--- a/topics/knowledge-distillation/Knowledge_Distillation_slides_EN.pptx
+++ b/topics/knowledge-distillation/Knowledge_Distillation_slides_EN.pptx
@@ -10699,7 +10699,7 @@
                           </a:solidFill>
                           <a:latin typeface="Times New Roman"/>
                         </a:rPr>
-                        <a:t>Notebook of this module</a:t>
+                        <a:t>Our repetition</a:t>
                       </a:r>
                     </a:p>
                   </a:txBody>
@@ -11543,7 +11543,7 @@
                           </a:solidFill>
                           <a:latin typeface="Times New Roman"/>
                         </a:rPr>
-                        <a:t>This module</a:t>
+                        <a:t>Ours</a:t>
                       </a:r>
                     </a:p>
                   </a:txBody>
@@ -11845,7 +11845,7 @@
                 </a:solidFill>
                 <a:latin typeface="Times New Roman"/>
               </a:rPr>
-              <a:t>This module: distillation reduces the gap between the</a:t>
+              <a:t>In our repetition, distillation reduces the gap between the</a:t>
             </a:r>
           </a:p>
           <a:p>
@@ -13066,7 +13066,7 @@
                 </a:solidFill>
                 <a:latin typeface="Times New Roman"/>
               </a:rPr>
-              <a:t>This module: the 30-30 net is best at T = 4 (526 errors); at T = 20 it is worse than with hard targets only</a:t>
+              <a:t>In our repetition, the 30-30 net is best at T = 4 (526 errors); at T = 20 it is worse than with hard targets only</a:t>
             </a:r>
           </a:p>
         </p:txBody>
@@ -13675,7 +13675,7 @@
                           </a:solidFill>
                           <a:latin typeface="Times New Roman"/>
                         </a:rPr>
-                        <a:t>This module: hard targets only</a:t>
+                        <a:t>Ours: hard targets only</a:t>
                       </a:r>
                     </a:p>
                   </a:txBody>
@@ -13769,7 +13769,7 @@
                           </a:solidFill>
                           <a:latin typeface="Times New Roman"/>
                         </a:rPr>
-                        <a:t>This module: distilled, T = 8</a:t>
+                        <a:t>Ours: distilled, T = 8</a:t>
                       </a:r>
                     </a:p>
                   </a:txBody>
@@ -13863,7 +13863,7 @@
                           </a:solidFill>
                           <a:latin typeface="Times New Roman"/>
                         </a:rPr>
-                        <a:t>This module: distilled, bias for 3 increased by 3.0</a:t>
+                        <a:t>Ours: distilled, bias for 3 increased by 3.0</a:t>
                       </a:r>
                     </a:p>
                   </a:txBody>
@@ -15548,7 +15548,7 @@
                 </a:solidFill>
                 <a:latin typeface="Times New Roman"/>
               </a:rPr>
-              <a:t>Figures from Tables 1, 3, and 5 of the paper; these experiments are not repeated in this module.</a:t>
+              <a:t>Figures from Tables 1, 3, and 5 of the paper; we do not repeat these experiments.</a:t>
             </a:r>
           </a:p>
         </p:txBody>

--- a/topics/knowledge-distillation/Knowledge_Distillation_slides_EN.pptx
+++ b/topics/knowledge-distillation/Knowledge_Distillation_slides_EN.pptx
@@ -24,6 +24,7 @@
     <p:sldId id="272" r:id="rId23"/>
     <p:sldId id="273" r:id="rId24"/>
     <p:sldId id="274" r:id="rId25"/>
+    <p:sldId id="275" r:id="rId26"/>
   </p:sldIdLst>
   <p:sldSz cx="12191695" cy="6858000" type="screen4x3"/>
   <p:notesSz cx="6858000" cy="9144000"/>
@@ -3427,6 +3428,912 @@
 </file>
 
 <file path=ppt/slides/slide10.xml><?xml version="1.0" encoding="utf-8"?>
+<p:sld xmlns:a="http://schemas.openxmlformats.org/drawingml/2006/main" xmlns:p="http://schemas.openxmlformats.org/presentationml/2006/main" xmlns:r="http://schemas.openxmlformats.org/officeDocument/2006/relationships">
+  <p:cSld>
+    <p:spTree>
+      <p:nvGrpSpPr>
+        <p:cNvPr id="1" name=""/>
+        <p:cNvGrpSpPr/>
+        <p:nvPr/>
+      </p:nvGrpSpPr>
+      <p:grpSpPr/>
+      <p:sp>
+        <p:nvSpPr>
+          <p:cNvPr id="2" name="Rectangle 1"/>
+          <p:cNvSpPr/>
+          <p:nvPr/>
+        </p:nvSpPr>
+        <p:spPr>
+          <a:xfrm>
+            <a:off x="0" y="0"/>
+            <a:ext cx="12191695" cy="6858000"/>
+          </a:xfrm>
+          <a:prstGeom prst="rect">
+            <a:avLst/>
+          </a:prstGeom>
+          <a:solidFill>
+            <a:srgbClr val="FFFFFF"/>
+          </a:solidFill>
+          <a:ln>
+            <a:noFill/>
+          </a:ln>
+          <a:effectLst/>
+        </p:spPr>
+        <p:style>
+          <a:lnRef idx="1">
+            <a:schemeClr val="accent1"/>
+          </a:lnRef>
+          <a:fillRef idx="3">
+            <a:schemeClr val="accent1"/>
+          </a:fillRef>
+          <a:effectRef idx="2">
+            <a:schemeClr val="accent1"/>
+          </a:effectRef>
+          <a:fontRef idx="minor">
+            <a:schemeClr val="lt1"/>
+          </a:fontRef>
+        </p:style>
+        <p:txBody>
+          <a:bodyPr rtlCol="0" anchor="ctr"/>
+          <a:lstStyle/>
+          <a:p>
+            <a:pPr algn="ctr"/>
+          </a:p>
+        </p:txBody>
+      </p:sp>
+      <p:sp>
+        <p:nvSpPr>
+          <p:cNvPr id="3" name="Rectangle 2"/>
+          <p:cNvSpPr/>
+          <p:nvPr/>
+        </p:nvSpPr>
+        <p:spPr>
+          <a:xfrm>
+            <a:off x="0" y="0"/>
+            <a:ext cx="12191695" cy="868680"/>
+          </a:xfrm>
+          <a:prstGeom prst="rect">
+            <a:avLst/>
+          </a:prstGeom>
+          <a:solidFill>
+            <a:srgbClr val="1F4E79"/>
+          </a:solidFill>
+          <a:ln>
+            <a:noFill/>
+          </a:ln>
+          <a:effectLst/>
+        </p:spPr>
+        <p:style>
+          <a:lnRef idx="1">
+            <a:schemeClr val="accent1"/>
+          </a:lnRef>
+          <a:fillRef idx="3">
+            <a:schemeClr val="accent1"/>
+          </a:fillRef>
+          <a:effectRef idx="2">
+            <a:schemeClr val="accent1"/>
+          </a:effectRef>
+          <a:fontRef idx="minor">
+            <a:schemeClr val="lt1"/>
+          </a:fontRef>
+        </p:style>
+        <p:txBody>
+          <a:bodyPr rtlCol="0" anchor="ctr"/>
+          <a:lstStyle/>
+          <a:p>
+            <a:pPr algn="ctr"/>
+          </a:p>
+        </p:txBody>
+      </p:sp>
+      <p:sp>
+        <p:nvSpPr>
+          <p:cNvPr id="4" name="TextBox 3"/>
+          <p:cNvSpPr txBox="1"/>
+          <p:nvPr/>
+        </p:nvSpPr>
+        <p:spPr>
+          <a:xfrm>
+            <a:off x="411480" y="54864"/>
+            <a:ext cx="11338560" cy="457200"/>
+          </a:xfrm>
+          <a:prstGeom prst="rect">
+            <a:avLst/>
+          </a:prstGeom>
+          <a:noFill/>
+        </p:spPr>
+        <p:txBody>
+          <a:bodyPr wrap="square">
+            <a:spAutoFit/>
+          </a:bodyPr>
+          <a:lstStyle/>
+          <a:p>
+            <a:r>
+              <a:rPr sz="2800" b="1" i="0">
+                <a:solidFill>
+                  <a:srgbClr val="FFFFFF"/>
+                </a:solidFill>
+                <a:latin typeface="Times New Roman"/>
+              </a:rPr>
+              <a:t>3. Distillation</a:t>
+            </a:r>
+          </a:p>
+        </p:txBody>
+      </p:sp>
+      <p:sp>
+        <p:nvSpPr>
+          <p:cNvPr id="5" name="TextBox 4"/>
+          <p:cNvSpPr txBox="1"/>
+          <p:nvPr/>
+        </p:nvSpPr>
+        <p:spPr>
+          <a:xfrm>
+            <a:off x="411480" y="521207"/>
+            <a:ext cx="11338560" cy="301752"/>
+          </a:xfrm>
+          <a:prstGeom prst="rect">
+            <a:avLst/>
+          </a:prstGeom>
+          <a:noFill/>
+        </p:spPr>
+        <p:txBody>
+          <a:bodyPr wrap="square">
+            <a:spAutoFit/>
+          </a:bodyPr>
+          <a:lstStyle/>
+          <a:p>
+            <a:r>
+              <a:rPr sz="1400" b="0" i="0">
+                <a:solidFill>
+                  <a:srgbClr val="C7D6E5"/>
+                </a:solidFill>
+                <a:latin typeface="Times New Roman"/>
+              </a:rPr>
+              <a:t>Section 2 of the paper: a weighted average of two different objective functions</a:t>
+            </a:r>
+          </a:p>
+        </p:txBody>
+      </p:sp>
+      <p:pic>
+        <p:nvPicPr>
+          <p:cNvPr id="6" name="Picture 5" descr="m_loss.png"/>
+          <p:cNvPicPr>
+            <a:picLocks noChangeAspect="1"/>
+          </p:cNvPicPr>
+          <p:nvPr/>
+        </p:nvPicPr>
+        <p:blipFill>
+          <a:blip r:embed="rId2"/>
+          <a:stretch>
+            <a:fillRect/>
+          </a:stretch>
+        </p:blipFill>
+        <p:spPr>
+          <a:xfrm>
+            <a:off x="822960" y="1143000"/>
+            <a:ext cx="4966071" cy="566928"/>
+          </a:xfrm>
+          <a:prstGeom prst="rect">
+            <a:avLst/>
+          </a:prstGeom>
+        </p:spPr>
+      </p:pic>
+      <p:pic>
+        <p:nvPicPr>
+          <p:cNvPr id="7" name="Picture 6" descr="m_csoft.png"/>
+          <p:cNvPicPr>
+            <a:picLocks noChangeAspect="1"/>
+          </p:cNvPicPr>
+          <p:nvPr/>
+        </p:nvPicPr>
+        <p:blipFill>
+          <a:blip r:embed="rId3"/>
+          <a:stretch>
+            <a:fillRect/>
+          </a:stretch>
+        </p:blipFill>
+        <p:spPr>
+          <a:xfrm>
+            <a:off x="822960" y="1965960"/>
+            <a:ext cx="2501019" cy="658368"/>
+          </a:xfrm>
+          <a:prstGeom prst="rect">
+            <a:avLst/>
+          </a:prstGeom>
+        </p:spPr>
+      </p:pic>
+      <p:sp>
+        <p:nvSpPr>
+          <p:cNvPr id="8" name="TextBox 7"/>
+          <p:cNvSpPr txBox="1"/>
+          <p:nvPr/>
+        </p:nvSpPr>
+        <p:spPr>
+          <a:xfrm>
+            <a:off x="5120640" y="1965960"/>
+            <a:ext cx="6583680" cy="822960"/>
+          </a:xfrm>
+          <a:prstGeom prst="rect">
+            <a:avLst/>
+          </a:prstGeom>
+          <a:noFill/>
+        </p:spPr>
+        <p:txBody>
+          <a:bodyPr wrap="square">
+            <a:spAutoFit/>
+          </a:bodyPr>
+          <a:lstStyle/>
+          <a:p>
+            <a:r>
+              <a:rPr sz="1600" b="0" i="0">
+                <a:solidFill>
+                  <a:srgbClr val="202020"/>
+                </a:solidFill>
+                <a:latin typeface="Times New Roman"/>
+              </a:rPr>
+              <a:t>The cross entropy with the soft targets, computed using the same high temperature in the softmax of the distilled model as was used for generating the soft targets</a:t>
+            </a:r>
+          </a:p>
+        </p:txBody>
+      </p:sp>
+      <p:pic>
+        <p:nvPicPr>
+          <p:cNvPr id="9" name="Picture 8" descr="m_chard.png"/>
+          <p:cNvPicPr>
+            <a:picLocks noChangeAspect="1"/>
+          </p:cNvPicPr>
+          <p:nvPr/>
+        </p:nvPicPr>
+        <p:blipFill>
+          <a:blip r:embed="rId4"/>
+          <a:stretch>
+            <a:fillRect/>
+          </a:stretch>
+        </p:blipFill>
+        <p:spPr>
+          <a:xfrm>
+            <a:off x="822960" y="2880360"/>
+            <a:ext cx="3133023" cy="566928"/>
+          </a:xfrm>
+          <a:prstGeom prst="rect">
+            <a:avLst/>
+          </a:prstGeom>
+        </p:spPr>
+      </p:pic>
+      <p:sp>
+        <p:nvSpPr>
+          <p:cNvPr id="10" name="TextBox 9"/>
+          <p:cNvSpPr txBox="1"/>
+          <p:nvPr/>
+        </p:nvSpPr>
+        <p:spPr>
+          <a:xfrm>
+            <a:off x="5120640" y="2880360"/>
+            <a:ext cx="6583680" cy="822960"/>
+          </a:xfrm>
+          <a:prstGeom prst="rect">
+            <a:avLst/>
+          </a:prstGeom>
+          <a:noFill/>
+        </p:spPr>
+        <p:txBody>
+          <a:bodyPr wrap="square">
+            <a:spAutoFit/>
+          </a:bodyPr>
+          <a:lstStyle/>
+          <a:p>
+            <a:r>
+              <a:rPr sz="1600" b="0" i="0">
+                <a:solidFill>
+                  <a:srgbClr val="202020"/>
+                </a:solidFill>
+                <a:latin typeface="Times New Roman"/>
+              </a:rPr>
+              <a:t>The cross entropy with the correct labels, computed using exactly the same logits in the softmax of the distilled model but at a temperature of 1</a:t>
+            </a:r>
+          </a:p>
+        </p:txBody>
+      </p:sp>
+      <p:sp>
+        <p:nvSpPr>
+          <p:cNvPr id="11" name="Rectangle 10"/>
+          <p:cNvSpPr/>
+          <p:nvPr/>
+        </p:nvSpPr>
+        <p:spPr>
+          <a:xfrm>
+            <a:off x="731520" y="3840480"/>
+            <a:ext cx="5303520" cy="1188720"/>
+          </a:xfrm>
+          <a:prstGeom prst="rect">
+            <a:avLst/>
+          </a:prstGeom>
+          <a:solidFill>
+            <a:srgbClr val="DAE6F2"/>
+          </a:solidFill>
+          <a:ln>
+            <a:solidFill>
+              <a:srgbClr val="D0D7DE"/>
+            </a:solidFill>
+          </a:ln>
+          <a:effectLst/>
+        </p:spPr>
+        <p:style>
+          <a:lnRef idx="1">
+            <a:schemeClr val="accent1"/>
+          </a:lnRef>
+          <a:fillRef idx="3">
+            <a:schemeClr val="accent1"/>
+          </a:fillRef>
+          <a:effectRef idx="2">
+            <a:schemeClr val="accent1"/>
+          </a:effectRef>
+          <a:fontRef idx="minor">
+            <a:schemeClr val="lt1"/>
+          </a:fontRef>
+        </p:style>
+        <p:txBody>
+          <a:bodyPr rtlCol="0" anchor="ctr" wrap="square"/>
+          <a:lstStyle/>
+          <a:p>
+            <a:pPr algn="l"/>
+            <a:r>
+              <a:rPr sz="1600" b="0">
+                <a:solidFill>
+                  <a:srgbClr val="1F4E79"/>
+                </a:solidFill>
+                <a:latin typeface="Times New Roman"/>
+              </a:rPr>
+              <a:t>α: we found that the best results were</a:t>
+            </a:r>
+          </a:p>
+          <a:p>
+            <a:pPr algn="l"/>
+            <a:r>
+              <a:rPr sz="1600" b="0">
+                <a:solidFill>
+                  <a:srgbClr val="1F4E79"/>
+                </a:solidFill>
+                <a:latin typeface="Times New Roman"/>
+              </a:rPr>
+              <a:t>generally obtained by using a considerably</a:t>
+            </a:r>
+          </a:p>
+          <a:p>
+            <a:pPr algn="l"/>
+            <a:r>
+              <a:rPr sz="1600" b="0">
+                <a:solidFill>
+                  <a:srgbClr val="1F4E79"/>
+                </a:solidFill>
+                <a:latin typeface="Times New Roman"/>
+              </a:rPr>
+              <a:t>lower weight on the second objective; α = 0.9</a:t>
+            </a:r>
+          </a:p>
+        </p:txBody>
+      </p:sp>
+      <p:sp>
+        <p:nvSpPr>
+          <p:cNvPr id="12" name="Rectangle 11"/>
+          <p:cNvSpPr/>
+          <p:nvPr/>
+        </p:nvSpPr>
+        <p:spPr>
+          <a:xfrm>
+            <a:off x="6309360" y="3840480"/>
+            <a:ext cx="5303520" cy="1188720"/>
+          </a:xfrm>
+          <a:prstGeom prst="rect">
+            <a:avLst/>
+          </a:prstGeom>
+          <a:solidFill>
+            <a:srgbClr val="FFF3CD"/>
+          </a:solidFill>
+          <a:ln>
+            <a:solidFill>
+              <a:srgbClr val="D0D7DE"/>
+            </a:solidFill>
+          </a:ln>
+          <a:effectLst/>
+        </p:spPr>
+        <p:style>
+          <a:lnRef idx="1">
+            <a:schemeClr val="accent1"/>
+          </a:lnRef>
+          <a:fillRef idx="3">
+            <a:schemeClr val="accent1"/>
+          </a:fillRef>
+          <a:effectRef idx="2">
+            <a:schemeClr val="accent1"/>
+          </a:effectRef>
+          <a:fontRef idx="minor">
+            <a:schemeClr val="lt1"/>
+          </a:fontRef>
+        </p:style>
+        <p:txBody>
+          <a:bodyPr rtlCol="0" anchor="ctr" wrap="square"/>
+          <a:lstStyle/>
+          <a:p>
+            <a:pPr algn="l"/>
+            <a:r>
+              <a:rPr sz="1600" b="0">
+                <a:solidFill>
+                  <a:srgbClr val="C03030"/>
+                </a:solidFill>
+                <a:latin typeface="Times New Roman"/>
+              </a:rPr>
+              <a:t>T²: the magnitudes of the gradients produced by</a:t>
+            </a:r>
+          </a:p>
+          <a:p>
+            <a:pPr algn="l"/>
+            <a:r>
+              <a:rPr sz="1600" b="0">
+                <a:solidFill>
+                  <a:srgbClr val="C03030"/>
+                </a:solidFill>
+                <a:latin typeface="Times New Roman"/>
+              </a:rPr>
+              <a:t>the soft targets scale as 1/T², so we multiply</a:t>
+            </a:r>
+          </a:p>
+          <a:p>
+            <a:pPr algn="l"/>
+            <a:r>
+              <a:rPr sz="1600" b="0">
+                <a:solidFill>
+                  <a:srgbClr val="C03030"/>
+                </a:solidFill>
+                <a:latin typeface="Times New Roman"/>
+              </a:rPr>
+              <a:t>them by T² (checked on slide 14)</a:t>
+            </a:r>
+          </a:p>
+        </p:txBody>
+      </p:sp>
+      <p:sp>
+        <p:nvSpPr>
+          <p:cNvPr id="13" name="TextBox 12"/>
+          <p:cNvSpPr txBox="1"/>
+          <p:nvPr/>
+        </p:nvSpPr>
+        <p:spPr>
+          <a:xfrm>
+            <a:off x="731520" y="5257800"/>
+            <a:ext cx="10881360" cy="914400"/>
+          </a:xfrm>
+          <a:prstGeom prst="rect">
+            <a:avLst/>
+          </a:prstGeom>
+          <a:noFill/>
+        </p:spPr>
+        <p:txBody>
+          <a:bodyPr wrap="square">
+            <a:spAutoFit/>
+          </a:bodyPr>
+          <a:lstStyle/>
+          <a:p>
+            <a:r>
+              <a:rPr sz="1900" b="1" i="0">
+                <a:solidFill>
+                  <a:srgbClr val="1E7A45"/>
+                </a:solidFill>
+                <a:latin typeface="Times New Roman"/>
+              </a:rPr>
+              <a:t>After it has been trained, the distilled model uses a temperature of 1.</a:t>
+            </a:r>
+          </a:p>
+        </p:txBody>
+      </p:sp>
+    </p:spTree>
+  </p:cSld>
+  <p:clrMapOvr>
+    <a:masterClrMapping/>
+  </p:clrMapOvr>
+  <p:timing>
+    <p:tnLst>
+      <p:par>
+        <p:cTn id="1" dur="indefinite" restart="never" nodeType="tmRoot">
+          <p:childTnLst>
+            <p:seq concurrent="1" nextAc="seek">
+              <p:cTn id="2" dur="indefinite" nodeType="mainSeq">
+                <p:childTnLst>
+                  <p:par>
+                    <p:cTn id="3" fill="hold">
+                      <p:stCondLst>
+                        <p:cond delay="indefinite"/>
+                      </p:stCondLst>
+                      <p:childTnLst>
+                        <p:par>
+                          <p:cTn id="4" fill="hold">
+                            <p:stCondLst>
+                              <p:cond delay="0"/>
+                            </p:stCondLst>
+                            <p:childTnLst>
+                              <p:par>
+                                <p:cTn id="5" presetID="1" presetClass="entr" presetSubtype="0" fill="hold" grpId="0" nodeType="clickEffect">
+                                  <p:stCondLst>
+                                    <p:cond delay="0"/>
+                                  </p:stCondLst>
+                                  <p:childTnLst>
+                                    <p:set>
+                                      <p:cBhvr>
+                                        <p:cTn id="6" dur="1" fill="hold">
+                                          <p:stCondLst>
+                                            <p:cond delay="0"/>
+                                          </p:stCondLst>
+                                        </p:cTn>
+                                        <p:tgtEl>
+                                          <p:spTgt spid="6"/>
+                                        </p:tgtEl>
+                                        <p:attrNameLst>
+                                          <p:attrName>style.visibility</p:attrName>
+                                        </p:attrNameLst>
+                                      </p:cBhvr>
+                                      <p:to>
+                                        <p:strVal val="visible"/>
+                                      </p:to>
+                                    </p:set>
+                                  </p:childTnLst>
+                                </p:cTn>
+                              </p:par>
+                            </p:childTnLst>
+                          </p:cTn>
+                        </p:par>
+                      </p:childTnLst>
+                    </p:cTn>
+                  </p:par>
+                  <p:par>
+                    <p:cTn id="7" fill="hold">
+                      <p:stCondLst>
+                        <p:cond delay="indefinite"/>
+                      </p:stCondLst>
+                      <p:childTnLst>
+                        <p:par>
+                          <p:cTn id="8" fill="hold">
+                            <p:stCondLst>
+                              <p:cond delay="0"/>
+                            </p:stCondLst>
+                            <p:childTnLst>
+                              <p:par>
+                                <p:cTn id="9" presetID="1" presetClass="entr" presetSubtype="0" fill="hold" grpId="0" nodeType="clickEffect">
+                                  <p:stCondLst>
+                                    <p:cond delay="0"/>
+                                  </p:stCondLst>
+                                  <p:childTnLst>
+                                    <p:set>
+                                      <p:cBhvr>
+                                        <p:cTn id="10" dur="1" fill="hold">
+                                          <p:stCondLst>
+                                            <p:cond delay="0"/>
+                                          </p:stCondLst>
+                                        </p:cTn>
+                                        <p:tgtEl>
+                                          <p:spTgt spid="7"/>
+                                        </p:tgtEl>
+                                        <p:attrNameLst>
+                                          <p:attrName>style.visibility</p:attrName>
+                                        </p:attrNameLst>
+                                      </p:cBhvr>
+                                      <p:to>
+                                        <p:strVal val="visible"/>
+                                      </p:to>
+                                    </p:set>
+                                  </p:childTnLst>
+                                </p:cTn>
+                              </p:par>
+                            </p:childTnLst>
+                          </p:cTn>
+                        </p:par>
+                      </p:childTnLst>
+                    </p:cTn>
+                  </p:par>
+                  <p:par>
+                    <p:cTn id="11" fill="hold">
+                      <p:stCondLst>
+                        <p:cond delay="indefinite"/>
+                      </p:stCondLst>
+                      <p:childTnLst>
+                        <p:par>
+                          <p:cTn id="12" fill="hold">
+                            <p:stCondLst>
+                              <p:cond delay="0"/>
+                            </p:stCondLst>
+                            <p:childTnLst>
+                              <p:par>
+                                <p:cTn id="13" presetID="1" presetClass="entr" presetSubtype="0" fill="hold" grpId="0" nodeType="clickEffect">
+                                  <p:stCondLst>
+                                    <p:cond delay="0"/>
+                                  </p:stCondLst>
+                                  <p:childTnLst>
+                                    <p:set>
+                                      <p:cBhvr>
+                                        <p:cTn id="14" dur="1" fill="hold">
+                                          <p:stCondLst>
+                                            <p:cond delay="0"/>
+                                          </p:stCondLst>
+                                        </p:cTn>
+                                        <p:tgtEl>
+                                          <p:spTgt spid="8"/>
+                                        </p:tgtEl>
+                                        <p:attrNameLst>
+                                          <p:attrName>style.visibility</p:attrName>
+                                        </p:attrNameLst>
+                                      </p:cBhvr>
+                                      <p:to>
+                                        <p:strVal val="visible"/>
+                                      </p:to>
+                                    </p:set>
+                                  </p:childTnLst>
+                                </p:cTn>
+                              </p:par>
+                            </p:childTnLst>
+                          </p:cTn>
+                        </p:par>
+                      </p:childTnLst>
+                    </p:cTn>
+                  </p:par>
+                  <p:par>
+                    <p:cTn id="15" fill="hold">
+                      <p:stCondLst>
+                        <p:cond delay="indefinite"/>
+                      </p:stCondLst>
+                      <p:childTnLst>
+                        <p:par>
+                          <p:cTn id="16" fill="hold">
+                            <p:stCondLst>
+                              <p:cond delay="0"/>
+                            </p:stCondLst>
+                            <p:childTnLst>
+                              <p:par>
+                                <p:cTn id="17" presetID="1" presetClass="entr" presetSubtype="0" fill="hold" grpId="0" nodeType="clickEffect">
+                                  <p:stCondLst>
+                                    <p:cond delay="0"/>
+                                  </p:stCondLst>
+                                  <p:childTnLst>
+                                    <p:set>
+                                      <p:cBhvr>
+                                        <p:cTn id="18" dur="1" fill="hold">
+                                          <p:stCondLst>
+                                            <p:cond delay="0"/>
+                                          </p:stCondLst>
+                                        </p:cTn>
+                                        <p:tgtEl>
+                                          <p:spTgt spid="9"/>
+                                        </p:tgtEl>
+                                        <p:attrNameLst>
+                                          <p:attrName>style.visibility</p:attrName>
+                                        </p:attrNameLst>
+                                      </p:cBhvr>
+                                      <p:to>
+                                        <p:strVal val="visible"/>
+                                      </p:to>
+                                    </p:set>
+                                  </p:childTnLst>
+                                </p:cTn>
+                              </p:par>
+                            </p:childTnLst>
+                          </p:cTn>
+                        </p:par>
+                      </p:childTnLst>
+                    </p:cTn>
+                  </p:par>
+                  <p:par>
+                    <p:cTn id="19" fill="hold">
+                      <p:stCondLst>
+                        <p:cond delay="indefinite"/>
+                      </p:stCondLst>
+                      <p:childTnLst>
+                        <p:par>
+                          <p:cTn id="20" fill="hold">
+                            <p:stCondLst>
+                              <p:cond delay="0"/>
+                            </p:stCondLst>
+                            <p:childTnLst>
+                              <p:par>
+                                <p:cTn id="21" presetID="1" presetClass="entr" presetSubtype="0" fill="hold" grpId="0" nodeType="clickEffect">
+                                  <p:stCondLst>
+                                    <p:cond delay="0"/>
+                                  </p:stCondLst>
+                                  <p:childTnLst>
+                                    <p:set>
+                                      <p:cBhvr>
+                                        <p:cTn id="22" dur="1" fill="hold">
+                                          <p:stCondLst>
+                                            <p:cond delay="0"/>
+                                          </p:stCondLst>
+                                        </p:cTn>
+                                        <p:tgtEl>
+                                          <p:spTgt spid="10"/>
+                                        </p:tgtEl>
+                                        <p:attrNameLst>
+                                          <p:attrName>style.visibility</p:attrName>
+                                        </p:attrNameLst>
+                                      </p:cBhvr>
+                                      <p:to>
+                                        <p:strVal val="visible"/>
+                                      </p:to>
+                                    </p:set>
+                                  </p:childTnLst>
+                                </p:cTn>
+                              </p:par>
+                            </p:childTnLst>
+                          </p:cTn>
+                        </p:par>
+                      </p:childTnLst>
+                    </p:cTn>
+                  </p:par>
+                  <p:par>
+                    <p:cTn id="23" fill="hold">
+                      <p:stCondLst>
+                        <p:cond delay="indefinite"/>
+                      </p:stCondLst>
+                      <p:childTnLst>
+                        <p:par>
+                          <p:cTn id="24" fill="hold">
+                            <p:stCondLst>
+                              <p:cond delay="0"/>
+                            </p:stCondLst>
+                            <p:childTnLst>
+                              <p:par>
+                                <p:cTn id="25" presetID="1" presetClass="entr" presetSubtype="0" fill="hold" grpId="0" nodeType="clickEffect">
+                                  <p:stCondLst>
+                                    <p:cond delay="0"/>
+                                  </p:stCondLst>
+                                  <p:childTnLst>
+                                    <p:set>
+                                      <p:cBhvr>
+                                        <p:cTn id="26" dur="1" fill="hold">
+                                          <p:stCondLst>
+                                            <p:cond delay="0"/>
+                                          </p:stCondLst>
+                                        </p:cTn>
+                                        <p:tgtEl>
+                                          <p:spTgt spid="11"/>
+                                        </p:tgtEl>
+                                        <p:attrNameLst>
+                                          <p:attrName>style.visibility</p:attrName>
+                                        </p:attrNameLst>
+                                      </p:cBhvr>
+                                      <p:to>
+                                        <p:strVal val="visible"/>
+                                      </p:to>
+                                    </p:set>
+                                  </p:childTnLst>
+                                </p:cTn>
+                              </p:par>
+                            </p:childTnLst>
+                          </p:cTn>
+                        </p:par>
+                      </p:childTnLst>
+                    </p:cTn>
+                  </p:par>
+                  <p:par>
+                    <p:cTn id="27" fill="hold">
+                      <p:stCondLst>
+                        <p:cond delay="indefinite"/>
+                      </p:stCondLst>
+                      <p:childTnLst>
+                        <p:par>
+                          <p:cTn id="28" fill="hold">
+                            <p:stCondLst>
+                              <p:cond delay="0"/>
+                            </p:stCondLst>
+                            <p:childTnLst>
+                              <p:par>
+                                <p:cTn id="29" presetID="1" presetClass="entr" presetSubtype="0" fill="hold" grpId="0" nodeType="clickEffect">
+                                  <p:stCondLst>
+                                    <p:cond delay="0"/>
+                                  </p:stCondLst>
+                                  <p:childTnLst>
+                                    <p:set>
+                                      <p:cBhvr>
+                                        <p:cTn id="30" dur="1" fill="hold">
+                                          <p:stCondLst>
+                                            <p:cond delay="0"/>
+                                          </p:stCondLst>
+                                        </p:cTn>
+                                        <p:tgtEl>
+                                          <p:spTgt spid="12"/>
+                                        </p:tgtEl>
+                                        <p:attrNameLst>
+                                          <p:attrName>style.visibility</p:attrName>
+                                        </p:attrNameLst>
+                                      </p:cBhvr>
+                                      <p:to>
+                                        <p:strVal val="visible"/>
+                                      </p:to>
+                                    </p:set>
+                                  </p:childTnLst>
+                                </p:cTn>
+                              </p:par>
+                            </p:childTnLst>
+                          </p:cTn>
+                        </p:par>
+                      </p:childTnLst>
+                    </p:cTn>
+                  </p:par>
+                  <p:par>
+                    <p:cTn id="31" fill="hold">
+                      <p:stCondLst>
+                        <p:cond delay="indefinite"/>
+                      </p:stCondLst>
+                      <p:childTnLst>
+                        <p:par>
+                          <p:cTn id="32" fill="hold">
+                            <p:stCondLst>
+                              <p:cond delay="0"/>
+                            </p:stCondLst>
+                            <p:childTnLst>
+                              <p:par>
+                                <p:cTn id="33" presetID="1" presetClass="entr" presetSubtype="0" fill="hold" grpId="0" nodeType="clickEffect">
+                                  <p:stCondLst>
+                                    <p:cond delay="0"/>
+                                  </p:stCondLst>
+                                  <p:childTnLst>
+                                    <p:set>
+                                      <p:cBhvr>
+                                        <p:cTn id="34" dur="1" fill="hold">
+                                          <p:stCondLst>
+                                            <p:cond delay="0"/>
+                                          </p:stCondLst>
+                                        </p:cTn>
+                                        <p:tgtEl>
+                                          <p:spTgt spid="13"/>
+                                        </p:tgtEl>
+                                        <p:attrNameLst>
+                                          <p:attrName>style.visibility</p:attrName>
+                                        </p:attrNameLst>
+                                      </p:cBhvr>
+                                      <p:to>
+                                        <p:strVal val="visible"/>
+                                      </p:to>
+                                    </p:set>
+                                  </p:childTnLst>
+                                </p:cTn>
+                              </p:par>
+                            </p:childTnLst>
+                          </p:cTn>
+                        </p:par>
+                      </p:childTnLst>
+                    </p:cTn>
+                  </p:par>
+                </p:childTnLst>
+              </p:cTn>
+              <p:prevCondLst>
+                <p:cond evt="onPrev" delay="0">
+                  <p:tgtEl>
+                    <p:sldTgt/>
+                  </p:tgtEl>
+                </p:cond>
+              </p:prevCondLst>
+              <p:nextCondLst>
+                <p:cond evt="onNext" delay="0">
+                  <p:tgtEl>
+                    <p:sldTgt/>
+                  </p:tgtEl>
+                </p:cond>
+              </p:nextCondLst>
+            </p:seq>
+          </p:childTnLst>
+        </p:cTn>
+      </p:par>
+    </p:tnLst>
+    <p:bldLst>
+      <p:bldP spid="6" grpId="0" animBg="1"/>
+      <p:bldP spid="7" grpId="0" animBg="1"/>
+      <p:bldP spid="8" grpId="0" animBg="1"/>
+      <p:bldP spid="9" grpId="0" animBg="1"/>
+      <p:bldP spid="10" grpId="0" animBg="1"/>
+      <p:bldP spid="11" grpId="0" animBg="1"/>
+      <p:bldP spid="12" grpId="0" animBg="1"/>
+      <p:bldP spid="13" grpId="0" animBg="1"/>
+    </p:bldLst>
+  </p:timing>
+</p:sld>
+</file>
+
+<file path=ppt/slides/slide11.xml><?xml version="1.0" encoding="utf-8"?>
 <p:sld xmlns:a="http://schemas.openxmlformats.org/drawingml/2006/main" xmlns:p="http://schemas.openxmlformats.org/presentationml/2006/main" xmlns:r="http://schemas.openxmlformats.org/officeDocument/2006/relationships">
   <p:cSld>
     <p:spTree>
@@ -5608,7 +6515,7 @@
 </p:sld>
 </file>
 
-<file path=ppt/slides/slide11.xml><?xml version="1.0" encoding="utf-8"?>
+<file path=ppt/slides/slide12.xml><?xml version="1.0" encoding="utf-8"?>
 <p:sld xmlns:a="http://schemas.openxmlformats.org/drawingml/2006/main" xmlns:p="http://schemas.openxmlformats.org/presentationml/2006/main" xmlns:r="http://schemas.openxmlformats.org/officeDocument/2006/relationships">
   <p:cSld>
     <p:spTree>
@@ -7183,7 +8090,7 @@
 </p:sld>
 </file>
 
-<file path=ppt/slides/slide12.xml><?xml version="1.0" encoding="utf-8"?>
+<file path=ppt/slides/slide13.xml><?xml version="1.0" encoding="utf-8"?>
 <p:sld xmlns:a="http://schemas.openxmlformats.org/drawingml/2006/main" xmlns:p="http://schemas.openxmlformats.org/presentationml/2006/main" xmlns:r="http://schemas.openxmlformats.org/officeDocument/2006/relationships">
   <p:cSld>
     <p:spTree>
@@ -8954,7 +9861,7 @@
 </p:sld>
 </file>
 
-<file path=ppt/slides/slide13.xml><?xml version="1.0" encoding="utf-8"?>
+<file path=ppt/slides/slide14.xml><?xml version="1.0" encoding="utf-8"?>
 <p:sld xmlns:a="http://schemas.openxmlformats.org/drawingml/2006/main" xmlns:p="http://schemas.openxmlformats.org/presentationml/2006/main" xmlns:r="http://schemas.openxmlformats.org/officeDocument/2006/relationships">
   <p:cSld>
     <p:spTree>
@@ -10426,7 +11333,7 @@
 </p:sld>
 </file>
 
-<file path=ppt/slides/slide14.xml><?xml version="1.0" encoding="utf-8"?>
+<file path=ppt/slides/slide15.xml><?xml version="1.0" encoding="utf-8"?>
 <p:sld xmlns:a="http://schemas.openxmlformats.org/drawingml/2006/main" xmlns:p="http://schemas.openxmlformats.org/presentationml/2006/main" xmlns:r="http://schemas.openxmlformats.org/officeDocument/2006/relationships">
   <p:cSld>
     <p:spTree>
@@ -11294,7 +12201,7 @@
 </p:sld>
 </file>
 
-<file path=ppt/slides/slide15.xml><?xml version="1.0" encoding="utf-8"?>
+<file path=ppt/slides/slide16.xml><?xml version="1.0" encoding="utf-8"?>
 <p:sld xmlns:a="http://schemas.openxmlformats.org/drawingml/2006/main" xmlns:p="http://schemas.openxmlformats.org/presentationml/2006/main" xmlns:r="http://schemas.openxmlformats.org/officeDocument/2006/relationships">
   <p:cSld>
     <p:spTree>
@@ -11959,1148 +12866,6 @@
                 <a:latin typeface="Times New Roman"/>
               </a:rPr>
               <a:t>Blue: small net 100-100. At every temperature, distillation gives fewer test errors than training on hard targets only (dashed line).</a:t>
-            </a:r>
-          </a:p>
-        </p:txBody>
-      </p:sp>
-    </p:spTree>
-  </p:cSld>
-  <p:clrMapOvr>
-    <a:masterClrMapping/>
-  </p:clrMapOvr>
-  <p:timing>
-    <p:tnLst>
-      <p:par>
-        <p:cTn id="1" dur="indefinite" restart="never" nodeType="tmRoot">
-          <p:childTnLst>
-            <p:seq concurrent="1" nextAc="seek">
-              <p:cTn id="2" dur="indefinite" nodeType="mainSeq">
-                <p:childTnLst>
-                  <p:par>
-                    <p:cTn id="3" fill="hold">
-                      <p:stCondLst>
-                        <p:cond delay="indefinite"/>
-                      </p:stCondLst>
-                      <p:childTnLst>
-                        <p:par>
-                          <p:cTn id="4" fill="hold">
-                            <p:stCondLst>
-                              <p:cond delay="0"/>
-                            </p:stCondLst>
-                            <p:childTnLst>
-                              <p:par>
-                                <p:cTn id="5" presetID="1" presetClass="entr" presetSubtype="0" fill="hold" grpId="0" nodeType="clickEffect">
-                                  <p:stCondLst>
-                                    <p:cond delay="0"/>
-                                  </p:stCondLst>
-                                  <p:childTnLst>
-                                    <p:set>
-                                      <p:cBhvr>
-                                        <p:cTn id="6" dur="1" fill="hold">
-                                          <p:stCondLst>
-                                            <p:cond delay="0"/>
-                                          </p:stCondLst>
-                                        </p:cTn>
-                                        <p:tgtEl>
-                                          <p:spTgt spid="6"/>
-                                        </p:tgtEl>
-                                        <p:attrNameLst>
-                                          <p:attrName>style.visibility</p:attrName>
-                                        </p:attrNameLst>
-                                      </p:cBhvr>
-                                      <p:to>
-                                        <p:strVal val="visible"/>
-                                      </p:to>
-                                    </p:set>
-                                  </p:childTnLst>
-                                </p:cTn>
-                              </p:par>
-                            </p:childTnLst>
-                          </p:cTn>
-                        </p:par>
-                      </p:childTnLst>
-                    </p:cTn>
-                  </p:par>
-                  <p:par>
-                    <p:cTn id="7" fill="hold">
-                      <p:stCondLst>
-                        <p:cond delay="indefinite"/>
-                      </p:stCondLst>
-                      <p:childTnLst>
-                        <p:par>
-                          <p:cTn id="8" fill="hold">
-                            <p:stCondLst>
-                              <p:cond delay="0"/>
-                            </p:stCondLst>
-                            <p:childTnLst>
-                              <p:par>
-                                <p:cTn id="9" presetID="1" presetClass="entr" presetSubtype="0" fill="hold" grpId="0" nodeType="clickEffect">
-                                  <p:stCondLst>
-                                    <p:cond delay="0"/>
-                                  </p:stCondLst>
-                                  <p:childTnLst>
-                                    <p:set>
-                                      <p:cBhvr>
-                                        <p:cTn id="10" dur="1" fill="hold">
-                                          <p:stCondLst>
-                                            <p:cond delay="0"/>
-                                          </p:stCondLst>
-                                        </p:cTn>
-                                        <p:tgtEl>
-                                          <p:spTgt spid="7"/>
-                                        </p:tgtEl>
-                                        <p:attrNameLst>
-                                          <p:attrName>style.visibility</p:attrName>
-                                        </p:attrNameLst>
-                                      </p:cBhvr>
-                                      <p:to>
-                                        <p:strVal val="visible"/>
-                                      </p:to>
-                                    </p:set>
-                                  </p:childTnLst>
-                                </p:cTn>
-                              </p:par>
-                            </p:childTnLst>
-                          </p:cTn>
-                        </p:par>
-                      </p:childTnLst>
-                    </p:cTn>
-                  </p:par>
-                  <p:par>
-                    <p:cTn id="11" fill="hold">
-                      <p:stCondLst>
-                        <p:cond delay="indefinite"/>
-                      </p:stCondLst>
-                      <p:childTnLst>
-                        <p:par>
-                          <p:cTn id="12" fill="hold">
-                            <p:stCondLst>
-                              <p:cond delay="0"/>
-                            </p:stCondLst>
-                            <p:childTnLst>
-                              <p:par>
-                                <p:cTn id="13" presetID="1" presetClass="entr" presetSubtype="0" fill="hold" grpId="0" nodeType="clickEffect">
-                                  <p:stCondLst>
-                                    <p:cond delay="0"/>
-                                  </p:stCondLst>
-                                  <p:childTnLst>
-                                    <p:set>
-                                      <p:cBhvr>
-                                        <p:cTn id="14" dur="1" fill="hold">
-                                          <p:stCondLst>
-                                            <p:cond delay="0"/>
-                                          </p:stCondLst>
-                                        </p:cTn>
-                                        <p:tgtEl>
-                                          <p:spTgt spid="8"/>
-                                        </p:tgtEl>
-                                        <p:attrNameLst>
-                                          <p:attrName>style.visibility</p:attrName>
-                                        </p:attrNameLst>
-                                      </p:cBhvr>
-                                      <p:to>
-                                        <p:strVal val="visible"/>
-                                      </p:to>
-                                    </p:set>
-                                  </p:childTnLst>
-                                </p:cTn>
-                              </p:par>
-                            </p:childTnLst>
-                          </p:cTn>
-                        </p:par>
-                      </p:childTnLst>
-                    </p:cTn>
-                  </p:par>
-                  <p:par>
-                    <p:cTn id="15" fill="hold">
-                      <p:stCondLst>
-                        <p:cond delay="indefinite"/>
-                      </p:stCondLst>
-                      <p:childTnLst>
-                        <p:par>
-                          <p:cTn id="16" fill="hold">
-                            <p:stCondLst>
-                              <p:cond delay="0"/>
-                            </p:stCondLst>
-                            <p:childTnLst>
-                              <p:par>
-                                <p:cTn id="17" presetID="1" presetClass="entr" presetSubtype="0" fill="hold" grpId="0" nodeType="clickEffect">
-                                  <p:stCondLst>
-                                    <p:cond delay="0"/>
-                                  </p:stCondLst>
-                                  <p:childTnLst>
-                                    <p:set>
-                                      <p:cBhvr>
-                                        <p:cTn id="18" dur="1" fill="hold">
-                                          <p:stCondLst>
-                                            <p:cond delay="0"/>
-                                          </p:stCondLst>
-                                        </p:cTn>
-                                        <p:tgtEl>
-                                          <p:spTgt spid="9"/>
-                                        </p:tgtEl>
-                                        <p:attrNameLst>
-                                          <p:attrName>style.visibility</p:attrName>
-                                        </p:attrNameLst>
-                                      </p:cBhvr>
-                                      <p:to>
-                                        <p:strVal val="visible"/>
-                                      </p:to>
-                                    </p:set>
-                                  </p:childTnLst>
-                                </p:cTn>
-                              </p:par>
-                            </p:childTnLst>
-                          </p:cTn>
-                        </p:par>
-                      </p:childTnLst>
-                    </p:cTn>
-                  </p:par>
-                  <p:par>
-                    <p:cTn id="19" fill="hold">
-                      <p:stCondLst>
-                        <p:cond delay="indefinite"/>
-                      </p:stCondLst>
-                      <p:childTnLst>
-                        <p:par>
-                          <p:cTn id="20" fill="hold">
-                            <p:stCondLst>
-                              <p:cond delay="0"/>
-                            </p:stCondLst>
-                            <p:childTnLst>
-                              <p:par>
-                                <p:cTn id="21" presetID="1" presetClass="entr" presetSubtype="0" fill="hold" grpId="0" nodeType="clickEffect">
-                                  <p:stCondLst>
-                                    <p:cond delay="0"/>
-                                  </p:stCondLst>
-                                  <p:childTnLst>
-                                    <p:set>
-                                      <p:cBhvr>
-                                        <p:cTn id="22" dur="1" fill="hold">
-                                          <p:stCondLst>
-                                            <p:cond delay="0"/>
-                                          </p:stCondLst>
-                                        </p:cTn>
-                                        <p:tgtEl>
-                                          <p:spTgt spid="10"/>
-                                        </p:tgtEl>
-                                        <p:attrNameLst>
-                                          <p:attrName>style.visibility</p:attrName>
-                                        </p:attrNameLst>
-                                      </p:cBhvr>
-                                      <p:to>
-                                        <p:strVal val="visible"/>
-                                      </p:to>
-                                    </p:set>
-                                  </p:childTnLst>
-                                </p:cTn>
-                              </p:par>
-                            </p:childTnLst>
-                          </p:cTn>
-                        </p:par>
-                      </p:childTnLst>
-                    </p:cTn>
-                  </p:par>
-                </p:childTnLst>
-              </p:cTn>
-              <p:prevCondLst>
-                <p:cond evt="onPrev" delay="0">
-                  <p:tgtEl>
-                    <p:sldTgt/>
-                  </p:tgtEl>
-                </p:cond>
-              </p:prevCondLst>
-              <p:nextCondLst>
-                <p:cond evt="onNext" delay="0">
-                  <p:tgtEl>
-                    <p:sldTgt/>
-                  </p:tgtEl>
-                </p:cond>
-              </p:nextCondLst>
-            </p:seq>
-          </p:childTnLst>
-        </p:cTn>
-      </p:par>
-    </p:tnLst>
-    <p:bldLst>
-      <p:bldGraphic spid="6" grpId="0">
-        <p:bldAsOne/>
-      </p:bldGraphic>
-      <p:bldP spid="7" grpId="0" animBg="1"/>
-      <p:bldP spid="8" grpId="0" animBg="1"/>
-      <p:bldP spid="9" grpId="0" animBg="1"/>
-      <p:bldP spid="10" grpId="0" animBg="1"/>
-    </p:bldLst>
-  </p:timing>
-</p:sld>
-</file>
-
-<file path=ppt/slides/slide16.xml><?xml version="1.0" encoding="utf-8"?>
-<p:sld xmlns:a="http://schemas.openxmlformats.org/drawingml/2006/main" xmlns:p="http://schemas.openxmlformats.org/presentationml/2006/main" xmlns:r="http://schemas.openxmlformats.org/officeDocument/2006/relationships">
-  <p:cSld>
-    <p:spTree>
-      <p:nvGrpSpPr>
-        <p:cNvPr id="1" name=""/>
-        <p:cNvGrpSpPr/>
-        <p:nvPr/>
-      </p:nvGrpSpPr>
-      <p:grpSpPr/>
-      <p:sp>
-        <p:nvSpPr>
-          <p:cNvPr id="2" name="Rectangle 1"/>
-          <p:cNvSpPr/>
-          <p:nvPr/>
-        </p:nvSpPr>
-        <p:spPr>
-          <a:xfrm>
-            <a:off x="0" y="0"/>
-            <a:ext cx="12191695" cy="6858000"/>
-          </a:xfrm>
-          <a:prstGeom prst="rect">
-            <a:avLst/>
-          </a:prstGeom>
-          <a:solidFill>
-            <a:srgbClr val="FFFFFF"/>
-          </a:solidFill>
-          <a:ln>
-            <a:noFill/>
-          </a:ln>
-          <a:effectLst/>
-        </p:spPr>
-        <p:style>
-          <a:lnRef idx="1">
-            <a:schemeClr val="accent1"/>
-          </a:lnRef>
-          <a:fillRef idx="3">
-            <a:schemeClr val="accent1"/>
-          </a:fillRef>
-          <a:effectRef idx="2">
-            <a:schemeClr val="accent1"/>
-          </a:effectRef>
-          <a:fontRef idx="minor">
-            <a:schemeClr val="lt1"/>
-          </a:fontRef>
-        </p:style>
-        <p:txBody>
-          <a:bodyPr rtlCol="0" anchor="ctr"/>
-          <a:lstStyle/>
-          <a:p>
-            <a:pPr algn="ctr"/>
-          </a:p>
-        </p:txBody>
-      </p:sp>
-      <p:sp>
-        <p:nvSpPr>
-          <p:cNvPr id="3" name="Rectangle 2"/>
-          <p:cNvSpPr/>
-          <p:nvPr/>
-        </p:nvSpPr>
-        <p:spPr>
-          <a:xfrm>
-            <a:off x="0" y="0"/>
-            <a:ext cx="12191695" cy="868680"/>
-          </a:xfrm>
-          <a:prstGeom prst="rect">
-            <a:avLst/>
-          </a:prstGeom>
-          <a:solidFill>
-            <a:srgbClr val="1F4E79"/>
-          </a:solidFill>
-          <a:ln>
-            <a:noFill/>
-          </a:ln>
-          <a:effectLst/>
-        </p:spPr>
-        <p:style>
-          <a:lnRef idx="1">
-            <a:schemeClr val="accent1"/>
-          </a:lnRef>
-          <a:fillRef idx="3">
-            <a:schemeClr val="accent1"/>
-          </a:fillRef>
-          <a:effectRef idx="2">
-            <a:schemeClr val="accent1"/>
-          </a:effectRef>
-          <a:fontRef idx="minor">
-            <a:schemeClr val="lt1"/>
-          </a:fontRef>
-        </p:style>
-        <p:txBody>
-          <a:bodyPr rtlCol="0" anchor="ctr"/>
-          <a:lstStyle/>
-          <a:p>
-            <a:pPr algn="ctr"/>
-          </a:p>
-        </p:txBody>
-      </p:sp>
-      <p:sp>
-        <p:nvSpPr>
-          <p:cNvPr id="4" name="TextBox 3"/>
-          <p:cNvSpPr txBox="1"/>
-          <p:nvPr/>
-        </p:nvSpPr>
-        <p:spPr>
-          <a:xfrm>
-            <a:off x="411480" y="54864"/>
-            <a:ext cx="11338560" cy="457200"/>
-          </a:xfrm>
-          <a:prstGeom prst="rect">
-            <a:avLst/>
-          </a:prstGeom>
-          <a:noFill/>
-        </p:spPr>
-        <p:txBody>
-          <a:bodyPr wrap="square">
-            <a:spAutoFit/>
-          </a:bodyPr>
-          <a:lstStyle/>
-          <a:p>
-            <a:r>
-              <a:rPr sz="2800" b="1" i="0">
-                <a:solidFill>
-                  <a:srgbClr val="FFFFFF"/>
-                </a:solidFill>
-                <a:latin typeface="Times New Roman"/>
-              </a:rPr>
-              <a:t>4. Intermediate temperatures for a very small net</a:t>
-            </a:r>
-          </a:p>
-        </p:txBody>
-      </p:sp>
-      <p:sp>
-        <p:nvSpPr>
-          <p:cNvPr id="5" name="TextBox 4"/>
-          <p:cNvSpPr txBox="1"/>
-          <p:nvPr/>
-        </p:nvSpPr>
-        <p:spPr>
-          <a:xfrm>
-            <a:off x="411480" y="521207"/>
-            <a:ext cx="11338560" cy="301752"/>
-          </a:xfrm>
-          <a:prstGeom prst="rect">
-            <a:avLst/>
-          </a:prstGeom>
-          <a:noFill/>
-        </p:spPr>
-        <p:txBody>
-          <a:bodyPr wrap="square">
-            <a:spAutoFit/>
-          </a:bodyPr>
-          <a:lstStyle/>
-          <a:p>
-            <a:r>
-              <a:rPr sz="1400" b="0" i="0">
-                <a:solidFill>
-                  <a:srgbClr val="C7D6E5"/>
-                </a:solidFill>
-                <a:latin typeface="Times New Roman"/>
-              </a:rPr>
-              <a:t>The small net is reduced to 30-30</a:t>
-            </a:r>
-          </a:p>
-        </p:txBody>
-      </p:sp>
-      <p:graphicFrame>
-        <p:nvGraphicFramePr>
-          <p:cNvPr id="6" name="Table 5"/>
-          <p:cNvGraphicFramePr>
-            <a:graphicFrameLocks noGrp="1"/>
-          </p:cNvGraphicFramePr>
-          <p:nvPr/>
-        </p:nvGraphicFramePr>
-        <p:xfrm>
-          <a:off x="731520" y="1143000"/>
-          <a:ext cx="5669278" cy="2304288"/>
-        </p:xfrm>
-        <a:graphic>
-          <a:graphicData uri="http://schemas.openxmlformats.org/drawingml/2006/table">
-            <a:tbl>
-              <a:tblPr bandRow="1">
-                <a:tableStyleId>{5C22544A-7EE6-4342-B048-85BDC9FD1C3A}</a:tableStyleId>
-              </a:tblPr>
-              <a:tblGrid>
-                <a:gridCol w="2040940"/>
-                <a:gridCol w="1814169"/>
-                <a:gridCol w="1814169"/>
-              </a:tblGrid>
-              <a:tr h="329184">
-                <a:tc>
-                  <a:txBody>
-                    <a:bodyPr/>
-                    <a:lstStyle/>
-                    <a:p>
-                      <a:pPr algn="ctr"/>
-                      <a:r>
-                        <a:rPr sz="1600" b="1">
-                          <a:solidFill>
-                            <a:srgbClr val="FFFFFF"/>
-                          </a:solidFill>
-                          <a:latin typeface="Times New Roman"/>
-                        </a:rPr>
-                        <a:t>T</a:t>
-                      </a:r>
-                    </a:p>
-                  </a:txBody>
-                  <a:tcPr marL="36576" marR="36576" marT="9144" marB="9144">
-                    <a:solidFill>
-                      <a:srgbClr val="1F4E79"/>
-                    </a:solidFill>
-                  </a:tcPr>
-                </a:tc>
-                <a:tc>
-                  <a:txBody>
-                    <a:bodyPr/>
-                    <a:lstStyle/>
-                    <a:p>
-                      <a:pPr algn="ctr"/>
-                      <a:r>
-                        <a:rPr sz="1600" b="1">
-                          <a:solidFill>
-                            <a:srgbClr val="FFFFFF"/>
-                          </a:solidFill>
-                          <a:latin typeface="Times New Roman"/>
-                        </a:rPr>
-                        <a:t>Small net 100-100</a:t>
-                      </a:r>
-                    </a:p>
-                  </a:txBody>
-                  <a:tcPr marL="36576" marR="36576" marT="9144" marB="9144">
-                    <a:solidFill>
-                      <a:srgbClr val="1F4E79"/>
-                    </a:solidFill>
-                  </a:tcPr>
-                </a:tc>
-                <a:tc>
-                  <a:txBody>
-                    <a:bodyPr/>
-                    <a:lstStyle/>
-                    <a:p>
-                      <a:pPr algn="ctr"/>
-                      <a:r>
-                        <a:rPr sz="1600" b="1">
-                          <a:solidFill>
-                            <a:srgbClr val="FFFFFF"/>
-                          </a:solidFill>
-                          <a:latin typeface="Times New Roman"/>
-                        </a:rPr>
-                        <a:t>Small net 30-30</a:t>
-                      </a:r>
-                    </a:p>
-                  </a:txBody>
-                  <a:tcPr marL="36576" marR="36576" marT="9144" marB="9144">
-                    <a:solidFill>
-                      <a:srgbClr val="1F4E79"/>
-                    </a:solidFill>
-                  </a:tcPr>
-                </a:tc>
-              </a:tr>
-              <a:tr h="329184">
-                <a:tc>
-                  <a:txBody>
-                    <a:bodyPr/>
-                    <a:lstStyle/>
-                    <a:p>
-                      <a:pPr algn="ctr"/>
-                      <a:r>
-                        <a:rPr sz="1600" b="0">
-                          <a:solidFill>
-                            <a:srgbClr val="202020"/>
-                          </a:solidFill>
-                          <a:latin typeface="Times New Roman"/>
-                        </a:rPr>
-                        <a:t>hard targets only</a:t>
-                      </a:r>
-                    </a:p>
-                  </a:txBody>
-                  <a:tcPr marL="36576" marR="36576" marT="9144" marB="9144">
-                    <a:solidFill>
-                      <a:srgbClr val="FFFFFF"/>
-                    </a:solidFill>
-                  </a:tcPr>
-                </a:tc>
-                <a:tc>
-                  <a:txBody>
-                    <a:bodyPr/>
-                    <a:lstStyle/>
-                    <a:p>
-                      <a:pPr algn="ctr"/>
-                      <a:r>
-                        <a:rPr sz="1600" b="0">
-                          <a:solidFill>
-                            <a:srgbClr val="202020"/>
-                          </a:solidFill>
-                          <a:latin typeface="Times New Roman"/>
-                        </a:rPr>
-                        <a:t>420</a:t>
-                      </a:r>
-                    </a:p>
-                  </a:txBody>
-                  <a:tcPr marL="36576" marR="36576" marT="9144" marB="9144">
-                    <a:solidFill>
-                      <a:srgbClr val="FFFFFF"/>
-                    </a:solidFill>
-                  </a:tcPr>
-                </a:tc>
-                <a:tc>
-                  <a:txBody>
-                    <a:bodyPr/>
-                    <a:lstStyle/>
-                    <a:p>
-                      <a:pPr algn="ctr"/>
-                      <a:r>
-                        <a:rPr sz="1600" b="0">
-                          <a:solidFill>
-                            <a:srgbClr val="202020"/>
-                          </a:solidFill>
-                          <a:latin typeface="Times New Roman"/>
-                        </a:rPr>
-                        <a:t>568</a:t>
-                      </a:r>
-                    </a:p>
-                  </a:txBody>
-                  <a:tcPr marL="36576" marR="36576" marT="9144" marB="9144">
-                    <a:solidFill>
-                      <a:srgbClr val="FFFFFF"/>
-                    </a:solidFill>
-                  </a:tcPr>
-                </a:tc>
-              </a:tr>
-              <a:tr h="329184">
-                <a:tc>
-                  <a:txBody>
-                    <a:bodyPr/>
-                    <a:lstStyle/>
-                    <a:p>
-                      <a:pPr algn="ctr"/>
-                      <a:r>
-                        <a:rPr sz="1600" b="0">
-                          <a:solidFill>
-                            <a:srgbClr val="202020"/>
-                          </a:solidFill>
-                          <a:latin typeface="Times New Roman"/>
-                        </a:rPr>
-                        <a:t>1</a:t>
-                      </a:r>
-                    </a:p>
-                  </a:txBody>
-                  <a:tcPr marL="36576" marR="36576" marT="9144" marB="9144">
-                    <a:solidFill>
-                      <a:srgbClr val="FFFFFF"/>
-                    </a:solidFill>
-                  </a:tcPr>
-                </a:tc>
-                <a:tc>
-                  <a:txBody>
-                    <a:bodyPr/>
-                    <a:lstStyle/>
-                    <a:p>
-                      <a:pPr algn="ctr"/>
-                      <a:r>
-                        <a:rPr sz="1600" b="0">
-                          <a:solidFill>
-                            <a:srgbClr val="202020"/>
-                          </a:solidFill>
-                          <a:latin typeface="Times New Roman"/>
-                        </a:rPr>
-                        <a:t>402</a:t>
-                      </a:r>
-                    </a:p>
-                  </a:txBody>
-                  <a:tcPr marL="36576" marR="36576" marT="9144" marB="9144">
-                    <a:solidFill>
-                      <a:srgbClr val="FFFFFF"/>
-                    </a:solidFill>
-                  </a:tcPr>
-                </a:tc>
-                <a:tc>
-                  <a:txBody>
-                    <a:bodyPr/>
-                    <a:lstStyle/>
-                    <a:p>
-                      <a:pPr algn="ctr"/>
-                      <a:r>
-                        <a:rPr sz="1600" b="0">
-                          <a:solidFill>
-                            <a:srgbClr val="202020"/>
-                          </a:solidFill>
-                          <a:latin typeface="Times New Roman"/>
-                        </a:rPr>
-                        <a:t>561</a:t>
-                      </a:r>
-                    </a:p>
-                  </a:txBody>
-                  <a:tcPr marL="36576" marR="36576" marT="9144" marB="9144">
-                    <a:solidFill>
-                      <a:srgbClr val="FFFFFF"/>
-                    </a:solidFill>
-                  </a:tcPr>
-                </a:tc>
-              </a:tr>
-              <a:tr h="329184">
-                <a:tc>
-                  <a:txBody>
-                    <a:bodyPr/>
-                    <a:lstStyle/>
-                    <a:p>
-                      <a:pPr algn="ctr"/>
-                      <a:r>
-                        <a:rPr sz="1600" b="0">
-                          <a:solidFill>
-                            <a:srgbClr val="202020"/>
-                          </a:solidFill>
-                          <a:latin typeface="Times New Roman"/>
-                        </a:rPr>
-                        <a:t>2</a:t>
-                      </a:r>
-                    </a:p>
-                  </a:txBody>
-                  <a:tcPr marL="36576" marR="36576" marT="9144" marB="9144">
-                    <a:solidFill>
-                      <a:srgbClr val="FFFFFF"/>
-                    </a:solidFill>
-                  </a:tcPr>
-                </a:tc>
-                <a:tc>
-                  <a:txBody>
-                    <a:bodyPr/>
-                    <a:lstStyle/>
-                    <a:p>
-                      <a:pPr algn="ctr"/>
-                      <a:r>
-                        <a:rPr sz="1600" b="0">
-                          <a:solidFill>
-                            <a:srgbClr val="202020"/>
-                          </a:solidFill>
-                          <a:latin typeface="Times New Roman"/>
-                        </a:rPr>
-                        <a:t>349</a:t>
-                      </a:r>
-                    </a:p>
-                  </a:txBody>
-                  <a:tcPr marL="36576" marR="36576" marT="9144" marB="9144">
-                    <a:solidFill>
-                      <a:srgbClr val="FFFFFF"/>
-                    </a:solidFill>
-                  </a:tcPr>
-                </a:tc>
-                <a:tc>
-                  <a:txBody>
-                    <a:bodyPr/>
-                    <a:lstStyle/>
-                    <a:p>
-                      <a:pPr algn="ctr"/>
-                      <a:r>
-                        <a:rPr sz="1600" b="0">
-                          <a:solidFill>
-                            <a:srgbClr val="202020"/>
-                          </a:solidFill>
-                          <a:latin typeface="Times New Roman"/>
-                        </a:rPr>
-                        <a:t>544</a:t>
-                      </a:r>
-                    </a:p>
-                  </a:txBody>
-                  <a:tcPr marL="36576" marR="36576" marT="9144" marB="9144">
-                    <a:solidFill>
-                      <a:srgbClr val="FFFFFF"/>
-                    </a:solidFill>
-                  </a:tcPr>
-                </a:tc>
-              </a:tr>
-              <a:tr h="329184">
-                <a:tc>
-                  <a:txBody>
-                    <a:bodyPr/>
-                    <a:lstStyle/>
-                    <a:p>
-                      <a:pPr algn="ctr"/>
-                      <a:r>
-                        <a:rPr sz="1600" b="0">
-                          <a:solidFill>
-                            <a:srgbClr val="202020"/>
-                          </a:solidFill>
-                          <a:latin typeface="Times New Roman"/>
-                        </a:rPr>
-                        <a:t>4</a:t>
-                      </a:r>
-                    </a:p>
-                  </a:txBody>
-                  <a:tcPr marL="36576" marR="36576" marT="9144" marB="9144">
-                    <a:solidFill>
-                      <a:srgbClr val="FFFFFF"/>
-                    </a:solidFill>
-                  </a:tcPr>
-                </a:tc>
-                <a:tc>
-                  <a:txBody>
-                    <a:bodyPr/>
-                    <a:lstStyle/>
-                    <a:p>
-                      <a:pPr algn="ctr"/>
-                      <a:r>
-                        <a:rPr sz="1600" b="0">
-                          <a:solidFill>
-                            <a:srgbClr val="202020"/>
-                          </a:solidFill>
-                          <a:latin typeface="Times New Roman"/>
-                        </a:rPr>
-                        <a:t>349</a:t>
-                      </a:r>
-                    </a:p>
-                  </a:txBody>
-                  <a:tcPr marL="36576" marR="36576" marT="9144" marB="9144">
-                    <a:solidFill>
-                      <a:srgbClr val="FFFFFF"/>
-                    </a:solidFill>
-                  </a:tcPr>
-                </a:tc>
-                <a:tc>
-                  <a:txBody>
-                    <a:bodyPr/>
-                    <a:lstStyle/>
-                    <a:p>
-                      <a:pPr algn="ctr"/>
-                      <a:r>
-                        <a:rPr sz="1600" b="0">
-                          <a:solidFill>
-                            <a:srgbClr val="202020"/>
-                          </a:solidFill>
-                          <a:latin typeface="Times New Roman"/>
-                        </a:rPr>
-                        <a:t>526</a:t>
-                      </a:r>
-                    </a:p>
-                  </a:txBody>
-                  <a:tcPr marL="36576" marR="36576" marT="9144" marB="9144">
-                    <a:solidFill>
-                      <a:srgbClr val="FFF3CD"/>
-                    </a:solidFill>
-                  </a:tcPr>
-                </a:tc>
-              </a:tr>
-              <a:tr h="329184">
-                <a:tc>
-                  <a:txBody>
-                    <a:bodyPr/>
-                    <a:lstStyle/>
-                    <a:p>
-                      <a:pPr algn="ctr"/>
-                      <a:r>
-                        <a:rPr sz="1600" b="0">
-                          <a:solidFill>
-                            <a:srgbClr val="202020"/>
-                          </a:solidFill>
-                          <a:latin typeface="Times New Roman"/>
-                        </a:rPr>
-                        <a:t>8</a:t>
-                      </a:r>
-                    </a:p>
-                  </a:txBody>
-                  <a:tcPr marL="36576" marR="36576" marT="9144" marB="9144">
-                    <a:solidFill>
-                      <a:srgbClr val="FFFFFF"/>
-                    </a:solidFill>
-                  </a:tcPr>
-                </a:tc>
-                <a:tc>
-                  <a:txBody>
-                    <a:bodyPr/>
-                    <a:lstStyle/>
-                    <a:p>
-                      <a:pPr algn="ctr"/>
-                      <a:r>
-                        <a:rPr sz="1600" b="0">
-                          <a:solidFill>
-                            <a:srgbClr val="202020"/>
-                          </a:solidFill>
-                          <a:latin typeface="Times New Roman"/>
-                        </a:rPr>
-                        <a:t>347</a:t>
-                      </a:r>
-                    </a:p>
-                  </a:txBody>
-                  <a:tcPr marL="36576" marR="36576" marT="9144" marB="9144">
-                    <a:solidFill>
-                      <a:srgbClr val="FFFFFF"/>
-                    </a:solidFill>
-                  </a:tcPr>
-                </a:tc>
-                <a:tc>
-                  <a:txBody>
-                    <a:bodyPr/>
-                    <a:lstStyle/>
-                    <a:p>
-                      <a:pPr algn="ctr"/>
-                      <a:r>
-                        <a:rPr sz="1600" b="0">
-                          <a:solidFill>
-                            <a:srgbClr val="202020"/>
-                          </a:solidFill>
-                          <a:latin typeface="Times New Roman"/>
-                        </a:rPr>
-                        <a:t>570</a:t>
-                      </a:r>
-                    </a:p>
-                  </a:txBody>
-                  <a:tcPr marL="36576" marR="36576" marT="9144" marB="9144">
-                    <a:solidFill>
-                      <a:srgbClr val="FFFFFF"/>
-                    </a:solidFill>
-                  </a:tcPr>
-                </a:tc>
-              </a:tr>
-              <a:tr h="329184">
-                <a:tc>
-                  <a:txBody>
-                    <a:bodyPr/>
-                    <a:lstStyle/>
-                    <a:p>
-                      <a:pPr algn="ctr"/>
-                      <a:r>
-                        <a:rPr sz="1600" b="0">
-                          <a:solidFill>
-                            <a:srgbClr val="202020"/>
-                          </a:solidFill>
-                          <a:latin typeface="Times New Roman"/>
-                        </a:rPr>
-                        <a:t>20</a:t>
-                      </a:r>
-                    </a:p>
-                  </a:txBody>
-                  <a:tcPr marL="36576" marR="36576" marT="9144" marB="9144">
-                    <a:solidFill>
-                      <a:srgbClr val="FFFFFF"/>
-                    </a:solidFill>
-                  </a:tcPr>
-                </a:tc>
-                <a:tc>
-                  <a:txBody>
-                    <a:bodyPr/>
-                    <a:lstStyle/>
-                    <a:p>
-                      <a:pPr algn="ctr"/>
-                      <a:r>
-                        <a:rPr sz="1600" b="0">
-                          <a:solidFill>
-                            <a:srgbClr val="202020"/>
-                          </a:solidFill>
-                          <a:latin typeface="Times New Roman"/>
-                        </a:rPr>
-                        <a:t>318</a:t>
-                      </a:r>
-                    </a:p>
-                  </a:txBody>
-                  <a:tcPr marL="36576" marR="36576" marT="9144" marB="9144">
-                    <a:solidFill>
-                      <a:srgbClr val="FFFFFF"/>
-                    </a:solidFill>
-                  </a:tcPr>
-                </a:tc>
-                <a:tc>
-                  <a:txBody>
-                    <a:bodyPr/>
-                    <a:lstStyle/>
-                    <a:p>
-                      <a:pPr algn="ctr"/>
-                      <a:r>
-                        <a:rPr sz="1600" b="0">
-                          <a:solidFill>
-                            <a:srgbClr val="202020"/>
-                          </a:solidFill>
-                          <a:latin typeface="Times New Roman"/>
-                        </a:rPr>
-                        <a:t>598</a:t>
-                      </a:r>
-                    </a:p>
-                  </a:txBody>
-                  <a:tcPr marL="36576" marR="36576" marT="9144" marB="9144">
-                    <a:solidFill>
-                      <a:srgbClr val="FFFFFF"/>
-                    </a:solidFill>
-                  </a:tcPr>
-                </a:tc>
-              </a:tr>
-            </a:tbl>
-          </a:graphicData>
-        </a:graphic>
-      </p:graphicFrame>
-      <p:pic>
-        <p:nvPicPr>
-          <p:cNvPr id="7" name="Picture 6" descr="f_temp.png"/>
-          <p:cNvPicPr>
-            <a:picLocks noChangeAspect="1"/>
-          </p:cNvPicPr>
-          <p:nvPr/>
-        </p:nvPicPr>
-        <p:blipFill>
-          <a:blip r:embed="rId2"/>
-          <a:stretch>
-            <a:fillRect/>
-          </a:stretch>
-        </p:blipFill>
-        <p:spPr>
-          <a:xfrm>
-            <a:off x="6583680" y="1097280"/>
-            <a:ext cx="5120640" cy="2720340"/>
-          </a:xfrm>
-          <a:prstGeom prst="rect">
-            <a:avLst/>
-          </a:prstGeom>
-        </p:spPr>
-      </p:pic>
-      <p:sp>
-        <p:nvSpPr>
-          <p:cNvPr id="8" name="Rectangle 7"/>
-          <p:cNvSpPr/>
-          <p:nvPr/>
-        </p:nvSpPr>
-        <p:spPr>
-          <a:xfrm>
-            <a:off x="731520" y="3886200"/>
-            <a:ext cx="10881360" cy="914400"/>
-          </a:xfrm>
-          <a:prstGeom prst="rect">
-            <a:avLst/>
-          </a:prstGeom>
-          <a:solidFill>
-            <a:srgbClr val="F6F8FA"/>
-          </a:solidFill>
-          <a:ln>
-            <a:solidFill>
-              <a:srgbClr val="D0D7DE"/>
-            </a:solidFill>
-          </a:ln>
-          <a:effectLst/>
-        </p:spPr>
-        <p:style>
-          <a:lnRef idx="1">
-            <a:schemeClr val="accent1"/>
-          </a:lnRef>
-          <a:fillRef idx="3">
-            <a:schemeClr val="accent1"/>
-          </a:fillRef>
-          <a:effectRef idx="2">
-            <a:schemeClr val="accent1"/>
-          </a:effectRef>
-          <a:fontRef idx="minor">
-            <a:schemeClr val="lt1"/>
-          </a:fontRef>
-        </p:style>
-        <p:txBody>
-          <a:bodyPr rtlCol="0" anchor="ctr" wrap="square"/>
-          <a:lstStyle/>
-          <a:p>
-            <a:pPr algn="l"/>
-            <a:r>
-              <a:rPr sz="1500" b="1">
-                <a:solidFill>
-                  <a:srgbClr val="1F4E79"/>
-                </a:solidFill>
-                <a:latin typeface="Times New Roman"/>
-              </a:rPr>
-              <a:t>Paper: with 300 or more units per layer, all temperatures above 8 gave fairly similar results; with 30 units per layer,</a:t>
-            </a:r>
-          </a:p>
-          <a:p>
-            <a:pPr algn="l"/>
-            <a:r>
-              <a:rPr sz="1500" b="1">
-                <a:solidFill>
-                  <a:srgbClr val="1F4E79"/>
-                </a:solidFill>
-                <a:latin typeface="Times New Roman"/>
-              </a:rPr>
-              <a:t>temperatures in the range 2.5 to 4 worked significantly better than higher or lower temperatures</a:t>
-            </a:r>
-          </a:p>
-        </p:txBody>
-      </p:sp>
-      <p:sp>
-        <p:nvSpPr>
-          <p:cNvPr id="9" name="Rectangle 8"/>
-          <p:cNvSpPr/>
-          <p:nvPr/>
-        </p:nvSpPr>
-        <p:spPr>
-          <a:xfrm>
-            <a:off x="731520" y="4892040"/>
-            <a:ext cx="10881360" cy="914400"/>
-          </a:xfrm>
-          <a:prstGeom prst="rect">
-            <a:avLst/>
-          </a:prstGeom>
-          <a:solidFill>
-            <a:srgbClr val="DCF0E4"/>
-          </a:solidFill>
-          <a:ln>
-            <a:solidFill>
-              <a:srgbClr val="D0D7DE"/>
-            </a:solidFill>
-          </a:ln>
-          <a:effectLst/>
-        </p:spPr>
-        <p:style>
-          <a:lnRef idx="1">
-            <a:schemeClr val="accent1"/>
-          </a:lnRef>
-          <a:fillRef idx="3">
-            <a:schemeClr val="accent1"/>
-          </a:fillRef>
-          <a:effectRef idx="2">
-            <a:schemeClr val="accent1"/>
-          </a:effectRef>
-          <a:fontRef idx="minor">
-            <a:schemeClr val="lt1"/>
-          </a:fontRef>
-        </p:style>
-        <p:txBody>
-          <a:bodyPr rtlCol="0" anchor="ctr" wrap="square"/>
-          <a:lstStyle/>
-          <a:p>
-            <a:pPr algn="l"/>
-            <a:r>
-              <a:rPr sz="1700" b="1">
-                <a:solidFill>
-                  <a:srgbClr val="1E7A45"/>
-                </a:solidFill>
-                <a:latin typeface="Times New Roman"/>
-              </a:rPr>
-              <a:t>In our repetition, the 30-30 net is best at T = 4 (526 errors); at T = 20 it is worse than with hard targets only</a:t>
-            </a:r>
-          </a:p>
-        </p:txBody>
-      </p:sp>
-      <p:sp>
-        <p:nvSpPr>
-          <p:cNvPr id="10" name="TextBox 9"/>
-          <p:cNvSpPr txBox="1"/>
-          <p:nvPr/>
-        </p:nvSpPr>
-        <p:spPr>
-          <a:xfrm>
-            <a:off x="731520" y="5897880"/>
-            <a:ext cx="10881360" cy="731520"/>
-          </a:xfrm>
-          <a:prstGeom prst="rect">
-            <a:avLst/>
-          </a:prstGeom>
-          <a:noFill/>
-        </p:spPr>
-        <p:txBody>
-          <a:bodyPr wrap="square">
-            <a:spAutoFit/>
-          </a:bodyPr>
-          <a:lstStyle/>
-          <a:p>
-            <a:r>
-              <a:rPr sz="1600" b="0" i="0">
-                <a:solidFill>
-                  <a:srgbClr val="59636E"/>
-                </a:solidFill>
-                <a:latin typeface="Times New Roman"/>
-              </a:rPr>
-              <a:t>When the distilled model is much too small to capture all of the knowledge, ignoring the large negative logits can be helpful.</a:t>
             </a:r>
           </a:p>
         </p:txBody>
@@ -13504,6 +13269,1148 @@
                 </a:solidFill>
                 <a:latin typeface="Times New Roman"/>
               </a:rPr>
+              <a:t>4. Intermediate temperatures for a very small net</a:t>
+            </a:r>
+          </a:p>
+        </p:txBody>
+      </p:sp>
+      <p:sp>
+        <p:nvSpPr>
+          <p:cNvPr id="5" name="TextBox 4"/>
+          <p:cNvSpPr txBox="1"/>
+          <p:nvPr/>
+        </p:nvSpPr>
+        <p:spPr>
+          <a:xfrm>
+            <a:off x="411480" y="521207"/>
+            <a:ext cx="11338560" cy="301752"/>
+          </a:xfrm>
+          <a:prstGeom prst="rect">
+            <a:avLst/>
+          </a:prstGeom>
+          <a:noFill/>
+        </p:spPr>
+        <p:txBody>
+          <a:bodyPr wrap="square">
+            <a:spAutoFit/>
+          </a:bodyPr>
+          <a:lstStyle/>
+          <a:p>
+            <a:r>
+              <a:rPr sz="1400" b="0" i="0">
+                <a:solidFill>
+                  <a:srgbClr val="C7D6E5"/>
+                </a:solidFill>
+                <a:latin typeface="Times New Roman"/>
+              </a:rPr>
+              <a:t>The small net is reduced to 30-30</a:t>
+            </a:r>
+          </a:p>
+        </p:txBody>
+      </p:sp>
+      <p:graphicFrame>
+        <p:nvGraphicFramePr>
+          <p:cNvPr id="6" name="Table 5"/>
+          <p:cNvGraphicFramePr>
+            <a:graphicFrameLocks noGrp="1"/>
+          </p:cNvGraphicFramePr>
+          <p:nvPr/>
+        </p:nvGraphicFramePr>
+        <p:xfrm>
+          <a:off x="731520" y="1143000"/>
+          <a:ext cx="5669278" cy="2304288"/>
+        </p:xfrm>
+        <a:graphic>
+          <a:graphicData uri="http://schemas.openxmlformats.org/drawingml/2006/table">
+            <a:tbl>
+              <a:tblPr bandRow="1">
+                <a:tableStyleId>{5C22544A-7EE6-4342-B048-85BDC9FD1C3A}</a:tableStyleId>
+              </a:tblPr>
+              <a:tblGrid>
+                <a:gridCol w="2040940"/>
+                <a:gridCol w="1814169"/>
+                <a:gridCol w="1814169"/>
+              </a:tblGrid>
+              <a:tr h="329184">
+                <a:tc>
+                  <a:txBody>
+                    <a:bodyPr/>
+                    <a:lstStyle/>
+                    <a:p>
+                      <a:pPr algn="ctr"/>
+                      <a:r>
+                        <a:rPr sz="1600" b="1">
+                          <a:solidFill>
+                            <a:srgbClr val="FFFFFF"/>
+                          </a:solidFill>
+                          <a:latin typeface="Times New Roman"/>
+                        </a:rPr>
+                        <a:t>T</a:t>
+                      </a:r>
+                    </a:p>
+                  </a:txBody>
+                  <a:tcPr marL="36576" marR="36576" marT="9144" marB="9144">
+                    <a:solidFill>
+                      <a:srgbClr val="1F4E79"/>
+                    </a:solidFill>
+                  </a:tcPr>
+                </a:tc>
+                <a:tc>
+                  <a:txBody>
+                    <a:bodyPr/>
+                    <a:lstStyle/>
+                    <a:p>
+                      <a:pPr algn="ctr"/>
+                      <a:r>
+                        <a:rPr sz="1600" b="1">
+                          <a:solidFill>
+                            <a:srgbClr val="FFFFFF"/>
+                          </a:solidFill>
+                          <a:latin typeface="Times New Roman"/>
+                        </a:rPr>
+                        <a:t>Small net 100-100</a:t>
+                      </a:r>
+                    </a:p>
+                  </a:txBody>
+                  <a:tcPr marL="36576" marR="36576" marT="9144" marB="9144">
+                    <a:solidFill>
+                      <a:srgbClr val="1F4E79"/>
+                    </a:solidFill>
+                  </a:tcPr>
+                </a:tc>
+                <a:tc>
+                  <a:txBody>
+                    <a:bodyPr/>
+                    <a:lstStyle/>
+                    <a:p>
+                      <a:pPr algn="ctr"/>
+                      <a:r>
+                        <a:rPr sz="1600" b="1">
+                          <a:solidFill>
+                            <a:srgbClr val="FFFFFF"/>
+                          </a:solidFill>
+                          <a:latin typeface="Times New Roman"/>
+                        </a:rPr>
+                        <a:t>Small net 30-30</a:t>
+                      </a:r>
+                    </a:p>
+                  </a:txBody>
+                  <a:tcPr marL="36576" marR="36576" marT="9144" marB="9144">
+                    <a:solidFill>
+                      <a:srgbClr val="1F4E79"/>
+                    </a:solidFill>
+                  </a:tcPr>
+                </a:tc>
+              </a:tr>
+              <a:tr h="329184">
+                <a:tc>
+                  <a:txBody>
+                    <a:bodyPr/>
+                    <a:lstStyle/>
+                    <a:p>
+                      <a:pPr algn="ctr"/>
+                      <a:r>
+                        <a:rPr sz="1600" b="0">
+                          <a:solidFill>
+                            <a:srgbClr val="202020"/>
+                          </a:solidFill>
+                          <a:latin typeface="Times New Roman"/>
+                        </a:rPr>
+                        <a:t>hard targets only</a:t>
+                      </a:r>
+                    </a:p>
+                  </a:txBody>
+                  <a:tcPr marL="36576" marR="36576" marT="9144" marB="9144">
+                    <a:solidFill>
+                      <a:srgbClr val="FFFFFF"/>
+                    </a:solidFill>
+                  </a:tcPr>
+                </a:tc>
+                <a:tc>
+                  <a:txBody>
+                    <a:bodyPr/>
+                    <a:lstStyle/>
+                    <a:p>
+                      <a:pPr algn="ctr"/>
+                      <a:r>
+                        <a:rPr sz="1600" b="0">
+                          <a:solidFill>
+                            <a:srgbClr val="202020"/>
+                          </a:solidFill>
+                          <a:latin typeface="Times New Roman"/>
+                        </a:rPr>
+                        <a:t>420</a:t>
+                      </a:r>
+                    </a:p>
+                  </a:txBody>
+                  <a:tcPr marL="36576" marR="36576" marT="9144" marB="9144">
+                    <a:solidFill>
+                      <a:srgbClr val="FFFFFF"/>
+                    </a:solidFill>
+                  </a:tcPr>
+                </a:tc>
+                <a:tc>
+                  <a:txBody>
+                    <a:bodyPr/>
+                    <a:lstStyle/>
+                    <a:p>
+                      <a:pPr algn="ctr"/>
+                      <a:r>
+                        <a:rPr sz="1600" b="0">
+                          <a:solidFill>
+                            <a:srgbClr val="202020"/>
+                          </a:solidFill>
+                          <a:latin typeface="Times New Roman"/>
+                        </a:rPr>
+                        <a:t>568</a:t>
+                      </a:r>
+                    </a:p>
+                  </a:txBody>
+                  <a:tcPr marL="36576" marR="36576" marT="9144" marB="9144">
+                    <a:solidFill>
+                      <a:srgbClr val="FFFFFF"/>
+                    </a:solidFill>
+                  </a:tcPr>
+                </a:tc>
+              </a:tr>
+              <a:tr h="329184">
+                <a:tc>
+                  <a:txBody>
+                    <a:bodyPr/>
+                    <a:lstStyle/>
+                    <a:p>
+                      <a:pPr algn="ctr"/>
+                      <a:r>
+                        <a:rPr sz="1600" b="0">
+                          <a:solidFill>
+                            <a:srgbClr val="202020"/>
+                          </a:solidFill>
+                          <a:latin typeface="Times New Roman"/>
+                        </a:rPr>
+                        <a:t>1</a:t>
+                      </a:r>
+                    </a:p>
+                  </a:txBody>
+                  <a:tcPr marL="36576" marR="36576" marT="9144" marB="9144">
+                    <a:solidFill>
+                      <a:srgbClr val="FFFFFF"/>
+                    </a:solidFill>
+                  </a:tcPr>
+                </a:tc>
+                <a:tc>
+                  <a:txBody>
+                    <a:bodyPr/>
+                    <a:lstStyle/>
+                    <a:p>
+                      <a:pPr algn="ctr"/>
+                      <a:r>
+                        <a:rPr sz="1600" b="0">
+                          <a:solidFill>
+                            <a:srgbClr val="202020"/>
+                          </a:solidFill>
+                          <a:latin typeface="Times New Roman"/>
+                        </a:rPr>
+                        <a:t>402</a:t>
+                      </a:r>
+                    </a:p>
+                  </a:txBody>
+                  <a:tcPr marL="36576" marR="36576" marT="9144" marB="9144">
+                    <a:solidFill>
+                      <a:srgbClr val="FFFFFF"/>
+                    </a:solidFill>
+                  </a:tcPr>
+                </a:tc>
+                <a:tc>
+                  <a:txBody>
+                    <a:bodyPr/>
+                    <a:lstStyle/>
+                    <a:p>
+                      <a:pPr algn="ctr"/>
+                      <a:r>
+                        <a:rPr sz="1600" b="0">
+                          <a:solidFill>
+                            <a:srgbClr val="202020"/>
+                          </a:solidFill>
+                          <a:latin typeface="Times New Roman"/>
+                        </a:rPr>
+                        <a:t>561</a:t>
+                      </a:r>
+                    </a:p>
+                  </a:txBody>
+                  <a:tcPr marL="36576" marR="36576" marT="9144" marB="9144">
+                    <a:solidFill>
+                      <a:srgbClr val="FFFFFF"/>
+                    </a:solidFill>
+                  </a:tcPr>
+                </a:tc>
+              </a:tr>
+              <a:tr h="329184">
+                <a:tc>
+                  <a:txBody>
+                    <a:bodyPr/>
+                    <a:lstStyle/>
+                    <a:p>
+                      <a:pPr algn="ctr"/>
+                      <a:r>
+                        <a:rPr sz="1600" b="0">
+                          <a:solidFill>
+                            <a:srgbClr val="202020"/>
+                          </a:solidFill>
+                          <a:latin typeface="Times New Roman"/>
+                        </a:rPr>
+                        <a:t>2</a:t>
+                      </a:r>
+                    </a:p>
+                  </a:txBody>
+                  <a:tcPr marL="36576" marR="36576" marT="9144" marB="9144">
+                    <a:solidFill>
+                      <a:srgbClr val="FFFFFF"/>
+                    </a:solidFill>
+                  </a:tcPr>
+                </a:tc>
+                <a:tc>
+                  <a:txBody>
+                    <a:bodyPr/>
+                    <a:lstStyle/>
+                    <a:p>
+                      <a:pPr algn="ctr"/>
+                      <a:r>
+                        <a:rPr sz="1600" b="0">
+                          <a:solidFill>
+                            <a:srgbClr val="202020"/>
+                          </a:solidFill>
+                          <a:latin typeface="Times New Roman"/>
+                        </a:rPr>
+                        <a:t>349</a:t>
+                      </a:r>
+                    </a:p>
+                  </a:txBody>
+                  <a:tcPr marL="36576" marR="36576" marT="9144" marB="9144">
+                    <a:solidFill>
+                      <a:srgbClr val="FFFFFF"/>
+                    </a:solidFill>
+                  </a:tcPr>
+                </a:tc>
+                <a:tc>
+                  <a:txBody>
+                    <a:bodyPr/>
+                    <a:lstStyle/>
+                    <a:p>
+                      <a:pPr algn="ctr"/>
+                      <a:r>
+                        <a:rPr sz="1600" b="0">
+                          <a:solidFill>
+                            <a:srgbClr val="202020"/>
+                          </a:solidFill>
+                          <a:latin typeface="Times New Roman"/>
+                        </a:rPr>
+                        <a:t>544</a:t>
+                      </a:r>
+                    </a:p>
+                  </a:txBody>
+                  <a:tcPr marL="36576" marR="36576" marT="9144" marB="9144">
+                    <a:solidFill>
+                      <a:srgbClr val="FFFFFF"/>
+                    </a:solidFill>
+                  </a:tcPr>
+                </a:tc>
+              </a:tr>
+              <a:tr h="329184">
+                <a:tc>
+                  <a:txBody>
+                    <a:bodyPr/>
+                    <a:lstStyle/>
+                    <a:p>
+                      <a:pPr algn="ctr"/>
+                      <a:r>
+                        <a:rPr sz="1600" b="0">
+                          <a:solidFill>
+                            <a:srgbClr val="202020"/>
+                          </a:solidFill>
+                          <a:latin typeface="Times New Roman"/>
+                        </a:rPr>
+                        <a:t>4</a:t>
+                      </a:r>
+                    </a:p>
+                  </a:txBody>
+                  <a:tcPr marL="36576" marR="36576" marT="9144" marB="9144">
+                    <a:solidFill>
+                      <a:srgbClr val="FFFFFF"/>
+                    </a:solidFill>
+                  </a:tcPr>
+                </a:tc>
+                <a:tc>
+                  <a:txBody>
+                    <a:bodyPr/>
+                    <a:lstStyle/>
+                    <a:p>
+                      <a:pPr algn="ctr"/>
+                      <a:r>
+                        <a:rPr sz="1600" b="0">
+                          <a:solidFill>
+                            <a:srgbClr val="202020"/>
+                          </a:solidFill>
+                          <a:latin typeface="Times New Roman"/>
+                        </a:rPr>
+                        <a:t>349</a:t>
+                      </a:r>
+                    </a:p>
+                  </a:txBody>
+                  <a:tcPr marL="36576" marR="36576" marT="9144" marB="9144">
+                    <a:solidFill>
+                      <a:srgbClr val="FFFFFF"/>
+                    </a:solidFill>
+                  </a:tcPr>
+                </a:tc>
+                <a:tc>
+                  <a:txBody>
+                    <a:bodyPr/>
+                    <a:lstStyle/>
+                    <a:p>
+                      <a:pPr algn="ctr"/>
+                      <a:r>
+                        <a:rPr sz="1600" b="0">
+                          <a:solidFill>
+                            <a:srgbClr val="202020"/>
+                          </a:solidFill>
+                          <a:latin typeface="Times New Roman"/>
+                        </a:rPr>
+                        <a:t>526</a:t>
+                      </a:r>
+                    </a:p>
+                  </a:txBody>
+                  <a:tcPr marL="36576" marR="36576" marT="9144" marB="9144">
+                    <a:solidFill>
+                      <a:srgbClr val="FFF3CD"/>
+                    </a:solidFill>
+                  </a:tcPr>
+                </a:tc>
+              </a:tr>
+              <a:tr h="329184">
+                <a:tc>
+                  <a:txBody>
+                    <a:bodyPr/>
+                    <a:lstStyle/>
+                    <a:p>
+                      <a:pPr algn="ctr"/>
+                      <a:r>
+                        <a:rPr sz="1600" b="0">
+                          <a:solidFill>
+                            <a:srgbClr val="202020"/>
+                          </a:solidFill>
+                          <a:latin typeface="Times New Roman"/>
+                        </a:rPr>
+                        <a:t>8</a:t>
+                      </a:r>
+                    </a:p>
+                  </a:txBody>
+                  <a:tcPr marL="36576" marR="36576" marT="9144" marB="9144">
+                    <a:solidFill>
+                      <a:srgbClr val="FFFFFF"/>
+                    </a:solidFill>
+                  </a:tcPr>
+                </a:tc>
+                <a:tc>
+                  <a:txBody>
+                    <a:bodyPr/>
+                    <a:lstStyle/>
+                    <a:p>
+                      <a:pPr algn="ctr"/>
+                      <a:r>
+                        <a:rPr sz="1600" b="0">
+                          <a:solidFill>
+                            <a:srgbClr val="202020"/>
+                          </a:solidFill>
+                          <a:latin typeface="Times New Roman"/>
+                        </a:rPr>
+                        <a:t>347</a:t>
+                      </a:r>
+                    </a:p>
+                  </a:txBody>
+                  <a:tcPr marL="36576" marR="36576" marT="9144" marB="9144">
+                    <a:solidFill>
+                      <a:srgbClr val="FFFFFF"/>
+                    </a:solidFill>
+                  </a:tcPr>
+                </a:tc>
+                <a:tc>
+                  <a:txBody>
+                    <a:bodyPr/>
+                    <a:lstStyle/>
+                    <a:p>
+                      <a:pPr algn="ctr"/>
+                      <a:r>
+                        <a:rPr sz="1600" b="0">
+                          <a:solidFill>
+                            <a:srgbClr val="202020"/>
+                          </a:solidFill>
+                          <a:latin typeface="Times New Roman"/>
+                        </a:rPr>
+                        <a:t>570</a:t>
+                      </a:r>
+                    </a:p>
+                  </a:txBody>
+                  <a:tcPr marL="36576" marR="36576" marT="9144" marB="9144">
+                    <a:solidFill>
+                      <a:srgbClr val="FFFFFF"/>
+                    </a:solidFill>
+                  </a:tcPr>
+                </a:tc>
+              </a:tr>
+              <a:tr h="329184">
+                <a:tc>
+                  <a:txBody>
+                    <a:bodyPr/>
+                    <a:lstStyle/>
+                    <a:p>
+                      <a:pPr algn="ctr"/>
+                      <a:r>
+                        <a:rPr sz="1600" b="0">
+                          <a:solidFill>
+                            <a:srgbClr val="202020"/>
+                          </a:solidFill>
+                          <a:latin typeface="Times New Roman"/>
+                        </a:rPr>
+                        <a:t>20</a:t>
+                      </a:r>
+                    </a:p>
+                  </a:txBody>
+                  <a:tcPr marL="36576" marR="36576" marT="9144" marB="9144">
+                    <a:solidFill>
+                      <a:srgbClr val="FFFFFF"/>
+                    </a:solidFill>
+                  </a:tcPr>
+                </a:tc>
+                <a:tc>
+                  <a:txBody>
+                    <a:bodyPr/>
+                    <a:lstStyle/>
+                    <a:p>
+                      <a:pPr algn="ctr"/>
+                      <a:r>
+                        <a:rPr sz="1600" b="0">
+                          <a:solidFill>
+                            <a:srgbClr val="202020"/>
+                          </a:solidFill>
+                          <a:latin typeface="Times New Roman"/>
+                        </a:rPr>
+                        <a:t>318</a:t>
+                      </a:r>
+                    </a:p>
+                  </a:txBody>
+                  <a:tcPr marL="36576" marR="36576" marT="9144" marB="9144">
+                    <a:solidFill>
+                      <a:srgbClr val="FFFFFF"/>
+                    </a:solidFill>
+                  </a:tcPr>
+                </a:tc>
+                <a:tc>
+                  <a:txBody>
+                    <a:bodyPr/>
+                    <a:lstStyle/>
+                    <a:p>
+                      <a:pPr algn="ctr"/>
+                      <a:r>
+                        <a:rPr sz="1600" b="0">
+                          <a:solidFill>
+                            <a:srgbClr val="202020"/>
+                          </a:solidFill>
+                          <a:latin typeface="Times New Roman"/>
+                        </a:rPr>
+                        <a:t>598</a:t>
+                      </a:r>
+                    </a:p>
+                  </a:txBody>
+                  <a:tcPr marL="36576" marR="36576" marT="9144" marB="9144">
+                    <a:solidFill>
+                      <a:srgbClr val="FFFFFF"/>
+                    </a:solidFill>
+                  </a:tcPr>
+                </a:tc>
+              </a:tr>
+            </a:tbl>
+          </a:graphicData>
+        </a:graphic>
+      </p:graphicFrame>
+      <p:pic>
+        <p:nvPicPr>
+          <p:cNvPr id="7" name="Picture 6" descr="f_temp.png"/>
+          <p:cNvPicPr>
+            <a:picLocks noChangeAspect="1"/>
+          </p:cNvPicPr>
+          <p:nvPr/>
+        </p:nvPicPr>
+        <p:blipFill>
+          <a:blip r:embed="rId2"/>
+          <a:stretch>
+            <a:fillRect/>
+          </a:stretch>
+        </p:blipFill>
+        <p:spPr>
+          <a:xfrm>
+            <a:off x="6583680" y="1097280"/>
+            <a:ext cx="5120640" cy="2720340"/>
+          </a:xfrm>
+          <a:prstGeom prst="rect">
+            <a:avLst/>
+          </a:prstGeom>
+        </p:spPr>
+      </p:pic>
+      <p:sp>
+        <p:nvSpPr>
+          <p:cNvPr id="8" name="Rectangle 7"/>
+          <p:cNvSpPr/>
+          <p:nvPr/>
+        </p:nvSpPr>
+        <p:spPr>
+          <a:xfrm>
+            <a:off x="731520" y="3886200"/>
+            <a:ext cx="10881360" cy="914400"/>
+          </a:xfrm>
+          <a:prstGeom prst="rect">
+            <a:avLst/>
+          </a:prstGeom>
+          <a:solidFill>
+            <a:srgbClr val="F6F8FA"/>
+          </a:solidFill>
+          <a:ln>
+            <a:solidFill>
+              <a:srgbClr val="D0D7DE"/>
+            </a:solidFill>
+          </a:ln>
+          <a:effectLst/>
+        </p:spPr>
+        <p:style>
+          <a:lnRef idx="1">
+            <a:schemeClr val="accent1"/>
+          </a:lnRef>
+          <a:fillRef idx="3">
+            <a:schemeClr val="accent1"/>
+          </a:fillRef>
+          <a:effectRef idx="2">
+            <a:schemeClr val="accent1"/>
+          </a:effectRef>
+          <a:fontRef idx="minor">
+            <a:schemeClr val="lt1"/>
+          </a:fontRef>
+        </p:style>
+        <p:txBody>
+          <a:bodyPr rtlCol="0" anchor="ctr" wrap="square"/>
+          <a:lstStyle/>
+          <a:p>
+            <a:pPr algn="l"/>
+            <a:r>
+              <a:rPr sz="1500" b="1">
+                <a:solidFill>
+                  <a:srgbClr val="1F4E79"/>
+                </a:solidFill>
+                <a:latin typeface="Times New Roman"/>
+              </a:rPr>
+              <a:t>Paper: with 300 or more units per layer, all temperatures above 8 gave fairly similar results; with 30 units per layer,</a:t>
+            </a:r>
+          </a:p>
+          <a:p>
+            <a:pPr algn="l"/>
+            <a:r>
+              <a:rPr sz="1500" b="1">
+                <a:solidFill>
+                  <a:srgbClr val="1F4E79"/>
+                </a:solidFill>
+                <a:latin typeface="Times New Roman"/>
+              </a:rPr>
+              <a:t>temperatures in the range 2.5 to 4 worked significantly better than higher or lower temperatures</a:t>
+            </a:r>
+          </a:p>
+        </p:txBody>
+      </p:sp>
+      <p:sp>
+        <p:nvSpPr>
+          <p:cNvPr id="9" name="Rectangle 8"/>
+          <p:cNvSpPr/>
+          <p:nvPr/>
+        </p:nvSpPr>
+        <p:spPr>
+          <a:xfrm>
+            <a:off x="731520" y="4892040"/>
+            <a:ext cx="10881360" cy="914400"/>
+          </a:xfrm>
+          <a:prstGeom prst="rect">
+            <a:avLst/>
+          </a:prstGeom>
+          <a:solidFill>
+            <a:srgbClr val="DCF0E4"/>
+          </a:solidFill>
+          <a:ln>
+            <a:solidFill>
+              <a:srgbClr val="D0D7DE"/>
+            </a:solidFill>
+          </a:ln>
+          <a:effectLst/>
+        </p:spPr>
+        <p:style>
+          <a:lnRef idx="1">
+            <a:schemeClr val="accent1"/>
+          </a:lnRef>
+          <a:fillRef idx="3">
+            <a:schemeClr val="accent1"/>
+          </a:fillRef>
+          <a:effectRef idx="2">
+            <a:schemeClr val="accent1"/>
+          </a:effectRef>
+          <a:fontRef idx="minor">
+            <a:schemeClr val="lt1"/>
+          </a:fontRef>
+        </p:style>
+        <p:txBody>
+          <a:bodyPr rtlCol="0" anchor="ctr" wrap="square"/>
+          <a:lstStyle/>
+          <a:p>
+            <a:pPr algn="l"/>
+            <a:r>
+              <a:rPr sz="1700" b="1">
+                <a:solidFill>
+                  <a:srgbClr val="1E7A45"/>
+                </a:solidFill>
+                <a:latin typeface="Times New Roman"/>
+              </a:rPr>
+              <a:t>In our repetition, the 30-30 net is best at T = 4 (526 errors); at T = 20 it is worse than with hard targets only</a:t>
+            </a:r>
+          </a:p>
+        </p:txBody>
+      </p:sp>
+      <p:sp>
+        <p:nvSpPr>
+          <p:cNvPr id="10" name="TextBox 9"/>
+          <p:cNvSpPr txBox="1"/>
+          <p:nvPr/>
+        </p:nvSpPr>
+        <p:spPr>
+          <a:xfrm>
+            <a:off x="731520" y="5897880"/>
+            <a:ext cx="10881360" cy="731520"/>
+          </a:xfrm>
+          <a:prstGeom prst="rect">
+            <a:avLst/>
+          </a:prstGeom>
+          <a:noFill/>
+        </p:spPr>
+        <p:txBody>
+          <a:bodyPr wrap="square">
+            <a:spAutoFit/>
+          </a:bodyPr>
+          <a:lstStyle/>
+          <a:p>
+            <a:r>
+              <a:rPr sz="1600" b="0" i="0">
+                <a:solidFill>
+                  <a:srgbClr val="59636E"/>
+                </a:solidFill>
+                <a:latin typeface="Times New Roman"/>
+              </a:rPr>
+              <a:t>When the distilled model is much too small to capture all of the knowledge, ignoring the large negative logits can be helpful.</a:t>
+            </a:r>
+          </a:p>
+        </p:txBody>
+      </p:sp>
+    </p:spTree>
+  </p:cSld>
+  <p:clrMapOvr>
+    <a:masterClrMapping/>
+  </p:clrMapOvr>
+  <p:timing>
+    <p:tnLst>
+      <p:par>
+        <p:cTn id="1" dur="indefinite" restart="never" nodeType="tmRoot">
+          <p:childTnLst>
+            <p:seq concurrent="1" nextAc="seek">
+              <p:cTn id="2" dur="indefinite" nodeType="mainSeq">
+                <p:childTnLst>
+                  <p:par>
+                    <p:cTn id="3" fill="hold">
+                      <p:stCondLst>
+                        <p:cond delay="indefinite"/>
+                      </p:stCondLst>
+                      <p:childTnLst>
+                        <p:par>
+                          <p:cTn id="4" fill="hold">
+                            <p:stCondLst>
+                              <p:cond delay="0"/>
+                            </p:stCondLst>
+                            <p:childTnLst>
+                              <p:par>
+                                <p:cTn id="5" presetID="1" presetClass="entr" presetSubtype="0" fill="hold" grpId="0" nodeType="clickEffect">
+                                  <p:stCondLst>
+                                    <p:cond delay="0"/>
+                                  </p:stCondLst>
+                                  <p:childTnLst>
+                                    <p:set>
+                                      <p:cBhvr>
+                                        <p:cTn id="6" dur="1" fill="hold">
+                                          <p:stCondLst>
+                                            <p:cond delay="0"/>
+                                          </p:stCondLst>
+                                        </p:cTn>
+                                        <p:tgtEl>
+                                          <p:spTgt spid="6"/>
+                                        </p:tgtEl>
+                                        <p:attrNameLst>
+                                          <p:attrName>style.visibility</p:attrName>
+                                        </p:attrNameLst>
+                                      </p:cBhvr>
+                                      <p:to>
+                                        <p:strVal val="visible"/>
+                                      </p:to>
+                                    </p:set>
+                                  </p:childTnLst>
+                                </p:cTn>
+                              </p:par>
+                            </p:childTnLst>
+                          </p:cTn>
+                        </p:par>
+                      </p:childTnLst>
+                    </p:cTn>
+                  </p:par>
+                  <p:par>
+                    <p:cTn id="7" fill="hold">
+                      <p:stCondLst>
+                        <p:cond delay="indefinite"/>
+                      </p:stCondLst>
+                      <p:childTnLst>
+                        <p:par>
+                          <p:cTn id="8" fill="hold">
+                            <p:stCondLst>
+                              <p:cond delay="0"/>
+                            </p:stCondLst>
+                            <p:childTnLst>
+                              <p:par>
+                                <p:cTn id="9" presetID="1" presetClass="entr" presetSubtype="0" fill="hold" grpId="0" nodeType="clickEffect">
+                                  <p:stCondLst>
+                                    <p:cond delay="0"/>
+                                  </p:stCondLst>
+                                  <p:childTnLst>
+                                    <p:set>
+                                      <p:cBhvr>
+                                        <p:cTn id="10" dur="1" fill="hold">
+                                          <p:stCondLst>
+                                            <p:cond delay="0"/>
+                                          </p:stCondLst>
+                                        </p:cTn>
+                                        <p:tgtEl>
+                                          <p:spTgt spid="7"/>
+                                        </p:tgtEl>
+                                        <p:attrNameLst>
+                                          <p:attrName>style.visibility</p:attrName>
+                                        </p:attrNameLst>
+                                      </p:cBhvr>
+                                      <p:to>
+                                        <p:strVal val="visible"/>
+                                      </p:to>
+                                    </p:set>
+                                  </p:childTnLst>
+                                </p:cTn>
+                              </p:par>
+                            </p:childTnLst>
+                          </p:cTn>
+                        </p:par>
+                      </p:childTnLst>
+                    </p:cTn>
+                  </p:par>
+                  <p:par>
+                    <p:cTn id="11" fill="hold">
+                      <p:stCondLst>
+                        <p:cond delay="indefinite"/>
+                      </p:stCondLst>
+                      <p:childTnLst>
+                        <p:par>
+                          <p:cTn id="12" fill="hold">
+                            <p:stCondLst>
+                              <p:cond delay="0"/>
+                            </p:stCondLst>
+                            <p:childTnLst>
+                              <p:par>
+                                <p:cTn id="13" presetID="1" presetClass="entr" presetSubtype="0" fill="hold" grpId="0" nodeType="clickEffect">
+                                  <p:stCondLst>
+                                    <p:cond delay="0"/>
+                                  </p:stCondLst>
+                                  <p:childTnLst>
+                                    <p:set>
+                                      <p:cBhvr>
+                                        <p:cTn id="14" dur="1" fill="hold">
+                                          <p:stCondLst>
+                                            <p:cond delay="0"/>
+                                          </p:stCondLst>
+                                        </p:cTn>
+                                        <p:tgtEl>
+                                          <p:spTgt spid="8"/>
+                                        </p:tgtEl>
+                                        <p:attrNameLst>
+                                          <p:attrName>style.visibility</p:attrName>
+                                        </p:attrNameLst>
+                                      </p:cBhvr>
+                                      <p:to>
+                                        <p:strVal val="visible"/>
+                                      </p:to>
+                                    </p:set>
+                                  </p:childTnLst>
+                                </p:cTn>
+                              </p:par>
+                            </p:childTnLst>
+                          </p:cTn>
+                        </p:par>
+                      </p:childTnLst>
+                    </p:cTn>
+                  </p:par>
+                  <p:par>
+                    <p:cTn id="15" fill="hold">
+                      <p:stCondLst>
+                        <p:cond delay="indefinite"/>
+                      </p:stCondLst>
+                      <p:childTnLst>
+                        <p:par>
+                          <p:cTn id="16" fill="hold">
+                            <p:stCondLst>
+                              <p:cond delay="0"/>
+                            </p:stCondLst>
+                            <p:childTnLst>
+                              <p:par>
+                                <p:cTn id="17" presetID="1" presetClass="entr" presetSubtype="0" fill="hold" grpId="0" nodeType="clickEffect">
+                                  <p:stCondLst>
+                                    <p:cond delay="0"/>
+                                  </p:stCondLst>
+                                  <p:childTnLst>
+                                    <p:set>
+                                      <p:cBhvr>
+                                        <p:cTn id="18" dur="1" fill="hold">
+                                          <p:stCondLst>
+                                            <p:cond delay="0"/>
+                                          </p:stCondLst>
+                                        </p:cTn>
+                                        <p:tgtEl>
+                                          <p:spTgt spid="9"/>
+                                        </p:tgtEl>
+                                        <p:attrNameLst>
+                                          <p:attrName>style.visibility</p:attrName>
+                                        </p:attrNameLst>
+                                      </p:cBhvr>
+                                      <p:to>
+                                        <p:strVal val="visible"/>
+                                      </p:to>
+                                    </p:set>
+                                  </p:childTnLst>
+                                </p:cTn>
+                              </p:par>
+                            </p:childTnLst>
+                          </p:cTn>
+                        </p:par>
+                      </p:childTnLst>
+                    </p:cTn>
+                  </p:par>
+                  <p:par>
+                    <p:cTn id="19" fill="hold">
+                      <p:stCondLst>
+                        <p:cond delay="indefinite"/>
+                      </p:stCondLst>
+                      <p:childTnLst>
+                        <p:par>
+                          <p:cTn id="20" fill="hold">
+                            <p:stCondLst>
+                              <p:cond delay="0"/>
+                            </p:stCondLst>
+                            <p:childTnLst>
+                              <p:par>
+                                <p:cTn id="21" presetID="1" presetClass="entr" presetSubtype="0" fill="hold" grpId="0" nodeType="clickEffect">
+                                  <p:stCondLst>
+                                    <p:cond delay="0"/>
+                                  </p:stCondLst>
+                                  <p:childTnLst>
+                                    <p:set>
+                                      <p:cBhvr>
+                                        <p:cTn id="22" dur="1" fill="hold">
+                                          <p:stCondLst>
+                                            <p:cond delay="0"/>
+                                          </p:stCondLst>
+                                        </p:cTn>
+                                        <p:tgtEl>
+                                          <p:spTgt spid="10"/>
+                                        </p:tgtEl>
+                                        <p:attrNameLst>
+                                          <p:attrName>style.visibility</p:attrName>
+                                        </p:attrNameLst>
+                                      </p:cBhvr>
+                                      <p:to>
+                                        <p:strVal val="visible"/>
+                                      </p:to>
+                                    </p:set>
+                                  </p:childTnLst>
+                                </p:cTn>
+                              </p:par>
+                            </p:childTnLst>
+                          </p:cTn>
+                        </p:par>
+                      </p:childTnLst>
+                    </p:cTn>
+                  </p:par>
+                </p:childTnLst>
+              </p:cTn>
+              <p:prevCondLst>
+                <p:cond evt="onPrev" delay="0">
+                  <p:tgtEl>
+                    <p:sldTgt/>
+                  </p:tgtEl>
+                </p:cond>
+              </p:prevCondLst>
+              <p:nextCondLst>
+                <p:cond evt="onNext" delay="0">
+                  <p:tgtEl>
+                    <p:sldTgt/>
+                  </p:tgtEl>
+                </p:cond>
+              </p:nextCondLst>
+            </p:seq>
+          </p:childTnLst>
+        </p:cTn>
+      </p:par>
+    </p:tnLst>
+    <p:bldLst>
+      <p:bldGraphic spid="6" grpId="0">
+        <p:bldAsOne/>
+      </p:bldGraphic>
+      <p:bldP spid="7" grpId="0" animBg="1"/>
+      <p:bldP spid="8" grpId="0" animBg="1"/>
+      <p:bldP spid="9" grpId="0" animBg="1"/>
+      <p:bldP spid="10" grpId="0" animBg="1"/>
+    </p:bldLst>
+  </p:timing>
+</p:sld>
+</file>
+
+<file path=ppt/slides/slide18.xml><?xml version="1.0" encoding="utf-8"?>
+<p:sld xmlns:a="http://schemas.openxmlformats.org/drawingml/2006/main" xmlns:p="http://schemas.openxmlformats.org/presentationml/2006/main" xmlns:r="http://schemas.openxmlformats.org/officeDocument/2006/relationships">
+  <p:cSld>
+    <p:spTree>
+      <p:nvGrpSpPr>
+        <p:cNvPr id="1" name=""/>
+        <p:cNvGrpSpPr/>
+        <p:nvPr/>
+      </p:nvGrpSpPr>
+      <p:grpSpPr/>
+      <p:sp>
+        <p:nvSpPr>
+          <p:cNvPr id="2" name="Rectangle 1"/>
+          <p:cNvSpPr/>
+          <p:nvPr/>
+        </p:nvSpPr>
+        <p:spPr>
+          <a:xfrm>
+            <a:off x="0" y="0"/>
+            <a:ext cx="12191695" cy="6858000"/>
+          </a:xfrm>
+          <a:prstGeom prst="rect">
+            <a:avLst/>
+          </a:prstGeom>
+          <a:solidFill>
+            <a:srgbClr val="FFFFFF"/>
+          </a:solidFill>
+          <a:ln>
+            <a:noFill/>
+          </a:ln>
+          <a:effectLst/>
+        </p:spPr>
+        <p:style>
+          <a:lnRef idx="1">
+            <a:schemeClr val="accent1"/>
+          </a:lnRef>
+          <a:fillRef idx="3">
+            <a:schemeClr val="accent1"/>
+          </a:fillRef>
+          <a:effectRef idx="2">
+            <a:schemeClr val="accent1"/>
+          </a:effectRef>
+          <a:fontRef idx="minor">
+            <a:schemeClr val="lt1"/>
+          </a:fontRef>
+        </p:style>
+        <p:txBody>
+          <a:bodyPr rtlCol="0" anchor="ctr"/>
+          <a:lstStyle/>
+          <a:p>
+            <a:pPr algn="ctr"/>
+          </a:p>
+        </p:txBody>
+      </p:sp>
+      <p:sp>
+        <p:nvSpPr>
+          <p:cNvPr id="3" name="Rectangle 2"/>
+          <p:cNvSpPr/>
+          <p:nvPr/>
+        </p:nvSpPr>
+        <p:spPr>
+          <a:xfrm>
+            <a:off x="0" y="0"/>
+            <a:ext cx="12191695" cy="868680"/>
+          </a:xfrm>
+          <a:prstGeom prst="rect">
+            <a:avLst/>
+          </a:prstGeom>
+          <a:solidFill>
+            <a:srgbClr val="1F4E79"/>
+          </a:solidFill>
+          <a:ln>
+            <a:noFill/>
+          </a:ln>
+          <a:effectLst/>
+        </p:spPr>
+        <p:style>
+          <a:lnRef idx="1">
+            <a:schemeClr val="accent1"/>
+          </a:lnRef>
+          <a:fillRef idx="3">
+            <a:schemeClr val="accent1"/>
+          </a:fillRef>
+          <a:effectRef idx="2">
+            <a:schemeClr val="accent1"/>
+          </a:effectRef>
+          <a:fontRef idx="minor">
+            <a:schemeClr val="lt1"/>
+          </a:fontRef>
+        </p:style>
+        <p:txBody>
+          <a:bodyPr rtlCol="0" anchor="ctr"/>
+          <a:lstStyle/>
+          <a:p>
+            <a:pPr algn="ctr"/>
+          </a:p>
+        </p:txBody>
+      </p:sp>
+      <p:sp>
+        <p:nvSpPr>
+          <p:cNvPr id="4" name="TextBox 3"/>
+          <p:cNvSpPr txBox="1"/>
+          <p:nvPr/>
+        </p:nvSpPr>
+        <p:spPr>
+          <a:xfrm>
+            <a:off x="411480" y="54864"/>
+            <a:ext cx="11338560" cy="457200"/>
+          </a:xfrm>
+          <a:prstGeom prst="rect">
+            <a:avLst/>
+          </a:prstGeom>
+          <a:noFill/>
+        </p:spPr>
+        <p:txBody>
+          <a:bodyPr wrap="square">
+            <a:spAutoFit/>
+          </a:bodyPr>
+          <a:lstStyle/>
+          <a:p>
+            <a:r>
+              <a:rPr sz="2800" b="1" i="0">
+                <a:solidFill>
+                  <a:srgbClr val="FFFFFF"/>
+                </a:solidFill>
+                <a:latin typeface="Times New Roman"/>
+              </a:rPr>
               <a:t>4. A mythical digit 3</a:t>
             </a:r>
           </a:p>
@@ -14552,7 +15459,7 @@
 </p:sld>
 </file>
 
-<file path=ppt/slides/slide18.xml><?xml version="1.0" encoding="utf-8"?>
+<file path=ppt/slides/slide19.xml><?xml version="1.0" encoding="utf-8"?>
 <p:sld xmlns:a="http://schemas.openxmlformats.org/drawingml/2006/main" xmlns:p="http://schemas.openxmlformats.org/presentationml/2006/main" xmlns:r="http://schemas.openxmlformats.org/officeDocument/2006/relationships">
   <p:cSld>
     <p:spTree>
@@ -15873,7 +16780,7 @@
 </p:sld>
 </file>
 
-<file path=ppt/slides/slide19.xml><?xml version="1.0" encoding="utf-8"?>
+<file path=ppt/slides/slide2.xml><?xml version="1.0" encoding="utf-8"?>
 <p:sld xmlns:a="http://schemas.openxmlformats.org/drawingml/2006/main" xmlns:p="http://schemas.openxmlformats.org/presentationml/2006/main" xmlns:r="http://schemas.openxmlformats.org/officeDocument/2006/relationships">
   <p:cSld>
     <p:spTree>
@@ -16000,6 +16907,315 @@
                 </a:solidFill>
                 <a:latin typeface="Times New Roman"/>
               </a:rPr>
+              <a:t>What is knowledge distillation?</a:t>
+            </a:r>
+          </a:p>
+        </p:txBody>
+      </p:sp>
+      <p:sp>
+        <p:nvSpPr>
+          <p:cNvPr id="5" name="TextBox 4"/>
+          <p:cNvSpPr txBox="1"/>
+          <p:nvPr/>
+        </p:nvSpPr>
+        <p:spPr>
+          <a:xfrm>
+            <a:off x="411480" y="521207"/>
+            <a:ext cx="11338560" cy="301752"/>
+          </a:xfrm>
+          <a:prstGeom prst="rect">
+            <a:avLst/>
+          </a:prstGeom>
+          <a:noFill/>
+        </p:spPr>
+        <p:txBody>
+          <a:bodyPr wrap="square">
+            <a:spAutoFit/>
+          </a:bodyPr>
+          <a:lstStyle/>
+          <a:p>
+            <a:r>
+              <a:rPr sz="1400" b="0" i="0">
+                <a:solidFill>
+                  <a:srgbClr val="C7D6E5"/>
+                </a:solidFill>
+                <a:latin typeface="Times New Roman"/>
+              </a:rPr>
+              <a:t>Based on Hinton, Vinyals, and Dean (2015)</a:t>
+            </a:r>
+          </a:p>
+        </p:txBody>
+      </p:sp>
+      <p:sp>
+        <p:nvSpPr>
+          <p:cNvPr id="6" name="TextBox 5"/>
+          <p:cNvSpPr txBox="1"/>
+          <p:nvPr/>
+        </p:nvSpPr>
+        <p:spPr>
+          <a:xfrm>
+            <a:off x="822960" y="1234440"/>
+            <a:ext cx="10515600" cy="5120640"/>
+          </a:xfrm>
+          <a:prstGeom prst="rect">
+            <a:avLst/>
+          </a:prstGeom>
+          <a:noFill/>
+        </p:spPr>
+        <p:txBody>
+          <a:bodyPr wrap="square">
+            <a:spAutoFit/>
+          </a:bodyPr>
+          <a:lstStyle/>
+          <a:p>
+            <a:pPr>
+              <a:lnSpc>
+                <a:spcPct val="120000"/>
+              </a:lnSpc>
+            </a:pPr>
+            <a:r>
+              <a:rPr sz="2000" b="0">
+                <a:solidFill>
+                  <a:srgbClr val="202020"/>
+                </a:solidFill>
+                <a:latin typeface="Times New Roman"/>
+              </a:rPr>
+              <a:t>To deploy an accurate model to a large number of users, we must resolve a conflict: a cumbersome model, such as an ensemble of models or a very large net trained with a strong regularizer, is best at extracting structure from the data, whereas deployment requires a small, fast model, and a small model trained only on the correct labels does not learn to generalize the way the cumbersome model does. We therefore first train the cumbersome model and regard its knowledge as a learned mapping from inputs to outputs rather than as particular parameter values. We then raise the temperature of its softmax so that it produces a softer distribution over classes, the soft targets, which preserve the relative probabilities of incorrect answers; for example, a particular 2 resembles a 3 more than a 7. Finally, we train the small model to match the soft targets at the same temperature, together with the correct labels, so that it learns to generalize like the cumbersome model, often from much less data. This process of transferring the knowledge of a cumbersome model to a small model is called </a:t>
+            </a:r>
+            <a:r>
+              <a:rPr sz="3200" b="1">
+                <a:solidFill>
+                  <a:srgbClr val="C03030"/>
+                </a:solidFill>
+                <a:latin typeface="Times New Roman"/>
+              </a:rPr>
+              <a:t>knowledge distillation</a:t>
+            </a:r>
+            <a:r>
+              <a:rPr sz="2000" b="0">
+                <a:solidFill>
+                  <a:srgbClr val="202020"/>
+                </a:solidFill>
+                <a:latin typeface="Times New Roman"/>
+              </a:rPr>
+              <a:t>.</a:t>
+            </a:r>
+          </a:p>
+        </p:txBody>
+      </p:sp>
+    </p:spTree>
+  </p:cSld>
+  <p:clrMapOvr>
+    <a:masterClrMapping/>
+  </p:clrMapOvr>
+  <p:timing>
+    <p:tnLst>
+      <p:par>
+        <p:cTn id="1" dur="indefinite" restart="never" nodeType="tmRoot">
+          <p:childTnLst>
+            <p:seq concurrent="1" nextAc="seek">
+              <p:cTn id="2" dur="indefinite" nodeType="mainSeq">
+                <p:childTnLst>
+                  <p:par>
+                    <p:cTn id="3" fill="hold">
+                      <p:stCondLst>
+                        <p:cond delay="indefinite"/>
+                      </p:stCondLst>
+                      <p:childTnLst>
+                        <p:par>
+                          <p:cTn id="4" fill="hold">
+                            <p:stCondLst>
+                              <p:cond delay="0"/>
+                            </p:stCondLst>
+                            <p:childTnLst>
+                              <p:par>
+                                <p:cTn id="5" presetID="1" presetClass="entr" presetSubtype="0" fill="hold" grpId="0" nodeType="clickEffect">
+                                  <p:stCondLst>
+                                    <p:cond delay="0"/>
+                                  </p:stCondLst>
+                                  <p:childTnLst>
+                                    <p:set>
+                                      <p:cBhvr>
+                                        <p:cTn id="6" dur="1" fill="hold">
+                                          <p:stCondLst>
+                                            <p:cond delay="0"/>
+                                          </p:stCondLst>
+                                        </p:cTn>
+                                        <p:tgtEl>
+                                          <p:spTgt spid="6"/>
+                                        </p:tgtEl>
+                                        <p:attrNameLst>
+                                          <p:attrName>style.visibility</p:attrName>
+                                        </p:attrNameLst>
+                                      </p:cBhvr>
+                                      <p:to>
+                                        <p:strVal val="visible"/>
+                                      </p:to>
+                                    </p:set>
+                                  </p:childTnLst>
+                                </p:cTn>
+                              </p:par>
+                            </p:childTnLst>
+                          </p:cTn>
+                        </p:par>
+                      </p:childTnLst>
+                    </p:cTn>
+                  </p:par>
+                </p:childTnLst>
+              </p:cTn>
+              <p:prevCondLst>
+                <p:cond evt="onPrev" delay="0">
+                  <p:tgtEl>
+                    <p:sldTgt/>
+                  </p:tgtEl>
+                </p:cond>
+              </p:prevCondLst>
+              <p:nextCondLst>
+                <p:cond evt="onNext" delay="0">
+                  <p:tgtEl>
+                    <p:sldTgt/>
+                  </p:tgtEl>
+                </p:cond>
+              </p:nextCondLst>
+            </p:seq>
+          </p:childTnLst>
+        </p:cTn>
+      </p:par>
+    </p:tnLst>
+    <p:bldLst>
+      <p:bldP spid="6" grpId="0" animBg="1"/>
+    </p:bldLst>
+  </p:timing>
+</p:sld>
+</file>
+
+<file path=ppt/slides/slide20.xml><?xml version="1.0" encoding="utf-8"?>
+<p:sld xmlns:a="http://schemas.openxmlformats.org/drawingml/2006/main" xmlns:p="http://schemas.openxmlformats.org/presentationml/2006/main" xmlns:r="http://schemas.openxmlformats.org/officeDocument/2006/relationships">
+  <p:cSld>
+    <p:spTree>
+      <p:nvGrpSpPr>
+        <p:cNvPr id="1" name=""/>
+        <p:cNvGrpSpPr/>
+        <p:nvPr/>
+      </p:nvGrpSpPr>
+      <p:grpSpPr/>
+      <p:sp>
+        <p:nvSpPr>
+          <p:cNvPr id="2" name="Rectangle 1"/>
+          <p:cNvSpPr/>
+          <p:nvPr/>
+        </p:nvSpPr>
+        <p:spPr>
+          <a:xfrm>
+            <a:off x="0" y="0"/>
+            <a:ext cx="12191695" cy="6858000"/>
+          </a:xfrm>
+          <a:prstGeom prst="rect">
+            <a:avLst/>
+          </a:prstGeom>
+          <a:solidFill>
+            <a:srgbClr val="FFFFFF"/>
+          </a:solidFill>
+          <a:ln>
+            <a:noFill/>
+          </a:ln>
+          <a:effectLst/>
+        </p:spPr>
+        <p:style>
+          <a:lnRef idx="1">
+            <a:schemeClr val="accent1"/>
+          </a:lnRef>
+          <a:fillRef idx="3">
+            <a:schemeClr val="accent1"/>
+          </a:fillRef>
+          <a:effectRef idx="2">
+            <a:schemeClr val="accent1"/>
+          </a:effectRef>
+          <a:fontRef idx="minor">
+            <a:schemeClr val="lt1"/>
+          </a:fontRef>
+        </p:style>
+        <p:txBody>
+          <a:bodyPr rtlCol="0" anchor="ctr"/>
+          <a:lstStyle/>
+          <a:p>
+            <a:pPr algn="ctr"/>
+          </a:p>
+        </p:txBody>
+      </p:sp>
+      <p:sp>
+        <p:nvSpPr>
+          <p:cNvPr id="3" name="Rectangle 2"/>
+          <p:cNvSpPr/>
+          <p:nvPr/>
+        </p:nvSpPr>
+        <p:spPr>
+          <a:xfrm>
+            <a:off x="0" y="0"/>
+            <a:ext cx="12191695" cy="868680"/>
+          </a:xfrm>
+          <a:prstGeom prst="rect">
+            <a:avLst/>
+          </a:prstGeom>
+          <a:solidFill>
+            <a:srgbClr val="1F4E79"/>
+          </a:solidFill>
+          <a:ln>
+            <a:noFill/>
+          </a:ln>
+          <a:effectLst/>
+        </p:spPr>
+        <p:style>
+          <a:lnRef idx="1">
+            <a:schemeClr val="accent1"/>
+          </a:lnRef>
+          <a:fillRef idx="3">
+            <a:schemeClr val="accent1"/>
+          </a:fillRef>
+          <a:effectRef idx="2">
+            <a:schemeClr val="accent1"/>
+          </a:effectRef>
+          <a:fontRef idx="minor">
+            <a:schemeClr val="lt1"/>
+          </a:fontRef>
+        </p:style>
+        <p:txBody>
+          <a:bodyPr rtlCol="0" anchor="ctr"/>
+          <a:lstStyle/>
+          <a:p>
+            <a:pPr algn="ctr"/>
+          </a:p>
+        </p:txBody>
+      </p:sp>
+      <p:sp>
+        <p:nvSpPr>
+          <p:cNvPr id="4" name="TextBox 3"/>
+          <p:cNvSpPr txBox="1"/>
+          <p:nvPr/>
+        </p:nvSpPr>
+        <p:spPr>
+          <a:xfrm>
+            <a:off x="411480" y="54864"/>
+            <a:ext cx="11338560" cy="457200"/>
+          </a:xfrm>
+          <a:prstGeom prst="rect">
+            <a:avLst/>
+          </a:prstGeom>
+          <a:noFill/>
+        </p:spPr>
+        <p:txBody>
+          <a:bodyPr wrap="square">
+            <a:spAutoFit/>
+          </a:bodyPr>
+          <a:lstStyle/>
+          <a:p>
+            <a:r>
+              <a:rPr sz="2800" b="1" i="0">
+                <a:solidFill>
+                  <a:srgbClr val="FFFFFF"/>
+                </a:solidFill>
+                <a:latin typeface="Times New Roman"/>
+              </a:rPr>
               <a:t>Summary and exercises</a:t>
             </a:r>
           </a:p>
@@ -16220,7 +17436,7 @@
                 </a:solidFill>
                 <a:latin typeface="Times New Roman"/>
               </a:rPr>
-              <a:t>Exercise 1  At T = 2, what are the soft targets for v = (8, 4, 0)? Use the four steps of slide 6</a:t>
+              <a:t>Exercise 1  At T = 2, what are the soft targets for v = (8, 4, 0)? Use the four steps of slide 7</a:t>
             </a:r>
           </a:p>
         </p:txBody>
@@ -16731,7 +17947,7 @@
 </p:sld>
 </file>
 
-<file path=ppt/slides/slide2.xml><?xml version="1.0" encoding="utf-8"?>
+<file path=ppt/slides/slide3.xml><?xml version="1.0" encoding="utf-8"?>
 <p:sld xmlns:a="http://schemas.openxmlformats.org/drawingml/2006/main" xmlns:p="http://schemas.openxmlformats.org/presentationml/2006/main" xmlns:r="http://schemas.openxmlformats.org/officeDocument/2006/relationships">
   <p:cSld>
     <p:spTree>
@@ -17051,7 +18267,7 @@
                           </a:solidFill>
                           <a:latin typeface="Times New Roman"/>
                         </a:rPr>
-                        <a:t>3–4</a:t>
+                        <a:t>4–5</a:t>
                       </a:r>
                     </a:p>
                   </a:txBody>
@@ -17122,7 +18338,7 @@
                           </a:solidFill>
                           <a:latin typeface="Times New Roman"/>
                         </a:rPr>
-                        <a:t>5–8</a:t>
+                        <a:t>6–9</a:t>
                       </a:r>
                     </a:p>
                   </a:txBody>
@@ -17193,7 +18409,7 @@
                           </a:solidFill>
                           <a:latin typeface="Times New Roman"/>
                         </a:rPr>
-                        <a:t>9–13</a:t>
+                        <a:t>10–14</a:t>
                       </a:r>
                     </a:p>
                   </a:txBody>
@@ -17264,7 +18480,7 @@
                           </a:solidFill>
                           <a:latin typeface="Times New Roman"/>
                         </a:rPr>
-                        <a:t>14–18</a:t>
+                        <a:t>15–19</a:t>
                       </a:r>
                     </a:p>
                   </a:txBody>
@@ -17335,7 +18551,7 @@
                           </a:solidFill>
                           <a:latin typeface="Times New Roman"/>
                         </a:rPr>
-                        <a:t>19</a:t>
+                        <a:t>20</a:t>
                       </a:r>
                     </a:p>
                   </a:txBody>
@@ -17666,7 +18882,7 @@
 </p:sld>
 </file>
 
-<file path=ppt/slides/slide3.xml><?xml version="1.0" encoding="utf-8"?>
+<file path=ppt/slides/slide4.xml><?xml version="1.0" encoding="utf-8"?>
 <p:sld xmlns:a="http://schemas.openxmlformats.org/drawingml/2006/main" xmlns:p="http://schemas.openxmlformats.org/presentationml/2006/main" xmlns:r="http://schemas.openxmlformats.org/officeDocument/2006/relationships">
   <p:cSld>
     <p:spTree>
@@ -18894,7 +20110,7 @@
 </p:sld>
 </file>
 
-<file path=ppt/slides/slide4.xml><?xml version="1.0" encoding="utf-8"?>
+<file path=ppt/slides/slide5.xml><?xml version="1.0" encoding="utf-8"?>
 <p:sld xmlns:a="http://schemas.openxmlformats.org/drawingml/2006/main" xmlns:p="http://schemas.openxmlformats.org/presentationml/2006/main" xmlns:r="http://schemas.openxmlformats.org/officeDocument/2006/relationships">
   <p:cSld>
     <p:spTree>
@@ -20006,7 +21222,7 @@
 </p:sld>
 </file>
 
-<file path=ppt/slides/slide5.xml><?xml version="1.0" encoding="utf-8"?>
+<file path=ppt/slides/slide6.xml><?xml version="1.0" encoding="utf-8"?>
 <p:sld xmlns:a="http://schemas.openxmlformats.org/drawingml/2006/main" xmlns:p="http://schemas.openxmlformats.org/presentationml/2006/main" xmlns:r="http://schemas.openxmlformats.org/officeDocument/2006/relationships">
   <p:cSld>
     <p:spTree>
@@ -20167,7 +21383,7 @@
                 </a:solidFill>
                 <a:latin typeface="Times New Roman"/>
               </a:rPr>
-              <a:t>Used from this slide to slide 13</a:t>
+              <a:t>Used from this slide to slide 14</a:t>
             </a:r>
           </a:p>
         </p:txBody>
@@ -21061,1533 +22277,6 @@
 </p:sld>
 </file>
 
-<file path=ppt/slides/slide6.xml><?xml version="1.0" encoding="utf-8"?>
-<p:sld xmlns:a="http://schemas.openxmlformats.org/drawingml/2006/main" xmlns:p="http://schemas.openxmlformats.org/presentationml/2006/main" xmlns:r="http://schemas.openxmlformats.org/officeDocument/2006/relationships">
-  <p:cSld>
-    <p:spTree>
-      <p:nvGrpSpPr>
-        <p:cNvPr id="1" name=""/>
-        <p:cNvGrpSpPr/>
-        <p:nvPr/>
-      </p:nvGrpSpPr>
-      <p:grpSpPr/>
-      <p:sp>
-        <p:nvSpPr>
-          <p:cNvPr id="2" name="Rectangle 1"/>
-          <p:cNvSpPr/>
-          <p:nvPr/>
-        </p:nvSpPr>
-        <p:spPr>
-          <a:xfrm>
-            <a:off x="0" y="0"/>
-            <a:ext cx="12191695" cy="6858000"/>
-          </a:xfrm>
-          <a:prstGeom prst="rect">
-            <a:avLst/>
-          </a:prstGeom>
-          <a:solidFill>
-            <a:srgbClr val="FFFFFF"/>
-          </a:solidFill>
-          <a:ln>
-            <a:noFill/>
-          </a:ln>
-          <a:effectLst/>
-        </p:spPr>
-        <p:style>
-          <a:lnRef idx="1">
-            <a:schemeClr val="accent1"/>
-          </a:lnRef>
-          <a:fillRef idx="3">
-            <a:schemeClr val="accent1"/>
-          </a:fillRef>
-          <a:effectRef idx="2">
-            <a:schemeClr val="accent1"/>
-          </a:effectRef>
-          <a:fontRef idx="minor">
-            <a:schemeClr val="lt1"/>
-          </a:fontRef>
-        </p:style>
-        <p:txBody>
-          <a:bodyPr rtlCol="0" anchor="ctr"/>
-          <a:lstStyle/>
-          <a:p>
-            <a:pPr algn="ctr"/>
-          </a:p>
-        </p:txBody>
-      </p:sp>
-      <p:sp>
-        <p:nvSpPr>
-          <p:cNvPr id="3" name="Rectangle 2"/>
-          <p:cNvSpPr/>
-          <p:nvPr/>
-        </p:nvSpPr>
-        <p:spPr>
-          <a:xfrm>
-            <a:off x="0" y="0"/>
-            <a:ext cx="12191695" cy="868680"/>
-          </a:xfrm>
-          <a:prstGeom prst="rect">
-            <a:avLst/>
-          </a:prstGeom>
-          <a:solidFill>
-            <a:srgbClr val="1F4E79"/>
-          </a:solidFill>
-          <a:ln>
-            <a:noFill/>
-          </a:ln>
-          <a:effectLst/>
-        </p:spPr>
-        <p:style>
-          <a:lnRef idx="1">
-            <a:schemeClr val="accent1"/>
-          </a:lnRef>
-          <a:fillRef idx="3">
-            <a:schemeClr val="accent1"/>
-          </a:fillRef>
-          <a:effectRef idx="2">
-            <a:schemeClr val="accent1"/>
-          </a:effectRef>
-          <a:fontRef idx="minor">
-            <a:schemeClr val="lt1"/>
-          </a:fontRef>
-        </p:style>
-        <p:txBody>
-          <a:bodyPr rtlCol="0" anchor="ctr"/>
-          <a:lstStyle/>
-          <a:p>
-            <a:pPr algn="ctr"/>
-          </a:p>
-        </p:txBody>
-      </p:sp>
-      <p:sp>
-        <p:nvSpPr>
-          <p:cNvPr id="4" name="TextBox 3"/>
-          <p:cNvSpPr txBox="1"/>
-          <p:nvPr/>
-        </p:nvSpPr>
-        <p:spPr>
-          <a:xfrm>
-            <a:off x="411480" y="54864"/>
-            <a:ext cx="11338560" cy="457200"/>
-          </a:xfrm>
-          <a:prstGeom prst="rect">
-            <a:avLst/>
-          </a:prstGeom>
-          <a:noFill/>
-        </p:spPr>
-        <p:txBody>
-          <a:bodyPr wrap="square">
-            <a:spAutoFit/>
-          </a:bodyPr>
-          <a:lstStyle/>
-          <a:p>
-            <a:r>
-              <a:rPr sz="2800" b="1" i="0">
-                <a:solidFill>
-                  <a:srgbClr val="FFFFFF"/>
-                </a:solidFill>
-                <a:latin typeface="Times New Roman"/>
-              </a:rPr>
-              <a:t>2. Softmax with a temperature: T = 1</a:t>
-            </a:r>
-          </a:p>
-        </p:txBody>
-      </p:sp>
-      <p:sp>
-        <p:nvSpPr>
-          <p:cNvPr id="5" name="TextBox 4"/>
-          <p:cNvSpPr txBox="1"/>
-          <p:nvPr/>
-        </p:nvSpPr>
-        <p:spPr>
-          <a:xfrm>
-            <a:off x="411480" y="521207"/>
-            <a:ext cx="11338560" cy="301752"/>
-          </a:xfrm>
-          <a:prstGeom prst="rect">
-            <a:avLst/>
-          </a:prstGeom>
-          <a:noFill/>
-        </p:spPr>
-        <p:txBody>
-          <a:bodyPr wrap="square">
-            <a:spAutoFit/>
-          </a:bodyPr>
-          <a:lstStyle/>
-          <a:p>
-            <a:r>
-              <a:rPr sz="1400" b="0" i="0">
-                <a:solidFill>
-                  <a:srgbClr val="C7D6E5"/>
-                </a:solidFill>
-                <a:latin typeface="Times New Roman"/>
-              </a:rPr>
-              <a:t>Eq. 1 of the paper; T is normally set to 1</a:t>
-            </a:r>
-          </a:p>
-        </p:txBody>
-      </p:sp>
-      <p:pic>
-        <p:nvPicPr>
-          <p:cNvPr id="6" name="Picture 5" descr="m_softmax.png"/>
-          <p:cNvPicPr>
-            <a:picLocks noChangeAspect="1"/>
-          </p:cNvPicPr>
-          <p:nvPr/>
-        </p:nvPicPr>
-        <p:blipFill>
-          <a:blip r:embed="rId2"/>
-          <a:stretch>
-            <a:fillRect/>
-          </a:stretch>
-        </p:blipFill>
-        <p:spPr>
-          <a:xfrm>
-            <a:off x="822960" y="1051560"/>
-            <a:ext cx="1834822" cy="868680"/>
-          </a:xfrm>
-          <a:prstGeom prst="rect">
-            <a:avLst/>
-          </a:prstGeom>
-        </p:spPr>
-      </p:pic>
-      <p:sp>
-        <p:nvSpPr>
-          <p:cNvPr id="7" name="TextBox 6"/>
-          <p:cNvSpPr txBox="1"/>
-          <p:nvPr/>
-        </p:nvSpPr>
-        <p:spPr>
-          <a:xfrm>
-            <a:off x="4754880" y="1097280"/>
-            <a:ext cx="6949440" cy="914400"/>
-          </a:xfrm>
-          <a:prstGeom prst="rect">
-            <a:avLst/>
-          </a:prstGeom>
-          <a:noFill/>
-        </p:spPr>
-        <p:txBody>
-          <a:bodyPr wrap="square">
-            <a:spAutoFit/>
-          </a:bodyPr>
-          <a:lstStyle/>
-          <a:p>
-            <a:r>
-              <a:rPr sz="1700" b="0" i="0">
-                <a:solidFill>
-                  <a:srgbClr val="202020"/>
-                </a:solidFill>
-                <a:latin typeface="Times New Roman"/>
-              </a:rPr>
-              <a:t>The softmax converts the logit z_i computed for each class into a probability q_i by comparing z_i with the other logits; T is a temperature.</a:t>
-            </a:r>
-          </a:p>
-        </p:txBody>
-      </p:sp>
-      <p:graphicFrame>
-        <p:nvGraphicFramePr>
-          <p:cNvPr id="8" name="Table 7"/>
-          <p:cNvGraphicFramePr>
-            <a:graphicFrameLocks noGrp="1"/>
-          </p:cNvGraphicFramePr>
-          <p:nvPr/>
-        </p:nvGraphicFramePr>
-        <p:xfrm>
-          <a:off x="731520" y="2240280"/>
-          <a:ext cx="1188720" cy="1316736"/>
-        </p:xfrm>
-        <a:graphic>
-          <a:graphicData uri="http://schemas.openxmlformats.org/drawingml/2006/table">
-            <a:tbl>
-              <a:tblPr bandRow="1">
-                <a:tableStyleId>{5C22544A-7EE6-4342-B048-85BDC9FD1C3A}</a:tableStyleId>
-              </a:tblPr>
-              <a:tblGrid>
-                <a:gridCol w="1188720"/>
-              </a:tblGrid>
-              <a:tr h="329184">
-                <a:tc>
-                  <a:txBody>
-                    <a:bodyPr/>
-                    <a:lstStyle/>
-                    <a:p>
-                      <a:pPr algn="ctr"/>
-                      <a:r>
-                        <a:rPr sz="1600" b="1">
-                          <a:solidFill>
-                            <a:srgbClr val="FFFFFF"/>
-                          </a:solidFill>
-                          <a:latin typeface="Times New Roman"/>
-                        </a:rPr>
-                        <a:t>Class</a:t>
-                      </a:r>
-                    </a:p>
-                  </a:txBody>
-                  <a:tcPr marL="36576" marR="36576" marT="9144" marB="9144">
-                    <a:solidFill>
-                      <a:srgbClr val="1F4E79"/>
-                    </a:solidFill>
-                  </a:tcPr>
-                </a:tc>
-              </a:tr>
-              <a:tr h="329184">
-                <a:tc>
-                  <a:txBody>
-                    <a:bodyPr/>
-                    <a:lstStyle/>
-                    <a:p>
-                      <a:pPr algn="ctr"/>
-                      <a:r>
-                        <a:rPr sz="1600" b="0">
-                          <a:solidFill>
-                            <a:srgbClr val="202020"/>
-                          </a:solidFill>
-                          <a:latin typeface="Times New Roman"/>
-                        </a:rPr>
-                        <a:t>2</a:t>
-                      </a:r>
-                    </a:p>
-                  </a:txBody>
-                  <a:tcPr marL="36576" marR="36576" marT="9144" marB="9144">
-                    <a:solidFill>
-                      <a:srgbClr val="FFFFFF"/>
-                    </a:solidFill>
-                  </a:tcPr>
-                </a:tc>
-              </a:tr>
-              <a:tr h="329184">
-                <a:tc>
-                  <a:txBody>
-                    <a:bodyPr/>
-                    <a:lstStyle/>
-                    <a:p>
-                      <a:pPr algn="ctr"/>
-                      <a:r>
-                        <a:rPr sz="1600" b="0">
-                          <a:solidFill>
-                            <a:srgbClr val="202020"/>
-                          </a:solidFill>
-                          <a:latin typeface="Times New Roman"/>
-                        </a:rPr>
-                        <a:t>3</a:t>
-                      </a:r>
-                    </a:p>
-                  </a:txBody>
-                  <a:tcPr marL="36576" marR="36576" marT="9144" marB="9144">
-                    <a:solidFill>
-                      <a:srgbClr val="FFFFFF"/>
-                    </a:solidFill>
-                  </a:tcPr>
-                </a:tc>
-              </a:tr>
-              <a:tr h="329184">
-                <a:tc>
-                  <a:txBody>
-                    <a:bodyPr/>
-                    <a:lstStyle/>
-                    <a:p>
-                      <a:pPr algn="ctr"/>
-                      <a:r>
-                        <a:rPr sz="1600" b="0">
-                          <a:solidFill>
-                            <a:srgbClr val="202020"/>
-                          </a:solidFill>
-                          <a:latin typeface="Times New Roman"/>
-                        </a:rPr>
-                        <a:t>7</a:t>
-                      </a:r>
-                    </a:p>
-                  </a:txBody>
-                  <a:tcPr marL="36576" marR="36576" marT="9144" marB="9144">
-                    <a:solidFill>
-                      <a:srgbClr val="FFFFFF"/>
-                    </a:solidFill>
-                  </a:tcPr>
-                </a:tc>
-              </a:tr>
-            </a:tbl>
-          </a:graphicData>
-        </a:graphic>
-      </p:graphicFrame>
-      <p:graphicFrame>
-        <p:nvGraphicFramePr>
-          <p:cNvPr id="9" name="Table 8"/>
-          <p:cNvGraphicFramePr>
-            <a:graphicFrameLocks noGrp="1"/>
-          </p:cNvGraphicFramePr>
-          <p:nvPr/>
-        </p:nvGraphicFramePr>
-        <p:xfrm>
-          <a:off x="2057400" y="2240280"/>
-          <a:ext cx="1463040" cy="1316736"/>
-        </p:xfrm>
-        <a:graphic>
-          <a:graphicData uri="http://schemas.openxmlformats.org/drawingml/2006/table">
-            <a:tbl>
-              <a:tblPr bandRow="1">
-                <a:tableStyleId>{5C22544A-7EE6-4342-B048-85BDC9FD1C3A}</a:tableStyleId>
-              </a:tblPr>
-              <a:tblGrid>
-                <a:gridCol w="1463040"/>
-              </a:tblGrid>
-              <a:tr h="329184">
-                <a:tc>
-                  <a:txBody>
-                    <a:bodyPr/>
-                    <a:lstStyle/>
-                    <a:p>
-                      <a:pPr algn="ctr"/>
-                      <a:r>
-                        <a:rPr sz="1600" b="1">
-                          <a:solidFill>
-                            <a:srgbClr val="FFFFFF"/>
-                          </a:solidFill>
-                          <a:latin typeface="Times New Roman"/>
-                        </a:rPr>
-                        <a:t>v</a:t>
-                      </a:r>
-                    </a:p>
-                  </a:txBody>
-                  <a:tcPr marL="36576" marR="36576" marT="9144" marB="9144">
-                    <a:solidFill>
-                      <a:srgbClr val="1F4E79"/>
-                    </a:solidFill>
-                  </a:tcPr>
-                </a:tc>
-              </a:tr>
-              <a:tr h="329184">
-                <a:tc>
-                  <a:txBody>
-                    <a:bodyPr/>
-                    <a:lstStyle/>
-                    <a:p>
-                      <a:pPr algn="ctr"/>
-                      <a:r>
-                        <a:rPr sz="1600" b="0">
-                          <a:solidFill>
-                            <a:srgbClr val="202020"/>
-                          </a:solidFill>
-                          <a:latin typeface="Times New Roman"/>
-                        </a:rPr>
-                        <a:t>8</a:t>
-                      </a:r>
-                    </a:p>
-                  </a:txBody>
-                  <a:tcPr marL="36576" marR="36576" marT="9144" marB="9144">
-                    <a:solidFill>
-                      <a:srgbClr val="FFFFFF"/>
-                    </a:solidFill>
-                  </a:tcPr>
-                </a:tc>
-              </a:tr>
-              <a:tr h="329184">
-                <a:tc>
-                  <a:txBody>
-                    <a:bodyPr/>
-                    <a:lstStyle/>
-                    <a:p>
-                      <a:pPr algn="ctr"/>
-                      <a:r>
-                        <a:rPr sz="1600" b="0">
-                          <a:solidFill>
-                            <a:srgbClr val="202020"/>
-                          </a:solidFill>
-                          <a:latin typeface="Times New Roman"/>
-                        </a:rPr>
-                        <a:t>4</a:t>
-                      </a:r>
-                    </a:p>
-                  </a:txBody>
-                  <a:tcPr marL="36576" marR="36576" marT="9144" marB="9144">
-                    <a:solidFill>
-                      <a:srgbClr val="FFFFFF"/>
-                    </a:solidFill>
-                  </a:tcPr>
-                </a:tc>
-              </a:tr>
-              <a:tr h="329184">
-                <a:tc>
-                  <a:txBody>
-                    <a:bodyPr/>
-                    <a:lstStyle/>
-                    <a:p>
-                      <a:pPr algn="ctr"/>
-                      <a:r>
-                        <a:rPr sz="1600" b="0">
-                          <a:solidFill>
-                            <a:srgbClr val="202020"/>
-                          </a:solidFill>
-                          <a:latin typeface="Times New Roman"/>
-                        </a:rPr>
-                        <a:t>0</a:t>
-                      </a:r>
-                    </a:p>
-                  </a:txBody>
-                  <a:tcPr marL="36576" marR="36576" marT="9144" marB="9144">
-                    <a:solidFill>
-                      <a:srgbClr val="FFFFFF"/>
-                    </a:solidFill>
-                  </a:tcPr>
-                </a:tc>
-              </a:tr>
-            </a:tbl>
-          </a:graphicData>
-        </a:graphic>
-      </p:graphicFrame>
-      <p:graphicFrame>
-        <p:nvGraphicFramePr>
-          <p:cNvPr id="10" name="Table 9"/>
-          <p:cNvGraphicFramePr>
-            <a:graphicFrameLocks noGrp="1"/>
-          </p:cNvGraphicFramePr>
-          <p:nvPr/>
-        </p:nvGraphicFramePr>
-        <p:xfrm>
-          <a:off x="3657600" y="2240280"/>
-          <a:ext cx="1965960" cy="1316736"/>
-        </p:xfrm>
-        <a:graphic>
-          <a:graphicData uri="http://schemas.openxmlformats.org/drawingml/2006/table">
-            <a:tbl>
-              <a:tblPr bandRow="1">
-                <a:tableStyleId>{5C22544A-7EE6-4342-B048-85BDC9FD1C3A}</a:tableStyleId>
-              </a:tblPr>
-              <a:tblGrid>
-                <a:gridCol w="1965960"/>
-              </a:tblGrid>
-              <a:tr h="329184">
-                <a:tc>
-                  <a:txBody>
-                    <a:bodyPr/>
-                    <a:lstStyle/>
-                    <a:p>
-                      <a:pPr algn="ctr"/>
-                      <a:r>
-                        <a:rPr sz="1600" b="1">
-                          <a:solidFill>
-                            <a:srgbClr val="FFFFFF"/>
-                          </a:solidFill>
-                          <a:latin typeface="Times New Roman"/>
-                        </a:rPr>
-                        <a:t>Step 1:  ÷ T</a:t>
-                      </a:r>
-                    </a:p>
-                  </a:txBody>
-                  <a:tcPr marL="36576" marR="36576" marT="9144" marB="9144">
-                    <a:solidFill>
-                      <a:srgbClr val="1F4E79"/>
-                    </a:solidFill>
-                  </a:tcPr>
-                </a:tc>
-              </a:tr>
-              <a:tr h="329184">
-                <a:tc>
-                  <a:txBody>
-                    <a:bodyPr/>
-                    <a:lstStyle/>
-                    <a:p>
-                      <a:pPr algn="ctr"/>
-                      <a:r>
-                        <a:rPr sz="1600" b="0">
-                          <a:solidFill>
-                            <a:srgbClr val="202020"/>
-                          </a:solidFill>
-                          <a:latin typeface="Times New Roman"/>
-                        </a:rPr>
-                        <a:t>8.0000</a:t>
-                      </a:r>
-                    </a:p>
-                  </a:txBody>
-                  <a:tcPr marL="36576" marR="36576" marT="9144" marB="9144">
-                    <a:solidFill>
-                      <a:srgbClr val="FFFFFF"/>
-                    </a:solidFill>
-                  </a:tcPr>
-                </a:tc>
-              </a:tr>
-              <a:tr h="329184">
-                <a:tc>
-                  <a:txBody>
-                    <a:bodyPr/>
-                    <a:lstStyle/>
-                    <a:p>
-                      <a:pPr algn="ctr"/>
-                      <a:r>
-                        <a:rPr sz="1600" b="0">
-                          <a:solidFill>
-                            <a:srgbClr val="202020"/>
-                          </a:solidFill>
-                          <a:latin typeface="Times New Roman"/>
-                        </a:rPr>
-                        <a:t>4.0000</a:t>
-                      </a:r>
-                    </a:p>
-                  </a:txBody>
-                  <a:tcPr marL="36576" marR="36576" marT="9144" marB="9144">
-                    <a:solidFill>
-                      <a:srgbClr val="FFFFFF"/>
-                    </a:solidFill>
-                  </a:tcPr>
-                </a:tc>
-              </a:tr>
-              <a:tr h="329184">
-                <a:tc>
-                  <a:txBody>
-                    <a:bodyPr/>
-                    <a:lstStyle/>
-                    <a:p>
-                      <a:pPr algn="ctr"/>
-                      <a:r>
-                        <a:rPr sz="1600" b="0">
-                          <a:solidFill>
-                            <a:srgbClr val="202020"/>
-                          </a:solidFill>
-                          <a:latin typeface="Times New Roman"/>
-                        </a:rPr>
-                        <a:t>0.0000</a:t>
-                      </a:r>
-                    </a:p>
-                  </a:txBody>
-                  <a:tcPr marL="36576" marR="36576" marT="9144" marB="9144">
-                    <a:solidFill>
-                      <a:srgbClr val="FFFFFF"/>
-                    </a:solidFill>
-                  </a:tcPr>
-                </a:tc>
-              </a:tr>
-            </a:tbl>
-          </a:graphicData>
-        </a:graphic>
-      </p:graphicFrame>
-      <p:graphicFrame>
-        <p:nvGraphicFramePr>
-          <p:cNvPr id="11" name="Table 10"/>
-          <p:cNvGraphicFramePr>
-            <a:graphicFrameLocks noGrp="1"/>
-          </p:cNvGraphicFramePr>
-          <p:nvPr/>
-        </p:nvGraphicFramePr>
-        <p:xfrm>
-          <a:off x="5760720" y="2240280"/>
-          <a:ext cx="2240279" cy="1316736"/>
-        </p:xfrm>
-        <a:graphic>
-          <a:graphicData uri="http://schemas.openxmlformats.org/drawingml/2006/table">
-            <a:tbl>
-              <a:tblPr bandRow="1">
-                <a:tableStyleId>{5C22544A-7EE6-4342-B048-85BDC9FD1C3A}</a:tableStyleId>
-              </a:tblPr>
-              <a:tblGrid>
-                <a:gridCol w="2240279"/>
-              </a:tblGrid>
-              <a:tr h="329184">
-                <a:tc>
-                  <a:txBody>
-                    <a:bodyPr/>
-                    <a:lstStyle/>
-                    <a:p>
-                      <a:pPr algn="ctr"/>
-                      <a:r>
-                        <a:rPr sz="1600" b="1">
-                          <a:solidFill>
-                            <a:srgbClr val="FFFFFF"/>
-                          </a:solidFill>
-                          <a:latin typeface="Times New Roman"/>
-                        </a:rPr>
-                        <a:t>Step 2:  exp</a:t>
-                      </a:r>
-                    </a:p>
-                  </a:txBody>
-                  <a:tcPr marL="36576" marR="36576" marT="9144" marB="9144">
-                    <a:solidFill>
-                      <a:srgbClr val="1F4E79"/>
-                    </a:solidFill>
-                  </a:tcPr>
-                </a:tc>
-              </a:tr>
-              <a:tr h="329184">
-                <a:tc>
-                  <a:txBody>
-                    <a:bodyPr/>
-                    <a:lstStyle/>
-                    <a:p>
-                      <a:pPr algn="ctr"/>
-                      <a:r>
-                        <a:rPr sz="1600" b="0">
-                          <a:solidFill>
-                            <a:srgbClr val="202020"/>
-                          </a:solidFill>
-                          <a:latin typeface="Times New Roman"/>
-                        </a:rPr>
-                        <a:t>2980.9580</a:t>
-                      </a:r>
-                    </a:p>
-                  </a:txBody>
-                  <a:tcPr marL="36576" marR="36576" marT="9144" marB="9144">
-                    <a:solidFill>
-                      <a:srgbClr val="FFFFFF"/>
-                    </a:solidFill>
-                  </a:tcPr>
-                </a:tc>
-              </a:tr>
-              <a:tr h="329184">
-                <a:tc>
-                  <a:txBody>
-                    <a:bodyPr/>
-                    <a:lstStyle/>
-                    <a:p>
-                      <a:pPr algn="ctr"/>
-                      <a:r>
-                        <a:rPr sz="1600" b="0">
-                          <a:solidFill>
-                            <a:srgbClr val="202020"/>
-                          </a:solidFill>
-                          <a:latin typeface="Times New Roman"/>
-                        </a:rPr>
-                        <a:t>54.5982</a:t>
-                      </a:r>
-                    </a:p>
-                  </a:txBody>
-                  <a:tcPr marL="36576" marR="36576" marT="9144" marB="9144">
-                    <a:solidFill>
-                      <a:srgbClr val="FFFFFF"/>
-                    </a:solidFill>
-                  </a:tcPr>
-                </a:tc>
-              </a:tr>
-              <a:tr h="329184">
-                <a:tc>
-                  <a:txBody>
-                    <a:bodyPr/>
-                    <a:lstStyle/>
-                    <a:p>
-                      <a:pPr algn="ctr"/>
-                      <a:r>
-                        <a:rPr sz="1600" b="0">
-                          <a:solidFill>
-                            <a:srgbClr val="202020"/>
-                          </a:solidFill>
-                          <a:latin typeface="Times New Roman"/>
-                        </a:rPr>
-                        <a:t>1.0000</a:t>
-                      </a:r>
-                    </a:p>
-                  </a:txBody>
-                  <a:tcPr marL="36576" marR="36576" marT="9144" marB="9144">
-                    <a:solidFill>
-                      <a:srgbClr val="FFFFFF"/>
-                    </a:solidFill>
-                  </a:tcPr>
-                </a:tc>
-              </a:tr>
-            </a:tbl>
-          </a:graphicData>
-        </a:graphic>
-      </p:graphicFrame>
-      <p:sp>
-        <p:nvSpPr>
-          <p:cNvPr id="12" name="Rectangle 11"/>
-          <p:cNvSpPr/>
-          <p:nvPr/>
-        </p:nvSpPr>
-        <p:spPr>
-          <a:xfrm>
-            <a:off x="8138160" y="2240280"/>
-            <a:ext cx="1737360" cy="1316736"/>
-          </a:xfrm>
-          <a:prstGeom prst="rect">
-            <a:avLst/>
-          </a:prstGeom>
-          <a:solidFill>
-            <a:srgbClr val="DAE6F2"/>
-          </a:solidFill>
-          <a:ln>
-            <a:solidFill>
-              <a:srgbClr val="D0D7DE"/>
-            </a:solidFill>
-          </a:ln>
-          <a:effectLst/>
-        </p:spPr>
-        <p:style>
-          <a:lnRef idx="1">
-            <a:schemeClr val="accent1"/>
-          </a:lnRef>
-          <a:fillRef idx="3">
-            <a:schemeClr val="accent1"/>
-          </a:fillRef>
-          <a:effectRef idx="2">
-            <a:schemeClr val="accent1"/>
-          </a:effectRef>
-          <a:fontRef idx="minor">
-            <a:schemeClr val="lt1"/>
-          </a:fontRef>
-        </p:style>
-        <p:txBody>
-          <a:bodyPr rtlCol="0" anchor="ctr" wrap="square"/>
-          <a:lstStyle/>
-          <a:p>
-            <a:pPr algn="ctr"/>
-            <a:r>
-              <a:rPr sz="1700" b="1">
-                <a:solidFill>
-                  <a:srgbClr val="1F4E79"/>
-                </a:solidFill>
-                <a:latin typeface="Times New Roman"/>
-              </a:rPr>
-              <a:t>Step 3:  sum</a:t>
-            </a:r>
-          </a:p>
-          <a:p>
-            <a:pPr algn="ctr"/>
-            <a:r>
-              <a:rPr sz="1700" b="1">
-                <a:solidFill>
-                  <a:srgbClr val="1F4E79"/>
-                </a:solidFill>
-                <a:latin typeface="Times New Roman"/>
-              </a:rPr>
-              <a:t>3036.5561</a:t>
-            </a:r>
-          </a:p>
-        </p:txBody>
-      </p:sp>
-      <p:graphicFrame>
-        <p:nvGraphicFramePr>
-          <p:cNvPr id="13" name="Table 12"/>
-          <p:cNvGraphicFramePr>
-            <a:graphicFrameLocks noGrp="1"/>
-          </p:cNvGraphicFramePr>
-          <p:nvPr/>
-        </p:nvGraphicFramePr>
-        <p:xfrm>
-          <a:off x="10012680" y="2240280"/>
-          <a:ext cx="1783080" cy="1316736"/>
-        </p:xfrm>
-        <a:graphic>
-          <a:graphicData uri="http://schemas.openxmlformats.org/drawingml/2006/table">
-            <a:tbl>
-              <a:tblPr bandRow="1">
-                <a:tableStyleId>{5C22544A-7EE6-4342-B048-85BDC9FD1C3A}</a:tableStyleId>
-              </a:tblPr>
-              <a:tblGrid>
-                <a:gridCol w="1783080"/>
-              </a:tblGrid>
-              <a:tr h="329184">
-                <a:tc>
-                  <a:txBody>
-                    <a:bodyPr/>
-                    <a:lstStyle/>
-                    <a:p>
-                      <a:pPr algn="ctr"/>
-                      <a:r>
-                        <a:rPr sz="1600" b="1">
-                          <a:solidFill>
-                            <a:srgbClr val="FFFFFF"/>
-                          </a:solidFill>
-                          <a:latin typeface="Times New Roman"/>
-                        </a:rPr>
-                        <a:t>Step 4:  p</a:t>
-                      </a:r>
-                    </a:p>
-                  </a:txBody>
-                  <a:tcPr marL="36576" marR="36576" marT="9144" marB="9144">
-                    <a:solidFill>
-                      <a:srgbClr val="1F4E79"/>
-                    </a:solidFill>
-                  </a:tcPr>
-                </a:tc>
-              </a:tr>
-              <a:tr h="329184">
-                <a:tc>
-                  <a:txBody>
-                    <a:bodyPr/>
-                    <a:lstStyle/>
-                    <a:p>
-                      <a:pPr algn="ctr"/>
-                      <a:r>
-                        <a:rPr sz="1600" b="0">
-                          <a:solidFill>
-                            <a:srgbClr val="202020"/>
-                          </a:solidFill>
-                          <a:latin typeface="Times New Roman"/>
-                        </a:rPr>
-                        <a:t>0.9817</a:t>
-                      </a:r>
-                    </a:p>
-                  </a:txBody>
-                  <a:tcPr marL="36576" marR="36576" marT="9144" marB="9144">
-                    <a:solidFill>
-                      <a:srgbClr val="FFFFFF"/>
-                    </a:solidFill>
-                  </a:tcPr>
-                </a:tc>
-              </a:tr>
-              <a:tr h="329184">
-                <a:tc>
-                  <a:txBody>
-                    <a:bodyPr/>
-                    <a:lstStyle/>
-                    <a:p>
-                      <a:pPr algn="ctr"/>
-                      <a:r>
-                        <a:rPr sz="1600" b="0">
-                          <a:solidFill>
-                            <a:srgbClr val="202020"/>
-                          </a:solidFill>
-                          <a:latin typeface="Times New Roman"/>
-                        </a:rPr>
-                        <a:t>0.0180</a:t>
-                      </a:r>
-                    </a:p>
-                  </a:txBody>
-                  <a:tcPr marL="36576" marR="36576" marT="9144" marB="9144">
-                    <a:solidFill>
-                      <a:srgbClr val="FFF3CD"/>
-                    </a:solidFill>
-                  </a:tcPr>
-                </a:tc>
-              </a:tr>
-              <a:tr h="329184">
-                <a:tc>
-                  <a:txBody>
-                    <a:bodyPr/>
-                    <a:lstStyle/>
-                    <a:p>
-                      <a:pPr algn="ctr"/>
-                      <a:r>
-                        <a:rPr sz="1600" b="0">
-                          <a:solidFill>
-                            <a:srgbClr val="202020"/>
-                          </a:solidFill>
-                          <a:latin typeface="Times New Roman"/>
-                        </a:rPr>
-                        <a:t>0.0003</a:t>
-                      </a:r>
-                    </a:p>
-                  </a:txBody>
-                  <a:tcPr marL="36576" marR="36576" marT="9144" marB="9144">
-                    <a:solidFill>
-                      <a:srgbClr val="FFF3CD"/>
-                    </a:solidFill>
-                  </a:tcPr>
-                </a:tc>
-              </a:tr>
-            </a:tbl>
-          </a:graphicData>
-        </a:graphic>
-      </p:graphicFrame>
-      <p:sp>
-        <p:nvSpPr>
-          <p:cNvPr id="14" name="Rectangle 13"/>
-          <p:cNvSpPr/>
-          <p:nvPr/>
-        </p:nvSpPr>
-        <p:spPr>
-          <a:xfrm>
-            <a:off x="731520" y="3931920"/>
-            <a:ext cx="10881360" cy="1051560"/>
-          </a:xfrm>
-          <a:prstGeom prst="rect">
-            <a:avLst/>
-          </a:prstGeom>
-          <a:solidFill>
-            <a:srgbClr val="FFF3CD"/>
-          </a:solidFill>
-          <a:ln>
-            <a:solidFill>
-              <a:srgbClr val="D0D7DE"/>
-            </a:solidFill>
-          </a:ln>
-          <a:effectLst/>
-        </p:spPr>
-        <p:style>
-          <a:lnRef idx="1">
-            <a:schemeClr val="accent1"/>
-          </a:lnRef>
-          <a:fillRef idx="3">
-            <a:schemeClr val="accent1"/>
-          </a:fillRef>
-          <a:effectRef idx="2">
-            <a:schemeClr val="accent1"/>
-          </a:effectRef>
-          <a:fontRef idx="minor">
-            <a:schemeClr val="lt1"/>
-          </a:fontRef>
-        </p:style>
-        <p:txBody>
-          <a:bodyPr rtlCol="0" anchor="ctr" wrap="square"/>
-          <a:lstStyle/>
-          <a:p>
-            <a:pPr algn="l"/>
-            <a:r>
-              <a:rPr sz="1700" b="1">
-                <a:solidFill>
-                  <a:srgbClr val="C03030"/>
-                </a:solidFill>
-                <a:latin typeface="Times New Roman"/>
-              </a:rPr>
-              <a:t>The probabilities of 3 and 7 are 0.0180 and 0.0003. The information that this 2 resembles a 3 more than a 7</a:t>
-            </a:r>
-          </a:p>
-          <a:p>
-            <a:pPr algn="l"/>
-            <a:r>
-              <a:rPr sz="1700" b="1">
-                <a:solidFill>
-                  <a:srgbClr val="C03030"/>
-                </a:solidFill>
-                <a:latin typeface="Times New Roman"/>
-              </a:rPr>
-              <a:t>is present, but it has very little influence on the cross-entropy cost function.</a:t>
-            </a:r>
-          </a:p>
-        </p:txBody>
-      </p:sp>
-      <p:sp>
-        <p:nvSpPr>
-          <p:cNvPr id="15" name="TextBox 14"/>
-          <p:cNvSpPr txBox="1"/>
-          <p:nvPr/>
-        </p:nvSpPr>
-        <p:spPr>
-          <a:xfrm>
-            <a:off x="731520" y="5166360"/>
-            <a:ext cx="10881360" cy="914400"/>
-          </a:xfrm>
-          <a:prstGeom prst="rect">
-            <a:avLst/>
-          </a:prstGeom>
-          <a:noFill/>
-        </p:spPr>
-        <p:txBody>
-          <a:bodyPr wrap="square">
-            <a:spAutoFit/>
-          </a:bodyPr>
-          <a:lstStyle/>
-          <a:p>
-            <a:r>
-              <a:rPr sz="1600" b="0" i="0">
-                <a:solidFill>
-                  <a:srgbClr val="59636E"/>
-                </a:solidFill>
-                <a:latin typeface="Times New Roman"/>
-              </a:rPr>
-              <a:t>Check: exp(8) = 2980.9580, exp(4) = 54.5982, and exp(0) = 1, which sum to 3036.5561.</a:t>
-            </a:r>
-          </a:p>
-        </p:txBody>
-      </p:sp>
-    </p:spTree>
-  </p:cSld>
-  <p:clrMapOvr>
-    <a:masterClrMapping/>
-  </p:clrMapOvr>
-  <p:timing>
-    <p:tnLst>
-      <p:par>
-        <p:cTn id="1" dur="indefinite" restart="never" nodeType="tmRoot">
-          <p:childTnLst>
-            <p:seq concurrent="1" nextAc="seek">
-              <p:cTn id="2" dur="indefinite" nodeType="mainSeq">
-                <p:childTnLst>
-                  <p:par>
-                    <p:cTn id="3" fill="hold">
-                      <p:stCondLst>
-                        <p:cond delay="indefinite"/>
-                      </p:stCondLst>
-                      <p:childTnLst>
-                        <p:par>
-                          <p:cTn id="4" fill="hold">
-                            <p:stCondLst>
-                              <p:cond delay="0"/>
-                            </p:stCondLst>
-                            <p:childTnLst>
-                              <p:par>
-                                <p:cTn id="5" presetID="1" presetClass="entr" presetSubtype="0" fill="hold" grpId="0" nodeType="clickEffect">
-                                  <p:stCondLst>
-                                    <p:cond delay="0"/>
-                                  </p:stCondLst>
-                                  <p:childTnLst>
-                                    <p:set>
-                                      <p:cBhvr>
-                                        <p:cTn id="6" dur="1" fill="hold">
-                                          <p:stCondLst>
-                                            <p:cond delay="0"/>
-                                          </p:stCondLst>
-                                        </p:cTn>
-                                        <p:tgtEl>
-                                          <p:spTgt spid="6"/>
-                                        </p:tgtEl>
-                                        <p:attrNameLst>
-                                          <p:attrName>style.visibility</p:attrName>
-                                        </p:attrNameLst>
-                                      </p:cBhvr>
-                                      <p:to>
-                                        <p:strVal val="visible"/>
-                                      </p:to>
-                                    </p:set>
-                                  </p:childTnLst>
-                                </p:cTn>
-                              </p:par>
-                            </p:childTnLst>
-                          </p:cTn>
-                        </p:par>
-                      </p:childTnLst>
-                    </p:cTn>
-                  </p:par>
-                  <p:par>
-                    <p:cTn id="7" fill="hold">
-                      <p:stCondLst>
-                        <p:cond delay="indefinite"/>
-                      </p:stCondLst>
-                      <p:childTnLst>
-                        <p:par>
-                          <p:cTn id="8" fill="hold">
-                            <p:stCondLst>
-                              <p:cond delay="0"/>
-                            </p:stCondLst>
-                            <p:childTnLst>
-                              <p:par>
-                                <p:cTn id="9" presetID="1" presetClass="entr" presetSubtype="0" fill="hold" grpId="0" nodeType="clickEffect">
-                                  <p:stCondLst>
-                                    <p:cond delay="0"/>
-                                  </p:stCondLst>
-                                  <p:childTnLst>
-                                    <p:set>
-                                      <p:cBhvr>
-                                        <p:cTn id="10" dur="1" fill="hold">
-                                          <p:stCondLst>
-                                            <p:cond delay="0"/>
-                                          </p:stCondLst>
-                                        </p:cTn>
-                                        <p:tgtEl>
-                                          <p:spTgt spid="7"/>
-                                        </p:tgtEl>
-                                        <p:attrNameLst>
-                                          <p:attrName>style.visibility</p:attrName>
-                                        </p:attrNameLst>
-                                      </p:cBhvr>
-                                      <p:to>
-                                        <p:strVal val="visible"/>
-                                      </p:to>
-                                    </p:set>
-                                  </p:childTnLst>
-                                </p:cTn>
-                              </p:par>
-                            </p:childTnLst>
-                          </p:cTn>
-                        </p:par>
-                      </p:childTnLst>
-                    </p:cTn>
-                  </p:par>
-                  <p:par>
-                    <p:cTn id="11" fill="hold">
-                      <p:stCondLst>
-                        <p:cond delay="indefinite"/>
-                      </p:stCondLst>
-                      <p:childTnLst>
-                        <p:par>
-                          <p:cTn id="12" fill="hold">
-                            <p:stCondLst>
-                              <p:cond delay="0"/>
-                            </p:stCondLst>
-                            <p:childTnLst>
-                              <p:par>
-                                <p:cTn id="13" presetID="1" presetClass="entr" presetSubtype="0" fill="hold" grpId="0" nodeType="clickEffect">
-                                  <p:stCondLst>
-                                    <p:cond delay="0"/>
-                                  </p:stCondLst>
-                                  <p:childTnLst>
-                                    <p:set>
-                                      <p:cBhvr>
-                                        <p:cTn id="14" dur="1" fill="hold">
-                                          <p:stCondLst>
-                                            <p:cond delay="0"/>
-                                          </p:stCondLst>
-                                        </p:cTn>
-                                        <p:tgtEl>
-                                          <p:spTgt spid="8"/>
-                                        </p:tgtEl>
-                                        <p:attrNameLst>
-                                          <p:attrName>style.visibility</p:attrName>
-                                        </p:attrNameLst>
-                                      </p:cBhvr>
-                                      <p:to>
-                                        <p:strVal val="visible"/>
-                                      </p:to>
-                                    </p:set>
-                                  </p:childTnLst>
-                                </p:cTn>
-                              </p:par>
-                            </p:childTnLst>
-                          </p:cTn>
-                        </p:par>
-                      </p:childTnLst>
-                    </p:cTn>
-                  </p:par>
-                  <p:par>
-                    <p:cTn id="15" fill="hold">
-                      <p:stCondLst>
-                        <p:cond delay="indefinite"/>
-                      </p:stCondLst>
-                      <p:childTnLst>
-                        <p:par>
-                          <p:cTn id="16" fill="hold">
-                            <p:stCondLst>
-                              <p:cond delay="0"/>
-                            </p:stCondLst>
-                            <p:childTnLst>
-                              <p:par>
-                                <p:cTn id="17" presetID="1" presetClass="entr" presetSubtype="0" fill="hold" grpId="0" nodeType="clickEffect">
-                                  <p:stCondLst>
-                                    <p:cond delay="0"/>
-                                  </p:stCondLst>
-                                  <p:childTnLst>
-                                    <p:set>
-                                      <p:cBhvr>
-                                        <p:cTn id="18" dur="1" fill="hold">
-                                          <p:stCondLst>
-                                            <p:cond delay="0"/>
-                                          </p:stCondLst>
-                                        </p:cTn>
-                                        <p:tgtEl>
-                                          <p:spTgt spid="9"/>
-                                        </p:tgtEl>
-                                        <p:attrNameLst>
-                                          <p:attrName>style.visibility</p:attrName>
-                                        </p:attrNameLst>
-                                      </p:cBhvr>
-                                      <p:to>
-                                        <p:strVal val="visible"/>
-                                      </p:to>
-                                    </p:set>
-                                  </p:childTnLst>
-                                </p:cTn>
-                              </p:par>
-                            </p:childTnLst>
-                          </p:cTn>
-                        </p:par>
-                      </p:childTnLst>
-                    </p:cTn>
-                  </p:par>
-                  <p:par>
-                    <p:cTn id="19" fill="hold">
-                      <p:stCondLst>
-                        <p:cond delay="indefinite"/>
-                      </p:stCondLst>
-                      <p:childTnLst>
-                        <p:par>
-                          <p:cTn id="20" fill="hold">
-                            <p:stCondLst>
-                              <p:cond delay="0"/>
-                            </p:stCondLst>
-                            <p:childTnLst>
-                              <p:par>
-                                <p:cTn id="21" presetID="1" presetClass="entr" presetSubtype="0" fill="hold" grpId="0" nodeType="clickEffect">
-                                  <p:stCondLst>
-                                    <p:cond delay="0"/>
-                                  </p:stCondLst>
-                                  <p:childTnLst>
-                                    <p:set>
-                                      <p:cBhvr>
-                                        <p:cTn id="22" dur="1" fill="hold">
-                                          <p:stCondLst>
-                                            <p:cond delay="0"/>
-                                          </p:stCondLst>
-                                        </p:cTn>
-                                        <p:tgtEl>
-                                          <p:spTgt spid="10"/>
-                                        </p:tgtEl>
-                                        <p:attrNameLst>
-                                          <p:attrName>style.visibility</p:attrName>
-                                        </p:attrNameLst>
-                                      </p:cBhvr>
-                                      <p:to>
-                                        <p:strVal val="visible"/>
-                                      </p:to>
-                                    </p:set>
-                                  </p:childTnLst>
-                                </p:cTn>
-                              </p:par>
-                            </p:childTnLst>
-                          </p:cTn>
-                        </p:par>
-                      </p:childTnLst>
-                    </p:cTn>
-                  </p:par>
-                  <p:par>
-                    <p:cTn id="23" fill="hold">
-                      <p:stCondLst>
-                        <p:cond delay="indefinite"/>
-                      </p:stCondLst>
-                      <p:childTnLst>
-                        <p:par>
-                          <p:cTn id="24" fill="hold">
-                            <p:stCondLst>
-                              <p:cond delay="0"/>
-                            </p:stCondLst>
-                            <p:childTnLst>
-                              <p:par>
-                                <p:cTn id="25" presetID="1" presetClass="entr" presetSubtype="0" fill="hold" grpId="0" nodeType="clickEffect">
-                                  <p:stCondLst>
-                                    <p:cond delay="0"/>
-                                  </p:stCondLst>
-                                  <p:childTnLst>
-                                    <p:set>
-                                      <p:cBhvr>
-                                        <p:cTn id="26" dur="1" fill="hold">
-                                          <p:stCondLst>
-                                            <p:cond delay="0"/>
-                                          </p:stCondLst>
-                                        </p:cTn>
-                                        <p:tgtEl>
-                                          <p:spTgt spid="11"/>
-                                        </p:tgtEl>
-                                        <p:attrNameLst>
-                                          <p:attrName>style.visibility</p:attrName>
-                                        </p:attrNameLst>
-                                      </p:cBhvr>
-                                      <p:to>
-                                        <p:strVal val="visible"/>
-                                      </p:to>
-                                    </p:set>
-                                  </p:childTnLst>
-                                </p:cTn>
-                              </p:par>
-                            </p:childTnLst>
-                          </p:cTn>
-                        </p:par>
-                      </p:childTnLst>
-                    </p:cTn>
-                  </p:par>
-                  <p:par>
-                    <p:cTn id="27" fill="hold">
-                      <p:stCondLst>
-                        <p:cond delay="indefinite"/>
-                      </p:stCondLst>
-                      <p:childTnLst>
-                        <p:par>
-                          <p:cTn id="28" fill="hold">
-                            <p:stCondLst>
-                              <p:cond delay="0"/>
-                            </p:stCondLst>
-                            <p:childTnLst>
-                              <p:par>
-                                <p:cTn id="29" presetID="1" presetClass="entr" presetSubtype="0" fill="hold" grpId="0" nodeType="clickEffect">
-                                  <p:stCondLst>
-                                    <p:cond delay="0"/>
-                                  </p:stCondLst>
-                                  <p:childTnLst>
-                                    <p:set>
-                                      <p:cBhvr>
-                                        <p:cTn id="30" dur="1" fill="hold">
-                                          <p:stCondLst>
-                                            <p:cond delay="0"/>
-                                          </p:stCondLst>
-                                        </p:cTn>
-                                        <p:tgtEl>
-                                          <p:spTgt spid="12"/>
-                                        </p:tgtEl>
-                                        <p:attrNameLst>
-                                          <p:attrName>style.visibility</p:attrName>
-                                        </p:attrNameLst>
-                                      </p:cBhvr>
-                                      <p:to>
-                                        <p:strVal val="visible"/>
-                                      </p:to>
-                                    </p:set>
-                                  </p:childTnLst>
-                                </p:cTn>
-                              </p:par>
-                            </p:childTnLst>
-                          </p:cTn>
-                        </p:par>
-                      </p:childTnLst>
-                    </p:cTn>
-                  </p:par>
-                  <p:par>
-                    <p:cTn id="31" fill="hold">
-                      <p:stCondLst>
-                        <p:cond delay="indefinite"/>
-                      </p:stCondLst>
-                      <p:childTnLst>
-                        <p:par>
-                          <p:cTn id="32" fill="hold">
-                            <p:stCondLst>
-                              <p:cond delay="0"/>
-                            </p:stCondLst>
-                            <p:childTnLst>
-                              <p:par>
-                                <p:cTn id="33" presetID="1" presetClass="entr" presetSubtype="0" fill="hold" grpId="0" nodeType="clickEffect">
-                                  <p:stCondLst>
-                                    <p:cond delay="0"/>
-                                  </p:stCondLst>
-                                  <p:childTnLst>
-                                    <p:set>
-                                      <p:cBhvr>
-                                        <p:cTn id="34" dur="1" fill="hold">
-                                          <p:stCondLst>
-                                            <p:cond delay="0"/>
-                                          </p:stCondLst>
-                                        </p:cTn>
-                                        <p:tgtEl>
-                                          <p:spTgt spid="13"/>
-                                        </p:tgtEl>
-                                        <p:attrNameLst>
-                                          <p:attrName>style.visibility</p:attrName>
-                                        </p:attrNameLst>
-                                      </p:cBhvr>
-                                      <p:to>
-                                        <p:strVal val="visible"/>
-                                      </p:to>
-                                    </p:set>
-                                  </p:childTnLst>
-                                </p:cTn>
-                              </p:par>
-                            </p:childTnLst>
-                          </p:cTn>
-                        </p:par>
-                      </p:childTnLst>
-                    </p:cTn>
-                  </p:par>
-                  <p:par>
-                    <p:cTn id="35" fill="hold">
-                      <p:stCondLst>
-                        <p:cond delay="indefinite"/>
-                      </p:stCondLst>
-                      <p:childTnLst>
-                        <p:par>
-                          <p:cTn id="36" fill="hold">
-                            <p:stCondLst>
-                              <p:cond delay="0"/>
-                            </p:stCondLst>
-                            <p:childTnLst>
-                              <p:par>
-                                <p:cTn id="37" presetID="1" presetClass="entr" presetSubtype="0" fill="hold" grpId="0" nodeType="clickEffect">
-                                  <p:stCondLst>
-                                    <p:cond delay="0"/>
-                                  </p:stCondLst>
-                                  <p:childTnLst>
-                                    <p:set>
-                                      <p:cBhvr>
-                                        <p:cTn id="38" dur="1" fill="hold">
-                                          <p:stCondLst>
-                                            <p:cond delay="0"/>
-                                          </p:stCondLst>
-                                        </p:cTn>
-                                        <p:tgtEl>
-                                          <p:spTgt spid="14"/>
-                                        </p:tgtEl>
-                                        <p:attrNameLst>
-                                          <p:attrName>style.visibility</p:attrName>
-                                        </p:attrNameLst>
-                                      </p:cBhvr>
-                                      <p:to>
-                                        <p:strVal val="visible"/>
-                                      </p:to>
-                                    </p:set>
-                                  </p:childTnLst>
-                                </p:cTn>
-                              </p:par>
-                            </p:childTnLst>
-                          </p:cTn>
-                        </p:par>
-                      </p:childTnLst>
-                    </p:cTn>
-                  </p:par>
-                  <p:par>
-                    <p:cTn id="39" fill="hold">
-                      <p:stCondLst>
-                        <p:cond delay="indefinite"/>
-                      </p:stCondLst>
-                      <p:childTnLst>
-                        <p:par>
-                          <p:cTn id="40" fill="hold">
-                            <p:stCondLst>
-                              <p:cond delay="0"/>
-                            </p:stCondLst>
-                            <p:childTnLst>
-                              <p:par>
-                                <p:cTn id="41" presetID="1" presetClass="entr" presetSubtype="0" fill="hold" grpId="0" nodeType="clickEffect">
-                                  <p:stCondLst>
-                                    <p:cond delay="0"/>
-                                  </p:stCondLst>
-                                  <p:childTnLst>
-                                    <p:set>
-                                      <p:cBhvr>
-                                        <p:cTn id="42" dur="1" fill="hold">
-                                          <p:stCondLst>
-                                            <p:cond delay="0"/>
-                                          </p:stCondLst>
-                                        </p:cTn>
-                                        <p:tgtEl>
-                                          <p:spTgt spid="15"/>
-                                        </p:tgtEl>
-                                        <p:attrNameLst>
-                                          <p:attrName>style.visibility</p:attrName>
-                                        </p:attrNameLst>
-                                      </p:cBhvr>
-                                      <p:to>
-                                        <p:strVal val="visible"/>
-                                      </p:to>
-                                    </p:set>
-                                  </p:childTnLst>
-                                </p:cTn>
-                              </p:par>
-                            </p:childTnLst>
-                          </p:cTn>
-                        </p:par>
-                      </p:childTnLst>
-                    </p:cTn>
-                  </p:par>
-                </p:childTnLst>
-              </p:cTn>
-              <p:prevCondLst>
-                <p:cond evt="onPrev" delay="0">
-                  <p:tgtEl>
-                    <p:sldTgt/>
-                  </p:tgtEl>
-                </p:cond>
-              </p:prevCondLst>
-              <p:nextCondLst>
-                <p:cond evt="onNext" delay="0">
-                  <p:tgtEl>
-                    <p:sldTgt/>
-                  </p:tgtEl>
-                </p:cond>
-              </p:nextCondLst>
-            </p:seq>
-          </p:childTnLst>
-        </p:cTn>
-      </p:par>
-    </p:tnLst>
-    <p:bldLst>
-      <p:bldP spid="6" grpId="0" animBg="1"/>
-      <p:bldP spid="7" grpId="0" animBg="1"/>
-      <p:bldGraphic spid="8" grpId="0">
-        <p:bldAsOne/>
-      </p:bldGraphic>
-      <p:bldGraphic spid="9" grpId="0">
-        <p:bldAsOne/>
-      </p:bldGraphic>
-      <p:bldGraphic spid="10" grpId="0">
-        <p:bldAsOne/>
-      </p:bldGraphic>
-      <p:bldGraphic spid="11" grpId="0">
-        <p:bldAsOne/>
-      </p:bldGraphic>
-      <p:bldP spid="12" grpId="0" animBg="1"/>
-      <p:bldGraphic spid="13" grpId="0">
-        <p:bldAsOne/>
-      </p:bldGraphic>
-      <p:bldP spid="14" grpId="0" animBg="1"/>
-      <p:bldP spid="15" grpId="0" animBg="1"/>
-    </p:bldLst>
-  </p:timing>
-</p:sld>
-</file>
-
 <file path=ppt/slides/slide7.xml><?xml version="1.0" encoding="utf-8"?>
 <p:sld xmlns:a="http://schemas.openxmlformats.org/drawingml/2006/main" xmlns:p="http://schemas.openxmlformats.org/presentationml/2006/main" xmlns:r="http://schemas.openxmlformats.org/officeDocument/2006/relationships">
   <p:cSld>
@@ -22715,7 +22404,7 @@
                 </a:solidFill>
                 <a:latin typeface="Times New Roman"/>
               </a:rPr>
-              <a:t>2. Softmax with a temperature: T = 4</a:t>
+              <a:t>2. Softmax with a temperature: T = 1</a:t>
             </a:r>
           </a:p>
         </p:txBody>
@@ -22749,7 +22438,7 @@
                 </a:solidFill>
                 <a:latin typeface="Times New Roman"/>
               </a:rPr>
-              <a:t>The same logits of the cumbersome model at a higher temperature</a:t>
+              <a:t>Eq. 1 of the paper; T is normally set to 1</a:t>
             </a:r>
           </a:p>
         </p:txBody>
@@ -22807,7 +22496,7 @@
                 </a:solidFill>
                 <a:latin typeface="Times New Roman"/>
               </a:rPr>
-              <a:t>Using a higher value for T produces a softer probability distribution over classes: Step 1 reduces the differences between the logits by a factor of 4.</a:t>
+              <a:t>The softmax converts the logit z_i computed for each class into a probability q_i by comparing z_i with the other logits; T is a temperature.</a:t>
             </a:r>
           </a:p>
         </p:txBody>
@@ -23122,7 +22811,7 @@
                           </a:solidFill>
                           <a:latin typeface="Times New Roman"/>
                         </a:rPr>
-                        <a:t>2.0000</a:t>
+                        <a:t>8.0000</a:t>
                       </a:r>
                     </a:p>
                   </a:txBody>
@@ -23147,7 +22836,7 @@
                           </a:solidFill>
                           <a:latin typeface="Times New Roman"/>
                         </a:rPr>
-                        <a:t>1.0000</a:t>
+                        <a:t>4.0000</a:t>
                       </a:r>
                     </a:p>
                   </a:txBody>
@@ -23247,7 +22936,7 @@
                           </a:solidFill>
                           <a:latin typeface="Times New Roman"/>
                         </a:rPr>
-                        <a:t>7.3891</a:t>
+                        <a:t>2980.9580</a:t>
                       </a:r>
                     </a:p>
                   </a:txBody>
@@ -23272,7 +22961,7 @@
                           </a:solidFill>
                           <a:latin typeface="Times New Roman"/>
                         </a:rPr>
-                        <a:t>2.7183</a:t>
+                        <a:t>54.5982</a:t>
                       </a:r>
                     </a:p>
                   </a:txBody>
@@ -23374,7 +23063,7 @@
                 </a:solidFill>
                 <a:latin typeface="Times New Roman"/>
               </a:rPr>
-              <a:t>11.1073</a:t>
+              <a:t>3036.5561</a:t>
             </a:r>
           </a:p>
         </p:txBody>
@@ -23439,7 +23128,7 @@
                           </a:solidFill>
                           <a:latin typeface="Times New Roman"/>
                         </a:rPr>
-                        <a:t>0.6652</a:t>
+                        <a:t>0.9817</a:t>
                       </a:r>
                     </a:p>
                   </a:txBody>
@@ -23464,7 +23153,7 @@
                           </a:solidFill>
                           <a:latin typeface="Times New Roman"/>
                         </a:rPr>
-                        <a:t>0.2447</a:t>
+                        <a:t>0.0180</a:t>
                       </a:r>
                     </a:p>
                   </a:txBody>
@@ -23489,7 +23178,7 @@
                           </a:solidFill>
                           <a:latin typeface="Times New Roman"/>
                         </a:rPr>
-                        <a:t>0.0900</a:t>
+                        <a:t>0.0003</a:t>
                       </a:r>
                     </a:p>
                   </a:txBody>
@@ -23519,7 +23208,7 @@
             <a:avLst/>
           </a:prstGeom>
           <a:solidFill>
-            <a:srgbClr val="DCF0E4"/>
+            <a:srgbClr val="FFF3CD"/>
           </a:solidFill>
           <a:ln>
             <a:solidFill>
@@ -23550,11 +23239,11 @@
             <a:r>
               <a:rPr sz="1700" b="1">
                 <a:solidFill>
-                  <a:srgbClr val="1E7A45"/>
+                  <a:srgbClr val="C03030"/>
                 </a:solidFill>
                 <a:latin typeface="Times New Roman"/>
               </a:rPr>
-              <a:t>The probabilities of 3 and 7 become 0.2447 and 0.0900.</a:t>
+              <a:t>The probabilities of 3 and 7 are 0.0180 and 0.0003. The information that this 2 resembles a 3 more than a 7</a:t>
             </a:r>
           </a:p>
           <a:p>
@@ -23562,11 +23251,11 @@
             <a:r>
               <a:rPr sz="1700" b="1">
                 <a:solidFill>
-                  <a:srgbClr val="1E7A45"/>
+                  <a:srgbClr val="C03030"/>
                 </a:solidFill>
                 <a:latin typeface="Times New Roman"/>
               </a:rPr>
-              <a:t>At this temperature, the relative probabilities of the incorrect classes are large enough to influence learning.</a:t>
+              <a:t>is present, but it has very little influence on the cross-entropy cost function.</a:t>
             </a:r>
           </a:p>
         </p:txBody>
@@ -23600,7 +23289,7 @@
                 </a:solidFill>
                 <a:latin typeface="Times New Roman"/>
               </a:rPr>
-              <a:t>Check: exp(2) = 7.3891, exp(1) = 2.7183, and exp(0) = 1, which sum to 11.1073.</a:t>
+              <a:t>Check: exp(8) = 2980.9580, exp(4) = 54.5982, and exp(0) = 1, which sum to 3036.5561.</a:t>
             </a:r>
           </a:p>
         </p:txBody>
@@ -24242,7 +23931,7 @@
                 </a:solidFill>
                 <a:latin typeface="Times New Roman"/>
               </a:rPr>
-              <a:t>2. Soft targets and hard targets</a:t>
+              <a:t>2. Softmax with a temperature: T = 4</a:t>
             </a:r>
           </a:p>
         </p:txBody>
@@ -24276,14 +23965,14 @@
                 </a:solidFill>
                 <a:latin typeface="Times New Roman"/>
               </a:rPr>
-              <a:t>The same 2 at two temperatures</a:t>
+              <a:t>The same logits of the cumbersome model at a higher temperature</a:t>
             </a:r>
           </a:p>
         </p:txBody>
       </p:sp>
       <p:pic>
         <p:nvPicPr>
-          <p:cNvPr id="6" name="Picture 5" descr="f_soft.png"/>
+          <p:cNvPr id="6" name="Picture 5" descr="m_softmax.png"/>
           <p:cNvPicPr>
             <a:picLocks noChangeAspect="1"/>
           </p:cNvPicPr>
@@ -24297,335 +23986,24 @@
         </p:blipFill>
         <p:spPr>
           <a:xfrm>
-            <a:off x="548640" y="1051560"/>
-            <a:ext cx="6400800" cy="2578100"/>
+            <a:off x="822960" y="1051560"/>
+            <a:ext cx="1834822" cy="868680"/>
           </a:xfrm>
           <a:prstGeom prst="rect">
             <a:avLst/>
           </a:prstGeom>
         </p:spPr>
       </p:pic>
-      <p:graphicFrame>
-        <p:nvGraphicFramePr>
-          <p:cNvPr id="7" name="Table 6"/>
-          <p:cNvGraphicFramePr>
-            <a:graphicFrameLocks noGrp="1"/>
-          </p:cNvGraphicFramePr>
-          <p:nvPr/>
-        </p:nvGraphicFramePr>
-        <p:xfrm>
-          <a:off x="7223760" y="1143000"/>
-          <a:ext cx="4480558" cy="1316736"/>
-        </p:xfrm>
-        <a:graphic>
-          <a:graphicData uri="http://schemas.openxmlformats.org/drawingml/2006/table">
-            <a:tbl>
-              <a:tblPr bandRow="1">
-                <a:tableStyleId>{5C22544A-7EE6-4342-B048-85BDC9FD1C3A}</a:tableStyleId>
-              </a:tblPr>
-              <a:tblGrid>
-                <a:gridCol w="1650732"/>
-                <a:gridCol w="1414913"/>
-                <a:gridCol w="1414913"/>
-              </a:tblGrid>
-              <a:tr h="329184">
-                <a:tc>
-                  <a:txBody>
-                    <a:bodyPr/>
-                    <a:lstStyle/>
-                    <a:p>
-                      <a:pPr algn="ctr"/>
-                      <a:r>
-                        <a:rPr sz="1600" b="1">
-                          <a:solidFill>
-                            <a:srgbClr val="FFFFFF"/>
-                          </a:solidFill>
-                          <a:latin typeface="Times New Roman"/>
-                        </a:rPr>
-                        <a:t/>
-                      </a:r>
-                    </a:p>
-                  </a:txBody>
-                  <a:tcPr marL="36576" marR="36576" marT="9144" marB="9144">
-                    <a:solidFill>
-                      <a:srgbClr val="1F4E79"/>
-                    </a:solidFill>
-                  </a:tcPr>
-                </a:tc>
-                <a:tc>
-                  <a:txBody>
-                    <a:bodyPr/>
-                    <a:lstStyle/>
-                    <a:p>
-                      <a:pPr algn="ctr"/>
-                      <a:r>
-                        <a:rPr sz="1600" b="1">
-                          <a:solidFill>
-                            <a:srgbClr val="FFFFFF"/>
-                          </a:solidFill>
-                          <a:latin typeface="Times New Roman"/>
-                        </a:rPr>
-                        <a:t>T = 1</a:t>
-                      </a:r>
-                    </a:p>
-                  </a:txBody>
-                  <a:tcPr marL="36576" marR="36576" marT="9144" marB="9144">
-                    <a:solidFill>
-                      <a:srgbClr val="1F4E79"/>
-                    </a:solidFill>
-                  </a:tcPr>
-                </a:tc>
-                <a:tc>
-                  <a:txBody>
-                    <a:bodyPr/>
-                    <a:lstStyle/>
-                    <a:p>
-                      <a:pPr algn="ctr"/>
-                      <a:r>
-                        <a:rPr sz="1600" b="1">
-                          <a:solidFill>
-                            <a:srgbClr val="FFFFFF"/>
-                          </a:solidFill>
-                          <a:latin typeface="Times New Roman"/>
-                        </a:rPr>
-                        <a:t>T = 4</a:t>
-                      </a:r>
-                    </a:p>
-                  </a:txBody>
-                  <a:tcPr marL="36576" marR="36576" marT="9144" marB="9144">
-                    <a:solidFill>
-                      <a:srgbClr val="1F4E79"/>
-                    </a:solidFill>
-                  </a:tcPr>
-                </a:tc>
-              </a:tr>
-              <a:tr h="329184">
-                <a:tc>
-                  <a:txBody>
-                    <a:bodyPr/>
-                    <a:lstStyle/>
-                    <a:p>
-                      <a:pPr algn="ctr"/>
-                      <a:r>
-                        <a:rPr sz="1600" b="0">
-                          <a:solidFill>
-                            <a:srgbClr val="202020"/>
-                          </a:solidFill>
-                          <a:latin typeface="Times New Roman"/>
-                        </a:rPr>
-                        <a:t>P(3)</a:t>
-                      </a:r>
-                    </a:p>
-                  </a:txBody>
-                  <a:tcPr marL="36576" marR="36576" marT="9144" marB="9144">
-                    <a:solidFill>
-                      <a:srgbClr val="FFFFFF"/>
-                    </a:solidFill>
-                  </a:tcPr>
-                </a:tc>
-                <a:tc>
-                  <a:txBody>
-                    <a:bodyPr/>
-                    <a:lstStyle/>
-                    <a:p>
-                      <a:pPr algn="ctr"/>
-                      <a:r>
-                        <a:rPr sz="1600" b="0">
-                          <a:solidFill>
-                            <a:srgbClr val="202020"/>
-                          </a:solidFill>
-                          <a:latin typeface="Times New Roman"/>
-                        </a:rPr>
-                        <a:t>0.0180</a:t>
-                      </a:r>
-                    </a:p>
-                  </a:txBody>
-                  <a:tcPr marL="36576" marR="36576" marT="9144" marB="9144">
-                    <a:solidFill>
-                      <a:srgbClr val="FFFFFF"/>
-                    </a:solidFill>
-                  </a:tcPr>
-                </a:tc>
-                <a:tc>
-                  <a:txBody>
-                    <a:bodyPr/>
-                    <a:lstStyle/>
-                    <a:p>
-                      <a:pPr algn="ctr"/>
-                      <a:r>
-                        <a:rPr sz="1600" b="0">
-                          <a:solidFill>
-                            <a:srgbClr val="202020"/>
-                          </a:solidFill>
-                          <a:latin typeface="Times New Roman"/>
-                        </a:rPr>
-                        <a:t>0.2447</a:t>
-                      </a:r>
-                    </a:p>
-                  </a:txBody>
-                  <a:tcPr marL="36576" marR="36576" marT="9144" marB="9144">
-                    <a:solidFill>
-                      <a:srgbClr val="FFFFFF"/>
-                    </a:solidFill>
-                  </a:tcPr>
-                </a:tc>
-              </a:tr>
-              <a:tr h="329184">
-                <a:tc>
-                  <a:txBody>
-                    <a:bodyPr/>
-                    <a:lstStyle/>
-                    <a:p>
-                      <a:pPr algn="ctr"/>
-                      <a:r>
-                        <a:rPr sz="1600" b="0">
-                          <a:solidFill>
-                            <a:srgbClr val="202020"/>
-                          </a:solidFill>
-                          <a:latin typeface="Times New Roman"/>
-                        </a:rPr>
-                        <a:t>P(7)</a:t>
-                      </a:r>
-                    </a:p>
-                  </a:txBody>
-                  <a:tcPr marL="36576" marR="36576" marT="9144" marB="9144">
-                    <a:solidFill>
-                      <a:srgbClr val="FFFFFF"/>
-                    </a:solidFill>
-                  </a:tcPr>
-                </a:tc>
-                <a:tc>
-                  <a:txBody>
-                    <a:bodyPr/>
-                    <a:lstStyle/>
-                    <a:p>
-                      <a:pPr algn="ctr"/>
-                      <a:r>
-                        <a:rPr sz="1600" b="0">
-                          <a:solidFill>
-                            <a:srgbClr val="202020"/>
-                          </a:solidFill>
-                          <a:latin typeface="Times New Roman"/>
-                        </a:rPr>
-                        <a:t>0.0003</a:t>
-                      </a:r>
-                    </a:p>
-                  </a:txBody>
-                  <a:tcPr marL="36576" marR="36576" marT="9144" marB="9144">
-                    <a:solidFill>
-                      <a:srgbClr val="FFFFFF"/>
-                    </a:solidFill>
-                  </a:tcPr>
-                </a:tc>
-                <a:tc>
-                  <a:txBody>
-                    <a:bodyPr/>
-                    <a:lstStyle/>
-                    <a:p>
-                      <a:pPr algn="ctr"/>
-                      <a:r>
-                        <a:rPr sz="1600" b="0">
-                          <a:solidFill>
-                            <a:srgbClr val="202020"/>
-                          </a:solidFill>
-                          <a:latin typeface="Times New Roman"/>
-                        </a:rPr>
-                        <a:t>0.0900</a:t>
-                      </a:r>
-                    </a:p>
-                  </a:txBody>
-                  <a:tcPr marL="36576" marR="36576" marT="9144" marB="9144">
-                    <a:solidFill>
-                      <a:srgbClr val="FFFFFF"/>
-                    </a:solidFill>
-                  </a:tcPr>
-                </a:tc>
-              </a:tr>
-              <a:tr h="329184">
-                <a:tc>
-                  <a:txBody>
-                    <a:bodyPr/>
-                    <a:lstStyle/>
-                    <a:p>
-                      <a:pPr algn="ctr"/>
-                      <a:r>
-                        <a:rPr sz="1600" b="0">
-                          <a:solidFill>
-                            <a:srgbClr val="202020"/>
-                          </a:solidFill>
-                          <a:latin typeface="Times New Roman"/>
-                        </a:rPr>
-                        <a:t>P(3) / P(7)</a:t>
-                      </a:r>
-                    </a:p>
-                  </a:txBody>
-                  <a:tcPr marL="36576" marR="36576" marT="9144" marB="9144">
-                    <a:solidFill>
-                      <a:srgbClr val="FFFFFF"/>
-                    </a:solidFill>
-                  </a:tcPr>
-                </a:tc>
-                <a:tc>
-                  <a:txBody>
-                    <a:bodyPr/>
-                    <a:lstStyle/>
-                    <a:p>
-                      <a:pPr algn="ctr"/>
-                      <a:r>
-                        <a:rPr sz="1600" b="0">
-                          <a:solidFill>
-                            <a:srgbClr val="202020"/>
-                          </a:solidFill>
-                          <a:latin typeface="Times New Roman"/>
-                        </a:rPr>
-                        <a:t>54.60</a:t>
-                      </a:r>
-                    </a:p>
-                  </a:txBody>
-                  <a:tcPr marL="36576" marR="36576" marT="9144" marB="9144">
-                    <a:solidFill>
-                      <a:srgbClr val="FFF3CD"/>
-                    </a:solidFill>
-                  </a:tcPr>
-                </a:tc>
-                <a:tc>
-                  <a:txBody>
-                    <a:bodyPr/>
-                    <a:lstStyle/>
-                    <a:p>
-                      <a:pPr algn="ctr"/>
-                      <a:r>
-                        <a:rPr sz="1600" b="0">
-                          <a:solidFill>
-                            <a:srgbClr val="202020"/>
-                          </a:solidFill>
-                          <a:latin typeface="Times New Roman"/>
-                        </a:rPr>
-                        <a:t>2.72</a:t>
-                      </a:r>
-                    </a:p>
-                  </a:txBody>
-                  <a:tcPr marL="36576" marR="36576" marT="9144" marB="9144">
-                    <a:solidFill>
-                      <a:srgbClr val="FFF3CD"/>
-                    </a:solidFill>
-                  </a:tcPr>
-                </a:tc>
-              </a:tr>
-            </a:tbl>
-          </a:graphicData>
-        </a:graphic>
-      </p:graphicFrame>
       <p:sp>
         <p:nvSpPr>
-          <p:cNvPr id="8" name="TextBox 7"/>
+          <p:cNvPr id="7" name="TextBox 6"/>
           <p:cNvSpPr txBox="1"/>
           <p:nvPr/>
         </p:nvSpPr>
         <p:spPr>
           <a:xfrm>
-            <a:off x="7223760" y="2606040"/>
-            <a:ext cx="4480560" cy="1097280"/>
+            <a:off x="4754880" y="1097280"/>
+            <a:ext cx="6949440" cy="914400"/>
           </a:xfrm>
           <a:prstGeom prst="rect">
             <a:avLst/>
@@ -24639,38 +24017,719 @@
           <a:lstStyle/>
           <a:p>
             <a:r>
-              <a:rPr sz="1600" b="0" i="0">
+              <a:rPr sz="1700" b="0" i="0">
                 <a:solidFill>
-                  <a:srgbClr val="59636E"/>
+                  <a:srgbClr val="202020"/>
                 </a:solidFill>
                 <a:latin typeface="Times New Roman"/>
               </a:rPr>
-              <a:t>The ratio equals exp((4 − 0)/T):</a:t>
-            </a:r>
-          </a:p>
-          <a:p>
-            <a:r>
-              <a:rPr sz="1600" b="0" i="0">
-                <a:solidFill>
-                  <a:srgbClr val="59636E"/>
-                </a:solidFill>
-                <a:latin typeface="Times New Roman"/>
-              </a:rPr>
-              <a:t>e⁴ = 54.60 at T = 1 and e¹ = 2.72 at T = 4.</a:t>
+              <a:t>Using a higher value for T produces a softer probability distribution over classes: Step 1 reduces the differences between the logits by a factor of 4.</a:t>
             </a:r>
           </a:p>
         </p:txBody>
       </p:sp>
+      <p:graphicFrame>
+        <p:nvGraphicFramePr>
+          <p:cNvPr id="8" name="Table 7"/>
+          <p:cNvGraphicFramePr>
+            <a:graphicFrameLocks noGrp="1"/>
+          </p:cNvGraphicFramePr>
+          <p:nvPr/>
+        </p:nvGraphicFramePr>
+        <p:xfrm>
+          <a:off x="731520" y="2240280"/>
+          <a:ext cx="1188720" cy="1316736"/>
+        </p:xfrm>
+        <a:graphic>
+          <a:graphicData uri="http://schemas.openxmlformats.org/drawingml/2006/table">
+            <a:tbl>
+              <a:tblPr bandRow="1">
+                <a:tableStyleId>{5C22544A-7EE6-4342-B048-85BDC9FD1C3A}</a:tableStyleId>
+              </a:tblPr>
+              <a:tblGrid>
+                <a:gridCol w="1188720"/>
+              </a:tblGrid>
+              <a:tr h="329184">
+                <a:tc>
+                  <a:txBody>
+                    <a:bodyPr/>
+                    <a:lstStyle/>
+                    <a:p>
+                      <a:pPr algn="ctr"/>
+                      <a:r>
+                        <a:rPr sz="1600" b="1">
+                          <a:solidFill>
+                            <a:srgbClr val="FFFFFF"/>
+                          </a:solidFill>
+                          <a:latin typeface="Times New Roman"/>
+                        </a:rPr>
+                        <a:t>Class</a:t>
+                      </a:r>
+                    </a:p>
+                  </a:txBody>
+                  <a:tcPr marL="36576" marR="36576" marT="9144" marB="9144">
+                    <a:solidFill>
+                      <a:srgbClr val="1F4E79"/>
+                    </a:solidFill>
+                  </a:tcPr>
+                </a:tc>
+              </a:tr>
+              <a:tr h="329184">
+                <a:tc>
+                  <a:txBody>
+                    <a:bodyPr/>
+                    <a:lstStyle/>
+                    <a:p>
+                      <a:pPr algn="ctr"/>
+                      <a:r>
+                        <a:rPr sz="1600" b="0">
+                          <a:solidFill>
+                            <a:srgbClr val="202020"/>
+                          </a:solidFill>
+                          <a:latin typeface="Times New Roman"/>
+                        </a:rPr>
+                        <a:t>2</a:t>
+                      </a:r>
+                    </a:p>
+                  </a:txBody>
+                  <a:tcPr marL="36576" marR="36576" marT="9144" marB="9144">
+                    <a:solidFill>
+                      <a:srgbClr val="FFFFFF"/>
+                    </a:solidFill>
+                  </a:tcPr>
+                </a:tc>
+              </a:tr>
+              <a:tr h="329184">
+                <a:tc>
+                  <a:txBody>
+                    <a:bodyPr/>
+                    <a:lstStyle/>
+                    <a:p>
+                      <a:pPr algn="ctr"/>
+                      <a:r>
+                        <a:rPr sz="1600" b="0">
+                          <a:solidFill>
+                            <a:srgbClr val="202020"/>
+                          </a:solidFill>
+                          <a:latin typeface="Times New Roman"/>
+                        </a:rPr>
+                        <a:t>3</a:t>
+                      </a:r>
+                    </a:p>
+                  </a:txBody>
+                  <a:tcPr marL="36576" marR="36576" marT="9144" marB="9144">
+                    <a:solidFill>
+                      <a:srgbClr val="FFFFFF"/>
+                    </a:solidFill>
+                  </a:tcPr>
+                </a:tc>
+              </a:tr>
+              <a:tr h="329184">
+                <a:tc>
+                  <a:txBody>
+                    <a:bodyPr/>
+                    <a:lstStyle/>
+                    <a:p>
+                      <a:pPr algn="ctr"/>
+                      <a:r>
+                        <a:rPr sz="1600" b="0">
+                          <a:solidFill>
+                            <a:srgbClr val="202020"/>
+                          </a:solidFill>
+                          <a:latin typeface="Times New Roman"/>
+                        </a:rPr>
+                        <a:t>7</a:t>
+                      </a:r>
+                    </a:p>
+                  </a:txBody>
+                  <a:tcPr marL="36576" marR="36576" marT="9144" marB="9144">
+                    <a:solidFill>
+                      <a:srgbClr val="FFFFFF"/>
+                    </a:solidFill>
+                  </a:tcPr>
+                </a:tc>
+              </a:tr>
+            </a:tbl>
+          </a:graphicData>
+        </a:graphic>
+      </p:graphicFrame>
+      <p:graphicFrame>
+        <p:nvGraphicFramePr>
+          <p:cNvPr id="9" name="Table 8"/>
+          <p:cNvGraphicFramePr>
+            <a:graphicFrameLocks noGrp="1"/>
+          </p:cNvGraphicFramePr>
+          <p:nvPr/>
+        </p:nvGraphicFramePr>
+        <p:xfrm>
+          <a:off x="2057400" y="2240280"/>
+          <a:ext cx="1463040" cy="1316736"/>
+        </p:xfrm>
+        <a:graphic>
+          <a:graphicData uri="http://schemas.openxmlformats.org/drawingml/2006/table">
+            <a:tbl>
+              <a:tblPr bandRow="1">
+                <a:tableStyleId>{5C22544A-7EE6-4342-B048-85BDC9FD1C3A}</a:tableStyleId>
+              </a:tblPr>
+              <a:tblGrid>
+                <a:gridCol w="1463040"/>
+              </a:tblGrid>
+              <a:tr h="329184">
+                <a:tc>
+                  <a:txBody>
+                    <a:bodyPr/>
+                    <a:lstStyle/>
+                    <a:p>
+                      <a:pPr algn="ctr"/>
+                      <a:r>
+                        <a:rPr sz="1600" b="1">
+                          <a:solidFill>
+                            <a:srgbClr val="FFFFFF"/>
+                          </a:solidFill>
+                          <a:latin typeface="Times New Roman"/>
+                        </a:rPr>
+                        <a:t>v</a:t>
+                      </a:r>
+                    </a:p>
+                  </a:txBody>
+                  <a:tcPr marL="36576" marR="36576" marT="9144" marB="9144">
+                    <a:solidFill>
+                      <a:srgbClr val="1F4E79"/>
+                    </a:solidFill>
+                  </a:tcPr>
+                </a:tc>
+              </a:tr>
+              <a:tr h="329184">
+                <a:tc>
+                  <a:txBody>
+                    <a:bodyPr/>
+                    <a:lstStyle/>
+                    <a:p>
+                      <a:pPr algn="ctr"/>
+                      <a:r>
+                        <a:rPr sz="1600" b="0">
+                          <a:solidFill>
+                            <a:srgbClr val="202020"/>
+                          </a:solidFill>
+                          <a:latin typeface="Times New Roman"/>
+                        </a:rPr>
+                        <a:t>8</a:t>
+                      </a:r>
+                    </a:p>
+                  </a:txBody>
+                  <a:tcPr marL="36576" marR="36576" marT="9144" marB="9144">
+                    <a:solidFill>
+                      <a:srgbClr val="FFFFFF"/>
+                    </a:solidFill>
+                  </a:tcPr>
+                </a:tc>
+              </a:tr>
+              <a:tr h="329184">
+                <a:tc>
+                  <a:txBody>
+                    <a:bodyPr/>
+                    <a:lstStyle/>
+                    <a:p>
+                      <a:pPr algn="ctr"/>
+                      <a:r>
+                        <a:rPr sz="1600" b="0">
+                          <a:solidFill>
+                            <a:srgbClr val="202020"/>
+                          </a:solidFill>
+                          <a:latin typeface="Times New Roman"/>
+                        </a:rPr>
+                        <a:t>4</a:t>
+                      </a:r>
+                    </a:p>
+                  </a:txBody>
+                  <a:tcPr marL="36576" marR="36576" marT="9144" marB="9144">
+                    <a:solidFill>
+                      <a:srgbClr val="FFFFFF"/>
+                    </a:solidFill>
+                  </a:tcPr>
+                </a:tc>
+              </a:tr>
+              <a:tr h="329184">
+                <a:tc>
+                  <a:txBody>
+                    <a:bodyPr/>
+                    <a:lstStyle/>
+                    <a:p>
+                      <a:pPr algn="ctr"/>
+                      <a:r>
+                        <a:rPr sz="1600" b="0">
+                          <a:solidFill>
+                            <a:srgbClr val="202020"/>
+                          </a:solidFill>
+                          <a:latin typeface="Times New Roman"/>
+                        </a:rPr>
+                        <a:t>0</a:t>
+                      </a:r>
+                    </a:p>
+                  </a:txBody>
+                  <a:tcPr marL="36576" marR="36576" marT="9144" marB="9144">
+                    <a:solidFill>
+                      <a:srgbClr val="FFFFFF"/>
+                    </a:solidFill>
+                  </a:tcPr>
+                </a:tc>
+              </a:tr>
+            </a:tbl>
+          </a:graphicData>
+        </a:graphic>
+      </p:graphicFrame>
+      <p:graphicFrame>
+        <p:nvGraphicFramePr>
+          <p:cNvPr id="10" name="Table 9"/>
+          <p:cNvGraphicFramePr>
+            <a:graphicFrameLocks noGrp="1"/>
+          </p:cNvGraphicFramePr>
+          <p:nvPr/>
+        </p:nvGraphicFramePr>
+        <p:xfrm>
+          <a:off x="3657600" y="2240280"/>
+          <a:ext cx="1965960" cy="1316736"/>
+        </p:xfrm>
+        <a:graphic>
+          <a:graphicData uri="http://schemas.openxmlformats.org/drawingml/2006/table">
+            <a:tbl>
+              <a:tblPr bandRow="1">
+                <a:tableStyleId>{5C22544A-7EE6-4342-B048-85BDC9FD1C3A}</a:tableStyleId>
+              </a:tblPr>
+              <a:tblGrid>
+                <a:gridCol w="1965960"/>
+              </a:tblGrid>
+              <a:tr h="329184">
+                <a:tc>
+                  <a:txBody>
+                    <a:bodyPr/>
+                    <a:lstStyle/>
+                    <a:p>
+                      <a:pPr algn="ctr"/>
+                      <a:r>
+                        <a:rPr sz="1600" b="1">
+                          <a:solidFill>
+                            <a:srgbClr val="FFFFFF"/>
+                          </a:solidFill>
+                          <a:latin typeface="Times New Roman"/>
+                        </a:rPr>
+                        <a:t>Step 1:  ÷ T</a:t>
+                      </a:r>
+                    </a:p>
+                  </a:txBody>
+                  <a:tcPr marL="36576" marR="36576" marT="9144" marB="9144">
+                    <a:solidFill>
+                      <a:srgbClr val="1F4E79"/>
+                    </a:solidFill>
+                  </a:tcPr>
+                </a:tc>
+              </a:tr>
+              <a:tr h="329184">
+                <a:tc>
+                  <a:txBody>
+                    <a:bodyPr/>
+                    <a:lstStyle/>
+                    <a:p>
+                      <a:pPr algn="ctr"/>
+                      <a:r>
+                        <a:rPr sz="1600" b="0">
+                          <a:solidFill>
+                            <a:srgbClr val="202020"/>
+                          </a:solidFill>
+                          <a:latin typeface="Times New Roman"/>
+                        </a:rPr>
+                        <a:t>2.0000</a:t>
+                      </a:r>
+                    </a:p>
+                  </a:txBody>
+                  <a:tcPr marL="36576" marR="36576" marT="9144" marB="9144">
+                    <a:solidFill>
+                      <a:srgbClr val="FFFFFF"/>
+                    </a:solidFill>
+                  </a:tcPr>
+                </a:tc>
+              </a:tr>
+              <a:tr h="329184">
+                <a:tc>
+                  <a:txBody>
+                    <a:bodyPr/>
+                    <a:lstStyle/>
+                    <a:p>
+                      <a:pPr algn="ctr"/>
+                      <a:r>
+                        <a:rPr sz="1600" b="0">
+                          <a:solidFill>
+                            <a:srgbClr val="202020"/>
+                          </a:solidFill>
+                          <a:latin typeface="Times New Roman"/>
+                        </a:rPr>
+                        <a:t>1.0000</a:t>
+                      </a:r>
+                    </a:p>
+                  </a:txBody>
+                  <a:tcPr marL="36576" marR="36576" marT="9144" marB="9144">
+                    <a:solidFill>
+                      <a:srgbClr val="FFFFFF"/>
+                    </a:solidFill>
+                  </a:tcPr>
+                </a:tc>
+              </a:tr>
+              <a:tr h="329184">
+                <a:tc>
+                  <a:txBody>
+                    <a:bodyPr/>
+                    <a:lstStyle/>
+                    <a:p>
+                      <a:pPr algn="ctr"/>
+                      <a:r>
+                        <a:rPr sz="1600" b="0">
+                          <a:solidFill>
+                            <a:srgbClr val="202020"/>
+                          </a:solidFill>
+                          <a:latin typeface="Times New Roman"/>
+                        </a:rPr>
+                        <a:t>0.0000</a:t>
+                      </a:r>
+                    </a:p>
+                  </a:txBody>
+                  <a:tcPr marL="36576" marR="36576" marT="9144" marB="9144">
+                    <a:solidFill>
+                      <a:srgbClr val="FFFFFF"/>
+                    </a:solidFill>
+                  </a:tcPr>
+                </a:tc>
+              </a:tr>
+            </a:tbl>
+          </a:graphicData>
+        </a:graphic>
+      </p:graphicFrame>
+      <p:graphicFrame>
+        <p:nvGraphicFramePr>
+          <p:cNvPr id="11" name="Table 10"/>
+          <p:cNvGraphicFramePr>
+            <a:graphicFrameLocks noGrp="1"/>
+          </p:cNvGraphicFramePr>
+          <p:nvPr/>
+        </p:nvGraphicFramePr>
+        <p:xfrm>
+          <a:off x="5760720" y="2240280"/>
+          <a:ext cx="2240279" cy="1316736"/>
+        </p:xfrm>
+        <a:graphic>
+          <a:graphicData uri="http://schemas.openxmlformats.org/drawingml/2006/table">
+            <a:tbl>
+              <a:tblPr bandRow="1">
+                <a:tableStyleId>{5C22544A-7EE6-4342-B048-85BDC9FD1C3A}</a:tableStyleId>
+              </a:tblPr>
+              <a:tblGrid>
+                <a:gridCol w="2240279"/>
+              </a:tblGrid>
+              <a:tr h="329184">
+                <a:tc>
+                  <a:txBody>
+                    <a:bodyPr/>
+                    <a:lstStyle/>
+                    <a:p>
+                      <a:pPr algn="ctr"/>
+                      <a:r>
+                        <a:rPr sz="1600" b="1">
+                          <a:solidFill>
+                            <a:srgbClr val="FFFFFF"/>
+                          </a:solidFill>
+                          <a:latin typeface="Times New Roman"/>
+                        </a:rPr>
+                        <a:t>Step 2:  exp</a:t>
+                      </a:r>
+                    </a:p>
+                  </a:txBody>
+                  <a:tcPr marL="36576" marR="36576" marT="9144" marB="9144">
+                    <a:solidFill>
+                      <a:srgbClr val="1F4E79"/>
+                    </a:solidFill>
+                  </a:tcPr>
+                </a:tc>
+              </a:tr>
+              <a:tr h="329184">
+                <a:tc>
+                  <a:txBody>
+                    <a:bodyPr/>
+                    <a:lstStyle/>
+                    <a:p>
+                      <a:pPr algn="ctr"/>
+                      <a:r>
+                        <a:rPr sz="1600" b="0">
+                          <a:solidFill>
+                            <a:srgbClr val="202020"/>
+                          </a:solidFill>
+                          <a:latin typeface="Times New Roman"/>
+                        </a:rPr>
+                        <a:t>7.3891</a:t>
+                      </a:r>
+                    </a:p>
+                  </a:txBody>
+                  <a:tcPr marL="36576" marR="36576" marT="9144" marB="9144">
+                    <a:solidFill>
+                      <a:srgbClr val="FFFFFF"/>
+                    </a:solidFill>
+                  </a:tcPr>
+                </a:tc>
+              </a:tr>
+              <a:tr h="329184">
+                <a:tc>
+                  <a:txBody>
+                    <a:bodyPr/>
+                    <a:lstStyle/>
+                    <a:p>
+                      <a:pPr algn="ctr"/>
+                      <a:r>
+                        <a:rPr sz="1600" b="0">
+                          <a:solidFill>
+                            <a:srgbClr val="202020"/>
+                          </a:solidFill>
+                          <a:latin typeface="Times New Roman"/>
+                        </a:rPr>
+                        <a:t>2.7183</a:t>
+                      </a:r>
+                    </a:p>
+                  </a:txBody>
+                  <a:tcPr marL="36576" marR="36576" marT="9144" marB="9144">
+                    <a:solidFill>
+                      <a:srgbClr val="FFFFFF"/>
+                    </a:solidFill>
+                  </a:tcPr>
+                </a:tc>
+              </a:tr>
+              <a:tr h="329184">
+                <a:tc>
+                  <a:txBody>
+                    <a:bodyPr/>
+                    <a:lstStyle/>
+                    <a:p>
+                      <a:pPr algn="ctr"/>
+                      <a:r>
+                        <a:rPr sz="1600" b="0">
+                          <a:solidFill>
+                            <a:srgbClr val="202020"/>
+                          </a:solidFill>
+                          <a:latin typeface="Times New Roman"/>
+                        </a:rPr>
+                        <a:t>1.0000</a:t>
+                      </a:r>
+                    </a:p>
+                  </a:txBody>
+                  <a:tcPr marL="36576" marR="36576" marT="9144" marB="9144">
+                    <a:solidFill>
+                      <a:srgbClr val="FFFFFF"/>
+                    </a:solidFill>
+                  </a:tcPr>
+                </a:tc>
+              </a:tr>
+            </a:tbl>
+          </a:graphicData>
+        </a:graphic>
+      </p:graphicFrame>
       <p:sp>
         <p:nvSpPr>
-          <p:cNvPr id="9" name="Rectangle 8"/>
+          <p:cNvPr id="12" name="Rectangle 11"/>
           <p:cNvSpPr/>
           <p:nvPr/>
         </p:nvSpPr>
         <p:spPr>
           <a:xfrm>
-            <a:off x="731520" y="3977639"/>
-            <a:ext cx="10881360" cy="731520"/>
+            <a:off x="8138160" y="2240280"/>
+            <a:ext cx="1737360" cy="1316736"/>
+          </a:xfrm>
+          <a:prstGeom prst="rect">
+            <a:avLst/>
+          </a:prstGeom>
+          <a:solidFill>
+            <a:srgbClr val="DAE6F2"/>
+          </a:solidFill>
+          <a:ln>
+            <a:solidFill>
+              <a:srgbClr val="D0D7DE"/>
+            </a:solidFill>
+          </a:ln>
+          <a:effectLst/>
+        </p:spPr>
+        <p:style>
+          <a:lnRef idx="1">
+            <a:schemeClr val="accent1"/>
+          </a:lnRef>
+          <a:fillRef idx="3">
+            <a:schemeClr val="accent1"/>
+          </a:fillRef>
+          <a:effectRef idx="2">
+            <a:schemeClr val="accent1"/>
+          </a:effectRef>
+          <a:fontRef idx="minor">
+            <a:schemeClr val="lt1"/>
+          </a:fontRef>
+        </p:style>
+        <p:txBody>
+          <a:bodyPr rtlCol="0" anchor="ctr" wrap="square"/>
+          <a:lstStyle/>
+          <a:p>
+            <a:pPr algn="ctr"/>
+            <a:r>
+              <a:rPr sz="1700" b="1">
+                <a:solidFill>
+                  <a:srgbClr val="1F4E79"/>
+                </a:solidFill>
+                <a:latin typeface="Times New Roman"/>
+              </a:rPr>
+              <a:t>Step 3:  sum</a:t>
+            </a:r>
+          </a:p>
+          <a:p>
+            <a:pPr algn="ctr"/>
+            <a:r>
+              <a:rPr sz="1700" b="1">
+                <a:solidFill>
+                  <a:srgbClr val="1F4E79"/>
+                </a:solidFill>
+                <a:latin typeface="Times New Roman"/>
+              </a:rPr>
+              <a:t>11.1073</a:t>
+            </a:r>
+          </a:p>
+        </p:txBody>
+      </p:sp>
+      <p:graphicFrame>
+        <p:nvGraphicFramePr>
+          <p:cNvPr id="13" name="Table 12"/>
+          <p:cNvGraphicFramePr>
+            <a:graphicFrameLocks noGrp="1"/>
+          </p:cNvGraphicFramePr>
+          <p:nvPr/>
+        </p:nvGraphicFramePr>
+        <p:xfrm>
+          <a:off x="10012680" y="2240280"/>
+          <a:ext cx="1783080" cy="1316736"/>
+        </p:xfrm>
+        <a:graphic>
+          <a:graphicData uri="http://schemas.openxmlformats.org/drawingml/2006/table">
+            <a:tbl>
+              <a:tblPr bandRow="1">
+                <a:tableStyleId>{5C22544A-7EE6-4342-B048-85BDC9FD1C3A}</a:tableStyleId>
+              </a:tblPr>
+              <a:tblGrid>
+                <a:gridCol w="1783080"/>
+              </a:tblGrid>
+              <a:tr h="329184">
+                <a:tc>
+                  <a:txBody>
+                    <a:bodyPr/>
+                    <a:lstStyle/>
+                    <a:p>
+                      <a:pPr algn="ctr"/>
+                      <a:r>
+                        <a:rPr sz="1600" b="1">
+                          <a:solidFill>
+                            <a:srgbClr val="FFFFFF"/>
+                          </a:solidFill>
+                          <a:latin typeface="Times New Roman"/>
+                        </a:rPr>
+                        <a:t>Step 4:  p</a:t>
+                      </a:r>
+                    </a:p>
+                  </a:txBody>
+                  <a:tcPr marL="36576" marR="36576" marT="9144" marB="9144">
+                    <a:solidFill>
+                      <a:srgbClr val="1F4E79"/>
+                    </a:solidFill>
+                  </a:tcPr>
+                </a:tc>
+              </a:tr>
+              <a:tr h="329184">
+                <a:tc>
+                  <a:txBody>
+                    <a:bodyPr/>
+                    <a:lstStyle/>
+                    <a:p>
+                      <a:pPr algn="ctr"/>
+                      <a:r>
+                        <a:rPr sz="1600" b="0">
+                          <a:solidFill>
+                            <a:srgbClr val="202020"/>
+                          </a:solidFill>
+                          <a:latin typeface="Times New Roman"/>
+                        </a:rPr>
+                        <a:t>0.6652</a:t>
+                      </a:r>
+                    </a:p>
+                  </a:txBody>
+                  <a:tcPr marL="36576" marR="36576" marT="9144" marB="9144">
+                    <a:solidFill>
+                      <a:srgbClr val="FFFFFF"/>
+                    </a:solidFill>
+                  </a:tcPr>
+                </a:tc>
+              </a:tr>
+              <a:tr h="329184">
+                <a:tc>
+                  <a:txBody>
+                    <a:bodyPr/>
+                    <a:lstStyle/>
+                    <a:p>
+                      <a:pPr algn="ctr"/>
+                      <a:r>
+                        <a:rPr sz="1600" b="0">
+                          <a:solidFill>
+                            <a:srgbClr val="202020"/>
+                          </a:solidFill>
+                          <a:latin typeface="Times New Roman"/>
+                        </a:rPr>
+                        <a:t>0.2447</a:t>
+                      </a:r>
+                    </a:p>
+                  </a:txBody>
+                  <a:tcPr marL="36576" marR="36576" marT="9144" marB="9144">
+                    <a:solidFill>
+                      <a:srgbClr val="FFF3CD"/>
+                    </a:solidFill>
+                  </a:tcPr>
+                </a:tc>
+              </a:tr>
+              <a:tr h="329184">
+                <a:tc>
+                  <a:txBody>
+                    <a:bodyPr/>
+                    <a:lstStyle/>
+                    <a:p>
+                      <a:pPr algn="ctr"/>
+                      <a:r>
+                        <a:rPr sz="1600" b="0">
+                          <a:solidFill>
+                            <a:srgbClr val="202020"/>
+                          </a:solidFill>
+                          <a:latin typeface="Times New Roman"/>
+                        </a:rPr>
+                        <a:t>0.0900</a:t>
+                      </a:r>
+                    </a:p>
+                  </a:txBody>
+                  <a:tcPr marL="36576" marR="36576" marT="9144" marB="9144">
+                    <a:solidFill>
+                      <a:srgbClr val="FFF3CD"/>
+                    </a:solidFill>
+                  </a:tcPr>
+                </a:tc>
+              </a:tr>
+            </a:tbl>
+          </a:graphicData>
+        </a:graphic>
+      </p:graphicFrame>
+      <p:sp>
+        <p:nvSpPr>
+          <p:cNvPr id="14" name="Rectangle 13"/>
+          <p:cNvSpPr/>
+          <p:nvPr/>
+        </p:nvSpPr>
+        <p:spPr>
+          <a:xfrm>
+            <a:off x="731520" y="3931920"/>
+            <a:ext cx="10881360" cy="1051560"/>
           </a:xfrm>
           <a:prstGeom prst="rect">
             <a:avLst/>
@@ -24711,891 +24770,32 @@
                 </a:solidFill>
                 <a:latin typeface="Times New Roman"/>
               </a:rPr>
-              <a:t>Soft targets: class probabilities of the cumbersome model at a high temperature, e.g. (0.6652, 0.2447, 0.0900)</a:t>
+              <a:t>The probabilities of 3 and 7 become 0.2447 and 0.0900.</a:t>
+            </a:r>
+          </a:p>
+          <a:p>
+            <a:pPr algn="l"/>
+            <a:r>
+              <a:rPr sz="1700" b="1">
+                <a:solidFill>
+                  <a:srgbClr val="1E7A45"/>
+                </a:solidFill>
+                <a:latin typeface="Times New Roman"/>
+              </a:rPr>
+              <a:t>At this temperature, the relative probabilities of the incorrect classes are large enough to influence learning.</a:t>
             </a:r>
           </a:p>
         </p:txBody>
       </p:sp>
       <p:sp>
         <p:nvSpPr>
-          <p:cNvPr id="10" name="Rectangle 9"/>
-          <p:cNvSpPr/>
-          <p:nvPr/>
-        </p:nvSpPr>
-        <p:spPr>
-          <a:xfrm>
-            <a:off x="731520" y="4800600"/>
-            <a:ext cx="10881360" cy="731520"/>
-          </a:xfrm>
-          <a:prstGeom prst="rect">
-            <a:avLst/>
-          </a:prstGeom>
-          <a:solidFill>
-            <a:srgbClr val="F6F8FA"/>
-          </a:solidFill>
-          <a:ln>
-            <a:solidFill>
-              <a:srgbClr val="D0D7DE"/>
-            </a:solidFill>
-          </a:ln>
-          <a:effectLst/>
-        </p:spPr>
-        <p:style>
-          <a:lnRef idx="1">
-            <a:schemeClr val="accent1"/>
-          </a:lnRef>
-          <a:fillRef idx="3">
-            <a:schemeClr val="accent1"/>
-          </a:fillRef>
-          <a:effectRef idx="2">
-            <a:schemeClr val="accent1"/>
-          </a:effectRef>
-          <a:fontRef idx="minor">
-            <a:schemeClr val="lt1"/>
-          </a:fontRef>
-        </p:style>
-        <p:txBody>
-          <a:bodyPr rtlCol="0" anchor="ctr" wrap="square"/>
-          <a:lstStyle/>
-          <a:p>
-            <a:pPr algn="l"/>
-            <a:r>
-              <a:rPr sz="1700" b="1">
-                <a:solidFill>
-                  <a:srgbClr val="1F4E79"/>
-                </a:solidFill>
-                <a:latin typeface="Times New Roman"/>
-              </a:rPr>
-              <a:t>Hard targets: the correct labels, here (1, 0, 0)</a:t>
-            </a:r>
-          </a:p>
-        </p:txBody>
-      </p:sp>
-      <p:sp>
-        <p:nvSpPr>
-          <p:cNvPr id="11" name="TextBox 10"/>
+          <p:cNvPr id="15" name="TextBox 14"/>
           <p:cNvSpPr txBox="1"/>
           <p:nvPr/>
         </p:nvSpPr>
         <p:spPr>
           <a:xfrm>
-            <a:off x="731520" y="5669280"/>
-            <a:ext cx="10881360" cy="822960"/>
-          </a:xfrm>
-          <a:prstGeom prst="rect">
-            <a:avLst/>
-          </a:prstGeom>
-          <a:noFill/>
-        </p:spPr>
-        <p:txBody>
-          <a:bodyPr wrap="square">
-            <a:spAutoFit/>
-          </a:bodyPr>
-          <a:lstStyle/>
-          <a:p>
-            <a:r>
-              <a:rPr sz="1500" b="0" i="0">
-                <a:solidFill>
-                  <a:srgbClr val="202020"/>
-                </a:solidFill>
-                <a:latin typeface="Times New Roman"/>
-              </a:rPr>
-              <a:t>When the soft targets have high entropy, they provide much more information per training case than hard targets and much less variance in the gradient between training cases, so the small model can often be trained on much less data and using a much higher learning rate.</a:t>
-            </a:r>
-          </a:p>
-        </p:txBody>
-      </p:sp>
-    </p:spTree>
-  </p:cSld>
-  <p:clrMapOvr>
-    <a:masterClrMapping/>
-  </p:clrMapOvr>
-  <p:timing>
-    <p:tnLst>
-      <p:par>
-        <p:cTn id="1" dur="indefinite" restart="never" nodeType="tmRoot">
-          <p:childTnLst>
-            <p:seq concurrent="1" nextAc="seek">
-              <p:cTn id="2" dur="indefinite" nodeType="mainSeq">
-                <p:childTnLst>
-                  <p:par>
-                    <p:cTn id="3" fill="hold">
-                      <p:stCondLst>
-                        <p:cond delay="indefinite"/>
-                      </p:stCondLst>
-                      <p:childTnLst>
-                        <p:par>
-                          <p:cTn id="4" fill="hold">
-                            <p:stCondLst>
-                              <p:cond delay="0"/>
-                            </p:stCondLst>
-                            <p:childTnLst>
-                              <p:par>
-                                <p:cTn id="5" presetID="1" presetClass="entr" presetSubtype="0" fill="hold" grpId="0" nodeType="clickEffect">
-                                  <p:stCondLst>
-                                    <p:cond delay="0"/>
-                                  </p:stCondLst>
-                                  <p:childTnLst>
-                                    <p:set>
-                                      <p:cBhvr>
-                                        <p:cTn id="6" dur="1" fill="hold">
-                                          <p:stCondLst>
-                                            <p:cond delay="0"/>
-                                          </p:stCondLst>
-                                        </p:cTn>
-                                        <p:tgtEl>
-                                          <p:spTgt spid="6"/>
-                                        </p:tgtEl>
-                                        <p:attrNameLst>
-                                          <p:attrName>style.visibility</p:attrName>
-                                        </p:attrNameLst>
-                                      </p:cBhvr>
-                                      <p:to>
-                                        <p:strVal val="visible"/>
-                                      </p:to>
-                                    </p:set>
-                                  </p:childTnLst>
-                                </p:cTn>
-                              </p:par>
-                            </p:childTnLst>
-                          </p:cTn>
-                        </p:par>
-                      </p:childTnLst>
-                    </p:cTn>
-                  </p:par>
-                  <p:par>
-                    <p:cTn id="7" fill="hold">
-                      <p:stCondLst>
-                        <p:cond delay="indefinite"/>
-                      </p:stCondLst>
-                      <p:childTnLst>
-                        <p:par>
-                          <p:cTn id="8" fill="hold">
-                            <p:stCondLst>
-                              <p:cond delay="0"/>
-                            </p:stCondLst>
-                            <p:childTnLst>
-                              <p:par>
-                                <p:cTn id="9" presetID="1" presetClass="entr" presetSubtype="0" fill="hold" grpId="0" nodeType="clickEffect">
-                                  <p:stCondLst>
-                                    <p:cond delay="0"/>
-                                  </p:stCondLst>
-                                  <p:childTnLst>
-                                    <p:set>
-                                      <p:cBhvr>
-                                        <p:cTn id="10" dur="1" fill="hold">
-                                          <p:stCondLst>
-                                            <p:cond delay="0"/>
-                                          </p:stCondLst>
-                                        </p:cTn>
-                                        <p:tgtEl>
-                                          <p:spTgt spid="7"/>
-                                        </p:tgtEl>
-                                        <p:attrNameLst>
-                                          <p:attrName>style.visibility</p:attrName>
-                                        </p:attrNameLst>
-                                      </p:cBhvr>
-                                      <p:to>
-                                        <p:strVal val="visible"/>
-                                      </p:to>
-                                    </p:set>
-                                  </p:childTnLst>
-                                </p:cTn>
-                              </p:par>
-                            </p:childTnLst>
-                          </p:cTn>
-                        </p:par>
-                      </p:childTnLst>
-                    </p:cTn>
-                  </p:par>
-                  <p:par>
-                    <p:cTn id="11" fill="hold">
-                      <p:stCondLst>
-                        <p:cond delay="indefinite"/>
-                      </p:stCondLst>
-                      <p:childTnLst>
-                        <p:par>
-                          <p:cTn id="12" fill="hold">
-                            <p:stCondLst>
-                              <p:cond delay="0"/>
-                            </p:stCondLst>
-                            <p:childTnLst>
-                              <p:par>
-                                <p:cTn id="13" presetID="1" presetClass="entr" presetSubtype="0" fill="hold" grpId="0" nodeType="clickEffect">
-                                  <p:stCondLst>
-                                    <p:cond delay="0"/>
-                                  </p:stCondLst>
-                                  <p:childTnLst>
-                                    <p:set>
-                                      <p:cBhvr>
-                                        <p:cTn id="14" dur="1" fill="hold">
-                                          <p:stCondLst>
-                                            <p:cond delay="0"/>
-                                          </p:stCondLst>
-                                        </p:cTn>
-                                        <p:tgtEl>
-                                          <p:spTgt spid="8"/>
-                                        </p:tgtEl>
-                                        <p:attrNameLst>
-                                          <p:attrName>style.visibility</p:attrName>
-                                        </p:attrNameLst>
-                                      </p:cBhvr>
-                                      <p:to>
-                                        <p:strVal val="visible"/>
-                                      </p:to>
-                                    </p:set>
-                                  </p:childTnLst>
-                                </p:cTn>
-                              </p:par>
-                            </p:childTnLst>
-                          </p:cTn>
-                        </p:par>
-                      </p:childTnLst>
-                    </p:cTn>
-                  </p:par>
-                  <p:par>
-                    <p:cTn id="15" fill="hold">
-                      <p:stCondLst>
-                        <p:cond delay="indefinite"/>
-                      </p:stCondLst>
-                      <p:childTnLst>
-                        <p:par>
-                          <p:cTn id="16" fill="hold">
-                            <p:stCondLst>
-                              <p:cond delay="0"/>
-                            </p:stCondLst>
-                            <p:childTnLst>
-                              <p:par>
-                                <p:cTn id="17" presetID="1" presetClass="entr" presetSubtype="0" fill="hold" grpId="0" nodeType="clickEffect">
-                                  <p:stCondLst>
-                                    <p:cond delay="0"/>
-                                  </p:stCondLst>
-                                  <p:childTnLst>
-                                    <p:set>
-                                      <p:cBhvr>
-                                        <p:cTn id="18" dur="1" fill="hold">
-                                          <p:stCondLst>
-                                            <p:cond delay="0"/>
-                                          </p:stCondLst>
-                                        </p:cTn>
-                                        <p:tgtEl>
-                                          <p:spTgt spid="9"/>
-                                        </p:tgtEl>
-                                        <p:attrNameLst>
-                                          <p:attrName>style.visibility</p:attrName>
-                                        </p:attrNameLst>
-                                      </p:cBhvr>
-                                      <p:to>
-                                        <p:strVal val="visible"/>
-                                      </p:to>
-                                    </p:set>
-                                  </p:childTnLst>
-                                </p:cTn>
-                              </p:par>
-                            </p:childTnLst>
-                          </p:cTn>
-                        </p:par>
-                      </p:childTnLst>
-                    </p:cTn>
-                  </p:par>
-                  <p:par>
-                    <p:cTn id="19" fill="hold">
-                      <p:stCondLst>
-                        <p:cond delay="indefinite"/>
-                      </p:stCondLst>
-                      <p:childTnLst>
-                        <p:par>
-                          <p:cTn id="20" fill="hold">
-                            <p:stCondLst>
-                              <p:cond delay="0"/>
-                            </p:stCondLst>
-                            <p:childTnLst>
-                              <p:par>
-                                <p:cTn id="21" presetID="1" presetClass="entr" presetSubtype="0" fill="hold" grpId="0" nodeType="clickEffect">
-                                  <p:stCondLst>
-                                    <p:cond delay="0"/>
-                                  </p:stCondLst>
-                                  <p:childTnLst>
-                                    <p:set>
-                                      <p:cBhvr>
-                                        <p:cTn id="22" dur="1" fill="hold">
-                                          <p:stCondLst>
-                                            <p:cond delay="0"/>
-                                          </p:stCondLst>
-                                        </p:cTn>
-                                        <p:tgtEl>
-                                          <p:spTgt spid="10"/>
-                                        </p:tgtEl>
-                                        <p:attrNameLst>
-                                          <p:attrName>style.visibility</p:attrName>
-                                        </p:attrNameLst>
-                                      </p:cBhvr>
-                                      <p:to>
-                                        <p:strVal val="visible"/>
-                                      </p:to>
-                                    </p:set>
-                                  </p:childTnLst>
-                                </p:cTn>
-                              </p:par>
-                            </p:childTnLst>
-                          </p:cTn>
-                        </p:par>
-                      </p:childTnLst>
-                    </p:cTn>
-                  </p:par>
-                  <p:par>
-                    <p:cTn id="23" fill="hold">
-                      <p:stCondLst>
-                        <p:cond delay="indefinite"/>
-                      </p:stCondLst>
-                      <p:childTnLst>
-                        <p:par>
-                          <p:cTn id="24" fill="hold">
-                            <p:stCondLst>
-                              <p:cond delay="0"/>
-                            </p:stCondLst>
-                            <p:childTnLst>
-                              <p:par>
-                                <p:cTn id="25" presetID="1" presetClass="entr" presetSubtype="0" fill="hold" grpId="0" nodeType="clickEffect">
-                                  <p:stCondLst>
-                                    <p:cond delay="0"/>
-                                  </p:stCondLst>
-                                  <p:childTnLst>
-                                    <p:set>
-                                      <p:cBhvr>
-                                        <p:cTn id="26" dur="1" fill="hold">
-                                          <p:stCondLst>
-                                            <p:cond delay="0"/>
-                                          </p:stCondLst>
-                                        </p:cTn>
-                                        <p:tgtEl>
-                                          <p:spTgt spid="11"/>
-                                        </p:tgtEl>
-                                        <p:attrNameLst>
-                                          <p:attrName>style.visibility</p:attrName>
-                                        </p:attrNameLst>
-                                      </p:cBhvr>
-                                      <p:to>
-                                        <p:strVal val="visible"/>
-                                      </p:to>
-                                    </p:set>
-                                  </p:childTnLst>
-                                </p:cTn>
-                              </p:par>
-                            </p:childTnLst>
-                          </p:cTn>
-                        </p:par>
-                      </p:childTnLst>
-                    </p:cTn>
-                  </p:par>
-                </p:childTnLst>
-              </p:cTn>
-              <p:prevCondLst>
-                <p:cond evt="onPrev" delay="0">
-                  <p:tgtEl>
-                    <p:sldTgt/>
-                  </p:tgtEl>
-                </p:cond>
-              </p:prevCondLst>
-              <p:nextCondLst>
-                <p:cond evt="onNext" delay="0">
-                  <p:tgtEl>
-                    <p:sldTgt/>
-                  </p:tgtEl>
-                </p:cond>
-              </p:nextCondLst>
-            </p:seq>
-          </p:childTnLst>
-        </p:cTn>
-      </p:par>
-    </p:tnLst>
-    <p:bldLst>
-      <p:bldP spid="6" grpId="0" animBg="1"/>
-      <p:bldGraphic spid="7" grpId="0">
-        <p:bldAsOne/>
-      </p:bldGraphic>
-      <p:bldP spid="8" grpId="0" animBg="1"/>
-      <p:bldP spid="9" grpId="0" animBg="1"/>
-      <p:bldP spid="10" grpId="0" animBg="1"/>
-      <p:bldP spid="11" grpId="0" animBg="1"/>
-    </p:bldLst>
-  </p:timing>
-</p:sld>
-</file>
-
-<file path=ppt/slides/slide9.xml><?xml version="1.0" encoding="utf-8"?>
-<p:sld xmlns:a="http://schemas.openxmlformats.org/drawingml/2006/main" xmlns:p="http://schemas.openxmlformats.org/presentationml/2006/main" xmlns:r="http://schemas.openxmlformats.org/officeDocument/2006/relationships">
-  <p:cSld>
-    <p:spTree>
-      <p:nvGrpSpPr>
-        <p:cNvPr id="1" name=""/>
-        <p:cNvGrpSpPr/>
-        <p:nvPr/>
-      </p:nvGrpSpPr>
-      <p:grpSpPr/>
-      <p:sp>
-        <p:nvSpPr>
-          <p:cNvPr id="2" name="Rectangle 1"/>
-          <p:cNvSpPr/>
-          <p:nvPr/>
-        </p:nvSpPr>
-        <p:spPr>
-          <a:xfrm>
-            <a:off x="0" y="0"/>
-            <a:ext cx="12191695" cy="6858000"/>
-          </a:xfrm>
-          <a:prstGeom prst="rect">
-            <a:avLst/>
-          </a:prstGeom>
-          <a:solidFill>
-            <a:srgbClr val="FFFFFF"/>
-          </a:solidFill>
-          <a:ln>
-            <a:noFill/>
-          </a:ln>
-          <a:effectLst/>
-        </p:spPr>
-        <p:style>
-          <a:lnRef idx="1">
-            <a:schemeClr val="accent1"/>
-          </a:lnRef>
-          <a:fillRef idx="3">
-            <a:schemeClr val="accent1"/>
-          </a:fillRef>
-          <a:effectRef idx="2">
-            <a:schemeClr val="accent1"/>
-          </a:effectRef>
-          <a:fontRef idx="minor">
-            <a:schemeClr val="lt1"/>
-          </a:fontRef>
-        </p:style>
-        <p:txBody>
-          <a:bodyPr rtlCol="0" anchor="ctr"/>
-          <a:lstStyle/>
-          <a:p>
-            <a:pPr algn="ctr"/>
-          </a:p>
-        </p:txBody>
-      </p:sp>
-      <p:sp>
-        <p:nvSpPr>
-          <p:cNvPr id="3" name="Rectangle 2"/>
-          <p:cNvSpPr/>
-          <p:nvPr/>
-        </p:nvSpPr>
-        <p:spPr>
-          <a:xfrm>
-            <a:off x="0" y="0"/>
-            <a:ext cx="12191695" cy="868680"/>
-          </a:xfrm>
-          <a:prstGeom prst="rect">
-            <a:avLst/>
-          </a:prstGeom>
-          <a:solidFill>
-            <a:srgbClr val="1F4E79"/>
-          </a:solidFill>
-          <a:ln>
-            <a:noFill/>
-          </a:ln>
-          <a:effectLst/>
-        </p:spPr>
-        <p:style>
-          <a:lnRef idx="1">
-            <a:schemeClr val="accent1"/>
-          </a:lnRef>
-          <a:fillRef idx="3">
-            <a:schemeClr val="accent1"/>
-          </a:fillRef>
-          <a:effectRef idx="2">
-            <a:schemeClr val="accent1"/>
-          </a:effectRef>
-          <a:fontRef idx="minor">
-            <a:schemeClr val="lt1"/>
-          </a:fontRef>
-        </p:style>
-        <p:txBody>
-          <a:bodyPr rtlCol="0" anchor="ctr"/>
-          <a:lstStyle/>
-          <a:p>
-            <a:pPr algn="ctr"/>
-          </a:p>
-        </p:txBody>
-      </p:sp>
-      <p:sp>
-        <p:nvSpPr>
-          <p:cNvPr id="4" name="TextBox 3"/>
-          <p:cNvSpPr txBox="1"/>
-          <p:nvPr/>
-        </p:nvSpPr>
-        <p:spPr>
-          <a:xfrm>
-            <a:off x="411480" y="54864"/>
-            <a:ext cx="11338560" cy="457200"/>
-          </a:xfrm>
-          <a:prstGeom prst="rect">
-            <a:avLst/>
-          </a:prstGeom>
-          <a:noFill/>
-        </p:spPr>
-        <p:txBody>
-          <a:bodyPr wrap="square">
-            <a:spAutoFit/>
-          </a:bodyPr>
-          <a:lstStyle/>
-          <a:p>
-            <a:r>
-              <a:rPr sz="2800" b="1" i="0">
-                <a:solidFill>
-                  <a:srgbClr val="FFFFFF"/>
-                </a:solidFill>
-                <a:latin typeface="Times New Roman"/>
-              </a:rPr>
-              <a:t>3. Distillation</a:t>
-            </a:r>
-          </a:p>
-        </p:txBody>
-      </p:sp>
-      <p:sp>
-        <p:nvSpPr>
-          <p:cNvPr id="5" name="TextBox 4"/>
-          <p:cNvSpPr txBox="1"/>
-          <p:nvPr/>
-        </p:nvSpPr>
-        <p:spPr>
-          <a:xfrm>
-            <a:off x="411480" y="521207"/>
-            <a:ext cx="11338560" cy="301752"/>
-          </a:xfrm>
-          <a:prstGeom prst="rect">
-            <a:avLst/>
-          </a:prstGeom>
-          <a:noFill/>
-        </p:spPr>
-        <p:txBody>
-          <a:bodyPr wrap="square">
-            <a:spAutoFit/>
-          </a:bodyPr>
-          <a:lstStyle/>
-          <a:p>
-            <a:r>
-              <a:rPr sz="1400" b="0" i="0">
-                <a:solidFill>
-                  <a:srgbClr val="C7D6E5"/>
-                </a:solidFill>
-                <a:latin typeface="Times New Roman"/>
-              </a:rPr>
-              <a:t>Section 2 of the paper: a weighted average of two different objective functions</a:t>
-            </a:r>
-          </a:p>
-        </p:txBody>
-      </p:sp>
-      <p:pic>
-        <p:nvPicPr>
-          <p:cNvPr id="6" name="Picture 5" descr="m_loss.png"/>
-          <p:cNvPicPr>
-            <a:picLocks noChangeAspect="1"/>
-          </p:cNvPicPr>
-          <p:nvPr/>
-        </p:nvPicPr>
-        <p:blipFill>
-          <a:blip r:embed="rId2"/>
-          <a:stretch>
-            <a:fillRect/>
-          </a:stretch>
-        </p:blipFill>
-        <p:spPr>
-          <a:xfrm>
-            <a:off x="822960" y="1143000"/>
-            <a:ext cx="4966071" cy="566928"/>
-          </a:xfrm>
-          <a:prstGeom prst="rect">
-            <a:avLst/>
-          </a:prstGeom>
-        </p:spPr>
-      </p:pic>
-      <p:pic>
-        <p:nvPicPr>
-          <p:cNvPr id="7" name="Picture 6" descr="m_csoft.png"/>
-          <p:cNvPicPr>
-            <a:picLocks noChangeAspect="1"/>
-          </p:cNvPicPr>
-          <p:nvPr/>
-        </p:nvPicPr>
-        <p:blipFill>
-          <a:blip r:embed="rId3"/>
-          <a:stretch>
-            <a:fillRect/>
-          </a:stretch>
-        </p:blipFill>
-        <p:spPr>
-          <a:xfrm>
-            <a:off x="822960" y="1965960"/>
-            <a:ext cx="2501019" cy="658368"/>
-          </a:xfrm>
-          <a:prstGeom prst="rect">
-            <a:avLst/>
-          </a:prstGeom>
-        </p:spPr>
-      </p:pic>
-      <p:sp>
-        <p:nvSpPr>
-          <p:cNvPr id="8" name="TextBox 7"/>
-          <p:cNvSpPr txBox="1"/>
-          <p:nvPr/>
-        </p:nvSpPr>
-        <p:spPr>
-          <a:xfrm>
-            <a:off x="5120640" y="1965960"/>
-            <a:ext cx="6583680" cy="822960"/>
-          </a:xfrm>
-          <a:prstGeom prst="rect">
-            <a:avLst/>
-          </a:prstGeom>
-          <a:noFill/>
-        </p:spPr>
-        <p:txBody>
-          <a:bodyPr wrap="square">
-            <a:spAutoFit/>
-          </a:bodyPr>
-          <a:lstStyle/>
-          <a:p>
-            <a:r>
-              <a:rPr sz="1600" b="0" i="0">
-                <a:solidFill>
-                  <a:srgbClr val="202020"/>
-                </a:solidFill>
-                <a:latin typeface="Times New Roman"/>
-              </a:rPr>
-              <a:t>The cross entropy with the soft targets, computed using the same high temperature in the softmax of the distilled model as was used for generating the soft targets</a:t>
-            </a:r>
-          </a:p>
-        </p:txBody>
-      </p:sp>
-      <p:pic>
-        <p:nvPicPr>
-          <p:cNvPr id="9" name="Picture 8" descr="m_chard.png"/>
-          <p:cNvPicPr>
-            <a:picLocks noChangeAspect="1"/>
-          </p:cNvPicPr>
-          <p:nvPr/>
-        </p:nvPicPr>
-        <p:blipFill>
-          <a:blip r:embed="rId4"/>
-          <a:stretch>
-            <a:fillRect/>
-          </a:stretch>
-        </p:blipFill>
-        <p:spPr>
-          <a:xfrm>
-            <a:off x="822960" y="2880360"/>
-            <a:ext cx="3133023" cy="566928"/>
-          </a:xfrm>
-          <a:prstGeom prst="rect">
-            <a:avLst/>
-          </a:prstGeom>
-        </p:spPr>
-      </p:pic>
-      <p:sp>
-        <p:nvSpPr>
-          <p:cNvPr id="10" name="TextBox 9"/>
-          <p:cNvSpPr txBox="1"/>
-          <p:nvPr/>
-        </p:nvSpPr>
-        <p:spPr>
-          <a:xfrm>
-            <a:off x="5120640" y="2880360"/>
-            <a:ext cx="6583680" cy="822960"/>
-          </a:xfrm>
-          <a:prstGeom prst="rect">
-            <a:avLst/>
-          </a:prstGeom>
-          <a:noFill/>
-        </p:spPr>
-        <p:txBody>
-          <a:bodyPr wrap="square">
-            <a:spAutoFit/>
-          </a:bodyPr>
-          <a:lstStyle/>
-          <a:p>
-            <a:r>
-              <a:rPr sz="1600" b="0" i="0">
-                <a:solidFill>
-                  <a:srgbClr val="202020"/>
-                </a:solidFill>
-                <a:latin typeface="Times New Roman"/>
-              </a:rPr>
-              <a:t>The cross entropy with the correct labels, computed using exactly the same logits in the softmax of the distilled model but at a temperature of 1</a:t>
-            </a:r>
-          </a:p>
-        </p:txBody>
-      </p:sp>
-      <p:sp>
-        <p:nvSpPr>
-          <p:cNvPr id="11" name="Rectangle 10"/>
-          <p:cNvSpPr/>
-          <p:nvPr/>
-        </p:nvSpPr>
-        <p:spPr>
-          <a:xfrm>
-            <a:off x="731520" y="3840480"/>
-            <a:ext cx="5303520" cy="1188720"/>
-          </a:xfrm>
-          <a:prstGeom prst="rect">
-            <a:avLst/>
-          </a:prstGeom>
-          <a:solidFill>
-            <a:srgbClr val="DAE6F2"/>
-          </a:solidFill>
-          <a:ln>
-            <a:solidFill>
-              <a:srgbClr val="D0D7DE"/>
-            </a:solidFill>
-          </a:ln>
-          <a:effectLst/>
-        </p:spPr>
-        <p:style>
-          <a:lnRef idx="1">
-            <a:schemeClr val="accent1"/>
-          </a:lnRef>
-          <a:fillRef idx="3">
-            <a:schemeClr val="accent1"/>
-          </a:fillRef>
-          <a:effectRef idx="2">
-            <a:schemeClr val="accent1"/>
-          </a:effectRef>
-          <a:fontRef idx="minor">
-            <a:schemeClr val="lt1"/>
-          </a:fontRef>
-        </p:style>
-        <p:txBody>
-          <a:bodyPr rtlCol="0" anchor="ctr" wrap="square"/>
-          <a:lstStyle/>
-          <a:p>
-            <a:pPr algn="l"/>
-            <a:r>
-              <a:rPr sz="1600" b="0">
-                <a:solidFill>
-                  <a:srgbClr val="1F4E79"/>
-                </a:solidFill>
-                <a:latin typeface="Times New Roman"/>
-              </a:rPr>
-              <a:t>α: we found that the best results were</a:t>
-            </a:r>
-          </a:p>
-          <a:p>
-            <a:pPr algn="l"/>
-            <a:r>
-              <a:rPr sz="1600" b="0">
-                <a:solidFill>
-                  <a:srgbClr val="1F4E79"/>
-                </a:solidFill>
-                <a:latin typeface="Times New Roman"/>
-              </a:rPr>
-              <a:t>generally obtained by using a considerably</a:t>
-            </a:r>
-          </a:p>
-          <a:p>
-            <a:pPr algn="l"/>
-            <a:r>
-              <a:rPr sz="1600" b="0">
-                <a:solidFill>
-                  <a:srgbClr val="1F4E79"/>
-                </a:solidFill>
-                <a:latin typeface="Times New Roman"/>
-              </a:rPr>
-              <a:t>lower weight on the second objective; α = 0.9</a:t>
-            </a:r>
-          </a:p>
-        </p:txBody>
-      </p:sp>
-      <p:sp>
-        <p:nvSpPr>
-          <p:cNvPr id="12" name="Rectangle 11"/>
-          <p:cNvSpPr/>
-          <p:nvPr/>
-        </p:nvSpPr>
-        <p:spPr>
-          <a:xfrm>
-            <a:off x="6309360" y="3840480"/>
-            <a:ext cx="5303520" cy="1188720"/>
-          </a:xfrm>
-          <a:prstGeom prst="rect">
-            <a:avLst/>
-          </a:prstGeom>
-          <a:solidFill>
-            <a:srgbClr val="FFF3CD"/>
-          </a:solidFill>
-          <a:ln>
-            <a:solidFill>
-              <a:srgbClr val="D0D7DE"/>
-            </a:solidFill>
-          </a:ln>
-          <a:effectLst/>
-        </p:spPr>
-        <p:style>
-          <a:lnRef idx="1">
-            <a:schemeClr val="accent1"/>
-          </a:lnRef>
-          <a:fillRef idx="3">
-            <a:schemeClr val="accent1"/>
-          </a:fillRef>
-          <a:effectRef idx="2">
-            <a:schemeClr val="accent1"/>
-          </a:effectRef>
-          <a:fontRef idx="minor">
-            <a:schemeClr val="lt1"/>
-          </a:fontRef>
-        </p:style>
-        <p:txBody>
-          <a:bodyPr rtlCol="0" anchor="ctr" wrap="square"/>
-          <a:lstStyle/>
-          <a:p>
-            <a:pPr algn="l"/>
-            <a:r>
-              <a:rPr sz="1600" b="0">
-                <a:solidFill>
-                  <a:srgbClr val="C03030"/>
-                </a:solidFill>
-                <a:latin typeface="Times New Roman"/>
-              </a:rPr>
-              <a:t>T²: the magnitudes of the gradients produced by</a:t>
-            </a:r>
-          </a:p>
-          <a:p>
-            <a:pPr algn="l"/>
-            <a:r>
-              <a:rPr sz="1600" b="0">
-                <a:solidFill>
-                  <a:srgbClr val="C03030"/>
-                </a:solidFill>
-                <a:latin typeface="Times New Roman"/>
-              </a:rPr>
-              <a:t>the soft targets scale as 1/T², so we multiply</a:t>
-            </a:r>
-          </a:p>
-          <a:p>
-            <a:pPr algn="l"/>
-            <a:r>
-              <a:rPr sz="1600" b="0">
-                <a:solidFill>
-                  <a:srgbClr val="C03030"/>
-                </a:solidFill>
-                <a:latin typeface="Times New Roman"/>
-              </a:rPr>
-              <a:t>them by T² (checked on slide 13)</a:t>
-            </a:r>
-          </a:p>
-        </p:txBody>
-      </p:sp>
-      <p:sp>
-        <p:nvSpPr>
-          <p:cNvPr id="13" name="TextBox 12"/>
-          <p:cNvSpPr txBox="1"/>
-          <p:nvPr/>
-        </p:nvSpPr>
-        <p:spPr>
-          <a:xfrm>
-            <a:off x="731520" y="5257800"/>
+            <a:off x="731520" y="5166360"/>
             <a:ext cx="10881360" cy="914400"/>
           </a:xfrm>
           <a:prstGeom prst="rect">
@@ -25610,13 +24810,13 @@
           <a:lstStyle/>
           <a:p>
             <a:r>
-              <a:rPr sz="1900" b="1" i="0">
+              <a:rPr sz="1600" b="0" i="0">
                 <a:solidFill>
-                  <a:srgbClr val="1E7A45"/>
+                  <a:srgbClr val="59636E"/>
                 </a:solidFill>
                 <a:latin typeface="Times New Roman"/>
               </a:rPr>
-              <a:t>After it has been trained, the distilled model uses a temperature of 1.</a:t>
+              <a:t>Check: exp(2) = 7.3891, exp(1) = 2.7183, and exp(0) = 1, which sum to 11.1073.</a:t>
             </a:r>
           </a:p>
         </p:txBody>
@@ -25994,6 +25194,96 @@
                       </p:childTnLst>
                     </p:cTn>
                   </p:par>
+                  <p:par>
+                    <p:cTn id="35" fill="hold">
+                      <p:stCondLst>
+                        <p:cond delay="indefinite"/>
+                      </p:stCondLst>
+                      <p:childTnLst>
+                        <p:par>
+                          <p:cTn id="36" fill="hold">
+                            <p:stCondLst>
+                              <p:cond delay="0"/>
+                            </p:stCondLst>
+                            <p:childTnLst>
+                              <p:par>
+                                <p:cTn id="37" presetID="1" presetClass="entr" presetSubtype="0" fill="hold" grpId="0" nodeType="clickEffect">
+                                  <p:stCondLst>
+                                    <p:cond delay="0"/>
+                                  </p:stCondLst>
+                                  <p:childTnLst>
+                                    <p:set>
+                                      <p:cBhvr>
+                                        <p:cTn id="38" dur="1" fill="hold">
+                                          <p:stCondLst>
+                                            <p:cond delay="0"/>
+                                          </p:stCondLst>
+                                        </p:cTn>
+                                        <p:tgtEl>
+                                          <p:spTgt spid="14"/>
+                                        </p:tgtEl>
+                                        <p:attrNameLst>
+                                          <p:attrName>style.visibility</p:attrName>
+                                        </p:attrNameLst>
+                                      </p:cBhvr>
+                                      <p:to>
+                                        <p:strVal val="visible"/>
+                                      </p:to>
+                                    </p:set>
+                                  </p:childTnLst>
+                                </p:cTn>
+                              </p:par>
+                            </p:childTnLst>
+                          </p:cTn>
+                        </p:par>
+                      </p:childTnLst>
+                    </p:cTn>
+                  </p:par>
+                  <p:par>
+                    <p:cTn id="39" fill="hold">
+                      <p:stCondLst>
+                        <p:cond delay="indefinite"/>
+                      </p:stCondLst>
+                      <p:childTnLst>
+                        <p:par>
+                          <p:cTn id="40" fill="hold">
+                            <p:stCondLst>
+                              <p:cond delay="0"/>
+                            </p:stCondLst>
+                            <p:childTnLst>
+                              <p:par>
+                                <p:cTn id="41" presetID="1" presetClass="entr" presetSubtype="0" fill="hold" grpId="0" nodeType="clickEffect">
+                                  <p:stCondLst>
+                                    <p:cond delay="0"/>
+                                  </p:stCondLst>
+                                  <p:childTnLst>
+                                    <p:set>
+                                      <p:cBhvr>
+                                        <p:cTn id="42" dur="1" fill="hold">
+                                          <p:stCondLst>
+                                            <p:cond delay="0"/>
+                                          </p:stCondLst>
+                                        </p:cTn>
+                                        <p:tgtEl>
+                                          <p:spTgt spid="15"/>
+                                        </p:tgtEl>
+                                        <p:attrNameLst>
+                                          <p:attrName>style.visibility</p:attrName>
+                                        </p:attrNameLst>
+                                      </p:cBhvr>
+                                      <p:to>
+                                        <p:strVal val="visible"/>
+                                      </p:to>
+                                    </p:set>
+                                  </p:childTnLst>
+                                </p:cTn>
+                              </p:par>
+                            </p:childTnLst>
+                          </p:cTn>
+                        </p:par>
+                      </p:childTnLst>
+                    </p:cTn>
+                  </p:par>
                 </p:childTnLst>
               </p:cTn>
               <p:prevCondLst>
@@ -26018,12 +25308,1032 @@
     <p:bldLst>
       <p:bldP spid="6" grpId="0" animBg="1"/>
       <p:bldP spid="7" grpId="0" animBg="1"/>
+      <p:bldGraphic spid="8" grpId="0">
+        <p:bldAsOne/>
+      </p:bldGraphic>
+      <p:bldGraphic spid="9" grpId="0">
+        <p:bldAsOne/>
+      </p:bldGraphic>
+      <p:bldGraphic spid="10" grpId="0">
+        <p:bldAsOne/>
+      </p:bldGraphic>
+      <p:bldGraphic spid="11" grpId="0">
+        <p:bldAsOne/>
+      </p:bldGraphic>
+      <p:bldP spid="12" grpId="0" animBg="1"/>
+      <p:bldGraphic spid="13" grpId="0">
+        <p:bldAsOne/>
+      </p:bldGraphic>
+      <p:bldP spid="14" grpId="0" animBg="1"/>
+      <p:bldP spid="15" grpId="0" animBg="1"/>
+    </p:bldLst>
+  </p:timing>
+</p:sld>
+</file>
+
+<file path=ppt/slides/slide9.xml><?xml version="1.0" encoding="utf-8"?>
+<p:sld xmlns:a="http://schemas.openxmlformats.org/drawingml/2006/main" xmlns:p="http://schemas.openxmlformats.org/presentationml/2006/main" xmlns:r="http://schemas.openxmlformats.org/officeDocument/2006/relationships">
+  <p:cSld>
+    <p:spTree>
+      <p:nvGrpSpPr>
+        <p:cNvPr id="1" name=""/>
+        <p:cNvGrpSpPr/>
+        <p:nvPr/>
+      </p:nvGrpSpPr>
+      <p:grpSpPr/>
+      <p:sp>
+        <p:nvSpPr>
+          <p:cNvPr id="2" name="Rectangle 1"/>
+          <p:cNvSpPr/>
+          <p:nvPr/>
+        </p:nvSpPr>
+        <p:spPr>
+          <a:xfrm>
+            <a:off x="0" y="0"/>
+            <a:ext cx="12191695" cy="6858000"/>
+          </a:xfrm>
+          <a:prstGeom prst="rect">
+            <a:avLst/>
+          </a:prstGeom>
+          <a:solidFill>
+            <a:srgbClr val="FFFFFF"/>
+          </a:solidFill>
+          <a:ln>
+            <a:noFill/>
+          </a:ln>
+          <a:effectLst/>
+        </p:spPr>
+        <p:style>
+          <a:lnRef idx="1">
+            <a:schemeClr val="accent1"/>
+          </a:lnRef>
+          <a:fillRef idx="3">
+            <a:schemeClr val="accent1"/>
+          </a:fillRef>
+          <a:effectRef idx="2">
+            <a:schemeClr val="accent1"/>
+          </a:effectRef>
+          <a:fontRef idx="minor">
+            <a:schemeClr val="lt1"/>
+          </a:fontRef>
+        </p:style>
+        <p:txBody>
+          <a:bodyPr rtlCol="0" anchor="ctr"/>
+          <a:lstStyle/>
+          <a:p>
+            <a:pPr algn="ctr"/>
+          </a:p>
+        </p:txBody>
+      </p:sp>
+      <p:sp>
+        <p:nvSpPr>
+          <p:cNvPr id="3" name="Rectangle 2"/>
+          <p:cNvSpPr/>
+          <p:nvPr/>
+        </p:nvSpPr>
+        <p:spPr>
+          <a:xfrm>
+            <a:off x="0" y="0"/>
+            <a:ext cx="12191695" cy="868680"/>
+          </a:xfrm>
+          <a:prstGeom prst="rect">
+            <a:avLst/>
+          </a:prstGeom>
+          <a:solidFill>
+            <a:srgbClr val="1F4E79"/>
+          </a:solidFill>
+          <a:ln>
+            <a:noFill/>
+          </a:ln>
+          <a:effectLst/>
+        </p:spPr>
+        <p:style>
+          <a:lnRef idx="1">
+            <a:schemeClr val="accent1"/>
+          </a:lnRef>
+          <a:fillRef idx="3">
+            <a:schemeClr val="accent1"/>
+          </a:fillRef>
+          <a:effectRef idx="2">
+            <a:schemeClr val="accent1"/>
+          </a:effectRef>
+          <a:fontRef idx="minor">
+            <a:schemeClr val="lt1"/>
+          </a:fontRef>
+        </p:style>
+        <p:txBody>
+          <a:bodyPr rtlCol="0" anchor="ctr"/>
+          <a:lstStyle/>
+          <a:p>
+            <a:pPr algn="ctr"/>
+          </a:p>
+        </p:txBody>
+      </p:sp>
+      <p:sp>
+        <p:nvSpPr>
+          <p:cNvPr id="4" name="TextBox 3"/>
+          <p:cNvSpPr txBox="1"/>
+          <p:nvPr/>
+        </p:nvSpPr>
+        <p:spPr>
+          <a:xfrm>
+            <a:off x="411480" y="54864"/>
+            <a:ext cx="11338560" cy="457200"/>
+          </a:xfrm>
+          <a:prstGeom prst="rect">
+            <a:avLst/>
+          </a:prstGeom>
+          <a:noFill/>
+        </p:spPr>
+        <p:txBody>
+          <a:bodyPr wrap="square">
+            <a:spAutoFit/>
+          </a:bodyPr>
+          <a:lstStyle/>
+          <a:p>
+            <a:r>
+              <a:rPr sz="2800" b="1" i="0">
+                <a:solidFill>
+                  <a:srgbClr val="FFFFFF"/>
+                </a:solidFill>
+                <a:latin typeface="Times New Roman"/>
+              </a:rPr>
+              <a:t>2. Soft targets and hard targets</a:t>
+            </a:r>
+          </a:p>
+        </p:txBody>
+      </p:sp>
+      <p:sp>
+        <p:nvSpPr>
+          <p:cNvPr id="5" name="TextBox 4"/>
+          <p:cNvSpPr txBox="1"/>
+          <p:nvPr/>
+        </p:nvSpPr>
+        <p:spPr>
+          <a:xfrm>
+            <a:off x="411480" y="521207"/>
+            <a:ext cx="11338560" cy="301752"/>
+          </a:xfrm>
+          <a:prstGeom prst="rect">
+            <a:avLst/>
+          </a:prstGeom>
+          <a:noFill/>
+        </p:spPr>
+        <p:txBody>
+          <a:bodyPr wrap="square">
+            <a:spAutoFit/>
+          </a:bodyPr>
+          <a:lstStyle/>
+          <a:p>
+            <a:r>
+              <a:rPr sz="1400" b="0" i="0">
+                <a:solidFill>
+                  <a:srgbClr val="C7D6E5"/>
+                </a:solidFill>
+                <a:latin typeface="Times New Roman"/>
+              </a:rPr>
+              <a:t>The same 2 at two temperatures</a:t>
+            </a:r>
+          </a:p>
+        </p:txBody>
+      </p:sp>
+      <p:pic>
+        <p:nvPicPr>
+          <p:cNvPr id="6" name="Picture 5" descr="f_soft.png"/>
+          <p:cNvPicPr>
+            <a:picLocks noChangeAspect="1"/>
+          </p:cNvPicPr>
+          <p:nvPr/>
+        </p:nvPicPr>
+        <p:blipFill>
+          <a:blip r:embed="rId2"/>
+          <a:stretch>
+            <a:fillRect/>
+          </a:stretch>
+        </p:blipFill>
+        <p:spPr>
+          <a:xfrm>
+            <a:off x="548640" y="1051560"/>
+            <a:ext cx="6400800" cy="2578100"/>
+          </a:xfrm>
+          <a:prstGeom prst="rect">
+            <a:avLst/>
+          </a:prstGeom>
+        </p:spPr>
+      </p:pic>
+      <p:graphicFrame>
+        <p:nvGraphicFramePr>
+          <p:cNvPr id="7" name="Table 6"/>
+          <p:cNvGraphicFramePr>
+            <a:graphicFrameLocks noGrp="1"/>
+          </p:cNvGraphicFramePr>
+          <p:nvPr/>
+        </p:nvGraphicFramePr>
+        <p:xfrm>
+          <a:off x="7223760" y="1143000"/>
+          <a:ext cx="4480558" cy="1316736"/>
+        </p:xfrm>
+        <a:graphic>
+          <a:graphicData uri="http://schemas.openxmlformats.org/drawingml/2006/table">
+            <a:tbl>
+              <a:tblPr bandRow="1">
+                <a:tableStyleId>{5C22544A-7EE6-4342-B048-85BDC9FD1C3A}</a:tableStyleId>
+              </a:tblPr>
+              <a:tblGrid>
+                <a:gridCol w="1650732"/>
+                <a:gridCol w="1414913"/>
+                <a:gridCol w="1414913"/>
+              </a:tblGrid>
+              <a:tr h="329184">
+                <a:tc>
+                  <a:txBody>
+                    <a:bodyPr/>
+                    <a:lstStyle/>
+                    <a:p>
+                      <a:pPr algn="ctr"/>
+                      <a:r>
+                        <a:rPr sz="1600" b="1">
+                          <a:solidFill>
+                            <a:srgbClr val="FFFFFF"/>
+                          </a:solidFill>
+                          <a:latin typeface="Times New Roman"/>
+                        </a:rPr>
+                        <a:t/>
+                      </a:r>
+                    </a:p>
+                  </a:txBody>
+                  <a:tcPr marL="36576" marR="36576" marT="9144" marB="9144">
+                    <a:solidFill>
+                      <a:srgbClr val="1F4E79"/>
+                    </a:solidFill>
+                  </a:tcPr>
+                </a:tc>
+                <a:tc>
+                  <a:txBody>
+                    <a:bodyPr/>
+                    <a:lstStyle/>
+                    <a:p>
+                      <a:pPr algn="ctr"/>
+                      <a:r>
+                        <a:rPr sz="1600" b="1">
+                          <a:solidFill>
+                            <a:srgbClr val="FFFFFF"/>
+                          </a:solidFill>
+                          <a:latin typeface="Times New Roman"/>
+                        </a:rPr>
+                        <a:t>T = 1</a:t>
+                      </a:r>
+                    </a:p>
+                  </a:txBody>
+                  <a:tcPr marL="36576" marR="36576" marT="9144" marB="9144">
+                    <a:solidFill>
+                      <a:srgbClr val="1F4E79"/>
+                    </a:solidFill>
+                  </a:tcPr>
+                </a:tc>
+                <a:tc>
+                  <a:txBody>
+                    <a:bodyPr/>
+                    <a:lstStyle/>
+                    <a:p>
+                      <a:pPr algn="ctr"/>
+                      <a:r>
+                        <a:rPr sz="1600" b="1">
+                          <a:solidFill>
+                            <a:srgbClr val="FFFFFF"/>
+                          </a:solidFill>
+                          <a:latin typeface="Times New Roman"/>
+                        </a:rPr>
+                        <a:t>T = 4</a:t>
+                      </a:r>
+                    </a:p>
+                  </a:txBody>
+                  <a:tcPr marL="36576" marR="36576" marT="9144" marB="9144">
+                    <a:solidFill>
+                      <a:srgbClr val="1F4E79"/>
+                    </a:solidFill>
+                  </a:tcPr>
+                </a:tc>
+              </a:tr>
+              <a:tr h="329184">
+                <a:tc>
+                  <a:txBody>
+                    <a:bodyPr/>
+                    <a:lstStyle/>
+                    <a:p>
+                      <a:pPr algn="ctr"/>
+                      <a:r>
+                        <a:rPr sz="1600" b="0">
+                          <a:solidFill>
+                            <a:srgbClr val="202020"/>
+                          </a:solidFill>
+                          <a:latin typeface="Times New Roman"/>
+                        </a:rPr>
+                        <a:t>P(3)</a:t>
+                      </a:r>
+                    </a:p>
+                  </a:txBody>
+                  <a:tcPr marL="36576" marR="36576" marT="9144" marB="9144">
+                    <a:solidFill>
+                      <a:srgbClr val="FFFFFF"/>
+                    </a:solidFill>
+                  </a:tcPr>
+                </a:tc>
+                <a:tc>
+                  <a:txBody>
+                    <a:bodyPr/>
+                    <a:lstStyle/>
+                    <a:p>
+                      <a:pPr algn="ctr"/>
+                      <a:r>
+                        <a:rPr sz="1600" b="0">
+                          <a:solidFill>
+                            <a:srgbClr val="202020"/>
+                          </a:solidFill>
+                          <a:latin typeface="Times New Roman"/>
+                        </a:rPr>
+                        <a:t>0.0180</a:t>
+                      </a:r>
+                    </a:p>
+                  </a:txBody>
+                  <a:tcPr marL="36576" marR="36576" marT="9144" marB="9144">
+                    <a:solidFill>
+                      <a:srgbClr val="FFFFFF"/>
+                    </a:solidFill>
+                  </a:tcPr>
+                </a:tc>
+                <a:tc>
+                  <a:txBody>
+                    <a:bodyPr/>
+                    <a:lstStyle/>
+                    <a:p>
+                      <a:pPr algn="ctr"/>
+                      <a:r>
+                        <a:rPr sz="1600" b="0">
+                          <a:solidFill>
+                            <a:srgbClr val="202020"/>
+                          </a:solidFill>
+                          <a:latin typeface="Times New Roman"/>
+                        </a:rPr>
+                        <a:t>0.2447</a:t>
+                      </a:r>
+                    </a:p>
+                  </a:txBody>
+                  <a:tcPr marL="36576" marR="36576" marT="9144" marB="9144">
+                    <a:solidFill>
+                      <a:srgbClr val="FFFFFF"/>
+                    </a:solidFill>
+                  </a:tcPr>
+                </a:tc>
+              </a:tr>
+              <a:tr h="329184">
+                <a:tc>
+                  <a:txBody>
+                    <a:bodyPr/>
+                    <a:lstStyle/>
+                    <a:p>
+                      <a:pPr algn="ctr"/>
+                      <a:r>
+                        <a:rPr sz="1600" b="0">
+                          <a:solidFill>
+                            <a:srgbClr val="202020"/>
+                          </a:solidFill>
+                          <a:latin typeface="Times New Roman"/>
+                        </a:rPr>
+                        <a:t>P(7)</a:t>
+                      </a:r>
+                    </a:p>
+                  </a:txBody>
+                  <a:tcPr marL="36576" marR="36576" marT="9144" marB="9144">
+                    <a:solidFill>
+                      <a:srgbClr val="FFFFFF"/>
+                    </a:solidFill>
+                  </a:tcPr>
+                </a:tc>
+                <a:tc>
+                  <a:txBody>
+                    <a:bodyPr/>
+                    <a:lstStyle/>
+                    <a:p>
+                      <a:pPr algn="ctr"/>
+                      <a:r>
+                        <a:rPr sz="1600" b="0">
+                          <a:solidFill>
+                            <a:srgbClr val="202020"/>
+                          </a:solidFill>
+                          <a:latin typeface="Times New Roman"/>
+                        </a:rPr>
+                        <a:t>0.0003</a:t>
+                      </a:r>
+                    </a:p>
+                  </a:txBody>
+                  <a:tcPr marL="36576" marR="36576" marT="9144" marB="9144">
+                    <a:solidFill>
+                      <a:srgbClr val="FFFFFF"/>
+                    </a:solidFill>
+                  </a:tcPr>
+                </a:tc>
+                <a:tc>
+                  <a:txBody>
+                    <a:bodyPr/>
+                    <a:lstStyle/>
+                    <a:p>
+                      <a:pPr algn="ctr"/>
+                      <a:r>
+                        <a:rPr sz="1600" b="0">
+                          <a:solidFill>
+                            <a:srgbClr val="202020"/>
+                          </a:solidFill>
+                          <a:latin typeface="Times New Roman"/>
+                        </a:rPr>
+                        <a:t>0.0900</a:t>
+                      </a:r>
+                    </a:p>
+                  </a:txBody>
+                  <a:tcPr marL="36576" marR="36576" marT="9144" marB="9144">
+                    <a:solidFill>
+                      <a:srgbClr val="FFFFFF"/>
+                    </a:solidFill>
+                  </a:tcPr>
+                </a:tc>
+              </a:tr>
+              <a:tr h="329184">
+                <a:tc>
+                  <a:txBody>
+                    <a:bodyPr/>
+                    <a:lstStyle/>
+                    <a:p>
+                      <a:pPr algn="ctr"/>
+                      <a:r>
+                        <a:rPr sz="1600" b="0">
+                          <a:solidFill>
+                            <a:srgbClr val="202020"/>
+                          </a:solidFill>
+                          <a:latin typeface="Times New Roman"/>
+                        </a:rPr>
+                        <a:t>P(3) / P(7)</a:t>
+                      </a:r>
+                    </a:p>
+                  </a:txBody>
+                  <a:tcPr marL="36576" marR="36576" marT="9144" marB="9144">
+                    <a:solidFill>
+                      <a:srgbClr val="FFFFFF"/>
+                    </a:solidFill>
+                  </a:tcPr>
+                </a:tc>
+                <a:tc>
+                  <a:txBody>
+                    <a:bodyPr/>
+                    <a:lstStyle/>
+                    <a:p>
+                      <a:pPr algn="ctr"/>
+                      <a:r>
+                        <a:rPr sz="1600" b="0">
+                          <a:solidFill>
+                            <a:srgbClr val="202020"/>
+                          </a:solidFill>
+                          <a:latin typeface="Times New Roman"/>
+                        </a:rPr>
+                        <a:t>54.60</a:t>
+                      </a:r>
+                    </a:p>
+                  </a:txBody>
+                  <a:tcPr marL="36576" marR="36576" marT="9144" marB="9144">
+                    <a:solidFill>
+                      <a:srgbClr val="FFF3CD"/>
+                    </a:solidFill>
+                  </a:tcPr>
+                </a:tc>
+                <a:tc>
+                  <a:txBody>
+                    <a:bodyPr/>
+                    <a:lstStyle/>
+                    <a:p>
+                      <a:pPr algn="ctr"/>
+                      <a:r>
+                        <a:rPr sz="1600" b="0">
+                          <a:solidFill>
+                            <a:srgbClr val="202020"/>
+                          </a:solidFill>
+                          <a:latin typeface="Times New Roman"/>
+                        </a:rPr>
+                        <a:t>2.72</a:t>
+                      </a:r>
+                    </a:p>
+                  </a:txBody>
+                  <a:tcPr marL="36576" marR="36576" marT="9144" marB="9144">
+                    <a:solidFill>
+                      <a:srgbClr val="FFF3CD"/>
+                    </a:solidFill>
+                  </a:tcPr>
+                </a:tc>
+              </a:tr>
+            </a:tbl>
+          </a:graphicData>
+        </a:graphic>
+      </p:graphicFrame>
+      <p:sp>
+        <p:nvSpPr>
+          <p:cNvPr id="8" name="TextBox 7"/>
+          <p:cNvSpPr txBox="1"/>
+          <p:nvPr/>
+        </p:nvSpPr>
+        <p:spPr>
+          <a:xfrm>
+            <a:off x="7223760" y="2606040"/>
+            <a:ext cx="4480560" cy="1097280"/>
+          </a:xfrm>
+          <a:prstGeom prst="rect">
+            <a:avLst/>
+          </a:prstGeom>
+          <a:noFill/>
+        </p:spPr>
+        <p:txBody>
+          <a:bodyPr wrap="square">
+            <a:spAutoFit/>
+          </a:bodyPr>
+          <a:lstStyle/>
+          <a:p>
+            <a:r>
+              <a:rPr sz="1600" b="0" i="0">
+                <a:solidFill>
+                  <a:srgbClr val="59636E"/>
+                </a:solidFill>
+                <a:latin typeface="Times New Roman"/>
+              </a:rPr>
+              <a:t>The ratio equals exp((4 − 0)/T):</a:t>
+            </a:r>
+          </a:p>
+          <a:p>
+            <a:r>
+              <a:rPr sz="1600" b="0" i="0">
+                <a:solidFill>
+                  <a:srgbClr val="59636E"/>
+                </a:solidFill>
+                <a:latin typeface="Times New Roman"/>
+              </a:rPr>
+              <a:t>e⁴ = 54.60 at T = 1 and e¹ = 2.72 at T = 4.</a:t>
+            </a:r>
+          </a:p>
+        </p:txBody>
+      </p:sp>
+      <p:sp>
+        <p:nvSpPr>
+          <p:cNvPr id="9" name="Rectangle 8"/>
+          <p:cNvSpPr/>
+          <p:nvPr/>
+        </p:nvSpPr>
+        <p:spPr>
+          <a:xfrm>
+            <a:off x="731520" y="3977639"/>
+            <a:ext cx="10881360" cy="731520"/>
+          </a:xfrm>
+          <a:prstGeom prst="rect">
+            <a:avLst/>
+          </a:prstGeom>
+          <a:solidFill>
+            <a:srgbClr val="DCF0E4"/>
+          </a:solidFill>
+          <a:ln>
+            <a:solidFill>
+              <a:srgbClr val="D0D7DE"/>
+            </a:solidFill>
+          </a:ln>
+          <a:effectLst/>
+        </p:spPr>
+        <p:style>
+          <a:lnRef idx="1">
+            <a:schemeClr val="accent1"/>
+          </a:lnRef>
+          <a:fillRef idx="3">
+            <a:schemeClr val="accent1"/>
+          </a:fillRef>
+          <a:effectRef idx="2">
+            <a:schemeClr val="accent1"/>
+          </a:effectRef>
+          <a:fontRef idx="minor">
+            <a:schemeClr val="lt1"/>
+          </a:fontRef>
+        </p:style>
+        <p:txBody>
+          <a:bodyPr rtlCol="0" anchor="ctr" wrap="square"/>
+          <a:lstStyle/>
+          <a:p>
+            <a:pPr algn="l"/>
+            <a:r>
+              <a:rPr sz="1700" b="1">
+                <a:solidFill>
+                  <a:srgbClr val="1E7A45"/>
+                </a:solidFill>
+                <a:latin typeface="Times New Roman"/>
+              </a:rPr>
+              <a:t>Soft targets: class probabilities of the cumbersome model at a high temperature, e.g. (0.6652, 0.2447, 0.0900)</a:t>
+            </a:r>
+          </a:p>
+        </p:txBody>
+      </p:sp>
+      <p:sp>
+        <p:nvSpPr>
+          <p:cNvPr id="10" name="Rectangle 9"/>
+          <p:cNvSpPr/>
+          <p:nvPr/>
+        </p:nvSpPr>
+        <p:spPr>
+          <a:xfrm>
+            <a:off x="731520" y="4800600"/>
+            <a:ext cx="10881360" cy="731520"/>
+          </a:xfrm>
+          <a:prstGeom prst="rect">
+            <a:avLst/>
+          </a:prstGeom>
+          <a:solidFill>
+            <a:srgbClr val="F6F8FA"/>
+          </a:solidFill>
+          <a:ln>
+            <a:solidFill>
+              <a:srgbClr val="D0D7DE"/>
+            </a:solidFill>
+          </a:ln>
+          <a:effectLst/>
+        </p:spPr>
+        <p:style>
+          <a:lnRef idx="1">
+            <a:schemeClr val="accent1"/>
+          </a:lnRef>
+          <a:fillRef idx="3">
+            <a:schemeClr val="accent1"/>
+          </a:fillRef>
+          <a:effectRef idx="2">
+            <a:schemeClr val="accent1"/>
+          </a:effectRef>
+          <a:fontRef idx="minor">
+            <a:schemeClr val="lt1"/>
+          </a:fontRef>
+        </p:style>
+        <p:txBody>
+          <a:bodyPr rtlCol="0" anchor="ctr" wrap="square"/>
+          <a:lstStyle/>
+          <a:p>
+            <a:pPr algn="l"/>
+            <a:r>
+              <a:rPr sz="1700" b="1">
+                <a:solidFill>
+                  <a:srgbClr val="1F4E79"/>
+                </a:solidFill>
+                <a:latin typeface="Times New Roman"/>
+              </a:rPr>
+              <a:t>Hard targets: the correct labels, here (1, 0, 0)</a:t>
+            </a:r>
+          </a:p>
+        </p:txBody>
+      </p:sp>
+      <p:sp>
+        <p:nvSpPr>
+          <p:cNvPr id="11" name="TextBox 10"/>
+          <p:cNvSpPr txBox="1"/>
+          <p:nvPr/>
+        </p:nvSpPr>
+        <p:spPr>
+          <a:xfrm>
+            <a:off x="731520" y="5669280"/>
+            <a:ext cx="10881360" cy="822960"/>
+          </a:xfrm>
+          <a:prstGeom prst="rect">
+            <a:avLst/>
+          </a:prstGeom>
+          <a:noFill/>
+        </p:spPr>
+        <p:txBody>
+          <a:bodyPr wrap="square">
+            <a:spAutoFit/>
+          </a:bodyPr>
+          <a:lstStyle/>
+          <a:p>
+            <a:r>
+              <a:rPr sz="1500" b="0" i="0">
+                <a:solidFill>
+                  <a:srgbClr val="202020"/>
+                </a:solidFill>
+                <a:latin typeface="Times New Roman"/>
+              </a:rPr>
+              <a:t>When the soft targets have high entropy, they provide much more information per training case than hard targets and much less variance in the gradient between training cases, so the small model can often be trained on much less data and using a much higher learning rate.</a:t>
+            </a:r>
+          </a:p>
+        </p:txBody>
+      </p:sp>
+    </p:spTree>
+  </p:cSld>
+  <p:clrMapOvr>
+    <a:masterClrMapping/>
+  </p:clrMapOvr>
+  <p:timing>
+    <p:tnLst>
+      <p:par>
+        <p:cTn id="1" dur="indefinite" restart="never" nodeType="tmRoot">
+          <p:childTnLst>
+            <p:seq concurrent="1" nextAc="seek">
+              <p:cTn id="2" dur="indefinite" nodeType="mainSeq">
+                <p:childTnLst>
+                  <p:par>
+                    <p:cTn id="3" fill="hold">
+                      <p:stCondLst>
+                        <p:cond delay="indefinite"/>
+                      </p:stCondLst>
+                      <p:childTnLst>
+                        <p:par>
+                          <p:cTn id="4" fill="hold">
+                            <p:stCondLst>
+                              <p:cond delay="0"/>
+                            </p:stCondLst>
+                            <p:childTnLst>
+                              <p:par>
+                                <p:cTn id="5" presetID="1" presetClass="entr" presetSubtype="0" fill="hold" grpId="0" nodeType="clickEffect">
+                                  <p:stCondLst>
+                                    <p:cond delay="0"/>
+                                  </p:stCondLst>
+                                  <p:childTnLst>
+                                    <p:set>
+                                      <p:cBhvr>
+                                        <p:cTn id="6" dur="1" fill="hold">
+                                          <p:stCondLst>
+                                            <p:cond delay="0"/>
+                                          </p:stCondLst>
+                                        </p:cTn>
+                                        <p:tgtEl>
+                                          <p:spTgt spid="6"/>
+                                        </p:tgtEl>
+                                        <p:attrNameLst>
+                                          <p:attrName>style.visibility</p:attrName>
+                                        </p:attrNameLst>
+                                      </p:cBhvr>
+                                      <p:to>
+                                        <p:strVal val="visible"/>
+                                      </p:to>
+                                    </p:set>
+                                  </p:childTnLst>
+                                </p:cTn>
+                              </p:par>
+                            </p:childTnLst>
+                          </p:cTn>
+                        </p:par>
+                      </p:childTnLst>
+                    </p:cTn>
+                  </p:par>
+                  <p:par>
+                    <p:cTn id="7" fill="hold">
+                      <p:stCondLst>
+                        <p:cond delay="indefinite"/>
+                      </p:stCondLst>
+                      <p:childTnLst>
+                        <p:par>
+                          <p:cTn id="8" fill="hold">
+                            <p:stCondLst>
+                              <p:cond delay="0"/>
+                            </p:stCondLst>
+                            <p:childTnLst>
+                              <p:par>
+                                <p:cTn id="9" presetID="1" presetClass="entr" presetSubtype="0" fill="hold" grpId="0" nodeType="clickEffect">
+                                  <p:stCondLst>
+                                    <p:cond delay="0"/>
+                                  </p:stCondLst>
+                                  <p:childTnLst>
+                                    <p:set>
+                                      <p:cBhvr>
+                                        <p:cTn id="10" dur="1" fill="hold">
+                                          <p:stCondLst>
+                                            <p:cond delay="0"/>
+                                          </p:stCondLst>
+                                        </p:cTn>
+                                        <p:tgtEl>
+                                          <p:spTgt spid="7"/>
+                                        </p:tgtEl>
+                                        <p:attrNameLst>
+                                          <p:attrName>style.visibility</p:attrName>
+                                        </p:attrNameLst>
+                                      </p:cBhvr>
+                                      <p:to>
+                                        <p:strVal val="visible"/>
+                                      </p:to>
+                                    </p:set>
+                                  </p:childTnLst>
+                                </p:cTn>
+                              </p:par>
+                            </p:childTnLst>
+                          </p:cTn>
+                        </p:par>
+                      </p:childTnLst>
+                    </p:cTn>
+                  </p:par>
+                  <p:par>
+                    <p:cTn id="11" fill="hold">
+                      <p:stCondLst>
+                        <p:cond delay="indefinite"/>
+                      </p:stCondLst>
+                      <p:childTnLst>
+                        <p:par>
+                          <p:cTn id="12" fill="hold">
+                            <p:stCondLst>
+                              <p:cond delay="0"/>
+                            </p:stCondLst>
+                            <p:childTnLst>
+                              <p:par>
+                                <p:cTn id="13" presetID="1" presetClass="entr" presetSubtype="0" fill="hold" grpId="0" nodeType="clickEffect">
+                                  <p:stCondLst>
+                                    <p:cond delay="0"/>
+                                  </p:stCondLst>
+                                  <p:childTnLst>
+                                    <p:set>
+                                      <p:cBhvr>
+                                        <p:cTn id="14" dur="1" fill="hold">
+                                          <p:stCondLst>
+                                            <p:cond delay="0"/>
+                                          </p:stCondLst>
+                                        </p:cTn>
+                                        <p:tgtEl>
+                                          <p:spTgt spid="8"/>
+                                        </p:tgtEl>
+                                        <p:attrNameLst>
+                                          <p:attrName>style.visibility</p:attrName>
+                                        </p:attrNameLst>
+                                      </p:cBhvr>
+                                      <p:to>
+                                        <p:strVal val="visible"/>
+                                      </p:to>
+                                    </p:set>
+                                  </p:childTnLst>
+                                </p:cTn>
+                              </p:par>
+                            </p:childTnLst>
+                          </p:cTn>
+                        </p:par>
+                      </p:childTnLst>
+                    </p:cTn>
+                  </p:par>
+                  <p:par>
+                    <p:cTn id="15" fill="hold">
+                      <p:stCondLst>
+                        <p:cond delay="indefinite"/>
+                      </p:stCondLst>
+                      <p:childTnLst>
+                        <p:par>
+                          <p:cTn id="16" fill="hold">
+                            <p:stCondLst>
+                              <p:cond delay="0"/>
+                            </p:stCondLst>
+                            <p:childTnLst>
+                              <p:par>
+                                <p:cTn id="17" presetID="1" presetClass="entr" presetSubtype="0" fill="hold" grpId="0" nodeType="clickEffect">
+                                  <p:stCondLst>
+                                    <p:cond delay="0"/>
+                                  </p:stCondLst>
+                                  <p:childTnLst>
+                                    <p:set>
+                                      <p:cBhvr>
+                                        <p:cTn id="18" dur="1" fill="hold">
+                                          <p:stCondLst>
+                                            <p:cond delay="0"/>
+                                          </p:stCondLst>
+                                        </p:cTn>
+                                        <p:tgtEl>
+                                          <p:spTgt spid="9"/>
+                                        </p:tgtEl>
+                                        <p:attrNameLst>
+                                          <p:attrName>style.visibility</p:attrName>
+                                        </p:attrNameLst>
+                                      </p:cBhvr>
+                                      <p:to>
+                                        <p:strVal val="visible"/>
+                                      </p:to>
+                                    </p:set>
+                                  </p:childTnLst>
+                                </p:cTn>
+                              </p:par>
+                            </p:childTnLst>
+                          </p:cTn>
+                        </p:par>
+                      </p:childTnLst>
+                    </p:cTn>
+                  </p:par>
+                  <p:par>
+                    <p:cTn id="19" fill="hold">
+                      <p:stCondLst>
+                        <p:cond delay="indefinite"/>
+                      </p:stCondLst>
+                      <p:childTnLst>
+                        <p:par>
+                          <p:cTn id="20" fill="hold">
+                            <p:stCondLst>
+                              <p:cond delay="0"/>
+                            </p:stCondLst>
+                            <p:childTnLst>
+                              <p:par>
+                                <p:cTn id="21" presetID="1" presetClass="entr" presetSubtype="0" fill="hold" grpId="0" nodeType="clickEffect">
+                                  <p:stCondLst>
+                                    <p:cond delay="0"/>
+                                  </p:stCondLst>
+                                  <p:childTnLst>
+                                    <p:set>
+                                      <p:cBhvr>
+                                        <p:cTn id="22" dur="1" fill="hold">
+                                          <p:stCondLst>
+                                            <p:cond delay="0"/>
+                                          </p:stCondLst>
+                                        </p:cTn>
+                                        <p:tgtEl>
+                                          <p:spTgt spid="10"/>
+                                        </p:tgtEl>
+                                        <p:attrNameLst>
+                                          <p:attrName>style.visibility</p:attrName>
+                                        </p:attrNameLst>
+                                      </p:cBhvr>
+                                      <p:to>
+                                        <p:strVal val="visible"/>
+                                      </p:to>
+                                    </p:set>
+                                  </p:childTnLst>
+                                </p:cTn>
+                              </p:par>
+                            </p:childTnLst>
+                          </p:cTn>
+                        </p:par>
+                      </p:childTnLst>
+                    </p:cTn>
+                  </p:par>
+                  <p:par>
+                    <p:cTn id="23" fill="hold">
+                      <p:stCondLst>
+                        <p:cond delay="indefinite"/>
+                      </p:stCondLst>
+                      <p:childTnLst>
+                        <p:par>
+                          <p:cTn id="24" fill="hold">
+                            <p:stCondLst>
+                              <p:cond delay="0"/>
+                            </p:stCondLst>
+                            <p:childTnLst>
+                              <p:par>
+                                <p:cTn id="25" presetID="1" presetClass="entr" presetSubtype="0" fill="hold" grpId="0" nodeType="clickEffect">
+                                  <p:stCondLst>
+                                    <p:cond delay="0"/>
+                                  </p:stCondLst>
+                                  <p:childTnLst>
+                                    <p:set>
+                                      <p:cBhvr>
+                                        <p:cTn id="26" dur="1" fill="hold">
+                                          <p:stCondLst>
+                                            <p:cond delay="0"/>
+                                          </p:stCondLst>
+                                        </p:cTn>
+                                        <p:tgtEl>
+                                          <p:spTgt spid="11"/>
+                                        </p:tgtEl>
+                                        <p:attrNameLst>
+                                          <p:attrName>style.visibility</p:attrName>
+                                        </p:attrNameLst>
+                                      </p:cBhvr>
+                                      <p:to>
+                                        <p:strVal val="visible"/>
+                                      </p:to>
+                                    </p:set>
+                                  </p:childTnLst>
+                                </p:cTn>
+                              </p:par>
+                            </p:childTnLst>
+                          </p:cTn>
+                        </p:par>
+                      </p:childTnLst>
+                    </p:cTn>
+                  </p:par>
+                </p:childTnLst>
+              </p:cTn>
+              <p:prevCondLst>
+                <p:cond evt="onPrev" delay="0">
+                  <p:tgtEl>
+                    <p:sldTgt/>
+                  </p:tgtEl>
+                </p:cond>
+              </p:prevCondLst>
+              <p:nextCondLst>
+                <p:cond evt="onNext" delay="0">
+                  <p:tgtEl>
+                    <p:sldTgt/>
+                  </p:tgtEl>
+                </p:cond>
+              </p:nextCondLst>
+            </p:seq>
+          </p:childTnLst>
+        </p:cTn>
+      </p:par>
+    </p:tnLst>
+    <p:bldLst>
+      <p:bldP spid="6" grpId="0" animBg="1"/>
+      <p:bldGraphic spid="7" grpId="0">
+        <p:bldAsOne/>
+      </p:bldGraphic>
       <p:bldP spid="8" grpId="0" animBg="1"/>
       <p:bldP spid="9" grpId="0" animBg="1"/>
       <p:bldP spid="10" grpId="0" animBg="1"/>
       <p:bldP spid="11" grpId="0" animBg="1"/>
-      <p:bldP spid="12" grpId="0" animBg="1"/>
-      <p:bldP spid="13" grpId="0" animBg="1"/>
     </p:bldLst>
   </p:timing>
 </p:sld>

--- a/topics/knowledge-distillation/Knowledge_Distillation_slides_EN.pptx
+++ b/topics/knowledge-distillation/Knowledge_Distillation_slides_EN.pptx
@@ -3173,6 +3173,7 @@
           </a:bodyPr>
           <a:lstStyle/>
           <a:p>
+            <a:pPr algn="just"/>
             <a:r>
               <a:rPr sz="5400" b="1" i="0">
                 <a:solidFill>
@@ -3207,6 +3208,7 @@
           </a:bodyPr>
           <a:lstStyle/>
           <a:p>
+            <a:pPr algn="just"/>
             <a:r>
               <a:rPr sz="2600" b="0" i="0">
                 <a:solidFill>
@@ -3284,6 +3286,7 @@
           </a:bodyPr>
           <a:lstStyle/>
           <a:p>
+            <a:pPr algn="just"/>
             <a:r>
               <a:rPr sz="1800" b="0" i="0">
                 <a:solidFill>
@@ -3295,6 +3298,7 @@
             </a:r>
           </a:p>
           <a:p>
+            <a:pPr algn="just"/>
             <a:r>
               <a:rPr sz="1800" b="0" i="0">
                 <a:solidFill>
@@ -3329,6 +3333,7 @@
           </a:bodyPr>
           <a:lstStyle/>
           <a:p>
+            <a:pPr algn="just"/>
             <a:r>
               <a:rPr sz="1500" b="0" i="0">
                 <a:solidFill>
@@ -3547,6 +3552,7 @@
           </a:bodyPr>
           <a:lstStyle/>
           <a:p>
+            <a:pPr algn="just"/>
             <a:r>
               <a:rPr sz="2800" b="1" i="0">
                 <a:solidFill>
@@ -3581,6 +3587,7 @@
           </a:bodyPr>
           <a:lstStyle/>
           <a:p>
+            <a:pPr algn="just"/>
             <a:r>
               <a:rPr sz="1400" b="0" i="0">
                 <a:solidFill>
@@ -3663,6 +3670,7 @@
           </a:bodyPr>
           <a:lstStyle/>
           <a:p>
+            <a:pPr algn="just"/>
             <a:r>
               <a:rPr sz="1600" b="0" i="0">
                 <a:solidFill>
@@ -3721,6 +3729,7 @@
           </a:bodyPr>
           <a:lstStyle/>
           <a:p>
+            <a:pPr algn="just"/>
             <a:r>
               <a:rPr sz="1600" b="0" i="0">
                 <a:solidFill>
@@ -3775,7 +3784,7 @@
           <a:bodyPr rtlCol="0" anchor="ctr" wrap="square"/>
           <a:lstStyle/>
           <a:p>
-            <a:pPr algn="l"/>
+            <a:pPr algn="just"/>
             <a:r>
               <a:rPr sz="1600" b="0">
                 <a:solidFill>
@@ -3787,7 +3796,7 @@
             </a:r>
           </a:p>
           <a:p>
-            <a:pPr algn="l"/>
+            <a:pPr algn="just"/>
             <a:r>
               <a:rPr sz="1600" b="0">
                 <a:solidFill>
@@ -3799,7 +3808,7 @@
             </a:r>
           </a:p>
           <a:p>
-            <a:pPr algn="l"/>
+            <a:pPr algn="just"/>
             <a:r>
               <a:rPr sz="1600" b="0">
                 <a:solidFill>
@@ -3854,7 +3863,7 @@
           <a:bodyPr rtlCol="0" anchor="ctr" wrap="square"/>
           <a:lstStyle/>
           <a:p>
-            <a:pPr algn="l"/>
+            <a:pPr algn="just"/>
             <a:r>
               <a:rPr sz="1600" b="0">
                 <a:solidFill>
@@ -3866,7 +3875,7 @@
             </a:r>
           </a:p>
           <a:p>
-            <a:pPr algn="l"/>
+            <a:pPr algn="just"/>
             <a:r>
               <a:rPr sz="1600" b="0">
                 <a:solidFill>
@@ -3878,7 +3887,7 @@
             </a:r>
           </a:p>
           <a:p>
-            <a:pPr algn="l"/>
+            <a:pPr algn="just"/>
             <a:r>
               <a:rPr sz="1600" b="0">
                 <a:solidFill>
@@ -3913,6 +3922,7 @@
           </a:bodyPr>
           <a:lstStyle/>
           <a:p>
+            <a:pPr algn="just"/>
             <a:r>
               <a:rPr sz="1900" b="1" i="0">
                 <a:solidFill>
@@ -4453,6 +4463,7 @@
           </a:bodyPr>
           <a:lstStyle/>
           <a:p>
+            <a:pPr algn="just"/>
             <a:r>
               <a:rPr sz="2800" b="1" i="0">
                 <a:solidFill>
@@ -4487,6 +4498,7 @@
           </a:bodyPr>
           <a:lstStyle/>
           <a:p>
+            <a:pPr algn="just"/>
             <a:r>
               <a:rPr sz="1400" b="0" i="0">
                 <a:solidFill>
@@ -5213,6 +5225,7 @@
           </a:bodyPr>
           <a:lstStyle/>
           <a:p>
+            <a:pPr algn="just"/>
             <a:r>
               <a:rPr sz="1500" b="0" i="0">
                 <a:solidFill>
@@ -5224,6 +5237,7 @@
             </a:r>
           </a:p>
           <a:p>
+            <a:pPr algn="just"/>
             <a:r>
               <a:rPr sz="1500" b="0" i="0">
                 <a:solidFill>
@@ -5235,6 +5249,7 @@
             </a:r>
           </a:p>
           <a:p>
+            <a:pPr algn="just"/>
             <a:r>
               <a:rPr sz="1500" b="0" i="0">
                 <a:solidFill>
@@ -5836,6 +5851,7 @@
           </a:bodyPr>
           <a:lstStyle/>
           <a:p>
+            <a:pPr algn="just"/>
             <a:r>
               <a:rPr sz="1600" b="0" i="0">
                 <a:solidFill>
@@ -5847,6 +5863,7 @@
             </a:r>
           </a:p>
           <a:p>
+            <a:pPr algn="just"/>
             <a:r>
               <a:rPr sz="1600" b="0" i="0">
                 <a:solidFill>
@@ -6635,6 +6652,7 @@
           </a:bodyPr>
           <a:lstStyle/>
           <a:p>
+            <a:pPr algn="just"/>
             <a:r>
               <a:rPr sz="2800" b="1" i="0">
                 <a:solidFill>
@@ -6669,6 +6687,7 @@
           </a:bodyPr>
           <a:lstStyle/>
           <a:p>
+            <a:pPr algn="just"/>
             <a:r>
               <a:rPr sz="1400" b="0" i="0">
                 <a:solidFill>
@@ -7660,6 +7679,7 @@
           </a:bodyPr>
           <a:lstStyle/>
           <a:p>
+            <a:pPr algn="just"/>
             <a:r>
               <a:rPr sz="1600" b="0" i="0">
                 <a:solidFill>
@@ -8210,6 +8230,7 @@
           </a:bodyPr>
           <a:lstStyle/>
           <a:p>
+            <a:pPr algn="just"/>
             <a:r>
               <a:rPr sz="2800" b="1" i="0">
                 <a:solidFill>
@@ -8244,6 +8265,7 @@
           </a:bodyPr>
           <a:lstStyle/>
           <a:p>
+            <a:pPr algn="just"/>
             <a:r>
               <a:rPr sz="1400" b="0" i="0">
                 <a:solidFill>
@@ -8302,6 +8324,7 @@
           </a:bodyPr>
           <a:lstStyle/>
           <a:p>
+            <a:pPr algn="just"/>
             <a:r>
               <a:rPr sz="1700" b="0" i="0">
                 <a:solidFill>
@@ -9231,7 +9254,7 @@
           <a:bodyPr rtlCol="0" anchor="ctr" wrap="square"/>
           <a:lstStyle/>
           <a:p>
-            <a:pPr algn="l"/>
+            <a:pPr algn="just"/>
             <a:r>
               <a:rPr sz="1700" b="1">
                 <a:solidFill>
@@ -9243,7 +9266,7 @@
             </a:r>
           </a:p>
           <a:p>
-            <a:pPr algn="l"/>
+            <a:pPr algn="just"/>
             <a:r>
               <a:rPr sz="1700" b="1">
                 <a:solidFill>
@@ -9278,6 +9301,7 @@
           </a:bodyPr>
           <a:lstStyle/>
           <a:p>
+            <a:pPr algn="just"/>
             <a:r>
               <a:rPr sz="1600" b="0" i="0">
                 <a:solidFill>
@@ -9289,6 +9313,7 @@
             </a:r>
           </a:p>
           <a:p>
+            <a:pPr algn="just"/>
             <a:r>
               <a:rPr sz="1600" b="0" i="0">
                 <a:solidFill>
@@ -9981,6 +10006,7 @@
           </a:bodyPr>
           <a:lstStyle/>
           <a:p>
+            <a:pPr algn="just"/>
             <a:r>
               <a:rPr sz="2800" b="1" i="0">
                 <a:solidFill>
@@ -10015,6 +10041,7 @@
           </a:bodyPr>
           <a:lstStyle/>
           <a:p>
+            <a:pPr algn="just"/>
             <a:r>
               <a:rPr sz="1400" b="0" i="0">
                 <a:solidFill>
@@ -10360,6 +10387,7 @@
           </a:bodyPr>
           <a:lstStyle/>
           <a:p>
+            <a:pPr algn="just"/>
             <a:r>
               <a:rPr sz="1600" b="0" i="0">
                 <a:solidFill>
@@ -10371,6 +10399,7 @@
             </a:r>
           </a:p>
           <a:p>
+            <a:pPr algn="just"/>
             <a:r>
               <a:rPr sz="1600" b="0" i="0">
                 <a:solidFill>
@@ -10382,6 +10411,7 @@
             </a:r>
           </a:p>
           <a:p>
+            <a:pPr algn="just"/>
             <a:r>
               <a:rPr sz="1600" b="0" i="0">
                 <a:solidFill>
@@ -10393,6 +10423,7 @@
             </a:r>
           </a:p>
           <a:p>
+            <a:pPr algn="just"/>
             <a:r>
               <a:rPr sz="1600" b="0" i="0">
                 <a:solidFill>
@@ -10404,6 +10435,7 @@
             </a:r>
           </a:p>
           <a:p>
+            <a:pPr algn="just"/>
             <a:r>
               <a:rPr sz="1600" b="0" i="0">
                 <a:solidFill>
@@ -10462,6 +10494,7 @@
           </a:bodyPr>
           <a:lstStyle/>
           <a:p>
+            <a:pPr algn="just"/>
             <a:r>
               <a:rPr sz="1600" b="0" i="0">
                 <a:solidFill>
@@ -10473,6 +10506,7 @@
             </a:r>
           </a:p>
           <a:p>
+            <a:pPr algn="just"/>
             <a:r>
               <a:rPr sz="1600" b="0" i="0">
                 <a:solidFill>
@@ -10842,6 +10876,7 @@
           </a:bodyPr>
           <a:lstStyle/>
           <a:p>
+            <a:pPr algn="just"/>
             <a:r>
               <a:rPr sz="1400" b="0" i="0">
                 <a:solidFill>
@@ -10896,7 +10931,7 @@
           <a:bodyPr rtlCol="0" anchor="ctr" wrap="square"/>
           <a:lstStyle/>
           <a:p>
-            <a:pPr algn="l"/>
+            <a:pPr algn="just"/>
             <a:r>
               <a:rPr sz="1600" b="1">
                 <a:solidFill>
@@ -10908,7 +10943,7 @@
             </a:r>
           </a:p>
           <a:p>
-            <a:pPr algn="l"/>
+            <a:pPr algn="just"/>
             <a:r>
               <a:rPr sz="1600" b="1">
                 <a:solidFill>
@@ -11453,6 +11488,7 @@
           </a:bodyPr>
           <a:lstStyle/>
           <a:p>
+            <a:pPr algn="just"/>
             <a:r>
               <a:rPr sz="2800" b="1" i="0">
                 <a:solidFill>
@@ -11487,6 +11523,7 @@
           </a:bodyPr>
           <a:lstStyle/>
           <a:p>
+            <a:pPr algn="just"/>
             <a:r>
               <a:rPr sz="1400" b="0" i="0">
                 <a:solidFill>
@@ -11998,6 +12035,7 @@
           </a:bodyPr>
           <a:lstStyle/>
           <a:p>
+            <a:pPr algn="just"/>
             <a:r>
               <a:rPr sz="1600" b="0" i="0">
                 <a:solidFill>
@@ -12009,6 +12047,7 @@
             </a:r>
           </a:p>
           <a:p>
+            <a:pPr algn="just"/>
             <a:r>
               <a:rPr sz="1600" b="0" i="0">
                 <a:solidFill>
@@ -12321,6 +12360,7 @@
           </a:bodyPr>
           <a:lstStyle/>
           <a:p>
+            <a:pPr algn="just"/>
             <a:r>
               <a:rPr sz="2800" b="1" i="0">
                 <a:solidFill>
@@ -12355,6 +12395,7 @@
           </a:bodyPr>
           <a:lstStyle/>
           <a:p>
+            <a:pPr algn="just"/>
             <a:r>
               <a:rPr sz="1400" b="0" i="0">
                 <a:solidFill>
@@ -12744,7 +12785,7 @@
           <a:bodyPr rtlCol="0" anchor="ctr" wrap="square"/>
           <a:lstStyle/>
           <a:p>
-            <a:pPr algn="l"/>
+            <a:pPr algn="just"/>
             <a:r>
               <a:rPr sz="1600" b="1">
                 <a:solidFill>
@@ -12756,7 +12797,7 @@
             </a:r>
           </a:p>
           <a:p>
-            <a:pPr algn="l"/>
+            <a:pPr algn="just"/>
             <a:r>
               <a:rPr sz="1600" b="1">
                 <a:solidFill>
@@ -12791,6 +12832,7 @@
           </a:bodyPr>
           <a:lstStyle/>
           <a:p>
+            <a:pPr algn="just"/>
             <a:r>
               <a:rPr sz="1600" b="0" i="0">
                 <a:solidFill>
@@ -12802,6 +12844,7 @@
             </a:r>
           </a:p>
           <a:p>
+            <a:pPr algn="just"/>
             <a:r>
               <a:rPr sz="1600" b="0" i="0">
                 <a:solidFill>
@@ -12813,6 +12856,7 @@
             </a:r>
           </a:p>
           <a:p>
+            <a:pPr algn="just"/>
             <a:r>
               <a:rPr sz="1600" b="0" i="0">
                 <a:solidFill>
@@ -12824,6 +12868,7 @@
             </a:r>
           </a:p>
           <a:p>
+            <a:pPr algn="just"/>
             <a:r>
               <a:rPr sz="1600" b="0" i="0">
                 <a:solidFill>
@@ -12858,6 +12903,7 @@
           </a:bodyPr>
           <a:lstStyle/>
           <a:p>
+            <a:pPr algn="just"/>
             <a:r>
               <a:rPr sz="1500" b="0" i="0">
                 <a:solidFill>
@@ -13262,6 +13308,7 @@
           </a:bodyPr>
           <a:lstStyle/>
           <a:p>
+            <a:pPr algn="just"/>
             <a:r>
               <a:rPr sz="2800" b="1" i="0">
                 <a:solidFill>
@@ -13296,6 +13343,7 @@
           </a:bodyPr>
           <a:lstStyle/>
           <a:p>
+            <a:pPr algn="just"/>
             <a:r>
               <a:rPr sz="1400" b="0" i="0">
                 <a:solidFill>
@@ -13898,7 +13946,7 @@
           <a:bodyPr rtlCol="0" anchor="ctr" wrap="square"/>
           <a:lstStyle/>
           <a:p>
-            <a:pPr algn="l"/>
+            <a:pPr algn="just"/>
             <a:r>
               <a:rPr sz="1500" b="1">
                 <a:solidFill>
@@ -13910,7 +13958,7 @@
             </a:r>
           </a:p>
           <a:p>
-            <a:pPr algn="l"/>
+            <a:pPr algn="just"/>
             <a:r>
               <a:rPr sz="1500" b="1">
                 <a:solidFill>
@@ -13965,7 +14013,7 @@
           <a:bodyPr rtlCol="0" anchor="ctr" wrap="square"/>
           <a:lstStyle/>
           <a:p>
-            <a:pPr algn="l"/>
+            <a:pPr algn="just"/>
             <a:r>
               <a:rPr sz="1700" b="1">
                 <a:solidFill>
@@ -14000,6 +14048,7 @@
           </a:bodyPr>
           <a:lstStyle/>
           <a:p>
+            <a:pPr algn="just"/>
             <a:r>
               <a:rPr sz="1600" b="0" i="0">
                 <a:solidFill>
@@ -14404,6 +14453,7 @@
           </a:bodyPr>
           <a:lstStyle/>
           <a:p>
+            <a:pPr algn="just"/>
             <a:r>
               <a:rPr sz="2800" b="1" i="0">
                 <a:solidFill>
@@ -14438,6 +14488,7 @@
           </a:bodyPr>
           <a:lstStyle/>
           <a:p>
+            <a:pPr algn="just"/>
             <a:r>
               <a:rPr sz="1400" b="0" i="0">
                 <a:solidFill>
@@ -15084,7 +15135,7 @@
           <a:bodyPr rtlCol="0" anchor="ctr" wrap="square"/>
           <a:lstStyle/>
           <a:p>
-            <a:pPr algn="l"/>
+            <a:pPr algn="just"/>
             <a:r>
               <a:rPr sz="1600" b="1">
                 <a:solidFill>
@@ -15096,7 +15147,7 @@
             </a:r>
           </a:p>
           <a:p>
-            <a:pPr algn="l"/>
+            <a:pPr algn="just"/>
             <a:r>
               <a:rPr sz="1600" b="1">
                 <a:solidFill>
@@ -15151,7 +15202,7 @@
           <a:bodyPr rtlCol="0" anchor="ctr" wrap="square"/>
           <a:lstStyle/>
           <a:p>
-            <a:pPr algn="l"/>
+            <a:pPr algn="just"/>
             <a:r>
               <a:rPr sz="1600" b="1">
                 <a:solidFill>
@@ -15163,7 +15214,7 @@
             </a:r>
           </a:p>
           <a:p>
-            <a:pPr algn="l"/>
+            <a:pPr algn="just"/>
             <a:r>
               <a:rPr sz="1600" b="1">
                 <a:solidFill>
@@ -15175,7 +15226,7 @@
             </a:r>
           </a:p>
           <a:p>
-            <a:pPr algn="l"/>
+            <a:pPr algn="just"/>
             <a:r>
               <a:rPr sz="1600" b="1">
                 <a:solidFill>
@@ -15210,6 +15261,7 @@
           </a:bodyPr>
           <a:lstStyle/>
           <a:p>
+            <a:pPr algn="just"/>
             <a:r>
               <a:rPr sz="1600" b="0" i="0">
                 <a:solidFill>
@@ -15221,6 +15273,7 @@
             </a:r>
           </a:p>
           <a:p>
+            <a:pPr algn="just"/>
             <a:r>
               <a:rPr sz="1600" b="0" i="0">
                 <a:solidFill>
@@ -15579,6 +15632,7 @@
           </a:bodyPr>
           <a:lstStyle/>
           <a:p>
+            <a:pPr algn="just"/>
             <a:r>
               <a:rPr sz="2800" b="1" i="0">
                 <a:solidFill>
@@ -15613,6 +15667,7 @@
           </a:bodyPr>
           <a:lstStyle/>
           <a:p>
+            <a:pPr algn="just"/>
             <a:r>
               <a:rPr sz="1400" b="0" i="0">
                 <a:solidFill>
@@ -15958,6 +16013,7 @@
           </a:bodyPr>
           <a:lstStyle/>
           <a:p>
+            <a:pPr algn="just"/>
             <a:r>
               <a:rPr sz="1500" b="0" i="0">
                 <a:solidFill>
@@ -15969,6 +16025,7 @@
             </a:r>
           </a:p>
           <a:p>
+            <a:pPr algn="just"/>
             <a:r>
               <a:rPr sz="1500" b="0" i="0">
                 <a:solidFill>
@@ -15980,6 +16037,7 @@
             </a:r>
           </a:p>
           <a:p>
+            <a:pPr algn="just"/>
             <a:r>
               <a:rPr sz="1500" b="0" i="0">
                 <a:solidFill>
@@ -16325,6 +16383,7 @@
           </a:bodyPr>
           <a:lstStyle/>
           <a:p>
+            <a:pPr algn="just"/>
             <a:r>
               <a:rPr sz="1500" b="0" i="0">
                 <a:solidFill>
@@ -16336,6 +16395,7 @@
             </a:r>
           </a:p>
           <a:p>
+            <a:pPr algn="just"/>
             <a:r>
               <a:rPr sz="1500" b="0" i="0">
                 <a:solidFill>
@@ -16347,6 +16407,7 @@
             </a:r>
           </a:p>
           <a:p>
+            <a:pPr algn="just"/>
             <a:r>
               <a:rPr sz="1500" b="0" i="0">
                 <a:solidFill>
@@ -16401,7 +16462,7 @@
           <a:bodyPr rtlCol="0" anchor="ctr" wrap="square"/>
           <a:lstStyle/>
           <a:p>
-            <a:pPr algn="l"/>
+            <a:pPr algn="just"/>
             <a:r>
               <a:rPr sz="1600" b="0">
                 <a:solidFill>
@@ -16413,7 +16474,7 @@
             </a:r>
           </a:p>
           <a:p>
-            <a:pPr algn="l"/>
+            <a:pPr algn="just"/>
             <a:r>
               <a:rPr sz="1600" b="0">
                 <a:solidFill>
@@ -16448,6 +16509,7 @@
           </a:bodyPr>
           <a:lstStyle/>
           <a:p>
+            <a:pPr algn="just"/>
             <a:r>
               <a:rPr sz="1500" b="0" i="0">
                 <a:solidFill>
@@ -16900,6 +16962,7 @@
           </a:bodyPr>
           <a:lstStyle/>
           <a:p>
+            <a:pPr algn="just"/>
             <a:r>
               <a:rPr sz="2800" b="1" i="0">
                 <a:solidFill>
@@ -16934,6 +16997,7 @@
           </a:bodyPr>
           <a:lstStyle/>
           <a:p>
+            <a:pPr algn="just"/>
             <a:r>
               <a:rPr sz="1400" b="0" i="0">
                 <a:solidFill>
@@ -16968,7 +17032,7 @@
           </a:bodyPr>
           <a:lstStyle/>
           <a:p>
-            <a:pPr>
+            <a:pPr algn="just">
               <a:lnSpc>
                 <a:spcPct val="120000"/>
               </a:lnSpc>
@@ -17209,6 +17273,7 @@
           </a:bodyPr>
           <a:lstStyle/>
           <a:p>
+            <a:pPr algn="just"/>
             <a:r>
               <a:rPr sz="2800" b="1" i="0">
                 <a:solidFill>
@@ -17263,7 +17328,7 @@
           <a:bodyPr rtlCol="0" anchor="ctr" wrap="square"/>
           <a:lstStyle/>
           <a:p>
-            <a:pPr algn="l"/>
+            <a:pPr algn="just"/>
             <a:r>
               <a:rPr sz="1700" b="1">
                 <a:solidFill>
@@ -17318,7 +17383,7 @@
           <a:bodyPr rtlCol="0" anchor="ctr" wrap="square"/>
           <a:lstStyle/>
           <a:p>
-            <a:pPr algn="l"/>
+            <a:pPr algn="just"/>
             <a:r>
               <a:rPr sz="1700" b="1">
                 <a:solidFill>
@@ -17373,7 +17438,7 @@
           <a:bodyPr rtlCol="0" anchor="ctr" wrap="square"/>
           <a:lstStyle/>
           <a:p>
-            <a:pPr algn="l"/>
+            <a:pPr algn="just"/>
             <a:r>
               <a:rPr sz="1700" b="1">
                 <a:solidFill>
@@ -17428,7 +17493,7 @@
           <a:bodyPr rtlCol="0" anchor="ctr" wrap="square"/>
           <a:lstStyle/>
           <a:p>
-            <a:pPr algn="l"/>
+            <a:pPr algn="just"/>
             <a:r>
               <a:rPr sz="1700" b="1">
                 <a:solidFill>
@@ -17483,7 +17548,7 @@
           <a:bodyPr rtlCol="0" anchor="ctr" wrap="square"/>
           <a:lstStyle/>
           <a:p>
-            <a:pPr algn="l"/>
+            <a:pPr algn="just"/>
             <a:r>
               <a:rPr sz="1700" b="1">
                 <a:solidFill>
@@ -17538,7 +17603,7 @@
           <a:bodyPr rtlCol="0" anchor="ctr" wrap="square"/>
           <a:lstStyle/>
           <a:p>
-            <a:pPr algn="l"/>
+            <a:pPr algn="just"/>
             <a:r>
               <a:rPr sz="1700" b="1">
                 <a:solidFill>
@@ -17573,6 +17638,7 @@
           </a:bodyPr>
           <a:lstStyle/>
           <a:p>
+            <a:pPr algn="just"/>
             <a:r>
               <a:rPr sz="1600" b="1" i="0">
                 <a:solidFill>
@@ -18067,6 +18133,7 @@
           </a:bodyPr>
           <a:lstStyle/>
           <a:p>
+            <a:pPr algn="just"/>
             <a:r>
               <a:rPr sz="2800" b="1" i="0">
                 <a:solidFill>
@@ -18101,6 +18168,7 @@
           </a:bodyPr>
           <a:lstStyle/>
           <a:p>
+            <a:pPr algn="just"/>
             <a:r>
               <a:rPr sz="1400" b="0" i="0">
                 <a:solidFill>
@@ -18608,7 +18676,7 @@
           <a:bodyPr rtlCol="0" anchor="ctr" wrap="square"/>
           <a:lstStyle/>
           <a:p>
-            <a:pPr algn="l"/>
+            <a:pPr algn="just"/>
             <a:r>
               <a:rPr sz="1700" b="1">
                 <a:solidFill>
@@ -18620,7 +18688,7 @@
             </a:r>
           </a:p>
           <a:p>
-            <a:pPr algn="l"/>
+            <a:pPr algn="just"/>
             <a:r>
               <a:rPr sz="1700" b="1">
                 <a:solidFill>
@@ -18632,7 +18700,7 @@
             </a:r>
           </a:p>
           <a:p>
-            <a:pPr algn="l"/>
+            <a:pPr algn="just"/>
             <a:r>
               <a:rPr sz="1700" b="1">
                 <a:solidFill>
@@ -18644,7 +18712,7 @@
             </a:r>
           </a:p>
           <a:p>
-            <a:pPr algn="l"/>
+            <a:pPr algn="just"/>
             <a:r>
               <a:rPr sz="1700" b="1">
                 <a:solidFill>
@@ -18679,6 +18747,7 @@
           </a:bodyPr>
           <a:lstStyle/>
           <a:p>
+            <a:pPr algn="just"/>
             <a:r>
               <a:rPr sz="1600" b="0" i="0">
                 <a:solidFill>
@@ -18690,6 +18759,7 @@
             </a:r>
           </a:p>
           <a:p>
+            <a:pPr algn="just"/>
             <a:r>
               <a:rPr sz="1600" b="0" i="0">
                 <a:solidFill>
@@ -19002,6 +19072,7 @@
           </a:bodyPr>
           <a:lstStyle/>
           <a:p>
+            <a:pPr algn="just"/>
             <a:r>
               <a:rPr sz="2800" b="1" i="0">
                 <a:solidFill>
@@ -19036,6 +19107,7 @@
           </a:bodyPr>
           <a:lstStyle/>
           <a:p>
+            <a:pPr algn="just"/>
             <a:r>
               <a:rPr sz="1400" b="0" i="0">
                 <a:solidFill>
@@ -19555,6 +19627,7 @@
           </a:bodyPr>
           <a:lstStyle/>
           <a:p>
+            <a:pPr algn="just"/>
             <a:r>
               <a:rPr sz="1900" b="1" i="0">
                 <a:solidFill>
@@ -19676,7 +19749,7 @@
           <a:bodyPr rtlCol="0" anchor="ctr" wrap="square"/>
           <a:lstStyle/>
           <a:p>
-            <a:pPr algn="l"/>
+            <a:pPr algn="just"/>
             <a:r>
               <a:rPr sz="1800" b="1">
                 <a:solidFill>
@@ -19688,7 +19761,7 @@
             </a:r>
           </a:p>
           <a:p>
-            <a:pPr algn="l"/>
+            <a:pPr algn="just"/>
             <a:r>
               <a:rPr sz="1800" b="1">
                 <a:solidFill>
@@ -19723,6 +19796,7 @@
           </a:bodyPr>
           <a:lstStyle/>
           <a:p>
+            <a:pPr algn="just"/>
             <a:r>
               <a:rPr sz="1800" b="0" i="0">
                 <a:solidFill>
@@ -19734,6 +19808,7 @@
             </a:r>
           </a:p>
           <a:p>
+            <a:pPr algn="just"/>
             <a:r>
               <a:rPr sz="1800" b="0" i="0">
                 <a:solidFill>
@@ -20230,6 +20305,7 @@
           </a:bodyPr>
           <a:lstStyle/>
           <a:p>
+            <a:pPr algn="just"/>
             <a:r>
               <a:rPr sz="2800" b="1" i="0">
                 <a:solidFill>
@@ -20264,6 +20340,7 @@
           </a:bodyPr>
           <a:lstStyle/>
           <a:p>
+            <a:pPr algn="just"/>
             <a:r>
               <a:rPr sz="1400" b="0" i="0">
                 <a:solidFill>
@@ -20298,6 +20375,7 @@
           </a:bodyPr>
           <a:lstStyle/>
           <a:p>
+            <a:pPr algn="just"/>
             <a:r>
               <a:rPr sz="1700" b="0" i="0">
                 <a:solidFill>
@@ -20832,7 +20910,7 @@
           <a:bodyPr rtlCol="0" anchor="ctr" wrap="square"/>
           <a:lstStyle/>
           <a:p>
-            <a:pPr algn="l"/>
+            <a:pPr algn="just"/>
             <a:r>
               <a:rPr sz="1800" b="1">
                 <a:solidFill>
@@ -20844,7 +20922,7 @@
             </a:r>
           </a:p>
           <a:p>
-            <a:pPr algn="l"/>
+            <a:pPr algn="just"/>
             <a:r>
               <a:rPr sz="1800" b="1">
                 <a:solidFill>
@@ -20856,7 +20934,7 @@
             </a:r>
           </a:p>
           <a:p>
-            <a:pPr algn="l"/>
+            <a:pPr algn="just"/>
             <a:r>
               <a:rPr sz="1800" b="1">
                 <a:solidFill>
@@ -20868,7 +20946,7 @@
             </a:r>
           </a:p>
           <a:p>
-            <a:pPr algn="l"/>
+            <a:pPr algn="just"/>
             <a:r>
               <a:rPr sz="1800" b="1">
                 <a:solidFill>
@@ -20923,7 +21001,7 @@
           <a:bodyPr rtlCol="0" anchor="ctr" wrap="square"/>
           <a:lstStyle/>
           <a:p>
-            <a:pPr algn="l"/>
+            <a:pPr algn="just"/>
             <a:r>
               <a:rPr sz="1700" b="1">
                 <a:solidFill>
@@ -20935,7 +21013,7 @@
             </a:r>
           </a:p>
           <a:p>
-            <a:pPr algn="l"/>
+            <a:pPr algn="just"/>
             <a:r>
               <a:rPr sz="1700" b="1">
                 <a:solidFill>
@@ -21342,6 +21420,7 @@
           </a:bodyPr>
           <a:lstStyle/>
           <a:p>
+            <a:pPr algn="just"/>
             <a:r>
               <a:rPr sz="2800" b="1" i="0">
                 <a:solidFill>
@@ -21376,6 +21455,7 @@
           </a:bodyPr>
           <a:lstStyle/>
           <a:p>
+            <a:pPr algn="just"/>
             <a:r>
               <a:rPr sz="1400" b="0" i="0">
                 <a:solidFill>
@@ -21410,6 +21490,7 @@
           </a:bodyPr>
           <a:lstStyle/>
           <a:p>
+            <a:pPr algn="just"/>
             <a:r>
               <a:rPr sz="1800" b="0" i="0">
                 <a:solidFill>
@@ -21868,7 +21949,7 @@
           <a:bodyPr rtlCol="0" anchor="ctr" wrap="square"/>
           <a:lstStyle/>
           <a:p>
-            <a:pPr algn="l"/>
+            <a:pPr algn="just"/>
             <a:r>
               <a:rPr sz="1800" b="1">
                 <a:solidFill>
@@ -21880,7 +21961,7 @@
             </a:r>
           </a:p>
           <a:p>
-            <a:pPr algn="l"/>
+            <a:pPr algn="just"/>
             <a:r>
               <a:rPr sz="1800" b="1">
                 <a:solidFill>
@@ -21935,7 +22016,7 @@
           <a:bodyPr rtlCol="0" anchor="ctr" wrap="square"/>
           <a:lstStyle/>
           <a:p>
-            <a:pPr algn="l"/>
+            <a:pPr algn="just"/>
             <a:r>
               <a:rPr sz="1800" b="1">
                 <a:solidFill>
@@ -21947,7 +22028,7 @@
             </a:r>
           </a:p>
           <a:p>
-            <a:pPr algn="l"/>
+            <a:pPr algn="just"/>
             <a:r>
               <a:rPr sz="1800" b="1">
                 <a:solidFill>
@@ -21982,6 +22063,7 @@
           </a:bodyPr>
           <a:lstStyle/>
           <a:p>
+            <a:pPr algn="just"/>
             <a:r>
               <a:rPr sz="1700" b="0" i="0">
                 <a:solidFill>
@@ -21993,6 +22075,7 @@
             </a:r>
           </a:p>
           <a:p>
+            <a:pPr algn="just"/>
             <a:r>
               <a:rPr sz="1700" b="0" i="0">
                 <a:solidFill>
@@ -22397,6 +22480,7 @@
           </a:bodyPr>
           <a:lstStyle/>
           <a:p>
+            <a:pPr algn="just"/>
             <a:r>
               <a:rPr sz="2800" b="1" i="0">
                 <a:solidFill>
@@ -22431,6 +22515,7 @@
           </a:bodyPr>
           <a:lstStyle/>
           <a:p>
+            <a:pPr algn="just"/>
             <a:r>
               <a:rPr sz="1400" b="0" i="0">
                 <a:solidFill>
@@ -22489,6 +22574,7 @@
           </a:bodyPr>
           <a:lstStyle/>
           <a:p>
+            <a:pPr algn="just"/>
             <a:r>
               <a:rPr sz="1700" b="0" i="0">
                 <a:solidFill>
@@ -23235,7 +23321,7 @@
           <a:bodyPr rtlCol="0" anchor="ctr" wrap="square"/>
           <a:lstStyle/>
           <a:p>
-            <a:pPr algn="l"/>
+            <a:pPr algn="just"/>
             <a:r>
               <a:rPr sz="1700" b="1">
                 <a:solidFill>
@@ -23247,7 +23333,7 @@
             </a:r>
           </a:p>
           <a:p>
-            <a:pPr algn="l"/>
+            <a:pPr algn="just"/>
             <a:r>
               <a:rPr sz="1700" b="1">
                 <a:solidFill>
@@ -23282,6 +23368,7 @@
           </a:bodyPr>
           <a:lstStyle/>
           <a:p>
+            <a:pPr algn="just"/>
             <a:r>
               <a:rPr sz="1600" b="0" i="0">
                 <a:solidFill>
@@ -23924,6 +24011,7 @@
           </a:bodyPr>
           <a:lstStyle/>
           <a:p>
+            <a:pPr algn="just"/>
             <a:r>
               <a:rPr sz="2800" b="1" i="0">
                 <a:solidFill>
@@ -23958,6 +24046,7 @@
           </a:bodyPr>
           <a:lstStyle/>
           <a:p>
+            <a:pPr algn="just"/>
             <a:r>
               <a:rPr sz="1400" b="0" i="0">
                 <a:solidFill>
@@ -24016,6 +24105,7 @@
           </a:bodyPr>
           <a:lstStyle/>
           <a:p>
+            <a:pPr algn="just"/>
             <a:r>
               <a:rPr sz="1700" b="0" i="0">
                 <a:solidFill>
@@ -24762,7 +24852,7 @@
           <a:bodyPr rtlCol="0" anchor="ctr" wrap="square"/>
           <a:lstStyle/>
           <a:p>
-            <a:pPr algn="l"/>
+            <a:pPr algn="just"/>
             <a:r>
               <a:rPr sz="1700" b="1">
                 <a:solidFill>
@@ -24774,7 +24864,7 @@
             </a:r>
           </a:p>
           <a:p>
-            <a:pPr algn="l"/>
+            <a:pPr algn="just"/>
             <a:r>
               <a:rPr sz="1700" b="1">
                 <a:solidFill>
@@ -24809,6 +24899,7 @@
           </a:bodyPr>
           <a:lstStyle/>
           <a:p>
+            <a:pPr algn="just"/>
             <a:r>
               <a:rPr sz="1600" b="0" i="0">
                 <a:solidFill>
@@ -25451,6 +25542,7 @@
           </a:bodyPr>
           <a:lstStyle/>
           <a:p>
+            <a:pPr algn="just"/>
             <a:r>
               <a:rPr sz="2800" b="1" i="0">
                 <a:solidFill>
@@ -25485,6 +25577,7 @@
           </a:bodyPr>
           <a:lstStyle/>
           <a:p>
+            <a:pPr algn="just"/>
             <a:r>
               <a:rPr sz="1400" b="0" i="0">
                 <a:solidFill>
@@ -25854,6 +25947,7 @@
           </a:bodyPr>
           <a:lstStyle/>
           <a:p>
+            <a:pPr algn="just"/>
             <a:r>
               <a:rPr sz="1600" b="0" i="0">
                 <a:solidFill>
@@ -25865,6 +25959,7 @@
             </a:r>
           </a:p>
           <a:p>
+            <a:pPr algn="just"/>
             <a:r>
               <a:rPr sz="1600" b="0" i="0">
                 <a:solidFill>
@@ -25919,7 +26014,7 @@
           <a:bodyPr rtlCol="0" anchor="ctr" wrap="square"/>
           <a:lstStyle/>
           <a:p>
-            <a:pPr algn="l"/>
+            <a:pPr algn="just"/>
             <a:r>
               <a:rPr sz="1700" b="1">
                 <a:solidFill>
@@ -25974,7 +26069,7 @@
           <a:bodyPr rtlCol="0" anchor="ctr" wrap="square"/>
           <a:lstStyle/>
           <a:p>
-            <a:pPr algn="l"/>
+            <a:pPr algn="just"/>
             <a:r>
               <a:rPr sz="1700" b="1">
                 <a:solidFill>
@@ -26009,6 +26104,7 @@
           </a:bodyPr>
           <a:lstStyle/>
           <a:p>
+            <a:pPr algn="just"/>
             <a:r>
               <a:rPr sz="1500" b="0" i="0">
                 <a:solidFill>

--- a/topics/knowledge-distillation/Knowledge_Distillation_slides_EN.pptx
+++ b/topics/knowledge-distillation/Knowledge_Distillation_slides_EN.pptx
@@ -3152,16 +3152,40 @@
           </a:p>
         </p:txBody>
       </p:sp>
+      <p:pic>
+        <p:nvPicPr>
+          <p:cNvPr id="3" name="Picture 2" descr="cover_art.png"/>
+          <p:cNvPicPr>
+            <a:picLocks noChangeAspect="1"/>
+          </p:cNvPicPr>
+          <p:nvPr/>
+        </p:nvPicPr>
+        <p:blipFill>
+          <a:blip r:embed="rId2"/>
+          <a:stretch>
+            <a:fillRect/>
+          </a:stretch>
+        </p:blipFill>
+        <p:spPr>
+          <a:xfrm>
+            <a:off x="6172200" y="1051560"/>
+            <a:ext cx="5760720" cy="4279392"/>
+          </a:xfrm>
+          <a:prstGeom prst="rect">
+            <a:avLst/>
+          </a:prstGeom>
+        </p:spPr>
+      </p:pic>
       <p:sp>
         <p:nvSpPr>
-          <p:cNvPr id="3" name="TextBox 2"/>
+          <p:cNvPr id="4" name="TextBox 3"/>
           <p:cNvSpPr txBox="1"/>
           <p:nvPr/>
         </p:nvSpPr>
         <p:spPr>
           <a:xfrm>
-            <a:off x="822960" y="1737360"/>
-            <a:ext cx="10515600" cy="1005840"/>
+            <a:off x="822960" y="868680"/>
+            <a:ext cx="5303520" cy="1645920"/>
           </a:xfrm>
           <a:prstGeom prst="rect">
             <a:avLst/>
@@ -3174,29 +3198,41 @@
           </a:bodyPr>
           <a:lstStyle/>
           <a:p>
-            <a:pPr algn="just"/>
+            <a:pPr algn="l"/>
             <a:r>
-              <a:rPr sz="5400" b="1" i="0">
+              <a:rPr sz="4600" b="1" i="0">
                 <a:solidFill>
                   <a:srgbClr val="FFFFFF"/>
                 </a:solidFill>
                 <a:latin typeface="Times New Roman"/>
               </a:rPr>
-              <a:t>Knowledge Distillation</a:t>
+              <a:t>Knowledge</a:t>
+            </a:r>
+          </a:p>
+          <a:p>
+            <a:pPr algn="l"/>
+            <a:r>
+              <a:rPr sz="4600" b="1" i="0">
+                <a:solidFill>
+                  <a:srgbClr val="FFFFFF"/>
+                </a:solidFill>
+                <a:latin typeface="Times New Roman"/>
+              </a:rPr>
+              <a:t>Distillation</a:t>
             </a:r>
           </a:p>
         </p:txBody>
       </p:sp>
       <p:sp>
         <p:nvSpPr>
-          <p:cNvPr id="4" name="TextBox 3"/>
+          <p:cNvPr id="5" name="TextBox 4"/>
           <p:cNvSpPr txBox="1"/>
           <p:nvPr/>
         </p:nvSpPr>
         <p:spPr>
           <a:xfrm>
-            <a:off x="822960" y="2743200"/>
-            <a:ext cx="10515600" cy="731520"/>
+            <a:off x="822960" y="2560320"/>
+            <a:ext cx="5303520" cy="914400"/>
           </a:xfrm>
           <a:prstGeom prst="rect">
             <a:avLst/>
@@ -3209,9 +3245,9 @@
           </a:bodyPr>
           <a:lstStyle/>
           <a:p>
-            <a:pPr algn="just"/>
+            <a:pPr algn="l"/>
             <a:r>
-              <a:rPr sz="2600" b="0" i="0">
+              <a:rPr sz="2100" b="0" i="0">
                 <a:solidFill>
                   <a:srgbClr val="FFFFFF"/>
                 </a:solidFill>
@@ -3224,7 +3260,7 @@
       </p:sp>
       <p:sp>
         <p:nvSpPr>
-          <p:cNvPr id="5" name="Rectangle 4"/>
+          <p:cNvPr id="6" name="Rectangle 5"/>
           <p:cNvSpPr/>
           <p:nvPr/>
         </p:nvSpPr>
@@ -3267,14 +3303,14 @@
       </p:sp>
       <p:sp>
         <p:nvSpPr>
-          <p:cNvPr id="6" name="TextBox 5"/>
+          <p:cNvPr id="7" name="TextBox 6"/>
           <p:cNvSpPr txBox="1"/>
           <p:nvPr/>
         </p:nvSpPr>
         <p:spPr>
           <a:xfrm>
             <a:off x="822960" y="3840480"/>
-            <a:ext cx="10515600" cy="822960"/>
+            <a:ext cx="5303520" cy="1097280"/>
           </a:xfrm>
           <a:prstGeom prst="rect">
             <a:avLst/>
@@ -3287,9 +3323,9 @@
           </a:bodyPr>
           <a:lstStyle/>
           <a:p>
-            <a:pPr algn="just"/>
+            <a:pPr algn="l"/>
             <a:r>
-              <a:rPr sz="1800" b="0" i="0">
+              <a:rPr sz="1700" b="0" i="0">
                 <a:solidFill>
                   <a:srgbClr val="C7D6E5"/>
                 </a:solidFill>
@@ -3299,22 +3335,34 @@
             </a:r>
           </a:p>
           <a:p>
-            <a:pPr algn="just"/>
+            <a:pPr algn="l"/>
             <a:r>
-              <a:rPr sz="1800" b="0" i="0">
+              <a:rPr sz="1700" b="0" i="0">
                 <a:solidFill>
                   <a:srgbClr val="C7D6E5"/>
                 </a:solidFill>
                 <a:latin typeface="Times New Roman"/>
               </a:rPr>
-              <a:t>Distilling the Knowledge in a Neural Network, arXiv:1503.02531</a:t>
+              <a:t>Distilling the Knowledge in a Neural Network,</a:t>
+            </a:r>
+          </a:p>
+          <a:p>
+            <a:pPr algn="l"/>
+            <a:r>
+              <a:rPr sz="1700" b="0" i="0">
+                <a:solidFill>
+                  <a:srgbClr val="C7D6E5"/>
+                </a:solidFill>
+                <a:latin typeface="Times New Roman"/>
+              </a:rPr>
+              <a:t>arXiv:1503.02531</a:t>
             </a:r>
           </a:p>
         </p:txBody>
       </p:sp>
       <p:sp>
         <p:nvSpPr>
-          <p:cNvPr id="7" name="TextBox 6"/>
+          <p:cNvPr id="8" name="TextBox 7"/>
           <p:cNvSpPr txBox="1"/>
           <p:nvPr/>
         </p:nvSpPr>
@@ -3334,7 +3382,7 @@
           </a:bodyPr>
           <a:lstStyle/>
           <a:p>
-            <a:pPr algn="just"/>
+            <a:pPr algn="l"/>
             <a:r>
               <a:rPr sz="1500" b="0" i="0">
                 <a:solidFill>
@@ -3386,7 +3434,7 @@
                                           </p:stCondLst>
                                         </p:cTn>
                                         <p:tgtEl>
-                                          <p:spTgt spid="6"/>
+                                          <p:spTgt spid="7"/>
                                         </p:tgtEl>
                                         <p:attrNameLst>
                                           <p:attrName>style.visibility</p:attrName>
@@ -3427,7 +3475,7 @@
       </p:par>
     </p:tnLst>
     <p:bldLst>
-      <p:bldP spid="6" grpId="0" animBg="1"/>
+      <p:bldP spid="7" grpId="0" animBg="1"/>
     </p:bldLst>
   </p:timing>
 </p:sld>

--- a/topics/knowledge-distillation/Knowledge_Distillation_slides_EN.pptx
+++ b/topics/knowledge-distillation/Knowledge_Distillation_slides_EN.pptx
@@ -26,6 +26,7 @@
     <p:sldId id="274" r:id="rId25"/>
     <p:sldId id="275" r:id="rId26"/>
     <p:sldId id="276" r:id="rId27"/>
+    <p:sldId id="277" r:id="rId28"/>
   </p:sldIdLst>
   <p:sldSz cx="12191695" cy="6858000" type="screen4x3"/>
   <p:notesSz cx="6858000" cy="9144000"/>
@@ -3609,6 +3610,1537 @@
                 </a:solidFill>
                 <a:latin typeface="Times New Roman"/>
               </a:rPr>
+              <a:t>2. Softmax with a temperature: T = 4</a:t>
+            </a:r>
+          </a:p>
+        </p:txBody>
+      </p:sp>
+      <p:sp>
+        <p:nvSpPr>
+          <p:cNvPr id="5" name="TextBox 4"/>
+          <p:cNvSpPr txBox="1"/>
+          <p:nvPr/>
+        </p:nvSpPr>
+        <p:spPr>
+          <a:xfrm>
+            <a:off x="411480" y="521207"/>
+            <a:ext cx="11338560" cy="301752"/>
+          </a:xfrm>
+          <a:prstGeom prst="rect">
+            <a:avLst/>
+          </a:prstGeom>
+          <a:noFill/>
+        </p:spPr>
+        <p:txBody>
+          <a:bodyPr wrap="square">
+            <a:spAutoFit/>
+          </a:bodyPr>
+          <a:lstStyle/>
+          <a:p>
+            <a:pPr algn="just"/>
+            <a:r>
+              <a:rPr sz="1400" b="0" i="0">
+                <a:solidFill>
+                  <a:srgbClr val="C7D6E5"/>
+                </a:solidFill>
+                <a:latin typeface="Times New Roman"/>
+              </a:rPr>
+              <a:t>The same logits of the cumbersome model at a higher temperature</a:t>
+            </a:r>
+          </a:p>
+        </p:txBody>
+      </p:sp>
+      <p:pic>
+        <p:nvPicPr>
+          <p:cNvPr id="6" name="Picture 5" descr="m_softmax.png"/>
+          <p:cNvPicPr>
+            <a:picLocks noChangeAspect="1"/>
+          </p:cNvPicPr>
+          <p:nvPr/>
+        </p:nvPicPr>
+        <p:blipFill>
+          <a:blip r:embed="rId2"/>
+          <a:stretch>
+            <a:fillRect/>
+          </a:stretch>
+        </p:blipFill>
+        <p:spPr>
+          <a:xfrm>
+            <a:off x="822960" y="1051560"/>
+            <a:ext cx="1834822" cy="868680"/>
+          </a:xfrm>
+          <a:prstGeom prst="rect">
+            <a:avLst/>
+          </a:prstGeom>
+        </p:spPr>
+      </p:pic>
+      <p:sp>
+        <p:nvSpPr>
+          <p:cNvPr id="7" name="TextBox 6"/>
+          <p:cNvSpPr txBox="1"/>
+          <p:nvPr/>
+        </p:nvSpPr>
+        <p:spPr>
+          <a:xfrm>
+            <a:off x="4754880" y="1097280"/>
+            <a:ext cx="6949440" cy="914400"/>
+          </a:xfrm>
+          <a:prstGeom prst="rect">
+            <a:avLst/>
+          </a:prstGeom>
+          <a:noFill/>
+        </p:spPr>
+        <p:txBody>
+          <a:bodyPr wrap="square">
+            <a:spAutoFit/>
+          </a:bodyPr>
+          <a:lstStyle/>
+          <a:p>
+            <a:pPr algn="just"/>
+            <a:r>
+              <a:rPr sz="1700" b="0" i="0">
+                <a:solidFill>
+                  <a:srgbClr val="202020"/>
+                </a:solidFill>
+                <a:latin typeface="Times New Roman"/>
+              </a:rPr>
+              <a:t>Using a higher value for T produces a softer probability distribution over classes: Step 1 reduces the differences between the logits by a factor of 4.</a:t>
+            </a:r>
+          </a:p>
+        </p:txBody>
+      </p:sp>
+      <p:graphicFrame>
+        <p:nvGraphicFramePr>
+          <p:cNvPr id="8" name="Table 7"/>
+          <p:cNvGraphicFramePr>
+            <a:graphicFrameLocks noGrp="1"/>
+          </p:cNvGraphicFramePr>
+          <p:nvPr/>
+        </p:nvGraphicFramePr>
+        <p:xfrm>
+          <a:off x="731520" y="2240280"/>
+          <a:ext cx="1188720" cy="1316736"/>
+        </p:xfrm>
+        <a:graphic>
+          <a:graphicData uri="http://schemas.openxmlformats.org/drawingml/2006/table">
+            <a:tbl>
+              <a:tblPr bandRow="1">
+                <a:tableStyleId>{5C22544A-7EE6-4342-B048-85BDC9FD1C3A}</a:tableStyleId>
+              </a:tblPr>
+              <a:tblGrid>
+                <a:gridCol w="1188720"/>
+              </a:tblGrid>
+              <a:tr h="329184">
+                <a:tc>
+                  <a:txBody>
+                    <a:bodyPr/>
+                    <a:lstStyle/>
+                    <a:p>
+                      <a:pPr algn="ctr"/>
+                      <a:r>
+                        <a:rPr sz="1600" b="1">
+                          <a:solidFill>
+                            <a:srgbClr val="FFFFFF"/>
+                          </a:solidFill>
+                          <a:latin typeface="Times New Roman"/>
+                        </a:rPr>
+                        <a:t>Class</a:t>
+                      </a:r>
+                    </a:p>
+                  </a:txBody>
+                  <a:tcPr marL="36576" marR="36576" marT="9144" marB="9144">
+                    <a:solidFill>
+                      <a:srgbClr val="1F4E79"/>
+                    </a:solidFill>
+                  </a:tcPr>
+                </a:tc>
+              </a:tr>
+              <a:tr h="329184">
+                <a:tc>
+                  <a:txBody>
+                    <a:bodyPr/>
+                    <a:lstStyle/>
+                    <a:p>
+                      <a:pPr algn="ctr"/>
+                      <a:r>
+                        <a:rPr sz="1600" b="0">
+                          <a:solidFill>
+                            <a:srgbClr val="202020"/>
+                          </a:solidFill>
+                          <a:latin typeface="Times New Roman"/>
+                        </a:rPr>
+                        <a:t>2</a:t>
+                      </a:r>
+                    </a:p>
+                  </a:txBody>
+                  <a:tcPr marL="36576" marR="36576" marT="9144" marB="9144">
+                    <a:solidFill>
+                      <a:srgbClr val="FFFFFF"/>
+                    </a:solidFill>
+                  </a:tcPr>
+                </a:tc>
+              </a:tr>
+              <a:tr h="329184">
+                <a:tc>
+                  <a:txBody>
+                    <a:bodyPr/>
+                    <a:lstStyle/>
+                    <a:p>
+                      <a:pPr algn="ctr"/>
+                      <a:r>
+                        <a:rPr sz="1600" b="0">
+                          <a:solidFill>
+                            <a:srgbClr val="202020"/>
+                          </a:solidFill>
+                          <a:latin typeface="Times New Roman"/>
+                        </a:rPr>
+                        <a:t>3</a:t>
+                      </a:r>
+                    </a:p>
+                  </a:txBody>
+                  <a:tcPr marL="36576" marR="36576" marT="9144" marB="9144">
+                    <a:solidFill>
+                      <a:srgbClr val="FFFFFF"/>
+                    </a:solidFill>
+                  </a:tcPr>
+                </a:tc>
+              </a:tr>
+              <a:tr h="329184">
+                <a:tc>
+                  <a:txBody>
+                    <a:bodyPr/>
+                    <a:lstStyle/>
+                    <a:p>
+                      <a:pPr algn="ctr"/>
+                      <a:r>
+                        <a:rPr sz="1600" b="0">
+                          <a:solidFill>
+                            <a:srgbClr val="202020"/>
+                          </a:solidFill>
+                          <a:latin typeface="Times New Roman"/>
+                        </a:rPr>
+                        <a:t>7</a:t>
+                      </a:r>
+                    </a:p>
+                  </a:txBody>
+                  <a:tcPr marL="36576" marR="36576" marT="9144" marB="9144">
+                    <a:solidFill>
+                      <a:srgbClr val="FFFFFF"/>
+                    </a:solidFill>
+                  </a:tcPr>
+                </a:tc>
+              </a:tr>
+            </a:tbl>
+          </a:graphicData>
+        </a:graphic>
+      </p:graphicFrame>
+      <p:graphicFrame>
+        <p:nvGraphicFramePr>
+          <p:cNvPr id="9" name="Table 8"/>
+          <p:cNvGraphicFramePr>
+            <a:graphicFrameLocks noGrp="1"/>
+          </p:cNvGraphicFramePr>
+          <p:nvPr/>
+        </p:nvGraphicFramePr>
+        <p:xfrm>
+          <a:off x="2057400" y="2240280"/>
+          <a:ext cx="1463040" cy="1316736"/>
+        </p:xfrm>
+        <a:graphic>
+          <a:graphicData uri="http://schemas.openxmlformats.org/drawingml/2006/table">
+            <a:tbl>
+              <a:tblPr bandRow="1">
+                <a:tableStyleId>{5C22544A-7EE6-4342-B048-85BDC9FD1C3A}</a:tableStyleId>
+              </a:tblPr>
+              <a:tblGrid>
+                <a:gridCol w="1463040"/>
+              </a:tblGrid>
+              <a:tr h="329184">
+                <a:tc>
+                  <a:txBody>
+                    <a:bodyPr/>
+                    <a:lstStyle/>
+                    <a:p>
+                      <a:pPr algn="ctr"/>
+                      <a:r>
+                        <a:rPr sz="1600" b="1">
+                          <a:solidFill>
+                            <a:srgbClr val="FFFFFF"/>
+                          </a:solidFill>
+                          <a:latin typeface="Times New Roman"/>
+                        </a:rPr>
+                        <a:t>v</a:t>
+                      </a:r>
+                    </a:p>
+                  </a:txBody>
+                  <a:tcPr marL="36576" marR="36576" marT="9144" marB="9144">
+                    <a:solidFill>
+                      <a:srgbClr val="1F4E79"/>
+                    </a:solidFill>
+                  </a:tcPr>
+                </a:tc>
+              </a:tr>
+              <a:tr h="329184">
+                <a:tc>
+                  <a:txBody>
+                    <a:bodyPr/>
+                    <a:lstStyle/>
+                    <a:p>
+                      <a:pPr algn="ctr"/>
+                      <a:r>
+                        <a:rPr sz="1600" b="0">
+                          <a:solidFill>
+                            <a:srgbClr val="202020"/>
+                          </a:solidFill>
+                          <a:latin typeface="Times New Roman"/>
+                        </a:rPr>
+                        <a:t>8</a:t>
+                      </a:r>
+                    </a:p>
+                  </a:txBody>
+                  <a:tcPr marL="36576" marR="36576" marT="9144" marB="9144">
+                    <a:solidFill>
+                      <a:srgbClr val="FFFFFF"/>
+                    </a:solidFill>
+                  </a:tcPr>
+                </a:tc>
+              </a:tr>
+              <a:tr h="329184">
+                <a:tc>
+                  <a:txBody>
+                    <a:bodyPr/>
+                    <a:lstStyle/>
+                    <a:p>
+                      <a:pPr algn="ctr"/>
+                      <a:r>
+                        <a:rPr sz="1600" b="0">
+                          <a:solidFill>
+                            <a:srgbClr val="202020"/>
+                          </a:solidFill>
+                          <a:latin typeface="Times New Roman"/>
+                        </a:rPr>
+                        <a:t>4</a:t>
+                      </a:r>
+                    </a:p>
+                  </a:txBody>
+                  <a:tcPr marL="36576" marR="36576" marT="9144" marB="9144">
+                    <a:solidFill>
+                      <a:srgbClr val="FFFFFF"/>
+                    </a:solidFill>
+                  </a:tcPr>
+                </a:tc>
+              </a:tr>
+              <a:tr h="329184">
+                <a:tc>
+                  <a:txBody>
+                    <a:bodyPr/>
+                    <a:lstStyle/>
+                    <a:p>
+                      <a:pPr algn="ctr"/>
+                      <a:r>
+                        <a:rPr sz="1600" b="0">
+                          <a:solidFill>
+                            <a:srgbClr val="202020"/>
+                          </a:solidFill>
+                          <a:latin typeface="Times New Roman"/>
+                        </a:rPr>
+                        <a:t>0</a:t>
+                      </a:r>
+                    </a:p>
+                  </a:txBody>
+                  <a:tcPr marL="36576" marR="36576" marT="9144" marB="9144">
+                    <a:solidFill>
+                      <a:srgbClr val="FFFFFF"/>
+                    </a:solidFill>
+                  </a:tcPr>
+                </a:tc>
+              </a:tr>
+            </a:tbl>
+          </a:graphicData>
+        </a:graphic>
+      </p:graphicFrame>
+      <p:graphicFrame>
+        <p:nvGraphicFramePr>
+          <p:cNvPr id="10" name="Table 9"/>
+          <p:cNvGraphicFramePr>
+            <a:graphicFrameLocks noGrp="1"/>
+          </p:cNvGraphicFramePr>
+          <p:nvPr/>
+        </p:nvGraphicFramePr>
+        <p:xfrm>
+          <a:off x="3657600" y="2240280"/>
+          <a:ext cx="1965960" cy="1316736"/>
+        </p:xfrm>
+        <a:graphic>
+          <a:graphicData uri="http://schemas.openxmlformats.org/drawingml/2006/table">
+            <a:tbl>
+              <a:tblPr bandRow="1">
+                <a:tableStyleId>{5C22544A-7EE6-4342-B048-85BDC9FD1C3A}</a:tableStyleId>
+              </a:tblPr>
+              <a:tblGrid>
+                <a:gridCol w="1965960"/>
+              </a:tblGrid>
+              <a:tr h="329184">
+                <a:tc>
+                  <a:txBody>
+                    <a:bodyPr/>
+                    <a:lstStyle/>
+                    <a:p>
+                      <a:pPr algn="ctr"/>
+                      <a:r>
+                        <a:rPr sz="1600" b="1">
+                          <a:solidFill>
+                            <a:srgbClr val="FFFFFF"/>
+                          </a:solidFill>
+                          <a:latin typeface="Times New Roman"/>
+                        </a:rPr>
+                        <a:t>Step 1:  ÷ T</a:t>
+                      </a:r>
+                    </a:p>
+                  </a:txBody>
+                  <a:tcPr marL="36576" marR="36576" marT="9144" marB="9144">
+                    <a:solidFill>
+                      <a:srgbClr val="1F4E79"/>
+                    </a:solidFill>
+                  </a:tcPr>
+                </a:tc>
+              </a:tr>
+              <a:tr h="329184">
+                <a:tc>
+                  <a:txBody>
+                    <a:bodyPr/>
+                    <a:lstStyle/>
+                    <a:p>
+                      <a:pPr algn="ctr"/>
+                      <a:r>
+                        <a:rPr sz="1600" b="0">
+                          <a:solidFill>
+                            <a:srgbClr val="202020"/>
+                          </a:solidFill>
+                          <a:latin typeface="Times New Roman"/>
+                        </a:rPr>
+                        <a:t>2.0000</a:t>
+                      </a:r>
+                    </a:p>
+                  </a:txBody>
+                  <a:tcPr marL="36576" marR="36576" marT="9144" marB="9144">
+                    <a:solidFill>
+                      <a:srgbClr val="FFFFFF"/>
+                    </a:solidFill>
+                  </a:tcPr>
+                </a:tc>
+              </a:tr>
+              <a:tr h="329184">
+                <a:tc>
+                  <a:txBody>
+                    <a:bodyPr/>
+                    <a:lstStyle/>
+                    <a:p>
+                      <a:pPr algn="ctr"/>
+                      <a:r>
+                        <a:rPr sz="1600" b="0">
+                          <a:solidFill>
+                            <a:srgbClr val="202020"/>
+                          </a:solidFill>
+                          <a:latin typeface="Times New Roman"/>
+                        </a:rPr>
+                        <a:t>1.0000</a:t>
+                      </a:r>
+                    </a:p>
+                  </a:txBody>
+                  <a:tcPr marL="36576" marR="36576" marT="9144" marB="9144">
+                    <a:solidFill>
+                      <a:srgbClr val="FFFFFF"/>
+                    </a:solidFill>
+                  </a:tcPr>
+                </a:tc>
+              </a:tr>
+              <a:tr h="329184">
+                <a:tc>
+                  <a:txBody>
+                    <a:bodyPr/>
+                    <a:lstStyle/>
+                    <a:p>
+                      <a:pPr algn="ctr"/>
+                      <a:r>
+                        <a:rPr sz="1600" b="0">
+                          <a:solidFill>
+                            <a:srgbClr val="202020"/>
+                          </a:solidFill>
+                          <a:latin typeface="Times New Roman"/>
+                        </a:rPr>
+                        <a:t>0.0000</a:t>
+                      </a:r>
+                    </a:p>
+                  </a:txBody>
+                  <a:tcPr marL="36576" marR="36576" marT="9144" marB="9144">
+                    <a:solidFill>
+                      <a:srgbClr val="FFFFFF"/>
+                    </a:solidFill>
+                  </a:tcPr>
+                </a:tc>
+              </a:tr>
+            </a:tbl>
+          </a:graphicData>
+        </a:graphic>
+      </p:graphicFrame>
+      <p:graphicFrame>
+        <p:nvGraphicFramePr>
+          <p:cNvPr id="11" name="Table 10"/>
+          <p:cNvGraphicFramePr>
+            <a:graphicFrameLocks noGrp="1"/>
+          </p:cNvGraphicFramePr>
+          <p:nvPr/>
+        </p:nvGraphicFramePr>
+        <p:xfrm>
+          <a:off x="5760720" y="2240280"/>
+          <a:ext cx="2240279" cy="1316736"/>
+        </p:xfrm>
+        <a:graphic>
+          <a:graphicData uri="http://schemas.openxmlformats.org/drawingml/2006/table">
+            <a:tbl>
+              <a:tblPr bandRow="1">
+                <a:tableStyleId>{5C22544A-7EE6-4342-B048-85BDC9FD1C3A}</a:tableStyleId>
+              </a:tblPr>
+              <a:tblGrid>
+                <a:gridCol w="2240279"/>
+              </a:tblGrid>
+              <a:tr h="329184">
+                <a:tc>
+                  <a:txBody>
+                    <a:bodyPr/>
+                    <a:lstStyle/>
+                    <a:p>
+                      <a:pPr algn="ctr"/>
+                      <a:r>
+                        <a:rPr sz="1600" b="1">
+                          <a:solidFill>
+                            <a:srgbClr val="FFFFFF"/>
+                          </a:solidFill>
+                          <a:latin typeface="Times New Roman"/>
+                        </a:rPr>
+                        <a:t>Step 2:  exp</a:t>
+                      </a:r>
+                    </a:p>
+                  </a:txBody>
+                  <a:tcPr marL="36576" marR="36576" marT="9144" marB="9144">
+                    <a:solidFill>
+                      <a:srgbClr val="1F4E79"/>
+                    </a:solidFill>
+                  </a:tcPr>
+                </a:tc>
+              </a:tr>
+              <a:tr h="329184">
+                <a:tc>
+                  <a:txBody>
+                    <a:bodyPr/>
+                    <a:lstStyle/>
+                    <a:p>
+                      <a:pPr algn="ctr"/>
+                      <a:r>
+                        <a:rPr sz="1600" b="0">
+                          <a:solidFill>
+                            <a:srgbClr val="202020"/>
+                          </a:solidFill>
+                          <a:latin typeface="Times New Roman"/>
+                        </a:rPr>
+                        <a:t>7.3891</a:t>
+                      </a:r>
+                    </a:p>
+                  </a:txBody>
+                  <a:tcPr marL="36576" marR="36576" marT="9144" marB="9144">
+                    <a:solidFill>
+                      <a:srgbClr val="FFFFFF"/>
+                    </a:solidFill>
+                  </a:tcPr>
+                </a:tc>
+              </a:tr>
+              <a:tr h="329184">
+                <a:tc>
+                  <a:txBody>
+                    <a:bodyPr/>
+                    <a:lstStyle/>
+                    <a:p>
+                      <a:pPr algn="ctr"/>
+                      <a:r>
+                        <a:rPr sz="1600" b="0">
+                          <a:solidFill>
+                            <a:srgbClr val="202020"/>
+                          </a:solidFill>
+                          <a:latin typeface="Times New Roman"/>
+                        </a:rPr>
+                        <a:t>2.7183</a:t>
+                      </a:r>
+                    </a:p>
+                  </a:txBody>
+                  <a:tcPr marL="36576" marR="36576" marT="9144" marB="9144">
+                    <a:solidFill>
+                      <a:srgbClr val="FFFFFF"/>
+                    </a:solidFill>
+                  </a:tcPr>
+                </a:tc>
+              </a:tr>
+              <a:tr h="329184">
+                <a:tc>
+                  <a:txBody>
+                    <a:bodyPr/>
+                    <a:lstStyle/>
+                    <a:p>
+                      <a:pPr algn="ctr"/>
+                      <a:r>
+                        <a:rPr sz="1600" b="0">
+                          <a:solidFill>
+                            <a:srgbClr val="202020"/>
+                          </a:solidFill>
+                          <a:latin typeface="Times New Roman"/>
+                        </a:rPr>
+                        <a:t>1.0000</a:t>
+                      </a:r>
+                    </a:p>
+                  </a:txBody>
+                  <a:tcPr marL="36576" marR="36576" marT="9144" marB="9144">
+                    <a:solidFill>
+                      <a:srgbClr val="FFFFFF"/>
+                    </a:solidFill>
+                  </a:tcPr>
+                </a:tc>
+              </a:tr>
+            </a:tbl>
+          </a:graphicData>
+        </a:graphic>
+      </p:graphicFrame>
+      <p:sp>
+        <p:nvSpPr>
+          <p:cNvPr id="12" name="Rectangle 11"/>
+          <p:cNvSpPr/>
+          <p:nvPr/>
+        </p:nvSpPr>
+        <p:spPr>
+          <a:xfrm>
+            <a:off x="8138160" y="2240280"/>
+            <a:ext cx="1737360" cy="1316736"/>
+          </a:xfrm>
+          <a:prstGeom prst="rect">
+            <a:avLst/>
+          </a:prstGeom>
+          <a:solidFill>
+            <a:srgbClr val="DAE6F2"/>
+          </a:solidFill>
+          <a:ln>
+            <a:solidFill>
+              <a:srgbClr val="D0D7DE"/>
+            </a:solidFill>
+          </a:ln>
+          <a:effectLst/>
+        </p:spPr>
+        <p:style>
+          <a:lnRef idx="1">
+            <a:schemeClr val="accent1"/>
+          </a:lnRef>
+          <a:fillRef idx="3">
+            <a:schemeClr val="accent1"/>
+          </a:fillRef>
+          <a:effectRef idx="2">
+            <a:schemeClr val="accent1"/>
+          </a:effectRef>
+          <a:fontRef idx="minor">
+            <a:schemeClr val="lt1"/>
+          </a:fontRef>
+        </p:style>
+        <p:txBody>
+          <a:bodyPr rtlCol="0" anchor="ctr" wrap="square"/>
+          <a:lstStyle/>
+          <a:p>
+            <a:pPr algn="ctr"/>
+            <a:r>
+              <a:rPr sz="1700" b="1">
+                <a:solidFill>
+                  <a:srgbClr val="1F4E79"/>
+                </a:solidFill>
+                <a:latin typeface="Times New Roman"/>
+              </a:rPr>
+              <a:t>Step 3:  sum</a:t>
+            </a:r>
+          </a:p>
+          <a:p>
+            <a:pPr algn="ctr"/>
+            <a:r>
+              <a:rPr sz="1700" b="1">
+                <a:solidFill>
+                  <a:srgbClr val="1F4E79"/>
+                </a:solidFill>
+                <a:latin typeface="Times New Roman"/>
+              </a:rPr>
+              <a:t>11.1073</a:t>
+            </a:r>
+          </a:p>
+        </p:txBody>
+      </p:sp>
+      <p:graphicFrame>
+        <p:nvGraphicFramePr>
+          <p:cNvPr id="13" name="Table 12"/>
+          <p:cNvGraphicFramePr>
+            <a:graphicFrameLocks noGrp="1"/>
+          </p:cNvGraphicFramePr>
+          <p:nvPr/>
+        </p:nvGraphicFramePr>
+        <p:xfrm>
+          <a:off x="10012680" y="2240280"/>
+          <a:ext cx="1783080" cy="1316736"/>
+        </p:xfrm>
+        <a:graphic>
+          <a:graphicData uri="http://schemas.openxmlformats.org/drawingml/2006/table">
+            <a:tbl>
+              <a:tblPr bandRow="1">
+                <a:tableStyleId>{5C22544A-7EE6-4342-B048-85BDC9FD1C3A}</a:tableStyleId>
+              </a:tblPr>
+              <a:tblGrid>
+                <a:gridCol w="1783080"/>
+              </a:tblGrid>
+              <a:tr h="329184">
+                <a:tc>
+                  <a:txBody>
+                    <a:bodyPr/>
+                    <a:lstStyle/>
+                    <a:p>
+                      <a:pPr algn="ctr"/>
+                      <a:r>
+                        <a:rPr sz="1600" b="1">
+                          <a:solidFill>
+                            <a:srgbClr val="FFFFFF"/>
+                          </a:solidFill>
+                          <a:latin typeface="Times New Roman"/>
+                        </a:rPr>
+                        <a:t>Step 4:  p</a:t>
+                      </a:r>
+                    </a:p>
+                  </a:txBody>
+                  <a:tcPr marL="36576" marR="36576" marT="9144" marB="9144">
+                    <a:solidFill>
+                      <a:srgbClr val="1F4E79"/>
+                    </a:solidFill>
+                  </a:tcPr>
+                </a:tc>
+              </a:tr>
+              <a:tr h="329184">
+                <a:tc>
+                  <a:txBody>
+                    <a:bodyPr/>
+                    <a:lstStyle/>
+                    <a:p>
+                      <a:pPr algn="ctr"/>
+                      <a:r>
+                        <a:rPr sz="1600" b="0">
+                          <a:solidFill>
+                            <a:srgbClr val="202020"/>
+                          </a:solidFill>
+                          <a:latin typeface="Times New Roman"/>
+                        </a:rPr>
+                        <a:t>0.6652</a:t>
+                      </a:r>
+                    </a:p>
+                  </a:txBody>
+                  <a:tcPr marL="36576" marR="36576" marT="9144" marB="9144">
+                    <a:solidFill>
+                      <a:srgbClr val="FFFFFF"/>
+                    </a:solidFill>
+                  </a:tcPr>
+                </a:tc>
+              </a:tr>
+              <a:tr h="329184">
+                <a:tc>
+                  <a:txBody>
+                    <a:bodyPr/>
+                    <a:lstStyle/>
+                    <a:p>
+                      <a:pPr algn="ctr"/>
+                      <a:r>
+                        <a:rPr sz="1600" b="0">
+                          <a:solidFill>
+                            <a:srgbClr val="202020"/>
+                          </a:solidFill>
+                          <a:latin typeface="Times New Roman"/>
+                        </a:rPr>
+                        <a:t>0.2447</a:t>
+                      </a:r>
+                    </a:p>
+                  </a:txBody>
+                  <a:tcPr marL="36576" marR="36576" marT="9144" marB="9144">
+                    <a:solidFill>
+                      <a:srgbClr val="FFF3CD"/>
+                    </a:solidFill>
+                  </a:tcPr>
+                </a:tc>
+              </a:tr>
+              <a:tr h="329184">
+                <a:tc>
+                  <a:txBody>
+                    <a:bodyPr/>
+                    <a:lstStyle/>
+                    <a:p>
+                      <a:pPr algn="ctr"/>
+                      <a:r>
+                        <a:rPr sz="1600" b="0">
+                          <a:solidFill>
+                            <a:srgbClr val="202020"/>
+                          </a:solidFill>
+                          <a:latin typeface="Times New Roman"/>
+                        </a:rPr>
+                        <a:t>0.0900</a:t>
+                      </a:r>
+                    </a:p>
+                  </a:txBody>
+                  <a:tcPr marL="36576" marR="36576" marT="9144" marB="9144">
+                    <a:solidFill>
+                      <a:srgbClr val="FFF3CD"/>
+                    </a:solidFill>
+                  </a:tcPr>
+                </a:tc>
+              </a:tr>
+            </a:tbl>
+          </a:graphicData>
+        </a:graphic>
+      </p:graphicFrame>
+      <p:sp>
+        <p:nvSpPr>
+          <p:cNvPr id="14" name="Rectangle 13"/>
+          <p:cNvSpPr/>
+          <p:nvPr/>
+        </p:nvSpPr>
+        <p:spPr>
+          <a:xfrm>
+            <a:off x="731520" y="3931920"/>
+            <a:ext cx="10881360" cy="1051560"/>
+          </a:xfrm>
+          <a:prstGeom prst="rect">
+            <a:avLst/>
+          </a:prstGeom>
+          <a:solidFill>
+            <a:srgbClr val="DCF0E4"/>
+          </a:solidFill>
+          <a:ln>
+            <a:solidFill>
+              <a:srgbClr val="D0D7DE"/>
+            </a:solidFill>
+          </a:ln>
+          <a:effectLst/>
+        </p:spPr>
+        <p:style>
+          <a:lnRef idx="1">
+            <a:schemeClr val="accent1"/>
+          </a:lnRef>
+          <a:fillRef idx="3">
+            <a:schemeClr val="accent1"/>
+          </a:fillRef>
+          <a:effectRef idx="2">
+            <a:schemeClr val="accent1"/>
+          </a:effectRef>
+          <a:fontRef idx="minor">
+            <a:schemeClr val="lt1"/>
+          </a:fontRef>
+        </p:style>
+        <p:txBody>
+          <a:bodyPr rtlCol="0" anchor="ctr" wrap="square"/>
+          <a:lstStyle/>
+          <a:p>
+            <a:pPr algn="just"/>
+            <a:r>
+              <a:rPr sz="1700" b="1">
+                <a:solidFill>
+                  <a:srgbClr val="1E7A45"/>
+                </a:solidFill>
+                <a:latin typeface="Times New Roman"/>
+              </a:rPr>
+              <a:t>The probabilities of 3 and 7 become 0.2447 and 0.0900.</a:t>
+            </a:r>
+          </a:p>
+          <a:p>
+            <a:pPr algn="just"/>
+            <a:r>
+              <a:rPr sz="1700" b="1">
+                <a:solidFill>
+                  <a:srgbClr val="1E7A45"/>
+                </a:solidFill>
+                <a:latin typeface="Times New Roman"/>
+              </a:rPr>
+              <a:t>At this temperature, the relative probabilities of the incorrect classes are large enough to influence learning.</a:t>
+            </a:r>
+          </a:p>
+        </p:txBody>
+      </p:sp>
+      <p:sp>
+        <p:nvSpPr>
+          <p:cNvPr id="15" name="TextBox 14"/>
+          <p:cNvSpPr txBox="1"/>
+          <p:nvPr/>
+        </p:nvSpPr>
+        <p:spPr>
+          <a:xfrm>
+            <a:off x="731520" y="5166360"/>
+            <a:ext cx="10881360" cy="914400"/>
+          </a:xfrm>
+          <a:prstGeom prst="rect">
+            <a:avLst/>
+          </a:prstGeom>
+          <a:noFill/>
+        </p:spPr>
+        <p:txBody>
+          <a:bodyPr wrap="square">
+            <a:spAutoFit/>
+          </a:bodyPr>
+          <a:lstStyle/>
+          <a:p>
+            <a:pPr algn="just"/>
+            <a:r>
+              <a:rPr sz="1600" b="0" i="0">
+                <a:solidFill>
+                  <a:srgbClr val="59636E"/>
+                </a:solidFill>
+                <a:latin typeface="Times New Roman"/>
+              </a:rPr>
+              <a:t>Check: exp(2) = 7.3891, exp(1) = 2.7183, and exp(0) = 1, which sum to 11.1073.</a:t>
+            </a:r>
+          </a:p>
+        </p:txBody>
+      </p:sp>
+    </p:spTree>
+  </p:cSld>
+  <p:clrMapOvr>
+    <a:masterClrMapping/>
+  </p:clrMapOvr>
+  <p:timing>
+    <p:tnLst>
+      <p:par>
+        <p:cTn id="1" dur="indefinite" restart="never" nodeType="tmRoot">
+          <p:childTnLst>
+            <p:seq concurrent="1" nextAc="seek">
+              <p:cTn id="2" dur="indefinite" nodeType="mainSeq">
+                <p:childTnLst>
+                  <p:par>
+                    <p:cTn id="3" fill="hold">
+                      <p:stCondLst>
+                        <p:cond delay="indefinite"/>
+                      </p:stCondLst>
+                      <p:childTnLst>
+                        <p:par>
+                          <p:cTn id="4" fill="hold">
+                            <p:stCondLst>
+                              <p:cond delay="0"/>
+                            </p:stCondLst>
+                            <p:childTnLst>
+                              <p:par>
+                                <p:cTn id="5" presetID="1" presetClass="entr" presetSubtype="0" fill="hold" grpId="0" nodeType="clickEffect">
+                                  <p:stCondLst>
+                                    <p:cond delay="0"/>
+                                  </p:stCondLst>
+                                  <p:childTnLst>
+                                    <p:set>
+                                      <p:cBhvr>
+                                        <p:cTn id="6" dur="1" fill="hold">
+                                          <p:stCondLst>
+                                            <p:cond delay="0"/>
+                                          </p:stCondLst>
+                                        </p:cTn>
+                                        <p:tgtEl>
+                                          <p:spTgt spid="6"/>
+                                        </p:tgtEl>
+                                        <p:attrNameLst>
+                                          <p:attrName>style.visibility</p:attrName>
+                                        </p:attrNameLst>
+                                      </p:cBhvr>
+                                      <p:to>
+                                        <p:strVal val="visible"/>
+                                      </p:to>
+                                    </p:set>
+                                  </p:childTnLst>
+                                </p:cTn>
+                              </p:par>
+                            </p:childTnLst>
+                          </p:cTn>
+                        </p:par>
+                      </p:childTnLst>
+                    </p:cTn>
+                  </p:par>
+                  <p:par>
+                    <p:cTn id="7" fill="hold">
+                      <p:stCondLst>
+                        <p:cond delay="indefinite"/>
+                      </p:stCondLst>
+                      <p:childTnLst>
+                        <p:par>
+                          <p:cTn id="8" fill="hold">
+                            <p:stCondLst>
+                              <p:cond delay="0"/>
+                            </p:stCondLst>
+                            <p:childTnLst>
+                              <p:par>
+                                <p:cTn id="9" presetID="1" presetClass="entr" presetSubtype="0" fill="hold" grpId="0" nodeType="clickEffect">
+                                  <p:stCondLst>
+                                    <p:cond delay="0"/>
+                                  </p:stCondLst>
+                                  <p:childTnLst>
+                                    <p:set>
+                                      <p:cBhvr>
+                                        <p:cTn id="10" dur="1" fill="hold">
+                                          <p:stCondLst>
+                                            <p:cond delay="0"/>
+                                          </p:stCondLst>
+                                        </p:cTn>
+                                        <p:tgtEl>
+                                          <p:spTgt spid="7"/>
+                                        </p:tgtEl>
+                                        <p:attrNameLst>
+                                          <p:attrName>style.visibility</p:attrName>
+                                        </p:attrNameLst>
+                                      </p:cBhvr>
+                                      <p:to>
+                                        <p:strVal val="visible"/>
+                                      </p:to>
+                                    </p:set>
+                                  </p:childTnLst>
+                                </p:cTn>
+                              </p:par>
+                            </p:childTnLst>
+                          </p:cTn>
+                        </p:par>
+                      </p:childTnLst>
+                    </p:cTn>
+                  </p:par>
+                  <p:par>
+                    <p:cTn id="11" fill="hold">
+                      <p:stCondLst>
+                        <p:cond delay="indefinite"/>
+                      </p:stCondLst>
+                      <p:childTnLst>
+                        <p:par>
+                          <p:cTn id="12" fill="hold">
+                            <p:stCondLst>
+                              <p:cond delay="0"/>
+                            </p:stCondLst>
+                            <p:childTnLst>
+                              <p:par>
+                                <p:cTn id="13" presetID="1" presetClass="entr" presetSubtype="0" fill="hold" grpId="0" nodeType="clickEffect">
+                                  <p:stCondLst>
+                                    <p:cond delay="0"/>
+                                  </p:stCondLst>
+                                  <p:childTnLst>
+                                    <p:set>
+                                      <p:cBhvr>
+                                        <p:cTn id="14" dur="1" fill="hold">
+                                          <p:stCondLst>
+                                            <p:cond delay="0"/>
+                                          </p:stCondLst>
+                                        </p:cTn>
+                                        <p:tgtEl>
+                                          <p:spTgt spid="8"/>
+                                        </p:tgtEl>
+                                        <p:attrNameLst>
+                                          <p:attrName>style.visibility</p:attrName>
+                                        </p:attrNameLst>
+                                      </p:cBhvr>
+                                      <p:to>
+                                        <p:strVal val="visible"/>
+                                      </p:to>
+                                    </p:set>
+                                  </p:childTnLst>
+                                </p:cTn>
+                              </p:par>
+                            </p:childTnLst>
+                          </p:cTn>
+                        </p:par>
+                      </p:childTnLst>
+                    </p:cTn>
+                  </p:par>
+                  <p:par>
+                    <p:cTn id="15" fill="hold">
+                      <p:stCondLst>
+                        <p:cond delay="indefinite"/>
+                      </p:stCondLst>
+                      <p:childTnLst>
+                        <p:par>
+                          <p:cTn id="16" fill="hold">
+                            <p:stCondLst>
+                              <p:cond delay="0"/>
+                            </p:stCondLst>
+                            <p:childTnLst>
+                              <p:par>
+                                <p:cTn id="17" presetID="1" presetClass="entr" presetSubtype="0" fill="hold" grpId="0" nodeType="clickEffect">
+                                  <p:stCondLst>
+                                    <p:cond delay="0"/>
+                                  </p:stCondLst>
+                                  <p:childTnLst>
+                                    <p:set>
+                                      <p:cBhvr>
+                                        <p:cTn id="18" dur="1" fill="hold">
+                                          <p:stCondLst>
+                                            <p:cond delay="0"/>
+                                          </p:stCondLst>
+                                        </p:cTn>
+                                        <p:tgtEl>
+                                          <p:spTgt spid="9"/>
+                                        </p:tgtEl>
+                                        <p:attrNameLst>
+                                          <p:attrName>style.visibility</p:attrName>
+                                        </p:attrNameLst>
+                                      </p:cBhvr>
+                                      <p:to>
+                                        <p:strVal val="visible"/>
+                                      </p:to>
+                                    </p:set>
+                                  </p:childTnLst>
+                                </p:cTn>
+                              </p:par>
+                            </p:childTnLst>
+                          </p:cTn>
+                        </p:par>
+                      </p:childTnLst>
+                    </p:cTn>
+                  </p:par>
+                  <p:par>
+                    <p:cTn id="19" fill="hold">
+                      <p:stCondLst>
+                        <p:cond delay="indefinite"/>
+                      </p:stCondLst>
+                      <p:childTnLst>
+                        <p:par>
+                          <p:cTn id="20" fill="hold">
+                            <p:stCondLst>
+                              <p:cond delay="0"/>
+                            </p:stCondLst>
+                            <p:childTnLst>
+                              <p:par>
+                                <p:cTn id="21" presetID="1" presetClass="entr" presetSubtype="0" fill="hold" grpId="0" nodeType="clickEffect">
+                                  <p:stCondLst>
+                                    <p:cond delay="0"/>
+                                  </p:stCondLst>
+                                  <p:childTnLst>
+                                    <p:set>
+                                      <p:cBhvr>
+                                        <p:cTn id="22" dur="1" fill="hold">
+                                          <p:stCondLst>
+                                            <p:cond delay="0"/>
+                                          </p:stCondLst>
+                                        </p:cTn>
+                                        <p:tgtEl>
+                                          <p:spTgt spid="10"/>
+                                        </p:tgtEl>
+                                        <p:attrNameLst>
+                                          <p:attrName>style.visibility</p:attrName>
+                                        </p:attrNameLst>
+                                      </p:cBhvr>
+                                      <p:to>
+                                        <p:strVal val="visible"/>
+                                      </p:to>
+                                    </p:set>
+                                  </p:childTnLst>
+                                </p:cTn>
+                              </p:par>
+                            </p:childTnLst>
+                          </p:cTn>
+                        </p:par>
+                      </p:childTnLst>
+                    </p:cTn>
+                  </p:par>
+                  <p:par>
+                    <p:cTn id="23" fill="hold">
+                      <p:stCondLst>
+                        <p:cond delay="indefinite"/>
+                      </p:stCondLst>
+                      <p:childTnLst>
+                        <p:par>
+                          <p:cTn id="24" fill="hold">
+                            <p:stCondLst>
+                              <p:cond delay="0"/>
+                            </p:stCondLst>
+                            <p:childTnLst>
+                              <p:par>
+                                <p:cTn id="25" presetID="1" presetClass="entr" presetSubtype="0" fill="hold" grpId="0" nodeType="clickEffect">
+                                  <p:stCondLst>
+                                    <p:cond delay="0"/>
+                                  </p:stCondLst>
+                                  <p:childTnLst>
+                                    <p:set>
+                                      <p:cBhvr>
+                                        <p:cTn id="26" dur="1" fill="hold">
+                                          <p:stCondLst>
+                                            <p:cond delay="0"/>
+                                          </p:stCondLst>
+                                        </p:cTn>
+                                        <p:tgtEl>
+                                          <p:spTgt spid="11"/>
+                                        </p:tgtEl>
+                                        <p:attrNameLst>
+                                          <p:attrName>style.visibility</p:attrName>
+                                        </p:attrNameLst>
+                                      </p:cBhvr>
+                                      <p:to>
+                                        <p:strVal val="visible"/>
+                                      </p:to>
+                                    </p:set>
+                                  </p:childTnLst>
+                                </p:cTn>
+                              </p:par>
+                            </p:childTnLst>
+                          </p:cTn>
+                        </p:par>
+                      </p:childTnLst>
+                    </p:cTn>
+                  </p:par>
+                  <p:par>
+                    <p:cTn id="27" fill="hold">
+                      <p:stCondLst>
+                        <p:cond delay="indefinite"/>
+                      </p:stCondLst>
+                      <p:childTnLst>
+                        <p:par>
+                          <p:cTn id="28" fill="hold">
+                            <p:stCondLst>
+                              <p:cond delay="0"/>
+                            </p:stCondLst>
+                            <p:childTnLst>
+                              <p:par>
+                                <p:cTn id="29" presetID="1" presetClass="entr" presetSubtype="0" fill="hold" grpId="0" nodeType="clickEffect">
+                                  <p:stCondLst>
+                                    <p:cond delay="0"/>
+                                  </p:stCondLst>
+                                  <p:childTnLst>
+                                    <p:set>
+                                      <p:cBhvr>
+                                        <p:cTn id="30" dur="1" fill="hold">
+                                          <p:stCondLst>
+                                            <p:cond delay="0"/>
+                                          </p:stCondLst>
+                                        </p:cTn>
+                                        <p:tgtEl>
+                                          <p:spTgt spid="12"/>
+                                        </p:tgtEl>
+                                        <p:attrNameLst>
+                                          <p:attrName>style.visibility</p:attrName>
+                                        </p:attrNameLst>
+                                      </p:cBhvr>
+                                      <p:to>
+                                        <p:strVal val="visible"/>
+                                      </p:to>
+                                    </p:set>
+                                  </p:childTnLst>
+                                </p:cTn>
+                              </p:par>
+                            </p:childTnLst>
+                          </p:cTn>
+                        </p:par>
+                      </p:childTnLst>
+                    </p:cTn>
+                  </p:par>
+                  <p:par>
+                    <p:cTn id="31" fill="hold">
+                      <p:stCondLst>
+                        <p:cond delay="indefinite"/>
+                      </p:stCondLst>
+                      <p:childTnLst>
+                        <p:par>
+                          <p:cTn id="32" fill="hold">
+                            <p:stCondLst>
+                              <p:cond delay="0"/>
+                            </p:stCondLst>
+                            <p:childTnLst>
+                              <p:par>
+                                <p:cTn id="33" presetID="1" presetClass="entr" presetSubtype="0" fill="hold" grpId="0" nodeType="clickEffect">
+                                  <p:stCondLst>
+                                    <p:cond delay="0"/>
+                                  </p:stCondLst>
+                                  <p:childTnLst>
+                                    <p:set>
+                                      <p:cBhvr>
+                                        <p:cTn id="34" dur="1" fill="hold">
+                                          <p:stCondLst>
+                                            <p:cond delay="0"/>
+                                          </p:stCondLst>
+                                        </p:cTn>
+                                        <p:tgtEl>
+                                          <p:spTgt spid="13"/>
+                                        </p:tgtEl>
+                                        <p:attrNameLst>
+                                          <p:attrName>style.visibility</p:attrName>
+                                        </p:attrNameLst>
+                                      </p:cBhvr>
+                                      <p:to>
+                                        <p:strVal val="visible"/>
+                                      </p:to>
+                                    </p:set>
+                                  </p:childTnLst>
+                                </p:cTn>
+                              </p:par>
+                            </p:childTnLst>
+                          </p:cTn>
+                        </p:par>
+                      </p:childTnLst>
+                    </p:cTn>
+                  </p:par>
+                  <p:par>
+                    <p:cTn id="35" fill="hold">
+                      <p:stCondLst>
+                        <p:cond delay="indefinite"/>
+                      </p:stCondLst>
+                      <p:childTnLst>
+                        <p:par>
+                          <p:cTn id="36" fill="hold">
+                            <p:stCondLst>
+                              <p:cond delay="0"/>
+                            </p:stCondLst>
+                            <p:childTnLst>
+                              <p:par>
+                                <p:cTn id="37" presetID="1" presetClass="entr" presetSubtype="0" fill="hold" grpId="0" nodeType="clickEffect">
+                                  <p:stCondLst>
+                                    <p:cond delay="0"/>
+                                  </p:stCondLst>
+                                  <p:childTnLst>
+                                    <p:set>
+                                      <p:cBhvr>
+                                        <p:cTn id="38" dur="1" fill="hold">
+                                          <p:stCondLst>
+                                            <p:cond delay="0"/>
+                                          </p:stCondLst>
+                                        </p:cTn>
+                                        <p:tgtEl>
+                                          <p:spTgt spid="14"/>
+                                        </p:tgtEl>
+                                        <p:attrNameLst>
+                                          <p:attrName>style.visibility</p:attrName>
+                                        </p:attrNameLst>
+                                      </p:cBhvr>
+                                      <p:to>
+                                        <p:strVal val="visible"/>
+                                      </p:to>
+                                    </p:set>
+                                  </p:childTnLst>
+                                </p:cTn>
+                              </p:par>
+                            </p:childTnLst>
+                          </p:cTn>
+                        </p:par>
+                      </p:childTnLst>
+                    </p:cTn>
+                  </p:par>
+                  <p:par>
+                    <p:cTn id="39" fill="hold">
+                      <p:stCondLst>
+                        <p:cond delay="indefinite"/>
+                      </p:stCondLst>
+                      <p:childTnLst>
+                        <p:par>
+                          <p:cTn id="40" fill="hold">
+                            <p:stCondLst>
+                              <p:cond delay="0"/>
+                            </p:stCondLst>
+                            <p:childTnLst>
+                              <p:par>
+                                <p:cTn id="41" presetID="1" presetClass="entr" presetSubtype="0" fill="hold" grpId="0" nodeType="clickEffect">
+                                  <p:stCondLst>
+                                    <p:cond delay="0"/>
+                                  </p:stCondLst>
+                                  <p:childTnLst>
+                                    <p:set>
+                                      <p:cBhvr>
+                                        <p:cTn id="42" dur="1" fill="hold">
+                                          <p:stCondLst>
+                                            <p:cond delay="0"/>
+                                          </p:stCondLst>
+                                        </p:cTn>
+                                        <p:tgtEl>
+                                          <p:spTgt spid="15"/>
+                                        </p:tgtEl>
+                                        <p:attrNameLst>
+                                          <p:attrName>style.visibility</p:attrName>
+                                        </p:attrNameLst>
+                                      </p:cBhvr>
+                                      <p:to>
+                                        <p:strVal val="visible"/>
+                                      </p:to>
+                                    </p:set>
+                                  </p:childTnLst>
+                                </p:cTn>
+                              </p:par>
+                            </p:childTnLst>
+                          </p:cTn>
+                        </p:par>
+                      </p:childTnLst>
+                    </p:cTn>
+                  </p:par>
+                </p:childTnLst>
+              </p:cTn>
+              <p:prevCondLst>
+                <p:cond evt="onPrev" delay="0">
+                  <p:tgtEl>
+                    <p:sldTgt/>
+                  </p:tgtEl>
+                </p:cond>
+              </p:prevCondLst>
+              <p:nextCondLst>
+                <p:cond evt="onNext" delay="0">
+                  <p:tgtEl>
+                    <p:sldTgt/>
+                  </p:tgtEl>
+                </p:cond>
+              </p:nextCondLst>
+            </p:seq>
+          </p:childTnLst>
+        </p:cTn>
+      </p:par>
+    </p:tnLst>
+    <p:bldLst>
+      <p:bldP spid="6" grpId="0" animBg="1"/>
+      <p:bldP spid="7" grpId="0" animBg="1"/>
+      <p:bldGraphic spid="8" grpId="0">
+        <p:bldAsOne/>
+      </p:bldGraphic>
+      <p:bldGraphic spid="9" grpId="0">
+        <p:bldAsOne/>
+      </p:bldGraphic>
+      <p:bldGraphic spid="10" grpId="0">
+        <p:bldAsOne/>
+      </p:bldGraphic>
+      <p:bldGraphic spid="11" grpId="0">
+        <p:bldAsOne/>
+      </p:bldGraphic>
+      <p:bldP spid="12" grpId="0" animBg="1"/>
+      <p:bldGraphic spid="13" grpId="0">
+        <p:bldAsOne/>
+      </p:bldGraphic>
+      <p:bldP spid="14" grpId="0" animBg="1"/>
+      <p:bldP spid="15" grpId="0" animBg="1"/>
+    </p:bldLst>
+  </p:timing>
+</p:sld>
+</file>
+
+<file path=ppt/slides/slide11.xml><?xml version="1.0" encoding="utf-8"?>
+<p:sld xmlns:a="http://schemas.openxmlformats.org/drawingml/2006/main" xmlns:p="http://schemas.openxmlformats.org/presentationml/2006/main" xmlns:r="http://schemas.openxmlformats.org/officeDocument/2006/relationships">
+  <p:cSld>
+    <p:spTree>
+      <p:nvGrpSpPr>
+        <p:cNvPr id="1" name=""/>
+        <p:cNvGrpSpPr/>
+        <p:nvPr/>
+      </p:nvGrpSpPr>
+      <p:grpSpPr/>
+      <p:sp>
+        <p:nvSpPr>
+          <p:cNvPr id="2" name="Rectangle 1"/>
+          <p:cNvSpPr/>
+          <p:nvPr/>
+        </p:nvSpPr>
+        <p:spPr>
+          <a:xfrm>
+            <a:off x="0" y="0"/>
+            <a:ext cx="12191695" cy="6858000"/>
+          </a:xfrm>
+          <a:prstGeom prst="rect">
+            <a:avLst/>
+          </a:prstGeom>
+          <a:solidFill>
+            <a:srgbClr val="FFFFFF"/>
+          </a:solidFill>
+          <a:ln>
+            <a:noFill/>
+          </a:ln>
+          <a:effectLst/>
+        </p:spPr>
+        <p:style>
+          <a:lnRef idx="1">
+            <a:schemeClr val="accent1"/>
+          </a:lnRef>
+          <a:fillRef idx="3">
+            <a:schemeClr val="accent1"/>
+          </a:fillRef>
+          <a:effectRef idx="2">
+            <a:schemeClr val="accent1"/>
+          </a:effectRef>
+          <a:fontRef idx="minor">
+            <a:schemeClr val="lt1"/>
+          </a:fontRef>
+        </p:style>
+        <p:txBody>
+          <a:bodyPr rtlCol="0" anchor="ctr"/>
+          <a:lstStyle/>
+          <a:p>
+            <a:pPr algn="ctr"/>
+          </a:p>
+        </p:txBody>
+      </p:sp>
+      <p:sp>
+        <p:nvSpPr>
+          <p:cNvPr id="3" name="Rectangle 2"/>
+          <p:cNvSpPr/>
+          <p:nvPr/>
+        </p:nvSpPr>
+        <p:spPr>
+          <a:xfrm>
+            <a:off x="0" y="0"/>
+            <a:ext cx="12191695" cy="868680"/>
+          </a:xfrm>
+          <a:prstGeom prst="rect">
+            <a:avLst/>
+          </a:prstGeom>
+          <a:solidFill>
+            <a:srgbClr val="1F4E79"/>
+          </a:solidFill>
+          <a:ln>
+            <a:noFill/>
+          </a:ln>
+          <a:effectLst/>
+        </p:spPr>
+        <p:style>
+          <a:lnRef idx="1">
+            <a:schemeClr val="accent1"/>
+          </a:lnRef>
+          <a:fillRef idx="3">
+            <a:schemeClr val="accent1"/>
+          </a:fillRef>
+          <a:effectRef idx="2">
+            <a:schemeClr val="accent1"/>
+          </a:effectRef>
+          <a:fontRef idx="minor">
+            <a:schemeClr val="lt1"/>
+          </a:fontRef>
+        </p:style>
+        <p:txBody>
+          <a:bodyPr rtlCol="0" anchor="ctr"/>
+          <a:lstStyle/>
+          <a:p>
+            <a:pPr algn="ctr"/>
+          </a:p>
+        </p:txBody>
+      </p:sp>
+      <p:sp>
+        <p:nvSpPr>
+          <p:cNvPr id="4" name="TextBox 3"/>
+          <p:cNvSpPr txBox="1"/>
+          <p:nvPr/>
+        </p:nvSpPr>
+        <p:spPr>
+          <a:xfrm>
+            <a:off x="411480" y="54864"/>
+            <a:ext cx="11338560" cy="457200"/>
+          </a:xfrm>
+          <a:prstGeom prst="rect">
+            <a:avLst/>
+          </a:prstGeom>
+          <a:noFill/>
+        </p:spPr>
+        <p:txBody>
+          <a:bodyPr wrap="square">
+            <a:spAutoFit/>
+          </a:bodyPr>
+          <a:lstStyle/>
+          <a:p>
+            <a:pPr algn="just"/>
+            <a:r>
+              <a:rPr sz="2800" b="1" i="0">
+                <a:solidFill>
+                  <a:srgbClr val="FFFFFF"/>
+                </a:solidFill>
+                <a:latin typeface="Times New Roman"/>
+              </a:rPr>
               <a:t>2. Soft targets and hard targets</a:t>
             </a:r>
           </a:p>
@@ -4494,7 +6026,7 @@
 </p:sld>
 </file>
 
-<file path=ppt/slides/slide11.xml><?xml version="1.0" encoding="utf-8"?>
+<file path=ppt/slides/slide12.xml><?xml version="1.0" encoding="utf-8"?>
 <p:sld xmlns:a="http://schemas.openxmlformats.org/drawingml/2006/main" xmlns:p="http://schemas.openxmlformats.org/presentationml/2006/main" xmlns:r="http://schemas.openxmlformats.org/officeDocument/2006/relationships">
   <p:cSld>
     <p:spTree>
@@ -4957,7 +6489,7 @@
                 </a:solidFill>
                 <a:latin typeface="Times New Roman"/>
               </a:rPr>
-              <a:t>them by T² (checked on slide 15)</a:t>
+              <a:t>them by T² (checked on slide 16)</a:t>
             </a:r>
           </a:p>
         </p:txBody>
@@ -5405,7 +6937,7 @@
 </p:sld>
 </file>
 
-<file path=ppt/slides/slide12.xml><?xml version="1.0" encoding="utf-8"?>
+<file path=ppt/slides/slide13.xml><?xml version="1.0" encoding="utf-8"?>
 <p:sld xmlns:a="http://schemas.openxmlformats.org/drawingml/2006/main" xmlns:p="http://schemas.openxmlformats.org/presentationml/2006/main" xmlns:r="http://schemas.openxmlformats.org/officeDocument/2006/relationships">
   <p:cSld>
     <p:spTree>
@@ -7594,7 +9126,7 @@
 </p:sld>
 </file>
 
-<file path=ppt/slides/slide13.xml><?xml version="1.0" encoding="utf-8"?>
+<file path=ppt/slides/slide14.xml><?xml version="1.0" encoding="utf-8"?>
 <p:sld xmlns:a="http://schemas.openxmlformats.org/drawingml/2006/main" xmlns:p="http://schemas.openxmlformats.org/presentationml/2006/main" xmlns:r="http://schemas.openxmlformats.org/officeDocument/2006/relationships">
   <p:cSld>
     <p:spTree>
@@ -9172,7 +10704,7 @@
 </p:sld>
 </file>
 
-<file path=ppt/slides/slide14.xml><?xml version="1.0" encoding="utf-8"?>
+<file path=ppt/slides/slide15.xml><?xml version="1.0" encoding="utf-8"?>
 <p:sld xmlns:a="http://schemas.openxmlformats.org/drawingml/2006/main" xmlns:p="http://schemas.openxmlformats.org/presentationml/2006/main" xmlns:r="http://schemas.openxmlformats.org/officeDocument/2006/relationships">
   <p:cSld>
     <p:spTree>
@@ -10948,7 +12480,7 @@
 </p:sld>
 </file>
 
-<file path=ppt/slides/slide15.xml><?xml version="1.0" encoding="utf-8"?>
+<file path=ppt/slides/slide16.xml><?xml version="1.0" encoding="utf-8"?>
 <p:sld xmlns:a="http://schemas.openxmlformats.org/drawingml/2006/main" xmlns:p="http://schemas.openxmlformats.org/presentationml/2006/main" xmlns:r="http://schemas.openxmlformats.org/officeDocument/2006/relationships">
   <p:cSld>
     <p:spTree>
@@ -12430,7 +13962,7 @@
 </p:sld>
 </file>
 
-<file path=ppt/slides/slide16.xml><?xml version="1.0" encoding="utf-8"?>
+<file path=ppt/slides/slide17.xml><?xml version="1.0" encoding="utf-8"?>
 <p:sld xmlns:a="http://schemas.openxmlformats.org/drawingml/2006/main" xmlns:p="http://schemas.openxmlformats.org/presentationml/2006/main" xmlns:r="http://schemas.openxmlformats.org/officeDocument/2006/relationships">
   <p:cSld>
     <p:spTree>
@@ -13302,7 +14834,7 @@
 </p:sld>
 </file>
 
-<file path=ppt/slides/slide17.xml><?xml version="1.0" encoding="utf-8"?>
+<file path=ppt/slides/slide18.xml><?xml version="1.0" encoding="utf-8"?>
 <p:sld xmlns:a="http://schemas.openxmlformats.org/drawingml/2006/main" xmlns:p="http://schemas.openxmlformats.org/presentationml/2006/main" xmlns:r="http://schemas.openxmlformats.org/officeDocument/2006/relationships">
   <p:cSld>
     <p:spTree>
@@ -13974,1151 +15506,6 @@
                 <a:latin typeface="Times New Roman"/>
               </a:rPr>
               <a:t>Blue: small net 100-100. At every temperature, distillation gives fewer test errors than training on hard targets only (dashed line).</a:t>
-            </a:r>
-          </a:p>
-        </p:txBody>
-      </p:sp>
-    </p:spTree>
-  </p:cSld>
-  <p:clrMapOvr>
-    <a:masterClrMapping/>
-  </p:clrMapOvr>
-  <p:timing>
-    <p:tnLst>
-      <p:par>
-        <p:cTn id="1" dur="indefinite" restart="never" nodeType="tmRoot">
-          <p:childTnLst>
-            <p:seq concurrent="1" nextAc="seek">
-              <p:cTn id="2" dur="indefinite" nodeType="mainSeq">
-                <p:childTnLst>
-                  <p:par>
-                    <p:cTn id="3" fill="hold">
-                      <p:stCondLst>
-                        <p:cond delay="indefinite"/>
-                      </p:stCondLst>
-                      <p:childTnLst>
-                        <p:par>
-                          <p:cTn id="4" fill="hold">
-                            <p:stCondLst>
-                              <p:cond delay="0"/>
-                            </p:stCondLst>
-                            <p:childTnLst>
-                              <p:par>
-                                <p:cTn id="5" presetID="1" presetClass="entr" presetSubtype="0" fill="hold" grpId="0" nodeType="clickEffect">
-                                  <p:stCondLst>
-                                    <p:cond delay="0"/>
-                                  </p:stCondLst>
-                                  <p:childTnLst>
-                                    <p:set>
-                                      <p:cBhvr>
-                                        <p:cTn id="6" dur="1" fill="hold">
-                                          <p:stCondLst>
-                                            <p:cond delay="0"/>
-                                          </p:stCondLst>
-                                        </p:cTn>
-                                        <p:tgtEl>
-                                          <p:spTgt spid="6"/>
-                                        </p:tgtEl>
-                                        <p:attrNameLst>
-                                          <p:attrName>style.visibility</p:attrName>
-                                        </p:attrNameLst>
-                                      </p:cBhvr>
-                                      <p:to>
-                                        <p:strVal val="visible"/>
-                                      </p:to>
-                                    </p:set>
-                                  </p:childTnLst>
-                                </p:cTn>
-                              </p:par>
-                            </p:childTnLst>
-                          </p:cTn>
-                        </p:par>
-                      </p:childTnLst>
-                    </p:cTn>
-                  </p:par>
-                  <p:par>
-                    <p:cTn id="7" fill="hold">
-                      <p:stCondLst>
-                        <p:cond delay="indefinite"/>
-                      </p:stCondLst>
-                      <p:childTnLst>
-                        <p:par>
-                          <p:cTn id="8" fill="hold">
-                            <p:stCondLst>
-                              <p:cond delay="0"/>
-                            </p:stCondLst>
-                            <p:childTnLst>
-                              <p:par>
-                                <p:cTn id="9" presetID="1" presetClass="entr" presetSubtype="0" fill="hold" grpId="0" nodeType="clickEffect">
-                                  <p:stCondLst>
-                                    <p:cond delay="0"/>
-                                  </p:stCondLst>
-                                  <p:childTnLst>
-                                    <p:set>
-                                      <p:cBhvr>
-                                        <p:cTn id="10" dur="1" fill="hold">
-                                          <p:stCondLst>
-                                            <p:cond delay="0"/>
-                                          </p:stCondLst>
-                                        </p:cTn>
-                                        <p:tgtEl>
-                                          <p:spTgt spid="7"/>
-                                        </p:tgtEl>
-                                        <p:attrNameLst>
-                                          <p:attrName>style.visibility</p:attrName>
-                                        </p:attrNameLst>
-                                      </p:cBhvr>
-                                      <p:to>
-                                        <p:strVal val="visible"/>
-                                      </p:to>
-                                    </p:set>
-                                  </p:childTnLst>
-                                </p:cTn>
-                              </p:par>
-                            </p:childTnLst>
-                          </p:cTn>
-                        </p:par>
-                      </p:childTnLst>
-                    </p:cTn>
-                  </p:par>
-                  <p:par>
-                    <p:cTn id="11" fill="hold">
-                      <p:stCondLst>
-                        <p:cond delay="indefinite"/>
-                      </p:stCondLst>
-                      <p:childTnLst>
-                        <p:par>
-                          <p:cTn id="12" fill="hold">
-                            <p:stCondLst>
-                              <p:cond delay="0"/>
-                            </p:stCondLst>
-                            <p:childTnLst>
-                              <p:par>
-                                <p:cTn id="13" presetID="1" presetClass="entr" presetSubtype="0" fill="hold" grpId="0" nodeType="clickEffect">
-                                  <p:stCondLst>
-                                    <p:cond delay="0"/>
-                                  </p:stCondLst>
-                                  <p:childTnLst>
-                                    <p:set>
-                                      <p:cBhvr>
-                                        <p:cTn id="14" dur="1" fill="hold">
-                                          <p:stCondLst>
-                                            <p:cond delay="0"/>
-                                          </p:stCondLst>
-                                        </p:cTn>
-                                        <p:tgtEl>
-                                          <p:spTgt spid="8"/>
-                                        </p:tgtEl>
-                                        <p:attrNameLst>
-                                          <p:attrName>style.visibility</p:attrName>
-                                        </p:attrNameLst>
-                                      </p:cBhvr>
-                                      <p:to>
-                                        <p:strVal val="visible"/>
-                                      </p:to>
-                                    </p:set>
-                                  </p:childTnLst>
-                                </p:cTn>
-                              </p:par>
-                            </p:childTnLst>
-                          </p:cTn>
-                        </p:par>
-                      </p:childTnLst>
-                    </p:cTn>
-                  </p:par>
-                  <p:par>
-                    <p:cTn id="15" fill="hold">
-                      <p:stCondLst>
-                        <p:cond delay="indefinite"/>
-                      </p:stCondLst>
-                      <p:childTnLst>
-                        <p:par>
-                          <p:cTn id="16" fill="hold">
-                            <p:stCondLst>
-                              <p:cond delay="0"/>
-                            </p:stCondLst>
-                            <p:childTnLst>
-                              <p:par>
-                                <p:cTn id="17" presetID="1" presetClass="entr" presetSubtype="0" fill="hold" grpId="0" nodeType="clickEffect">
-                                  <p:stCondLst>
-                                    <p:cond delay="0"/>
-                                  </p:stCondLst>
-                                  <p:childTnLst>
-                                    <p:set>
-                                      <p:cBhvr>
-                                        <p:cTn id="18" dur="1" fill="hold">
-                                          <p:stCondLst>
-                                            <p:cond delay="0"/>
-                                          </p:stCondLst>
-                                        </p:cTn>
-                                        <p:tgtEl>
-                                          <p:spTgt spid="9"/>
-                                        </p:tgtEl>
-                                        <p:attrNameLst>
-                                          <p:attrName>style.visibility</p:attrName>
-                                        </p:attrNameLst>
-                                      </p:cBhvr>
-                                      <p:to>
-                                        <p:strVal val="visible"/>
-                                      </p:to>
-                                    </p:set>
-                                  </p:childTnLst>
-                                </p:cTn>
-                              </p:par>
-                            </p:childTnLst>
-                          </p:cTn>
-                        </p:par>
-                      </p:childTnLst>
-                    </p:cTn>
-                  </p:par>
-                  <p:par>
-                    <p:cTn id="19" fill="hold">
-                      <p:stCondLst>
-                        <p:cond delay="indefinite"/>
-                      </p:stCondLst>
-                      <p:childTnLst>
-                        <p:par>
-                          <p:cTn id="20" fill="hold">
-                            <p:stCondLst>
-                              <p:cond delay="0"/>
-                            </p:stCondLst>
-                            <p:childTnLst>
-                              <p:par>
-                                <p:cTn id="21" presetID="1" presetClass="entr" presetSubtype="0" fill="hold" grpId="0" nodeType="clickEffect">
-                                  <p:stCondLst>
-                                    <p:cond delay="0"/>
-                                  </p:stCondLst>
-                                  <p:childTnLst>
-                                    <p:set>
-                                      <p:cBhvr>
-                                        <p:cTn id="22" dur="1" fill="hold">
-                                          <p:stCondLst>
-                                            <p:cond delay="0"/>
-                                          </p:stCondLst>
-                                        </p:cTn>
-                                        <p:tgtEl>
-                                          <p:spTgt spid="10"/>
-                                        </p:tgtEl>
-                                        <p:attrNameLst>
-                                          <p:attrName>style.visibility</p:attrName>
-                                        </p:attrNameLst>
-                                      </p:cBhvr>
-                                      <p:to>
-                                        <p:strVal val="visible"/>
-                                      </p:to>
-                                    </p:set>
-                                  </p:childTnLst>
-                                </p:cTn>
-                              </p:par>
-                            </p:childTnLst>
-                          </p:cTn>
-                        </p:par>
-                      </p:childTnLst>
-                    </p:cTn>
-                  </p:par>
-                </p:childTnLst>
-              </p:cTn>
-              <p:prevCondLst>
-                <p:cond evt="onPrev" delay="0">
-                  <p:tgtEl>
-                    <p:sldTgt/>
-                  </p:tgtEl>
-                </p:cond>
-              </p:prevCondLst>
-              <p:nextCondLst>
-                <p:cond evt="onNext" delay="0">
-                  <p:tgtEl>
-                    <p:sldTgt/>
-                  </p:tgtEl>
-                </p:cond>
-              </p:nextCondLst>
-            </p:seq>
-          </p:childTnLst>
-        </p:cTn>
-      </p:par>
-    </p:tnLst>
-    <p:bldLst>
-      <p:bldGraphic spid="6" grpId="0">
-        <p:bldAsOne/>
-      </p:bldGraphic>
-      <p:bldP spid="7" grpId="0" animBg="1"/>
-      <p:bldP spid="8" grpId="0" animBg="1"/>
-      <p:bldP spid="9" grpId="0" animBg="1"/>
-      <p:bldP spid="10" grpId="0" animBg="1"/>
-    </p:bldLst>
-  </p:timing>
-</p:sld>
-</file>
-
-<file path=ppt/slides/slide18.xml><?xml version="1.0" encoding="utf-8"?>
-<p:sld xmlns:a="http://schemas.openxmlformats.org/drawingml/2006/main" xmlns:p="http://schemas.openxmlformats.org/presentationml/2006/main" xmlns:r="http://schemas.openxmlformats.org/officeDocument/2006/relationships">
-  <p:cSld>
-    <p:spTree>
-      <p:nvGrpSpPr>
-        <p:cNvPr id="1" name=""/>
-        <p:cNvGrpSpPr/>
-        <p:nvPr/>
-      </p:nvGrpSpPr>
-      <p:grpSpPr/>
-      <p:sp>
-        <p:nvSpPr>
-          <p:cNvPr id="2" name="Rectangle 1"/>
-          <p:cNvSpPr/>
-          <p:nvPr/>
-        </p:nvSpPr>
-        <p:spPr>
-          <a:xfrm>
-            <a:off x="0" y="0"/>
-            <a:ext cx="12191695" cy="6858000"/>
-          </a:xfrm>
-          <a:prstGeom prst="rect">
-            <a:avLst/>
-          </a:prstGeom>
-          <a:solidFill>
-            <a:srgbClr val="FFFFFF"/>
-          </a:solidFill>
-          <a:ln>
-            <a:noFill/>
-          </a:ln>
-          <a:effectLst/>
-        </p:spPr>
-        <p:style>
-          <a:lnRef idx="1">
-            <a:schemeClr val="accent1"/>
-          </a:lnRef>
-          <a:fillRef idx="3">
-            <a:schemeClr val="accent1"/>
-          </a:fillRef>
-          <a:effectRef idx="2">
-            <a:schemeClr val="accent1"/>
-          </a:effectRef>
-          <a:fontRef idx="minor">
-            <a:schemeClr val="lt1"/>
-          </a:fontRef>
-        </p:style>
-        <p:txBody>
-          <a:bodyPr rtlCol="0" anchor="ctr"/>
-          <a:lstStyle/>
-          <a:p>
-            <a:pPr algn="ctr"/>
-          </a:p>
-        </p:txBody>
-      </p:sp>
-      <p:sp>
-        <p:nvSpPr>
-          <p:cNvPr id="3" name="Rectangle 2"/>
-          <p:cNvSpPr/>
-          <p:nvPr/>
-        </p:nvSpPr>
-        <p:spPr>
-          <a:xfrm>
-            <a:off x="0" y="0"/>
-            <a:ext cx="12191695" cy="868680"/>
-          </a:xfrm>
-          <a:prstGeom prst="rect">
-            <a:avLst/>
-          </a:prstGeom>
-          <a:solidFill>
-            <a:srgbClr val="1F4E79"/>
-          </a:solidFill>
-          <a:ln>
-            <a:noFill/>
-          </a:ln>
-          <a:effectLst/>
-        </p:spPr>
-        <p:style>
-          <a:lnRef idx="1">
-            <a:schemeClr val="accent1"/>
-          </a:lnRef>
-          <a:fillRef idx="3">
-            <a:schemeClr val="accent1"/>
-          </a:fillRef>
-          <a:effectRef idx="2">
-            <a:schemeClr val="accent1"/>
-          </a:effectRef>
-          <a:fontRef idx="minor">
-            <a:schemeClr val="lt1"/>
-          </a:fontRef>
-        </p:style>
-        <p:txBody>
-          <a:bodyPr rtlCol="0" anchor="ctr"/>
-          <a:lstStyle/>
-          <a:p>
-            <a:pPr algn="ctr"/>
-          </a:p>
-        </p:txBody>
-      </p:sp>
-      <p:sp>
-        <p:nvSpPr>
-          <p:cNvPr id="4" name="TextBox 3"/>
-          <p:cNvSpPr txBox="1"/>
-          <p:nvPr/>
-        </p:nvSpPr>
-        <p:spPr>
-          <a:xfrm>
-            <a:off x="411480" y="54864"/>
-            <a:ext cx="11338560" cy="457200"/>
-          </a:xfrm>
-          <a:prstGeom prst="rect">
-            <a:avLst/>
-          </a:prstGeom>
-          <a:noFill/>
-        </p:spPr>
-        <p:txBody>
-          <a:bodyPr wrap="square">
-            <a:spAutoFit/>
-          </a:bodyPr>
-          <a:lstStyle/>
-          <a:p>
-            <a:pPr algn="just"/>
-            <a:r>
-              <a:rPr sz="2800" b="1" i="0">
-                <a:solidFill>
-                  <a:srgbClr val="FFFFFF"/>
-                </a:solidFill>
-                <a:latin typeface="Times New Roman"/>
-              </a:rPr>
-              <a:t>4. Intermediate temperatures for a very small net</a:t>
-            </a:r>
-          </a:p>
-        </p:txBody>
-      </p:sp>
-      <p:sp>
-        <p:nvSpPr>
-          <p:cNvPr id="5" name="TextBox 4"/>
-          <p:cNvSpPr txBox="1"/>
-          <p:nvPr/>
-        </p:nvSpPr>
-        <p:spPr>
-          <a:xfrm>
-            <a:off x="411480" y="521207"/>
-            <a:ext cx="11338560" cy="301752"/>
-          </a:xfrm>
-          <a:prstGeom prst="rect">
-            <a:avLst/>
-          </a:prstGeom>
-          <a:noFill/>
-        </p:spPr>
-        <p:txBody>
-          <a:bodyPr wrap="square">
-            <a:spAutoFit/>
-          </a:bodyPr>
-          <a:lstStyle/>
-          <a:p>
-            <a:pPr algn="just"/>
-            <a:r>
-              <a:rPr sz="1400" b="0" i="0">
-                <a:solidFill>
-                  <a:srgbClr val="C7D6E5"/>
-                </a:solidFill>
-                <a:latin typeface="Times New Roman"/>
-              </a:rPr>
-              <a:t>The small net is reduced to 30-30</a:t>
-            </a:r>
-          </a:p>
-        </p:txBody>
-      </p:sp>
-      <p:graphicFrame>
-        <p:nvGraphicFramePr>
-          <p:cNvPr id="6" name="Table 5"/>
-          <p:cNvGraphicFramePr>
-            <a:graphicFrameLocks noGrp="1"/>
-          </p:cNvGraphicFramePr>
-          <p:nvPr/>
-        </p:nvGraphicFramePr>
-        <p:xfrm>
-          <a:off x="731520" y="1143000"/>
-          <a:ext cx="5669278" cy="2304288"/>
-        </p:xfrm>
-        <a:graphic>
-          <a:graphicData uri="http://schemas.openxmlformats.org/drawingml/2006/table">
-            <a:tbl>
-              <a:tblPr bandRow="1">
-                <a:tableStyleId>{5C22544A-7EE6-4342-B048-85BDC9FD1C3A}</a:tableStyleId>
-              </a:tblPr>
-              <a:tblGrid>
-                <a:gridCol w="2040940"/>
-                <a:gridCol w="1814169"/>
-                <a:gridCol w="1814169"/>
-              </a:tblGrid>
-              <a:tr h="329184">
-                <a:tc>
-                  <a:txBody>
-                    <a:bodyPr/>
-                    <a:lstStyle/>
-                    <a:p>
-                      <a:pPr algn="ctr"/>
-                      <a:r>
-                        <a:rPr sz="1600" b="1">
-                          <a:solidFill>
-                            <a:srgbClr val="FFFFFF"/>
-                          </a:solidFill>
-                          <a:latin typeface="Times New Roman"/>
-                        </a:rPr>
-                        <a:t>T</a:t>
-                      </a:r>
-                    </a:p>
-                  </a:txBody>
-                  <a:tcPr marL="36576" marR="36576" marT="9144" marB="9144">
-                    <a:solidFill>
-                      <a:srgbClr val="1F4E79"/>
-                    </a:solidFill>
-                  </a:tcPr>
-                </a:tc>
-                <a:tc>
-                  <a:txBody>
-                    <a:bodyPr/>
-                    <a:lstStyle/>
-                    <a:p>
-                      <a:pPr algn="ctr"/>
-                      <a:r>
-                        <a:rPr sz="1600" b="1">
-                          <a:solidFill>
-                            <a:srgbClr val="FFFFFF"/>
-                          </a:solidFill>
-                          <a:latin typeface="Times New Roman"/>
-                        </a:rPr>
-                        <a:t>Small net 100-100</a:t>
-                      </a:r>
-                    </a:p>
-                  </a:txBody>
-                  <a:tcPr marL="36576" marR="36576" marT="9144" marB="9144">
-                    <a:solidFill>
-                      <a:srgbClr val="1F4E79"/>
-                    </a:solidFill>
-                  </a:tcPr>
-                </a:tc>
-                <a:tc>
-                  <a:txBody>
-                    <a:bodyPr/>
-                    <a:lstStyle/>
-                    <a:p>
-                      <a:pPr algn="ctr"/>
-                      <a:r>
-                        <a:rPr sz="1600" b="1">
-                          <a:solidFill>
-                            <a:srgbClr val="FFFFFF"/>
-                          </a:solidFill>
-                          <a:latin typeface="Times New Roman"/>
-                        </a:rPr>
-                        <a:t>Small net 30-30</a:t>
-                      </a:r>
-                    </a:p>
-                  </a:txBody>
-                  <a:tcPr marL="36576" marR="36576" marT="9144" marB="9144">
-                    <a:solidFill>
-                      <a:srgbClr val="1F4E79"/>
-                    </a:solidFill>
-                  </a:tcPr>
-                </a:tc>
-              </a:tr>
-              <a:tr h="329184">
-                <a:tc>
-                  <a:txBody>
-                    <a:bodyPr/>
-                    <a:lstStyle/>
-                    <a:p>
-                      <a:pPr algn="ctr"/>
-                      <a:r>
-                        <a:rPr sz="1600" b="0">
-                          <a:solidFill>
-                            <a:srgbClr val="202020"/>
-                          </a:solidFill>
-                          <a:latin typeface="Times New Roman"/>
-                        </a:rPr>
-                        <a:t>hard targets only</a:t>
-                      </a:r>
-                    </a:p>
-                  </a:txBody>
-                  <a:tcPr marL="36576" marR="36576" marT="9144" marB="9144">
-                    <a:solidFill>
-                      <a:srgbClr val="FFFFFF"/>
-                    </a:solidFill>
-                  </a:tcPr>
-                </a:tc>
-                <a:tc>
-                  <a:txBody>
-                    <a:bodyPr/>
-                    <a:lstStyle/>
-                    <a:p>
-                      <a:pPr algn="ctr"/>
-                      <a:r>
-                        <a:rPr sz="1600" b="0">
-                          <a:solidFill>
-                            <a:srgbClr val="202020"/>
-                          </a:solidFill>
-                          <a:latin typeface="Times New Roman"/>
-                        </a:rPr>
-                        <a:t>420</a:t>
-                      </a:r>
-                    </a:p>
-                  </a:txBody>
-                  <a:tcPr marL="36576" marR="36576" marT="9144" marB="9144">
-                    <a:solidFill>
-                      <a:srgbClr val="FFFFFF"/>
-                    </a:solidFill>
-                  </a:tcPr>
-                </a:tc>
-                <a:tc>
-                  <a:txBody>
-                    <a:bodyPr/>
-                    <a:lstStyle/>
-                    <a:p>
-                      <a:pPr algn="ctr"/>
-                      <a:r>
-                        <a:rPr sz="1600" b="0">
-                          <a:solidFill>
-                            <a:srgbClr val="202020"/>
-                          </a:solidFill>
-                          <a:latin typeface="Times New Roman"/>
-                        </a:rPr>
-                        <a:t>568</a:t>
-                      </a:r>
-                    </a:p>
-                  </a:txBody>
-                  <a:tcPr marL="36576" marR="36576" marT="9144" marB="9144">
-                    <a:solidFill>
-                      <a:srgbClr val="FFFFFF"/>
-                    </a:solidFill>
-                  </a:tcPr>
-                </a:tc>
-              </a:tr>
-              <a:tr h="329184">
-                <a:tc>
-                  <a:txBody>
-                    <a:bodyPr/>
-                    <a:lstStyle/>
-                    <a:p>
-                      <a:pPr algn="ctr"/>
-                      <a:r>
-                        <a:rPr sz="1600" b="0">
-                          <a:solidFill>
-                            <a:srgbClr val="202020"/>
-                          </a:solidFill>
-                          <a:latin typeface="Times New Roman"/>
-                        </a:rPr>
-                        <a:t>1</a:t>
-                      </a:r>
-                    </a:p>
-                  </a:txBody>
-                  <a:tcPr marL="36576" marR="36576" marT="9144" marB="9144">
-                    <a:solidFill>
-                      <a:srgbClr val="FFFFFF"/>
-                    </a:solidFill>
-                  </a:tcPr>
-                </a:tc>
-                <a:tc>
-                  <a:txBody>
-                    <a:bodyPr/>
-                    <a:lstStyle/>
-                    <a:p>
-                      <a:pPr algn="ctr"/>
-                      <a:r>
-                        <a:rPr sz="1600" b="0">
-                          <a:solidFill>
-                            <a:srgbClr val="202020"/>
-                          </a:solidFill>
-                          <a:latin typeface="Times New Roman"/>
-                        </a:rPr>
-                        <a:t>402</a:t>
-                      </a:r>
-                    </a:p>
-                  </a:txBody>
-                  <a:tcPr marL="36576" marR="36576" marT="9144" marB="9144">
-                    <a:solidFill>
-                      <a:srgbClr val="FFFFFF"/>
-                    </a:solidFill>
-                  </a:tcPr>
-                </a:tc>
-                <a:tc>
-                  <a:txBody>
-                    <a:bodyPr/>
-                    <a:lstStyle/>
-                    <a:p>
-                      <a:pPr algn="ctr"/>
-                      <a:r>
-                        <a:rPr sz="1600" b="0">
-                          <a:solidFill>
-                            <a:srgbClr val="202020"/>
-                          </a:solidFill>
-                          <a:latin typeface="Times New Roman"/>
-                        </a:rPr>
-                        <a:t>561</a:t>
-                      </a:r>
-                    </a:p>
-                  </a:txBody>
-                  <a:tcPr marL="36576" marR="36576" marT="9144" marB="9144">
-                    <a:solidFill>
-                      <a:srgbClr val="FFFFFF"/>
-                    </a:solidFill>
-                  </a:tcPr>
-                </a:tc>
-              </a:tr>
-              <a:tr h="329184">
-                <a:tc>
-                  <a:txBody>
-                    <a:bodyPr/>
-                    <a:lstStyle/>
-                    <a:p>
-                      <a:pPr algn="ctr"/>
-                      <a:r>
-                        <a:rPr sz="1600" b="0">
-                          <a:solidFill>
-                            <a:srgbClr val="202020"/>
-                          </a:solidFill>
-                          <a:latin typeface="Times New Roman"/>
-                        </a:rPr>
-                        <a:t>2</a:t>
-                      </a:r>
-                    </a:p>
-                  </a:txBody>
-                  <a:tcPr marL="36576" marR="36576" marT="9144" marB="9144">
-                    <a:solidFill>
-                      <a:srgbClr val="FFFFFF"/>
-                    </a:solidFill>
-                  </a:tcPr>
-                </a:tc>
-                <a:tc>
-                  <a:txBody>
-                    <a:bodyPr/>
-                    <a:lstStyle/>
-                    <a:p>
-                      <a:pPr algn="ctr"/>
-                      <a:r>
-                        <a:rPr sz="1600" b="0">
-                          <a:solidFill>
-                            <a:srgbClr val="202020"/>
-                          </a:solidFill>
-                          <a:latin typeface="Times New Roman"/>
-                        </a:rPr>
-                        <a:t>349</a:t>
-                      </a:r>
-                    </a:p>
-                  </a:txBody>
-                  <a:tcPr marL="36576" marR="36576" marT="9144" marB="9144">
-                    <a:solidFill>
-                      <a:srgbClr val="FFFFFF"/>
-                    </a:solidFill>
-                  </a:tcPr>
-                </a:tc>
-                <a:tc>
-                  <a:txBody>
-                    <a:bodyPr/>
-                    <a:lstStyle/>
-                    <a:p>
-                      <a:pPr algn="ctr"/>
-                      <a:r>
-                        <a:rPr sz="1600" b="0">
-                          <a:solidFill>
-                            <a:srgbClr val="202020"/>
-                          </a:solidFill>
-                          <a:latin typeface="Times New Roman"/>
-                        </a:rPr>
-                        <a:t>544</a:t>
-                      </a:r>
-                    </a:p>
-                  </a:txBody>
-                  <a:tcPr marL="36576" marR="36576" marT="9144" marB="9144">
-                    <a:solidFill>
-                      <a:srgbClr val="FFFFFF"/>
-                    </a:solidFill>
-                  </a:tcPr>
-                </a:tc>
-              </a:tr>
-              <a:tr h="329184">
-                <a:tc>
-                  <a:txBody>
-                    <a:bodyPr/>
-                    <a:lstStyle/>
-                    <a:p>
-                      <a:pPr algn="ctr"/>
-                      <a:r>
-                        <a:rPr sz="1600" b="0">
-                          <a:solidFill>
-                            <a:srgbClr val="202020"/>
-                          </a:solidFill>
-                          <a:latin typeface="Times New Roman"/>
-                        </a:rPr>
-                        <a:t>4</a:t>
-                      </a:r>
-                    </a:p>
-                  </a:txBody>
-                  <a:tcPr marL="36576" marR="36576" marT="9144" marB="9144">
-                    <a:solidFill>
-                      <a:srgbClr val="FFFFFF"/>
-                    </a:solidFill>
-                  </a:tcPr>
-                </a:tc>
-                <a:tc>
-                  <a:txBody>
-                    <a:bodyPr/>
-                    <a:lstStyle/>
-                    <a:p>
-                      <a:pPr algn="ctr"/>
-                      <a:r>
-                        <a:rPr sz="1600" b="0">
-                          <a:solidFill>
-                            <a:srgbClr val="202020"/>
-                          </a:solidFill>
-                          <a:latin typeface="Times New Roman"/>
-                        </a:rPr>
-                        <a:t>349</a:t>
-                      </a:r>
-                    </a:p>
-                  </a:txBody>
-                  <a:tcPr marL="36576" marR="36576" marT="9144" marB="9144">
-                    <a:solidFill>
-                      <a:srgbClr val="FFFFFF"/>
-                    </a:solidFill>
-                  </a:tcPr>
-                </a:tc>
-                <a:tc>
-                  <a:txBody>
-                    <a:bodyPr/>
-                    <a:lstStyle/>
-                    <a:p>
-                      <a:pPr algn="ctr"/>
-                      <a:r>
-                        <a:rPr sz="1600" b="0">
-                          <a:solidFill>
-                            <a:srgbClr val="202020"/>
-                          </a:solidFill>
-                          <a:latin typeface="Times New Roman"/>
-                        </a:rPr>
-                        <a:t>526</a:t>
-                      </a:r>
-                    </a:p>
-                  </a:txBody>
-                  <a:tcPr marL="36576" marR="36576" marT="9144" marB="9144">
-                    <a:solidFill>
-                      <a:srgbClr val="FFF3CD"/>
-                    </a:solidFill>
-                  </a:tcPr>
-                </a:tc>
-              </a:tr>
-              <a:tr h="329184">
-                <a:tc>
-                  <a:txBody>
-                    <a:bodyPr/>
-                    <a:lstStyle/>
-                    <a:p>
-                      <a:pPr algn="ctr"/>
-                      <a:r>
-                        <a:rPr sz="1600" b="0">
-                          <a:solidFill>
-                            <a:srgbClr val="202020"/>
-                          </a:solidFill>
-                          <a:latin typeface="Times New Roman"/>
-                        </a:rPr>
-                        <a:t>8</a:t>
-                      </a:r>
-                    </a:p>
-                  </a:txBody>
-                  <a:tcPr marL="36576" marR="36576" marT="9144" marB="9144">
-                    <a:solidFill>
-                      <a:srgbClr val="FFFFFF"/>
-                    </a:solidFill>
-                  </a:tcPr>
-                </a:tc>
-                <a:tc>
-                  <a:txBody>
-                    <a:bodyPr/>
-                    <a:lstStyle/>
-                    <a:p>
-                      <a:pPr algn="ctr"/>
-                      <a:r>
-                        <a:rPr sz="1600" b="0">
-                          <a:solidFill>
-                            <a:srgbClr val="202020"/>
-                          </a:solidFill>
-                          <a:latin typeface="Times New Roman"/>
-                        </a:rPr>
-                        <a:t>347</a:t>
-                      </a:r>
-                    </a:p>
-                  </a:txBody>
-                  <a:tcPr marL="36576" marR="36576" marT="9144" marB="9144">
-                    <a:solidFill>
-                      <a:srgbClr val="FFFFFF"/>
-                    </a:solidFill>
-                  </a:tcPr>
-                </a:tc>
-                <a:tc>
-                  <a:txBody>
-                    <a:bodyPr/>
-                    <a:lstStyle/>
-                    <a:p>
-                      <a:pPr algn="ctr"/>
-                      <a:r>
-                        <a:rPr sz="1600" b="0">
-                          <a:solidFill>
-                            <a:srgbClr val="202020"/>
-                          </a:solidFill>
-                          <a:latin typeface="Times New Roman"/>
-                        </a:rPr>
-                        <a:t>570</a:t>
-                      </a:r>
-                    </a:p>
-                  </a:txBody>
-                  <a:tcPr marL="36576" marR="36576" marT="9144" marB="9144">
-                    <a:solidFill>
-                      <a:srgbClr val="FFFFFF"/>
-                    </a:solidFill>
-                  </a:tcPr>
-                </a:tc>
-              </a:tr>
-              <a:tr h="329184">
-                <a:tc>
-                  <a:txBody>
-                    <a:bodyPr/>
-                    <a:lstStyle/>
-                    <a:p>
-                      <a:pPr algn="ctr"/>
-                      <a:r>
-                        <a:rPr sz="1600" b="0">
-                          <a:solidFill>
-                            <a:srgbClr val="202020"/>
-                          </a:solidFill>
-                          <a:latin typeface="Times New Roman"/>
-                        </a:rPr>
-                        <a:t>20</a:t>
-                      </a:r>
-                    </a:p>
-                  </a:txBody>
-                  <a:tcPr marL="36576" marR="36576" marT="9144" marB="9144">
-                    <a:solidFill>
-                      <a:srgbClr val="FFFFFF"/>
-                    </a:solidFill>
-                  </a:tcPr>
-                </a:tc>
-                <a:tc>
-                  <a:txBody>
-                    <a:bodyPr/>
-                    <a:lstStyle/>
-                    <a:p>
-                      <a:pPr algn="ctr"/>
-                      <a:r>
-                        <a:rPr sz="1600" b="0">
-                          <a:solidFill>
-                            <a:srgbClr val="202020"/>
-                          </a:solidFill>
-                          <a:latin typeface="Times New Roman"/>
-                        </a:rPr>
-                        <a:t>318</a:t>
-                      </a:r>
-                    </a:p>
-                  </a:txBody>
-                  <a:tcPr marL="36576" marR="36576" marT="9144" marB="9144">
-                    <a:solidFill>
-                      <a:srgbClr val="FFFFFF"/>
-                    </a:solidFill>
-                  </a:tcPr>
-                </a:tc>
-                <a:tc>
-                  <a:txBody>
-                    <a:bodyPr/>
-                    <a:lstStyle/>
-                    <a:p>
-                      <a:pPr algn="ctr"/>
-                      <a:r>
-                        <a:rPr sz="1600" b="0">
-                          <a:solidFill>
-                            <a:srgbClr val="202020"/>
-                          </a:solidFill>
-                          <a:latin typeface="Times New Roman"/>
-                        </a:rPr>
-                        <a:t>598</a:t>
-                      </a:r>
-                    </a:p>
-                  </a:txBody>
-                  <a:tcPr marL="36576" marR="36576" marT="9144" marB="9144">
-                    <a:solidFill>
-                      <a:srgbClr val="FFFFFF"/>
-                    </a:solidFill>
-                  </a:tcPr>
-                </a:tc>
-              </a:tr>
-            </a:tbl>
-          </a:graphicData>
-        </a:graphic>
-      </p:graphicFrame>
-      <p:pic>
-        <p:nvPicPr>
-          <p:cNvPr id="7" name="Picture 6" descr="f_temp.png"/>
-          <p:cNvPicPr>
-            <a:picLocks noChangeAspect="1"/>
-          </p:cNvPicPr>
-          <p:nvPr/>
-        </p:nvPicPr>
-        <p:blipFill>
-          <a:blip r:embed="rId2"/>
-          <a:stretch>
-            <a:fillRect/>
-          </a:stretch>
-        </p:blipFill>
-        <p:spPr>
-          <a:xfrm>
-            <a:off x="6583680" y="1097280"/>
-            <a:ext cx="5120640" cy="2720340"/>
-          </a:xfrm>
-          <a:prstGeom prst="rect">
-            <a:avLst/>
-          </a:prstGeom>
-        </p:spPr>
-      </p:pic>
-      <p:sp>
-        <p:nvSpPr>
-          <p:cNvPr id="8" name="Rectangle 7"/>
-          <p:cNvSpPr/>
-          <p:nvPr/>
-        </p:nvSpPr>
-        <p:spPr>
-          <a:xfrm>
-            <a:off x="731520" y="3886200"/>
-            <a:ext cx="10881360" cy="914400"/>
-          </a:xfrm>
-          <a:prstGeom prst="rect">
-            <a:avLst/>
-          </a:prstGeom>
-          <a:solidFill>
-            <a:srgbClr val="F6F8FA"/>
-          </a:solidFill>
-          <a:ln>
-            <a:solidFill>
-              <a:srgbClr val="D0D7DE"/>
-            </a:solidFill>
-          </a:ln>
-          <a:effectLst/>
-        </p:spPr>
-        <p:style>
-          <a:lnRef idx="1">
-            <a:schemeClr val="accent1"/>
-          </a:lnRef>
-          <a:fillRef idx="3">
-            <a:schemeClr val="accent1"/>
-          </a:fillRef>
-          <a:effectRef idx="2">
-            <a:schemeClr val="accent1"/>
-          </a:effectRef>
-          <a:fontRef idx="minor">
-            <a:schemeClr val="lt1"/>
-          </a:fontRef>
-        </p:style>
-        <p:txBody>
-          <a:bodyPr rtlCol="0" anchor="ctr" wrap="square"/>
-          <a:lstStyle/>
-          <a:p>
-            <a:pPr algn="just"/>
-            <a:r>
-              <a:rPr sz="1500" b="1">
-                <a:solidFill>
-                  <a:srgbClr val="1F4E79"/>
-                </a:solidFill>
-                <a:latin typeface="Times New Roman"/>
-              </a:rPr>
-              <a:t>Paper: with 300 or more units per layer, all temperatures above 8 gave fairly similar results; with 30 units per layer,</a:t>
-            </a:r>
-          </a:p>
-          <a:p>
-            <a:pPr algn="just"/>
-            <a:r>
-              <a:rPr sz="1500" b="1">
-                <a:solidFill>
-                  <a:srgbClr val="1F4E79"/>
-                </a:solidFill>
-                <a:latin typeface="Times New Roman"/>
-              </a:rPr>
-              <a:t>temperatures in the range 2.5 to 4 worked significantly better than higher or lower temperatures</a:t>
-            </a:r>
-          </a:p>
-        </p:txBody>
-      </p:sp>
-      <p:sp>
-        <p:nvSpPr>
-          <p:cNvPr id="9" name="Rectangle 8"/>
-          <p:cNvSpPr/>
-          <p:nvPr/>
-        </p:nvSpPr>
-        <p:spPr>
-          <a:xfrm>
-            <a:off x="731520" y="4892040"/>
-            <a:ext cx="10881360" cy="914400"/>
-          </a:xfrm>
-          <a:prstGeom prst="rect">
-            <a:avLst/>
-          </a:prstGeom>
-          <a:solidFill>
-            <a:srgbClr val="DCF0E4"/>
-          </a:solidFill>
-          <a:ln>
-            <a:solidFill>
-              <a:srgbClr val="D0D7DE"/>
-            </a:solidFill>
-          </a:ln>
-          <a:effectLst/>
-        </p:spPr>
-        <p:style>
-          <a:lnRef idx="1">
-            <a:schemeClr val="accent1"/>
-          </a:lnRef>
-          <a:fillRef idx="3">
-            <a:schemeClr val="accent1"/>
-          </a:fillRef>
-          <a:effectRef idx="2">
-            <a:schemeClr val="accent1"/>
-          </a:effectRef>
-          <a:fontRef idx="minor">
-            <a:schemeClr val="lt1"/>
-          </a:fontRef>
-        </p:style>
-        <p:txBody>
-          <a:bodyPr rtlCol="0" anchor="ctr" wrap="square"/>
-          <a:lstStyle/>
-          <a:p>
-            <a:pPr algn="just"/>
-            <a:r>
-              <a:rPr sz="1700" b="1">
-                <a:solidFill>
-                  <a:srgbClr val="1E7A45"/>
-                </a:solidFill>
-                <a:latin typeface="Times New Roman"/>
-              </a:rPr>
-              <a:t>In our repetition, the 30-30 net is best at T = 4 (526 errors); at T = 20 it is worse than with hard targets only</a:t>
-            </a:r>
-          </a:p>
-        </p:txBody>
-      </p:sp>
-      <p:sp>
-        <p:nvSpPr>
-          <p:cNvPr id="10" name="TextBox 9"/>
-          <p:cNvSpPr txBox="1"/>
-          <p:nvPr/>
-        </p:nvSpPr>
-        <p:spPr>
-          <a:xfrm>
-            <a:off x="731520" y="5897880"/>
-            <a:ext cx="10881360" cy="731520"/>
-          </a:xfrm>
-          <a:prstGeom prst="rect">
-            <a:avLst/>
-          </a:prstGeom>
-          <a:noFill/>
-        </p:spPr>
-        <p:txBody>
-          <a:bodyPr wrap="square">
-            <a:spAutoFit/>
-          </a:bodyPr>
-          <a:lstStyle/>
-          <a:p>
-            <a:pPr algn="just"/>
-            <a:r>
-              <a:rPr sz="1600" b="0" i="0">
-                <a:solidFill>
-                  <a:srgbClr val="59636E"/>
-                </a:solidFill>
-                <a:latin typeface="Times New Roman"/>
-              </a:rPr>
-              <a:t>When the distilled model is much too small to capture all of the knowledge, ignoring the large negative logits can be helpful.</a:t>
             </a:r>
           </a:p>
         </p:txBody>
@@ -15523,6 +15910,1462 @@
                 </a:solidFill>
                 <a:latin typeface="Times New Roman"/>
               </a:rPr>
+              <a:t>4. Intermediate temperatures for a very small net</a:t>
+            </a:r>
+          </a:p>
+        </p:txBody>
+      </p:sp>
+      <p:sp>
+        <p:nvSpPr>
+          <p:cNvPr id="5" name="TextBox 4"/>
+          <p:cNvSpPr txBox="1"/>
+          <p:nvPr/>
+        </p:nvSpPr>
+        <p:spPr>
+          <a:xfrm>
+            <a:off x="411480" y="521207"/>
+            <a:ext cx="11338560" cy="301752"/>
+          </a:xfrm>
+          <a:prstGeom prst="rect">
+            <a:avLst/>
+          </a:prstGeom>
+          <a:noFill/>
+        </p:spPr>
+        <p:txBody>
+          <a:bodyPr wrap="square">
+            <a:spAutoFit/>
+          </a:bodyPr>
+          <a:lstStyle/>
+          <a:p>
+            <a:pPr algn="just"/>
+            <a:r>
+              <a:rPr sz="1400" b="0" i="0">
+                <a:solidFill>
+                  <a:srgbClr val="C7D6E5"/>
+                </a:solidFill>
+                <a:latin typeface="Times New Roman"/>
+              </a:rPr>
+              <a:t>The small net is reduced to 30-30</a:t>
+            </a:r>
+          </a:p>
+        </p:txBody>
+      </p:sp>
+      <p:graphicFrame>
+        <p:nvGraphicFramePr>
+          <p:cNvPr id="6" name="Table 5"/>
+          <p:cNvGraphicFramePr>
+            <a:graphicFrameLocks noGrp="1"/>
+          </p:cNvGraphicFramePr>
+          <p:nvPr/>
+        </p:nvGraphicFramePr>
+        <p:xfrm>
+          <a:off x="731520" y="1143000"/>
+          <a:ext cx="5669278" cy="2304288"/>
+        </p:xfrm>
+        <a:graphic>
+          <a:graphicData uri="http://schemas.openxmlformats.org/drawingml/2006/table">
+            <a:tbl>
+              <a:tblPr bandRow="1">
+                <a:tableStyleId>{5C22544A-7EE6-4342-B048-85BDC9FD1C3A}</a:tableStyleId>
+              </a:tblPr>
+              <a:tblGrid>
+                <a:gridCol w="2040940"/>
+                <a:gridCol w="1814169"/>
+                <a:gridCol w="1814169"/>
+              </a:tblGrid>
+              <a:tr h="329184">
+                <a:tc>
+                  <a:txBody>
+                    <a:bodyPr/>
+                    <a:lstStyle/>
+                    <a:p>
+                      <a:pPr algn="ctr"/>
+                      <a:r>
+                        <a:rPr sz="1600" b="1">
+                          <a:solidFill>
+                            <a:srgbClr val="FFFFFF"/>
+                          </a:solidFill>
+                          <a:latin typeface="Times New Roman"/>
+                        </a:rPr>
+                        <a:t>T</a:t>
+                      </a:r>
+                    </a:p>
+                  </a:txBody>
+                  <a:tcPr marL="36576" marR="36576" marT="9144" marB="9144">
+                    <a:solidFill>
+                      <a:srgbClr val="1F4E79"/>
+                    </a:solidFill>
+                  </a:tcPr>
+                </a:tc>
+                <a:tc>
+                  <a:txBody>
+                    <a:bodyPr/>
+                    <a:lstStyle/>
+                    <a:p>
+                      <a:pPr algn="ctr"/>
+                      <a:r>
+                        <a:rPr sz="1600" b="1">
+                          <a:solidFill>
+                            <a:srgbClr val="FFFFFF"/>
+                          </a:solidFill>
+                          <a:latin typeface="Times New Roman"/>
+                        </a:rPr>
+                        <a:t>Small net 100-100</a:t>
+                      </a:r>
+                    </a:p>
+                  </a:txBody>
+                  <a:tcPr marL="36576" marR="36576" marT="9144" marB="9144">
+                    <a:solidFill>
+                      <a:srgbClr val="1F4E79"/>
+                    </a:solidFill>
+                  </a:tcPr>
+                </a:tc>
+                <a:tc>
+                  <a:txBody>
+                    <a:bodyPr/>
+                    <a:lstStyle/>
+                    <a:p>
+                      <a:pPr algn="ctr"/>
+                      <a:r>
+                        <a:rPr sz="1600" b="1">
+                          <a:solidFill>
+                            <a:srgbClr val="FFFFFF"/>
+                          </a:solidFill>
+                          <a:latin typeface="Times New Roman"/>
+                        </a:rPr>
+                        <a:t>Small net 30-30</a:t>
+                      </a:r>
+                    </a:p>
+                  </a:txBody>
+                  <a:tcPr marL="36576" marR="36576" marT="9144" marB="9144">
+                    <a:solidFill>
+                      <a:srgbClr val="1F4E79"/>
+                    </a:solidFill>
+                  </a:tcPr>
+                </a:tc>
+              </a:tr>
+              <a:tr h="329184">
+                <a:tc>
+                  <a:txBody>
+                    <a:bodyPr/>
+                    <a:lstStyle/>
+                    <a:p>
+                      <a:pPr algn="ctr"/>
+                      <a:r>
+                        <a:rPr sz="1600" b="0">
+                          <a:solidFill>
+                            <a:srgbClr val="202020"/>
+                          </a:solidFill>
+                          <a:latin typeface="Times New Roman"/>
+                        </a:rPr>
+                        <a:t>hard targets only</a:t>
+                      </a:r>
+                    </a:p>
+                  </a:txBody>
+                  <a:tcPr marL="36576" marR="36576" marT="9144" marB="9144">
+                    <a:solidFill>
+                      <a:srgbClr val="FFFFFF"/>
+                    </a:solidFill>
+                  </a:tcPr>
+                </a:tc>
+                <a:tc>
+                  <a:txBody>
+                    <a:bodyPr/>
+                    <a:lstStyle/>
+                    <a:p>
+                      <a:pPr algn="ctr"/>
+                      <a:r>
+                        <a:rPr sz="1600" b="0">
+                          <a:solidFill>
+                            <a:srgbClr val="202020"/>
+                          </a:solidFill>
+                          <a:latin typeface="Times New Roman"/>
+                        </a:rPr>
+                        <a:t>420</a:t>
+                      </a:r>
+                    </a:p>
+                  </a:txBody>
+                  <a:tcPr marL="36576" marR="36576" marT="9144" marB="9144">
+                    <a:solidFill>
+                      <a:srgbClr val="FFFFFF"/>
+                    </a:solidFill>
+                  </a:tcPr>
+                </a:tc>
+                <a:tc>
+                  <a:txBody>
+                    <a:bodyPr/>
+                    <a:lstStyle/>
+                    <a:p>
+                      <a:pPr algn="ctr"/>
+                      <a:r>
+                        <a:rPr sz="1600" b="0">
+                          <a:solidFill>
+                            <a:srgbClr val="202020"/>
+                          </a:solidFill>
+                          <a:latin typeface="Times New Roman"/>
+                        </a:rPr>
+                        <a:t>568</a:t>
+                      </a:r>
+                    </a:p>
+                  </a:txBody>
+                  <a:tcPr marL="36576" marR="36576" marT="9144" marB="9144">
+                    <a:solidFill>
+                      <a:srgbClr val="FFFFFF"/>
+                    </a:solidFill>
+                  </a:tcPr>
+                </a:tc>
+              </a:tr>
+              <a:tr h="329184">
+                <a:tc>
+                  <a:txBody>
+                    <a:bodyPr/>
+                    <a:lstStyle/>
+                    <a:p>
+                      <a:pPr algn="ctr"/>
+                      <a:r>
+                        <a:rPr sz="1600" b="0">
+                          <a:solidFill>
+                            <a:srgbClr val="202020"/>
+                          </a:solidFill>
+                          <a:latin typeface="Times New Roman"/>
+                        </a:rPr>
+                        <a:t>1</a:t>
+                      </a:r>
+                    </a:p>
+                  </a:txBody>
+                  <a:tcPr marL="36576" marR="36576" marT="9144" marB="9144">
+                    <a:solidFill>
+                      <a:srgbClr val="FFFFFF"/>
+                    </a:solidFill>
+                  </a:tcPr>
+                </a:tc>
+                <a:tc>
+                  <a:txBody>
+                    <a:bodyPr/>
+                    <a:lstStyle/>
+                    <a:p>
+                      <a:pPr algn="ctr"/>
+                      <a:r>
+                        <a:rPr sz="1600" b="0">
+                          <a:solidFill>
+                            <a:srgbClr val="202020"/>
+                          </a:solidFill>
+                          <a:latin typeface="Times New Roman"/>
+                        </a:rPr>
+                        <a:t>402</a:t>
+                      </a:r>
+                    </a:p>
+                  </a:txBody>
+                  <a:tcPr marL="36576" marR="36576" marT="9144" marB="9144">
+                    <a:solidFill>
+                      <a:srgbClr val="FFFFFF"/>
+                    </a:solidFill>
+                  </a:tcPr>
+                </a:tc>
+                <a:tc>
+                  <a:txBody>
+                    <a:bodyPr/>
+                    <a:lstStyle/>
+                    <a:p>
+                      <a:pPr algn="ctr"/>
+                      <a:r>
+                        <a:rPr sz="1600" b="0">
+                          <a:solidFill>
+                            <a:srgbClr val="202020"/>
+                          </a:solidFill>
+                          <a:latin typeface="Times New Roman"/>
+                        </a:rPr>
+                        <a:t>561</a:t>
+                      </a:r>
+                    </a:p>
+                  </a:txBody>
+                  <a:tcPr marL="36576" marR="36576" marT="9144" marB="9144">
+                    <a:solidFill>
+                      <a:srgbClr val="FFFFFF"/>
+                    </a:solidFill>
+                  </a:tcPr>
+                </a:tc>
+              </a:tr>
+              <a:tr h="329184">
+                <a:tc>
+                  <a:txBody>
+                    <a:bodyPr/>
+                    <a:lstStyle/>
+                    <a:p>
+                      <a:pPr algn="ctr"/>
+                      <a:r>
+                        <a:rPr sz="1600" b="0">
+                          <a:solidFill>
+                            <a:srgbClr val="202020"/>
+                          </a:solidFill>
+                          <a:latin typeface="Times New Roman"/>
+                        </a:rPr>
+                        <a:t>2</a:t>
+                      </a:r>
+                    </a:p>
+                  </a:txBody>
+                  <a:tcPr marL="36576" marR="36576" marT="9144" marB="9144">
+                    <a:solidFill>
+                      <a:srgbClr val="FFFFFF"/>
+                    </a:solidFill>
+                  </a:tcPr>
+                </a:tc>
+                <a:tc>
+                  <a:txBody>
+                    <a:bodyPr/>
+                    <a:lstStyle/>
+                    <a:p>
+                      <a:pPr algn="ctr"/>
+                      <a:r>
+                        <a:rPr sz="1600" b="0">
+                          <a:solidFill>
+                            <a:srgbClr val="202020"/>
+                          </a:solidFill>
+                          <a:latin typeface="Times New Roman"/>
+                        </a:rPr>
+                        <a:t>349</a:t>
+                      </a:r>
+                    </a:p>
+                  </a:txBody>
+                  <a:tcPr marL="36576" marR="36576" marT="9144" marB="9144">
+                    <a:solidFill>
+                      <a:srgbClr val="FFFFFF"/>
+                    </a:solidFill>
+                  </a:tcPr>
+                </a:tc>
+                <a:tc>
+                  <a:txBody>
+                    <a:bodyPr/>
+                    <a:lstStyle/>
+                    <a:p>
+                      <a:pPr algn="ctr"/>
+                      <a:r>
+                        <a:rPr sz="1600" b="0">
+                          <a:solidFill>
+                            <a:srgbClr val="202020"/>
+                          </a:solidFill>
+                          <a:latin typeface="Times New Roman"/>
+                        </a:rPr>
+                        <a:t>544</a:t>
+                      </a:r>
+                    </a:p>
+                  </a:txBody>
+                  <a:tcPr marL="36576" marR="36576" marT="9144" marB="9144">
+                    <a:solidFill>
+                      <a:srgbClr val="FFFFFF"/>
+                    </a:solidFill>
+                  </a:tcPr>
+                </a:tc>
+              </a:tr>
+              <a:tr h="329184">
+                <a:tc>
+                  <a:txBody>
+                    <a:bodyPr/>
+                    <a:lstStyle/>
+                    <a:p>
+                      <a:pPr algn="ctr"/>
+                      <a:r>
+                        <a:rPr sz="1600" b="0">
+                          <a:solidFill>
+                            <a:srgbClr val="202020"/>
+                          </a:solidFill>
+                          <a:latin typeface="Times New Roman"/>
+                        </a:rPr>
+                        <a:t>4</a:t>
+                      </a:r>
+                    </a:p>
+                  </a:txBody>
+                  <a:tcPr marL="36576" marR="36576" marT="9144" marB="9144">
+                    <a:solidFill>
+                      <a:srgbClr val="FFFFFF"/>
+                    </a:solidFill>
+                  </a:tcPr>
+                </a:tc>
+                <a:tc>
+                  <a:txBody>
+                    <a:bodyPr/>
+                    <a:lstStyle/>
+                    <a:p>
+                      <a:pPr algn="ctr"/>
+                      <a:r>
+                        <a:rPr sz="1600" b="0">
+                          <a:solidFill>
+                            <a:srgbClr val="202020"/>
+                          </a:solidFill>
+                          <a:latin typeface="Times New Roman"/>
+                        </a:rPr>
+                        <a:t>349</a:t>
+                      </a:r>
+                    </a:p>
+                  </a:txBody>
+                  <a:tcPr marL="36576" marR="36576" marT="9144" marB="9144">
+                    <a:solidFill>
+                      <a:srgbClr val="FFFFFF"/>
+                    </a:solidFill>
+                  </a:tcPr>
+                </a:tc>
+                <a:tc>
+                  <a:txBody>
+                    <a:bodyPr/>
+                    <a:lstStyle/>
+                    <a:p>
+                      <a:pPr algn="ctr"/>
+                      <a:r>
+                        <a:rPr sz="1600" b="0">
+                          <a:solidFill>
+                            <a:srgbClr val="202020"/>
+                          </a:solidFill>
+                          <a:latin typeface="Times New Roman"/>
+                        </a:rPr>
+                        <a:t>526</a:t>
+                      </a:r>
+                    </a:p>
+                  </a:txBody>
+                  <a:tcPr marL="36576" marR="36576" marT="9144" marB="9144">
+                    <a:solidFill>
+                      <a:srgbClr val="FFF3CD"/>
+                    </a:solidFill>
+                  </a:tcPr>
+                </a:tc>
+              </a:tr>
+              <a:tr h="329184">
+                <a:tc>
+                  <a:txBody>
+                    <a:bodyPr/>
+                    <a:lstStyle/>
+                    <a:p>
+                      <a:pPr algn="ctr"/>
+                      <a:r>
+                        <a:rPr sz="1600" b="0">
+                          <a:solidFill>
+                            <a:srgbClr val="202020"/>
+                          </a:solidFill>
+                          <a:latin typeface="Times New Roman"/>
+                        </a:rPr>
+                        <a:t>8</a:t>
+                      </a:r>
+                    </a:p>
+                  </a:txBody>
+                  <a:tcPr marL="36576" marR="36576" marT="9144" marB="9144">
+                    <a:solidFill>
+                      <a:srgbClr val="FFFFFF"/>
+                    </a:solidFill>
+                  </a:tcPr>
+                </a:tc>
+                <a:tc>
+                  <a:txBody>
+                    <a:bodyPr/>
+                    <a:lstStyle/>
+                    <a:p>
+                      <a:pPr algn="ctr"/>
+                      <a:r>
+                        <a:rPr sz="1600" b="0">
+                          <a:solidFill>
+                            <a:srgbClr val="202020"/>
+                          </a:solidFill>
+                          <a:latin typeface="Times New Roman"/>
+                        </a:rPr>
+                        <a:t>347</a:t>
+                      </a:r>
+                    </a:p>
+                  </a:txBody>
+                  <a:tcPr marL="36576" marR="36576" marT="9144" marB="9144">
+                    <a:solidFill>
+                      <a:srgbClr val="FFFFFF"/>
+                    </a:solidFill>
+                  </a:tcPr>
+                </a:tc>
+                <a:tc>
+                  <a:txBody>
+                    <a:bodyPr/>
+                    <a:lstStyle/>
+                    <a:p>
+                      <a:pPr algn="ctr"/>
+                      <a:r>
+                        <a:rPr sz="1600" b="0">
+                          <a:solidFill>
+                            <a:srgbClr val="202020"/>
+                          </a:solidFill>
+                          <a:latin typeface="Times New Roman"/>
+                        </a:rPr>
+                        <a:t>570</a:t>
+                      </a:r>
+                    </a:p>
+                  </a:txBody>
+                  <a:tcPr marL="36576" marR="36576" marT="9144" marB="9144">
+                    <a:solidFill>
+                      <a:srgbClr val="FFFFFF"/>
+                    </a:solidFill>
+                  </a:tcPr>
+                </a:tc>
+              </a:tr>
+              <a:tr h="329184">
+                <a:tc>
+                  <a:txBody>
+                    <a:bodyPr/>
+                    <a:lstStyle/>
+                    <a:p>
+                      <a:pPr algn="ctr"/>
+                      <a:r>
+                        <a:rPr sz="1600" b="0">
+                          <a:solidFill>
+                            <a:srgbClr val="202020"/>
+                          </a:solidFill>
+                          <a:latin typeface="Times New Roman"/>
+                        </a:rPr>
+                        <a:t>20</a:t>
+                      </a:r>
+                    </a:p>
+                  </a:txBody>
+                  <a:tcPr marL="36576" marR="36576" marT="9144" marB="9144">
+                    <a:solidFill>
+                      <a:srgbClr val="FFFFFF"/>
+                    </a:solidFill>
+                  </a:tcPr>
+                </a:tc>
+                <a:tc>
+                  <a:txBody>
+                    <a:bodyPr/>
+                    <a:lstStyle/>
+                    <a:p>
+                      <a:pPr algn="ctr"/>
+                      <a:r>
+                        <a:rPr sz="1600" b="0">
+                          <a:solidFill>
+                            <a:srgbClr val="202020"/>
+                          </a:solidFill>
+                          <a:latin typeface="Times New Roman"/>
+                        </a:rPr>
+                        <a:t>318</a:t>
+                      </a:r>
+                    </a:p>
+                  </a:txBody>
+                  <a:tcPr marL="36576" marR="36576" marT="9144" marB="9144">
+                    <a:solidFill>
+                      <a:srgbClr val="FFFFFF"/>
+                    </a:solidFill>
+                  </a:tcPr>
+                </a:tc>
+                <a:tc>
+                  <a:txBody>
+                    <a:bodyPr/>
+                    <a:lstStyle/>
+                    <a:p>
+                      <a:pPr algn="ctr"/>
+                      <a:r>
+                        <a:rPr sz="1600" b="0">
+                          <a:solidFill>
+                            <a:srgbClr val="202020"/>
+                          </a:solidFill>
+                          <a:latin typeface="Times New Roman"/>
+                        </a:rPr>
+                        <a:t>598</a:t>
+                      </a:r>
+                    </a:p>
+                  </a:txBody>
+                  <a:tcPr marL="36576" marR="36576" marT="9144" marB="9144">
+                    <a:solidFill>
+                      <a:srgbClr val="FFFFFF"/>
+                    </a:solidFill>
+                  </a:tcPr>
+                </a:tc>
+              </a:tr>
+            </a:tbl>
+          </a:graphicData>
+        </a:graphic>
+      </p:graphicFrame>
+      <p:pic>
+        <p:nvPicPr>
+          <p:cNvPr id="7" name="Picture 6" descr="f_temp.png"/>
+          <p:cNvPicPr>
+            <a:picLocks noChangeAspect="1"/>
+          </p:cNvPicPr>
+          <p:nvPr/>
+        </p:nvPicPr>
+        <p:blipFill>
+          <a:blip r:embed="rId2"/>
+          <a:stretch>
+            <a:fillRect/>
+          </a:stretch>
+        </p:blipFill>
+        <p:spPr>
+          <a:xfrm>
+            <a:off x="6583680" y="1097280"/>
+            <a:ext cx="5120640" cy="2720340"/>
+          </a:xfrm>
+          <a:prstGeom prst="rect">
+            <a:avLst/>
+          </a:prstGeom>
+        </p:spPr>
+      </p:pic>
+      <p:sp>
+        <p:nvSpPr>
+          <p:cNvPr id="8" name="Rectangle 7"/>
+          <p:cNvSpPr/>
+          <p:nvPr/>
+        </p:nvSpPr>
+        <p:spPr>
+          <a:xfrm>
+            <a:off x="731520" y="3886200"/>
+            <a:ext cx="10881360" cy="914400"/>
+          </a:xfrm>
+          <a:prstGeom prst="rect">
+            <a:avLst/>
+          </a:prstGeom>
+          <a:solidFill>
+            <a:srgbClr val="F6F8FA"/>
+          </a:solidFill>
+          <a:ln>
+            <a:solidFill>
+              <a:srgbClr val="D0D7DE"/>
+            </a:solidFill>
+          </a:ln>
+          <a:effectLst/>
+        </p:spPr>
+        <p:style>
+          <a:lnRef idx="1">
+            <a:schemeClr val="accent1"/>
+          </a:lnRef>
+          <a:fillRef idx="3">
+            <a:schemeClr val="accent1"/>
+          </a:fillRef>
+          <a:effectRef idx="2">
+            <a:schemeClr val="accent1"/>
+          </a:effectRef>
+          <a:fontRef idx="minor">
+            <a:schemeClr val="lt1"/>
+          </a:fontRef>
+        </p:style>
+        <p:txBody>
+          <a:bodyPr rtlCol="0" anchor="ctr" wrap="square"/>
+          <a:lstStyle/>
+          <a:p>
+            <a:pPr algn="just"/>
+            <a:r>
+              <a:rPr sz="1500" b="1">
+                <a:solidFill>
+                  <a:srgbClr val="1F4E79"/>
+                </a:solidFill>
+                <a:latin typeface="Times New Roman"/>
+              </a:rPr>
+              <a:t>Paper: with 300 or more units per layer, all temperatures above 8 gave fairly similar results; with 30 units per layer,</a:t>
+            </a:r>
+          </a:p>
+          <a:p>
+            <a:pPr algn="just"/>
+            <a:r>
+              <a:rPr sz="1500" b="1">
+                <a:solidFill>
+                  <a:srgbClr val="1F4E79"/>
+                </a:solidFill>
+                <a:latin typeface="Times New Roman"/>
+              </a:rPr>
+              <a:t>temperatures in the range 2.5 to 4 worked significantly better than higher or lower temperatures</a:t>
+            </a:r>
+          </a:p>
+        </p:txBody>
+      </p:sp>
+      <p:sp>
+        <p:nvSpPr>
+          <p:cNvPr id="9" name="Rectangle 8"/>
+          <p:cNvSpPr/>
+          <p:nvPr/>
+        </p:nvSpPr>
+        <p:spPr>
+          <a:xfrm>
+            <a:off x="731520" y="4892040"/>
+            <a:ext cx="10881360" cy="914400"/>
+          </a:xfrm>
+          <a:prstGeom prst="rect">
+            <a:avLst/>
+          </a:prstGeom>
+          <a:solidFill>
+            <a:srgbClr val="DCF0E4"/>
+          </a:solidFill>
+          <a:ln>
+            <a:solidFill>
+              <a:srgbClr val="D0D7DE"/>
+            </a:solidFill>
+          </a:ln>
+          <a:effectLst/>
+        </p:spPr>
+        <p:style>
+          <a:lnRef idx="1">
+            <a:schemeClr val="accent1"/>
+          </a:lnRef>
+          <a:fillRef idx="3">
+            <a:schemeClr val="accent1"/>
+          </a:fillRef>
+          <a:effectRef idx="2">
+            <a:schemeClr val="accent1"/>
+          </a:effectRef>
+          <a:fontRef idx="minor">
+            <a:schemeClr val="lt1"/>
+          </a:fontRef>
+        </p:style>
+        <p:txBody>
+          <a:bodyPr rtlCol="0" anchor="ctr" wrap="square"/>
+          <a:lstStyle/>
+          <a:p>
+            <a:pPr algn="just"/>
+            <a:r>
+              <a:rPr sz="1700" b="1">
+                <a:solidFill>
+                  <a:srgbClr val="1E7A45"/>
+                </a:solidFill>
+                <a:latin typeface="Times New Roman"/>
+              </a:rPr>
+              <a:t>In our repetition, the 30-30 net is best at T = 4 (526 errors); at T = 20 it is worse than with hard targets only</a:t>
+            </a:r>
+          </a:p>
+        </p:txBody>
+      </p:sp>
+      <p:sp>
+        <p:nvSpPr>
+          <p:cNvPr id="10" name="TextBox 9"/>
+          <p:cNvSpPr txBox="1"/>
+          <p:nvPr/>
+        </p:nvSpPr>
+        <p:spPr>
+          <a:xfrm>
+            <a:off x="731520" y="5897880"/>
+            <a:ext cx="10881360" cy="731520"/>
+          </a:xfrm>
+          <a:prstGeom prst="rect">
+            <a:avLst/>
+          </a:prstGeom>
+          <a:noFill/>
+        </p:spPr>
+        <p:txBody>
+          <a:bodyPr wrap="square">
+            <a:spAutoFit/>
+          </a:bodyPr>
+          <a:lstStyle/>
+          <a:p>
+            <a:pPr algn="just"/>
+            <a:r>
+              <a:rPr sz="1600" b="0" i="0">
+                <a:solidFill>
+                  <a:srgbClr val="59636E"/>
+                </a:solidFill>
+                <a:latin typeface="Times New Roman"/>
+              </a:rPr>
+              <a:t>When the distilled model is much too small to capture all of the knowledge, ignoring the large negative logits can be helpful.</a:t>
+            </a:r>
+          </a:p>
+        </p:txBody>
+      </p:sp>
+    </p:spTree>
+  </p:cSld>
+  <p:clrMapOvr>
+    <a:masterClrMapping/>
+  </p:clrMapOvr>
+  <p:timing>
+    <p:tnLst>
+      <p:par>
+        <p:cTn id="1" dur="indefinite" restart="never" nodeType="tmRoot">
+          <p:childTnLst>
+            <p:seq concurrent="1" nextAc="seek">
+              <p:cTn id="2" dur="indefinite" nodeType="mainSeq">
+                <p:childTnLst>
+                  <p:par>
+                    <p:cTn id="3" fill="hold">
+                      <p:stCondLst>
+                        <p:cond delay="indefinite"/>
+                      </p:stCondLst>
+                      <p:childTnLst>
+                        <p:par>
+                          <p:cTn id="4" fill="hold">
+                            <p:stCondLst>
+                              <p:cond delay="0"/>
+                            </p:stCondLst>
+                            <p:childTnLst>
+                              <p:par>
+                                <p:cTn id="5" presetID="1" presetClass="entr" presetSubtype="0" fill="hold" grpId="0" nodeType="clickEffect">
+                                  <p:stCondLst>
+                                    <p:cond delay="0"/>
+                                  </p:stCondLst>
+                                  <p:childTnLst>
+                                    <p:set>
+                                      <p:cBhvr>
+                                        <p:cTn id="6" dur="1" fill="hold">
+                                          <p:stCondLst>
+                                            <p:cond delay="0"/>
+                                          </p:stCondLst>
+                                        </p:cTn>
+                                        <p:tgtEl>
+                                          <p:spTgt spid="6"/>
+                                        </p:tgtEl>
+                                        <p:attrNameLst>
+                                          <p:attrName>style.visibility</p:attrName>
+                                        </p:attrNameLst>
+                                      </p:cBhvr>
+                                      <p:to>
+                                        <p:strVal val="visible"/>
+                                      </p:to>
+                                    </p:set>
+                                  </p:childTnLst>
+                                </p:cTn>
+                              </p:par>
+                            </p:childTnLst>
+                          </p:cTn>
+                        </p:par>
+                      </p:childTnLst>
+                    </p:cTn>
+                  </p:par>
+                  <p:par>
+                    <p:cTn id="7" fill="hold">
+                      <p:stCondLst>
+                        <p:cond delay="indefinite"/>
+                      </p:stCondLst>
+                      <p:childTnLst>
+                        <p:par>
+                          <p:cTn id="8" fill="hold">
+                            <p:stCondLst>
+                              <p:cond delay="0"/>
+                            </p:stCondLst>
+                            <p:childTnLst>
+                              <p:par>
+                                <p:cTn id="9" presetID="1" presetClass="entr" presetSubtype="0" fill="hold" grpId="0" nodeType="clickEffect">
+                                  <p:stCondLst>
+                                    <p:cond delay="0"/>
+                                  </p:stCondLst>
+                                  <p:childTnLst>
+                                    <p:set>
+                                      <p:cBhvr>
+                                        <p:cTn id="10" dur="1" fill="hold">
+                                          <p:stCondLst>
+                                            <p:cond delay="0"/>
+                                          </p:stCondLst>
+                                        </p:cTn>
+                                        <p:tgtEl>
+                                          <p:spTgt spid="7"/>
+                                        </p:tgtEl>
+                                        <p:attrNameLst>
+                                          <p:attrName>style.visibility</p:attrName>
+                                        </p:attrNameLst>
+                                      </p:cBhvr>
+                                      <p:to>
+                                        <p:strVal val="visible"/>
+                                      </p:to>
+                                    </p:set>
+                                  </p:childTnLst>
+                                </p:cTn>
+                              </p:par>
+                            </p:childTnLst>
+                          </p:cTn>
+                        </p:par>
+                      </p:childTnLst>
+                    </p:cTn>
+                  </p:par>
+                  <p:par>
+                    <p:cTn id="11" fill="hold">
+                      <p:stCondLst>
+                        <p:cond delay="indefinite"/>
+                      </p:stCondLst>
+                      <p:childTnLst>
+                        <p:par>
+                          <p:cTn id="12" fill="hold">
+                            <p:stCondLst>
+                              <p:cond delay="0"/>
+                            </p:stCondLst>
+                            <p:childTnLst>
+                              <p:par>
+                                <p:cTn id="13" presetID="1" presetClass="entr" presetSubtype="0" fill="hold" grpId="0" nodeType="clickEffect">
+                                  <p:stCondLst>
+                                    <p:cond delay="0"/>
+                                  </p:stCondLst>
+                                  <p:childTnLst>
+                                    <p:set>
+                                      <p:cBhvr>
+                                        <p:cTn id="14" dur="1" fill="hold">
+                                          <p:stCondLst>
+                                            <p:cond delay="0"/>
+                                          </p:stCondLst>
+                                        </p:cTn>
+                                        <p:tgtEl>
+                                          <p:spTgt spid="8"/>
+                                        </p:tgtEl>
+                                        <p:attrNameLst>
+                                          <p:attrName>style.visibility</p:attrName>
+                                        </p:attrNameLst>
+                                      </p:cBhvr>
+                                      <p:to>
+                                        <p:strVal val="visible"/>
+                                      </p:to>
+                                    </p:set>
+                                  </p:childTnLst>
+                                </p:cTn>
+                              </p:par>
+                            </p:childTnLst>
+                          </p:cTn>
+                        </p:par>
+                      </p:childTnLst>
+                    </p:cTn>
+                  </p:par>
+                  <p:par>
+                    <p:cTn id="15" fill="hold">
+                      <p:stCondLst>
+                        <p:cond delay="indefinite"/>
+                      </p:stCondLst>
+                      <p:childTnLst>
+                        <p:par>
+                          <p:cTn id="16" fill="hold">
+                            <p:stCondLst>
+                              <p:cond delay="0"/>
+                            </p:stCondLst>
+                            <p:childTnLst>
+                              <p:par>
+                                <p:cTn id="17" presetID="1" presetClass="entr" presetSubtype="0" fill="hold" grpId="0" nodeType="clickEffect">
+                                  <p:stCondLst>
+                                    <p:cond delay="0"/>
+                                  </p:stCondLst>
+                                  <p:childTnLst>
+                                    <p:set>
+                                      <p:cBhvr>
+                                        <p:cTn id="18" dur="1" fill="hold">
+                                          <p:stCondLst>
+                                            <p:cond delay="0"/>
+                                          </p:stCondLst>
+                                        </p:cTn>
+                                        <p:tgtEl>
+                                          <p:spTgt spid="9"/>
+                                        </p:tgtEl>
+                                        <p:attrNameLst>
+                                          <p:attrName>style.visibility</p:attrName>
+                                        </p:attrNameLst>
+                                      </p:cBhvr>
+                                      <p:to>
+                                        <p:strVal val="visible"/>
+                                      </p:to>
+                                    </p:set>
+                                  </p:childTnLst>
+                                </p:cTn>
+                              </p:par>
+                            </p:childTnLst>
+                          </p:cTn>
+                        </p:par>
+                      </p:childTnLst>
+                    </p:cTn>
+                  </p:par>
+                  <p:par>
+                    <p:cTn id="19" fill="hold">
+                      <p:stCondLst>
+                        <p:cond delay="indefinite"/>
+                      </p:stCondLst>
+                      <p:childTnLst>
+                        <p:par>
+                          <p:cTn id="20" fill="hold">
+                            <p:stCondLst>
+                              <p:cond delay="0"/>
+                            </p:stCondLst>
+                            <p:childTnLst>
+                              <p:par>
+                                <p:cTn id="21" presetID="1" presetClass="entr" presetSubtype="0" fill="hold" grpId="0" nodeType="clickEffect">
+                                  <p:stCondLst>
+                                    <p:cond delay="0"/>
+                                  </p:stCondLst>
+                                  <p:childTnLst>
+                                    <p:set>
+                                      <p:cBhvr>
+                                        <p:cTn id="22" dur="1" fill="hold">
+                                          <p:stCondLst>
+                                            <p:cond delay="0"/>
+                                          </p:stCondLst>
+                                        </p:cTn>
+                                        <p:tgtEl>
+                                          <p:spTgt spid="10"/>
+                                        </p:tgtEl>
+                                        <p:attrNameLst>
+                                          <p:attrName>style.visibility</p:attrName>
+                                        </p:attrNameLst>
+                                      </p:cBhvr>
+                                      <p:to>
+                                        <p:strVal val="visible"/>
+                                      </p:to>
+                                    </p:set>
+                                  </p:childTnLst>
+                                </p:cTn>
+                              </p:par>
+                            </p:childTnLst>
+                          </p:cTn>
+                        </p:par>
+                      </p:childTnLst>
+                    </p:cTn>
+                  </p:par>
+                </p:childTnLst>
+              </p:cTn>
+              <p:prevCondLst>
+                <p:cond evt="onPrev" delay="0">
+                  <p:tgtEl>
+                    <p:sldTgt/>
+                  </p:tgtEl>
+                </p:cond>
+              </p:prevCondLst>
+              <p:nextCondLst>
+                <p:cond evt="onNext" delay="0">
+                  <p:tgtEl>
+                    <p:sldTgt/>
+                  </p:tgtEl>
+                </p:cond>
+              </p:nextCondLst>
+            </p:seq>
+          </p:childTnLst>
+        </p:cTn>
+      </p:par>
+    </p:tnLst>
+    <p:bldLst>
+      <p:bldGraphic spid="6" grpId="0">
+        <p:bldAsOne/>
+      </p:bldGraphic>
+      <p:bldP spid="7" grpId="0" animBg="1"/>
+      <p:bldP spid="8" grpId="0" animBg="1"/>
+      <p:bldP spid="9" grpId="0" animBg="1"/>
+      <p:bldP spid="10" grpId="0" animBg="1"/>
+    </p:bldLst>
+  </p:timing>
+</p:sld>
+</file>
+
+<file path=ppt/slides/slide2.xml><?xml version="1.0" encoding="utf-8"?>
+<p:sld xmlns:a="http://schemas.openxmlformats.org/drawingml/2006/main" xmlns:p="http://schemas.openxmlformats.org/presentationml/2006/main" xmlns:r="http://schemas.openxmlformats.org/officeDocument/2006/relationships">
+  <p:cSld>
+    <p:spTree>
+      <p:nvGrpSpPr>
+        <p:cNvPr id="1" name=""/>
+        <p:cNvGrpSpPr/>
+        <p:nvPr/>
+      </p:nvGrpSpPr>
+      <p:grpSpPr/>
+      <p:sp>
+        <p:nvSpPr>
+          <p:cNvPr id="2" name="Rectangle 1"/>
+          <p:cNvSpPr/>
+          <p:nvPr/>
+        </p:nvSpPr>
+        <p:spPr>
+          <a:xfrm>
+            <a:off x="0" y="0"/>
+            <a:ext cx="12191695" cy="6858000"/>
+          </a:xfrm>
+          <a:prstGeom prst="rect">
+            <a:avLst/>
+          </a:prstGeom>
+          <a:solidFill>
+            <a:srgbClr val="FFFFFF"/>
+          </a:solidFill>
+          <a:ln>
+            <a:noFill/>
+          </a:ln>
+          <a:effectLst/>
+        </p:spPr>
+        <p:style>
+          <a:lnRef idx="1">
+            <a:schemeClr val="accent1"/>
+          </a:lnRef>
+          <a:fillRef idx="3">
+            <a:schemeClr val="accent1"/>
+          </a:fillRef>
+          <a:effectRef idx="2">
+            <a:schemeClr val="accent1"/>
+          </a:effectRef>
+          <a:fontRef idx="minor">
+            <a:schemeClr val="lt1"/>
+          </a:fontRef>
+        </p:style>
+        <p:txBody>
+          <a:bodyPr rtlCol="0" anchor="ctr"/>
+          <a:lstStyle/>
+          <a:p>
+            <a:pPr algn="ctr"/>
+          </a:p>
+        </p:txBody>
+      </p:sp>
+      <p:sp>
+        <p:nvSpPr>
+          <p:cNvPr id="3" name="Rectangle 2"/>
+          <p:cNvSpPr/>
+          <p:nvPr/>
+        </p:nvSpPr>
+        <p:spPr>
+          <a:xfrm>
+            <a:off x="0" y="0"/>
+            <a:ext cx="12191695" cy="868680"/>
+          </a:xfrm>
+          <a:prstGeom prst="rect">
+            <a:avLst/>
+          </a:prstGeom>
+          <a:solidFill>
+            <a:srgbClr val="1F4E79"/>
+          </a:solidFill>
+          <a:ln>
+            <a:noFill/>
+          </a:ln>
+          <a:effectLst/>
+        </p:spPr>
+        <p:style>
+          <a:lnRef idx="1">
+            <a:schemeClr val="accent1"/>
+          </a:lnRef>
+          <a:fillRef idx="3">
+            <a:schemeClr val="accent1"/>
+          </a:fillRef>
+          <a:effectRef idx="2">
+            <a:schemeClr val="accent1"/>
+          </a:effectRef>
+          <a:fontRef idx="minor">
+            <a:schemeClr val="lt1"/>
+          </a:fontRef>
+        </p:style>
+        <p:txBody>
+          <a:bodyPr rtlCol="0" anchor="ctr"/>
+          <a:lstStyle/>
+          <a:p>
+            <a:pPr algn="ctr"/>
+          </a:p>
+        </p:txBody>
+      </p:sp>
+      <p:sp>
+        <p:nvSpPr>
+          <p:cNvPr id="4" name="TextBox 3"/>
+          <p:cNvSpPr txBox="1"/>
+          <p:nvPr/>
+        </p:nvSpPr>
+        <p:spPr>
+          <a:xfrm>
+            <a:off x="411480" y="54864"/>
+            <a:ext cx="11338560" cy="457200"/>
+          </a:xfrm>
+          <a:prstGeom prst="rect">
+            <a:avLst/>
+          </a:prstGeom>
+          <a:noFill/>
+        </p:spPr>
+        <p:txBody>
+          <a:bodyPr wrap="square">
+            <a:spAutoFit/>
+          </a:bodyPr>
+          <a:lstStyle/>
+          <a:p>
+            <a:pPr algn="just"/>
+            <a:r>
+              <a:rPr sz="2800" b="1" i="0">
+                <a:solidFill>
+                  <a:srgbClr val="FFFFFF"/>
+                </a:solidFill>
+                <a:latin typeface="Times New Roman"/>
+              </a:rPr>
+              <a:t>What is knowledge distillation?</a:t>
+            </a:r>
+          </a:p>
+        </p:txBody>
+      </p:sp>
+      <p:sp>
+        <p:nvSpPr>
+          <p:cNvPr id="5" name="TextBox 4"/>
+          <p:cNvSpPr txBox="1"/>
+          <p:nvPr/>
+        </p:nvSpPr>
+        <p:spPr>
+          <a:xfrm>
+            <a:off x="411480" y="521207"/>
+            <a:ext cx="11338560" cy="301752"/>
+          </a:xfrm>
+          <a:prstGeom prst="rect">
+            <a:avLst/>
+          </a:prstGeom>
+          <a:noFill/>
+        </p:spPr>
+        <p:txBody>
+          <a:bodyPr wrap="square">
+            <a:spAutoFit/>
+          </a:bodyPr>
+          <a:lstStyle/>
+          <a:p>
+            <a:pPr algn="just"/>
+            <a:r>
+              <a:rPr sz="1400" b="0" i="0">
+                <a:solidFill>
+                  <a:srgbClr val="C7D6E5"/>
+                </a:solidFill>
+                <a:latin typeface="Times New Roman"/>
+              </a:rPr>
+              <a:t>Based on Hinton, Vinyals, and Dean (2015)</a:t>
+            </a:r>
+          </a:p>
+        </p:txBody>
+      </p:sp>
+      <p:sp>
+        <p:nvSpPr>
+          <p:cNvPr id="6" name="TextBox 5"/>
+          <p:cNvSpPr txBox="1"/>
+          <p:nvPr/>
+        </p:nvSpPr>
+        <p:spPr>
+          <a:xfrm>
+            <a:off x="822960" y="1234440"/>
+            <a:ext cx="10515600" cy="5120640"/>
+          </a:xfrm>
+          <a:prstGeom prst="rect">
+            <a:avLst/>
+          </a:prstGeom>
+          <a:noFill/>
+        </p:spPr>
+        <p:txBody>
+          <a:bodyPr wrap="square">
+            <a:spAutoFit/>
+          </a:bodyPr>
+          <a:lstStyle/>
+          <a:p>
+            <a:pPr algn="just">
+              <a:lnSpc>
+                <a:spcPct val="120000"/>
+              </a:lnSpc>
+            </a:pPr>
+            <a:r>
+              <a:rPr sz="2000" b="0">
+                <a:solidFill>
+                  <a:srgbClr val="202020"/>
+                </a:solidFill>
+                <a:latin typeface="Times New Roman"/>
+              </a:rPr>
+              <a:t>To deploy an accurate model to a large number of users, we must resolve a conflict: a cumbersome model, such as an ensemble of models or a very large net trained with a strong regularizer, is best at extracting structure from the data, whereas deployment requires a small, fast model, and a small model trained only on the correct labels does not learn to generalize the way the cumbersome model does. We therefore first train the cumbersome model and regard its knowledge as a learned mapping from inputs to outputs rather than as particular parameter values. We then raise the temperature of its softmax so that it produces a softer distribution over classes, the soft targets, which preserve the relative probabilities of incorrect answers; for example, a particular 2 resembles a 3 more than a 7. Finally, we train the small model to match the soft targets at the same temperature, together with the correct labels, so that it learns to generalize like the cumbersome model, often from much less data. This process of transferring the knowledge of a cumbersome model to a small model is called </a:t>
+            </a:r>
+            <a:r>
+              <a:rPr sz="6400" b="1">
+                <a:solidFill>
+                  <a:srgbClr val="C03030"/>
+                </a:solidFill>
+                <a:latin typeface="Times New Roman"/>
+              </a:rPr>
+              <a:t>knowledge distillation</a:t>
+            </a:r>
+            <a:r>
+              <a:rPr sz="2000" b="0">
+                <a:solidFill>
+                  <a:srgbClr val="202020"/>
+                </a:solidFill>
+                <a:latin typeface="Times New Roman"/>
+              </a:rPr>
+              <a:t>.</a:t>
+            </a:r>
+          </a:p>
+        </p:txBody>
+      </p:sp>
+    </p:spTree>
+  </p:cSld>
+  <p:clrMapOvr>
+    <a:masterClrMapping/>
+  </p:clrMapOvr>
+  <p:timing>
+    <p:tnLst>
+      <p:par>
+        <p:cTn id="1" dur="indefinite" restart="never" nodeType="tmRoot">
+          <p:childTnLst>
+            <p:seq concurrent="1" nextAc="seek">
+              <p:cTn id="2" dur="indefinite" nodeType="mainSeq">
+                <p:childTnLst>
+                  <p:par>
+                    <p:cTn id="3" fill="hold">
+                      <p:stCondLst>
+                        <p:cond delay="indefinite"/>
+                      </p:stCondLst>
+                      <p:childTnLst>
+                        <p:par>
+                          <p:cTn id="4" fill="hold">
+                            <p:stCondLst>
+                              <p:cond delay="0"/>
+                            </p:stCondLst>
+                            <p:childTnLst>
+                              <p:par>
+                                <p:cTn id="5" presetID="1" presetClass="entr" presetSubtype="0" fill="hold" grpId="0" nodeType="clickEffect">
+                                  <p:stCondLst>
+                                    <p:cond delay="0"/>
+                                  </p:stCondLst>
+                                  <p:childTnLst>
+                                    <p:set>
+                                      <p:cBhvr>
+                                        <p:cTn id="6" dur="1" fill="hold">
+                                          <p:stCondLst>
+                                            <p:cond delay="0"/>
+                                          </p:stCondLst>
+                                        </p:cTn>
+                                        <p:tgtEl>
+                                          <p:spTgt spid="6"/>
+                                        </p:tgtEl>
+                                        <p:attrNameLst>
+                                          <p:attrName>style.visibility</p:attrName>
+                                        </p:attrNameLst>
+                                      </p:cBhvr>
+                                      <p:to>
+                                        <p:strVal val="visible"/>
+                                      </p:to>
+                                    </p:set>
+                                  </p:childTnLst>
+                                </p:cTn>
+                              </p:par>
+                            </p:childTnLst>
+                          </p:cTn>
+                        </p:par>
+                      </p:childTnLst>
+                    </p:cTn>
+                  </p:par>
+                </p:childTnLst>
+              </p:cTn>
+              <p:prevCondLst>
+                <p:cond evt="onPrev" delay="0">
+                  <p:tgtEl>
+                    <p:sldTgt/>
+                  </p:tgtEl>
+                </p:cond>
+              </p:prevCondLst>
+              <p:nextCondLst>
+                <p:cond evt="onNext" delay="0">
+                  <p:tgtEl>
+                    <p:sldTgt/>
+                  </p:tgtEl>
+                </p:cond>
+              </p:nextCondLst>
+            </p:seq>
+          </p:childTnLst>
+        </p:cTn>
+      </p:par>
+    </p:tnLst>
+    <p:bldLst>
+      <p:bldP spid="6" grpId="0" animBg="1"/>
+    </p:bldLst>
+  </p:timing>
+</p:sld>
+</file>
+
+<file path=ppt/slides/slide20.xml><?xml version="1.0" encoding="utf-8"?>
+<p:sld xmlns:a="http://schemas.openxmlformats.org/drawingml/2006/main" xmlns:p="http://schemas.openxmlformats.org/presentationml/2006/main" xmlns:r="http://schemas.openxmlformats.org/officeDocument/2006/relationships">
+  <p:cSld>
+    <p:spTree>
+      <p:nvGrpSpPr>
+        <p:cNvPr id="1" name=""/>
+        <p:cNvGrpSpPr/>
+        <p:nvPr/>
+      </p:nvGrpSpPr>
+      <p:grpSpPr/>
+      <p:sp>
+        <p:nvSpPr>
+          <p:cNvPr id="2" name="Rectangle 1"/>
+          <p:cNvSpPr/>
+          <p:nvPr/>
+        </p:nvSpPr>
+        <p:spPr>
+          <a:xfrm>
+            <a:off x="0" y="0"/>
+            <a:ext cx="12191695" cy="6858000"/>
+          </a:xfrm>
+          <a:prstGeom prst="rect">
+            <a:avLst/>
+          </a:prstGeom>
+          <a:solidFill>
+            <a:srgbClr val="FFFFFF"/>
+          </a:solidFill>
+          <a:ln>
+            <a:noFill/>
+          </a:ln>
+          <a:effectLst/>
+        </p:spPr>
+        <p:style>
+          <a:lnRef idx="1">
+            <a:schemeClr val="accent1"/>
+          </a:lnRef>
+          <a:fillRef idx="3">
+            <a:schemeClr val="accent1"/>
+          </a:fillRef>
+          <a:effectRef idx="2">
+            <a:schemeClr val="accent1"/>
+          </a:effectRef>
+          <a:fontRef idx="minor">
+            <a:schemeClr val="lt1"/>
+          </a:fontRef>
+        </p:style>
+        <p:txBody>
+          <a:bodyPr rtlCol="0" anchor="ctr"/>
+          <a:lstStyle/>
+          <a:p>
+            <a:pPr algn="ctr"/>
+          </a:p>
+        </p:txBody>
+      </p:sp>
+      <p:sp>
+        <p:nvSpPr>
+          <p:cNvPr id="3" name="Rectangle 2"/>
+          <p:cNvSpPr/>
+          <p:nvPr/>
+        </p:nvSpPr>
+        <p:spPr>
+          <a:xfrm>
+            <a:off x="0" y="0"/>
+            <a:ext cx="12191695" cy="868680"/>
+          </a:xfrm>
+          <a:prstGeom prst="rect">
+            <a:avLst/>
+          </a:prstGeom>
+          <a:solidFill>
+            <a:srgbClr val="1F4E79"/>
+          </a:solidFill>
+          <a:ln>
+            <a:noFill/>
+          </a:ln>
+          <a:effectLst/>
+        </p:spPr>
+        <p:style>
+          <a:lnRef idx="1">
+            <a:schemeClr val="accent1"/>
+          </a:lnRef>
+          <a:fillRef idx="3">
+            <a:schemeClr val="accent1"/>
+          </a:fillRef>
+          <a:effectRef idx="2">
+            <a:schemeClr val="accent1"/>
+          </a:effectRef>
+          <a:fontRef idx="minor">
+            <a:schemeClr val="lt1"/>
+          </a:fontRef>
+        </p:style>
+        <p:txBody>
+          <a:bodyPr rtlCol="0" anchor="ctr"/>
+          <a:lstStyle/>
+          <a:p>
+            <a:pPr algn="ctr"/>
+          </a:p>
+        </p:txBody>
+      </p:sp>
+      <p:sp>
+        <p:nvSpPr>
+          <p:cNvPr id="4" name="TextBox 3"/>
+          <p:cNvSpPr txBox="1"/>
+          <p:nvPr/>
+        </p:nvSpPr>
+        <p:spPr>
+          <a:xfrm>
+            <a:off x="411480" y="54864"/>
+            <a:ext cx="11338560" cy="457200"/>
+          </a:xfrm>
+          <a:prstGeom prst="rect">
+            <a:avLst/>
+          </a:prstGeom>
+          <a:noFill/>
+        </p:spPr>
+        <p:txBody>
+          <a:bodyPr wrap="square">
+            <a:spAutoFit/>
+          </a:bodyPr>
+          <a:lstStyle/>
+          <a:p>
+            <a:pPr algn="just"/>
+            <a:r>
+              <a:rPr sz="2800" b="1" i="0">
+                <a:solidFill>
+                  <a:srgbClr val="FFFFFF"/>
+                </a:solidFill>
+                <a:latin typeface="Times New Roman"/>
+              </a:rPr>
               <a:t>4. A mythical digit 3</a:t>
             </a:r>
           </a:p>
@@ -16574,318 +18417,7 @@
 </p:sld>
 </file>
 
-<file path=ppt/slides/slide2.xml><?xml version="1.0" encoding="utf-8"?>
-<p:sld xmlns:a="http://schemas.openxmlformats.org/drawingml/2006/main" xmlns:p="http://schemas.openxmlformats.org/presentationml/2006/main" xmlns:r="http://schemas.openxmlformats.org/officeDocument/2006/relationships">
-  <p:cSld>
-    <p:spTree>
-      <p:nvGrpSpPr>
-        <p:cNvPr id="1" name=""/>
-        <p:cNvGrpSpPr/>
-        <p:nvPr/>
-      </p:nvGrpSpPr>
-      <p:grpSpPr/>
-      <p:sp>
-        <p:nvSpPr>
-          <p:cNvPr id="2" name="Rectangle 1"/>
-          <p:cNvSpPr/>
-          <p:nvPr/>
-        </p:nvSpPr>
-        <p:spPr>
-          <a:xfrm>
-            <a:off x="0" y="0"/>
-            <a:ext cx="12191695" cy="6858000"/>
-          </a:xfrm>
-          <a:prstGeom prst="rect">
-            <a:avLst/>
-          </a:prstGeom>
-          <a:solidFill>
-            <a:srgbClr val="FFFFFF"/>
-          </a:solidFill>
-          <a:ln>
-            <a:noFill/>
-          </a:ln>
-          <a:effectLst/>
-        </p:spPr>
-        <p:style>
-          <a:lnRef idx="1">
-            <a:schemeClr val="accent1"/>
-          </a:lnRef>
-          <a:fillRef idx="3">
-            <a:schemeClr val="accent1"/>
-          </a:fillRef>
-          <a:effectRef idx="2">
-            <a:schemeClr val="accent1"/>
-          </a:effectRef>
-          <a:fontRef idx="minor">
-            <a:schemeClr val="lt1"/>
-          </a:fontRef>
-        </p:style>
-        <p:txBody>
-          <a:bodyPr rtlCol="0" anchor="ctr"/>
-          <a:lstStyle/>
-          <a:p>
-            <a:pPr algn="ctr"/>
-          </a:p>
-        </p:txBody>
-      </p:sp>
-      <p:sp>
-        <p:nvSpPr>
-          <p:cNvPr id="3" name="Rectangle 2"/>
-          <p:cNvSpPr/>
-          <p:nvPr/>
-        </p:nvSpPr>
-        <p:spPr>
-          <a:xfrm>
-            <a:off x="0" y="0"/>
-            <a:ext cx="12191695" cy="868680"/>
-          </a:xfrm>
-          <a:prstGeom prst="rect">
-            <a:avLst/>
-          </a:prstGeom>
-          <a:solidFill>
-            <a:srgbClr val="1F4E79"/>
-          </a:solidFill>
-          <a:ln>
-            <a:noFill/>
-          </a:ln>
-          <a:effectLst/>
-        </p:spPr>
-        <p:style>
-          <a:lnRef idx="1">
-            <a:schemeClr val="accent1"/>
-          </a:lnRef>
-          <a:fillRef idx="3">
-            <a:schemeClr val="accent1"/>
-          </a:fillRef>
-          <a:effectRef idx="2">
-            <a:schemeClr val="accent1"/>
-          </a:effectRef>
-          <a:fontRef idx="minor">
-            <a:schemeClr val="lt1"/>
-          </a:fontRef>
-        </p:style>
-        <p:txBody>
-          <a:bodyPr rtlCol="0" anchor="ctr"/>
-          <a:lstStyle/>
-          <a:p>
-            <a:pPr algn="ctr"/>
-          </a:p>
-        </p:txBody>
-      </p:sp>
-      <p:sp>
-        <p:nvSpPr>
-          <p:cNvPr id="4" name="TextBox 3"/>
-          <p:cNvSpPr txBox="1"/>
-          <p:nvPr/>
-        </p:nvSpPr>
-        <p:spPr>
-          <a:xfrm>
-            <a:off x="411480" y="54864"/>
-            <a:ext cx="11338560" cy="457200"/>
-          </a:xfrm>
-          <a:prstGeom prst="rect">
-            <a:avLst/>
-          </a:prstGeom>
-          <a:noFill/>
-        </p:spPr>
-        <p:txBody>
-          <a:bodyPr wrap="square">
-            <a:spAutoFit/>
-          </a:bodyPr>
-          <a:lstStyle/>
-          <a:p>
-            <a:pPr algn="just"/>
-            <a:r>
-              <a:rPr sz="2800" b="1" i="0">
-                <a:solidFill>
-                  <a:srgbClr val="FFFFFF"/>
-                </a:solidFill>
-                <a:latin typeface="Times New Roman"/>
-              </a:rPr>
-              <a:t>What is knowledge distillation?</a:t>
-            </a:r>
-          </a:p>
-        </p:txBody>
-      </p:sp>
-      <p:sp>
-        <p:nvSpPr>
-          <p:cNvPr id="5" name="TextBox 4"/>
-          <p:cNvSpPr txBox="1"/>
-          <p:nvPr/>
-        </p:nvSpPr>
-        <p:spPr>
-          <a:xfrm>
-            <a:off x="411480" y="521207"/>
-            <a:ext cx="11338560" cy="301752"/>
-          </a:xfrm>
-          <a:prstGeom prst="rect">
-            <a:avLst/>
-          </a:prstGeom>
-          <a:noFill/>
-        </p:spPr>
-        <p:txBody>
-          <a:bodyPr wrap="square">
-            <a:spAutoFit/>
-          </a:bodyPr>
-          <a:lstStyle/>
-          <a:p>
-            <a:pPr algn="just"/>
-            <a:r>
-              <a:rPr sz="1400" b="0" i="0">
-                <a:solidFill>
-                  <a:srgbClr val="C7D6E5"/>
-                </a:solidFill>
-                <a:latin typeface="Times New Roman"/>
-              </a:rPr>
-              <a:t>Based on Hinton, Vinyals, and Dean (2015)</a:t>
-            </a:r>
-          </a:p>
-        </p:txBody>
-      </p:sp>
-      <p:sp>
-        <p:nvSpPr>
-          <p:cNvPr id="6" name="TextBox 5"/>
-          <p:cNvSpPr txBox="1"/>
-          <p:nvPr/>
-        </p:nvSpPr>
-        <p:spPr>
-          <a:xfrm>
-            <a:off x="822960" y="1234440"/>
-            <a:ext cx="10515600" cy="5120640"/>
-          </a:xfrm>
-          <a:prstGeom prst="rect">
-            <a:avLst/>
-          </a:prstGeom>
-          <a:noFill/>
-        </p:spPr>
-        <p:txBody>
-          <a:bodyPr wrap="square">
-            <a:spAutoFit/>
-          </a:bodyPr>
-          <a:lstStyle/>
-          <a:p>
-            <a:pPr algn="just">
-              <a:lnSpc>
-                <a:spcPct val="120000"/>
-              </a:lnSpc>
-            </a:pPr>
-            <a:r>
-              <a:rPr sz="2000" b="0">
-                <a:solidFill>
-                  <a:srgbClr val="202020"/>
-                </a:solidFill>
-                <a:latin typeface="Times New Roman"/>
-              </a:rPr>
-              <a:t>To deploy an accurate model to a large number of users, we must resolve a conflict: a cumbersome model, such as an ensemble of models or a very large net trained with a strong regularizer, is best at extracting structure from the data, whereas deployment requires a small, fast model, and a small model trained only on the correct labels does not learn to generalize the way the cumbersome model does. We therefore first train the cumbersome model and regard its knowledge as a learned mapping from inputs to outputs rather than as particular parameter values. We then raise the temperature of its softmax so that it produces a softer distribution over classes, the soft targets, which preserve the relative probabilities of incorrect answers; for example, a particular 2 resembles a 3 more than a 7. Finally, we train the small model to match the soft targets at the same temperature, together with the correct labels, so that it learns to generalize like the cumbersome model, often from much less data. This process of transferring the knowledge of a cumbersome model to a small model is called </a:t>
-            </a:r>
-            <a:r>
-              <a:rPr sz="6400" b="1">
-                <a:solidFill>
-                  <a:srgbClr val="C03030"/>
-                </a:solidFill>
-                <a:latin typeface="Times New Roman"/>
-              </a:rPr>
-              <a:t>knowledge distillation</a:t>
-            </a:r>
-            <a:r>
-              <a:rPr sz="2000" b="0">
-                <a:solidFill>
-                  <a:srgbClr val="202020"/>
-                </a:solidFill>
-                <a:latin typeface="Times New Roman"/>
-              </a:rPr>
-              <a:t>.</a:t>
-            </a:r>
-          </a:p>
-        </p:txBody>
-      </p:sp>
-    </p:spTree>
-  </p:cSld>
-  <p:clrMapOvr>
-    <a:masterClrMapping/>
-  </p:clrMapOvr>
-  <p:timing>
-    <p:tnLst>
-      <p:par>
-        <p:cTn id="1" dur="indefinite" restart="never" nodeType="tmRoot">
-          <p:childTnLst>
-            <p:seq concurrent="1" nextAc="seek">
-              <p:cTn id="2" dur="indefinite" nodeType="mainSeq">
-                <p:childTnLst>
-                  <p:par>
-                    <p:cTn id="3" fill="hold">
-                      <p:stCondLst>
-                        <p:cond delay="indefinite"/>
-                      </p:stCondLst>
-                      <p:childTnLst>
-                        <p:par>
-                          <p:cTn id="4" fill="hold">
-                            <p:stCondLst>
-                              <p:cond delay="0"/>
-                            </p:stCondLst>
-                            <p:childTnLst>
-                              <p:par>
-                                <p:cTn id="5" presetID="1" presetClass="entr" presetSubtype="0" fill="hold" grpId="0" nodeType="clickEffect">
-                                  <p:stCondLst>
-                                    <p:cond delay="0"/>
-                                  </p:stCondLst>
-                                  <p:childTnLst>
-                                    <p:set>
-                                      <p:cBhvr>
-                                        <p:cTn id="6" dur="1" fill="hold">
-                                          <p:stCondLst>
-                                            <p:cond delay="0"/>
-                                          </p:stCondLst>
-                                        </p:cTn>
-                                        <p:tgtEl>
-                                          <p:spTgt spid="6"/>
-                                        </p:tgtEl>
-                                        <p:attrNameLst>
-                                          <p:attrName>style.visibility</p:attrName>
-                                        </p:attrNameLst>
-                                      </p:cBhvr>
-                                      <p:to>
-                                        <p:strVal val="visible"/>
-                                      </p:to>
-                                    </p:set>
-                                  </p:childTnLst>
-                                </p:cTn>
-                              </p:par>
-                            </p:childTnLst>
-                          </p:cTn>
-                        </p:par>
-                      </p:childTnLst>
-                    </p:cTn>
-                  </p:par>
-                </p:childTnLst>
-              </p:cTn>
-              <p:prevCondLst>
-                <p:cond evt="onPrev" delay="0">
-                  <p:tgtEl>
-                    <p:sldTgt/>
-                  </p:tgtEl>
-                </p:cond>
-              </p:prevCondLst>
-              <p:nextCondLst>
-                <p:cond evt="onNext" delay="0">
-                  <p:tgtEl>
-                    <p:sldTgt/>
-                  </p:tgtEl>
-                </p:cond>
-              </p:nextCondLst>
-            </p:seq>
-          </p:childTnLst>
-        </p:cTn>
-      </p:par>
-    </p:tnLst>
-    <p:bldLst>
-      <p:bldP spid="6" grpId="0" animBg="1"/>
-    </p:bldLst>
-  </p:timing>
-</p:sld>
-</file>
-
-<file path=ppt/slides/slide20.xml><?xml version="1.0" encoding="utf-8"?>
+<file path=ppt/slides/slide21.xml><?xml version="1.0" encoding="utf-8"?>
 <p:sld xmlns:a="http://schemas.openxmlformats.org/drawingml/2006/main" xmlns:p="http://schemas.openxmlformats.org/presentationml/2006/main" xmlns:r="http://schemas.openxmlformats.org/officeDocument/2006/relationships">
   <p:cSld>
     <p:spTree>
@@ -18215,7 +19747,7 @@
 </p:sld>
 </file>
 
-<file path=ppt/slides/slide21.xml><?xml version="1.0" encoding="utf-8"?>
+<file path=ppt/slides/slide22.xml><?xml version="1.0" encoding="utf-8"?>
 <p:sld xmlns:a="http://schemas.openxmlformats.org/drawingml/2006/main" xmlns:p="http://schemas.openxmlformats.org/presentationml/2006/main" xmlns:r="http://schemas.openxmlformats.org/officeDocument/2006/relationships">
   <p:cSld>
     <p:spTree>
@@ -18563,7 +20095,7 @@
                 </a:solidFill>
                 <a:latin typeface="Times New Roman"/>
               </a:rPr>
-              <a:t>Exercise 1  At T = 2, what are the soft targets for v = (8, 4, 0)? Use the four steps of slide 8</a:t>
+              <a:t>Exercise 1  At T = 2, what are the soft targets for v = (8, 4, 0)? Use the four steps of slide 9</a:t>
             </a:r>
           </a:p>
         </p:txBody>
@@ -20350,7 +21882,7 @@
         </p:nvGraphicFramePr>
         <p:xfrm>
           <a:off x="731520" y="1143000"/>
-          <a:ext cx="10881358" cy="1975104"/>
+          <a:ext cx="10881358" cy="2304288"/>
         </p:xfrm>
         <a:graphic>
           <a:graphicData uri="http://schemas.openxmlformats.org/drawingml/2006/table">
@@ -20448,7 +21980,7 @@
                           </a:solidFill>
                           <a:latin typeface="Times New Roman"/>
                         </a:rPr>
-                        <a:t>1  Introduction</a:t>
+                        <a:t>Terminology</a:t>
                       </a:r>
                     </a:p>
                   </a:txBody>
@@ -20471,7 +22003,7 @@
                           </a:solidFill>
                           <a:latin typeface="Times New Roman"/>
                         </a:rPr>
-                        <a:t>Training and deployment have different requirements; the relative probabilities of incorrect answers</a:t>
+                        <a:t>Technical terms in English and Chinese, with their meanings</a:t>
                       </a:r>
                     </a:p>
                   </a:txBody>
@@ -20494,7 +22026,7 @@
                           </a:solidFill>
                           <a:latin typeface="Times New Roman"/>
                         </a:rPr>
-                        <a:t>5–6</a:t>
+                        <a:t>5</a:t>
                       </a:r>
                     </a:p>
                   </a:txBody>
@@ -20519,7 +22051,7 @@
                           </a:solidFill>
                           <a:latin typeface="Times New Roman"/>
                         </a:rPr>
-                        <a:t>2  Soft targets</a:t>
+                        <a:t>1  Introduction</a:t>
                       </a:r>
                     </a:p>
                   </a:txBody>
@@ -20542,7 +22074,7 @@
                           </a:solidFill>
                           <a:latin typeface="Times New Roman"/>
                         </a:rPr>
-                        <a:t>Softmax with a temperature, computed in four steps; T = 1 compared with T = 4</a:t>
+                        <a:t>Training and deployment have different requirements; the relative probabilities of incorrect answers</a:t>
                       </a:r>
                     </a:p>
                   </a:txBody>
@@ -20565,7 +22097,7 @@
                           </a:solidFill>
                           <a:latin typeface="Times New Roman"/>
                         </a:rPr>
-                        <a:t>7–10</a:t>
+                        <a:t>6–7</a:t>
                       </a:r>
                     </a:p>
                   </a:txBody>
@@ -20590,7 +22122,7 @@
                           </a:solidFill>
                           <a:latin typeface="Times New Roman"/>
                         </a:rPr>
-                        <a:t>3  Distillation</a:t>
+                        <a:t>2  Soft targets</a:t>
                       </a:r>
                     </a:p>
                   </a:txBody>
@@ -20613,7 +22145,7 @@
                           </a:solidFill>
                           <a:latin typeface="Times New Roman"/>
                         </a:rPr>
-                        <a:t>L = α T² C_soft + (1 − α) C_hard step by step; the gradient; why we multiply by T²</a:t>
+                        <a:t>Softmax with a temperature, computed in four steps; T = 1 compared with T = 4</a:t>
                       </a:r>
                     </a:p>
                   </a:txBody>
@@ -20636,7 +22168,7 @@
                           </a:solidFill>
                           <a:latin typeface="Times New Roman"/>
                         </a:rPr>
-                        <a:t>11–15</a:t>
+                        <a:t>8–11</a:t>
                       </a:r>
                     </a:p>
                   </a:txBody>
@@ -20661,7 +22193,7 @@
                           </a:solidFill>
                           <a:latin typeface="Times New Roman"/>
                         </a:rPr>
-                        <a:t>4  Experiments on MNIST</a:t>
+                        <a:t>3  Distillation</a:t>
                       </a:r>
                     </a:p>
                   </a:txBody>
@@ -20684,7 +22216,7 @@
                           </a:solidFill>
                           <a:latin typeface="Times New Roman"/>
                         </a:rPr>
-                        <a:t>Fewer test errors; intermediate temperatures for a very small net; a mythical digit 3</a:t>
+                        <a:t>L = α T² C_soft + (1 − α) C_hard step by step; the gradient; why we multiply by T²</a:t>
                       </a:r>
                     </a:p>
                   </a:txBody>
@@ -20707,7 +22239,7 @@
                           </a:solidFill>
                           <a:latin typeface="Times New Roman"/>
                         </a:rPr>
-                        <a:t>16–20</a:t>
+                        <a:t>12–16</a:t>
                       </a:r>
                     </a:p>
                   </a:txBody>
@@ -20732,6 +22264,77 @@
                           </a:solidFill>
                           <a:latin typeface="Times New Roman"/>
                         </a:rPr>
+                        <a:t>4  Experiments on MNIST</a:t>
+                      </a:r>
+                    </a:p>
+                  </a:txBody>
+                  <a:tcPr marL="36576" marR="36576" marT="9144" marB="9144">
+                    <a:solidFill>
+                      <a:srgbClr val="FFFFFF"/>
+                    </a:solidFill>
+                  </a:tcPr>
+                </a:tc>
+                <a:tc>
+                  <a:txBody>
+                    <a:bodyPr/>
+                    <a:lstStyle/>
+                    <a:p>
+                      <a:pPr algn="ctr"/>
+                      <a:r>
+                        <a:rPr sz="1500" b="0">
+                          <a:solidFill>
+                            <a:srgbClr val="202020"/>
+                          </a:solidFill>
+                          <a:latin typeface="Times New Roman"/>
+                        </a:rPr>
+                        <a:t>Fewer test errors; intermediate temperatures for a very small net; a mythical digit 3</a:t>
+                      </a:r>
+                    </a:p>
+                  </a:txBody>
+                  <a:tcPr marL="36576" marR="36576" marT="9144" marB="9144">
+                    <a:solidFill>
+                      <a:srgbClr val="FFFFFF"/>
+                    </a:solidFill>
+                  </a:tcPr>
+                </a:tc>
+                <a:tc>
+                  <a:txBody>
+                    <a:bodyPr/>
+                    <a:lstStyle/>
+                    <a:p>
+                      <a:pPr algn="ctr"/>
+                      <a:r>
+                        <a:rPr sz="1500" b="0">
+                          <a:solidFill>
+                            <a:srgbClr val="202020"/>
+                          </a:solidFill>
+                          <a:latin typeface="Times New Roman"/>
+                        </a:rPr>
+                        <a:t>17–21</a:t>
+                      </a:r>
+                    </a:p>
+                  </a:txBody>
+                  <a:tcPr marL="36576" marR="36576" marT="9144" marB="9144">
+                    <a:solidFill>
+                      <a:srgbClr val="FFFFFF"/>
+                    </a:solidFill>
+                  </a:tcPr>
+                </a:tc>
+              </a:tr>
+              <a:tr h="329184">
+                <a:tc>
+                  <a:txBody>
+                    <a:bodyPr/>
+                    <a:lstStyle/>
+                    <a:p>
+                      <a:pPr algn="ctr"/>
+                      <a:r>
+                        <a:rPr sz="1500" b="0">
+                          <a:solidFill>
+                            <a:srgbClr val="202020"/>
+                          </a:solidFill>
+                          <a:latin typeface="Times New Roman"/>
+                        </a:rPr>
                         <a:t>Summary and exercises</a:t>
                       </a:r>
                     </a:p>
@@ -20778,7 +22381,7 @@
                           </a:solidFill>
                           <a:latin typeface="Times New Roman"/>
                         </a:rPr>
-                        <a:t>21</a:t>
+                        <a:t>22</a:t>
                       </a:r>
                     </a:p>
                   </a:txBody>
@@ -20801,7 +22404,7 @@
         </p:nvSpPr>
         <p:spPr>
           <a:xfrm>
-            <a:off x="731520" y="3429000"/>
+            <a:off x="731520" y="3657600"/>
             <a:ext cx="10881360" cy="1463040"/>
           </a:xfrm>
           <a:prstGeom prst="rect">
@@ -20892,7 +22495,7 @@
         </p:nvSpPr>
         <p:spPr>
           <a:xfrm>
-            <a:off x="731520" y="5166360"/>
+            <a:off x="731520" y="5349240"/>
             <a:ext cx="10881360" cy="1097280"/>
           </a:xfrm>
           <a:prstGeom prst="rect">
@@ -21112,6 +22715,1212 @@
 </file>
 
 <file path=ppt/slides/slide5.xml><?xml version="1.0" encoding="utf-8"?>
+<p:sld xmlns:a="http://schemas.openxmlformats.org/drawingml/2006/main" xmlns:p="http://schemas.openxmlformats.org/presentationml/2006/main" xmlns:r="http://schemas.openxmlformats.org/officeDocument/2006/relationships">
+  <p:cSld>
+    <p:spTree>
+      <p:nvGrpSpPr>
+        <p:cNvPr id="1" name=""/>
+        <p:cNvGrpSpPr/>
+        <p:nvPr/>
+      </p:nvGrpSpPr>
+      <p:grpSpPr/>
+      <p:sp>
+        <p:nvSpPr>
+          <p:cNvPr id="2" name="Rectangle 1"/>
+          <p:cNvSpPr/>
+          <p:nvPr/>
+        </p:nvSpPr>
+        <p:spPr>
+          <a:xfrm>
+            <a:off x="0" y="0"/>
+            <a:ext cx="12191695" cy="6858000"/>
+          </a:xfrm>
+          <a:prstGeom prst="rect">
+            <a:avLst/>
+          </a:prstGeom>
+          <a:solidFill>
+            <a:srgbClr val="FFFFFF"/>
+          </a:solidFill>
+          <a:ln>
+            <a:noFill/>
+          </a:ln>
+          <a:effectLst/>
+        </p:spPr>
+        <p:style>
+          <a:lnRef idx="1">
+            <a:schemeClr val="accent1"/>
+          </a:lnRef>
+          <a:fillRef idx="3">
+            <a:schemeClr val="accent1"/>
+          </a:fillRef>
+          <a:effectRef idx="2">
+            <a:schemeClr val="accent1"/>
+          </a:effectRef>
+          <a:fontRef idx="minor">
+            <a:schemeClr val="lt1"/>
+          </a:fontRef>
+        </p:style>
+        <p:txBody>
+          <a:bodyPr rtlCol="0" anchor="ctr"/>
+          <a:lstStyle/>
+          <a:p>
+            <a:pPr algn="ctr"/>
+          </a:p>
+        </p:txBody>
+      </p:sp>
+      <p:sp>
+        <p:nvSpPr>
+          <p:cNvPr id="3" name="Rectangle 2"/>
+          <p:cNvSpPr/>
+          <p:nvPr/>
+        </p:nvSpPr>
+        <p:spPr>
+          <a:xfrm>
+            <a:off x="0" y="0"/>
+            <a:ext cx="12191695" cy="868680"/>
+          </a:xfrm>
+          <a:prstGeom prst="rect">
+            <a:avLst/>
+          </a:prstGeom>
+          <a:solidFill>
+            <a:srgbClr val="1F4E79"/>
+          </a:solidFill>
+          <a:ln>
+            <a:noFill/>
+          </a:ln>
+          <a:effectLst/>
+        </p:spPr>
+        <p:style>
+          <a:lnRef idx="1">
+            <a:schemeClr val="accent1"/>
+          </a:lnRef>
+          <a:fillRef idx="3">
+            <a:schemeClr val="accent1"/>
+          </a:fillRef>
+          <a:effectRef idx="2">
+            <a:schemeClr val="accent1"/>
+          </a:effectRef>
+          <a:fontRef idx="minor">
+            <a:schemeClr val="lt1"/>
+          </a:fontRef>
+        </p:style>
+        <p:txBody>
+          <a:bodyPr rtlCol="0" anchor="ctr"/>
+          <a:lstStyle/>
+          <a:p>
+            <a:pPr algn="ctr"/>
+          </a:p>
+        </p:txBody>
+      </p:sp>
+      <p:sp>
+        <p:nvSpPr>
+          <p:cNvPr id="4" name="TextBox 3"/>
+          <p:cNvSpPr txBox="1"/>
+          <p:nvPr/>
+        </p:nvSpPr>
+        <p:spPr>
+          <a:xfrm>
+            <a:off x="411480" y="54864"/>
+            <a:ext cx="11338560" cy="457200"/>
+          </a:xfrm>
+          <a:prstGeom prst="rect">
+            <a:avLst/>
+          </a:prstGeom>
+          <a:noFill/>
+        </p:spPr>
+        <p:txBody>
+          <a:bodyPr wrap="square">
+            <a:spAutoFit/>
+          </a:bodyPr>
+          <a:lstStyle/>
+          <a:p>
+            <a:pPr algn="just"/>
+            <a:r>
+              <a:rPr sz="2800" b="1" i="0">
+                <a:solidFill>
+                  <a:srgbClr val="FFFFFF"/>
+                </a:solidFill>
+                <a:latin typeface="Times New Roman"/>
+              </a:rPr>
+              <a:t>Terminology</a:t>
+            </a:r>
+          </a:p>
+        </p:txBody>
+      </p:sp>
+      <p:sp>
+        <p:nvSpPr>
+          <p:cNvPr id="5" name="TextBox 4"/>
+          <p:cNvSpPr txBox="1"/>
+          <p:nvPr/>
+        </p:nvSpPr>
+        <p:spPr>
+          <a:xfrm>
+            <a:off x="411480" y="521207"/>
+            <a:ext cx="11338560" cy="301752"/>
+          </a:xfrm>
+          <a:prstGeom prst="rect">
+            <a:avLst/>
+          </a:prstGeom>
+          <a:noFill/>
+        </p:spPr>
+        <p:txBody>
+          <a:bodyPr wrap="square">
+            <a:spAutoFit/>
+          </a:bodyPr>
+          <a:lstStyle/>
+          <a:p>
+            <a:pPr algn="just"/>
+            <a:r>
+              <a:rPr sz="1400" b="0" i="0">
+                <a:solidFill>
+                  <a:srgbClr val="C7D6E5"/>
+                </a:solidFill>
+                <a:latin typeface="Times New Roman"/>
+              </a:rPr>
+              <a:t>Technical terms of this module: English, Chinese, and meaning</a:t>
+            </a:r>
+          </a:p>
+        </p:txBody>
+      </p:sp>
+      <p:graphicFrame>
+        <p:nvGraphicFramePr>
+          <p:cNvPr id="6" name="Table 5"/>
+          <p:cNvGraphicFramePr>
+            <a:graphicFrameLocks noGrp="1"/>
+          </p:cNvGraphicFramePr>
+          <p:nvPr/>
+        </p:nvGraphicFramePr>
+        <p:xfrm>
+          <a:off x="548640" y="1051560"/>
+          <a:ext cx="11109959" cy="4279392"/>
+        </p:xfrm>
+        <a:graphic>
+          <a:graphicData uri="http://schemas.openxmlformats.org/drawingml/2006/table">
+            <a:tbl>
+              <a:tblPr bandRow="1">
+                <a:tableStyleId>{5C22544A-7EE6-4342-B048-85BDC9FD1C3A}</a:tableStyleId>
+              </a:tblPr>
+              <a:tblGrid>
+                <a:gridCol w="2286000"/>
+                <a:gridCol w="1097280"/>
+                <a:gridCol w="7726679"/>
+              </a:tblGrid>
+              <a:tr h="329184">
+                <a:tc>
+                  <a:txBody>
+                    <a:bodyPr/>
+                    <a:lstStyle/>
+                    <a:p>
+                      <a:pPr algn="ctr"/>
+                      <a:r>
+                        <a:rPr sz="1400" b="1">
+                          <a:solidFill>
+                            <a:srgbClr val="FFFFFF"/>
+                          </a:solidFill>
+                          <a:latin typeface="Times New Roman"/>
+                        </a:rPr>
+                        <a:t>English</a:t>
+                      </a:r>
+                    </a:p>
+                  </a:txBody>
+                  <a:tcPr marL="36576" marR="36576" marT="9144" marB="9144">
+                    <a:solidFill>
+                      <a:srgbClr val="1F4E79"/>
+                    </a:solidFill>
+                  </a:tcPr>
+                </a:tc>
+                <a:tc>
+                  <a:txBody>
+                    <a:bodyPr/>
+                    <a:lstStyle/>
+                    <a:p>
+                      <a:pPr algn="ctr"/>
+                      <a:r>
+                        <a:rPr sz="1400" b="1">
+                          <a:solidFill>
+                            <a:srgbClr val="FFFFFF"/>
+                          </a:solidFill>
+                          <a:latin typeface="Times New Roman"/>
+                        </a:rPr>
+                        <a:t>Chinese</a:t>
+                      </a:r>
+                    </a:p>
+                  </a:txBody>
+                  <a:tcPr marL="36576" marR="36576" marT="9144" marB="9144">
+                    <a:solidFill>
+                      <a:srgbClr val="1F4E79"/>
+                    </a:solidFill>
+                  </a:tcPr>
+                </a:tc>
+                <a:tc>
+                  <a:txBody>
+                    <a:bodyPr/>
+                    <a:lstStyle/>
+                    <a:p>
+                      <a:pPr algn="ctr"/>
+                      <a:r>
+                        <a:rPr sz="1400" b="1">
+                          <a:solidFill>
+                            <a:srgbClr val="FFFFFF"/>
+                          </a:solidFill>
+                          <a:latin typeface="Times New Roman"/>
+                        </a:rPr>
+                        <a:t>Meaning</a:t>
+                      </a:r>
+                    </a:p>
+                  </a:txBody>
+                  <a:tcPr marL="36576" marR="36576" marT="9144" marB="9144">
+                    <a:solidFill>
+                      <a:srgbClr val="1F4E79"/>
+                    </a:solidFill>
+                  </a:tcPr>
+                </a:tc>
+              </a:tr>
+              <a:tr h="329184">
+                <a:tc>
+                  <a:txBody>
+                    <a:bodyPr/>
+                    <a:lstStyle/>
+                    <a:p>
+                      <a:pPr algn="ctr"/>
+                      <a:r>
+                        <a:rPr sz="1400" b="1">
+                          <a:solidFill>
+                            <a:srgbClr val="202020"/>
+                          </a:solidFill>
+                          <a:latin typeface="Times New Roman"/>
+                        </a:rPr>
+                        <a:t>knowledge distillation (KD)</a:t>
+                      </a:r>
+                    </a:p>
+                  </a:txBody>
+                  <a:tcPr marL="36576" marR="36576" marT="9144" marB="9144">
+                    <a:solidFill>
+                      <a:srgbClr val="FFFFFF"/>
+                    </a:solidFill>
+                  </a:tcPr>
+                </a:tc>
+                <a:tc>
+                  <a:txBody>
+                    <a:bodyPr/>
+                    <a:lstStyle/>
+                    <a:p>
+                      <a:pPr algn="ctr"/>
+                      <a:r>
+                        <a:rPr sz="1400" b="1">
+                          <a:solidFill>
+                            <a:srgbClr val="202020"/>
+                          </a:solidFill>
+                          <a:latin typeface="Microsoft JhengHei"/>
+                        </a:rPr>
+                        <a:t>知識蒸餾</a:t>
+                      </a:r>
+                    </a:p>
+                  </a:txBody>
+                  <a:tcPr marL="36576" marR="36576" marT="9144" marB="9144">
+                    <a:solidFill>
+                      <a:srgbClr val="FFFFFF"/>
+                    </a:solidFill>
+                  </a:tcPr>
+                </a:tc>
+                <a:tc>
+                  <a:txBody>
+                    <a:bodyPr/>
+                    <a:lstStyle/>
+                    <a:p>
+                      <a:pPr algn="just"/>
+                      <a:r>
+                        <a:rPr sz="1400" b="0">
+                          <a:solidFill>
+                            <a:srgbClr val="202020"/>
+                          </a:solidFill>
+                          <a:latin typeface="Times New Roman"/>
+                        </a:rPr>
+                        <a:t>a kind of training that transfers the knowledge from a cumbersome model to a small model suitable for deployment</a:t>
+                      </a:r>
+                    </a:p>
+                  </a:txBody>
+                  <a:tcPr marL="36576" marR="36576" marT="9144" marB="9144">
+                    <a:solidFill>
+                      <a:srgbClr val="FFFFFF"/>
+                    </a:solidFill>
+                  </a:tcPr>
+                </a:tc>
+              </a:tr>
+              <a:tr h="329184">
+                <a:tc>
+                  <a:txBody>
+                    <a:bodyPr/>
+                    <a:lstStyle/>
+                    <a:p>
+                      <a:pPr algn="ctr"/>
+                      <a:r>
+                        <a:rPr sz="1400" b="1">
+                          <a:solidFill>
+                            <a:srgbClr val="202020"/>
+                          </a:solidFill>
+                          <a:latin typeface="Times New Roman"/>
+                        </a:rPr>
+                        <a:t>cumbersome model</a:t>
+                      </a:r>
+                    </a:p>
+                  </a:txBody>
+                  <a:tcPr marL="36576" marR="36576" marT="9144" marB="9144">
+                    <a:solidFill>
+                      <a:srgbClr val="FFFFFF"/>
+                    </a:solidFill>
+                  </a:tcPr>
+                </a:tc>
+                <a:tc>
+                  <a:txBody>
+                    <a:bodyPr/>
+                    <a:lstStyle/>
+                    <a:p>
+                      <a:pPr algn="ctr"/>
+                      <a:r>
+                        <a:rPr sz="1400" b="1">
+                          <a:solidFill>
+                            <a:srgbClr val="202020"/>
+                          </a:solidFill>
+                          <a:latin typeface="Microsoft JhengHei"/>
+                        </a:rPr>
+                        <a:t>笨重模型</a:t>
+                      </a:r>
+                    </a:p>
+                  </a:txBody>
+                  <a:tcPr marL="36576" marR="36576" marT="9144" marB="9144">
+                    <a:solidFill>
+                      <a:srgbClr val="FFFFFF"/>
+                    </a:solidFill>
+                  </a:tcPr>
+                </a:tc>
+                <a:tc>
+                  <a:txBody>
+                    <a:bodyPr/>
+                    <a:lstStyle/>
+                    <a:p>
+                      <a:pPr algn="just"/>
+                      <a:r>
+                        <a:rPr sz="1400" b="0">
+                          <a:solidFill>
+                            <a:srgbClr val="202020"/>
+                          </a:solidFill>
+                          <a:latin typeface="Times New Roman"/>
+                        </a:rPr>
+                        <a:t>a large model trained to extract structure from the data: an ensemble of models or a very large net with a strong regularizer</a:t>
+                      </a:r>
+                    </a:p>
+                  </a:txBody>
+                  <a:tcPr marL="36576" marR="36576" marT="9144" marB="9144">
+                    <a:solidFill>
+                      <a:srgbClr val="FFFFFF"/>
+                    </a:solidFill>
+                  </a:tcPr>
+                </a:tc>
+              </a:tr>
+              <a:tr h="329184">
+                <a:tc>
+                  <a:txBody>
+                    <a:bodyPr/>
+                    <a:lstStyle/>
+                    <a:p>
+                      <a:pPr algn="ctr"/>
+                      <a:r>
+                        <a:rPr sz="1400" b="1">
+                          <a:solidFill>
+                            <a:srgbClr val="202020"/>
+                          </a:solidFill>
+                          <a:latin typeface="Times New Roman"/>
+                        </a:rPr>
+                        <a:t>distilled model</a:t>
+                      </a:r>
+                    </a:p>
+                  </a:txBody>
+                  <a:tcPr marL="36576" marR="36576" marT="9144" marB="9144">
+                    <a:solidFill>
+                      <a:srgbClr val="FFFFFF"/>
+                    </a:solidFill>
+                  </a:tcPr>
+                </a:tc>
+                <a:tc>
+                  <a:txBody>
+                    <a:bodyPr/>
+                    <a:lstStyle/>
+                    <a:p>
+                      <a:pPr algn="ctr"/>
+                      <a:r>
+                        <a:rPr sz="1400" b="1">
+                          <a:solidFill>
+                            <a:srgbClr val="202020"/>
+                          </a:solidFill>
+                          <a:latin typeface="Microsoft JhengHei"/>
+                        </a:rPr>
+                        <a:t>蒸餾模型</a:t>
+                      </a:r>
+                    </a:p>
+                  </a:txBody>
+                  <a:tcPr marL="36576" marR="36576" marT="9144" marB="9144">
+                    <a:solidFill>
+                      <a:srgbClr val="FFFFFF"/>
+                    </a:solidFill>
+                  </a:tcPr>
+                </a:tc>
+                <a:tc>
+                  <a:txBody>
+                    <a:bodyPr/>
+                    <a:lstStyle/>
+                    <a:p>
+                      <a:pPr algn="just"/>
+                      <a:r>
+                        <a:rPr sz="1400" b="0">
+                          <a:solidFill>
+                            <a:srgbClr val="202020"/>
+                          </a:solidFill>
+                          <a:latin typeface="Times New Roman"/>
+                        </a:rPr>
+                        <a:t>the small model trained on soft targets and correct labels; after training it uses a temperature of 1</a:t>
+                      </a:r>
+                    </a:p>
+                  </a:txBody>
+                  <a:tcPr marL="36576" marR="36576" marT="9144" marB="9144">
+                    <a:solidFill>
+                      <a:srgbClr val="FFFFFF"/>
+                    </a:solidFill>
+                  </a:tcPr>
+                </a:tc>
+              </a:tr>
+              <a:tr h="329184">
+                <a:tc>
+                  <a:txBody>
+                    <a:bodyPr/>
+                    <a:lstStyle/>
+                    <a:p>
+                      <a:pPr algn="ctr"/>
+                      <a:r>
+                        <a:rPr sz="1400" b="1">
+                          <a:solidFill>
+                            <a:srgbClr val="202020"/>
+                          </a:solidFill>
+                          <a:latin typeface="Times New Roman"/>
+                        </a:rPr>
+                        <a:t>ensemble</a:t>
+                      </a:r>
+                    </a:p>
+                  </a:txBody>
+                  <a:tcPr marL="36576" marR="36576" marT="9144" marB="9144">
+                    <a:solidFill>
+                      <a:srgbClr val="FFFFFF"/>
+                    </a:solidFill>
+                  </a:tcPr>
+                </a:tc>
+                <a:tc>
+                  <a:txBody>
+                    <a:bodyPr/>
+                    <a:lstStyle/>
+                    <a:p>
+                      <a:pPr algn="ctr"/>
+                      <a:r>
+                        <a:rPr sz="1400" b="1">
+                          <a:solidFill>
+                            <a:srgbClr val="202020"/>
+                          </a:solidFill>
+                          <a:latin typeface="Microsoft JhengHei"/>
+                        </a:rPr>
+                        <a:t>組合模型</a:t>
+                      </a:r>
+                    </a:p>
+                  </a:txBody>
+                  <a:tcPr marL="36576" marR="36576" marT="9144" marB="9144">
+                    <a:solidFill>
+                      <a:srgbClr val="FFFFFF"/>
+                    </a:solidFill>
+                  </a:tcPr>
+                </a:tc>
+                <a:tc>
+                  <a:txBody>
+                    <a:bodyPr/>
+                    <a:lstStyle/>
+                    <a:p>
+                      <a:pPr algn="just"/>
+                      <a:r>
+                        <a:rPr sz="1400" b="0">
+                          <a:solidFill>
+                            <a:srgbClr val="202020"/>
+                          </a:solidFill>
+                          <a:latin typeface="Times New Roman"/>
+                        </a:rPr>
+                        <a:t>many separately trained models whose predictions are averaged</a:t>
+                      </a:r>
+                    </a:p>
+                  </a:txBody>
+                  <a:tcPr marL="36576" marR="36576" marT="9144" marB="9144">
+                    <a:solidFill>
+                      <a:srgbClr val="FFFFFF"/>
+                    </a:solidFill>
+                  </a:tcPr>
+                </a:tc>
+              </a:tr>
+              <a:tr h="329184">
+                <a:tc>
+                  <a:txBody>
+                    <a:bodyPr/>
+                    <a:lstStyle/>
+                    <a:p>
+                      <a:pPr algn="ctr"/>
+                      <a:r>
+                        <a:rPr sz="1400" b="1">
+                          <a:solidFill>
+                            <a:srgbClr val="202020"/>
+                          </a:solidFill>
+                          <a:latin typeface="Times New Roman"/>
+                        </a:rPr>
+                        <a:t>logit</a:t>
+                      </a:r>
+                    </a:p>
+                  </a:txBody>
+                  <a:tcPr marL="36576" marR="36576" marT="9144" marB="9144">
+                    <a:solidFill>
+                      <a:srgbClr val="FFFFFF"/>
+                    </a:solidFill>
+                  </a:tcPr>
+                </a:tc>
+                <a:tc>
+                  <a:txBody>
+                    <a:bodyPr/>
+                    <a:lstStyle/>
+                    <a:p>
+                      <a:pPr algn="ctr"/>
+                      <a:r>
+                        <a:rPr sz="1400" b="1">
+                          <a:solidFill>
+                            <a:srgbClr val="202020"/>
+                          </a:solidFill>
+                          <a:latin typeface="Microsoft JhengHei"/>
+                        </a:rPr>
+                        <a:t>logit</a:t>
+                      </a:r>
+                    </a:p>
+                  </a:txBody>
+                  <a:tcPr marL="36576" marR="36576" marT="9144" marB="9144">
+                    <a:solidFill>
+                      <a:srgbClr val="FFFFFF"/>
+                    </a:solidFill>
+                  </a:tcPr>
+                </a:tc>
+                <a:tc>
+                  <a:txBody>
+                    <a:bodyPr/>
+                    <a:lstStyle/>
+                    <a:p>
+                      <a:pPr algn="just"/>
+                      <a:r>
+                        <a:rPr sz="1400" b="0">
+                          <a:solidFill>
+                            <a:srgbClr val="202020"/>
+                          </a:solidFill>
+                          <a:latin typeface="Times New Roman"/>
+                        </a:rPr>
+                        <a:t>the input to the final softmax: the value z_i computed for each class</a:t>
+                      </a:r>
+                    </a:p>
+                  </a:txBody>
+                  <a:tcPr marL="36576" marR="36576" marT="9144" marB="9144">
+                    <a:solidFill>
+                      <a:srgbClr val="FFFFFF"/>
+                    </a:solidFill>
+                  </a:tcPr>
+                </a:tc>
+              </a:tr>
+              <a:tr h="329184">
+                <a:tc>
+                  <a:txBody>
+                    <a:bodyPr/>
+                    <a:lstStyle/>
+                    <a:p>
+                      <a:pPr algn="ctr"/>
+                      <a:r>
+                        <a:rPr sz="1400" b="1">
+                          <a:solidFill>
+                            <a:srgbClr val="202020"/>
+                          </a:solidFill>
+                          <a:latin typeface="Times New Roman"/>
+                        </a:rPr>
+                        <a:t>temperature (T)</a:t>
+                      </a:r>
+                    </a:p>
+                  </a:txBody>
+                  <a:tcPr marL="36576" marR="36576" marT="9144" marB="9144">
+                    <a:solidFill>
+                      <a:srgbClr val="FFFFFF"/>
+                    </a:solidFill>
+                  </a:tcPr>
+                </a:tc>
+                <a:tc>
+                  <a:txBody>
+                    <a:bodyPr/>
+                    <a:lstStyle/>
+                    <a:p>
+                      <a:pPr algn="ctr"/>
+                      <a:r>
+                        <a:rPr sz="1400" b="1">
+                          <a:solidFill>
+                            <a:srgbClr val="202020"/>
+                          </a:solidFill>
+                          <a:latin typeface="Microsoft JhengHei"/>
+                        </a:rPr>
+                        <a:t>溫度</a:t>
+                      </a:r>
+                    </a:p>
+                  </a:txBody>
+                  <a:tcPr marL="36576" marR="36576" marT="9144" marB="9144">
+                    <a:solidFill>
+                      <a:srgbClr val="FFFFFF"/>
+                    </a:solidFill>
+                  </a:tcPr>
+                </a:tc>
+                <a:tc>
+                  <a:txBody>
+                    <a:bodyPr/>
+                    <a:lstStyle/>
+                    <a:p>
+                      <a:pPr algn="just"/>
+                      <a:r>
+                        <a:rPr sz="1400" b="0">
+                          <a:solidFill>
+                            <a:srgbClr val="202020"/>
+                          </a:solidFill>
+                          <a:latin typeface="Times New Roman"/>
+                        </a:rPr>
+                        <a:t>the divisor of the logits in the softmax; a higher T gives a softer distribution; normally T = 1</a:t>
+                      </a:r>
+                    </a:p>
+                  </a:txBody>
+                  <a:tcPr marL="36576" marR="36576" marT="9144" marB="9144">
+                    <a:solidFill>
+                      <a:srgbClr val="FFFFFF"/>
+                    </a:solidFill>
+                  </a:tcPr>
+                </a:tc>
+              </a:tr>
+              <a:tr h="329184">
+                <a:tc>
+                  <a:txBody>
+                    <a:bodyPr/>
+                    <a:lstStyle/>
+                    <a:p>
+                      <a:pPr algn="ctr"/>
+                      <a:r>
+                        <a:rPr sz="1400" b="1">
+                          <a:solidFill>
+                            <a:srgbClr val="202020"/>
+                          </a:solidFill>
+                          <a:latin typeface="Times New Roman"/>
+                        </a:rPr>
+                        <a:t>soft targets</a:t>
+                      </a:r>
+                    </a:p>
+                  </a:txBody>
+                  <a:tcPr marL="36576" marR="36576" marT="9144" marB="9144">
+                    <a:solidFill>
+                      <a:srgbClr val="FFFFFF"/>
+                    </a:solidFill>
+                  </a:tcPr>
+                </a:tc>
+                <a:tc>
+                  <a:txBody>
+                    <a:bodyPr/>
+                    <a:lstStyle/>
+                    <a:p>
+                      <a:pPr algn="ctr"/>
+                      <a:r>
+                        <a:rPr sz="1400" b="1">
+                          <a:solidFill>
+                            <a:srgbClr val="202020"/>
+                          </a:solidFill>
+                          <a:latin typeface="Microsoft JhengHei"/>
+                        </a:rPr>
+                        <a:t>軟目標</a:t>
+                      </a:r>
+                    </a:p>
+                  </a:txBody>
+                  <a:tcPr marL="36576" marR="36576" marT="9144" marB="9144">
+                    <a:solidFill>
+                      <a:srgbClr val="FFFFFF"/>
+                    </a:solidFill>
+                  </a:tcPr>
+                </a:tc>
+                <a:tc>
+                  <a:txBody>
+                    <a:bodyPr/>
+                    <a:lstStyle/>
+                    <a:p>
+                      <a:pPr algn="just"/>
+                      <a:r>
+                        <a:rPr sz="1400" b="0">
+                          <a:solidFill>
+                            <a:srgbClr val="202020"/>
+                          </a:solidFill>
+                          <a:latin typeface="Times New Roman"/>
+                        </a:rPr>
+                        <a:t>class probabilities produced by the cumbersome model at a high temperature; they keep the relative probabilities of incorrect answers</a:t>
+                      </a:r>
+                    </a:p>
+                  </a:txBody>
+                  <a:tcPr marL="36576" marR="36576" marT="9144" marB="9144">
+                    <a:solidFill>
+                      <a:srgbClr val="FFFFFF"/>
+                    </a:solidFill>
+                  </a:tcPr>
+                </a:tc>
+              </a:tr>
+              <a:tr h="329184">
+                <a:tc>
+                  <a:txBody>
+                    <a:bodyPr/>
+                    <a:lstStyle/>
+                    <a:p>
+                      <a:pPr algn="ctr"/>
+                      <a:r>
+                        <a:rPr sz="1400" b="1">
+                          <a:solidFill>
+                            <a:srgbClr val="202020"/>
+                          </a:solidFill>
+                          <a:latin typeface="Times New Roman"/>
+                        </a:rPr>
+                        <a:t>hard targets</a:t>
+                      </a:r>
+                    </a:p>
+                  </a:txBody>
+                  <a:tcPr marL="36576" marR="36576" marT="9144" marB="9144">
+                    <a:solidFill>
+                      <a:srgbClr val="FFFFFF"/>
+                    </a:solidFill>
+                  </a:tcPr>
+                </a:tc>
+                <a:tc>
+                  <a:txBody>
+                    <a:bodyPr/>
+                    <a:lstStyle/>
+                    <a:p>
+                      <a:pPr algn="ctr"/>
+                      <a:r>
+                        <a:rPr sz="1400" b="1">
+                          <a:solidFill>
+                            <a:srgbClr val="202020"/>
+                          </a:solidFill>
+                          <a:latin typeface="Microsoft JhengHei"/>
+                        </a:rPr>
+                        <a:t>硬目標</a:t>
+                      </a:r>
+                    </a:p>
+                  </a:txBody>
+                  <a:tcPr marL="36576" marR="36576" marT="9144" marB="9144">
+                    <a:solidFill>
+                      <a:srgbClr val="FFFFFF"/>
+                    </a:solidFill>
+                  </a:tcPr>
+                </a:tc>
+                <a:tc>
+                  <a:txBody>
+                    <a:bodyPr/>
+                    <a:lstStyle/>
+                    <a:p>
+                      <a:pPr algn="just"/>
+                      <a:r>
+                        <a:rPr sz="1400" b="0">
+                          <a:solidFill>
+                            <a:srgbClr val="202020"/>
+                          </a:solidFill>
+                          <a:latin typeface="Times New Roman"/>
+                        </a:rPr>
+                        <a:t>the correct labels: 1 for the correct class and 0 for all others</a:t>
+                      </a:r>
+                    </a:p>
+                  </a:txBody>
+                  <a:tcPr marL="36576" marR="36576" marT="9144" marB="9144">
+                    <a:solidFill>
+                      <a:srgbClr val="FFFFFF"/>
+                    </a:solidFill>
+                  </a:tcPr>
+                </a:tc>
+              </a:tr>
+              <a:tr h="329184">
+                <a:tc>
+                  <a:txBody>
+                    <a:bodyPr/>
+                    <a:lstStyle/>
+                    <a:p>
+                      <a:pPr algn="ctr"/>
+                      <a:r>
+                        <a:rPr sz="1400" b="1">
+                          <a:solidFill>
+                            <a:srgbClr val="202020"/>
+                          </a:solidFill>
+                          <a:latin typeface="Times New Roman"/>
+                        </a:rPr>
+                        <a:t>transfer set</a:t>
+                      </a:r>
+                    </a:p>
+                  </a:txBody>
+                  <a:tcPr marL="36576" marR="36576" marT="9144" marB="9144">
+                    <a:solidFill>
+                      <a:srgbClr val="FFFFFF"/>
+                    </a:solidFill>
+                  </a:tcPr>
+                </a:tc>
+                <a:tc>
+                  <a:txBody>
+                    <a:bodyPr/>
+                    <a:lstStyle/>
+                    <a:p>
+                      <a:pPr algn="ctr"/>
+                      <a:r>
+                        <a:rPr sz="1400" b="1">
+                          <a:solidFill>
+                            <a:srgbClr val="202020"/>
+                          </a:solidFill>
+                          <a:latin typeface="Microsoft JhengHei"/>
+                        </a:rPr>
+                        <a:t>移轉集</a:t>
+                      </a:r>
+                    </a:p>
+                  </a:txBody>
+                  <a:tcPr marL="36576" marR="36576" marT="9144" marB="9144">
+                    <a:solidFill>
+                      <a:srgbClr val="FFFFFF"/>
+                    </a:solidFill>
+                  </a:tcPr>
+                </a:tc>
+                <a:tc>
+                  <a:txBody>
+                    <a:bodyPr/>
+                    <a:lstStyle/>
+                    <a:p>
+                      <a:pPr algn="just"/>
+                      <a:r>
+                        <a:rPr sz="1400" b="0">
+                          <a:solidFill>
+                            <a:srgbClr val="202020"/>
+                          </a:solidFill>
+                          <a:latin typeface="Times New Roman"/>
+                        </a:rPr>
+                        <a:t>the data used to train the distilled model: the original training set or unlabeled data</a:t>
+                      </a:r>
+                    </a:p>
+                  </a:txBody>
+                  <a:tcPr marL="36576" marR="36576" marT="9144" marB="9144">
+                    <a:solidFill>
+                      <a:srgbClr val="FFFFFF"/>
+                    </a:solidFill>
+                  </a:tcPr>
+                </a:tc>
+              </a:tr>
+              <a:tr h="329184">
+                <a:tc>
+                  <a:txBody>
+                    <a:bodyPr/>
+                    <a:lstStyle/>
+                    <a:p>
+                      <a:pPr algn="ctr"/>
+                      <a:r>
+                        <a:rPr sz="1400" b="1">
+                          <a:solidFill>
+                            <a:srgbClr val="202020"/>
+                          </a:solidFill>
+                          <a:latin typeface="Times New Roman"/>
+                        </a:rPr>
+                        <a:t>cross entropy</a:t>
+                      </a:r>
+                    </a:p>
+                  </a:txBody>
+                  <a:tcPr marL="36576" marR="36576" marT="9144" marB="9144">
+                    <a:solidFill>
+                      <a:srgbClr val="FFFFFF"/>
+                    </a:solidFill>
+                  </a:tcPr>
+                </a:tc>
+                <a:tc>
+                  <a:txBody>
+                    <a:bodyPr/>
+                    <a:lstStyle/>
+                    <a:p>
+                      <a:pPr algn="ctr"/>
+                      <a:r>
+                        <a:rPr sz="1400" b="1">
+                          <a:solidFill>
+                            <a:srgbClr val="202020"/>
+                          </a:solidFill>
+                          <a:latin typeface="Microsoft JhengHei"/>
+                        </a:rPr>
+                        <a:t>交叉熵</a:t>
+                      </a:r>
+                    </a:p>
+                  </a:txBody>
+                  <a:tcPr marL="36576" marR="36576" marT="9144" marB="9144">
+                    <a:solidFill>
+                      <a:srgbClr val="FFFFFF"/>
+                    </a:solidFill>
+                  </a:tcPr>
+                </a:tc>
+                <a:tc>
+                  <a:txBody>
+                    <a:bodyPr/>
+                    <a:lstStyle/>
+                    <a:p>
+                      <a:pPr algn="just"/>
+                      <a:r>
+                        <a:rPr sz="1400" b="0">
+                          <a:solidFill>
+                            <a:srgbClr val="202020"/>
+                          </a:solidFill>
+                          <a:latin typeface="Times New Roman"/>
+                        </a:rPr>
+                        <a:t>a measure of the difference between two distributions: C = −Σ p_i log q_i</a:t>
+                      </a:r>
+                    </a:p>
+                  </a:txBody>
+                  <a:tcPr marL="36576" marR="36576" marT="9144" marB="9144">
+                    <a:solidFill>
+                      <a:srgbClr val="FFFFFF"/>
+                    </a:solidFill>
+                  </a:tcPr>
+                </a:tc>
+              </a:tr>
+              <a:tr h="329184">
+                <a:tc>
+                  <a:txBody>
+                    <a:bodyPr/>
+                    <a:lstStyle/>
+                    <a:p>
+                      <a:pPr algn="ctr"/>
+                      <a:r>
+                        <a:rPr sz="1400" b="1">
+                          <a:solidFill>
+                            <a:srgbClr val="202020"/>
+                          </a:solidFill>
+                          <a:latin typeface="Times New Roman"/>
+                        </a:rPr>
+                        <a:t>matching logits</a:t>
+                      </a:r>
+                    </a:p>
+                  </a:txBody>
+                  <a:tcPr marL="36576" marR="36576" marT="9144" marB="9144">
+                    <a:solidFill>
+                      <a:srgbClr val="FFFFFF"/>
+                    </a:solidFill>
+                  </a:tcPr>
+                </a:tc>
+                <a:tc>
+                  <a:txBody>
+                    <a:bodyPr/>
+                    <a:lstStyle/>
+                    <a:p>
+                      <a:pPr algn="ctr"/>
+                      <a:r>
+                        <a:rPr sz="1400" b="1">
+                          <a:solidFill>
+                            <a:srgbClr val="202020"/>
+                          </a:solidFill>
+                          <a:latin typeface="Microsoft JhengHei"/>
+                        </a:rPr>
+                        <a:t>比對 logit</a:t>
+                      </a:r>
+                    </a:p>
+                  </a:txBody>
+                  <a:tcPr marL="36576" marR="36576" marT="9144" marB="9144">
+                    <a:solidFill>
+                      <a:srgbClr val="FFFFFF"/>
+                    </a:solidFill>
+                  </a:tcPr>
+                </a:tc>
+                <a:tc>
+                  <a:txBody>
+                    <a:bodyPr/>
+                    <a:lstStyle/>
+                    <a:p>
+                      <a:pPr algn="just"/>
+                      <a:r>
+                        <a:rPr sz="1400" b="0">
+                          <a:solidFill>
+                            <a:srgbClr val="202020"/>
+                          </a:solidFill>
+                          <a:latin typeface="Times New Roman"/>
+                        </a:rPr>
+                        <a:t>making the logits of the small model match those of the cumbersome model; the high-temperature limit of distillation</a:t>
+                      </a:r>
+                    </a:p>
+                  </a:txBody>
+                  <a:tcPr marL="36576" marR="36576" marT="9144" marB="9144">
+                    <a:solidFill>
+                      <a:srgbClr val="FFFFFF"/>
+                    </a:solidFill>
+                  </a:tcPr>
+                </a:tc>
+              </a:tr>
+              <a:tr h="329184">
+                <a:tc>
+                  <a:txBody>
+                    <a:bodyPr/>
+                    <a:lstStyle/>
+                    <a:p>
+                      <a:pPr algn="ctr"/>
+                      <a:r>
+                        <a:rPr sz="1400" b="1">
+                          <a:solidFill>
+                            <a:srgbClr val="202020"/>
+                          </a:solidFill>
+                          <a:latin typeface="Times New Roman"/>
+                        </a:rPr>
+                        <a:t>specialist models</a:t>
+                      </a:r>
+                    </a:p>
+                  </a:txBody>
+                  <a:tcPr marL="36576" marR="36576" marT="9144" marB="9144">
+                    <a:solidFill>
+                      <a:srgbClr val="FFFFFF"/>
+                    </a:solidFill>
+                  </a:tcPr>
+                </a:tc>
+                <a:tc>
+                  <a:txBody>
+                    <a:bodyPr/>
+                    <a:lstStyle/>
+                    <a:p>
+                      <a:pPr algn="ctr"/>
+                      <a:r>
+                        <a:rPr sz="1400" b="1">
+                          <a:solidFill>
+                            <a:srgbClr val="202020"/>
+                          </a:solidFill>
+                          <a:latin typeface="Microsoft JhengHei"/>
+                        </a:rPr>
+                        <a:t>專家模型</a:t>
+                      </a:r>
+                    </a:p>
+                  </a:txBody>
+                  <a:tcPr marL="36576" marR="36576" marT="9144" marB="9144">
+                    <a:solidFill>
+                      <a:srgbClr val="FFFFFF"/>
+                    </a:solidFill>
+                  </a:tcPr>
+                </a:tc>
+                <a:tc>
+                  <a:txBody>
+                    <a:bodyPr/>
+                    <a:lstStyle/>
+                    <a:p>
+                      <a:pPr algn="just"/>
+                      <a:r>
+                        <a:rPr sz="1400" b="0">
+                          <a:solidFill>
+                            <a:srgbClr val="202020"/>
+                          </a:solidFill>
+                          <a:latin typeface="Times New Roman"/>
+                        </a:rPr>
+                        <a:t>models that each handle a confusable subset of classes, used together with a generalist model</a:t>
+                      </a:r>
+                    </a:p>
+                  </a:txBody>
+                  <a:tcPr marL="36576" marR="36576" marT="9144" marB="9144">
+                    <a:solidFill>
+                      <a:srgbClr val="FFFFFF"/>
+                    </a:solidFill>
+                  </a:tcPr>
+                </a:tc>
+              </a:tr>
+            </a:tbl>
+          </a:graphicData>
+        </a:graphic>
+      </p:graphicFrame>
+    </p:spTree>
+  </p:cSld>
+  <p:clrMapOvr>
+    <a:masterClrMapping/>
+  </p:clrMapOvr>
+  <p:timing>
+    <p:tnLst>
+      <p:par>
+        <p:cTn id="1" dur="indefinite" restart="never" nodeType="tmRoot">
+          <p:childTnLst>
+            <p:seq concurrent="1" nextAc="seek">
+              <p:cTn id="2" dur="indefinite" nodeType="mainSeq">
+                <p:childTnLst>
+                  <p:par>
+                    <p:cTn id="3" fill="hold">
+                      <p:stCondLst>
+                        <p:cond delay="indefinite"/>
+                      </p:stCondLst>
+                      <p:childTnLst>
+                        <p:par>
+                          <p:cTn id="4" fill="hold">
+                            <p:stCondLst>
+                              <p:cond delay="0"/>
+                            </p:stCondLst>
+                            <p:childTnLst>
+                              <p:par>
+                                <p:cTn id="5" presetID="1" presetClass="entr" presetSubtype="0" fill="hold" grpId="0" nodeType="clickEffect">
+                                  <p:stCondLst>
+                                    <p:cond delay="0"/>
+                                  </p:stCondLst>
+                                  <p:childTnLst>
+                                    <p:set>
+                                      <p:cBhvr>
+                                        <p:cTn id="6" dur="1" fill="hold">
+                                          <p:stCondLst>
+                                            <p:cond delay="0"/>
+                                          </p:stCondLst>
+                                        </p:cTn>
+                                        <p:tgtEl>
+                                          <p:spTgt spid="6"/>
+                                        </p:tgtEl>
+                                        <p:attrNameLst>
+                                          <p:attrName>style.visibility</p:attrName>
+                                        </p:attrNameLst>
+                                      </p:cBhvr>
+                                      <p:to>
+                                        <p:strVal val="visible"/>
+                                      </p:to>
+                                    </p:set>
+                                  </p:childTnLst>
+                                </p:cTn>
+                              </p:par>
+                            </p:childTnLst>
+                          </p:cTn>
+                        </p:par>
+                      </p:childTnLst>
+                    </p:cTn>
+                  </p:par>
+                </p:childTnLst>
+              </p:cTn>
+              <p:prevCondLst>
+                <p:cond evt="onPrev" delay="0">
+                  <p:tgtEl>
+                    <p:sldTgt/>
+                  </p:tgtEl>
+                </p:cond>
+              </p:prevCondLst>
+              <p:nextCondLst>
+                <p:cond evt="onNext" delay="0">
+                  <p:tgtEl>
+                    <p:sldTgt/>
+                  </p:tgtEl>
+                </p:cond>
+              </p:nextCondLst>
+            </p:seq>
+          </p:childTnLst>
+        </p:cTn>
+      </p:par>
+    </p:tnLst>
+    <p:bldLst>
+      <p:bldGraphic spid="6" grpId="0">
+        <p:bldAsOne/>
+      </p:bldGraphic>
+    </p:bldLst>
+  </p:timing>
+</p:sld>
+</file>
+
+<file path=ppt/slides/slide6.xml><?xml version="1.0" encoding="utf-8"?>
 <p:sld xmlns:a="http://schemas.openxmlformats.org/drawingml/2006/main" xmlns:p="http://schemas.openxmlformats.org/presentationml/2006/main" xmlns:r="http://schemas.openxmlformats.org/officeDocument/2006/relationships">
   <p:cSld>
     <p:spTree>
@@ -22344,7 +25153,7 @@
 </p:sld>
 </file>
 
-<file path=ppt/slides/slide6.xml><?xml version="1.0" encoding="utf-8"?>
+<file path=ppt/slides/slide7.xml><?xml version="1.0" encoding="utf-8"?>
 <p:sld xmlns:a="http://schemas.openxmlformats.org/drawingml/2006/main" xmlns:p="http://schemas.openxmlformats.org/presentationml/2006/main" xmlns:r="http://schemas.openxmlformats.org/officeDocument/2006/relationships">
   <p:cSld>
     <p:spTree>
@@ -23459,7 +26268,7 @@
 </p:sld>
 </file>
 
-<file path=ppt/slides/slide7.xml><?xml version="1.0" encoding="utf-8"?>
+<file path=ppt/slides/slide8.xml><?xml version="1.0" encoding="utf-8"?>
 <p:sld xmlns:a="http://schemas.openxmlformats.org/drawingml/2006/main" xmlns:p="http://schemas.openxmlformats.org/presentationml/2006/main" xmlns:r="http://schemas.openxmlformats.org/officeDocument/2006/relationships">
   <p:cSld>
     <p:spTree>
@@ -23622,7 +26431,7 @@
                 </a:solidFill>
                 <a:latin typeface="Times New Roman"/>
               </a:rPr>
-              <a:t>Used from this slide to slide 15</a:t>
+              <a:t>Used from this slide to slide 16</a:t>
             </a:r>
           </a:p>
         </p:txBody>
@@ -24519,1537 +27328,6 @@
 </p:sld>
 </file>
 
-<file path=ppt/slides/slide8.xml><?xml version="1.0" encoding="utf-8"?>
-<p:sld xmlns:a="http://schemas.openxmlformats.org/drawingml/2006/main" xmlns:p="http://schemas.openxmlformats.org/presentationml/2006/main" xmlns:r="http://schemas.openxmlformats.org/officeDocument/2006/relationships">
-  <p:cSld>
-    <p:spTree>
-      <p:nvGrpSpPr>
-        <p:cNvPr id="1" name=""/>
-        <p:cNvGrpSpPr/>
-        <p:nvPr/>
-      </p:nvGrpSpPr>
-      <p:grpSpPr/>
-      <p:sp>
-        <p:nvSpPr>
-          <p:cNvPr id="2" name="Rectangle 1"/>
-          <p:cNvSpPr/>
-          <p:nvPr/>
-        </p:nvSpPr>
-        <p:spPr>
-          <a:xfrm>
-            <a:off x="0" y="0"/>
-            <a:ext cx="12191695" cy="6858000"/>
-          </a:xfrm>
-          <a:prstGeom prst="rect">
-            <a:avLst/>
-          </a:prstGeom>
-          <a:solidFill>
-            <a:srgbClr val="FFFFFF"/>
-          </a:solidFill>
-          <a:ln>
-            <a:noFill/>
-          </a:ln>
-          <a:effectLst/>
-        </p:spPr>
-        <p:style>
-          <a:lnRef idx="1">
-            <a:schemeClr val="accent1"/>
-          </a:lnRef>
-          <a:fillRef idx="3">
-            <a:schemeClr val="accent1"/>
-          </a:fillRef>
-          <a:effectRef idx="2">
-            <a:schemeClr val="accent1"/>
-          </a:effectRef>
-          <a:fontRef idx="minor">
-            <a:schemeClr val="lt1"/>
-          </a:fontRef>
-        </p:style>
-        <p:txBody>
-          <a:bodyPr rtlCol="0" anchor="ctr"/>
-          <a:lstStyle/>
-          <a:p>
-            <a:pPr algn="ctr"/>
-          </a:p>
-        </p:txBody>
-      </p:sp>
-      <p:sp>
-        <p:nvSpPr>
-          <p:cNvPr id="3" name="Rectangle 2"/>
-          <p:cNvSpPr/>
-          <p:nvPr/>
-        </p:nvSpPr>
-        <p:spPr>
-          <a:xfrm>
-            <a:off x="0" y="0"/>
-            <a:ext cx="12191695" cy="868680"/>
-          </a:xfrm>
-          <a:prstGeom prst="rect">
-            <a:avLst/>
-          </a:prstGeom>
-          <a:solidFill>
-            <a:srgbClr val="1F4E79"/>
-          </a:solidFill>
-          <a:ln>
-            <a:noFill/>
-          </a:ln>
-          <a:effectLst/>
-        </p:spPr>
-        <p:style>
-          <a:lnRef idx="1">
-            <a:schemeClr val="accent1"/>
-          </a:lnRef>
-          <a:fillRef idx="3">
-            <a:schemeClr val="accent1"/>
-          </a:fillRef>
-          <a:effectRef idx="2">
-            <a:schemeClr val="accent1"/>
-          </a:effectRef>
-          <a:fontRef idx="minor">
-            <a:schemeClr val="lt1"/>
-          </a:fontRef>
-        </p:style>
-        <p:txBody>
-          <a:bodyPr rtlCol="0" anchor="ctr"/>
-          <a:lstStyle/>
-          <a:p>
-            <a:pPr algn="ctr"/>
-          </a:p>
-        </p:txBody>
-      </p:sp>
-      <p:sp>
-        <p:nvSpPr>
-          <p:cNvPr id="4" name="TextBox 3"/>
-          <p:cNvSpPr txBox="1"/>
-          <p:nvPr/>
-        </p:nvSpPr>
-        <p:spPr>
-          <a:xfrm>
-            <a:off x="411480" y="54864"/>
-            <a:ext cx="11338560" cy="457200"/>
-          </a:xfrm>
-          <a:prstGeom prst="rect">
-            <a:avLst/>
-          </a:prstGeom>
-          <a:noFill/>
-        </p:spPr>
-        <p:txBody>
-          <a:bodyPr wrap="square">
-            <a:spAutoFit/>
-          </a:bodyPr>
-          <a:lstStyle/>
-          <a:p>
-            <a:pPr algn="just"/>
-            <a:r>
-              <a:rPr sz="2800" b="1" i="0">
-                <a:solidFill>
-                  <a:srgbClr val="FFFFFF"/>
-                </a:solidFill>
-                <a:latin typeface="Times New Roman"/>
-              </a:rPr>
-              <a:t>2. Softmax with a temperature: T = 1</a:t>
-            </a:r>
-          </a:p>
-        </p:txBody>
-      </p:sp>
-      <p:sp>
-        <p:nvSpPr>
-          <p:cNvPr id="5" name="TextBox 4"/>
-          <p:cNvSpPr txBox="1"/>
-          <p:nvPr/>
-        </p:nvSpPr>
-        <p:spPr>
-          <a:xfrm>
-            <a:off x="411480" y="521207"/>
-            <a:ext cx="11338560" cy="301752"/>
-          </a:xfrm>
-          <a:prstGeom prst="rect">
-            <a:avLst/>
-          </a:prstGeom>
-          <a:noFill/>
-        </p:spPr>
-        <p:txBody>
-          <a:bodyPr wrap="square">
-            <a:spAutoFit/>
-          </a:bodyPr>
-          <a:lstStyle/>
-          <a:p>
-            <a:pPr algn="just"/>
-            <a:r>
-              <a:rPr sz="1400" b="0" i="0">
-                <a:solidFill>
-                  <a:srgbClr val="C7D6E5"/>
-                </a:solidFill>
-                <a:latin typeface="Times New Roman"/>
-              </a:rPr>
-              <a:t>Eq. 1 of the paper; T is normally set to 1</a:t>
-            </a:r>
-          </a:p>
-        </p:txBody>
-      </p:sp>
-      <p:pic>
-        <p:nvPicPr>
-          <p:cNvPr id="6" name="Picture 5" descr="m_softmax.png"/>
-          <p:cNvPicPr>
-            <a:picLocks noChangeAspect="1"/>
-          </p:cNvPicPr>
-          <p:nvPr/>
-        </p:nvPicPr>
-        <p:blipFill>
-          <a:blip r:embed="rId2"/>
-          <a:stretch>
-            <a:fillRect/>
-          </a:stretch>
-        </p:blipFill>
-        <p:spPr>
-          <a:xfrm>
-            <a:off x="822960" y="1051560"/>
-            <a:ext cx="1834822" cy="868680"/>
-          </a:xfrm>
-          <a:prstGeom prst="rect">
-            <a:avLst/>
-          </a:prstGeom>
-        </p:spPr>
-      </p:pic>
-      <p:sp>
-        <p:nvSpPr>
-          <p:cNvPr id="7" name="TextBox 6"/>
-          <p:cNvSpPr txBox="1"/>
-          <p:nvPr/>
-        </p:nvSpPr>
-        <p:spPr>
-          <a:xfrm>
-            <a:off x="4754880" y="1097280"/>
-            <a:ext cx="6949440" cy="914400"/>
-          </a:xfrm>
-          <a:prstGeom prst="rect">
-            <a:avLst/>
-          </a:prstGeom>
-          <a:noFill/>
-        </p:spPr>
-        <p:txBody>
-          <a:bodyPr wrap="square">
-            <a:spAutoFit/>
-          </a:bodyPr>
-          <a:lstStyle/>
-          <a:p>
-            <a:pPr algn="just"/>
-            <a:r>
-              <a:rPr sz="1700" b="0" i="0">
-                <a:solidFill>
-                  <a:srgbClr val="202020"/>
-                </a:solidFill>
-                <a:latin typeface="Times New Roman"/>
-              </a:rPr>
-              <a:t>The softmax converts the logit z_i computed for each class into a probability q_i by comparing z_i with the other logits; T is a temperature.</a:t>
-            </a:r>
-          </a:p>
-        </p:txBody>
-      </p:sp>
-      <p:graphicFrame>
-        <p:nvGraphicFramePr>
-          <p:cNvPr id="8" name="Table 7"/>
-          <p:cNvGraphicFramePr>
-            <a:graphicFrameLocks noGrp="1"/>
-          </p:cNvGraphicFramePr>
-          <p:nvPr/>
-        </p:nvGraphicFramePr>
-        <p:xfrm>
-          <a:off x="731520" y="2240280"/>
-          <a:ext cx="1188720" cy="1316736"/>
-        </p:xfrm>
-        <a:graphic>
-          <a:graphicData uri="http://schemas.openxmlformats.org/drawingml/2006/table">
-            <a:tbl>
-              <a:tblPr bandRow="1">
-                <a:tableStyleId>{5C22544A-7EE6-4342-B048-85BDC9FD1C3A}</a:tableStyleId>
-              </a:tblPr>
-              <a:tblGrid>
-                <a:gridCol w="1188720"/>
-              </a:tblGrid>
-              <a:tr h="329184">
-                <a:tc>
-                  <a:txBody>
-                    <a:bodyPr/>
-                    <a:lstStyle/>
-                    <a:p>
-                      <a:pPr algn="ctr"/>
-                      <a:r>
-                        <a:rPr sz="1600" b="1">
-                          <a:solidFill>
-                            <a:srgbClr val="FFFFFF"/>
-                          </a:solidFill>
-                          <a:latin typeface="Times New Roman"/>
-                        </a:rPr>
-                        <a:t>Class</a:t>
-                      </a:r>
-                    </a:p>
-                  </a:txBody>
-                  <a:tcPr marL="36576" marR="36576" marT="9144" marB="9144">
-                    <a:solidFill>
-                      <a:srgbClr val="1F4E79"/>
-                    </a:solidFill>
-                  </a:tcPr>
-                </a:tc>
-              </a:tr>
-              <a:tr h="329184">
-                <a:tc>
-                  <a:txBody>
-                    <a:bodyPr/>
-                    <a:lstStyle/>
-                    <a:p>
-                      <a:pPr algn="ctr"/>
-                      <a:r>
-                        <a:rPr sz="1600" b="0">
-                          <a:solidFill>
-                            <a:srgbClr val="202020"/>
-                          </a:solidFill>
-                          <a:latin typeface="Times New Roman"/>
-                        </a:rPr>
-                        <a:t>2</a:t>
-                      </a:r>
-                    </a:p>
-                  </a:txBody>
-                  <a:tcPr marL="36576" marR="36576" marT="9144" marB="9144">
-                    <a:solidFill>
-                      <a:srgbClr val="FFFFFF"/>
-                    </a:solidFill>
-                  </a:tcPr>
-                </a:tc>
-              </a:tr>
-              <a:tr h="329184">
-                <a:tc>
-                  <a:txBody>
-                    <a:bodyPr/>
-                    <a:lstStyle/>
-                    <a:p>
-                      <a:pPr algn="ctr"/>
-                      <a:r>
-                        <a:rPr sz="1600" b="0">
-                          <a:solidFill>
-                            <a:srgbClr val="202020"/>
-                          </a:solidFill>
-                          <a:latin typeface="Times New Roman"/>
-                        </a:rPr>
-                        <a:t>3</a:t>
-                      </a:r>
-                    </a:p>
-                  </a:txBody>
-                  <a:tcPr marL="36576" marR="36576" marT="9144" marB="9144">
-                    <a:solidFill>
-                      <a:srgbClr val="FFFFFF"/>
-                    </a:solidFill>
-                  </a:tcPr>
-                </a:tc>
-              </a:tr>
-              <a:tr h="329184">
-                <a:tc>
-                  <a:txBody>
-                    <a:bodyPr/>
-                    <a:lstStyle/>
-                    <a:p>
-                      <a:pPr algn="ctr"/>
-                      <a:r>
-                        <a:rPr sz="1600" b="0">
-                          <a:solidFill>
-                            <a:srgbClr val="202020"/>
-                          </a:solidFill>
-                          <a:latin typeface="Times New Roman"/>
-                        </a:rPr>
-                        <a:t>7</a:t>
-                      </a:r>
-                    </a:p>
-                  </a:txBody>
-                  <a:tcPr marL="36576" marR="36576" marT="9144" marB="9144">
-                    <a:solidFill>
-                      <a:srgbClr val="FFFFFF"/>
-                    </a:solidFill>
-                  </a:tcPr>
-                </a:tc>
-              </a:tr>
-            </a:tbl>
-          </a:graphicData>
-        </a:graphic>
-      </p:graphicFrame>
-      <p:graphicFrame>
-        <p:nvGraphicFramePr>
-          <p:cNvPr id="9" name="Table 8"/>
-          <p:cNvGraphicFramePr>
-            <a:graphicFrameLocks noGrp="1"/>
-          </p:cNvGraphicFramePr>
-          <p:nvPr/>
-        </p:nvGraphicFramePr>
-        <p:xfrm>
-          <a:off x="2057400" y="2240280"/>
-          <a:ext cx="1463040" cy="1316736"/>
-        </p:xfrm>
-        <a:graphic>
-          <a:graphicData uri="http://schemas.openxmlformats.org/drawingml/2006/table">
-            <a:tbl>
-              <a:tblPr bandRow="1">
-                <a:tableStyleId>{5C22544A-7EE6-4342-B048-85BDC9FD1C3A}</a:tableStyleId>
-              </a:tblPr>
-              <a:tblGrid>
-                <a:gridCol w="1463040"/>
-              </a:tblGrid>
-              <a:tr h="329184">
-                <a:tc>
-                  <a:txBody>
-                    <a:bodyPr/>
-                    <a:lstStyle/>
-                    <a:p>
-                      <a:pPr algn="ctr"/>
-                      <a:r>
-                        <a:rPr sz="1600" b="1">
-                          <a:solidFill>
-                            <a:srgbClr val="FFFFFF"/>
-                          </a:solidFill>
-                          <a:latin typeface="Times New Roman"/>
-                        </a:rPr>
-                        <a:t>v</a:t>
-                      </a:r>
-                    </a:p>
-                  </a:txBody>
-                  <a:tcPr marL="36576" marR="36576" marT="9144" marB="9144">
-                    <a:solidFill>
-                      <a:srgbClr val="1F4E79"/>
-                    </a:solidFill>
-                  </a:tcPr>
-                </a:tc>
-              </a:tr>
-              <a:tr h="329184">
-                <a:tc>
-                  <a:txBody>
-                    <a:bodyPr/>
-                    <a:lstStyle/>
-                    <a:p>
-                      <a:pPr algn="ctr"/>
-                      <a:r>
-                        <a:rPr sz="1600" b="0">
-                          <a:solidFill>
-                            <a:srgbClr val="202020"/>
-                          </a:solidFill>
-                          <a:latin typeface="Times New Roman"/>
-                        </a:rPr>
-                        <a:t>8</a:t>
-                      </a:r>
-                    </a:p>
-                  </a:txBody>
-                  <a:tcPr marL="36576" marR="36576" marT="9144" marB="9144">
-                    <a:solidFill>
-                      <a:srgbClr val="FFFFFF"/>
-                    </a:solidFill>
-                  </a:tcPr>
-                </a:tc>
-              </a:tr>
-              <a:tr h="329184">
-                <a:tc>
-                  <a:txBody>
-                    <a:bodyPr/>
-                    <a:lstStyle/>
-                    <a:p>
-                      <a:pPr algn="ctr"/>
-                      <a:r>
-                        <a:rPr sz="1600" b="0">
-                          <a:solidFill>
-                            <a:srgbClr val="202020"/>
-                          </a:solidFill>
-                          <a:latin typeface="Times New Roman"/>
-                        </a:rPr>
-                        <a:t>4</a:t>
-                      </a:r>
-                    </a:p>
-                  </a:txBody>
-                  <a:tcPr marL="36576" marR="36576" marT="9144" marB="9144">
-                    <a:solidFill>
-                      <a:srgbClr val="FFFFFF"/>
-                    </a:solidFill>
-                  </a:tcPr>
-                </a:tc>
-              </a:tr>
-              <a:tr h="329184">
-                <a:tc>
-                  <a:txBody>
-                    <a:bodyPr/>
-                    <a:lstStyle/>
-                    <a:p>
-                      <a:pPr algn="ctr"/>
-                      <a:r>
-                        <a:rPr sz="1600" b="0">
-                          <a:solidFill>
-                            <a:srgbClr val="202020"/>
-                          </a:solidFill>
-                          <a:latin typeface="Times New Roman"/>
-                        </a:rPr>
-                        <a:t>0</a:t>
-                      </a:r>
-                    </a:p>
-                  </a:txBody>
-                  <a:tcPr marL="36576" marR="36576" marT="9144" marB="9144">
-                    <a:solidFill>
-                      <a:srgbClr val="FFFFFF"/>
-                    </a:solidFill>
-                  </a:tcPr>
-                </a:tc>
-              </a:tr>
-            </a:tbl>
-          </a:graphicData>
-        </a:graphic>
-      </p:graphicFrame>
-      <p:graphicFrame>
-        <p:nvGraphicFramePr>
-          <p:cNvPr id="10" name="Table 9"/>
-          <p:cNvGraphicFramePr>
-            <a:graphicFrameLocks noGrp="1"/>
-          </p:cNvGraphicFramePr>
-          <p:nvPr/>
-        </p:nvGraphicFramePr>
-        <p:xfrm>
-          <a:off x="3657600" y="2240280"/>
-          <a:ext cx="1965960" cy="1316736"/>
-        </p:xfrm>
-        <a:graphic>
-          <a:graphicData uri="http://schemas.openxmlformats.org/drawingml/2006/table">
-            <a:tbl>
-              <a:tblPr bandRow="1">
-                <a:tableStyleId>{5C22544A-7EE6-4342-B048-85BDC9FD1C3A}</a:tableStyleId>
-              </a:tblPr>
-              <a:tblGrid>
-                <a:gridCol w="1965960"/>
-              </a:tblGrid>
-              <a:tr h="329184">
-                <a:tc>
-                  <a:txBody>
-                    <a:bodyPr/>
-                    <a:lstStyle/>
-                    <a:p>
-                      <a:pPr algn="ctr"/>
-                      <a:r>
-                        <a:rPr sz="1600" b="1">
-                          <a:solidFill>
-                            <a:srgbClr val="FFFFFF"/>
-                          </a:solidFill>
-                          <a:latin typeface="Times New Roman"/>
-                        </a:rPr>
-                        <a:t>Step 1:  ÷ T</a:t>
-                      </a:r>
-                    </a:p>
-                  </a:txBody>
-                  <a:tcPr marL="36576" marR="36576" marT="9144" marB="9144">
-                    <a:solidFill>
-                      <a:srgbClr val="1F4E79"/>
-                    </a:solidFill>
-                  </a:tcPr>
-                </a:tc>
-              </a:tr>
-              <a:tr h="329184">
-                <a:tc>
-                  <a:txBody>
-                    <a:bodyPr/>
-                    <a:lstStyle/>
-                    <a:p>
-                      <a:pPr algn="ctr"/>
-                      <a:r>
-                        <a:rPr sz="1600" b="0">
-                          <a:solidFill>
-                            <a:srgbClr val="202020"/>
-                          </a:solidFill>
-                          <a:latin typeface="Times New Roman"/>
-                        </a:rPr>
-                        <a:t>8.0000</a:t>
-                      </a:r>
-                    </a:p>
-                  </a:txBody>
-                  <a:tcPr marL="36576" marR="36576" marT="9144" marB="9144">
-                    <a:solidFill>
-                      <a:srgbClr val="FFFFFF"/>
-                    </a:solidFill>
-                  </a:tcPr>
-                </a:tc>
-              </a:tr>
-              <a:tr h="329184">
-                <a:tc>
-                  <a:txBody>
-                    <a:bodyPr/>
-                    <a:lstStyle/>
-                    <a:p>
-                      <a:pPr algn="ctr"/>
-                      <a:r>
-                        <a:rPr sz="1600" b="0">
-                          <a:solidFill>
-                            <a:srgbClr val="202020"/>
-                          </a:solidFill>
-                          <a:latin typeface="Times New Roman"/>
-                        </a:rPr>
-                        <a:t>4.0000</a:t>
-                      </a:r>
-                    </a:p>
-                  </a:txBody>
-                  <a:tcPr marL="36576" marR="36576" marT="9144" marB="9144">
-                    <a:solidFill>
-                      <a:srgbClr val="FFFFFF"/>
-                    </a:solidFill>
-                  </a:tcPr>
-                </a:tc>
-              </a:tr>
-              <a:tr h="329184">
-                <a:tc>
-                  <a:txBody>
-                    <a:bodyPr/>
-                    <a:lstStyle/>
-                    <a:p>
-                      <a:pPr algn="ctr"/>
-                      <a:r>
-                        <a:rPr sz="1600" b="0">
-                          <a:solidFill>
-                            <a:srgbClr val="202020"/>
-                          </a:solidFill>
-                          <a:latin typeface="Times New Roman"/>
-                        </a:rPr>
-                        <a:t>0.0000</a:t>
-                      </a:r>
-                    </a:p>
-                  </a:txBody>
-                  <a:tcPr marL="36576" marR="36576" marT="9144" marB="9144">
-                    <a:solidFill>
-                      <a:srgbClr val="FFFFFF"/>
-                    </a:solidFill>
-                  </a:tcPr>
-                </a:tc>
-              </a:tr>
-            </a:tbl>
-          </a:graphicData>
-        </a:graphic>
-      </p:graphicFrame>
-      <p:graphicFrame>
-        <p:nvGraphicFramePr>
-          <p:cNvPr id="11" name="Table 10"/>
-          <p:cNvGraphicFramePr>
-            <a:graphicFrameLocks noGrp="1"/>
-          </p:cNvGraphicFramePr>
-          <p:nvPr/>
-        </p:nvGraphicFramePr>
-        <p:xfrm>
-          <a:off x="5760720" y="2240280"/>
-          <a:ext cx="2240279" cy="1316736"/>
-        </p:xfrm>
-        <a:graphic>
-          <a:graphicData uri="http://schemas.openxmlformats.org/drawingml/2006/table">
-            <a:tbl>
-              <a:tblPr bandRow="1">
-                <a:tableStyleId>{5C22544A-7EE6-4342-B048-85BDC9FD1C3A}</a:tableStyleId>
-              </a:tblPr>
-              <a:tblGrid>
-                <a:gridCol w="2240279"/>
-              </a:tblGrid>
-              <a:tr h="329184">
-                <a:tc>
-                  <a:txBody>
-                    <a:bodyPr/>
-                    <a:lstStyle/>
-                    <a:p>
-                      <a:pPr algn="ctr"/>
-                      <a:r>
-                        <a:rPr sz="1600" b="1">
-                          <a:solidFill>
-                            <a:srgbClr val="FFFFFF"/>
-                          </a:solidFill>
-                          <a:latin typeface="Times New Roman"/>
-                        </a:rPr>
-                        <a:t>Step 2:  exp</a:t>
-                      </a:r>
-                    </a:p>
-                  </a:txBody>
-                  <a:tcPr marL="36576" marR="36576" marT="9144" marB="9144">
-                    <a:solidFill>
-                      <a:srgbClr val="1F4E79"/>
-                    </a:solidFill>
-                  </a:tcPr>
-                </a:tc>
-              </a:tr>
-              <a:tr h="329184">
-                <a:tc>
-                  <a:txBody>
-                    <a:bodyPr/>
-                    <a:lstStyle/>
-                    <a:p>
-                      <a:pPr algn="ctr"/>
-                      <a:r>
-                        <a:rPr sz="1600" b="0">
-                          <a:solidFill>
-                            <a:srgbClr val="202020"/>
-                          </a:solidFill>
-                          <a:latin typeface="Times New Roman"/>
-                        </a:rPr>
-                        <a:t>2980.9580</a:t>
-                      </a:r>
-                    </a:p>
-                  </a:txBody>
-                  <a:tcPr marL="36576" marR="36576" marT="9144" marB="9144">
-                    <a:solidFill>
-                      <a:srgbClr val="FFFFFF"/>
-                    </a:solidFill>
-                  </a:tcPr>
-                </a:tc>
-              </a:tr>
-              <a:tr h="329184">
-                <a:tc>
-                  <a:txBody>
-                    <a:bodyPr/>
-                    <a:lstStyle/>
-                    <a:p>
-                      <a:pPr algn="ctr"/>
-                      <a:r>
-                        <a:rPr sz="1600" b="0">
-                          <a:solidFill>
-                            <a:srgbClr val="202020"/>
-                          </a:solidFill>
-                          <a:latin typeface="Times New Roman"/>
-                        </a:rPr>
-                        <a:t>54.5982</a:t>
-                      </a:r>
-                    </a:p>
-                  </a:txBody>
-                  <a:tcPr marL="36576" marR="36576" marT="9144" marB="9144">
-                    <a:solidFill>
-                      <a:srgbClr val="FFFFFF"/>
-                    </a:solidFill>
-                  </a:tcPr>
-                </a:tc>
-              </a:tr>
-              <a:tr h="329184">
-                <a:tc>
-                  <a:txBody>
-                    <a:bodyPr/>
-                    <a:lstStyle/>
-                    <a:p>
-                      <a:pPr algn="ctr"/>
-                      <a:r>
-                        <a:rPr sz="1600" b="0">
-                          <a:solidFill>
-                            <a:srgbClr val="202020"/>
-                          </a:solidFill>
-                          <a:latin typeface="Times New Roman"/>
-                        </a:rPr>
-                        <a:t>1.0000</a:t>
-                      </a:r>
-                    </a:p>
-                  </a:txBody>
-                  <a:tcPr marL="36576" marR="36576" marT="9144" marB="9144">
-                    <a:solidFill>
-                      <a:srgbClr val="FFFFFF"/>
-                    </a:solidFill>
-                  </a:tcPr>
-                </a:tc>
-              </a:tr>
-            </a:tbl>
-          </a:graphicData>
-        </a:graphic>
-      </p:graphicFrame>
-      <p:sp>
-        <p:nvSpPr>
-          <p:cNvPr id="12" name="Rectangle 11"/>
-          <p:cNvSpPr/>
-          <p:nvPr/>
-        </p:nvSpPr>
-        <p:spPr>
-          <a:xfrm>
-            <a:off x="8138160" y="2240280"/>
-            <a:ext cx="1737360" cy="1316736"/>
-          </a:xfrm>
-          <a:prstGeom prst="rect">
-            <a:avLst/>
-          </a:prstGeom>
-          <a:solidFill>
-            <a:srgbClr val="DAE6F2"/>
-          </a:solidFill>
-          <a:ln>
-            <a:solidFill>
-              <a:srgbClr val="D0D7DE"/>
-            </a:solidFill>
-          </a:ln>
-          <a:effectLst/>
-        </p:spPr>
-        <p:style>
-          <a:lnRef idx="1">
-            <a:schemeClr val="accent1"/>
-          </a:lnRef>
-          <a:fillRef idx="3">
-            <a:schemeClr val="accent1"/>
-          </a:fillRef>
-          <a:effectRef idx="2">
-            <a:schemeClr val="accent1"/>
-          </a:effectRef>
-          <a:fontRef idx="minor">
-            <a:schemeClr val="lt1"/>
-          </a:fontRef>
-        </p:style>
-        <p:txBody>
-          <a:bodyPr rtlCol="0" anchor="ctr" wrap="square"/>
-          <a:lstStyle/>
-          <a:p>
-            <a:pPr algn="ctr"/>
-            <a:r>
-              <a:rPr sz="1700" b="1">
-                <a:solidFill>
-                  <a:srgbClr val="1F4E79"/>
-                </a:solidFill>
-                <a:latin typeface="Times New Roman"/>
-              </a:rPr>
-              <a:t>Step 3:  sum</a:t>
-            </a:r>
-          </a:p>
-          <a:p>
-            <a:pPr algn="ctr"/>
-            <a:r>
-              <a:rPr sz="1700" b="1">
-                <a:solidFill>
-                  <a:srgbClr val="1F4E79"/>
-                </a:solidFill>
-                <a:latin typeface="Times New Roman"/>
-              </a:rPr>
-              <a:t>3036.5561</a:t>
-            </a:r>
-          </a:p>
-        </p:txBody>
-      </p:sp>
-      <p:graphicFrame>
-        <p:nvGraphicFramePr>
-          <p:cNvPr id="13" name="Table 12"/>
-          <p:cNvGraphicFramePr>
-            <a:graphicFrameLocks noGrp="1"/>
-          </p:cNvGraphicFramePr>
-          <p:nvPr/>
-        </p:nvGraphicFramePr>
-        <p:xfrm>
-          <a:off x="10012680" y="2240280"/>
-          <a:ext cx="1783080" cy="1316736"/>
-        </p:xfrm>
-        <a:graphic>
-          <a:graphicData uri="http://schemas.openxmlformats.org/drawingml/2006/table">
-            <a:tbl>
-              <a:tblPr bandRow="1">
-                <a:tableStyleId>{5C22544A-7EE6-4342-B048-85BDC9FD1C3A}</a:tableStyleId>
-              </a:tblPr>
-              <a:tblGrid>
-                <a:gridCol w="1783080"/>
-              </a:tblGrid>
-              <a:tr h="329184">
-                <a:tc>
-                  <a:txBody>
-                    <a:bodyPr/>
-                    <a:lstStyle/>
-                    <a:p>
-                      <a:pPr algn="ctr"/>
-                      <a:r>
-                        <a:rPr sz="1600" b="1">
-                          <a:solidFill>
-                            <a:srgbClr val="FFFFFF"/>
-                          </a:solidFill>
-                          <a:latin typeface="Times New Roman"/>
-                        </a:rPr>
-                        <a:t>Step 4:  p</a:t>
-                      </a:r>
-                    </a:p>
-                  </a:txBody>
-                  <a:tcPr marL="36576" marR="36576" marT="9144" marB="9144">
-                    <a:solidFill>
-                      <a:srgbClr val="1F4E79"/>
-                    </a:solidFill>
-                  </a:tcPr>
-                </a:tc>
-              </a:tr>
-              <a:tr h="329184">
-                <a:tc>
-                  <a:txBody>
-                    <a:bodyPr/>
-                    <a:lstStyle/>
-                    <a:p>
-                      <a:pPr algn="ctr"/>
-                      <a:r>
-                        <a:rPr sz="1600" b="0">
-                          <a:solidFill>
-                            <a:srgbClr val="202020"/>
-                          </a:solidFill>
-                          <a:latin typeface="Times New Roman"/>
-                        </a:rPr>
-                        <a:t>0.9817</a:t>
-                      </a:r>
-                    </a:p>
-                  </a:txBody>
-                  <a:tcPr marL="36576" marR="36576" marT="9144" marB="9144">
-                    <a:solidFill>
-                      <a:srgbClr val="FFFFFF"/>
-                    </a:solidFill>
-                  </a:tcPr>
-                </a:tc>
-              </a:tr>
-              <a:tr h="329184">
-                <a:tc>
-                  <a:txBody>
-                    <a:bodyPr/>
-                    <a:lstStyle/>
-                    <a:p>
-                      <a:pPr algn="ctr"/>
-                      <a:r>
-                        <a:rPr sz="1600" b="0">
-                          <a:solidFill>
-                            <a:srgbClr val="202020"/>
-                          </a:solidFill>
-                          <a:latin typeface="Times New Roman"/>
-                        </a:rPr>
-                        <a:t>0.0180</a:t>
-                      </a:r>
-                    </a:p>
-                  </a:txBody>
-                  <a:tcPr marL="36576" marR="36576" marT="9144" marB="9144">
-                    <a:solidFill>
-                      <a:srgbClr val="FFF3CD"/>
-                    </a:solidFill>
-                  </a:tcPr>
-                </a:tc>
-              </a:tr>
-              <a:tr h="329184">
-                <a:tc>
-                  <a:txBody>
-                    <a:bodyPr/>
-                    <a:lstStyle/>
-                    <a:p>
-                      <a:pPr algn="ctr"/>
-                      <a:r>
-                        <a:rPr sz="1600" b="0">
-                          <a:solidFill>
-                            <a:srgbClr val="202020"/>
-                          </a:solidFill>
-                          <a:latin typeface="Times New Roman"/>
-                        </a:rPr>
-                        <a:t>0.0003</a:t>
-                      </a:r>
-                    </a:p>
-                  </a:txBody>
-                  <a:tcPr marL="36576" marR="36576" marT="9144" marB="9144">
-                    <a:solidFill>
-                      <a:srgbClr val="FFF3CD"/>
-                    </a:solidFill>
-                  </a:tcPr>
-                </a:tc>
-              </a:tr>
-            </a:tbl>
-          </a:graphicData>
-        </a:graphic>
-      </p:graphicFrame>
-      <p:sp>
-        <p:nvSpPr>
-          <p:cNvPr id="14" name="Rectangle 13"/>
-          <p:cNvSpPr/>
-          <p:nvPr/>
-        </p:nvSpPr>
-        <p:spPr>
-          <a:xfrm>
-            <a:off x="731520" y="3931920"/>
-            <a:ext cx="10881360" cy="1051560"/>
-          </a:xfrm>
-          <a:prstGeom prst="rect">
-            <a:avLst/>
-          </a:prstGeom>
-          <a:solidFill>
-            <a:srgbClr val="FFF3CD"/>
-          </a:solidFill>
-          <a:ln>
-            <a:solidFill>
-              <a:srgbClr val="D0D7DE"/>
-            </a:solidFill>
-          </a:ln>
-          <a:effectLst/>
-        </p:spPr>
-        <p:style>
-          <a:lnRef idx="1">
-            <a:schemeClr val="accent1"/>
-          </a:lnRef>
-          <a:fillRef idx="3">
-            <a:schemeClr val="accent1"/>
-          </a:fillRef>
-          <a:effectRef idx="2">
-            <a:schemeClr val="accent1"/>
-          </a:effectRef>
-          <a:fontRef idx="minor">
-            <a:schemeClr val="lt1"/>
-          </a:fontRef>
-        </p:style>
-        <p:txBody>
-          <a:bodyPr rtlCol="0" anchor="ctr" wrap="square"/>
-          <a:lstStyle/>
-          <a:p>
-            <a:pPr algn="just"/>
-            <a:r>
-              <a:rPr sz="1700" b="1">
-                <a:solidFill>
-                  <a:srgbClr val="C03030"/>
-                </a:solidFill>
-                <a:latin typeface="Times New Roman"/>
-              </a:rPr>
-              <a:t>The probabilities of 3 and 7 are 0.0180 and 0.0003. The information that this 2 resembles a 3 more than a 7</a:t>
-            </a:r>
-          </a:p>
-          <a:p>
-            <a:pPr algn="just"/>
-            <a:r>
-              <a:rPr sz="1700" b="1">
-                <a:solidFill>
-                  <a:srgbClr val="C03030"/>
-                </a:solidFill>
-                <a:latin typeface="Times New Roman"/>
-              </a:rPr>
-              <a:t>is present, but it has very little influence on the cross-entropy cost function.</a:t>
-            </a:r>
-          </a:p>
-        </p:txBody>
-      </p:sp>
-      <p:sp>
-        <p:nvSpPr>
-          <p:cNvPr id="15" name="TextBox 14"/>
-          <p:cNvSpPr txBox="1"/>
-          <p:nvPr/>
-        </p:nvSpPr>
-        <p:spPr>
-          <a:xfrm>
-            <a:off x="731520" y="5166360"/>
-            <a:ext cx="10881360" cy="914400"/>
-          </a:xfrm>
-          <a:prstGeom prst="rect">
-            <a:avLst/>
-          </a:prstGeom>
-          <a:noFill/>
-        </p:spPr>
-        <p:txBody>
-          <a:bodyPr wrap="square">
-            <a:spAutoFit/>
-          </a:bodyPr>
-          <a:lstStyle/>
-          <a:p>
-            <a:pPr algn="just"/>
-            <a:r>
-              <a:rPr sz="1600" b="0" i="0">
-                <a:solidFill>
-                  <a:srgbClr val="59636E"/>
-                </a:solidFill>
-                <a:latin typeface="Times New Roman"/>
-              </a:rPr>
-              <a:t>Check: exp(8) = 2980.9580, exp(4) = 54.5982, and exp(0) = 1, which sum to 3036.5561.</a:t>
-            </a:r>
-          </a:p>
-        </p:txBody>
-      </p:sp>
-    </p:spTree>
-  </p:cSld>
-  <p:clrMapOvr>
-    <a:masterClrMapping/>
-  </p:clrMapOvr>
-  <p:timing>
-    <p:tnLst>
-      <p:par>
-        <p:cTn id="1" dur="indefinite" restart="never" nodeType="tmRoot">
-          <p:childTnLst>
-            <p:seq concurrent="1" nextAc="seek">
-              <p:cTn id="2" dur="indefinite" nodeType="mainSeq">
-                <p:childTnLst>
-                  <p:par>
-                    <p:cTn id="3" fill="hold">
-                      <p:stCondLst>
-                        <p:cond delay="indefinite"/>
-                      </p:stCondLst>
-                      <p:childTnLst>
-                        <p:par>
-                          <p:cTn id="4" fill="hold">
-                            <p:stCondLst>
-                              <p:cond delay="0"/>
-                            </p:stCondLst>
-                            <p:childTnLst>
-                              <p:par>
-                                <p:cTn id="5" presetID="1" presetClass="entr" presetSubtype="0" fill="hold" grpId="0" nodeType="clickEffect">
-                                  <p:stCondLst>
-                                    <p:cond delay="0"/>
-                                  </p:stCondLst>
-                                  <p:childTnLst>
-                                    <p:set>
-                                      <p:cBhvr>
-                                        <p:cTn id="6" dur="1" fill="hold">
-                                          <p:stCondLst>
-                                            <p:cond delay="0"/>
-                                          </p:stCondLst>
-                                        </p:cTn>
-                                        <p:tgtEl>
-                                          <p:spTgt spid="6"/>
-                                        </p:tgtEl>
-                                        <p:attrNameLst>
-                                          <p:attrName>style.visibility</p:attrName>
-                                        </p:attrNameLst>
-                                      </p:cBhvr>
-                                      <p:to>
-                                        <p:strVal val="visible"/>
-                                      </p:to>
-                                    </p:set>
-                                  </p:childTnLst>
-                                </p:cTn>
-                              </p:par>
-                            </p:childTnLst>
-                          </p:cTn>
-                        </p:par>
-                      </p:childTnLst>
-                    </p:cTn>
-                  </p:par>
-                  <p:par>
-                    <p:cTn id="7" fill="hold">
-                      <p:stCondLst>
-                        <p:cond delay="indefinite"/>
-                      </p:stCondLst>
-                      <p:childTnLst>
-                        <p:par>
-                          <p:cTn id="8" fill="hold">
-                            <p:stCondLst>
-                              <p:cond delay="0"/>
-                            </p:stCondLst>
-                            <p:childTnLst>
-                              <p:par>
-                                <p:cTn id="9" presetID="1" presetClass="entr" presetSubtype="0" fill="hold" grpId="0" nodeType="clickEffect">
-                                  <p:stCondLst>
-                                    <p:cond delay="0"/>
-                                  </p:stCondLst>
-                                  <p:childTnLst>
-                                    <p:set>
-                                      <p:cBhvr>
-                                        <p:cTn id="10" dur="1" fill="hold">
-                                          <p:stCondLst>
-                                            <p:cond delay="0"/>
-                                          </p:stCondLst>
-                                        </p:cTn>
-                                        <p:tgtEl>
-                                          <p:spTgt spid="7"/>
-                                        </p:tgtEl>
-                                        <p:attrNameLst>
-                                          <p:attrName>style.visibility</p:attrName>
-                                        </p:attrNameLst>
-                                      </p:cBhvr>
-                                      <p:to>
-                                        <p:strVal val="visible"/>
-                                      </p:to>
-                                    </p:set>
-                                  </p:childTnLst>
-                                </p:cTn>
-                              </p:par>
-                            </p:childTnLst>
-                          </p:cTn>
-                        </p:par>
-                      </p:childTnLst>
-                    </p:cTn>
-                  </p:par>
-                  <p:par>
-                    <p:cTn id="11" fill="hold">
-                      <p:stCondLst>
-                        <p:cond delay="indefinite"/>
-                      </p:stCondLst>
-                      <p:childTnLst>
-                        <p:par>
-                          <p:cTn id="12" fill="hold">
-                            <p:stCondLst>
-                              <p:cond delay="0"/>
-                            </p:stCondLst>
-                            <p:childTnLst>
-                              <p:par>
-                                <p:cTn id="13" presetID="1" presetClass="entr" presetSubtype="0" fill="hold" grpId="0" nodeType="clickEffect">
-                                  <p:stCondLst>
-                                    <p:cond delay="0"/>
-                                  </p:stCondLst>
-                                  <p:childTnLst>
-                                    <p:set>
-                                      <p:cBhvr>
-                                        <p:cTn id="14" dur="1" fill="hold">
-                                          <p:stCondLst>
-                                            <p:cond delay="0"/>
-                                          </p:stCondLst>
-                                        </p:cTn>
-                                        <p:tgtEl>
-                                          <p:spTgt spid="8"/>
-                                        </p:tgtEl>
-                                        <p:attrNameLst>
-                                          <p:attrName>style.visibility</p:attrName>
-                                        </p:attrNameLst>
-                                      </p:cBhvr>
-                                      <p:to>
-                                        <p:strVal val="visible"/>
-                                      </p:to>
-                                    </p:set>
-                                  </p:childTnLst>
-                                </p:cTn>
-                              </p:par>
-                            </p:childTnLst>
-                          </p:cTn>
-                        </p:par>
-                      </p:childTnLst>
-                    </p:cTn>
-                  </p:par>
-                  <p:par>
-                    <p:cTn id="15" fill="hold">
-                      <p:stCondLst>
-                        <p:cond delay="indefinite"/>
-                      </p:stCondLst>
-                      <p:childTnLst>
-                        <p:par>
-                          <p:cTn id="16" fill="hold">
-                            <p:stCondLst>
-                              <p:cond delay="0"/>
-                            </p:stCondLst>
-                            <p:childTnLst>
-                              <p:par>
-                                <p:cTn id="17" presetID="1" presetClass="entr" presetSubtype="0" fill="hold" grpId="0" nodeType="clickEffect">
-                                  <p:stCondLst>
-                                    <p:cond delay="0"/>
-                                  </p:stCondLst>
-                                  <p:childTnLst>
-                                    <p:set>
-                                      <p:cBhvr>
-                                        <p:cTn id="18" dur="1" fill="hold">
-                                          <p:stCondLst>
-                                            <p:cond delay="0"/>
-                                          </p:stCondLst>
-                                        </p:cTn>
-                                        <p:tgtEl>
-                                          <p:spTgt spid="9"/>
-                                        </p:tgtEl>
-                                        <p:attrNameLst>
-                                          <p:attrName>style.visibility</p:attrName>
-                                        </p:attrNameLst>
-                                      </p:cBhvr>
-                                      <p:to>
-                                        <p:strVal val="visible"/>
-                                      </p:to>
-                                    </p:set>
-                                  </p:childTnLst>
-                                </p:cTn>
-                              </p:par>
-                            </p:childTnLst>
-                          </p:cTn>
-                        </p:par>
-                      </p:childTnLst>
-                    </p:cTn>
-                  </p:par>
-                  <p:par>
-                    <p:cTn id="19" fill="hold">
-                      <p:stCondLst>
-                        <p:cond delay="indefinite"/>
-                      </p:stCondLst>
-                      <p:childTnLst>
-                        <p:par>
-                          <p:cTn id="20" fill="hold">
-                            <p:stCondLst>
-                              <p:cond delay="0"/>
-                            </p:stCondLst>
-                            <p:childTnLst>
-                              <p:par>
-                                <p:cTn id="21" presetID="1" presetClass="entr" presetSubtype="0" fill="hold" grpId="0" nodeType="clickEffect">
-                                  <p:stCondLst>
-                                    <p:cond delay="0"/>
-                                  </p:stCondLst>
-                                  <p:childTnLst>
-                                    <p:set>
-                                      <p:cBhvr>
-                                        <p:cTn id="22" dur="1" fill="hold">
-                                          <p:stCondLst>
-                                            <p:cond delay="0"/>
-                                          </p:stCondLst>
-                                        </p:cTn>
-                                        <p:tgtEl>
-                                          <p:spTgt spid="10"/>
-                                        </p:tgtEl>
-                                        <p:attrNameLst>
-                                          <p:attrName>style.visibility</p:attrName>
-                                        </p:attrNameLst>
-                                      </p:cBhvr>
-                                      <p:to>
-                                        <p:strVal val="visible"/>
-                                      </p:to>
-                                    </p:set>
-                                  </p:childTnLst>
-                                </p:cTn>
-                              </p:par>
-                            </p:childTnLst>
-                          </p:cTn>
-                        </p:par>
-                      </p:childTnLst>
-                    </p:cTn>
-                  </p:par>
-                  <p:par>
-                    <p:cTn id="23" fill="hold">
-                      <p:stCondLst>
-                        <p:cond delay="indefinite"/>
-                      </p:stCondLst>
-                      <p:childTnLst>
-                        <p:par>
-                          <p:cTn id="24" fill="hold">
-                            <p:stCondLst>
-                              <p:cond delay="0"/>
-                            </p:stCondLst>
-                            <p:childTnLst>
-                              <p:par>
-                                <p:cTn id="25" presetID="1" presetClass="entr" presetSubtype="0" fill="hold" grpId="0" nodeType="clickEffect">
-                                  <p:stCondLst>
-                                    <p:cond delay="0"/>
-                                  </p:stCondLst>
-                                  <p:childTnLst>
-                                    <p:set>
-                                      <p:cBhvr>
-                                        <p:cTn id="26" dur="1" fill="hold">
-                                          <p:stCondLst>
-                                            <p:cond delay="0"/>
-                                          </p:stCondLst>
-                                        </p:cTn>
-                                        <p:tgtEl>
-                                          <p:spTgt spid="11"/>
-                                        </p:tgtEl>
-                                        <p:attrNameLst>
-                                          <p:attrName>style.visibility</p:attrName>
-                                        </p:attrNameLst>
-                                      </p:cBhvr>
-                                      <p:to>
-                                        <p:strVal val="visible"/>
-                                      </p:to>
-                                    </p:set>
-                                  </p:childTnLst>
-                                </p:cTn>
-                              </p:par>
-                            </p:childTnLst>
-                          </p:cTn>
-                        </p:par>
-                      </p:childTnLst>
-                    </p:cTn>
-                  </p:par>
-                  <p:par>
-                    <p:cTn id="27" fill="hold">
-                      <p:stCondLst>
-                        <p:cond delay="indefinite"/>
-                      </p:stCondLst>
-                      <p:childTnLst>
-                        <p:par>
-                          <p:cTn id="28" fill="hold">
-                            <p:stCondLst>
-                              <p:cond delay="0"/>
-                            </p:stCondLst>
-                            <p:childTnLst>
-                              <p:par>
-                                <p:cTn id="29" presetID="1" presetClass="entr" presetSubtype="0" fill="hold" grpId="0" nodeType="clickEffect">
-                                  <p:stCondLst>
-                                    <p:cond delay="0"/>
-                                  </p:stCondLst>
-                                  <p:childTnLst>
-                                    <p:set>
-                                      <p:cBhvr>
-                                        <p:cTn id="30" dur="1" fill="hold">
-                                          <p:stCondLst>
-                                            <p:cond delay="0"/>
-                                          </p:stCondLst>
-                                        </p:cTn>
-                                        <p:tgtEl>
-                                          <p:spTgt spid="12"/>
-                                        </p:tgtEl>
-                                        <p:attrNameLst>
-                                          <p:attrName>style.visibility</p:attrName>
-                                        </p:attrNameLst>
-                                      </p:cBhvr>
-                                      <p:to>
-                                        <p:strVal val="visible"/>
-                                      </p:to>
-                                    </p:set>
-                                  </p:childTnLst>
-                                </p:cTn>
-                              </p:par>
-                            </p:childTnLst>
-                          </p:cTn>
-                        </p:par>
-                      </p:childTnLst>
-                    </p:cTn>
-                  </p:par>
-                  <p:par>
-                    <p:cTn id="31" fill="hold">
-                      <p:stCondLst>
-                        <p:cond delay="indefinite"/>
-                      </p:stCondLst>
-                      <p:childTnLst>
-                        <p:par>
-                          <p:cTn id="32" fill="hold">
-                            <p:stCondLst>
-                              <p:cond delay="0"/>
-                            </p:stCondLst>
-                            <p:childTnLst>
-                              <p:par>
-                                <p:cTn id="33" presetID="1" presetClass="entr" presetSubtype="0" fill="hold" grpId="0" nodeType="clickEffect">
-                                  <p:stCondLst>
-                                    <p:cond delay="0"/>
-                                  </p:stCondLst>
-                                  <p:childTnLst>
-                                    <p:set>
-                                      <p:cBhvr>
-                                        <p:cTn id="34" dur="1" fill="hold">
-                                          <p:stCondLst>
-                                            <p:cond delay="0"/>
-                                          </p:stCondLst>
-                                        </p:cTn>
-                                        <p:tgtEl>
-                                          <p:spTgt spid="13"/>
-                                        </p:tgtEl>
-                                        <p:attrNameLst>
-                                          <p:attrName>style.visibility</p:attrName>
-                                        </p:attrNameLst>
-                                      </p:cBhvr>
-                                      <p:to>
-                                        <p:strVal val="visible"/>
-                                      </p:to>
-                                    </p:set>
-                                  </p:childTnLst>
-                                </p:cTn>
-                              </p:par>
-                            </p:childTnLst>
-                          </p:cTn>
-                        </p:par>
-                      </p:childTnLst>
-                    </p:cTn>
-                  </p:par>
-                  <p:par>
-                    <p:cTn id="35" fill="hold">
-                      <p:stCondLst>
-                        <p:cond delay="indefinite"/>
-                      </p:stCondLst>
-                      <p:childTnLst>
-                        <p:par>
-                          <p:cTn id="36" fill="hold">
-                            <p:stCondLst>
-                              <p:cond delay="0"/>
-                            </p:stCondLst>
-                            <p:childTnLst>
-                              <p:par>
-                                <p:cTn id="37" presetID="1" presetClass="entr" presetSubtype="0" fill="hold" grpId="0" nodeType="clickEffect">
-                                  <p:stCondLst>
-                                    <p:cond delay="0"/>
-                                  </p:stCondLst>
-                                  <p:childTnLst>
-                                    <p:set>
-                                      <p:cBhvr>
-                                        <p:cTn id="38" dur="1" fill="hold">
-                                          <p:stCondLst>
-                                            <p:cond delay="0"/>
-                                          </p:stCondLst>
-                                        </p:cTn>
-                                        <p:tgtEl>
-                                          <p:spTgt spid="14"/>
-                                        </p:tgtEl>
-                                        <p:attrNameLst>
-                                          <p:attrName>style.visibility</p:attrName>
-                                        </p:attrNameLst>
-                                      </p:cBhvr>
-                                      <p:to>
-                                        <p:strVal val="visible"/>
-                                      </p:to>
-                                    </p:set>
-                                  </p:childTnLst>
-                                </p:cTn>
-                              </p:par>
-                            </p:childTnLst>
-                          </p:cTn>
-                        </p:par>
-                      </p:childTnLst>
-                    </p:cTn>
-                  </p:par>
-                  <p:par>
-                    <p:cTn id="39" fill="hold">
-                      <p:stCondLst>
-                        <p:cond delay="indefinite"/>
-                      </p:stCondLst>
-                      <p:childTnLst>
-                        <p:par>
-                          <p:cTn id="40" fill="hold">
-                            <p:stCondLst>
-                              <p:cond delay="0"/>
-                            </p:stCondLst>
-                            <p:childTnLst>
-                              <p:par>
-                                <p:cTn id="41" presetID="1" presetClass="entr" presetSubtype="0" fill="hold" grpId="0" nodeType="clickEffect">
-                                  <p:stCondLst>
-                                    <p:cond delay="0"/>
-                                  </p:stCondLst>
-                                  <p:childTnLst>
-                                    <p:set>
-                                      <p:cBhvr>
-                                        <p:cTn id="42" dur="1" fill="hold">
-                                          <p:stCondLst>
-                                            <p:cond delay="0"/>
-                                          </p:stCondLst>
-                                        </p:cTn>
-                                        <p:tgtEl>
-                                          <p:spTgt spid="15"/>
-                                        </p:tgtEl>
-                                        <p:attrNameLst>
-                                          <p:attrName>style.visibility</p:attrName>
-                                        </p:attrNameLst>
-                                      </p:cBhvr>
-                                      <p:to>
-                                        <p:strVal val="visible"/>
-                                      </p:to>
-                                    </p:set>
-                                  </p:childTnLst>
-                                </p:cTn>
-                              </p:par>
-                            </p:childTnLst>
-                          </p:cTn>
-                        </p:par>
-                      </p:childTnLst>
-                    </p:cTn>
-                  </p:par>
-                </p:childTnLst>
-              </p:cTn>
-              <p:prevCondLst>
-                <p:cond evt="onPrev" delay="0">
-                  <p:tgtEl>
-                    <p:sldTgt/>
-                  </p:tgtEl>
-                </p:cond>
-              </p:prevCondLst>
-              <p:nextCondLst>
-                <p:cond evt="onNext" delay="0">
-                  <p:tgtEl>
-                    <p:sldTgt/>
-                  </p:tgtEl>
-                </p:cond>
-              </p:nextCondLst>
-            </p:seq>
-          </p:childTnLst>
-        </p:cTn>
-      </p:par>
-    </p:tnLst>
-    <p:bldLst>
-      <p:bldP spid="6" grpId="0" animBg="1"/>
-      <p:bldP spid="7" grpId="0" animBg="1"/>
-      <p:bldGraphic spid="8" grpId="0">
-        <p:bldAsOne/>
-      </p:bldGraphic>
-      <p:bldGraphic spid="9" grpId="0">
-        <p:bldAsOne/>
-      </p:bldGraphic>
-      <p:bldGraphic spid="10" grpId="0">
-        <p:bldAsOne/>
-      </p:bldGraphic>
-      <p:bldGraphic spid="11" grpId="0">
-        <p:bldAsOne/>
-      </p:bldGraphic>
-      <p:bldP spid="12" grpId="0" animBg="1"/>
-      <p:bldGraphic spid="13" grpId="0">
-        <p:bldAsOne/>
-      </p:bldGraphic>
-      <p:bldP spid="14" grpId="0" animBg="1"/>
-      <p:bldP spid="15" grpId="0" animBg="1"/>
-    </p:bldLst>
-  </p:timing>
-</p:sld>
-</file>
-
 <file path=ppt/slides/slide9.xml><?xml version="1.0" encoding="utf-8"?>
 <p:sld xmlns:a="http://schemas.openxmlformats.org/drawingml/2006/main" xmlns:p="http://schemas.openxmlformats.org/presentationml/2006/main" xmlns:r="http://schemas.openxmlformats.org/officeDocument/2006/relationships">
   <p:cSld>
@@ -26178,7 +27456,7 @@
                 </a:solidFill>
                 <a:latin typeface="Times New Roman"/>
               </a:rPr>
-              <a:t>2. Softmax with a temperature: T = 4</a:t>
+              <a:t>2. Softmax with a temperature: T = 1</a:t>
             </a:r>
           </a:p>
         </p:txBody>
@@ -26213,7 +27491,7 @@
                 </a:solidFill>
                 <a:latin typeface="Times New Roman"/>
               </a:rPr>
-              <a:t>The same logits of the cumbersome model at a higher temperature</a:t>
+              <a:t>Eq. 1 of the paper; T is normally set to 1</a:t>
             </a:r>
           </a:p>
         </p:txBody>
@@ -26272,7 +27550,7 @@
                 </a:solidFill>
                 <a:latin typeface="Times New Roman"/>
               </a:rPr>
-              <a:t>Using a higher value for T produces a softer probability distribution over classes: Step 1 reduces the differences between the logits by a factor of 4.</a:t>
+              <a:t>The softmax converts the logit z_i computed for each class into a probability q_i by comparing z_i with the other logits; T is a temperature.</a:t>
             </a:r>
           </a:p>
         </p:txBody>
@@ -26587,7 +27865,7 @@
                           </a:solidFill>
                           <a:latin typeface="Times New Roman"/>
                         </a:rPr>
-                        <a:t>2.0000</a:t>
+                        <a:t>8.0000</a:t>
                       </a:r>
                     </a:p>
                   </a:txBody>
@@ -26612,7 +27890,7 @@
                           </a:solidFill>
                           <a:latin typeface="Times New Roman"/>
                         </a:rPr>
-                        <a:t>1.0000</a:t>
+                        <a:t>4.0000</a:t>
                       </a:r>
                     </a:p>
                   </a:txBody>
@@ -26712,7 +27990,7 @@
                           </a:solidFill>
                           <a:latin typeface="Times New Roman"/>
                         </a:rPr>
-                        <a:t>7.3891</a:t>
+                        <a:t>2980.9580</a:t>
                       </a:r>
                     </a:p>
                   </a:txBody>
@@ -26737,7 +28015,7 @@
                           </a:solidFill>
                           <a:latin typeface="Times New Roman"/>
                         </a:rPr>
-                        <a:t>2.7183</a:t>
+                        <a:t>54.5982</a:t>
                       </a:r>
                     </a:p>
                   </a:txBody>
@@ -26839,7 +28117,7 @@
                 </a:solidFill>
                 <a:latin typeface="Times New Roman"/>
               </a:rPr>
-              <a:t>11.1073</a:t>
+              <a:t>3036.5561</a:t>
             </a:r>
           </a:p>
         </p:txBody>
@@ -26904,7 +28182,7 @@
                           </a:solidFill>
                           <a:latin typeface="Times New Roman"/>
                         </a:rPr>
-                        <a:t>0.6652</a:t>
+                        <a:t>0.9817</a:t>
                       </a:r>
                     </a:p>
                   </a:txBody>
@@ -26929,7 +28207,7 @@
                           </a:solidFill>
                           <a:latin typeface="Times New Roman"/>
                         </a:rPr>
-                        <a:t>0.2447</a:t>
+                        <a:t>0.0180</a:t>
                       </a:r>
                     </a:p>
                   </a:txBody>
@@ -26954,7 +28232,7 @@
                           </a:solidFill>
                           <a:latin typeface="Times New Roman"/>
                         </a:rPr>
-                        <a:t>0.0900</a:t>
+                        <a:t>0.0003</a:t>
                       </a:r>
                     </a:p>
                   </a:txBody>
@@ -26984,7 +28262,7 @@
             <a:avLst/>
           </a:prstGeom>
           <a:solidFill>
-            <a:srgbClr val="DCF0E4"/>
+            <a:srgbClr val="FFF3CD"/>
           </a:solidFill>
           <a:ln>
             <a:solidFill>
@@ -27015,11 +28293,11 @@
             <a:r>
               <a:rPr sz="1700" b="1">
                 <a:solidFill>
-                  <a:srgbClr val="1E7A45"/>
+                  <a:srgbClr val="C03030"/>
                 </a:solidFill>
                 <a:latin typeface="Times New Roman"/>
               </a:rPr>
-              <a:t>The probabilities of 3 and 7 become 0.2447 and 0.0900.</a:t>
+              <a:t>The probabilities of 3 and 7 are 0.0180 and 0.0003. The information that this 2 resembles a 3 more than a 7</a:t>
             </a:r>
           </a:p>
           <a:p>
@@ -27027,11 +28305,11 @@
             <a:r>
               <a:rPr sz="1700" b="1">
                 <a:solidFill>
-                  <a:srgbClr val="1E7A45"/>
+                  <a:srgbClr val="C03030"/>
                 </a:solidFill>
                 <a:latin typeface="Times New Roman"/>
               </a:rPr>
-              <a:t>At this temperature, the relative probabilities of the incorrect classes are large enough to influence learning.</a:t>
+              <a:t>is present, but it has very little influence on the cross-entropy cost function.</a:t>
             </a:r>
           </a:p>
         </p:txBody>
@@ -27066,7 +28344,7 @@
                 </a:solidFill>
                 <a:latin typeface="Times New Roman"/>
               </a:rPr>
-              <a:t>Check: exp(2) = 7.3891, exp(1) = 2.7183, and exp(0) = 1, which sum to 11.1073.</a:t>
+              <a:t>Check: exp(8) = 2980.9580, exp(4) = 54.5982, and exp(0) = 1, which sum to 3036.5561.</a:t>
             </a:r>
           </a:p>
         </p:txBody>

--- a/topics/knowledge-distillation/Knowledge_Distillation_slides_EN.pptx
+++ b/topics/knowledge-distillation/Knowledge_Distillation_slides_EN.pptx
@@ -27,6 +27,7 @@
     <p:sldId id="275" r:id="rId26"/>
     <p:sldId id="276" r:id="rId27"/>
     <p:sldId id="277" r:id="rId28"/>
+    <p:sldId id="278" r:id="rId29"/>
   </p:sldIdLst>
   <p:sldSz cx="12191695" cy="6858000" type="screen4x3"/>
   <p:notesSz cx="6858000" cy="9144000"/>
@@ -3610,7 +3611,7 @@
                 </a:solidFill>
                 <a:latin typeface="Times New Roman"/>
               </a:rPr>
-              <a:t>2. Softmax with a temperature: T = 4</a:t>
+              <a:t>2. Softmax with a temperature: T = 1</a:t>
             </a:r>
           </a:p>
         </p:txBody>
@@ -3645,7 +3646,7 @@
                 </a:solidFill>
                 <a:latin typeface="Times New Roman"/>
               </a:rPr>
-              <a:t>The same logits of the cumbersome model at a higher temperature</a:t>
+              <a:t>Eq. 1 of the paper; T is normally set to 1</a:t>
             </a:r>
           </a:p>
         </p:txBody>
@@ -3704,7 +3705,7 @@
                 </a:solidFill>
                 <a:latin typeface="Times New Roman"/>
               </a:rPr>
-              <a:t>Using a higher value for T produces a softer probability distribution over classes: Step 1 reduces the differences between the logits by a factor of 4.</a:t>
+              <a:t>The softmax converts the logit z_i computed for each class into a probability q_i by comparing z_i with the other logits; T is a temperature.</a:t>
             </a:r>
           </a:p>
         </p:txBody>
@@ -4019,7 +4020,7 @@
                           </a:solidFill>
                           <a:latin typeface="Times New Roman"/>
                         </a:rPr>
-                        <a:t>2.0000</a:t>
+                        <a:t>8.0000</a:t>
                       </a:r>
                     </a:p>
                   </a:txBody>
@@ -4044,7 +4045,7 @@
                           </a:solidFill>
                           <a:latin typeface="Times New Roman"/>
                         </a:rPr>
-                        <a:t>1.0000</a:t>
+                        <a:t>4.0000</a:t>
                       </a:r>
                     </a:p>
                   </a:txBody>
@@ -4144,7 +4145,7 @@
                           </a:solidFill>
                           <a:latin typeface="Times New Roman"/>
                         </a:rPr>
-                        <a:t>7.3891</a:t>
+                        <a:t>2980.9580</a:t>
                       </a:r>
                     </a:p>
                   </a:txBody>
@@ -4169,7 +4170,7 @@
                           </a:solidFill>
                           <a:latin typeface="Times New Roman"/>
                         </a:rPr>
-                        <a:t>2.7183</a:t>
+                        <a:t>54.5982</a:t>
                       </a:r>
                     </a:p>
                   </a:txBody>
@@ -4271,7 +4272,7 @@
                 </a:solidFill>
                 <a:latin typeface="Times New Roman"/>
               </a:rPr>
-              <a:t>11.1073</a:t>
+              <a:t>3036.5561</a:t>
             </a:r>
           </a:p>
         </p:txBody>
@@ -4336,7 +4337,7 @@
                           </a:solidFill>
                           <a:latin typeface="Times New Roman"/>
                         </a:rPr>
-                        <a:t>0.6652</a:t>
+                        <a:t>0.9817</a:t>
                       </a:r>
                     </a:p>
                   </a:txBody>
@@ -4361,7 +4362,7 @@
                           </a:solidFill>
                           <a:latin typeface="Times New Roman"/>
                         </a:rPr>
-                        <a:t>0.2447</a:t>
+                        <a:t>0.0180</a:t>
                       </a:r>
                     </a:p>
                   </a:txBody>
@@ -4386,7 +4387,7 @@
                           </a:solidFill>
                           <a:latin typeface="Times New Roman"/>
                         </a:rPr>
-                        <a:t>0.0900</a:t>
+                        <a:t>0.0003</a:t>
                       </a:r>
                     </a:p>
                   </a:txBody>
@@ -4416,7 +4417,7 @@
             <a:avLst/>
           </a:prstGeom>
           <a:solidFill>
-            <a:srgbClr val="DCF0E4"/>
+            <a:srgbClr val="FFF3CD"/>
           </a:solidFill>
           <a:ln>
             <a:solidFill>
@@ -4447,11 +4448,11 @@
             <a:r>
               <a:rPr sz="1700" b="1">
                 <a:solidFill>
-                  <a:srgbClr val="1E7A45"/>
+                  <a:srgbClr val="C03030"/>
                 </a:solidFill>
                 <a:latin typeface="Times New Roman"/>
               </a:rPr>
-              <a:t>The probabilities of 3 and 7 become 0.2447 and 0.0900.</a:t>
+              <a:t>The probabilities of 3 and 7 are 0.0180 and 0.0003. The information that this 2 resembles a 3 more than a 7</a:t>
             </a:r>
           </a:p>
           <a:p>
@@ -4459,11 +4460,11 @@
             <a:r>
               <a:rPr sz="1700" b="1">
                 <a:solidFill>
-                  <a:srgbClr val="1E7A45"/>
+                  <a:srgbClr val="C03030"/>
                 </a:solidFill>
                 <a:latin typeface="Times New Roman"/>
               </a:rPr>
-              <a:t>At this temperature, the relative probabilities of the incorrect classes are large enough to influence learning.</a:t>
+              <a:t>is present, but it has very little influence on the cross-entropy cost function.</a:t>
             </a:r>
           </a:p>
         </p:txBody>
@@ -4498,7 +4499,7 @@
                 </a:solidFill>
                 <a:latin typeface="Times New Roman"/>
               </a:rPr>
-              <a:t>Check: exp(2) = 7.3891, exp(1) = 2.7183, and exp(0) = 1, which sum to 11.1073.</a:t>
+              <a:t>Check: exp(8) = 2980.9580, exp(4) = 54.5982, and exp(0) = 1, which sum to 3036.5561.</a:t>
             </a:r>
           </a:p>
         </p:txBody>
@@ -5141,6 +5142,1537 @@
                 </a:solidFill>
                 <a:latin typeface="Times New Roman"/>
               </a:rPr>
+              <a:t>2. Softmax with a temperature: T = 4</a:t>
+            </a:r>
+          </a:p>
+        </p:txBody>
+      </p:sp>
+      <p:sp>
+        <p:nvSpPr>
+          <p:cNvPr id="5" name="TextBox 4"/>
+          <p:cNvSpPr txBox="1"/>
+          <p:nvPr/>
+        </p:nvSpPr>
+        <p:spPr>
+          <a:xfrm>
+            <a:off x="411480" y="521207"/>
+            <a:ext cx="11338560" cy="301752"/>
+          </a:xfrm>
+          <a:prstGeom prst="rect">
+            <a:avLst/>
+          </a:prstGeom>
+          <a:noFill/>
+        </p:spPr>
+        <p:txBody>
+          <a:bodyPr wrap="square">
+            <a:spAutoFit/>
+          </a:bodyPr>
+          <a:lstStyle/>
+          <a:p>
+            <a:pPr algn="just"/>
+            <a:r>
+              <a:rPr sz="1400" b="0" i="0">
+                <a:solidFill>
+                  <a:srgbClr val="C7D6E5"/>
+                </a:solidFill>
+                <a:latin typeface="Times New Roman"/>
+              </a:rPr>
+              <a:t>The same logits of the cumbersome model at a higher temperature</a:t>
+            </a:r>
+          </a:p>
+        </p:txBody>
+      </p:sp>
+      <p:pic>
+        <p:nvPicPr>
+          <p:cNvPr id="6" name="Picture 5" descr="m_softmax.png"/>
+          <p:cNvPicPr>
+            <a:picLocks noChangeAspect="1"/>
+          </p:cNvPicPr>
+          <p:nvPr/>
+        </p:nvPicPr>
+        <p:blipFill>
+          <a:blip r:embed="rId2"/>
+          <a:stretch>
+            <a:fillRect/>
+          </a:stretch>
+        </p:blipFill>
+        <p:spPr>
+          <a:xfrm>
+            <a:off x="822960" y="1051560"/>
+            <a:ext cx="1834822" cy="868680"/>
+          </a:xfrm>
+          <a:prstGeom prst="rect">
+            <a:avLst/>
+          </a:prstGeom>
+        </p:spPr>
+      </p:pic>
+      <p:sp>
+        <p:nvSpPr>
+          <p:cNvPr id="7" name="TextBox 6"/>
+          <p:cNvSpPr txBox="1"/>
+          <p:nvPr/>
+        </p:nvSpPr>
+        <p:spPr>
+          <a:xfrm>
+            <a:off x="4754880" y="1097280"/>
+            <a:ext cx="6949440" cy="914400"/>
+          </a:xfrm>
+          <a:prstGeom prst="rect">
+            <a:avLst/>
+          </a:prstGeom>
+          <a:noFill/>
+        </p:spPr>
+        <p:txBody>
+          <a:bodyPr wrap="square">
+            <a:spAutoFit/>
+          </a:bodyPr>
+          <a:lstStyle/>
+          <a:p>
+            <a:pPr algn="just"/>
+            <a:r>
+              <a:rPr sz="1700" b="0" i="0">
+                <a:solidFill>
+                  <a:srgbClr val="202020"/>
+                </a:solidFill>
+                <a:latin typeface="Times New Roman"/>
+              </a:rPr>
+              <a:t>Using a higher value for T produces a softer probability distribution over classes: Step 1 reduces the differences between the logits by a factor of 4.</a:t>
+            </a:r>
+          </a:p>
+        </p:txBody>
+      </p:sp>
+      <p:graphicFrame>
+        <p:nvGraphicFramePr>
+          <p:cNvPr id="8" name="Table 7"/>
+          <p:cNvGraphicFramePr>
+            <a:graphicFrameLocks noGrp="1"/>
+          </p:cNvGraphicFramePr>
+          <p:nvPr/>
+        </p:nvGraphicFramePr>
+        <p:xfrm>
+          <a:off x="731520" y="2240280"/>
+          <a:ext cx="1188720" cy="1316736"/>
+        </p:xfrm>
+        <a:graphic>
+          <a:graphicData uri="http://schemas.openxmlformats.org/drawingml/2006/table">
+            <a:tbl>
+              <a:tblPr bandRow="1">
+                <a:tableStyleId>{5C22544A-7EE6-4342-B048-85BDC9FD1C3A}</a:tableStyleId>
+              </a:tblPr>
+              <a:tblGrid>
+                <a:gridCol w="1188720"/>
+              </a:tblGrid>
+              <a:tr h="329184">
+                <a:tc>
+                  <a:txBody>
+                    <a:bodyPr/>
+                    <a:lstStyle/>
+                    <a:p>
+                      <a:pPr algn="ctr"/>
+                      <a:r>
+                        <a:rPr sz="1600" b="1">
+                          <a:solidFill>
+                            <a:srgbClr val="FFFFFF"/>
+                          </a:solidFill>
+                          <a:latin typeface="Times New Roman"/>
+                        </a:rPr>
+                        <a:t>Class</a:t>
+                      </a:r>
+                    </a:p>
+                  </a:txBody>
+                  <a:tcPr marL="36576" marR="36576" marT="9144" marB="9144">
+                    <a:solidFill>
+                      <a:srgbClr val="1F4E79"/>
+                    </a:solidFill>
+                  </a:tcPr>
+                </a:tc>
+              </a:tr>
+              <a:tr h="329184">
+                <a:tc>
+                  <a:txBody>
+                    <a:bodyPr/>
+                    <a:lstStyle/>
+                    <a:p>
+                      <a:pPr algn="ctr"/>
+                      <a:r>
+                        <a:rPr sz="1600" b="0">
+                          <a:solidFill>
+                            <a:srgbClr val="202020"/>
+                          </a:solidFill>
+                          <a:latin typeface="Times New Roman"/>
+                        </a:rPr>
+                        <a:t>2</a:t>
+                      </a:r>
+                    </a:p>
+                  </a:txBody>
+                  <a:tcPr marL="36576" marR="36576" marT="9144" marB="9144">
+                    <a:solidFill>
+                      <a:srgbClr val="FFFFFF"/>
+                    </a:solidFill>
+                  </a:tcPr>
+                </a:tc>
+              </a:tr>
+              <a:tr h="329184">
+                <a:tc>
+                  <a:txBody>
+                    <a:bodyPr/>
+                    <a:lstStyle/>
+                    <a:p>
+                      <a:pPr algn="ctr"/>
+                      <a:r>
+                        <a:rPr sz="1600" b="0">
+                          <a:solidFill>
+                            <a:srgbClr val="202020"/>
+                          </a:solidFill>
+                          <a:latin typeface="Times New Roman"/>
+                        </a:rPr>
+                        <a:t>3</a:t>
+                      </a:r>
+                    </a:p>
+                  </a:txBody>
+                  <a:tcPr marL="36576" marR="36576" marT="9144" marB="9144">
+                    <a:solidFill>
+                      <a:srgbClr val="FFFFFF"/>
+                    </a:solidFill>
+                  </a:tcPr>
+                </a:tc>
+              </a:tr>
+              <a:tr h="329184">
+                <a:tc>
+                  <a:txBody>
+                    <a:bodyPr/>
+                    <a:lstStyle/>
+                    <a:p>
+                      <a:pPr algn="ctr"/>
+                      <a:r>
+                        <a:rPr sz="1600" b="0">
+                          <a:solidFill>
+                            <a:srgbClr val="202020"/>
+                          </a:solidFill>
+                          <a:latin typeface="Times New Roman"/>
+                        </a:rPr>
+                        <a:t>7</a:t>
+                      </a:r>
+                    </a:p>
+                  </a:txBody>
+                  <a:tcPr marL="36576" marR="36576" marT="9144" marB="9144">
+                    <a:solidFill>
+                      <a:srgbClr val="FFFFFF"/>
+                    </a:solidFill>
+                  </a:tcPr>
+                </a:tc>
+              </a:tr>
+            </a:tbl>
+          </a:graphicData>
+        </a:graphic>
+      </p:graphicFrame>
+      <p:graphicFrame>
+        <p:nvGraphicFramePr>
+          <p:cNvPr id="9" name="Table 8"/>
+          <p:cNvGraphicFramePr>
+            <a:graphicFrameLocks noGrp="1"/>
+          </p:cNvGraphicFramePr>
+          <p:nvPr/>
+        </p:nvGraphicFramePr>
+        <p:xfrm>
+          <a:off x="2057400" y="2240280"/>
+          <a:ext cx="1463040" cy="1316736"/>
+        </p:xfrm>
+        <a:graphic>
+          <a:graphicData uri="http://schemas.openxmlformats.org/drawingml/2006/table">
+            <a:tbl>
+              <a:tblPr bandRow="1">
+                <a:tableStyleId>{5C22544A-7EE6-4342-B048-85BDC9FD1C3A}</a:tableStyleId>
+              </a:tblPr>
+              <a:tblGrid>
+                <a:gridCol w="1463040"/>
+              </a:tblGrid>
+              <a:tr h="329184">
+                <a:tc>
+                  <a:txBody>
+                    <a:bodyPr/>
+                    <a:lstStyle/>
+                    <a:p>
+                      <a:pPr algn="ctr"/>
+                      <a:r>
+                        <a:rPr sz="1600" b="1">
+                          <a:solidFill>
+                            <a:srgbClr val="FFFFFF"/>
+                          </a:solidFill>
+                          <a:latin typeface="Times New Roman"/>
+                        </a:rPr>
+                        <a:t>v</a:t>
+                      </a:r>
+                    </a:p>
+                  </a:txBody>
+                  <a:tcPr marL="36576" marR="36576" marT="9144" marB="9144">
+                    <a:solidFill>
+                      <a:srgbClr val="1F4E79"/>
+                    </a:solidFill>
+                  </a:tcPr>
+                </a:tc>
+              </a:tr>
+              <a:tr h="329184">
+                <a:tc>
+                  <a:txBody>
+                    <a:bodyPr/>
+                    <a:lstStyle/>
+                    <a:p>
+                      <a:pPr algn="ctr"/>
+                      <a:r>
+                        <a:rPr sz="1600" b="0">
+                          <a:solidFill>
+                            <a:srgbClr val="202020"/>
+                          </a:solidFill>
+                          <a:latin typeface="Times New Roman"/>
+                        </a:rPr>
+                        <a:t>8</a:t>
+                      </a:r>
+                    </a:p>
+                  </a:txBody>
+                  <a:tcPr marL="36576" marR="36576" marT="9144" marB="9144">
+                    <a:solidFill>
+                      <a:srgbClr val="FFFFFF"/>
+                    </a:solidFill>
+                  </a:tcPr>
+                </a:tc>
+              </a:tr>
+              <a:tr h="329184">
+                <a:tc>
+                  <a:txBody>
+                    <a:bodyPr/>
+                    <a:lstStyle/>
+                    <a:p>
+                      <a:pPr algn="ctr"/>
+                      <a:r>
+                        <a:rPr sz="1600" b="0">
+                          <a:solidFill>
+                            <a:srgbClr val="202020"/>
+                          </a:solidFill>
+                          <a:latin typeface="Times New Roman"/>
+                        </a:rPr>
+                        <a:t>4</a:t>
+                      </a:r>
+                    </a:p>
+                  </a:txBody>
+                  <a:tcPr marL="36576" marR="36576" marT="9144" marB="9144">
+                    <a:solidFill>
+                      <a:srgbClr val="FFFFFF"/>
+                    </a:solidFill>
+                  </a:tcPr>
+                </a:tc>
+              </a:tr>
+              <a:tr h="329184">
+                <a:tc>
+                  <a:txBody>
+                    <a:bodyPr/>
+                    <a:lstStyle/>
+                    <a:p>
+                      <a:pPr algn="ctr"/>
+                      <a:r>
+                        <a:rPr sz="1600" b="0">
+                          <a:solidFill>
+                            <a:srgbClr val="202020"/>
+                          </a:solidFill>
+                          <a:latin typeface="Times New Roman"/>
+                        </a:rPr>
+                        <a:t>0</a:t>
+                      </a:r>
+                    </a:p>
+                  </a:txBody>
+                  <a:tcPr marL="36576" marR="36576" marT="9144" marB="9144">
+                    <a:solidFill>
+                      <a:srgbClr val="FFFFFF"/>
+                    </a:solidFill>
+                  </a:tcPr>
+                </a:tc>
+              </a:tr>
+            </a:tbl>
+          </a:graphicData>
+        </a:graphic>
+      </p:graphicFrame>
+      <p:graphicFrame>
+        <p:nvGraphicFramePr>
+          <p:cNvPr id="10" name="Table 9"/>
+          <p:cNvGraphicFramePr>
+            <a:graphicFrameLocks noGrp="1"/>
+          </p:cNvGraphicFramePr>
+          <p:nvPr/>
+        </p:nvGraphicFramePr>
+        <p:xfrm>
+          <a:off x="3657600" y="2240280"/>
+          <a:ext cx="1965960" cy="1316736"/>
+        </p:xfrm>
+        <a:graphic>
+          <a:graphicData uri="http://schemas.openxmlformats.org/drawingml/2006/table">
+            <a:tbl>
+              <a:tblPr bandRow="1">
+                <a:tableStyleId>{5C22544A-7EE6-4342-B048-85BDC9FD1C3A}</a:tableStyleId>
+              </a:tblPr>
+              <a:tblGrid>
+                <a:gridCol w="1965960"/>
+              </a:tblGrid>
+              <a:tr h="329184">
+                <a:tc>
+                  <a:txBody>
+                    <a:bodyPr/>
+                    <a:lstStyle/>
+                    <a:p>
+                      <a:pPr algn="ctr"/>
+                      <a:r>
+                        <a:rPr sz="1600" b="1">
+                          <a:solidFill>
+                            <a:srgbClr val="FFFFFF"/>
+                          </a:solidFill>
+                          <a:latin typeface="Times New Roman"/>
+                        </a:rPr>
+                        <a:t>Step 1:  ÷ T</a:t>
+                      </a:r>
+                    </a:p>
+                  </a:txBody>
+                  <a:tcPr marL="36576" marR="36576" marT="9144" marB="9144">
+                    <a:solidFill>
+                      <a:srgbClr val="1F4E79"/>
+                    </a:solidFill>
+                  </a:tcPr>
+                </a:tc>
+              </a:tr>
+              <a:tr h="329184">
+                <a:tc>
+                  <a:txBody>
+                    <a:bodyPr/>
+                    <a:lstStyle/>
+                    <a:p>
+                      <a:pPr algn="ctr"/>
+                      <a:r>
+                        <a:rPr sz="1600" b="0">
+                          <a:solidFill>
+                            <a:srgbClr val="202020"/>
+                          </a:solidFill>
+                          <a:latin typeface="Times New Roman"/>
+                        </a:rPr>
+                        <a:t>2.0000</a:t>
+                      </a:r>
+                    </a:p>
+                  </a:txBody>
+                  <a:tcPr marL="36576" marR="36576" marT="9144" marB="9144">
+                    <a:solidFill>
+                      <a:srgbClr val="FFFFFF"/>
+                    </a:solidFill>
+                  </a:tcPr>
+                </a:tc>
+              </a:tr>
+              <a:tr h="329184">
+                <a:tc>
+                  <a:txBody>
+                    <a:bodyPr/>
+                    <a:lstStyle/>
+                    <a:p>
+                      <a:pPr algn="ctr"/>
+                      <a:r>
+                        <a:rPr sz="1600" b="0">
+                          <a:solidFill>
+                            <a:srgbClr val="202020"/>
+                          </a:solidFill>
+                          <a:latin typeface="Times New Roman"/>
+                        </a:rPr>
+                        <a:t>1.0000</a:t>
+                      </a:r>
+                    </a:p>
+                  </a:txBody>
+                  <a:tcPr marL="36576" marR="36576" marT="9144" marB="9144">
+                    <a:solidFill>
+                      <a:srgbClr val="FFFFFF"/>
+                    </a:solidFill>
+                  </a:tcPr>
+                </a:tc>
+              </a:tr>
+              <a:tr h="329184">
+                <a:tc>
+                  <a:txBody>
+                    <a:bodyPr/>
+                    <a:lstStyle/>
+                    <a:p>
+                      <a:pPr algn="ctr"/>
+                      <a:r>
+                        <a:rPr sz="1600" b="0">
+                          <a:solidFill>
+                            <a:srgbClr val="202020"/>
+                          </a:solidFill>
+                          <a:latin typeface="Times New Roman"/>
+                        </a:rPr>
+                        <a:t>0.0000</a:t>
+                      </a:r>
+                    </a:p>
+                  </a:txBody>
+                  <a:tcPr marL="36576" marR="36576" marT="9144" marB="9144">
+                    <a:solidFill>
+                      <a:srgbClr val="FFFFFF"/>
+                    </a:solidFill>
+                  </a:tcPr>
+                </a:tc>
+              </a:tr>
+            </a:tbl>
+          </a:graphicData>
+        </a:graphic>
+      </p:graphicFrame>
+      <p:graphicFrame>
+        <p:nvGraphicFramePr>
+          <p:cNvPr id="11" name="Table 10"/>
+          <p:cNvGraphicFramePr>
+            <a:graphicFrameLocks noGrp="1"/>
+          </p:cNvGraphicFramePr>
+          <p:nvPr/>
+        </p:nvGraphicFramePr>
+        <p:xfrm>
+          <a:off x="5760720" y="2240280"/>
+          <a:ext cx="2240279" cy="1316736"/>
+        </p:xfrm>
+        <a:graphic>
+          <a:graphicData uri="http://schemas.openxmlformats.org/drawingml/2006/table">
+            <a:tbl>
+              <a:tblPr bandRow="1">
+                <a:tableStyleId>{5C22544A-7EE6-4342-B048-85BDC9FD1C3A}</a:tableStyleId>
+              </a:tblPr>
+              <a:tblGrid>
+                <a:gridCol w="2240279"/>
+              </a:tblGrid>
+              <a:tr h="329184">
+                <a:tc>
+                  <a:txBody>
+                    <a:bodyPr/>
+                    <a:lstStyle/>
+                    <a:p>
+                      <a:pPr algn="ctr"/>
+                      <a:r>
+                        <a:rPr sz="1600" b="1">
+                          <a:solidFill>
+                            <a:srgbClr val="FFFFFF"/>
+                          </a:solidFill>
+                          <a:latin typeface="Times New Roman"/>
+                        </a:rPr>
+                        <a:t>Step 2:  exp</a:t>
+                      </a:r>
+                    </a:p>
+                  </a:txBody>
+                  <a:tcPr marL="36576" marR="36576" marT="9144" marB="9144">
+                    <a:solidFill>
+                      <a:srgbClr val="1F4E79"/>
+                    </a:solidFill>
+                  </a:tcPr>
+                </a:tc>
+              </a:tr>
+              <a:tr h="329184">
+                <a:tc>
+                  <a:txBody>
+                    <a:bodyPr/>
+                    <a:lstStyle/>
+                    <a:p>
+                      <a:pPr algn="ctr"/>
+                      <a:r>
+                        <a:rPr sz="1600" b="0">
+                          <a:solidFill>
+                            <a:srgbClr val="202020"/>
+                          </a:solidFill>
+                          <a:latin typeface="Times New Roman"/>
+                        </a:rPr>
+                        <a:t>7.3891</a:t>
+                      </a:r>
+                    </a:p>
+                  </a:txBody>
+                  <a:tcPr marL="36576" marR="36576" marT="9144" marB="9144">
+                    <a:solidFill>
+                      <a:srgbClr val="FFFFFF"/>
+                    </a:solidFill>
+                  </a:tcPr>
+                </a:tc>
+              </a:tr>
+              <a:tr h="329184">
+                <a:tc>
+                  <a:txBody>
+                    <a:bodyPr/>
+                    <a:lstStyle/>
+                    <a:p>
+                      <a:pPr algn="ctr"/>
+                      <a:r>
+                        <a:rPr sz="1600" b="0">
+                          <a:solidFill>
+                            <a:srgbClr val="202020"/>
+                          </a:solidFill>
+                          <a:latin typeface="Times New Roman"/>
+                        </a:rPr>
+                        <a:t>2.7183</a:t>
+                      </a:r>
+                    </a:p>
+                  </a:txBody>
+                  <a:tcPr marL="36576" marR="36576" marT="9144" marB="9144">
+                    <a:solidFill>
+                      <a:srgbClr val="FFFFFF"/>
+                    </a:solidFill>
+                  </a:tcPr>
+                </a:tc>
+              </a:tr>
+              <a:tr h="329184">
+                <a:tc>
+                  <a:txBody>
+                    <a:bodyPr/>
+                    <a:lstStyle/>
+                    <a:p>
+                      <a:pPr algn="ctr"/>
+                      <a:r>
+                        <a:rPr sz="1600" b="0">
+                          <a:solidFill>
+                            <a:srgbClr val="202020"/>
+                          </a:solidFill>
+                          <a:latin typeface="Times New Roman"/>
+                        </a:rPr>
+                        <a:t>1.0000</a:t>
+                      </a:r>
+                    </a:p>
+                  </a:txBody>
+                  <a:tcPr marL="36576" marR="36576" marT="9144" marB="9144">
+                    <a:solidFill>
+                      <a:srgbClr val="FFFFFF"/>
+                    </a:solidFill>
+                  </a:tcPr>
+                </a:tc>
+              </a:tr>
+            </a:tbl>
+          </a:graphicData>
+        </a:graphic>
+      </p:graphicFrame>
+      <p:sp>
+        <p:nvSpPr>
+          <p:cNvPr id="12" name="Rectangle 11"/>
+          <p:cNvSpPr/>
+          <p:nvPr/>
+        </p:nvSpPr>
+        <p:spPr>
+          <a:xfrm>
+            <a:off x="8138160" y="2240280"/>
+            <a:ext cx="1737360" cy="1316736"/>
+          </a:xfrm>
+          <a:prstGeom prst="rect">
+            <a:avLst/>
+          </a:prstGeom>
+          <a:solidFill>
+            <a:srgbClr val="DAE6F2"/>
+          </a:solidFill>
+          <a:ln>
+            <a:solidFill>
+              <a:srgbClr val="D0D7DE"/>
+            </a:solidFill>
+          </a:ln>
+          <a:effectLst/>
+        </p:spPr>
+        <p:style>
+          <a:lnRef idx="1">
+            <a:schemeClr val="accent1"/>
+          </a:lnRef>
+          <a:fillRef idx="3">
+            <a:schemeClr val="accent1"/>
+          </a:fillRef>
+          <a:effectRef idx="2">
+            <a:schemeClr val="accent1"/>
+          </a:effectRef>
+          <a:fontRef idx="minor">
+            <a:schemeClr val="lt1"/>
+          </a:fontRef>
+        </p:style>
+        <p:txBody>
+          <a:bodyPr rtlCol="0" anchor="ctr" wrap="square"/>
+          <a:lstStyle/>
+          <a:p>
+            <a:pPr algn="ctr"/>
+            <a:r>
+              <a:rPr sz="1700" b="1">
+                <a:solidFill>
+                  <a:srgbClr val="1F4E79"/>
+                </a:solidFill>
+                <a:latin typeface="Times New Roman"/>
+              </a:rPr>
+              <a:t>Step 3:  sum</a:t>
+            </a:r>
+          </a:p>
+          <a:p>
+            <a:pPr algn="ctr"/>
+            <a:r>
+              <a:rPr sz="1700" b="1">
+                <a:solidFill>
+                  <a:srgbClr val="1F4E79"/>
+                </a:solidFill>
+                <a:latin typeface="Times New Roman"/>
+              </a:rPr>
+              <a:t>11.1073</a:t>
+            </a:r>
+          </a:p>
+        </p:txBody>
+      </p:sp>
+      <p:graphicFrame>
+        <p:nvGraphicFramePr>
+          <p:cNvPr id="13" name="Table 12"/>
+          <p:cNvGraphicFramePr>
+            <a:graphicFrameLocks noGrp="1"/>
+          </p:cNvGraphicFramePr>
+          <p:nvPr/>
+        </p:nvGraphicFramePr>
+        <p:xfrm>
+          <a:off x="10012680" y="2240280"/>
+          <a:ext cx="1783080" cy="1316736"/>
+        </p:xfrm>
+        <a:graphic>
+          <a:graphicData uri="http://schemas.openxmlformats.org/drawingml/2006/table">
+            <a:tbl>
+              <a:tblPr bandRow="1">
+                <a:tableStyleId>{5C22544A-7EE6-4342-B048-85BDC9FD1C3A}</a:tableStyleId>
+              </a:tblPr>
+              <a:tblGrid>
+                <a:gridCol w="1783080"/>
+              </a:tblGrid>
+              <a:tr h="329184">
+                <a:tc>
+                  <a:txBody>
+                    <a:bodyPr/>
+                    <a:lstStyle/>
+                    <a:p>
+                      <a:pPr algn="ctr"/>
+                      <a:r>
+                        <a:rPr sz="1600" b="1">
+                          <a:solidFill>
+                            <a:srgbClr val="FFFFFF"/>
+                          </a:solidFill>
+                          <a:latin typeface="Times New Roman"/>
+                        </a:rPr>
+                        <a:t>Step 4:  p</a:t>
+                      </a:r>
+                    </a:p>
+                  </a:txBody>
+                  <a:tcPr marL="36576" marR="36576" marT="9144" marB="9144">
+                    <a:solidFill>
+                      <a:srgbClr val="1F4E79"/>
+                    </a:solidFill>
+                  </a:tcPr>
+                </a:tc>
+              </a:tr>
+              <a:tr h="329184">
+                <a:tc>
+                  <a:txBody>
+                    <a:bodyPr/>
+                    <a:lstStyle/>
+                    <a:p>
+                      <a:pPr algn="ctr"/>
+                      <a:r>
+                        <a:rPr sz="1600" b="0">
+                          <a:solidFill>
+                            <a:srgbClr val="202020"/>
+                          </a:solidFill>
+                          <a:latin typeface="Times New Roman"/>
+                        </a:rPr>
+                        <a:t>0.6652</a:t>
+                      </a:r>
+                    </a:p>
+                  </a:txBody>
+                  <a:tcPr marL="36576" marR="36576" marT="9144" marB="9144">
+                    <a:solidFill>
+                      <a:srgbClr val="FFFFFF"/>
+                    </a:solidFill>
+                  </a:tcPr>
+                </a:tc>
+              </a:tr>
+              <a:tr h="329184">
+                <a:tc>
+                  <a:txBody>
+                    <a:bodyPr/>
+                    <a:lstStyle/>
+                    <a:p>
+                      <a:pPr algn="ctr"/>
+                      <a:r>
+                        <a:rPr sz="1600" b="0">
+                          <a:solidFill>
+                            <a:srgbClr val="202020"/>
+                          </a:solidFill>
+                          <a:latin typeface="Times New Roman"/>
+                        </a:rPr>
+                        <a:t>0.2447</a:t>
+                      </a:r>
+                    </a:p>
+                  </a:txBody>
+                  <a:tcPr marL="36576" marR="36576" marT="9144" marB="9144">
+                    <a:solidFill>
+                      <a:srgbClr val="FFF3CD"/>
+                    </a:solidFill>
+                  </a:tcPr>
+                </a:tc>
+              </a:tr>
+              <a:tr h="329184">
+                <a:tc>
+                  <a:txBody>
+                    <a:bodyPr/>
+                    <a:lstStyle/>
+                    <a:p>
+                      <a:pPr algn="ctr"/>
+                      <a:r>
+                        <a:rPr sz="1600" b="0">
+                          <a:solidFill>
+                            <a:srgbClr val="202020"/>
+                          </a:solidFill>
+                          <a:latin typeface="Times New Roman"/>
+                        </a:rPr>
+                        <a:t>0.0900</a:t>
+                      </a:r>
+                    </a:p>
+                  </a:txBody>
+                  <a:tcPr marL="36576" marR="36576" marT="9144" marB="9144">
+                    <a:solidFill>
+                      <a:srgbClr val="FFF3CD"/>
+                    </a:solidFill>
+                  </a:tcPr>
+                </a:tc>
+              </a:tr>
+            </a:tbl>
+          </a:graphicData>
+        </a:graphic>
+      </p:graphicFrame>
+      <p:sp>
+        <p:nvSpPr>
+          <p:cNvPr id="14" name="Rectangle 13"/>
+          <p:cNvSpPr/>
+          <p:nvPr/>
+        </p:nvSpPr>
+        <p:spPr>
+          <a:xfrm>
+            <a:off x="731520" y="3931920"/>
+            <a:ext cx="10881360" cy="1051560"/>
+          </a:xfrm>
+          <a:prstGeom prst="rect">
+            <a:avLst/>
+          </a:prstGeom>
+          <a:solidFill>
+            <a:srgbClr val="DCF0E4"/>
+          </a:solidFill>
+          <a:ln>
+            <a:solidFill>
+              <a:srgbClr val="D0D7DE"/>
+            </a:solidFill>
+          </a:ln>
+          <a:effectLst/>
+        </p:spPr>
+        <p:style>
+          <a:lnRef idx="1">
+            <a:schemeClr val="accent1"/>
+          </a:lnRef>
+          <a:fillRef idx="3">
+            <a:schemeClr val="accent1"/>
+          </a:fillRef>
+          <a:effectRef idx="2">
+            <a:schemeClr val="accent1"/>
+          </a:effectRef>
+          <a:fontRef idx="minor">
+            <a:schemeClr val="lt1"/>
+          </a:fontRef>
+        </p:style>
+        <p:txBody>
+          <a:bodyPr rtlCol="0" anchor="ctr" wrap="square"/>
+          <a:lstStyle/>
+          <a:p>
+            <a:pPr algn="just"/>
+            <a:r>
+              <a:rPr sz="1700" b="1">
+                <a:solidFill>
+                  <a:srgbClr val="1E7A45"/>
+                </a:solidFill>
+                <a:latin typeface="Times New Roman"/>
+              </a:rPr>
+              <a:t>The probabilities of 3 and 7 become 0.2447 and 0.0900.</a:t>
+            </a:r>
+          </a:p>
+          <a:p>
+            <a:pPr algn="just"/>
+            <a:r>
+              <a:rPr sz="1700" b="1">
+                <a:solidFill>
+                  <a:srgbClr val="1E7A45"/>
+                </a:solidFill>
+                <a:latin typeface="Times New Roman"/>
+              </a:rPr>
+              <a:t>At this temperature, the relative probabilities of the incorrect classes are large enough to influence learning.</a:t>
+            </a:r>
+          </a:p>
+        </p:txBody>
+      </p:sp>
+      <p:sp>
+        <p:nvSpPr>
+          <p:cNvPr id="15" name="TextBox 14"/>
+          <p:cNvSpPr txBox="1"/>
+          <p:nvPr/>
+        </p:nvSpPr>
+        <p:spPr>
+          <a:xfrm>
+            <a:off x="731520" y="5166360"/>
+            <a:ext cx="10881360" cy="914400"/>
+          </a:xfrm>
+          <a:prstGeom prst="rect">
+            <a:avLst/>
+          </a:prstGeom>
+          <a:noFill/>
+        </p:spPr>
+        <p:txBody>
+          <a:bodyPr wrap="square">
+            <a:spAutoFit/>
+          </a:bodyPr>
+          <a:lstStyle/>
+          <a:p>
+            <a:pPr algn="just"/>
+            <a:r>
+              <a:rPr sz="1600" b="0" i="0">
+                <a:solidFill>
+                  <a:srgbClr val="59636E"/>
+                </a:solidFill>
+                <a:latin typeface="Times New Roman"/>
+              </a:rPr>
+              <a:t>Check: exp(2) = 7.3891, exp(1) = 2.7183, and exp(0) = 1, which sum to 11.1073.</a:t>
+            </a:r>
+          </a:p>
+        </p:txBody>
+      </p:sp>
+    </p:spTree>
+  </p:cSld>
+  <p:clrMapOvr>
+    <a:masterClrMapping/>
+  </p:clrMapOvr>
+  <p:timing>
+    <p:tnLst>
+      <p:par>
+        <p:cTn id="1" dur="indefinite" restart="never" nodeType="tmRoot">
+          <p:childTnLst>
+            <p:seq concurrent="1" nextAc="seek">
+              <p:cTn id="2" dur="indefinite" nodeType="mainSeq">
+                <p:childTnLst>
+                  <p:par>
+                    <p:cTn id="3" fill="hold">
+                      <p:stCondLst>
+                        <p:cond delay="indefinite"/>
+                      </p:stCondLst>
+                      <p:childTnLst>
+                        <p:par>
+                          <p:cTn id="4" fill="hold">
+                            <p:stCondLst>
+                              <p:cond delay="0"/>
+                            </p:stCondLst>
+                            <p:childTnLst>
+                              <p:par>
+                                <p:cTn id="5" presetID="1" presetClass="entr" presetSubtype="0" fill="hold" grpId="0" nodeType="clickEffect">
+                                  <p:stCondLst>
+                                    <p:cond delay="0"/>
+                                  </p:stCondLst>
+                                  <p:childTnLst>
+                                    <p:set>
+                                      <p:cBhvr>
+                                        <p:cTn id="6" dur="1" fill="hold">
+                                          <p:stCondLst>
+                                            <p:cond delay="0"/>
+                                          </p:stCondLst>
+                                        </p:cTn>
+                                        <p:tgtEl>
+                                          <p:spTgt spid="6"/>
+                                        </p:tgtEl>
+                                        <p:attrNameLst>
+                                          <p:attrName>style.visibility</p:attrName>
+                                        </p:attrNameLst>
+                                      </p:cBhvr>
+                                      <p:to>
+                                        <p:strVal val="visible"/>
+                                      </p:to>
+                                    </p:set>
+                                  </p:childTnLst>
+                                </p:cTn>
+                              </p:par>
+                            </p:childTnLst>
+                          </p:cTn>
+                        </p:par>
+                      </p:childTnLst>
+                    </p:cTn>
+                  </p:par>
+                  <p:par>
+                    <p:cTn id="7" fill="hold">
+                      <p:stCondLst>
+                        <p:cond delay="indefinite"/>
+                      </p:stCondLst>
+                      <p:childTnLst>
+                        <p:par>
+                          <p:cTn id="8" fill="hold">
+                            <p:stCondLst>
+                              <p:cond delay="0"/>
+                            </p:stCondLst>
+                            <p:childTnLst>
+                              <p:par>
+                                <p:cTn id="9" presetID="1" presetClass="entr" presetSubtype="0" fill="hold" grpId="0" nodeType="clickEffect">
+                                  <p:stCondLst>
+                                    <p:cond delay="0"/>
+                                  </p:stCondLst>
+                                  <p:childTnLst>
+                                    <p:set>
+                                      <p:cBhvr>
+                                        <p:cTn id="10" dur="1" fill="hold">
+                                          <p:stCondLst>
+                                            <p:cond delay="0"/>
+                                          </p:stCondLst>
+                                        </p:cTn>
+                                        <p:tgtEl>
+                                          <p:spTgt spid="7"/>
+                                        </p:tgtEl>
+                                        <p:attrNameLst>
+                                          <p:attrName>style.visibility</p:attrName>
+                                        </p:attrNameLst>
+                                      </p:cBhvr>
+                                      <p:to>
+                                        <p:strVal val="visible"/>
+                                      </p:to>
+                                    </p:set>
+                                  </p:childTnLst>
+                                </p:cTn>
+                              </p:par>
+                            </p:childTnLst>
+                          </p:cTn>
+                        </p:par>
+                      </p:childTnLst>
+                    </p:cTn>
+                  </p:par>
+                  <p:par>
+                    <p:cTn id="11" fill="hold">
+                      <p:stCondLst>
+                        <p:cond delay="indefinite"/>
+                      </p:stCondLst>
+                      <p:childTnLst>
+                        <p:par>
+                          <p:cTn id="12" fill="hold">
+                            <p:stCondLst>
+                              <p:cond delay="0"/>
+                            </p:stCondLst>
+                            <p:childTnLst>
+                              <p:par>
+                                <p:cTn id="13" presetID="1" presetClass="entr" presetSubtype="0" fill="hold" grpId="0" nodeType="clickEffect">
+                                  <p:stCondLst>
+                                    <p:cond delay="0"/>
+                                  </p:stCondLst>
+                                  <p:childTnLst>
+                                    <p:set>
+                                      <p:cBhvr>
+                                        <p:cTn id="14" dur="1" fill="hold">
+                                          <p:stCondLst>
+                                            <p:cond delay="0"/>
+                                          </p:stCondLst>
+                                        </p:cTn>
+                                        <p:tgtEl>
+                                          <p:spTgt spid="8"/>
+                                        </p:tgtEl>
+                                        <p:attrNameLst>
+                                          <p:attrName>style.visibility</p:attrName>
+                                        </p:attrNameLst>
+                                      </p:cBhvr>
+                                      <p:to>
+                                        <p:strVal val="visible"/>
+                                      </p:to>
+                                    </p:set>
+                                  </p:childTnLst>
+                                </p:cTn>
+                              </p:par>
+                            </p:childTnLst>
+                          </p:cTn>
+                        </p:par>
+                      </p:childTnLst>
+                    </p:cTn>
+                  </p:par>
+                  <p:par>
+                    <p:cTn id="15" fill="hold">
+                      <p:stCondLst>
+                        <p:cond delay="indefinite"/>
+                      </p:stCondLst>
+                      <p:childTnLst>
+                        <p:par>
+                          <p:cTn id="16" fill="hold">
+                            <p:stCondLst>
+                              <p:cond delay="0"/>
+                            </p:stCondLst>
+                            <p:childTnLst>
+                              <p:par>
+                                <p:cTn id="17" presetID="1" presetClass="entr" presetSubtype="0" fill="hold" grpId="0" nodeType="clickEffect">
+                                  <p:stCondLst>
+                                    <p:cond delay="0"/>
+                                  </p:stCondLst>
+                                  <p:childTnLst>
+                                    <p:set>
+                                      <p:cBhvr>
+                                        <p:cTn id="18" dur="1" fill="hold">
+                                          <p:stCondLst>
+                                            <p:cond delay="0"/>
+                                          </p:stCondLst>
+                                        </p:cTn>
+                                        <p:tgtEl>
+                                          <p:spTgt spid="9"/>
+                                        </p:tgtEl>
+                                        <p:attrNameLst>
+                                          <p:attrName>style.visibility</p:attrName>
+                                        </p:attrNameLst>
+                                      </p:cBhvr>
+                                      <p:to>
+                                        <p:strVal val="visible"/>
+                                      </p:to>
+                                    </p:set>
+                                  </p:childTnLst>
+                                </p:cTn>
+                              </p:par>
+                            </p:childTnLst>
+                          </p:cTn>
+                        </p:par>
+                      </p:childTnLst>
+                    </p:cTn>
+                  </p:par>
+                  <p:par>
+                    <p:cTn id="19" fill="hold">
+                      <p:stCondLst>
+                        <p:cond delay="indefinite"/>
+                      </p:stCondLst>
+                      <p:childTnLst>
+                        <p:par>
+                          <p:cTn id="20" fill="hold">
+                            <p:stCondLst>
+                              <p:cond delay="0"/>
+                            </p:stCondLst>
+                            <p:childTnLst>
+                              <p:par>
+                                <p:cTn id="21" presetID="1" presetClass="entr" presetSubtype="0" fill="hold" grpId="0" nodeType="clickEffect">
+                                  <p:stCondLst>
+                                    <p:cond delay="0"/>
+                                  </p:stCondLst>
+                                  <p:childTnLst>
+                                    <p:set>
+                                      <p:cBhvr>
+                                        <p:cTn id="22" dur="1" fill="hold">
+                                          <p:stCondLst>
+                                            <p:cond delay="0"/>
+                                          </p:stCondLst>
+                                        </p:cTn>
+                                        <p:tgtEl>
+                                          <p:spTgt spid="10"/>
+                                        </p:tgtEl>
+                                        <p:attrNameLst>
+                                          <p:attrName>style.visibility</p:attrName>
+                                        </p:attrNameLst>
+                                      </p:cBhvr>
+                                      <p:to>
+                                        <p:strVal val="visible"/>
+                                      </p:to>
+                                    </p:set>
+                                  </p:childTnLst>
+                                </p:cTn>
+                              </p:par>
+                            </p:childTnLst>
+                          </p:cTn>
+                        </p:par>
+                      </p:childTnLst>
+                    </p:cTn>
+                  </p:par>
+                  <p:par>
+                    <p:cTn id="23" fill="hold">
+                      <p:stCondLst>
+                        <p:cond delay="indefinite"/>
+                      </p:stCondLst>
+                      <p:childTnLst>
+                        <p:par>
+                          <p:cTn id="24" fill="hold">
+                            <p:stCondLst>
+                              <p:cond delay="0"/>
+                            </p:stCondLst>
+                            <p:childTnLst>
+                              <p:par>
+                                <p:cTn id="25" presetID="1" presetClass="entr" presetSubtype="0" fill="hold" grpId="0" nodeType="clickEffect">
+                                  <p:stCondLst>
+                                    <p:cond delay="0"/>
+                                  </p:stCondLst>
+                                  <p:childTnLst>
+                                    <p:set>
+                                      <p:cBhvr>
+                                        <p:cTn id="26" dur="1" fill="hold">
+                                          <p:stCondLst>
+                                            <p:cond delay="0"/>
+                                          </p:stCondLst>
+                                        </p:cTn>
+                                        <p:tgtEl>
+                                          <p:spTgt spid="11"/>
+                                        </p:tgtEl>
+                                        <p:attrNameLst>
+                                          <p:attrName>style.visibility</p:attrName>
+                                        </p:attrNameLst>
+                                      </p:cBhvr>
+                                      <p:to>
+                                        <p:strVal val="visible"/>
+                                      </p:to>
+                                    </p:set>
+                                  </p:childTnLst>
+                                </p:cTn>
+                              </p:par>
+                            </p:childTnLst>
+                          </p:cTn>
+                        </p:par>
+                      </p:childTnLst>
+                    </p:cTn>
+                  </p:par>
+                  <p:par>
+                    <p:cTn id="27" fill="hold">
+                      <p:stCondLst>
+                        <p:cond delay="indefinite"/>
+                      </p:stCondLst>
+                      <p:childTnLst>
+                        <p:par>
+                          <p:cTn id="28" fill="hold">
+                            <p:stCondLst>
+                              <p:cond delay="0"/>
+                            </p:stCondLst>
+                            <p:childTnLst>
+                              <p:par>
+                                <p:cTn id="29" presetID="1" presetClass="entr" presetSubtype="0" fill="hold" grpId="0" nodeType="clickEffect">
+                                  <p:stCondLst>
+                                    <p:cond delay="0"/>
+                                  </p:stCondLst>
+                                  <p:childTnLst>
+                                    <p:set>
+                                      <p:cBhvr>
+                                        <p:cTn id="30" dur="1" fill="hold">
+                                          <p:stCondLst>
+                                            <p:cond delay="0"/>
+                                          </p:stCondLst>
+                                        </p:cTn>
+                                        <p:tgtEl>
+                                          <p:spTgt spid="12"/>
+                                        </p:tgtEl>
+                                        <p:attrNameLst>
+                                          <p:attrName>style.visibility</p:attrName>
+                                        </p:attrNameLst>
+                                      </p:cBhvr>
+                                      <p:to>
+                                        <p:strVal val="visible"/>
+                                      </p:to>
+                                    </p:set>
+                                  </p:childTnLst>
+                                </p:cTn>
+                              </p:par>
+                            </p:childTnLst>
+                          </p:cTn>
+                        </p:par>
+                      </p:childTnLst>
+                    </p:cTn>
+                  </p:par>
+                  <p:par>
+                    <p:cTn id="31" fill="hold">
+                      <p:stCondLst>
+                        <p:cond delay="indefinite"/>
+                      </p:stCondLst>
+                      <p:childTnLst>
+                        <p:par>
+                          <p:cTn id="32" fill="hold">
+                            <p:stCondLst>
+                              <p:cond delay="0"/>
+                            </p:stCondLst>
+                            <p:childTnLst>
+                              <p:par>
+                                <p:cTn id="33" presetID="1" presetClass="entr" presetSubtype="0" fill="hold" grpId="0" nodeType="clickEffect">
+                                  <p:stCondLst>
+                                    <p:cond delay="0"/>
+                                  </p:stCondLst>
+                                  <p:childTnLst>
+                                    <p:set>
+                                      <p:cBhvr>
+                                        <p:cTn id="34" dur="1" fill="hold">
+                                          <p:stCondLst>
+                                            <p:cond delay="0"/>
+                                          </p:stCondLst>
+                                        </p:cTn>
+                                        <p:tgtEl>
+                                          <p:spTgt spid="13"/>
+                                        </p:tgtEl>
+                                        <p:attrNameLst>
+                                          <p:attrName>style.visibility</p:attrName>
+                                        </p:attrNameLst>
+                                      </p:cBhvr>
+                                      <p:to>
+                                        <p:strVal val="visible"/>
+                                      </p:to>
+                                    </p:set>
+                                  </p:childTnLst>
+                                </p:cTn>
+                              </p:par>
+                            </p:childTnLst>
+                          </p:cTn>
+                        </p:par>
+                      </p:childTnLst>
+                    </p:cTn>
+                  </p:par>
+                  <p:par>
+                    <p:cTn id="35" fill="hold">
+                      <p:stCondLst>
+                        <p:cond delay="indefinite"/>
+                      </p:stCondLst>
+                      <p:childTnLst>
+                        <p:par>
+                          <p:cTn id="36" fill="hold">
+                            <p:stCondLst>
+                              <p:cond delay="0"/>
+                            </p:stCondLst>
+                            <p:childTnLst>
+                              <p:par>
+                                <p:cTn id="37" presetID="1" presetClass="entr" presetSubtype="0" fill="hold" grpId="0" nodeType="clickEffect">
+                                  <p:stCondLst>
+                                    <p:cond delay="0"/>
+                                  </p:stCondLst>
+                                  <p:childTnLst>
+                                    <p:set>
+                                      <p:cBhvr>
+                                        <p:cTn id="38" dur="1" fill="hold">
+                                          <p:stCondLst>
+                                            <p:cond delay="0"/>
+                                          </p:stCondLst>
+                                        </p:cTn>
+                                        <p:tgtEl>
+                                          <p:spTgt spid="14"/>
+                                        </p:tgtEl>
+                                        <p:attrNameLst>
+                                          <p:attrName>style.visibility</p:attrName>
+                                        </p:attrNameLst>
+                                      </p:cBhvr>
+                                      <p:to>
+                                        <p:strVal val="visible"/>
+                                      </p:to>
+                                    </p:set>
+                                  </p:childTnLst>
+                                </p:cTn>
+                              </p:par>
+                            </p:childTnLst>
+                          </p:cTn>
+                        </p:par>
+                      </p:childTnLst>
+                    </p:cTn>
+                  </p:par>
+                  <p:par>
+                    <p:cTn id="39" fill="hold">
+                      <p:stCondLst>
+                        <p:cond delay="indefinite"/>
+                      </p:stCondLst>
+                      <p:childTnLst>
+                        <p:par>
+                          <p:cTn id="40" fill="hold">
+                            <p:stCondLst>
+                              <p:cond delay="0"/>
+                            </p:stCondLst>
+                            <p:childTnLst>
+                              <p:par>
+                                <p:cTn id="41" presetID="1" presetClass="entr" presetSubtype="0" fill="hold" grpId="0" nodeType="clickEffect">
+                                  <p:stCondLst>
+                                    <p:cond delay="0"/>
+                                  </p:stCondLst>
+                                  <p:childTnLst>
+                                    <p:set>
+                                      <p:cBhvr>
+                                        <p:cTn id="42" dur="1" fill="hold">
+                                          <p:stCondLst>
+                                            <p:cond delay="0"/>
+                                          </p:stCondLst>
+                                        </p:cTn>
+                                        <p:tgtEl>
+                                          <p:spTgt spid="15"/>
+                                        </p:tgtEl>
+                                        <p:attrNameLst>
+                                          <p:attrName>style.visibility</p:attrName>
+                                        </p:attrNameLst>
+                                      </p:cBhvr>
+                                      <p:to>
+                                        <p:strVal val="visible"/>
+                                      </p:to>
+                                    </p:set>
+                                  </p:childTnLst>
+                                </p:cTn>
+                              </p:par>
+                            </p:childTnLst>
+                          </p:cTn>
+                        </p:par>
+                      </p:childTnLst>
+                    </p:cTn>
+                  </p:par>
+                </p:childTnLst>
+              </p:cTn>
+              <p:prevCondLst>
+                <p:cond evt="onPrev" delay="0">
+                  <p:tgtEl>
+                    <p:sldTgt/>
+                  </p:tgtEl>
+                </p:cond>
+              </p:prevCondLst>
+              <p:nextCondLst>
+                <p:cond evt="onNext" delay="0">
+                  <p:tgtEl>
+                    <p:sldTgt/>
+                  </p:tgtEl>
+                </p:cond>
+              </p:nextCondLst>
+            </p:seq>
+          </p:childTnLst>
+        </p:cTn>
+      </p:par>
+    </p:tnLst>
+    <p:bldLst>
+      <p:bldP spid="6" grpId="0" animBg="1"/>
+      <p:bldP spid="7" grpId="0" animBg="1"/>
+      <p:bldGraphic spid="8" grpId="0">
+        <p:bldAsOne/>
+      </p:bldGraphic>
+      <p:bldGraphic spid="9" grpId="0">
+        <p:bldAsOne/>
+      </p:bldGraphic>
+      <p:bldGraphic spid="10" grpId="0">
+        <p:bldAsOne/>
+      </p:bldGraphic>
+      <p:bldGraphic spid="11" grpId="0">
+        <p:bldAsOne/>
+      </p:bldGraphic>
+      <p:bldP spid="12" grpId="0" animBg="1"/>
+      <p:bldGraphic spid="13" grpId="0">
+        <p:bldAsOne/>
+      </p:bldGraphic>
+      <p:bldP spid="14" grpId="0" animBg="1"/>
+      <p:bldP spid="15" grpId="0" animBg="1"/>
+    </p:bldLst>
+  </p:timing>
+</p:sld>
+</file>
+
+<file path=ppt/slides/slide12.xml><?xml version="1.0" encoding="utf-8"?>
+<p:sld xmlns:a="http://schemas.openxmlformats.org/drawingml/2006/main" xmlns:p="http://schemas.openxmlformats.org/presentationml/2006/main" xmlns:r="http://schemas.openxmlformats.org/officeDocument/2006/relationships">
+  <p:cSld>
+    <p:spTree>
+      <p:nvGrpSpPr>
+        <p:cNvPr id="1" name=""/>
+        <p:cNvGrpSpPr/>
+        <p:nvPr/>
+      </p:nvGrpSpPr>
+      <p:grpSpPr/>
+      <p:sp>
+        <p:nvSpPr>
+          <p:cNvPr id="2" name="Rectangle 1"/>
+          <p:cNvSpPr/>
+          <p:nvPr/>
+        </p:nvSpPr>
+        <p:spPr>
+          <a:xfrm>
+            <a:off x="0" y="0"/>
+            <a:ext cx="12191695" cy="6858000"/>
+          </a:xfrm>
+          <a:prstGeom prst="rect">
+            <a:avLst/>
+          </a:prstGeom>
+          <a:solidFill>
+            <a:srgbClr val="FFFFFF"/>
+          </a:solidFill>
+          <a:ln>
+            <a:noFill/>
+          </a:ln>
+          <a:effectLst/>
+        </p:spPr>
+        <p:style>
+          <a:lnRef idx="1">
+            <a:schemeClr val="accent1"/>
+          </a:lnRef>
+          <a:fillRef idx="3">
+            <a:schemeClr val="accent1"/>
+          </a:fillRef>
+          <a:effectRef idx="2">
+            <a:schemeClr val="accent1"/>
+          </a:effectRef>
+          <a:fontRef idx="minor">
+            <a:schemeClr val="lt1"/>
+          </a:fontRef>
+        </p:style>
+        <p:txBody>
+          <a:bodyPr rtlCol="0" anchor="ctr"/>
+          <a:lstStyle/>
+          <a:p>
+            <a:pPr algn="ctr"/>
+          </a:p>
+        </p:txBody>
+      </p:sp>
+      <p:sp>
+        <p:nvSpPr>
+          <p:cNvPr id="3" name="Rectangle 2"/>
+          <p:cNvSpPr/>
+          <p:nvPr/>
+        </p:nvSpPr>
+        <p:spPr>
+          <a:xfrm>
+            <a:off x="0" y="0"/>
+            <a:ext cx="12191695" cy="868680"/>
+          </a:xfrm>
+          <a:prstGeom prst="rect">
+            <a:avLst/>
+          </a:prstGeom>
+          <a:solidFill>
+            <a:srgbClr val="1F4E79"/>
+          </a:solidFill>
+          <a:ln>
+            <a:noFill/>
+          </a:ln>
+          <a:effectLst/>
+        </p:spPr>
+        <p:style>
+          <a:lnRef idx="1">
+            <a:schemeClr val="accent1"/>
+          </a:lnRef>
+          <a:fillRef idx="3">
+            <a:schemeClr val="accent1"/>
+          </a:fillRef>
+          <a:effectRef idx="2">
+            <a:schemeClr val="accent1"/>
+          </a:effectRef>
+          <a:fontRef idx="minor">
+            <a:schemeClr val="lt1"/>
+          </a:fontRef>
+        </p:style>
+        <p:txBody>
+          <a:bodyPr rtlCol="0" anchor="ctr"/>
+          <a:lstStyle/>
+          <a:p>
+            <a:pPr algn="ctr"/>
+          </a:p>
+        </p:txBody>
+      </p:sp>
+      <p:sp>
+        <p:nvSpPr>
+          <p:cNvPr id="4" name="TextBox 3"/>
+          <p:cNvSpPr txBox="1"/>
+          <p:nvPr/>
+        </p:nvSpPr>
+        <p:spPr>
+          <a:xfrm>
+            <a:off x="411480" y="54864"/>
+            <a:ext cx="11338560" cy="457200"/>
+          </a:xfrm>
+          <a:prstGeom prst="rect">
+            <a:avLst/>
+          </a:prstGeom>
+          <a:noFill/>
+        </p:spPr>
+        <p:txBody>
+          <a:bodyPr wrap="square">
+            <a:spAutoFit/>
+          </a:bodyPr>
+          <a:lstStyle/>
+          <a:p>
+            <a:pPr algn="just"/>
+            <a:r>
+              <a:rPr sz="2800" b="1" i="0">
+                <a:solidFill>
+                  <a:srgbClr val="FFFFFF"/>
+                </a:solidFill>
+                <a:latin typeface="Times New Roman"/>
+              </a:rPr>
               <a:t>2. Soft targets and hard targets</a:t>
             </a:r>
           </a:p>
@@ -6026,7 +7558,7 @@
 </p:sld>
 </file>
 
-<file path=ppt/slides/slide12.xml><?xml version="1.0" encoding="utf-8"?>
+<file path=ppt/slides/slide13.xml><?xml version="1.0" encoding="utf-8"?>
 <p:sld xmlns:a="http://schemas.openxmlformats.org/drawingml/2006/main" xmlns:p="http://schemas.openxmlformats.org/presentationml/2006/main" xmlns:r="http://schemas.openxmlformats.org/officeDocument/2006/relationships">
   <p:cSld>
     <p:spTree>
@@ -6489,7 +8021,7 @@
                 </a:solidFill>
                 <a:latin typeface="Times New Roman"/>
               </a:rPr>
-              <a:t>them by T² (checked on slide 16)</a:t>
+              <a:t>them by T² (checked on slide 17)</a:t>
             </a:r>
           </a:p>
         </p:txBody>
@@ -6937,7 +8469,7 @@
 </p:sld>
 </file>
 
-<file path=ppt/slides/slide13.xml><?xml version="1.0" encoding="utf-8"?>
+<file path=ppt/slides/slide14.xml><?xml version="1.0" encoding="utf-8"?>
 <p:sld xmlns:a="http://schemas.openxmlformats.org/drawingml/2006/main" xmlns:p="http://schemas.openxmlformats.org/presentationml/2006/main" xmlns:r="http://schemas.openxmlformats.org/officeDocument/2006/relationships">
   <p:cSld>
     <p:spTree>
@@ -9126,7 +10658,7 @@
 </p:sld>
 </file>
 
-<file path=ppt/slides/slide14.xml><?xml version="1.0" encoding="utf-8"?>
+<file path=ppt/slides/slide15.xml><?xml version="1.0" encoding="utf-8"?>
 <p:sld xmlns:a="http://schemas.openxmlformats.org/drawingml/2006/main" xmlns:p="http://schemas.openxmlformats.org/presentationml/2006/main" xmlns:r="http://schemas.openxmlformats.org/officeDocument/2006/relationships">
   <p:cSld>
     <p:spTree>
@@ -10704,7 +12236,7 @@
 </p:sld>
 </file>
 
-<file path=ppt/slides/slide15.xml><?xml version="1.0" encoding="utf-8"?>
+<file path=ppt/slides/slide16.xml><?xml version="1.0" encoding="utf-8"?>
 <p:sld xmlns:a="http://schemas.openxmlformats.org/drawingml/2006/main" xmlns:p="http://schemas.openxmlformats.org/presentationml/2006/main" xmlns:r="http://schemas.openxmlformats.org/officeDocument/2006/relationships">
   <p:cSld>
     <p:spTree>
@@ -12480,7 +14012,7 @@
 </p:sld>
 </file>
 
-<file path=ppt/slides/slide16.xml><?xml version="1.0" encoding="utf-8"?>
+<file path=ppt/slides/slide17.xml><?xml version="1.0" encoding="utf-8"?>
 <p:sld xmlns:a="http://schemas.openxmlformats.org/drawingml/2006/main" xmlns:p="http://schemas.openxmlformats.org/presentationml/2006/main" xmlns:r="http://schemas.openxmlformats.org/officeDocument/2006/relationships">
   <p:cSld>
     <p:spTree>
@@ -13962,7 +15494,7 @@
 </p:sld>
 </file>
 
-<file path=ppt/slides/slide17.xml><?xml version="1.0" encoding="utf-8"?>
+<file path=ppt/slides/slide18.xml><?xml version="1.0" encoding="utf-8"?>
 <p:sld xmlns:a="http://schemas.openxmlformats.org/drawingml/2006/main" xmlns:p="http://schemas.openxmlformats.org/presentationml/2006/main" xmlns:r="http://schemas.openxmlformats.org/officeDocument/2006/relationships">
   <p:cSld>
     <p:spTree>
@@ -14834,7 +16366,7 @@
 </p:sld>
 </file>
 
-<file path=ppt/slides/slide18.xml><?xml version="1.0" encoding="utf-8"?>
+<file path=ppt/slides/slide19.xml><?xml version="1.0" encoding="utf-8"?>
 <p:sld xmlns:a="http://schemas.openxmlformats.org/drawingml/2006/main" xmlns:p="http://schemas.openxmlformats.org/presentationml/2006/main" xmlns:r="http://schemas.openxmlformats.org/officeDocument/2006/relationships">
   <p:cSld>
     <p:spTree>
@@ -15506,1151 +17038,6 @@
                 <a:latin typeface="Times New Roman"/>
               </a:rPr>
               <a:t>Blue: small net 100-100. At every temperature, distillation gives fewer test errors than training on hard targets only (dashed line).</a:t>
-            </a:r>
-          </a:p>
-        </p:txBody>
-      </p:sp>
-    </p:spTree>
-  </p:cSld>
-  <p:clrMapOvr>
-    <a:masterClrMapping/>
-  </p:clrMapOvr>
-  <p:timing>
-    <p:tnLst>
-      <p:par>
-        <p:cTn id="1" dur="indefinite" restart="never" nodeType="tmRoot">
-          <p:childTnLst>
-            <p:seq concurrent="1" nextAc="seek">
-              <p:cTn id="2" dur="indefinite" nodeType="mainSeq">
-                <p:childTnLst>
-                  <p:par>
-                    <p:cTn id="3" fill="hold">
-                      <p:stCondLst>
-                        <p:cond delay="indefinite"/>
-                      </p:stCondLst>
-                      <p:childTnLst>
-                        <p:par>
-                          <p:cTn id="4" fill="hold">
-                            <p:stCondLst>
-                              <p:cond delay="0"/>
-                            </p:stCondLst>
-                            <p:childTnLst>
-                              <p:par>
-                                <p:cTn id="5" presetID="1" presetClass="entr" presetSubtype="0" fill="hold" grpId="0" nodeType="clickEffect">
-                                  <p:stCondLst>
-                                    <p:cond delay="0"/>
-                                  </p:stCondLst>
-                                  <p:childTnLst>
-                                    <p:set>
-                                      <p:cBhvr>
-                                        <p:cTn id="6" dur="1" fill="hold">
-                                          <p:stCondLst>
-                                            <p:cond delay="0"/>
-                                          </p:stCondLst>
-                                        </p:cTn>
-                                        <p:tgtEl>
-                                          <p:spTgt spid="6"/>
-                                        </p:tgtEl>
-                                        <p:attrNameLst>
-                                          <p:attrName>style.visibility</p:attrName>
-                                        </p:attrNameLst>
-                                      </p:cBhvr>
-                                      <p:to>
-                                        <p:strVal val="visible"/>
-                                      </p:to>
-                                    </p:set>
-                                  </p:childTnLst>
-                                </p:cTn>
-                              </p:par>
-                            </p:childTnLst>
-                          </p:cTn>
-                        </p:par>
-                      </p:childTnLst>
-                    </p:cTn>
-                  </p:par>
-                  <p:par>
-                    <p:cTn id="7" fill="hold">
-                      <p:stCondLst>
-                        <p:cond delay="indefinite"/>
-                      </p:stCondLst>
-                      <p:childTnLst>
-                        <p:par>
-                          <p:cTn id="8" fill="hold">
-                            <p:stCondLst>
-                              <p:cond delay="0"/>
-                            </p:stCondLst>
-                            <p:childTnLst>
-                              <p:par>
-                                <p:cTn id="9" presetID="1" presetClass="entr" presetSubtype="0" fill="hold" grpId="0" nodeType="clickEffect">
-                                  <p:stCondLst>
-                                    <p:cond delay="0"/>
-                                  </p:stCondLst>
-                                  <p:childTnLst>
-                                    <p:set>
-                                      <p:cBhvr>
-                                        <p:cTn id="10" dur="1" fill="hold">
-                                          <p:stCondLst>
-                                            <p:cond delay="0"/>
-                                          </p:stCondLst>
-                                        </p:cTn>
-                                        <p:tgtEl>
-                                          <p:spTgt spid="7"/>
-                                        </p:tgtEl>
-                                        <p:attrNameLst>
-                                          <p:attrName>style.visibility</p:attrName>
-                                        </p:attrNameLst>
-                                      </p:cBhvr>
-                                      <p:to>
-                                        <p:strVal val="visible"/>
-                                      </p:to>
-                                    </p:set>
-                                  </p:childTnLst>
-                                </p:cTn>
-                              </p:par>
-                            </p:childTnLst>
-                          </p:cTn>
-                        </p:par>
-                      </p:childTnLst>
-                    </p:cTn>
-                  </p:par>
-                  <p:par>
-                    <p:cTn id="11" fill="hold">
-                      <p:stCondLst>
-                        <p:cond delay="indefinite"/>
-                      </p:stCondLst>
-                      <p:childTnLst>
-                        <p:par>
-                          <p:cTn id="12" fill="hold">
-                            <p:stCondLst>
-                              <p:cond delay="0"/>
-                            </p:stCondLst>
-                            <p:childTnLst>
-                              <p:par>
-                                <p:cTn id="13" presetID="1" presetClass="entr" presetSubtype="0" fill="hold" grpId="0" nodeType="clickEffect">
-                                  <p:stCondLst>
-                                    <p:cond delay="0"/>
-                                  </p:stCondLst>
-                                  <p:childTnLst>
-                                    <p:set>
-                                      <p:cBhvr>
-                                        <p:cTn id="14" dur="1" fill="hold">
-                                          <p:stCondLst>
-                                            <p:cond delay="0"/>
-                                          </p:stCondLst>
-                                        </p:cTn>
-                                        <p:tgtEl>
-                                          <p:spTgt spid="8"/>
-                                        </p:tgtEl>
-                                        <p:attrNameLst>
-                                          <p:attrName>style.visibility</p:attrName>
-                                        </p:attrNameLst>
-                                      </p:cBhvr>
-                                      <p:to>
-                                        <p:strVal val="visible"/>
-                                      </p:to>
-                                    </p:set>
-                                  </p:childTnLst>
-                                </p:cTn>
-                              </p:par>
-                            </p:childTnLst>
-                          </p:cTn>
-                        </p:par>
-                      </p:childTnLst>
-                    </p:cTn>
-                  </p:par>
-                  <p:par>
-                    <p:cTn id="15" fill="hold">
-                      <p:stCondLst>
-                        <p:cond delay="indefinite"/>
-                      </p:stCondLst>
-                      <p:childTnLst>
-                        <p:par>
-                          <p:cTn id="16" fill="hold">
-                            <p:stCondLst>
-                              <p:cond delay="0"/>
-                            </p:stCondLst>
-                            <p:childTnLst>
-                              <p:par>
-                                <p:cTn id="17" presetID="1" presetClass="entr" presetSubtype="0" fill="hold" grpId="0" nodeType="clickEffect">
-                                  <p:stCondLst>
-                                    <p:cond delay="0"/>
-                                  </p:stCondLst>
-                                  <p:childTnLst>
-                                    <p:set>
-                                      <p:cBhvr>
-                                        <p:cTn id="18" dur="1" fill="hold">
-                                          <p:stCondLst>
-                                            <p:cond delay="0"/>
-                                          </p:stCondLst>
-                                        </p:cTn>
-                                        <p:tgtEl>
-                                          <p:spTgt spid="9"/>
-                                        </p:tgtEl>
-                                        <p:attrNameLst>
-                                          <p:attrName>style.visibility</p:attrName>
-                                        </p:attrNameLst>
-                                      </p:cBhvr>
-                                      <p:to>
-                                        <p:strVal val="visible"/>
-                                      </p:to>
-                                    </p:set>
-                                  </p:childTnLst>
-                                </p:cTn>
-                              </p:par>
-                            </p:childTnLst>
-                          </p:cTn>
-                        </p:par>
-                      </p:childTnLst>
-                    </p:cTn>
-                  </p:par>
-                  <p:par>
-                    <p:cTn id="19" fill="hold">
-                      <p:stCondLst>
-                        <p:cond delay="indefinite"/>
-                      </p:stCondLst>
-                      <p:childTnLst>
-                        <p:par>
-                          <p:cTn id="20" fill="hold">
-                            <p:stCondLst>
-                              <p:cond delay="0"/>
-                            </p:stCondLst>
-                            <p:childTnLst>
-                              <p:par>
-                                <p:cTn id="21" presetID="1" presetClass="entr" presetSubtype="0" fill="hold" grpId="0" nodeType="clickEffect">
-                                  <p:stCondLst>
-                                    <p:cond delay="0"/>
-                                  </p:stCondLst>
-                                  <p:childTnLst>
-                                    <p:set>
-                                      <p:cBhvr>
-                                        <p:cTn id="22" dur="1" fill="hold">
-                                          <p:stCondLst>
-                                            <p:cond delay="0"/>
-                                          </p:stCondLst>
-                                        </p:cTn>
-                                        <p:tgtEl>
-                                          <p:spTgt spid="10"/>
-                                        </p:tgtEl>
-                                        <p:attrNameLst>
-                                          <p:attrName>style.visibility</p:attrName>
-                                        </p:attrNameLst>
-                                      </p:cBhvr>
-                                      <p:to>
-                                        <p:strVal val="visible"/>
-                                      </p:to>
-                                    </p:set>
-                                  </p:childTnLst>
-                                </p:cTn>
-                              </p:par>
-                            </p:childTnLst>
-                          </p:cTn>
-                        </p:par>
-                      </p:childTnLst>
-                    </p:cTn>
-                  </p:par>
-                </p:childTnLst>
-              </p:cTn>
-              <p:prevCondLst>
-                <p:cond evt="onPrev" delay="0">
-                  <p:tgtEl>
-                    <p:sldTgt/>
-                  </p:tgtEl>
-                </p:cond>
-              </p:prevCondLst>
-              <p:nextCondLst>
-                <p:cond evt="onNext" delay="0">
-                  <p:tgtEl>
-                    <p:sldTgt/>
-                  </p:tgtEl>
-                </p:cond>
-              </p:nextCondLst>
-            </p:seq>
-          </p:childTnLst>
-        </p:cTn>
-      </p:par>
-    </p:tnLst>
-    <p:bldLst>
-      <p:bldGraphic spid="6" grpId="0">
-        <p:bldAsOne/>
-      </p:bldGraphic>
-      <p:bldP spid="7" grpId="0" animBg="1"/>
-      <p:bldP spid="8" grpId="0" animBg="1"/>
-      <p:bldP spid="9" grpId="0" animBg="1"/>
-      <p:bldP spid="10" grpId="0" animBg="1"/>
-    </p:bldLst>
-  </p:timing>
-</p:sld>
-</file>
-
-<file path=ppt/slides/slide19.xml><?xml version="1.0" encoding="utf-8"?>
-<p:sld xmlns:a="http://schemas.openxmlformats.org/drawingml/2006/main" xmlns:p="http://schemas.openxmlformats.org/presentationml/2006/main" xmlns:r="http://schemas.openxmlformats.org/officeDocument/2006/relationships">
-  <p:cSld>
-    <p:spTree>
-      <p:nvGrpSpPr>
-        <p:cNvPr id="1" name=""/>
-        <p:cNvGrpSpPr/>
-        <p:nvPr/>
-      </p:nvGrpSpPr>
-      <p:grpSpPr/>
-      <p:sp>
-        <p:nvSpPr>
-          <p:cNvPr id="2" name="Rectangle 1"/>
-          <p:cNvSpPr/>
-          <p:nvPr/>
-        </p:nvSpPr>
-        <p:spPr>
-          <a:xfrm>
-            <a:off x="0" y="0"/>
-            <a:ext cx="12191695" cy="6858000"/>
-          </a:xfrm>
-          <a:prstGeom prst="rect">
-            <a:avLst/>
-          </a:prstGeom>
-          <a:solidFill>
-            <a:srgbClr val="FFFFFF"/>
-          </a:solidFill>
-          <a:ln>
-            <a:noFill/>
-          </a:ln>
-          <a:effectLst/>
-        </p:spPr>
-        <p:style>
-          <a:lnRef idx="1">
-            <a:schemeClr val="accent1"/>
-          </a:lnRef>
-          <a:fillRef idx="3">
-            <a:schemeClr val="accent1"/>
-          </a:fillRef>
-          <a:effectRef idx="2">
-            <a:schemeClr val="accent1"/>
-          </a:effectRef>
-          <a:fontRef idx="minor">
-            <a:schemeClr val="lt1"/>
-          </a:fontRef>
-        </p:style>
-        <p:txBody>
-          <a:bodyPr rtlCol="0" anchor="ctr"/>
-          <a:lstStyle/>
-          <a:p>
-            <a:pPr algn="ctr"/>
-          </a:p>
-        </p:txBody>
-      </p:sp>
-      <p:sp>
-        <p:nvSpPr>
-          <p:cNvPr id="3" name="Rectangle 2"/>
-          <p:cNvSpPr/>
-          <p:nvPr/>
-        </p:nvSpPr>
-        <p:spPr>
-          <a:xfrm>
-            <a:off x="0" y="0"/>
-            <a:ext cx="12191695" cy="868680"/>
-          </a:xfrm>
-          <a:prstGeom prst="rect">
-            <a:avLst/>
-          </a:prstGeom>
-          <a:solidFill>
-            <a:srgbClr val="1F4E79"/>
-          </a:solidFill>
-          <a:ln>
-            <a:noFill/>
-          </a:ln>
-          <a:effectLst/>
-        </p:spPr>
-        <p:style>
-          <a:lnRef idx="1">
-            <a:schemeClr val="accent1"/>
-          </a:lnRef>
-          <a:fillRef idx="3">
-            <a:schemeClr val="accent1"/>
-          </a:fillRef>
-          <a:effectRef idx="2">
-            <a:schemeClr val="accent1"/>
-          </a:effectRef>
-          <a:fontRef idx="minor">
-            <a:schemeClr val="lt1"/>
-          </a:fontRef>
-        </p:style>
-        <p:txBody>
-          <a:bodyPr rtlCol="0" anchor="ctr"/>
-          <a:lstStyle/>
-          <a:p>
-            <a:pPr algn="ctr"/>
-          </a:p>
-        </p:txBody>
-      </p:sp>
-      <p:sp>
-        <p:nvSpPr>
-          <p:cNvPr id="4" name="TextBox 3"/>
-          <p:cNvSpPr txBox="1"/>
-          <p:nvPr/>
-        </p:nvSpPr>
-        <p:spPr>
-          <a:xfrm>
-            <a:off x="411480" y="54864"/>
-            <a:ext cx="11338560" cy="457200"/>
-          </a:xfrm>
-          <a:prstGeom prst="rect">
-            <a:avLst/>
-          </a:prstGeom>
-          <a:noFill/>
-        </p:spPr>
-        <p:txBody>
-          <a:bodyPr wrap="square">
-            <a:spAutoFit/>
-          </a:bodyPr>
-          <a:lstStyle/>
-          <a:p>
-            <a:pPr algn="just"/>
-            <a:r>
-              <a:rPr sz="2800" b="1" i="0">
-                <a:solidFill>
-                  <a:srgbClr val="FFFFFF"/>
-                </a:solidFill>
-                <a:latin typeface="Times New Roman"/>
-              </a:rPr>
-              <a:t>4. Intermediate temperatures for a very small net</a:t>
-            </a:r>
-          </a:p>
-        </p:txBody>
-      </p:sp>
-      <p:sp>
-        <p:nvSpPr>
-          <p:cNvPr id="5" name="TextBox 4"/>
-          <p:cNvSpPr txBox="1"/>
-          <p:nvPr/>
-        </p:nvSpPr>
-        <p:spPr>
-          <a:xfrm>
-            <a:off x="411480" y="521207"/>
-            <a:ext cx="11338560" cy="301752"/>
-          </a:xfrm>
-          <a:prstGeom prst="rect">
-            <a:avLst/>
-          </a:prstGeom>
-          <a:noFill/>
-        </p:spPr>
-        <p:txBody>
-          <a:bodyPr wrap="square">
-            <a:spAutoFit/>
-          </a:bodyPr>
-          <a:lstStyle/>
-          <a:p>
-            <a:pPr algn="just"/>
-            <a:r>
-              <a:rPr sz="1400" b="0" i="0">
-                <a:solidFill>
-                  <a:srgbClr val="C7D6E5"/>
-                </a:solidFill>
-                <a:latin typeface="Times New Roman"/>
-              </a:rPr>
-              <a:t>The small net is reduced to 30-30</a:t>
-            </a:r>
-          </a:p>
-        </p:txBody>
-      </p:sp>
-      <p:graphicFrame>
-        <p:nvGraphicFramePr>
-          <p:cNvPr id="6" name="Table 5"/>
-          <p:cNvGraphicFramePr>
-            <a:graphicFrameLocks noGrp="1"/>
-          </p:cNvGraphicFramePr>
-          <p:nvPr/>
-        </p:nvGraphicFramePr>
-        <p:xfrm>
-          <a:off x="731520" y="1143000"/>
-          <a:ext cx="5669278" cy="2304288"/>
-        </p:xfrm>
-        <a:graphic>
-          <a:graphicData uri="http://schemas.openxmlformats.org/drawingml/2006/table">
-            <a:tbl>
-              <a:tblPr bandRow="1">
-                <a:tableStyleId>{5C22544A-7EE6-4342-B048-85BDC9FD1C3A}</a:tableStyleId>
-              </a:tblPr>
-              <a:tblGrid>
-                <a:gridCol w="2040940"/>
-                <a:gridCol w="1814169"/>
-                <a:gridCol w="1814169"/>
-              </a:tblGrid>
-              <a:tr h="329184">
-                <a:tc>
-                  <a:txBody>
-                    <a:bodyPr/>
-                    <a:lstStyle/>
-                    <a:p>
-                      <a:pPr algn="ctr"/>
-                      <a:r>
-                        <a:rPr sz="1600" b="1">
-                          <a:solidFill>
-                            <a:srgbClr val="FFFFFF"/>
-                          </a:solidFill>
-                          <a:latin typeface="Times New Roman"/>
-                        </a:rPr>
-                        <a:t>T</a:t>
-                      </a:r>
-                    </a:p>
-                  </a:txBody>
-                  <a:tcPr marL="36576" marR="36576" marT="9144" marB="9144">
-                    <a:solidFill>
-                      <a:srgbClr val="1F4E79"/>
-                    </a:solidFill>
-                  </a:tcPr>
-                </a:tc>
-                <a:tc>
-                  <a:txBody>
-                    <a:bodyPr/>
-                    <a:lstStyle/>
-                    <a:p>
-                      <a:pPr algn="ctr"/>
-                      <a:r>
-                        <a:rPr sz="1600" b="1">
-                          <a:solidFill>
-                            <a:srgbClr val="FFFFFF"/>
-                          </a:solidFill>
-                          <a:latin typeface="Times New Roman"/>
-                        </a:rPr>
-                        <a:t>Small net 100-100</a:t>
-                      </a:r>
-                    </a:p>
-                  </a:txBody>
-                  <a:tcPr marL="36576" marR="36576" marT="9144" marB="9144">
-                    <a:solidFill>
-                      <a:srgbClr val="1F4E79"/>
-                    </a:solidFill>
-                  </a:tcPr>
-                </a:tc>
-                <a:tc>
-                  <a:txBody>
-                    <a:bodyPr/>
-                    <a:lstStyle/>
-                    <a:p>
-                      <a:pPr algn="ctr"/>
-                      <a:r>
-                        <a:rPr sz="1600" b="1">
-                          <a:solidFill>
-                            <a:srgbClr val="FFFFFF"/>
-                          </a:solidFill>
-                          <a:latin typeface="Times New Roman"/>
-                        </a:rPr>
-                        <a:t>Small net 30-30</a:t>
-                      </a:r>
-                    </a:p>
-                  </a:txBody>
-                  <a:tcPr marL="36576" marR="36576" marT="9144" marB="9144">
-                    <a:solidFill>
-                      <a:srgbClr val="1F4E79"/>
-                    </a:solidFill>
-                  </a:tcPr>
-                </a:tc>
-              </a:tr>
-              <a:tr h="329184">
-                <a:tc>
-                  <a:txBody>
-                    <a:bodyPr/>
-                    <a:lstStyle/>
-                    <a:p>
-                      <a:pPr algn="ctr"/>
-                      <a:r>
-                        <a:rPr sz="1600" b="0">
-                          <a:solidFill>
-                            <a:srgbClr val="202020"/>
-                          </a:solidFill>
-                          <a:latin typeface="Times New Roman"/>
-                        </a:rPr>
-                        <a:t>hard targets only</a:t>
-                      </a:r>
-                    </a:p>
-                  </a:txBody>
-                  <a:tcPr marL="36576" marR="36576" marT="9144" marB="9144">
-                    <a:solidFill>
-                      <a:srgbClr val="FFFFFF"/>
-                    </a:solidFill>
-                  </a:tcPr>
-                </a:tc>
-                <a:tc>
-                  <a:txBody>
-                    <a:bodyPr/>
-                    <a:lstStyle/>
-                    <a:p>
-                      <a:pPr algn="ctr"/>
-                      <a:r>
-                        <a:rPr sz="1600" b="0">
-                          <a:solidFill>
-                            <a:srgbClr val="202020"/>
-                          </a:solidFill>
-                          <a:latin typeface="Times New Roman"/>
-                        </a:rPr>
-                        <a:t>420</a:t>
-                      </a:r>
-                    </a:p>
-                  </a:txBody>
-                  <a:tcPr marL="36576" marR="36576" marT="9144" marB="9144">
-                    <a:solidFill>
-                      <a:srgbClr val="FFFFFF"/>
-                    </a:solidFill>
-                  </a:tcPr>
-                </a:tc>
-                <a:tc>
-                  <a:txBody>
-                    <a:bodyPr/>
-                    <a:lstStyle/>
-                    <a:p>
-                      <a:pPr algn="ctr"/>
-                      <a:r>
-                        <a:rPr sz="1600" b="0">
-                          <a:solidFill>
-                            <a:srgbClr val="202020"/>
-                          </a:solidFill>
-                          <a:latin typeface="Times New Roman"/>
-                        </a:rPr>
-                        <a:t>568</a:t>
-                      </a:r>
-                    </a:p>
-                  </a:txBody>
-                  <a:tcPr marL="36576" marR="36576" marT="9144" marB="9144">
-                    <a:solidFill>
-                      <a:srgbClr val="FFFFFF"/>
-                    </a:solidFill>
-                  </a:tcPr>
-                </a:tc>
-              </a:tr>
-              <a:tr h="329184">
-                <a:tc>
-                  <a:txBody>
-                    <a:bodyPr/>
-                    <a:lstStyle/>
-                    <a:p>
-                      <a:pPr algn="ctr"/>
-                      <a:r>
-                        <a:rPr sz="1600" b="0">
-                          <a:solidFill>
-                            <a:srgbClr val="202020"/>
-                          </a:solidFill>
-                          <a:latin typeface="Times New Roman"/>
-                        </a:rPr>
-                        <a:t>1</a:t>
-                      </a:r>
-                    </a:p>
-                  </a:txBody>
-                  <a:tcPr marL="36576" marR="36576" marT="9144" marB="9144">
-                    <a:solidFill>
-                      <a:srgbClr val="FFFFFF"/>
-                    </a:solidFill>
-                  </a:tcPr>
-                </a:tc>
-                <a:tc>
-                  <a:txBody>
-                    <a:bodyPr/>
-                    <a:lstStyle/>
-                    <a:p>
-                      <a:pPr algn="ctr"/>
-                      <a:r>
-                        <a:rPr sz="1600" b="0">
-                          <a:solidFill>
-                            <a:srgbClr val="202020"/>
-                          </a:solidFill>
-                          <a:latin typeface="Times New Roman"/>
-                        </a:rPr>
-                        <a:t>402</a:t>
-                      </a:r>
-                    </a:p>
-                  </a:txBody>
-                  <a:tcPr marL="36576" marR="36576" marT="9144" marB="9144">
-                    <a:solidFill>
-                      <a:srgbClr val="FFFFFF"/>
-                    </a:solidFill>
-                  </a:tcPr>
-                </a:tc>
-                <a:tc>
-                  <a:txBody>
-                    <a:bodyPr/>
-                    <a:lstStyle/>
-                    <a:p>
-                      <a:pPr algn="ctr"/>
-                      <a:r>
-                        <a:rPr sz="1600" b="0">
-                          <a:solidFill>
-                            <a:srgbClr val="202020"/>
-                          </a:solidFill>
-                          <a:latin typeface="Times New Roman"/>
-                        </a:rPr>
-                        <a:t>561</a:t>
-                      </a:r>
-                    </a:p>
-                  </a:txBody>
-                  <a:tcPr marL="36576" marR="36576" marT="9144" marB="9144">
-                    <a:solidFill>
-                      <a:srgbClr val="FFFFFF"/>
-                    </a:solidFill>
-                  </a:tcPr>
-                </a:tc>
-              </a:tr>
-              <a:tr h="329184">
-                <a:tc>
-                  <a:txBody>
-                    <a:bodyPr/>
-                    <a:lstStyle/>
-                    <a:p>
-                      <a:pPr algn="ctr"/>
-                      <a:r>
-                        <a:rPr sz="1600" b="0">
-                          <a:solidFill>
-                            <a:srgbClr val="202020"/>
-                          </a:solidFill>
-                          <a:latin typeface="Times New Roman"/>
-                        </a:rPr>
-                        <a:t>2</a:t>
-                      </a:r>
-                    </a:p>
-                  </a:txBody>
-                  <a:tcPr marL="36576" marR="36576" marT="9144" marB="9144">
-                    <a:solidFill>
-                      <a:srgbClr val="FFFFFF"/>
-                    </a:solidFill>
-                  </a:tcPr>
-                </a:tc>
-                <a:tc>
-                  <a:txBody>
-                    <a:bodyPr/>
-                    <a:lstStyle/>
-                    <a:p>
-                      <a:pPr algn="ctr"/>
-                      <a:r>
-                        <a:rPr sz="1600" b="0">
-                          <a:solidFill>
-                            <a:srgbClr val="202020"/>
-                          </a:solidFill>
-                          <a:latin typeface="Times New Roman"/>
-                        </a:rPr>
-                        <a:t>349</a:t>
-                      </a:r>
-                    </a:p>
-                  </a:txBody>
-                  <a:tcPr marL="36576" marR="36576" marT="9144" marB="9144">
-                    <a:solidFill>
-                      <a:srgbClr val="FFFFFF"/>
-                    </a:solidFill>
-                  </a:tcPr>
-                </a:tc>
-                <a:tc>
-                  <a:txBody>
-                    <a:bodyPr/>
-                    <a:lstStyle/>
-                    <a:p>
-                      <a:pPr algn="ctr"/>
-                      <a:r>
-                        <a:rPr sz="1600" b="0">
-                          <a:solidFill>
-                            <a:srgbClr val="202020"/>
-                          </a:solidFill>
-                          <a:latin typeface="Times New Roman"/>
-                        </a:rPr>
-                        <a:t>544</a:t>
-                      </a:r>
-                    </a:p>
-                  </a:txBody>
-                  <a:tcPr marL="36576" marR="36576" marT="9144" marB="9144">
-                    <a:solidFill>
-                      <a:srgbClr val="FFFFFF"/>
-                    </a:solidFill>
-                  </a:tcPr>
-                </a:tc>
-              </a:tr>
-              <a:tr h="329184">
-                <a:tc>
-                  <a:txBody>
-                    <a:bodyPr/>
-                    <a:lstStyle/>
-                    <a:p>
-                      <a:pPr algn="ctr"/>
-                      <a:r>
-                        <a:rPr sz="1600" b="0">
-                          <a:solidFill>
-                            <a:srgbClr val="202020"/>
-                          </a:solidFill>
-                          <a:latin typeface="Times New Roman"/>
-                        </a:rPr>
-                        <a:t>4</a:t>
-                      </a:r>
-                    </a:p>
-                  </a:txBody>
-                  <a:tcPr marL="36576" marR="36576" marT="9144" marB="9144">
-                    <a:solidFill>
-                      <a:srgbClr val="FFFFFF"/>
-                    </a:solidFill>
-                  </a:tcPr>
-                </a:tc>
-                <a:tc>
-                  <a:txBody>
-                    <a:bodyPr/>
-                    <a:lstStyle/>
-                    <a:p>
-                      <a:pPr algn="ctr"/>
-                      <a:r>
-                        <a:rPr sz="1600" b="0">
-                          <a:solidFill>
-                            <a:srgbClr val="202020"/>
-                          </a:solidFill>
-                          <a:latin typeface="Times New Roman"/>
-                        </a:rPr>
-                        <a:t>349</a:t>
-                      </a:r>
-                    </a:p>
-                  </a:txBody>
-                  <a:tcPr marL="36576" marR="36576" marT="9144" marB="9144">
-                    <a:solidFill>
-                      <a:srgbClr val="FFFFFF"/>
-                    </a:solidFill>
-                  </a:tcPr>
-                </a:tc>
-                <a:tc>
-                  <a:txBody>
-                    <a:bodyPr/>
-                    <a:lstStyle/>
-                    <a:p>
-                      <a:pPr algn="ctr"/>
-                      <a:r>
-                        <a:rPr sz="1600" b="0">
-                          <a:solidFill>
-                            <a:srgbClr val="202020"/>
-                          </a:solidFill>
-                          <a:latin typeface="Times New Roman"/>
-                        </a:rPr>
-                        <a:t>526</a:t>
-                      </a:r>
-                    </a:p>
-                  </a:txBody>
-                  <a:tcPr marL="36576" marR="36576" marT="9144" marB="9144">
-                    <a:solidFill>
-                      <a:srgbClr val="FFF3CD"/>
-                    </a:solidFill>
-                  </a:tcPr>
-                </a:tc>
-              </a:tr>
-              <a:tr h="329184">
-                <a:tc>
-                  <a:txBody>
-                    <a:bodyPr/>
-                    <a:lstStyle/>
-                    <a:p>
-                      <a:pPr algn="ctr"/>
-                      <a:r>
-                        <a:rPr sz="1600" b="0">
-                          <a:solidFill>
-                            <a:srgbClr val="202020"/>
-                          </a:solidFill>
-                          <a:latin typeface="Times New Roman"/>
-                        </a:rPr>
-                        <a:t>8</a:t>
-                      </a:r>
-                    </a:p>
-                  </a:txBody>
-                  <a:tcPr marL="36576" marR="36576" marT="9144" marB="9144">
-                    <a:solidFill>
-                      <a:srgbClr val="FFFFFF"/>
-                    </a:solidFill>
-                  </a:tcPr>
-                </a:tc>
-                <a:tc>
-                  <a:txBody>
-                    <a:bodyPr/>
-                    <a:lstStyle/>
-                    <a:p>
-                      <a:pPr algn="ctr"/>
-                      <a:r>
-                        <a:rPr sz="1600" b="0">
-                          <a:solidFill>
-                            <a:srgbClr val="202020"/>
-                          </a:solidFill>
-                          <a:latin typeface="Times New Roman"/>
-                        </a:rPr>
-                        <a:t>347</a:t>
-                      </a:r>
-                    </a:p>
-                  </a:txBody>
-                  <a:tcPr marL="36576" marR="36576" marT="9144" marB="9144">
-                    <a:solidFill>
-                      <a:srgbClr val="FFFFFF"/>
-                    </a:solidFill>
-                  </a:tcPr>
-                </a:tc>
-                <a:tc>
-                  <a:txBody>
-                    <a:bodyPr/>
-                    <a:lstStyle/>
-                    <a:p>
-                      <a:pPr algn="ctr"/>
-                      <a:r>
-                        <a:rPr sz="1600" b="0">
-                          <a:solidFill>
-                            <a:srgbClr val="202020"/>
-                          </a:solidFill>
-                          <a:latin typeface="Times New Roman"/>
-                        </a:rPr>
-                        <a:t>570</a:t>
-                      </a:r>
-                    </a:p>
-                  </a:txBody>
-                  <a:tcPr marL="36576" marR="36576" marT="9144" marB="9144">
-                    <a:solidFill>
-                      <a:srgbClr val="FFFFFF"/>
-                    </a:solidFill>
-                  </a:tcPr>
-                </a:tc>
-              </a:tr>
-              <a:tr h="329184">
-                <a:tc>
-                  <a:txBody>
-                    <a:bodyPr/>
-                    <a:lstStyle/>
-                    <a:p>
-                      <a:pPr algn="ctr"/>
-                      <a:r>
-                        <a:rPr sz="1600" b="0">
-                          <a:solidFill>
-                            <a:srgbClr val="202020"/>
-                          </a:solidFill>
-                          <a:latin typeface="Times New Roman"/>
-                        </a:rPr>
-                        <a:t>20</a:t>
-                      </a:r>
-                    </a:p>
-                  </a:txBody>
-                  <a:tcPr marL="36576" marR="36576" marT="9144" marB="9144">
-                    <a:solidFill>
-                      <a:srgbClr val="FFFFFF"/>
-                    </a:solidFill>
-                  </a:tcPr>
-                </a:tc>
-                <a:tc>
-                  <a:txBody>
-                    <a:bodyPr/>
-                    <a:lstStyle/>
-                    <a:p>
-                      <a:pPr algn="ctr"/>
-                      <a:r>
-                        <a:rPr sz="1600" b="0">
-                          <a:solidFill>
-                            <a:srgbClr val="202020"/>
-                          </a:solidFill>
-                          <a:latin typeface="Times New Roman"/>
-                        </a:rPr>
-                        <a:t>318</a:t>
-                      </a:r>
-                    </a:p>
-                  </a:txBody>
-                  <a:tcPr marL="36576" marR="36576" marT="9144" marB="9144">
-                    <a:solidFill>
-                      <a:srgbClr val="FFFFFF"/>
-                    </a:solidFill>
-                  </a:tcPr>
-                </a:tc>
-                <a:tc>
-                  <a:txBody>
-                    <a:bodyPr/>
-                    <a:lstStyle/>
-                    <a:p>
-                      <a:pPr algn="ctr"/>
-                      <a:r>
-                        <a:rPr sz="1600" b="0">
-                          <a:solidFill>
-                            <a:srgbClr val="202020"/>
-                          </a:solidFill>
-                          <a:latin typeface="Times New Roman"/>
-                        </a:rPr>
-                        <a:t>598</a:t>
-                      </a:r>
-                    </a:p>
-                  </a:txBody>
-                  <a:tcPr marL="36576" marR="36576" marT="9144" marB="9144">
-                    <a:solidFill>
-                      <a:srgbClr val="FFFFFF"/>
-                    </a:solidFill>
-                  </a:tcPr>
-                </a:tc>
-              </a:tr>
-            </a:tbl>
-          </a:graphicData>
-        </a:graphic>
-      </p:graphicFrame>
-      <p:pic>
-        <p:nvPicPr>
-          <p:cNvPr id="7" name="Picture 6" descr="f_temp.png"/>
-          <p:cNvPicPr>
-            <a:picLocks noChangeAspect="1"/>
-          </p:cNvPicPr>
-          <p:nvPr/>
-        </p:nvPicPr>
-        <p:blipFill>
-          <a:blip r:embed="rId2"/>
-          <a:stretch>
-            <a:fillRect/>
-          </a:stretch>
-        </p:blipFill>
-        <p:spPr>
-          <a:xfrm>
-            <a:off x="6583680" y="1097280"/>
-            <a:ext cx="5120640" cy="2720340"/>
-          </a:xfrm>
-          <a:prstGeom prst="rect">
-            <a:avLst/>
-          </a:prstGeom>
-        </p:spPr>
-      </p:pic>
-      <p:sp>
-        <p:nvSpPr>
-          <p:cNvPr id="8" name="Rectangle 7"/>
-          <p:cNvSpPr/>
-          <p:nvPr/>
-        </p:nvSpPr>
-        <p:spPr>
-          <a:xfrm>
-            <a:off x="731520" y="3886200"/>
-            <a:ext cx="10881360" cy="914400"/>
-          </a:xfrm>
-          <a:prstGeom prst="rect">
-            <a:avLst/>
-          </a:prstGeom>
-          <a:solidFill>
-            <a:srgbClr val="F6F8FA"/>
-          </a:solidFill>
-          <a:ln>
-            <a:solidFill>
-              <a:srgbClr val="D0D7DE"/>
-            </a:solidFill>
-          </a:ln>
-          <a:effectLst/>
-        </p:spPr>
-        <p:style>
-          <a:lnRef idx="1">
-            <a:schemeClr val="accent1"/>
-          </a:lnRef>
-          <a:fillRef idx="3">
-            <a:schemeClr val="accent1"/>
-          </a:fillRef>
-          <a:effectRef idx="2">
-            <a:schemeClr val="accent1"/>
-          </a:effectRef>
-          <a:fontRef idx="minor">
-            <a:schemeClr val="lt1"/>
-          </a:fontRef>
-        </p:style>
-        <p:txBody>
-          <a:bodyPr rtlCol="0" anchor="ctr" wrap="square"/>
-          <a:lstStyle/>
-          <a:p>
-            <a:pPr algn="just"/>
-            <a:r>
-              <a:rPr sz="1500" b="1">
-                <a:solidFill>
-                  <a:srgbClr val="1F4E79"/>
-                </a:solidFill>
-                <a:latin typeface="Times New Roman"/>
-              </a:rPr>
-              <a:t>Paper: with 300 or more units per layer, all temperatures above 8 gave fairly similar results; with 30 units per layer,</a:t>
-            </a:r>
-          </a:p>
-          <a:p>
-            <a:pPr algn="just"/>
-            <a:r>
-              <a:rPr sz="1500" b="1">
-                <a:solidFill>
-                  <a:srgbClr val="1F4E79"/>
-                </a:solidFill>
-                <a:latin typeface="Times New Roman"/>
-              </a:rPr>
-              <a:t>temperatures in the range 2.5 to 4 worked significantly better than higher or lower temperatures</a:t>
-            </a:r>
-          </a:p>
-        </p:txBody>
-      </p:sp>
-      <p:sp>
-        <p:nvSpPr>
-          <p:cNvPr id="9" name="Rectangle 8"/>
-          <p:cNvSpPr/>
-          <p:nvPr/>
-        </p:nvSpPr>
-        <p:spPr>
-          <a:xfrm>
-            <a:off x="731520" y="4892040"/>
-            <a:ext cx="10881360" cy="914400"/>
-          </a:xfrm>
-          <a:prstGeom prst="rect">
-            <a:avLst/>
-          </a:prstGeom>
-          <a:solidFill>
-            <a:srgbClr val="DCF0E4"/>
-          </a:solidFill>
-          <a:ln>
-            <a:solidFill>
-              <a:srgbClr val="D0D7DE"/>
-            </a:solidFill>
-          </a:ln>
-          <a:effectLst/>
-        </p:spPr>
-        <p:style>
-          <a:lnRef idx="1">
-            <a:schemeClr val="accent1"/>
-          </a:lnRef>
-          <a:fillRef idx="3">
-            <a:schemeClr val="accent1"/>
-          </a:fillRef>
-          <a:effectRef idx="2">
-            <a:schemeClr val="accent1"/>
-          </a:effectRef>
-          <a:fontRef idx="minor">
-            <a:schemeClr val="lt1"/>
-          </a:fontRef>
-        </p:style>
-        <p:txBody>
-          <a:bodyPr rtlCol="0" anchor="ctr" wrap="square"/>
-          <a:lstStyle/>
-          <a:p>
-            <a:pPr algn="just"/>
-            <a:r>
-              <a:rPr sz="1700" b="1">
-                <a:solidFill>
-                  <a:srgbClr val="1E7A45"/>
-                </a:solidFill>
-                <a:latin typeface="Times New Roman"/>
-              </a:rPr>
-              <a:t>In our repetition, the 30-30 net is best at T = 4 (526 errors); at T = 20 it is worse than with hard targets only</a:t>
-            </a:r>
-          </a:p>
-        </p:txBody>
-      </p:sp>
-      <p:sp>
-        <p:nvSpPr>
-          <p:cNvPr id="10" name="TextBox 9"/>
-          <p:cNvSpPr txBox="1"/>
-          <p:nvPr/>
-        </p:nvSpPr>
-        <p:spPr>
-          <a:xfrm>
-            <a:off x="731520" y="5897880"/>
-            <a:ext cx="10881360" cy="731520"/>
-          </a:xfrm>
-          <a:prstGeom prst="rect">
-            <a:avLst/>
-          </a:prstGeom>
-          <a:noFill/>
-        </p:spPr>
-        <p:txBody>
-          <a:bodyPr wrap="square">
-            <a:spAutoFit/>
-          </a:bodyPr>
-          <a:lstStyle/>
-          <a:p>
-            <a:pPr algn="just"/>
-            <a:r>
-              <a:rPr sz="1600" b="0" i="0">
-                <a:solidFill>
-                  <a:srgbClr val="59636E"/>
-                </a:solidFill>
-                <a:latin typeface="Times New Roman"/>
-              </a:rPr>
-              <a:t>When the distilled model is much too small to capture all of the knowledge, ignoring the large negative logits can be helpful.</a:t>
             </a:r>
           </a:p>
         </p:txBody>
@@ -17366,6 +17753,1151 @@
                 </a:solidFill>
                 <a:latin typeface="Times New Roman"/>
               </a:rPr>
+              <a:t>4. Intermediate temperatures for a very small net</a:t>
+            </a:r>
+          </a:p>
+        </p:txBody>
+      </p:sp>
+      <p:sp>
+        <p:nvSpPr>
+          <p:cNvPr id="5" name="TextBox 4"/>
+          <p:cNvSpPr txBox="1"/>
+          <p:nvPr/>
+        </p:nvSpPr>
+        <p:spPr>
+          <a:xfrm>
+            <a:off x="411480" y="521207"/>
+            <a:ext cx="11338560" cy="301752"/>
+          </a:xfrm>
+          <a:prstGeom prst="rect">
+            <a:avLst/>
+          </a:prstGeom>
+          <a:noFill/>
+        </p:spPr>
+        <p:txBody>
+          <a:bodyPr wrap="square">
+            <a:spAutoFit/>
+          </a:bodyPr>
+          <a:lstStyle/>
+          <a:p>
+            <a:pPr algn="just"/>
+            <a:r>
+              <a:rPr sz="1400" b="0" i="0">
+                <a:solidFill>
+                  <a:srgbClr val="C7D6E5"/>
+                </a:solidFill>
+                <a:latin typeface="Times New Roman"/>
+              </a:rPr>
+              <a:t>The small net is reduced to 30-30</a:t>
+            </a:r>
+          </a:p>
+        </p:txBody>
+      </p:sp>
+      <p:graphicFrame>
+        <p:nvGraphicFramePr>
+          <p:cNvPr id="6" name="Table 5"/>
+          <p:cNvGraphicFramePr>
+            <a:graphicFrameLocks noGrp="1"/>
+          </p:cNvGraphicFramePr>
+          <p:nvPr/>
+        </p:nvGraphicFramePr>
+        <p:xfrm>
+          <a:off x="731520" y="1143000"/>
+          <a:ext cx="5669278" cy="2304288"/>
+        </p:xfrm>
+        <a:graphic>
+          <a:graphicData uri="http://schemas.openxmlformats.org/drawingml/2006/table">
+            <a:tbl>
+              <a:tblPr bandRow="1">
+                <a:tableStyleId>{5C22544A-7EE6-4342-B048-85BDC9FD1C3A}</a:tableStyleId>
+              </a:tblPr>
+              <a:tblGrid>
+                <a:gridCol w="2040940"/>
+                <a:gridCol w="1814169"/>
+                <a:gridCol w="1814169"/>
+              </a:tblGrid>
+              <a:tr h="329184">
+                <a:tc>
+                  <a:txBody>
+                    <a:bodyPr/>
+                    <a:lstStyle/>
+                    <a:p>
+                      <a:pPr algn="ctr"/>
+                      <a:r>
+                        <a:rPr sz="1600" b="1">
+                          <a:solidFill>
+                            <a:srgbClr val="FFFFFF"/>
+                          </a:solidFill>
+                          <a:latin typeface="Times New Roman"/>
+                        </a:rPr>
+                        <a:t>T</a:t>
+                      </a:r>
+                    </a:p>
+                  </a:txBody>
+                  <a:tcPr marL="36576" marR="36576" marT="9144" marB="9144">
+                    <a:solidFill>
+                      <a:srgbClr val="1F4E79"/>
+                    </a:solidFill>
+                  </a:tcPr>
+                </a:tc>
+                <a:tc>
+                  <a:txBody>
+                    <a:bodyPr/>
+                    <a:lstStyle/>
+                    <a:p>
+                      <a:pPr algn="ctr"/>
+                      <a:r>
+                        <a:rPr sz="1600" b="1">
+                          <a:solidFill>
+                            <a:srgbClr val="FFFFFF"/>
+                          </a:solidFill>
+                          <a:latin typeface="Times New Roman"/>
+                        </a:rPr>
+                        <a:t>Small net 100-100</a:t>
+                      </a:r>
+                    </a:p>
+                  </a:txBody>
+                  <a:tcPr marL="36576" marR="36576" marT="9144" marB="9144">
+                    <a:solidFill>
+                      <a:srgbClr val="1F4E79"/>
+                    </a:solidFill>
+                  </a:tcPr>
+                </a:tc>
+                <a:tc>
+                  <a:txBody>
+                    <a:bodyPr/>
+                    <a:lstStyle/>
+                    <a:p>
+                      <a:pPr algn="ctr"/>
+                      <a:r>
+                        <a:rPr sz="1600" b="1">
+                          <a:solidFill>
+                            <a:srgbClr val="FFFFFF"/>
+                          </a:solidFill>
+                          <a:latin typeface="Times New Roman"/>
+                        </a:rPr>
+                        <a:t>Small net 30-30</a:t>
+                      </a:r>
+                    </a:p>
+                  </a:txBody>
+                  <a:tcPr marL="36576" marR="36576" marT="9144" marB="9144">
+                    <a:solidFill>
+                      <a:srgbClr val="1F4E79"/>
+                    </a:solidFill>
+                  </a:tcPr>
+                </a:tc>
+              </a:tr>
+              <a:tr h="329184">
+                <a:tc>
+                  <a:txBody>
+                    <a:bodyPr/>
+                    <a:lstStyle/>
+                    <a:p>
+                      <a:pPr algn="ctr"/>
+                      <a:r>
+                        <a:rPr sz="1600" b="0">
+                          <a:solidFill>
+                            <a:srgbClr val="202020"/>
+                          </a:solidFill>
+                          <a:latin typeface="Times New Roman"/>
+                        </a:rPr>
+                        <a:t>hard targets only</a:t>
+                      </a:r>
+                    </a:p>
+                  </a:txBody>
+                  <a:tcPr marL="36576" marR="36576" marT="9144" marB="9144">
+                    <a:solidFill>
+                      <a:srgbClr val="FFFFFF"/>
+                    </a:solidFill>
+                  </a:tcPr>
+                </a:tc>
+                <a:tc>
+                  <a:txBody>
+                    <a:bodyPr/>
+                    <a:lstStyle/>
+                    <a:p>
+                      <a:pPr algn="ctr"/>
+                      <a:r>
+                        <a:rPr sz="1600" b="0">
+                          <a:solidFill>
+                            <a:srgbClr val="202020"/>
+                          </a:solidFill>
+                          <a:latin typeface="Times New Roman"/>
+                        </a:rPr>
+                        <a:t>420</a:t>
+                      </a:r>
+                    </a:p>
+                  </a:txBody>
+                  <a:tcPr marL="36576" marR="36576" marT="9144" marB="9144">
+                    <a:solidFill>
+                      <a:srgbClr val="FFFFFF"/>
+                    </a:solidFill>
+                  </a:tcPr>
+                </a:tc>
+                <a:tc>
+                  <a:txBody>
+                    <a:bodyPr/>
+                    <a:lstStyle/>
+                    <a:p>
+                      <a:pPr algn="ctr"/>
+                      <a:r>
+                        <a:rPr sz="1600" b="0">
+                          <a:solidFill>
+                            <a:srgbClr val="202020"/>
+                          </a:solidFill>
+                          <a:latin typeface="Times New Roman"/>
+                        </a:rPr>
+                        <a:t>568</a:t>
+                      </a:r>
+                    </a:p>
+                  </a:txBody>
+                  <a:tcPr marL="36576" marR="36576" marT="9144" marB="9144">
+                    <a:solidFill>
+                      <a:srgbClr val="FFFFFF"/>
+                    </a:solidFill>
+                  </a:tcPr>
+                </a:tc>
+              </a:tr>
+              <a:tr h="329184">
+                <a:tc>
+                  <a:txBody>
+                    <a:bodyPr/>
+                    <a:lstStyle/>
+                    <a:p>
+                      <a:pPr algn="ctr"/>
+                      <a:r>
+                        <a:rPr sz="1600" b="0">
+                          <a:solidFill>
+                            <a:srgbClr val="202020"/>
+                          </a:solidFill>
+                          <a:latin typeface="Times New Roman"/>
+                        </a:rPr>
+                        <a:t>1</a:t>
+                      </a:r>
+                    </a:p>
+                  </a:txBody>
+                  <a:tcPr marL="36576" marR="36576" marT="9144" marB="9144">
+                    <a:solidFill>
+                      <a:srgbClr val="FFFFFF"/>
+                    </a:solidFill>
+                  </a:tcPr>
+                </a:tc>
+                <a:tc>
+                  <a:txBody>
+                    <a:bodyPr/>
+                    <a:lstStyle/>
+                    <a:p>
+                      <a:pPr algn="ctr"/>
+                      <a:r>
+                        <a:rPr sz="1600" b="0">
+                          <a:solidFill>
+                            <a:srgbClr val="202020"/>
+                          </a:solidFill>
+                          <a:latin typeface="Times New Roman"/>
+                        </a:rPr>
+                        <a:t>402</a:t>
+                      </a:r>
+                    </a:p>
+                  </a:txBody>
+                  <a:tcPr marL="36576" marR="36576" marT="9144" marB="9144">
+                    <a:solidFill>
+                      <a:srgbClr val="FFFFFF"/>
+                    </a:solidFill>
+                  </a:tcPr>
+                </a:tc>
+                <a:tc>
+                  <a:txBody>
+                    <a:bodyPr/>
+                    <a:lstStyle/>
+                    <a:p>
+                      <a:pPr algn="ctr"/>
+                      <a:r>
+                        <a:rPr sz="1600" b="0">
+                          <a:solidFill>
+                            <a:srgbClr val="202020"/>
+                          </a:solidFill>
+                          <a:latin typeface="Times New Roman"/>
+                        </a:rPr>
+                        <a:t>561</a:t>
+                      </a:r>
+                    </a:p>
+                  </a:txBody>
+                  <a:tcPr marL="36576" marR="36576" marT="9144" marB="9144">
+                    <a:solidFill>
+                      <a:srgbClr val="FFFFFF"/>
+                    </a:solidFill>
+                  </a:tcPr>
+                </a:tc>
+              </a:tr>
+              <a:tr h="329184">
+                <a:tc>
+                  <a:txBody>
+                    <a:bodyPr/>
+                    <a:lstStyle/>
+                    <a:p>
+                      <a:pPr algn="ctr"/>
+                      <a:r>
+                        <a:rPr sz="1600" b="0">
+                          <a:solidFill>
+                            <a:srgbClr val="202020"/>
+                          </a:solidFill>
+                          <a:latin typeface="Times New Roman"/>
+                        </a:rPr>
+                        <a:t>2</a:t>
+                      </a:r>
+                    </a:p>
+                  </a:txBody>
+                  <a:tcPr marL="36576" marR="36576" marT="9144" marB="9144">
+                    <a:solidFill>
+                      <a:srgbClr val="FFFFFF"/>
+                    </a:solidFill>
+                  </a:tcPr>
+                </a:tc>
+                <a:tc>
+                  <a:txBody>
+                    <a:bodyPr/>
+                    <a:lstStyle/>
+                    <a:p>
+                      <a:pPr algn="ctr"/>
+                      <a:r>
+                        <a:rPr sz="1600" b="0">
+                          <a:solidFill>
+                            <a:srgbClr val="202020"/>
+                          </a:solidFill>
+                          <a:latin typeface="Times New Roman"/>
+                        </a:rPr>
+                        <a:t>349</a:t>
+                      </a:r>
+                    </a:p>
+                  </a:txBody>
+                  <a:tcPr marL="36576" marR="36576" marT="9144" marB="9144">
+                    <a:solidFill>
+                      <a:srgbClr val="FFFFFF"/>
+                    </a:solidFill>
+                  </a:tcPr>
+                </a:tc>
+                <a:tc>
+                  <a:txBody>
+                    <a:bodyPr/>
+                    <a:lstStyle/>
+                    <a:p>
+                      <a:pPr algn="ctr"/>
+                      <a:r>
+                        <a:rPr sz="1600" b="0">
+                          <a:solidFill>
+                            <a:srgbClr val="202020"/>
+                          </a:solidFill>
+                          <a:latin typeface="Times New Roman"/>
+                        </a:rPr>
+                        <a:t>544</a:t>
+                      </a:r>
+                    </a:p>
+                  </a:txBody>
+                  <a:tcPr marL="36576" marR="36576" marT="9144" marB="9144">
+                    <a:solidFill>
+                      <a:srgbClr val="FFFFFF"/>
+                    </a:solidFill>
+                  </a:tcPr>
+                </a:tc>
+              </a:tr>
+              <a:tr h="329184">
+                <a:tc>
+                  <a:txBody>
+                    <a:bodyPr/>
+                    <a:lstStyle/>
+                    <a:p>
+                      <a:pPr algn="ctr"/>
+                      <a:r>
+                        <a:rPr sz="1600" b="0">
+                          <a:solidFill>
+                            <a:srgbClr val="202020"/>
+                          </a:solidFill>
+                          <a:latin typeface="Times New Roman"/>
+                        </a:rPr>
+                        <a:t>4</a:t>
+                      </a:r>
+                    </a:p>
+                  </a:txBody>
+                  <a:tcPr marL="36576" marR="36576" marT="9144" marB="9144">
+                    <a:solidFill>
+                      <a:srgbClr val="FFFFFF"/>
+                    </a:solidFill>
+                  </a:tcPr>
+                </a:tc>
+                <a:tc>
+                  <a:txBody>
+                    <a:bodyPr/>
+                    <a:lstStyle/>
+                    <a:p>
+                      <a:pPr algn="ctr"/>
+                      <a:r>
+                        <a:rPr sz="1600" b="0">
+                          <a:solidFill>
+                            <a:srgbClr val="202020"/>
+                          </a:solidFill>
+                          <a:latin typeface="Times New Roman"/>
+                        </a:rPr>
+                        <a:t>349</a:t>
+                      </a:r>
+                    </a:p>
+                  </a:txBody>
+                  <a:tcPr marL="36576" marR="36576" marT="9144" marB="9144">
+                    <a:solidFill>
+                      <a:srgbClr val="FFFFFF"/>
+                    </a:solidFill>
+                  </a:tcPr>
+                </a:tc>
+                <a:tc>
+                  <a:txBody>
+                    <a:bodyPr/>
+                    <a:lstStyle/>
+                    <a:p>
+                      <a:pPr algn="ctr"/>
+                      <a:r>
+                        <a:rPr sz="1600" b="0">
+                          <a:solidFill>
+                            <a:srgbClr val="202020"/>
+                          </a:solidFill>
+                          <a:latin typeface="Times New Roman"/>
+                        </a:rPr>
+                        <a:t>526</a:t>
+                      </a:r>
+                    </a:p>
+                  </a:txBody>
+                  <a:tcPr marL="36576" marR="36576" marT="9144" marB="9144">
+                    <a:solidFill>
+                      <a:srgbClr val="FFF3CD"/>
+                    </a:solidFill>
+                  </a:tcPr>
+                </a:tc>
+              </a:tr>
+              <a:tr h="329184">
+                <a:tc>
+                  <a:txBody>
+                    <a:bodyPr/>
+                    <a:lstStyle/>
+                    <a:p>
+                      <a:pPr algn="ctr"/>
+                      <a:r>
+                        <a:rPr sz="1600" b="0">
+                          <a:solidFill>
+                            <a:srgbClr val="202020"/>
+                          </a:solidFill>
+                          <a:latin typeface="Times New Roman"/>
+                        </a:rPr>
+                        <a:t>8</a:t>
+                      </a:r>
+                    </a:p>
+                  </a:txBody>
+                  <a:tcPr marL="36576" marR="36576" marT="9144" marB="9144">
+                    <a:solidFill>
+                      <a:srgbClr val="FFFFFF"/>
+                    </a:solidFill>
+                  </a:tcPr>
+                </a:tc>
+                <a:tc>
+                  <a:txBody>
+                    <a:bodyPr/>
+                    <a:lstStyle/>
+                    <a:p>
+                      <a:pPr algn="ctr"/>
+                      <a:r>
+                        <a:rPr sz="1600" b="0">
+                          <a:solidFill>
+                            <a:srgbClr val="202020"/>
+                          </a:solidFill>
+                          <a:latin typeface="Times New Roman"/>
+                        </a:rPr>
+                        <a:t>347</a:t>
+                      </a:r>
+                    </a:p>
+                  </a:txBody>
+                  <a:tcPr marL="36576" marR="36576" marT="9144" marB="9144">
+                    <a:solidFill>
+                      <a:srgbClr val="FFFFFF"/>
+                    </a:solidFill>
+                  </a:tcPr>
+                </a:tc>
+                <a:tc>
+                  <a:txBody>
+                    <a:bodyPr/>
+                    <a:lstStyle/>
+                    <a:p>
+                      <a:pPr algn="ctr"/>
+                      <a:r>
+                        <a:rPr sz="1600" b="0">
+                          <a:solidFill>
+                            <a:srgbClr val="202020"/>
+                          </a:solidFill>
+                          <a:latin typeface="Times New Roman"/>
+                        </a:rPr>
+                        <a:t>570</a:t>
+                      </a:r>
+                    </a:p>
+                  </a:txBody>
+                  <a:tcPr marL="36576" marR="36576" marT="9144" marB="9144">
+                    <a:solidFill>
+                      <a:srgbClr val="FFFFFF"/>
+                    </a:solidFill>
+                  </a:tcPr>
+                </a:tc>
+              </a:tr>
+              <a:tr h="329184">
+                <a:tc>
+                  <a:txBody>
+                    <a:bodyPr/>
+                    <a:lstStyle/>
+                    <a:p>
+                      <a:pPr algn="ctr"/>
+                      <a:r>
+                        <a:rPr sz="1600" b="0">
+                          <a:solidFill>
+                            <a:srgbClr val="202020"/>
+                          </a:solidFill>
+                          <a:latin typeface="Times New Roman"/>
+                        </a:rPr>
+                        <a:t>20</a:t>
+                      </a:r>
+                    </a:p>
+                  </a:txBody>
+                  <a:tcPr marL="36576" marR="36576" marT="9144" marB="9144">
+                    <a:solidFill>
+                      <a:srgbClr val="FFFFFF"/>
+                    </a:solidFill>
+                  </a:tcPr>
+                </a:tc>
+                <a:tc>
+                  <a:txBody>
+                    <a:bodyPr/>
+                    <a:lstStyle/>
+                    <a:p>
+                      <a:pPr algn="ctr"/>
+                      <a:r>
+                        <a:rPr sz="1600" b="0">
+                          <a:solidFill>
+                            <a:srgbClr val="202020"/>
+                          </a:solidFill>
+                          <a:latin typeface="Times New Roman"/>
+                        </a:rPr>
+                        <a:t>318</a:t>
+                      </a:r>
+                    </a:p>
+                  </a:txBody>
+                  <a:tcPr marL="36576" marR="36576" marT="9144" marB="9144">
+                    <a:solidFill>
+                      <a:srgbClr val="FFFFFF"/>
+                    </a:solidFill>
+                  </a:tcPr>
+                </a:tc>
+                <a:tc>
+                  <a:txBody>
+                    <a:bodyPr/>
+                    <a:lstStyle/>
+                    <a:p>
+                      <a:pPr algn="ctr"/>
+                      <a:r>
+                        <a:rPr sz="1600" b="0">
+                          <a:solidFill>
+                            <a:srgbClr val="202020"/>
+                          </a:solidFill>
+                          <a:latin typeface="Times New Roman"/>
+                        </a:rPr>
+                        <a:t>598</a:t>
+                      </a:r>
+                    </a:p>
+                  </a:txBody>
+                  <a:tcPr marL="36576" marR="36576" marT="9144" marB="9144">
+                    <a:solidFill>
+                      <a:srgbClr val="FFFFFF"/>
+                    </a:solidFill>
+                  </a:tcPr>
+                </a:tc>
+              </a:tr>
+            </a:tbl>
+          </a:graphicData>
+        </a:graphic>
+      </p:graphicFrame>
+      <p:pic>
+        <p:nvPicPr>
+          <p:cNvPr id="7" name="Picture 6" descr="f_temp.png"/>
+          <p:cNvPicPr>
+            <a:picLocks noChangeAspect="1"/>
+          </p:cNvPicPr>
+          <p:nvPr/>
+        </p:nvPicPr>
+        <p:blipFill>
+          <a:blip r:embed="rId2"/>
+          <a:stretch>
+            <a:fillRect/>
+          </a:stretch>
+        </p:blipFill>
+        <p:spPr>
+          <a:xfrm>
+            <a:off x="6583680" y="1097280"/>
+            <a:ext cx="5120640" cy="2720340"/>
+          </a:xfrm>
+          <a:prstGeom prst="rect">
+            <a:avLst/>
+          </a:prstGeom>
+        </p:spPr>
+      </p:pic>
+      <p:sp>
+        <p:nvSpPr>
+          <p:cNvPr id="8" name="Rectangle 7"/>
+          <p:cNvSpPr/>
+          <p:nvPr/>
+        </p:nvSpPr>
+        <p:spPr>
+          <a:xfrm>
+            <a:off x="731520" y="3886200"/>
+            <a:ext cx="10881360" cy="914400"/>
+          </a:xfrm>
+          <a:prstGeom prst="rect">
+            <a:avLst/>
+          </a:prstGeom>
+          <a:solidFill>
+            <a:srgbClr val="F6F8FA"/>
+          </a:solidFill>
+          <a:ln>
+            <a:solidFill>
+              <a:srgbClr val="D0D7DE"/>
+            </a:solidFill>
+          </a:ln>
+          <a:effectLst/>
+        </p:spPr>
+        <p:style>
+          <a:lnRef idx="1">
+            <a:schemeClr val="accent1"/>
+          </a:lnRef>
+          <a:fillRef idx="3">
+            <a:schemeClr val="accent1"/>
+          </a:fillRef>
+          <a:effectRef idx="2">
+            <a:schemeClr val="accent1"/>
+          </a:effectRef>
+          <a:fontRef idx="minor">
+            <a:schemeClr val="lt1"/>
+          </a:fontRef>
+        </p:style>
+        <p:txBody>
+          <a:bodyPr rtlCol="0" anchor="ctr" wrap="square"/>
+          <a:lstStyle/>
+          <a:p>
+            <a:pPr algn="just"/>
+            <a:r>
+              <a:rPr sz="1500" b="1">
+                <a:solidFill>
+                  <a:srgbClr val="1F4E79"/>
+                </a:solidFill>
+                <a:latin typeface="Times New Roman"/>
+              </a:rPr>
+              <a:t>Paper: with 300 or more units per layer, all temperatures above 8 gave fairly similar results; with 30 units per layer,</a:t>
+            </a:r>
+          </a:p>
+          <a:p>
+            <a:pPr algn="just"/>
+            <a:r>
+              <a:rPr sz="1500" b="1">
+                <a:solidFill>
+                  <a:srgbClr val="1F4E79"/>
+                </a:solidFill>
+                <a:latin typeface="Times New Roman"/>
+              </a:rPr>
+              <a:t>temperatures in the range 2.5 to 4 worked significantly better than higher or lower temperatures</a:t>
+            </a:r>
+          </a:p>
+        </p:txBody>
+      </p:sp>
+      <p:sp>
+        <p:nvSpPr>
+          <p:cNvPr id="9" name="Rectangle 8"/>
+          <p:cNvSpPr/>
+          <p:nvPr/>
+        </p:nvSpPr>
+        <p:spPr>
+          <a:xfrm>
+            <a:off x="731520" y="4892040"/>
+            <a:ext cx="10881360" cy="914400"/>
+          </a:xfrm>
+          <a:prstGeom prst="rect">
+            <a:avLst/>
+          </a:prstGeom>
+          <a:solidFill>
+            <a:srgbClr val="DCF0E4"/>
+          </a:solidFill>
+          <a:ln>
+            <a:solidFill>
+              <a:srgbClr val="D0D7DE"/>
+            </a:solidFill>
+          </a:ln>
+          <a:effectLst/>
+        </p:spPr>
+        <p:style>
+          <a:lnRef idx="1">
+            <a:schemeClr val="accent1"/>
+          </a:lnRef>
+          <a:fillRef idx="3">
+            <a:schemeClr val="accent1"/>
+          </a:fillRef>
+          <a:effectRef idx="2">
+            <a:schemeClr val="accent1"/>
+          </a:effectRef>
+          <a:fontRef idx="minor">
+            <a:schemeClr val="lt1"/>
+          </a:fontRef>
+        </p:style>
+        <p:txBody>
+          <a:bodyPr rtlCol="0" anchor="ctr" wrap="square"/>
+          <a:lstStyle/>
+          <a:p>
+            <a:pPr algn="just"/>
+            <a:r>
+              <a:rPr sz="1700" b="1">
+                <a:solidFill>
+                  <a:srgbClr val="1E7A45"/>
+                </a:solidFill>
+                <a:latin typeface="Times New Roman"/>
+              </a:rPr>
+              <a:t>In our repetition, the 30-30 net is best at T = 4 (526 errors); at T = 20 it is worse than with hard targets only</a:t>
+            </a:r>
+          </a:p>
+        </p:txBody>
+      </p:sp>
+      <p:sp>
+        <p:nvSpPr>
+          <p:cNvPr id="10" name="TextBox 9"/>
+          <p:cNvSpPr txBox="1"/>
+          <p:nvPr/>
+        </p:nvSpPr>
+        <p:spPr>
+          <a:xfrm>
+            <a:off x="731520" y="5897880"/>
+            <a:ext cx="10881360" cy="731520"/>
+          </a:xfrm>
+          <a:prstGeom prst="rect">
+            <a:avLst/>
+          </a:prstGeom>
+          <a:noFill/>
+        </p:spPr>
+        <p:txBody>
+          <a:bodyPr wrap="square">
+            <a:spAutoFit/>
+          </a:bodyPr>
+          <a:lstStyle/>
+          <a:p>
+            <a:pPr algn="just"/>
+            <a:r>
+              <a:rPr sz="1600" b="0" i="0">
+                <a:solidFill>
+                  <a:srgbClr val="59636E"/>
+                </a:solidFill>
+                <a:latin typeface="Times New Roman"/>
+              </a:rPr>
+              <a:t>When the distilled model is much too small to capture all of the knowledge, ignoring the large negative logits can be helpful.</a:t>
+            </a:r>
+          </a:p>
+        </p:txBody>
+      </p:sp>
+    </p:spTree>
+  </p:cSld>
+  <p:clrMapOvr>
+    <a:masterClrMapping/>
+  </p:clrMapOvr>
+  <p:timing>
+    <p:tnLst>
+      <p:par>
+        <p:cTn id="1" dur="indefinite" restart="never" nodeType="tmRoot">
+          <p:childTnLst>
+            <p:seq concurrent="1" nextAc="seek">
+              <p:cTn id="2" dur="indefinite" nodeType="mainSeq">
+                <p:childTnLst>
+                  <p:par>
+                    <p:cTn id="3" fill="hold">
+                      <p:stCondLst>
+                        <p:cond delay="indefinite"/>
+                      </p:stCondLst>
+                      <p:childTnLst>
+                        <p:par>
+                          <p:cTn id="4" fill="hold">
+                            <p:stCondLst>
+                              <p:cond delay="0"/>
+                            </p:stCondLst>
+                            <p:childTnLst>
+                              <p:par>
+                                <p:cTn id="5" presetID="1" presetClass="entr" presetSubtype="0" fill="hold" grpId="0" nodeType="clickEffect">
+                                  <p:stCondLst>
+                                    <p:cond delay="0"/>
+                                  </p:stCondLst>
+                                  <p:childTnLst>
+                                    <p:set>
+                                      <p:cBhvr>
+                                        <p:cTn id="6" dur="1" fill="hold">
+                                          <p:stCondLst>
+                                            <p:cond delay="0"/>
+                                          </p:stCondLst>
+                                        </p:cTn>
+                                        <p:tgtEl>
+                                          <p:spTgt spid="6"/>
+                                        </p:tgtEl>
+                                        <p:attrNameLst>
+                                          <p:attrName>style.visibility</p:attrName>
+                                        </p:attrNameLst>
+                                      </p:cBhvr>
+                                      <p:to>
+                                        <p:strVal val="visible"/>
+                                      </p:to>
+                                    </p:set>
+                                  </p:childTnLst>
+                                </p:cTn>
+                              </p:par>
+                            </p:childTnLst>
+                          </p:cTn>
+                        </p:par>
+                      </p:childTnLst>
+                    </p:cTn>
+                  </p:par>
+                  <p:par>
+                    <p:cTn id="7" fill="hold">
+                      <p:stCondLst>
+                        <p:cond delay="indefinite"/>
+                      </p:stCondLst>
+                      <p:childTnLst>
+                        <p:par>
+                          <p:cTn id="8" fill="hold">
+                            <p:stCondLst>
+                              <p:cond delay="0"/>
+                            </p:stCondLst>
+                            <p:childTnLst>
+                              <p:par>
+                                <p:cTn id="9" presetID="1" presetClass="entr" presetSubtype="0" fill="hold" grpId="0" nodeType="clickEffect">
+                                  <p:stCondLst>
+                                    <p:cond delay="0"/>
+                                  </p:stCondLst>
+                                  <p:childTnLst>
+                                    <p:set>
+                                      <p:cBhvr>
+                                        <p:cTn id="10" dur="1" fill="hold">
+                                          <p:stCondLst>
+                                            <p:cond delay="0"/>
+                                          </p:stCondLst>
+                                        </p:cTn>
+                                        <p:tgtEl>
+                                          <p:spTgt spid="7"/>
+                                        </p:tgtEl>
+                                        <p:attrNameLst>
+                                          <p:attrName>style.visibility</p:attrName>
+                                        </p:attrNameLst>
+                                      </p:cBhvr>
+                                      <p:to>
+                                        <p:strVal val="visible"/>
+                                      </p:to>
+                                    </p:set>
+                                  </p:childTnLst>
+                                </p:cTn>
+                              </p:par>
+                            </p:childTnLst>
+                          </p:cTn>
+                        </p:par>
+                      </p:childTnLst>
+                    </p:cTn>
+                  </p:par>
+                  <p:par>
+                    <p:cTn id="11" fill="hold">
+                      <p:stCondLst>
+                        <p:cond delay="indefinite"/>
+                      </p:stCondLst>
+                      <p:childTnLst>
+                        <p:par>
+                          <p:cTn id="12" fill="hold">
+                            <p:stCondLst>
+                              <p:cond delay="0"/>
+                            </p:stCondLst>
+                            <p:childTnLst>
+                              <p:par>
+                                <p:cTn id="13" presetID="1" presetClass="entr" presetSubtype="0" fill="hold" grpId="0" nodeType="clickEffect">
+                                  <p:stCondLst>
+                                    <p:cond delay="0"/>
+                                  </p:stCondLst>
+                                  <p:childTnLst>
+                                    <p:set>
+                                      <p:cBhvr>
+                                        <p:cTn id="14" dur="1" fill="hold">
+                                          <p:stCondLst>
+                                            <p:cond delay="0"/>
+                                          </p:stCondLst>
+                                        </p:cTn>
+                                        <p:tgtEl>
+                                          <p:spTgt spid="8"/>
+                                        </p:tgtEl>
+                                        <p:attrNameLst>
+                                          <p:attrName>style.visibility</p:attrName>
+                                        </p:attrNameLst>
+                                      </p:cBhvr>
+                                      <p:to>
+                                        <p:strVal val="visible"/>
+                                      </p:to>
+                                    </p:set>
+                                  </p:childTnLst>
+                                </p:cTn>
+                              </p:par>
+                            </p:childTnLst>
+                          </p:cTn>
+                        </p:par>
+                      </p:childTnLst>
+                    </p:cTn>
+                  </p:par>
+                  <p:par>
+                    <p:cTn id="15" fill="hold">
+                      <p:stCondLst>
+                        <p:cond delay="indefinite"/>
+                      </p:stCondLst>
+                      <p:childTnLst>
+                        <p:par>
+                          <p:cTn id="16" fill="hold">
+                            <p:stCondLst>
+                              <p:cond delay="0"/>
+                            </p:stCondLst>
+                            <p:childTnLst>
+                              <p:par>
+                                <p:cTn id="17" presetID="1" presetClass="entr" presetSubtype="0" fill="hold" grpId="0" nodeType="clickEffect">
+                                  <p:stCondLst>
+                                    <p:cond delay="0"/>
+                                  </p:stCondLst>
+                                  <p:childTnLst>
+                                    <p:set>
+                                      <p:cBhvr>
+                                        <p:cTn id="18" dur="1" fill="hold">
+                                          <p:stCondLst>
+                                            <p:cond delay="0"/>
+                                          </p:stCondLst>
+                                        </p:cTn>
+                                        <p:tgtEl>
+                                          <p:spTgt spid="9"/>
+                                        </p:tgtEl>
+                                        <p:attrNameLst>
+                                          <p:attrName>style.visibility</p:attrName>
+                                        </p:attrNameLst>
+                                      </p:cBhvr>
+                                      <p:to>
+                                        <p:strVal val="visible"/>
+                                      </p:to>
+                                    </p:set>
+                                  </p:childTnLst>
+                                </p:cTn>
+                              </p:par>
+                            </p:childTnLst>
+                          </p:cTn>
+                        </p:par>
+                      </p:childTnLst>
+                    </p:cTn>
+                  </p:par>
+                  <p:par>
+                    <p:cTn id="19" fill="hold">
+                      <p:stCondLst>
+                        <p:cond delay="indefinite"/>
+                      </p:stCondLst>
+                      <p:childTnLst>
+                        <p:par>
+                          <p:cTn id="20" fill="hold">
+                            <p:stCondLst>
+                              <p:cond delay="0"/>
+                            </p:stCondLst>
+                            <p:childTnLst>
+                              <p:par>
+                                <p:cTn id="21" presetID="1" presetClass="entr" presetSubtype="0" fill="hold" grpId="0" nodeType="clickEffect">
+                                  <p:stCondLst>
+                                    <p:cond delay="0"/>
+                                  </p:stCondLst>
+                                  <p:childTnLst>
+                                    <p:set>
+                                      <p:cBhvr>
+                                        <p:cTn id="22" dur="1" fill="hold">
+                                          <p:stCondLst>
+                                            <p:cond delay="0"/>
+                                          </p:stCondLst>
+                                        </p:cTn>
+                                        <p:tgtEl>
+                                          <p:spTgt spid="10"/>
+                                        </p:tgtEl>
+                                        <p:attrNameLst>
+                                          <p:attrName>style.visibility</p:attrName>
+                                        </p:attrNameLst>
+                                      </p:cBhvr>
+                                      <p:to>
+                                        <p:strVal val="visible"/>
+                                      </p:to>
+                                    </p:set>
+                                  </p:childTnLst>
+                                </p:cTn>
+                              </p:par>
+                            </p:childTnLst>
+                          </p:cTn>
+                        </p:par>
+                      </p:childTnLst>
+                    </p:cTn>
+                  </p:par>
+                </p:childTnLst>
+              </p:cTn>
+              <p:prevCondLst>
+                <p:cond evt="onPrev" delay="0">
+                  <p:tgtEl>
+                    <p:sldTgt/>
+                  </p:tgtEl>
+                </p:cond>
+              </p:prevCondLst>
+              <p:nextCondLst>
+                <p:cond evt="onNext" delay="0">
+                  <p:tgtEl>
+                    <p:sldTgt/>
+                  </p:tgtEl>
+                </p:cond>
+              </p:nextCondLst>
+            </p:seq>
+          </p:childTnLst>
+        </p:cTn>
+      </p:par>
+    </p:tnLst>
+    <p:bldLst>
+      <p:bldGraphic spid="6" grpId="0">
+        <p:bldAsOne/>
+      </p:bldGraphic>
+      <p:bldP spid="7" grpId="0" animBg="1"/>
+      <p:bldP spid="8" grpId="0" animBg="1"/>
+      <p:bldP spid="9" grpId="0" animBg="1"/>
+      <p:bldP spid="10" grpId="0" animBg="1"/>
+    </p:bldLst>
+  </p:timing>
+</p:sld>
+</file>
+
+<file path=ppt/slides/slide21.xml><?xml version="1.0" encoding="utf-8"?>
+<p:sld xmlns:a="http://schemas.openxmlformats.org/drawingml/2006/main" xmlns:p="http://schemas.openxmlformats.org/presentationml/2006/main" xmlns:r="http://schemas.openxmlformats.org/officeDocument/2006/relationships">
+  <p:cSld>
+    <p:spTree>
+      <p:nvGrpSpPr>
+        <p:cNvPr id="1" name=""/>
+        <p:cNvGrpSpPr/>
+        <p:nvPr/>
+      </p:nvGrpSpPr>
+      <p:grpSpPr/>
+      <p:sp>
+        <p:nvSpPr>
+          <p:cNvPr id="2" name="Rectangle 1"/>
+          <p:cNvSpPr/>
+          <p:nvPr/>
+        </p:nvSpPr>
+        <p:spPr>
+          <a:xfrm>
+            <a:off x="0" y="0"/>
+            <a:ext cx="12191695" cy="6858000"/>
+          </a:xfrm>
+          <a:prstGeom prst="rect">
+            <a:avLst/>
+          </a:prstGeom>
+          <a:solidFill>
+            <a:srgbClr val="FFFFFF"/>
+          </a:solidFill>
+          <a:ln>
+            <a:noFill/>
+          </a:ln>
+          <a:effectLst/>
+        </p:spPr>
+        <p:style>
+          <a:lnRef idx="1">
+            <a:schemeClr val="accent1"/>
+          </a:lnRef>
+          <a:fillRef idx="3">
+            <a:schemeClr val="accent1"/>
+          </a:fillRef>
+          <a:effectRef idx="2">
+            <a:schemeClr val="accent1"/>
+          </a:effectRef>
+          <a:fontRef idx="minor">
+            <a:schemeClr val="lt1"/>
+          </a:fontRef>
+        </p:style>
+        <p:txBody>
+          <a:bodyPr rtlCol="0" anchor="ctr"/>
+          <a:lstStyle/>
+          <a:p>
+            <a:pPr algn="ctr"/>
+          </a:p>
+        </p:txBody>
+      </p:sp>
+      <p:sp>
+        <p:nvSpPr>
+          <p:cNvPr id="3" name="Rectangle 2"/>
+          <p:cNvSpPr/>
+          <p:nvPr/>
+        </p:nvSpPr>
+        <p:spPr>
+          <a:xfrm>
+            <a:off x="0" y="0"/>
+            <a:ext cx="12191695" cy="868680"/>
+          </a:xfrm>
+          <a:prstGeom prst="rect">
+            <a:avLst/>
+          </a:prstGeom>
+          <a:solidFill>
+            <a:srgbClr val="1F4E79"/>
+          </a:solidFill>
+          <a:ln>
+            <a:noFill/>
+          </a:ln>
+          <a:effectLst/>
+        </p:spPr>
+        <p:style>
+          <a:lnRef idx="1">
+            <a:schemeClr val="accent1"/>
+          </a:lnRef>
+          <a:fillRef idx="3">
+            <a:schemeClr val="accent1"/>
+          </a:fillRef>
+          <a:effectRef idx="2">
+            <a:schemeClr val="accent1"/>
+          </a:effectRef>
+          <a:fontRef idx="minor">
+            <a:schemeClr val="lt1"/>
+          </a:fontRef>
+        </p:style>
+        <p:txBody>
+          <a:bodyPr rtlCol="0" anchor="ctr"/>
+          <a:lstStyle/>
+          <a:p>
+            <a:pPr algn="ctr"/>
+          </a:p>
+        </p:txBody>
+      </p:sp>
+      <p:sp>
+        <p:nvSpPr>
+          <p:cNvPr id="4" name="TextBox 3"/>
+          <p:cNvSpPr txBox="1"/>
+          <p:nvPr/>
+        </p:nvSpPr>
+        <p:spPr>
+          <a:xfrm>
+            <a:off x="411480" y="54864"/>
+            <a:ext cx="11338560" cy="457200"/>
+          </a:xfrm>
+          <a:prstGeom prst="rect">
+            <a:avLst/>
+          </a:prstGeom>
+          <a:noFill/>
+        </p:spPr>
+        <p:txBody>
+          <a:bodyPr wrap="square">
+            <a:spAutoFit/>
+          </a:bodyPr>
+          <a:lstStyle/>
+          <a:p>
+            <a:pPr algn="just"/>
+            <a:r>
+              <a:rPr sz="2800" b="1" i="0">
+                <a:solidFill>
+                  <a:srgbClr val="FFFFFF"/>
+                </a:solidFill>
+                <a:latin typeface="Times New Roman"/>
+              </a:rPr>
               <a:t>4. A mythical digit 3</a:t>
             </a:r>
           </a:p>
@@ -18417,7 +19949,7 @@
 </p:sld>
 </file>
 
-<file path=ppt/slides/slide21.xml><?xml version="1.0" encoding="utf-8"?>
+<file path=ppt/slides/slide22.xml><?xml version="1.0" encoding="utf-8"?>
 <p:sld xmlns:a="http://schemas.openxmlformats.org/drawingml/2006/main" xmlns:p="http://schemas.openxmlformats.org/presentationml/2006/main" xmlns:r="http://schemas.openxmlformats.org/officeDocument/2006/relationships">
   <p:cSld>
     <p:spTree>
@@ -19747,7 +21279,7 @@
 </p:sld>
 </file>
 
-<file path=ppt/slides/slide22.xml><?xml version="1.0" encoding="utf-8"?>
+<file path=ppt/slides/slide23.xml><?xml version="1.0" encoding="utf-8"?>
 <p:sld xmlns:a="http://schemas.openxmlformats.org/drawingml/2006/main" xmlns:p="http://schemas.openxmlformats.org/presentationml/2006/main" xmlns:r="http://schemas.openxmlformats.org/officeDocument/2006/relationships">
   <p:cSld>
     <p:spTree>
@@ -20095,7 +21627,7 @@
                 </a:solidFill>
                 <a:latin typeface="Times New Roman"/>
               </a:rPr>
-              <a:t>Exercise 1  At T = 2, what are the soft targets for v = (8, 4, 0)? Use the four steps of slide 9</a:t>
+              <a:t>Exercise 1  At T = 2, what are the soft targets for v = (8, 4, 0)? Use the four steps of slide 10</a:t>
             </a:r>
           </a:p>
         </p:txBody>
@@ -22026,7 +23558,7 @@
                           </a:solidFill>
                           <a:latin typeface="Times New Roman"/>
                         </a:rPr>
-                        <a:t>5</a:t>
+                        <a:t>5–6</a:t>
                       </a:r>
                     </a:p>
                   </a:txBody>
@@ -22097,7 +23629,7 @@
                           </a:solidFill>
                           <a:latin typeface="Times New Roman"/>
                         </a:rPr>
-                        <a:t>6–7</a:t>
+                        <a:t>7–8</a:t>
                       </a:r>
                     </a:p>
                   </a:txBody>
@@ -22168,7 +23700,7 @@
                           </a:solidFill>
                           <a:latin typeface="Times New Roman"/>
                         </a:rPr>
-                        <a:t>8–11</a:t>
+                        <a:t>9–12</a:t>
                       </a:r>
                     </a:p>
                   </a:txBody>
@@ -22239,7 +23771,7 @@
                           </a:solidFill>
                           <a:latin typeface="Times New Roman"/>
                         </a:rPr>
-                        <a:t>12–16</a:t>
+                        <a:t>13–17</a:t>
                       </a:r>
                     </a:p>
                   </a:txBody>
@@ -22310,7 +23842,7 @@
                           </a:solidFill>
                           <a:latin typeface="Times New Roman"/>
                         </a:rPr>
-                        <a:t>17–21</a:t>
+                        <a:t>18–22</a:t>
                       </a:r>
                     </a:p>
                   </a:txBody>
@@ -22381,7 +23913,7 @@
                           </a:solidFill>
                           <a:latin typeface="Times New Roman"/>
                         </a:rPr>
-                        <a:t>22</a:t>
+                        <a:t>23</a:t>
                       </a:r>
                     </a:p>
                   </a:txBody>
@@ -22842,7 +24374,7 @@
                 </a:solidFill>
                 <a:latin typeface="Times New Roman"/>
               </a:rPr>
-              <a:t>Terminology</a:t>
+              <a:t>Terminology (1 of 2)</a:t>
             </a:r>
           </a:p>
         </p:txBody>
@@ -22877,7 +24409,7 @@
                 </a:solidFill>
                 <a:latin typeface="Times New Roman"/>
               </a:rPr>
-              <a:t>Technical terms of this module: English, Chinese, and meaning</a:t>
+              <a:t>Models and training</a:t>
             </a:r>
           </a:p>
         </p:txBody>
@@ -22891,8 +24423,8 @@
           <p:nvPr/>
         </p:nvGraphicFramePr>
         <p:xfrm>
-          <a:off x="548640" y="1051560"/>
-          <a:ext cx="11109959" cy="4279392"/>
+          <a:off x="548640" y="1097280"/>
+          <a:ext cx="11109959" cy="2962656"/>
         </p:xfrm>
         <a:graphic>
           <a:graphicData uri="http://schemas.openxmlformats.org/drawingml/2006/table">
@@ -22913,7 +24445,7 @@
                     <a:p>
                       <a:pPr algn="ctr"/>
                       <a:r>
-                        <a:rPr sz="1400" b="1">
+                        <a:rPr sz="1500" b="1">
                           <a:solidFill>
                             <a:srgbClr val="FFFFFF"/>
                           </a:solidFill>
@@ -22936,7 +24468,7 @@
                     <a:p>
                       <a:pPr algn="ctr"/>
                       <a:r>
-                        <a:rPr sz="1400" b="1">
+                        <a:rPr sz="1500" b="1">
                           <a:solidFill>
                             <a:srgbClr val="FFFFFF"/>
                           </a:solidFill>
@@ -22959,7 +24491,7 @@
                     <a:p>
                       <a:pPr algn="ctr"/>
                       <a:r>
-                        <a:rPr sz="1400" b="1">
+                        <a:rPr sz="1500" b="1">
                           <a:solidFill>
                             <a:srgbClr val="FFFFFF"/>
                           </a:solidFill>
@@ -22984,7 +24516,7 @@
                     <a:p>
                       <a:pPr algn="ctr"/>
                       <a:r>
-                        <a:rPr sz="1400" b="1">
+                        <a:rPr sz="1500" b="1">
                           <a:solidFill>
                             <a:srgbClr val="202020"/>
                           </a:solidFill>
@@ -23007,7 +24539,7 @@
                     <a:p>
                       <a:pPr algn="ctr"/>
                       <a:r>
-                        <a:rPr sz="1400" b="1">
+                        <a:rPr sz="1500" b="1">
                           <a:solidFill>
                             <a:srgbClr val="202020"/>
                           </a:solidFill>
@@ -23030,7 +24562,7 @@
                     <a:p>
                       <a:pPr algn="just"/>
                       <a:r>
-                        <a:rPr sz="1400" b="0">
+                        <a:rPr sz="1500" b="0">
                           <a:solidFill>
                             <a:srgbClr val="202020"/>
                           </a:solidFill>
@@ -23055,7 +24587,7 @@
                     <a:p>
                       <a:pPr algn="ctr"/>
                       <a:r>
-                        <a:rPr sz="1400" b="1">
+                        <a:rPr sz="1500" b="1">
                           <a:solidFill>
                             <a:srgbClr val="202020"/>
                           </a:solidFill>
@@ -23078,7 +24610,7 @@
                     <a:p>
                       <a:pPr algn="ctr"/>
                       <a:r>
-                        <a:rPr sz="1400" b="1">
+                        <a:rPr sz="1500" b="1">
                           <a:solidFill>
                             <a:srgbClr val="202020"/>
                           </a:solidFill>
@@ -23101,13 +24633,13 @@
                     <a:p>
                       <a:pPr algn="just"/>
                       <a:r>
-                        <a:rPr sz="1400" b="0">
-                          <a:solidFill>
-                            <a:srgbClr val="202020"/>
-                          </a:solidFill>
-                          <a:latin typeface="Times New Roman"/>
-                        </a:rPr>
-                        <a:t>a large model trained to extract structure from the data: an ensemble of models or a very large net with a strong regularizer</a:t>
+                        <a:rPr sz="1500" b="0">
+                          <a:solidFill>
+                            <a:srgbClr val="202020"/>
+                          </a:solidFill>
+                          <a:latin typeface="Times New Roman"/>
+                        </a:rPr>
+                        <a:t>a large model trained to extract structure from the data: an ensemble of models or a very large net with a strong regularizer; now commonly called the teacher model</a:t>
                       </a:r>
                     </a:p>
                   </a:txBody>
@@ -23126,7 +24658,7 @@
                     <a:p>
                       <a:pPr algn="ctr"/>
                       <a:r>
-                        <a:rPr sz="1400" b="1">
+                        <a:rPr sz="1500" b="1">
                           <a:solidFill>
                             <a:srgbClr val="202020"/>
                           </a:solidFill>
@@ -23149,7 +24681,7 @@
                     <a:p>
                       <a:pPr algn="ctr"/>
                       <a:r>
-                        <a:rPr sz="1400" b="1">
+                        <a:rPr sz="1500" b="1">
                           <a:solidFill>
                             <a:srgbClr val="202020"/>
                           </a:solidFill>
@@ -23172,13 +24704,13 @@
                     <a:p>
                       <a:pPr algn="just"/>
                       <a:r>
-                        <a:rPr sz="1400" b="0">
-                          <a:solidFill>
-                            <a:srgbClr val="202020"/>
-                          </a:solidFill>
-                          <a:latin typeface="Times New Roman"/>
-                        </a:rPr>
-                        <a:t>the small model trained on soft targets and correct labels; after training it uses a temperature of 1</a:t>
+                        <a:rPr sz="1500" b="0">
+                          <a:solidFill>
+                            <a:srgbClr val="202020"/>
+                          </a:solidFill>
+                          <a:latin typeface="Times New Roman"/>
+                        </a:rPr>
+                        <a:t>the small model trained on soft targets and correct labels; after training it uses a temperature of 1; now commonly called the student model</a:t>
                       </a:r>
                     </a:p>
                   </a:txBody>
@@ -23197,7 +24729,7 @@
                     <a:p>
                       <a:pPr algn="ctr"/>
                       <a:r>
-                        <a:rPr sz="1400" b="1">
+                        <a:rPr sz="1500" b="1">
                           <a:solidFill>
                             <a:srgbClr val="202020"/>
                           </a:solidFill>
@@ -23220,7 +24752,7 @@
                     <a:p>
                       <a:pPr algn="ctr"/>
                       <a:r>
-                        <a:rPr sz="1400" b="1">
+                        <a:rPr sz="1500" b="1">
                           <a:solidFill>
                             <a:srgbClr val="202020"/>
                           </a:solidFill>
@@ -23243,7 +24775,7 @@
                     <a:p>
                       <a:pPr algn="just"/>
                       <a:r>
-                        <a:rPr sz="1400" b="0">
+                        <a:rPr sz="1500" b="0">
                           <a:solidFill>
                             <a:srgbClr val="202020"/>
                           </a:solidFill>
@@ -23268,13 +24800,13 @@
                     <a:p>
                       <a:pPr algn="ctr"/>
                       <a:r>
-                        <a:rPr sz="1400" b="1">
-                          <a:solidFill>
-                            <a:srgbClr val="202020"/>
-                          </a:solidFill>
-                          <a:latin typeface="Times New Roman"/>
-                        </a:rPr>
-                        <a:t>logit</a:t>
+                        <a:rPr sz="1500" b="1">
+                          <a:solidFill>
+                            <a:srgbClr val="202020"/>
+                          </a:solidFill>
+                          <a:latin typeface="Times New Roman"/>
+                        </a:rPr>
+                        <a:t>regularization</a:t>
                       </a:r>
                     </a:p>
                   </a:txBody>
@@ -23291,13 +24823,13 @@
                     <a:p>
                       <a:pPr algn="ctr"/>
                       <a:r>
-                        <a:rPr sz="1400" b="1">
+                        <a:rPr sz="1500" b="1">
                           <a:solidFill>
                             <a:srgbClr val="202020"/>
                           </a:solidFill>
                           <a:latin typeface="Microsoft JhengHei"/>
                         </a:rPr>
-                        <a:t>logit</a:t>
+                        <a:t>正則化</a:t>
                       </a:r>
                     </a:p>
                   </a:txBody>
@@ -23314,13 +24846,13 @@
                     <a:p>
                       <a:pPr algn="just"/>
                       <a:r>
-                        <a:rPr sz="1400" b="0">
-                          <a:solidFill>
-                            <a:srgbClr val="202020"/>
-                          </a:solidFill>
-                          <a:latin typeface="Times New Roman"/>
-                        </a:rPr>
-                        <a:t>the input to the final softmax: the value z_i computed for each class</a:t>
+                        <a:rPr sz="1500" b="0">
+                          <a:solidFill>
+                            <a:srgbClr val="202020"/>
+                          </a:solidFill>
+                          <a:latin typeface="Times New Roman"/>
+                        </a:rPr>
+                        <a:t>methods that constrain a model during training so that it does not fit the training data too closely (overfitting), e.g. dropout or weight constraints</a:t>
                       </a:r>
                     </a:p>
                   </a:txBody>
@@ -23339,13 +24871,13 @@
                     <a:p>
                       <a:pPr algn="ctr"/>
                       <a:r>
-                        <a:rPr sz="1400" b="1">
-                          <a:solidFill>
-                            <a:srgbClr val="202020"/>
-                          </a:solidFill>
-                          <a:latin typeface="Times New Roman"/>
-                        </a:rPr>
-                        <a:t>temperature (T)</a:t>
+                        <a:rPr sz="1500" b="1">
+                          <a:solidFill>
+                            <a:srgbClr val="202020"/>
+                          </a:solidFill>
+                          <a:latin typeface="Times New Roman"/>
+                        </a:rPr>
+                        <a:t>dropout</a:t>
                       </a:r>
                     </a:p>
                   </a:txBody>
@@ -23362,13 +24894,13 @@
                     <a:p>
                       <a:pPr algn="ctr"/>
                       <a:r>
-                        <a:rPr sz="1400" b="1">
+                        <a:rPr sz="1500" b="1">
                           <a:solidFill>
                             <a:srgbClr val="202020"/>
                           </a:solidFill>
                           <a:latin typeface="Microsoft JhengHei"/>
                         </a:rPr>
-                        <a:t>溫度</a:t>
+                        <a:t>dropout</a:t>
                       </a:r>
                     </a:p>
                   </a:txBody>
@@ -23385,13 +24917,13 @@
                     <a:p>
                       <a:pPr algn="just"/>
                       <a:r>
-                        <a:rPr sz="1400" b="0">
-                          <a:solidFill>
-                            <a:srgbClr val="202020"/>
-                          </a:solidFill>
-                          <a:latin typeface="Times New Roman"/>
-                        </a:rPr>
-                        <a:t>the divisor of the logits in the softmax; a higher T gives a softer distribution; normally T = 1</a:t>
+                        <a:rPr sz="1500" b="0">
+                          <a:solidFill>
+                            <a:srgbClr val="202020"/>
+                          </a:solidFill>
+                          <a:latin typeface="Times New Roman"/>
+                        </a:rPr>
+                        <a:t>a regularizer that randomly drops a fraction of the units on each training case; it can be viewed as training a very large ensemble of models that share weights</a:t>
                       </a:r>
                     </a:p>
                   </a:txBody>
@@ -23410,13 +24942,13 @@
                     <a:p>
                       <a:pPr algn="ctr"/>
                       <a:r>
-                        <a:rPr sz="1400" b="1">
-                          <a:solidFill>
-                            <a:srgbClr val="202020"/>
-                          </a:solidFill>
-                          <a:latin typeface="Times New Roman"/>
-                        </a:rPr>
-                        <a:t>soft targets</a:t>
+                        <a:rPr sz="1500" b="1">
+                          <a:solidFill>
+                            <a:srgbClr val="202020"/>
+                          </a:solidFill>
+                          <a:latin typeface="Times New Roman"/>
+                        </a:rPr>
+                        <a:t>transfer set</a:t>
                       </a:r>
                     </a:p>
                   </a:txBody>
@@ -23433,13 +24965,13 @@
                     <a:p>
                       <a:pPr algn="ctr"/>
                       <a:r>
-                        <a:rPr sz="1400" b="1">
+                        <a:rPr sz="1500" b="1">
                           <a:solidFill>
                             <a:srgbClr val="202020"/>
                           </a:solidFill>
                           <a:latin typeface="Microsoft JhengHei"/>
                         </a:rPr>
-                        <a:t>軟目標</a:t>
+                        <a:t>移轉集</a:t>
                       </a:r>
                     </a:p>
                   </a:txBody>
@@ -23456,13 +24988,13 @@
                     <a:p>
                       <a:pPr algn="just"/>
                       <a:r>
-                        <a:rPr sz="1400" b="0">
-                          <a:solidFill>
-                            <a:srgbClr val="202020"/>
-                          </a:solidFill>
-                          <a:latin typeface="Times New Roman"/>
-                        </a:rPr>
-                        <a:t>class probabilities produced by the cumbersome model at a high temperature; they keep the relative probabilities of incorrect answers</a:t>
+                        <a:rPr sz="1500" b="0">
+                          <a:solidFill>
+                            <a:srgbClr val="202020"/>
+                          </a:solidFill>
+                          <a:latin typeface="Times New Roman"/>
+                        </a:rPr>
+                        <a:t>the data used to train the distilled model: the original training set or unlabeled data</a:t>
                       </a:r>
                     </a:p>
                   </a:txBody>
@@ -23481,13 +25013,13 @@
                     <a:p>
                       <a:pPr algn="ctr"/>
                       <a:r>
-                        <a:rPr sz="1400" b="1">
-                          <a:solidFill>
-                            <a:srgbClr val="202020"/>
-                          </a:solidFill>
-                          <a:latin typeface="Times New Roman"/>
-                        </a:rPr>
-                        <a:t>hard targets</a:t>
+                        <a:rPr sz="1500" b="1">
+                          <a:solidFill>
+                            <a:srgbClr val="202020"/>
+                          </a:solidFill>
+                          <a:latin typeface="Times New Roman"/>
+                        </a:rPr>
+                        <a:t>generalization</a:t>
                       </a:r>
                     </a:p>
                   </a:txBody>
@@ -23504,13 +25036,13 @@
                     <a:p>
                       <a:pPr algn="ctr"/>
                       <a:r>
-                        <a:rPr sz="1400" b="1">
+                        <a:rPr sz="1500" b="1">
                           <a:solidFill>
                             <a:srgbClr val="202020"/>
                           </a:solidFill>
                           <a:latin typeface="Microsoft JhengHei"/>
                         </a:rPr>
-                        <a:t>硬目標</a:t>
+                        <a:t>類推</a:t>
                       </a:r>
                     </a:p>
                   </a:txBody>
@@ -23527,297 +25059,13 @@
                     <a:p>
                       <a:pPr algn="just"/>
                       <a:r>
-                        <a:rPr sz="1400" b="0">
-                          <a:solidFill>
-                            <a:srgbClr val="202020"/>
-                          </a:solidFill>
-                          <a:latin typeface="Times New Roman"/>
-                        </a:rPr>
-                        <a:t>the correct labels: 1 for the correct class and 0 for all others</a:t>
-                      </a:r>
-                    </a:p>
-                  </a:txBody>
-                  <a:tcPr marL="36576" marR="36576" marT="9144" marB="9144">
-                    <a:solidFill>
-                      <a:srgbClr val="FFFFFF"/>
-                    </a:solidFill>
-                  </a:tcPr>
-                </a:tc>
-              </a:tr>
-              <a:tr h="329184">
-                <a:tc>
-                  <a:txBody>
-                    <a:bodyPr/>
-                    <a:lstStyle/>
-                    <a:p>
-                      <a:pPr algn="ctr"/>
-                      <a:r>
-                        <a:rPr sz="1400" b="1">
-                          <a:solidFill>
-                            <a:srgbClr val="202020"/>
-                          </a:solidFill>
-                          <a:latin typeface="Times New Roman"/>
-                        </a:rPr>
-                        <a:t>transfer set</a:t>
-                      </a:r>
-                    </a:p>
-                  </a:txBody>
-                  <a:tcPr marL="36576" marR="36576" marT="9144" marB="9144">
-                    <a:solidFill>
-                      <a:srgbClr val="FFFFFF"/>
-                    </a:solidFill>
-                  </a:tcPr>
-                </a:tc>
-                <a:tc>
-                  <a:txBody>
-                    <a:bodyPr/>
-                    <a:lstStyle/>
-                    <a:p>
-                      <a:pPr algn="ctr"/>
-                      <a:r>
-                        <a:rPr sz="1400" b="1">
-                          <a:solidFill>
-                            <a:srgbClr val="202020"/>
-                          </a:solidFill>
-                          <a:latin typeface="Microsoft JhengHei"/>
-                        </a:rPr>
-                        <a:t>移轉集</a:t>
-                      </a:r>
-                    </a:p>
-                  </a:txBody>
-                  <a:tcPr marL="36576" marR="36576" marT="9144" marB="9144">
-                    <a:solidFill>
-                      <a:srgbClr val="FFFFFF"/>
-                    </a:solidFill>
-                  </a:tcPr>
-                </a:tc>
-                <a:tc>
-                  <a:txBody>
-                    <a:bodyPr/>
-                    <a:lstStyle/>
-                    <a:p>
-                      <a:pPr algn="just"/>
-                      <a:r>
-                        <a:rPr sz="1400" b="0">
-                          <a:solidFill>
-                            <a:srgbClr val="202020"/>
-                          </a:solidFill>
-                          <a:latin typeface="Times New Roman"/>
-                        </a:rPr>
-                        <a:t>the data used to train the distilled model: the original training set or unlabeled data</a:t>
-                      </a:r>
-                    </a:p>
-                  </a:txBody>
-                  <a:tcPr marL="36576" marR="36576" marT="9144" marB="9144">
-                    <a:solidFill>
-                      <a:srgbClr val="FFFFFF"/>
-                    </a:solidFill>
-                  </a:tcPr>
-                </a:tc>
-              </a:tr>
-              <a:tr h="329184">
-                <a:tc>
-                  <a:txBody>
-                    <a:bodyPr/>
-                    <a:lstStyle/>
-                    <a:p>
-                      <a:pPr algn="ctr"/>
-                      <a:r>
-                        <a:rPr sz="1400" b="1">
-                          <a:solidFill>
-                            <a:srgbClr val="202020"/>
-                          </a:solidFill>
-                          <a:latin typeface="Times New Roman"/>
-                        </a:rPr>
-                        <a:t>cross entropy</a:t>
-                      </a:r>
-                    </a:p>
-                  </a:txBody>
-                  <a:tcPr marL="36576" marR="36576" marT="9144" marB="9144">
-                    <a:solidFill>
-                      <a:srgbClr val="FFFFFF"/>
-                    </a:solidFill>
-                  </a:tcPr>
-                </a:tc>
-                <a:tc>
-                  <a:txBody>
-                    <a:bodyPr/>
-                    <a:lstStyle/>
-                    <a:p>
-                      <a:pPr algn="ctr"/>
-                      <a:r>
-                        <a:rPr sz="1400" b="1">
-                          <a:solidFill>
-                            <a:srgbClr val="202020"/>
-                          </a:solidFill>
-                          <a:latin typeface="Microsoft JhengHei"/>
-                        </a:rPr>
-                        <a:t>交叉熵</a:t>
-                      </a:r>
-                    </a:p>
-                  </a:txBody>
-                  <a:tcPr marL="36576" marR="36576" marT="9144" marB="9144">
-                    <a:solidFill>
-                      <a:srgbClr val="FFFFFF"/>
-                    </a:solidFill>
-                  </a:tcPr>
-                </a:tc>
-                <a:tc>
-                  <a:txBody>
-                    <a:bodyPr/>
-                    <a:lstStyle/>
-                    <a:p>
-                      <a:pPr algn="just"/>
-                      <a:r>
-                        <a:rPr sz="1400" b="0">
-                          <a:solidFill>
-                            <a:srgbClr val="202020"/>
-                          </a:solidFill>
-                          <a:latin typeface="Times New Roman"/>
-                        </a:rPr>
-                        <a:t>a measure of the difference between two distributions: C = −Σ p_i log q_i</a:t>
-                      </a:r>
-                    </a:p>
-                  </a:txBody>
-                  <a:tcPr marL="36576" marR="36576" marT="9144" marB="9144">
-                    <a:solidFill>
-                      <a:srgbClr val="FFFFFF"/>
-                    </a:solidFill>
-                  </a:tcPr>
-                </a:tc>
-              </a:tr>
-              <a:tr h="329184">
-                <a:tc>
-                  <a:txBody>
-                    <a:bodyPr/>
-                    <a:lstStyle/>
-                    <a:p>
-                      <a:pPr algn="ctr"/>
-                      <a:r>
-                        <a:rPr sz="1400" b="1">
-                          <a:solidFill>
-                            <a:srgbClr val="202020"/>
-                          </a:solidFill>
-                          <a:latin typeface="Times New Roman"/>
-                        </a:rPr>
-                        <a:t>matching logits</a:t>
-                      </a:r>
-                    </a:p>
-                  </a:txBody>
-                  <a:tcPr marL="36576" marR="36576" marT="9144" marB="9144">
-                    <a:solidFill>
-                      <a:srgbClr val="FFFFFF"/>
-                    </a:solidFill>
-                  </a:tcPr>
-                </a:tc>
-                <a:tc>
-                  <a:txBody>
-                    <a:bodyPr/>
-                    <a:lstStyle/>
-                    <a:p>
-                      <a:pPr algn="ctr"/>
-                      <a:r>
-                        <a:rPr sz="1400" b="1">
-                          <a:solidFill>
-                            <a:srgbClr val="202020"/>
-                          </a:solidFill>
-                          <a:latin typeface="Microsoft JhengHei"/>
-                        </a:rPr>
-                        <a:t>比對 logit</a:t>
-                      </a:r>
-                    </a:p>
-                  </a:txBody>
-                  <a:tcPr marL="36576" marR="36576" marT="9144" marB="9144">
-                    <a:solidFill>
-                      <a:srgbClr val="FFFFFF"/>
-                    </a:solidFill>
-                  </a:tcPr>
-                </a:tc>
-                <a:tc>
-                  <a:txBody>
-                    <a:bodyPr/>
-                    <a:lstStyle/>
-                    <a:p>
-                      <a:pPr algn="just"/>
-                      <a:r>
-                        <a:rPr sz="1400" b="0">
-                          <a:solidFill>
-                            <a:srgbClr val="202020"/>
-                          </a:solidFill>
-                          <a:latin typeface="Times New Roman"/>
-                        </a:rPr>
-                        <a:t>making the logits of the small model match those of the cumbersome model; the high-temperature limit of distillation</a:t>
-                      </a:r>
-                    </a:p>
-                  </a:txBody>
-                  <a:tcPr marL="36576" marR="36576" marT="9144" marB="9144">
-                    <a:solidFill>
-                      <a:srgbClr val="FFFFFF"/>
-                    </a:solidFill>
-                  </a:tcPr>
-                </a:tc>
-              </a:tr>
-              <a:tr h="329184">
-                <a:tc>
-                  <a:txBody>
-                    <a:bodyPr/>
-                    <a:lstStyle/>
-                    <a:p>
-                      <a:pPr algn="ctr"/>
-                      <a:r>
-                        <a:rPr sz="1400" b="1">
-                          <a:solidFill>
-                            <a:srgbClr val="202020"/>
-                          </a:solidFill>
-                          <a:latin typeface="Times New Roman"/>
-                        </a:rPr>
-                        <a:t>specialist models</a:t>
-                      </a:r>
-                    </a:p>
-                  </a:txBody>
-                  <a:tcPr marL="36576" marR="36576" marT="9144" marB="9144">
-                    <a:solidFill>
-                      <a:srgbClr val="FFFFFF"/>
-                    </a:solidFill>
-                  </a:tcPr>
-                </a:tc>
-                <a:tc>
-                  <a:txBody>
-                    <a:bodyPr/>
-                    <a:lstStyle/>
-                    <a:p>
-                      <a:pPr algn="ctr"/>
-                      <a:r>
-                        <a:rPr sz="1400" b="1">
-                          <a:solidFill>
-                            <a:srgbClr val="202020"/>
-                          </a:solidFill>
-                          <a:latin typeface="Microsoft JhengHei"/>
-                        </a:rPr>
-                        <a:t>專家模型</a:t>
-                      </a:r>
-                    </a:p>
-                  </a:txBody>
-                  <a:tcPr marL="36576" marR="36576" marT="9144" marB="9144">
-                    <a:solidFill>
-                      <a:srgbClr val="FFFFFF"/>
-                    </a:solidFill>
-                  </a:tcPr>
-                </a:tc>
-                <a:tc>
-                  <a:txBody>
-                    <a:bodyPr/>
-                    <a:lstStyle/>
-                    <a:p>
-                      <a:pPr algn="just"/>
-                      <a:r>
-                        <a:rPr sz="1400" b="0">
-                          <a:solidFill>
-                            <a:srgbClr val="202020"/>
-                          </a:solidFill>
-                          <a:latin typeface="Times New Roman"/>
-                        </a:rPr>
-                        <a:t>models that each handle a confusable subset of classes, used together with a generalist model</a:t>
+                        <a:rPr sz="1500" b="0">
+                          <a:solidFill>
+                            <a:srgbClr val="202020"/>
+                          </a:solidFill>
+                          <a:latin typeface="Times New Roman"/>
+                        </a:rPr>
+                        <a:t>the ability of a model to give correct outputs on new data that it has not seen</a:t>
                       </a:r>
                     </a:p>
                   </a:txBody>
@@ -23832,6 +25080,41 @@
           </a:graphicData>
         </a:graphic>
       </p:graphicFrame>
+      <p:sp>
+        <p:nvSpPr>
+          <p:cNvPr id="7" name="TextBox 6"/>
+          <p:cNvSpPr txBox="1"/>
+          <p:nvPr/>
+        </p:nvSpPr>
+        <p:spPr>
+          <a:xfrm>
+            <a:off x="548640" y="5989320"/>
+            <a:ext cx="11109960" cy="457200"/>
+          </a:xfrm>
+          <a:prstGeom prst="rect">
+            <a:avLst/>
+          </a:prstGeom>
+          <a:noFill/>
+        </p:spPr>
+        <p:txBody>
+          <a:bodyPr wrap="square">
+            <a:spAutoFit/>
+          </a:bodyPr>
+          <a:lstStyle/>
+          <a:p>
+            <a:pPr algn="just"/>
+            <a:r>
+              <a:rPr sz="1400" b="0" i="0">
+                <a:solidFill>
+                  <a:srgbClr val="59636E"/>
+                </a:solidFill>
+                <a:latin typeface="Times New Roman"/>
+              </a:rPr>
+              <a:t>The rest of this module keeps the terms of the paper (cumbersome model, distilled model) for easy comparison with the original.</a:t>
+            </a:r>
+          </a:p>
+        </p:txBody>
+      </p:sp>
     </p:spTree>
   </p:cSld>
   <p:clrMapOvr>
@@ -23890,6 +25173,51 @@
                       </p:childTnLst>
                     </p:cTn>
                   </p:par>
+                  <p:par>
+                    <p:cTn id="7" fill="hold">
+                      <p:stCondLst>
+                        <p:cond delay="indefinite"/>
+                      </p:stCondLst>
+                      <p:childTnLst>
+                        <p:par>
+                          <p:cTn id="8" fill="hold">
+                            <p:stCondLst>
+                              <p:cond delay="0"/>
+                            </p:stCondLst>
+                            <p:childTnLst>
+                              <p:par>
+                                <p:cTn id="9" presetID="1" presetClass="entr" presetSubtype="0" fill="hold" grpId="0" nodeType="clickEffect">
+                                  <p:stCondLst>
+                                    <p:cond delay="0"/>
+                                  </p:stCondLst>
+                                  <p:childTnLst>
+                                    <p:set>
+                                      <p:cBhvr>
+                                        <p:cTn id="10" dur="1" fill="hold">
+                                          <p:stCondLst>
+                                            <p:cond delay="0"/>
+                                          </p:stCondLst>
+                                        </p:cTn>
+                                        <p:tgtEl>
+                                          <p:spTgt spid="7"/>
+                                        </p:tgtEl>
+                                        <p:attrNameLst>
+                                          <p:attrName>style.visibility</p:attrName>
+                                        </p:attrNameLst>
+                                      </p:cBhvr>
+                                      <p:to>
+                                        <p:strVal val="visible"/>
+                                      </p:to>
+                                    </p:set>
+                                  </p:childTnLst>
+                                </p:cTn>
+                              </p:par>
+                            </p:childTnLst>
+                          </p:cTn>
+                        </p:par>
+                      </p:childTnLst>
+                    </p:cTn>
+                  </p:par>
                 </p:childTnLst>
               </p:cTn>
               <p:prevCondLst>
@@ -23915,12 +25243,1016 @@
       <p:bldGraphic spid="6" grpId="0">
         <p:bldAsOne/>
       </p:bldGraphic>
+      <p:bldP spid="7" grpId="0" animBg="1"/>
     </p:bldLst>
   </p:timing>
 </p:sld>
 </file>
 
 <file path=ppt/slides/slide6.xml><?xml version="1.0" encoding="utf-8"?>
+<p:sld xmlns:a="http://schemas.openxmlformats.org/drawingml/2006/main" xmlns:p="http://schemas.openxmlformats.org/presentationml/2006/main" xmlns:r="http://schemas.openxmlformats.org/officeDocument/2006/relationships">
+  <p:cSld>
+    <p:spTree>
+      <p:nvGrpSpPr>
+        <p:cNvPr id="1" name=""/>
+        <p:cNvGrpSpPr/>
+        <p:nvPr/>
+      </p:nvGrpSpPr>
+      <p:grpSpPr/>
+      <p:sp>
+        <p:nvSpPr>
+          <p:cNvPr id="2" name="Rectangle 1"/>
+          <p:cNvSpPr/>
+          <p:nvPr/>
+        </p:nvSpPr>
+        <p:spPr>
+          <a:xfrm>
+            <a:off x="0" y="0"/>
+            <a:ext cx="12191695" cy="6858000"/>
+          </a:xfrm>
+          <a:prstGeom prst="rect">
+            <a:avLst/>
+          </a:prstGeom>
+          <a:solidFill>
+            <a:srgbClr val="FFFFFF"/>
+          </a:solidFill>
+          <a:ln>
+            <a:noFill/>
+          </a:ln>
+          <a:effectLst/>
+        </p:spPr>
+        <p:style>
+          <a:lnRef idx="1">
+            <a:schemeClr val="accent1"/>
+          </a:lnRef>
+          <a:fillRef idx="3">
+            <a:schemeClr val="accent1"/>
+          </a:fillRef>
+          <a:effectRef idx="2">
+            <a:schemeClr val="accent1"/>
+          </a:effectRef>
+          <a:fontRef idx="minor">
+            <a:schemeClr val="lt1"/>
+          </a:fontRef>
+        </p:style>
+        <p:txBody>
+          <a:bodyPr rtlCol="0" anchor="ctr"/>
+          <a:lstStyle/>
+          <a:p>
+            <a:pPr algn="ctr"/>
+          </a:p>
+        </p:txBody>
+      </p:sp>
+      <p:sp>
+        <p:nvSpPr>
+          <p:cNvPr id="3" name="Rectangle 2"/>
+          <p:cNvSpPr/>
+          <p:nvPr/>
+        </p:nvSpPr>
+        <p:spPr>
+          <a:xfrm>
+            <a:off x="0" y="0"/>
+            <a:ext cx="12191695" cy="868680"/>
+          </a:xfrm>
+          <a:prstGeom prst="rect">
+            <a:avLst/>
+          </a:prstGeom>
+          <a:solidFill>
+            <a:srgbClr val="1F4E79"/>
+          </a:solidFill>
+          <a:ln>
+            <a:noFill/>
+          </a:ln>
+          <a:effectLst/>
+        </p:spPr>
+        <p:style>
+          <a:lnRef idx="1">
+            <a:schemeClr val="accent1"/>
+          </a:lnRef>
+          <a:fillRef idx="3">
+            <a:schemeClr val="accent1"/>
+          </a:fillRef>
+          <a:effectRef idx="2">
+            <a:schemeClr val="accent1"/>
+          </a:effectRef>
+          <a:fontRef idx="minor">
+            <a:schemeClr val="lt1"/>
+          </a:fontRef>
+        </p:style>
+        <p:txBody>
+          <a:bodyPr rtlCol="0" anchor="ctr"/>
+          <a:lstStyle/>
+          <a:p>
+            <a:pPr algn="ctr"/>
+          </a:p>
+        </p:txBody>
+      </p:sp>
+      <p:sp>
+        <p:nvSpPr>
+          <p:cNvPr id="4" name="TextBox 3"/>
+          <p:cNvSpPr txBox="1"/>
+          <p:nvPr/>
+        </p:nvSpPr>
+        <p:spPr>
+          <a:xfrm>
+            <a:off x="411480" y="54864"/>
+            <a:ext cx="11338560" cy="457200"/>
+          </a:xfrm>
+          <a:prstGeom prst="rect">
+            <a:avLst/>
+          </a:prstGeom>
+          <a:noFill/>
+        </p:spPr>
+        <p:txBody>
+          <a:bodyPr wrap="square">
+            <a:spAutoFit/>
+          </a:bodyPr>
+          <a:lstStyle/>
+          <a:p>
+            <a:pPr algn="just"/>
+            <a:r>
+              <a:rPr sz="2800" b="1" i="0">
+                <a:solidFill>
+                  <a:srgbClr val="FFFFFF"/>
+                </a:solidFill>
+                <a:latin typeface="Times New Roman"/>
+              </a:rPr>
+              <a:t>Terminology (2 of 2)</a:t>
+            </a:r>
+          </a:p>
+        </p:txBody>
+      </p:sp>
+      <p:sp>
+        <p:nvSpPr>
+          <p:cNvPr id="5" name="TextBox 4"/>
+          <p:cNvSpPr txBox="1"/>
+          <p:nvPr/>
+        </p:nvSpPr>
+        <p:spPr>
+          <a:xfrm>
+            <a:off x="411480" y="521207"/>
+            <a:ext cx="11338560" cy="301752"/>
+          </a:xfrm>
+          <a:prstGeom prst="rect">
+            <a:avLst/>
+          </a:prstGeom>
+          <a:noFill/>
+        </p:spPr>
+        <p:txBody>
+          <a:bodyPr wrap="square">
+            <a:spAutoFit/>
+          </a:bodyPr>
+          <a:lstStyle/>
+          <a:p>
+            <a:pPr algn="just"/>
+            <a:r>
+              <a:rPr sz="1400" b="0" i="0">
+                <a:solidFill>
+                  <a:srgbClr val="C7D6E5"/>
+                </a:solidFill>
+                <a:latin typeface="Times New Roman"/>
+              </a:rPr>
+              <a:t>Soft targets and computation</a:t>
+            </a:r>
+          </a:p>
+        </p:txBody>
+      </p:sp>
+      <p:graphicFrame>
+        <p:nvGraphicFramePr>
+          <p:cNvPr id="6" name="Table 5"/>
+          <p:cNvGraphicFramePr>
+            <a:graphicFrameLocks noGrp="1"/>
+          </p:cNvGraphicFramePr>
+          <p:nvPr/>
+        </p:nvGraphicFramePr>
+        <p:xfrm>
+          <a:off x="548640" y="1097280"/>
+          <a:ext cx="11109959" cy="2962656"/>
+        </p:xfrm>
+        <a:graphic>
+          <a:graphicData uri="http://schemas.openxmlformats.org/drawingml/2006/table">
+            <a:tbl>
+              <a:tblPr bandRow="1">
+                <a:tableStyleId>{5C22544A-7EE6-4342-B048-85BDC9FD1C3A}</a:tableStyleId>
+              </a:tblPr>
+              <a:tblGrid>
+                <a:gridCol w="2286000"/>
+                <a:gridCol w="1097280"/>
+                <a:gridCol w="7726679"/>
+              </a:tblGrid>
+              <a:tr h="329184">
+                <a:tc>
+                  <a:txBody>
+                    <a:bodyPr/>
+                    <a:lstStyle/>
+                    <a:p>
+                      <a:pPr algn="ctr"/>
+                      <a:r>
+                        <a:rPr sz="1500" b="1">
+                          <a:solidFill>
+                            <a:srgbClr val="FFFFFF"/>
+                          </a:solidFill>
+                          <a:latin typeface="Times New Roman"/>
+                        </a:rPr>
+                        <a:t>English</a:t>
+                      </a:r>
+                    </a:p>
+                  </a:txBody>
+                  <a:tcPr marL="36576" marR="36576" marT="9144" marB="9144">
+                    <a:solidFill>
+                      <a:srgbClr val="1F4E79"/>
+                    </a:solidFill>
+                  </a:tcPr>
+                </a:tc>
+                <a:tc>
+                  <a:txBody>
+                    <a:bodyPr/>
+                    <a:lstStyle/>
+                    <a:p>
+                      <a:pPr algn="ctr"/>
+                      <a:r>
+                        <a:rPr sz="1500" b="1">
+                          <a:solidFill>
+                            <a:srgbClr val="FFFFFF"/>
+                          </a:solidFill>
+                          <a:latin typeface="Times New Roman"/>
+                        </a:rPr>
+                        <a:t>Chinese</a:t>
+                      </a:r>
+                    </a:p>
+                  </a:txBody>
+                  <a:tcPr marL="36576" marR="36576" marT="9144" marB="9144">
+                    <a:solidFill>
+                      <a:srgbClr val="1F4E79"/>
+                    </a:solidFill>
+                  </a:tcPr>
+                </a:tc>
+                <a:tc>
+                  <a:txBody>
+                    <a:bodyPr/>
+                    <a:lstStyle/>
+                    <a:p>
+                      <a:pPr algn="ctr"/>
+                      <a:r>
+                        <a:rPr sz="1500" b="1">
+                          <a:solidFill>
+                            <a:srgbClr val="FFFFFF"/>
+                          </a:solidFill>
+                          <a:latin typeface="Times New Roman"/>
+                        </a:rPr>
+                        <a:t>Meaning</a:t>
+                      </a:r>
+                    </a:p>
+                  </a:txBody>
+                  <a:tcPr marL="36576" marR="36576" marT="9144" marB="9144">
+                    <a:solidFill>
+                      <a:srgbClr val="1F4E79"/>
+                    </a:solidFill>
+                  </a:tcPr>
+                </a:tc>
+              </a:tr>
+              <a:tr h="329184">
+                <a:tc>
+                  <a:txBody>
+                    <a:bodyPr/>
+                    <a:lstStyle/>
+                    <a:p>
+                      <a:pPr algn="ctr"/>
+                      <a:r>
+                        <a:rPr sz="1500" b="1">
+                          <a:solidFill>
+                            <a:srgbClr val="202020"/>
+                          </a:solidFill>
+                          <a:latin typeface="Times New Roman"/>
+                        </a:rPr>
+                        <a:t>logit</a:t>
+                      </a:r>
+                    </a:p>
+                  </a:txBody>
+                  <a:tcPr marL="36576" marR="36576" marT="9144" marB="9144">
+                    <a:solidFill>
+                      <a:srgbClr val="FFFFFF"/>
+                    </a:solidFill>
+                  </a:tcPr>
+                </a:tc>
+                <a:tc>
+                  <a:txBody>
+                    <a:bodyPr/>
+                    <a:lstStyle/>
+                    <a:p>
+                      <a:pPr algn="ctr"/>
+                      <a:r>
+                        <a:rPr sz="1500" b="1">
+                          <a:solidFill>
+                            <a:srgbClr val="202020"/>
+                          </a:solidFill>
+                          <a:latin typeface="Microsoft JhengHei"/>
+                        </a:rPr>
+                        <a:t>logit</a:t>
+                      </a:r>
+                    </a:p>
+                  </a:txBody>
+                  <a:tcPr marL="36576" marR="36576" marT="9144" marB="9144">
+                    <a:solidFill>
+                      <a:srgbClr val="FFFFFF"/>
+                    </a:solidFill>
+                  </a:tcPr>
+                </a:tc>
+                <a:tc>
+                  <a:txBody>
+                    <a:bodyPr/>
+                    <a:lstStyle/>
+                    <a:p>
+                      <a:pPr algn="just"/>
+                      <a:r>
+                        <a:rPr sz="1500" b="0">
+                          <a:solidFill>
+                            <a:srgbClr val="202020"/>
+                          </a:solidFill>
+                          <a:latin typeface="Times New Roman"/>
+                        </a:rPr>
+                        <a:t>the input to the final softmax: the value z_i computed for each class</a:t>
+                      </a:r>
+                    </a:p>
+                  </a:txBody>
+                  <a:tcPr marL="36576" marR="36576" marT="9144" marB="9144">
+                    <a:solidFill>
+                      <a:srgbClr val="FFFFFF"/>
+                    </a:solidFill>
+                  </a:tcPr>
+                </a:tc>
+              </a:tr>
+              <a:tr h="329184">
+                <a:tc>
+                  <a:txBody>
+                    <a:bodyPr/>
+                    <a:lstStyle/>
+                    <a:p>
+                      <a:pPr algn="ctr"/>
+                      <a:r>
+                        <a:rPr sz="1500" b="1">
+                          <a:solidFill>
+                            <a:srgbClr val="202020"/>
+                          </a:solidFill>
+                          <a:latin typeface="Times New Roman"/>
+                        </a:rPr>
+                        <a:t>softmax</a:t>
+                      </a:r>
+                    </a:p>
+                  </a:txBody>
+                  <a:tcPr marL="36576" marR="36576" marT="9144" marB="9144">
+                    <a:solidFill>
+                      <a:srgbClr val="FFFFFF"/>
+                    </a:solidFill>
+                  </a:tcPr>
+                </a:tc>
+                <a:tc>
+                  <a:txBody>
+                    <a:bodyPr/>
+                    <a:lstStyle/>
+                    <a:p>
+                      <a:pPr algn="ctr"/>
+                      <a:r>
+                        <a:rPr sz="1500" b="1">
+                          <a:solidFill>
+                            <a:srgbClr val="202020"/>
+                          </a:solidFill>
+                          <a:latin typeface="Microsoft JhengHei"/>
+                        </a:rPr>
+                        <a:t>softmax</a:t>
+                      </a:r>
+                    </a:p>
+                  </a:txBody>
+                  <a:tcPr marL="36576" marR="36576" marT="9144" marB="9144">
+                    <a:solidFill>
+                      <a:srgbClr val="FFFFFF"/>
+                    </a:solidFill>
+                  </a:tcPr>
+                </a:tc>
+                <a:tc>
+                  <a:txBody>
+                    <a:bodyPr/>
+                    <a:lstStyle/>
+                    <a:p>
+                      <a:pPr algn="just"/>
+                      <a:r>
+                        <a:rPr sz="1500" b="0">
+                          <a:solidFill>
+                            <a:srgbClr val="202020"/>
+                          </a:solidFill>
+                          <a:latin typeface="Times New Roman"/>
+                        </a:rPr>
+                        <a:t>the function that converts the logits into class probabilities that sum to 1</a:t>
+                      </a:r>
+                    </a:p>
+                  </a:txBody>
+                  <a:tcPr marL="36576" marR="36576" marT="9144" marB="9144">
+                    <a:solidFill>
+                      <a:srgbClr val="FFFFFF"/>
+                    </a:solidFill>
+                  </a:tcPr>
+                </a:tc>
+              </a:tr>
+              <a:tr h="329184">
+                <a:tc>
+                  <a:txBody>
+                    <a:bodyPr/>
+                    <a:lstStyle/>
+                    <a:p>
+                      <a:pPr algn="ctr"/>
+                      <a:r>
+                        <a:rPr sz="1500" b="1">
+                          <a:solidFill>
+                            <a:srgbClr val="202020"/>
+                          </a:solidFill>
+                          <a:latin typeface="Times New Roman"/>
+                        </a:rPr>
+                        <a:t>temperature (T)</a:t>
+                      </a:r>
+                    </a:p>
+                  </a:txBody>
+                  <a:tcPr marL="36576" marR="36576" marT="9144" marB="9144">
+                    <a:solidFill>
+                      <a:srgbClr val="FFFFFF"/>
+                    </a:solidFill>
+                  </a:tcPr>
+                </a:tc>
+                <a:tc>
+                  <a:txBody>
+                    <a:bodyPr/>
+                    <a:lstStyle/>
+                    <a:p>
+                      <a:pPr algn="ctr"/>
+                      <a:r>
+                        <a:rPr sz="1500" b="1">
+                          <a:solidFill>
+                            <a:srgbClr val="202020"/>
+                          </a:solidFill>
+                          <a:latin typeface="Microsoft JhengHei"/>
+                        </a:rPr>
+                        <a:t>溫度</a:t>
+                      </a:r>
+                    </a:p>
+                  </a:txBody>
+                  <a:tcPr marL="36576" marR="36576" marT="9144" marB="9144">
+                    <a:solidFill>
+                      <a:srgbClr val="FFFFFF"/>
+                    </a:solidFill>
+                  </a:tcPr>
+                </a:tc>
+                <a:tc>
+                  <a:txBody>
+                    <a:bodyPr/>
+                    <a:lstStyle/>
+                    <a:p>
+                      <a:pPr algn="just"/>
+                      <a:r>
+                        <a:rPr sz="1500" b="0">
+                          <a:solidFill>
+                            <a:srgbClr val="202020"/>
+                          </a:solidFill>
+                          <a:latin typeface="Times New Roman"/>
+                        </a:rPr>
+                        <a:t>the divisor of the logits in the softmax; a higher T gives a softer distribution; normally T = 1</a:t>
+                      </a:r>
+                    </a:p>
+                  </a:txBody>
+                  <a:tcPr marL="36576" marR="36576" marT="9144" marB="9144">
+                    <a:solidFill>
+                      <a:srgbClr val="FFFFFF"/>
+                    </a:solidFill>
+                  </a:tcPr>
+                </a:tc>
+              </a:tr>
+              <a:tr h="329184">
+                <a:tc>
+                  <a:txBody>
+                    <a:bodyPr/>
+                    <a:lstStyle/>
+                    <a:p>
+                      <a:pPr algn="ctr"/>
+                      <a:r>
+                        <a:rPr sz="1500" b="1">
+                          <a:solidFill>
+                            <a:srgbClr val="202020"/>
+                          </a:solidFill>
+                          <a:latin typeface="Times New Roman"/>
+                        </a:rPr>
+                        <a:t>soft targets</a:t>
+                      </a:r>
+                    </a:p>
+                  </a:txBody>
+                  <a:tcPr marL="36576" marR="36576" marT="9144" marB="9144">
+                    <a:solidFill>
+                      <a:srgbClr val="FFFFFF"/>
+                    </a:solidFill>
+                  </a:tcPr>
+                </a:tc>
+                <a:tc>
+                  <a:txBody>
+                    <a:bodyPr/>
+                    <a:lstStyle/>
+                    <a:p>
+                      <a:pPr algn="ctr"/>
+                      <a:r>
+                        <a:rPr sz="1500" b="1">
+                          <a:solidFill>
+                            <a:srgbClr val="202020"/>
+                          </a:solidFill>
+                          <a:latin typeface="Microsoft JhengHei"/>
+                        </a:rPr>
+                        <a:t>軟目標</a:t>
+                      </a:r>
+                    </a:p>
+                  </a:txBody>
+                  <a:tcPr marL="36576" marR="36576" marT="9144" marB="9144">
+                    <a:solidFill>
+                      <a:srgbClr val="FFFFFF"/>
+                    </a:solidFill>
+                  </a:tcPr>
+                </a:tc>
+                <a:tc>
+                  <a:txBody>
+                    <a:bodyPr/>
+                    <a:lstStyle/>
+                    <a:p>
+                      <a:pPr algn="just"/>
+                      <a:r>
+                        <a:rPr sz="1500" b="0">
+                          <a:solidFill>
+                            <a:srgbClr val="202020"/>
+                          </a:solidFill>
+                          <a:latin typeface="Times New Roman"/>
+                        </a:rPr>
+                        <a:t>class probabilities produced by the cumbersome model at a high temperature; they keep the relative probabilities of incorrect answers</a:t>
+                      </a:r>
+                    </a:p>
+                  </a:txBody>
+                  <a:tcPr marL="36576" marR="36576" marT="9144" marB="9144">
+                    <a:solidFill>
+                      <a:srgbClr val="FFFFFF"/>
+                    </a:solidFill>
+                  </a:tcPr>
+                </a:tc>
+              </a:tr>
+              <a:tr h="329184">
+                <a:tc>
+                  <a:txBody>
+                    <a:bodyPr/>
+                    <a:lstStyle/>
+                    <a:p>
+                      <a:pPr algn="ctr"/>
+                      <a:r>
+                        <a:rPr sz="1500" b="1">
+                          <a:solidFill>
+                            <a:srgbClr val="202020"/>
+                          </a:solidFill>
+                          <a:latin typeface="Times New Roman"/>
+                        </a:rPr>
+                        <a:t>hard targets</a:t>
+                      </a:r>
+                    </a:p>
+                  </a:txBody>
+                  <a:tcPr marL="36576" marR="36576" marT="9144" marB="9144">
+                    <a:solidFill>
+                      <a:srgbClr val="FFFFFF"/>
+                    </a:solidFill>
+                  </a:tcPr>
+                </a:tc>
+                <a:tc>
+                  <a:txBody>
+                    <a:bodyPr/>
+                    <a:lstStyle/>
+                    <a:p>
+                      <a:pPr algn="ctr"/>
+                      <a:r>
+                        <a:rPr sz="1500" b="1">
+                          <a:solidFill>
+                            <a:srgbClr val="202020"/>
+                          </a:solidFill>
+                          <a:latin typeface="Microsoft JhengHei"/>
+                        </a:rPr>
+                        <a:t>硬目標</a:t>
+                      </a:r>
+                    </a:p>
+                  </a:txBody>
+                  <a:tcPr marL="36576" marR="36576" marT="9144" marB="9144">
+                    <a:solidFill>
+                      <a:srgbClr val="FFFFFF"/>
+                    </a:solidFill>
+                  </a:tcPr>
+                </a:tc>
+                <a:tc>
+                  <a:txBody>
+                    <a:bodyPr/>
+                    <a:lstStyle/>
+                    <a:p>
+                      <a:pPr algn="just"/>
+                      <a:r>
+                        <a:rPr sz="1500" b="0">
+                          <a:solidFill>
+                            <a:srgbClr val="202020"/>
+                          </a:solidFill>
+                          <a:latin typeface="Times New Roman"/>
+                        </a:rPr>
+                        <a:t>the correct labels: 1 for the correct class and 0 for all others</a:t>
+                      </a:r>
+                    </a:p>
+                  </a:txBody>
+                  <a:tcPr marL="36576" marR="36576" marT="9144" marB="9144">
+                    <a:solidFill>
+                      <a:srgbClr val="FFFFFF"/>
+                    </a:solidFill>
+                  </a:tcPr>
+                </a:tc>
+              </a:tr>
+              <a:tr h="329184">
+                <a:tc>
+                  <a:txBody>
+                    <a:bodyPr/>
+                    <a:lstStyle/>
+                    <a:p>
+                      <a:pPr algn="ctr"/>
+                      <a:r>
+                        <a:rPr sz="1500" b="1">
+                          <a:solidFill>
+                            <a:srgbClr val="202020"/>
+                          </a:solidFill>
+                          <a:latin typeface="Times New Roman"/>
+                        </a:rPr>
+                        <a:t>cross entropy</a:t>
+                      </a:r>
+                    </a:p>
+                  </a:txBody>
+                  <a:tcPr marL="36576" marR="36576" marT="9144" marB="9144">
+                    <a:solidFill>
+                      <a:srgbClr val="FFFFFF"/>
+                    </a:solidFill>
+                  </a:tcPr>
+                </a:tc>
+                <a:tc>
+                  <a:txBody>
+                    <a:bodyPr/>
+                    <a:lstStyle/>
+                    <a:p>
+                      <a:pPr algn="ctr"/>
+                      <a:r>
+                        <a:rPr sz="1500" b="1">
+                          <a:solidFill>
+                            <a:srgbClr val="202020"/>
+                          </a:solidFill>
+                          <a:latin typeface="Microsoft JhengHei"/>
+                        </a:rPr>
+                        <a:t>交叉熵</a:t>
+                      </a:r>
+                    </a:p>
+                  </a:txBody>
+                  <a:tcPr marL="36576" marR="36576" marT="9144" marB="9144">
+                    <a:solidFill>
+                      <a:srgbClr val="FFFFFF"/>
+                    </a:solidFill>
+                  </a:tcPr>
+                </a:tc>
+                <a:tc>
+                  <a:txBody>
+                    <a:bodyPr/>
+                    <a:lstStyle/>
+                    <a:p>
+                      <a:pPr algn="just"/>
+                      <a:r>
+                        <a:rPr sz="1500" b="0">
+                          <a:solidFill>
+                            <a:srgbClr val="202020"/>
+                          </a:solidFill>
+                          <a:latin typeface="Times New Roman"/>
+                        </a:rPr>
+                        <a:t>a measure of the difference between two distributions: C = −Σ p_i log q_i</a:t>
+                      </a:r>
+                    </a:p>
+                  </a:txBody>
+                  <a:tcPr marL="36576" marR="36576" marT="9144" marB="9144">
+                    <a:solidFill>
+                      <a:srgbClr val="FFFFFF"/>
+                    </a:solidFill>
+                  </a:tcPr>
+                </a:tc>
+              </a:tr>
+              <a:tr h="329184">
+                <a:tc>
+                  <a:txBody>
+                    <a:bodyPr/>
+                    <a:lstStyle/>
+                    <a:p>
+                      <a:pPr algn="ctr"/>
+                      <a:r>
+                        <a:rPr sz="1500" b="1">
+                          <a:solidFill>
+                            <a:srgbClr val="202020"/>
+                          </a:solidFill>
+                          <a:latin typeface="Times New Roman"/>
+                        </a:rPr>
+                        <a:t>matching logits</a:t>
+                      </a:r>
+                    </a:p>
+                  </a:txBody>
+                  <a:tcPr marL="36576" marR="36576" marT="9144" marB="9144">
+                    <a:solidFill>
+                      <a:srgbClr val="FFFFFF"/>
+                    </a:solidFill>
+                  </a:tcPr>
+                </a:tc>
+                <a:tc>
+                  <a:txBody>
+                    <a:bodyPr/>
+                    <a:lstStyle/>
+                    <a:p>
+                      <a:pPr algn="ctr"/>
+                      <a:r>
+                        <a:rPr sz="1500" b="1">
+                          <a:solidFill>
+                            <a:srgbClr val="202020"/>
+                          </a:solidFill>
+                          <a:latin typeface="Microsoft JhengHei"/>
+                        </a:rPr>
+                        <a:t>比對 logit</a:t>
+                      </a:r>
+                    </a:p>
+                  </a:txBody>
+                  <a:tcPr marL="36576" marR="36576" marT="9144" marB="9144">
+                    <a:solidFill>
+                      <a:srgbClr val="FFFFFF"/>
+                    </a:solidFill>
+                  </a:tcPr>
+                </a:tc>
+                <a:tc>
+                  <a:txBody>
+                    <a:bodyPr/>
+                    <a:lstStyle/>
+                    <a:p>
+                      <a:pPr algn="just"/>
+                      <a:r>
+                        <a:rPr sz="1500" b="0">
+                          <a:solidFill>
+                            <a:srgbClr val="202020"/>
+                          </a:solidFill>
+                          <a:latin typeface="Times New Roman"/>
+                        </a:rPr>
+                        <a:t>making the logits of the small model match those of the cumbersome model; the high-temperature limit of distillation</a:t>
+                      </a:r>
+                    </a:p>
+                  </a:txBody>
+                  <a:tcPr marL="36576" marR="36576" marT="9144" marB="9144">
+                    <a:solidFill>
+                      <a:srgbClr val="FFFFFF"/>
+                    </a:solidFill>
+                  </a:tcPr>
+                </a:tc>
+              </a:tr>
+              <a:tr h="329184">
+                <a:tc>
+                  <a:txBody>
+                    <a:bodyPr/>
+                    <a:lstStyle/>
+                    <a:p>
+                      <a:pPr algn="ctr"/>
+                      <a:r>
+                        <a:rPr sz="1500" b="1">
+                          <a:solidFill>
+                            <a:srgbClr val="202020"/>
+                          </a:solidFill>
+                          <a:latin typeface="Times New Roman"/>
+                        </a:rPr>
+                        <a:t>specialist models</a:t>
+                      </a:r>
+                    </a:p>
+                  </a:txBody>
+                  <a:tcPr marL="36576" marR="36576" marT="9144" marB="9144">
+                    <a:solidFill>
+                      <a:srgbClr val="FFFFFF"/>
+                    </a:solidFill>
+                  </a:tcPr>
+                </a:tc>
+                <a:tc>
+                  <a:txBody>
+                    <a:bodyPr/>
+                    <a:lstStyle/>
+                    <a:p>
+                      <a:pPr algn="ctr"/>
+                      <a:r>
+                        <a:rPr sz="1500" b="1">
+                          <a:solidFill>
+                            <a:srgbClr val="202020"/>
+                          </a:solidFill>
+                          <a:latin typeface="Microsoft JhengHei"/>
+                        </a:rPr>
+                        <a:t>專家模型</a:t>
+                      </a:r>
+                    </a:p>
+                  </a:txBody>
+                  <a:tcPr marL="36576" marR="36576" marT="9144" marB="9144">
+                    <a:solidFill>
+                      <a:srgbClr val="FFFFFF"/>
+                    </a:solidFill>
+                  </a:tcPr>
+                </a:tc>
+                <a:tc>
+                  <a:txBody>
+                    <a:bodyPr/>
+                    <a:lstStyle/>
+                    <a:p>
+                      <a:pPr algn="just"/>
+                      <a:r>
+                        <a:rPr sz="1500" b="0">
+                          <a:solidFill>
+                            <a:srgbClr val="202020"/>
+                          </a:solidFill>
+                          <a:latin typeface="Times New Roman"/>
+                        </a:rPr>
+                        <a:t>models that each handle a confusable subset of classes, used together with a generalist model</a:t>
+                      </a:r>
+                    </a:p>
+                  </a:txBody>
+                  <a:tcPr marL="36576" marR="36576" marT="9144" marB="9144">
+                    <a:solidFill>
+                      <a:srgbClr val="FFFFFF"/>
+                    </a:solidFill>
+                  </a:tcPr>
+                </a:tc>
+              </a:tr>
+            </a:tbl>
+          </a:graphicData>
+        </a:graphic>
+      </p:graphicFrame>
+      <p:sp>
+        <p:nvSpPr>
+          <p:cNvPr id="7" name="TextBox 6"/>
+          <p:cNvSpPr txBox="1"/>
+          <p:nvPr/>
+        </p:nvSpPr>
+        <p:spPr>
+          <a:xfrm>
+            <a:off x="548640" y="5989320"/>
+            <a:ext cx="11109960" cy="457200"/>
+          </a:xfrm>
+          <a:prstGeom prst="rect">
+            <a:avLst/>
+          </a:prstGeom>
+          <a:noFill/>
+        </p:spPr>
+        <p:txBody>
+          <a:bodyPr wrap="square">
+            <a:spAutoFit/>
+          </a:bodyPr>
+          <a:lstStyle/>
+          <a:p>
+            <a:pPr algn="just"/>
+            <a:r>
+              <a:rPr sz="1400" b="0" i="0">
+                <a:solidFill>
+                  <a:srgbClr val="59636E"/>
+                </a:solidFill>
+                <a:latin typeface="Times New Roman"/>
+              </a:rPr>
+              <a:t>The rest of this module keeps the terms of the paper (cumbersome model, distilled model) for easy comparison with the original.</a:t>
+            </a:r>
+          </a:p>
+        </p:txBody>
+      </p:sp>
+    </p:spTree>
+  </p:cSld>
+  <p:clrMapOvr>
+    <a:masterClrMapping/>
+  </p:clrMapOvr>
+  <p:timing>
+    <p:tnLst>
+      <p:par>
+        <p:cTn id="1" dur="indefinite" restart="never" nodeType="tmRoot">
+          <p:childTnLst>
+            <p:seq concurrent="1" nextAc="seek">
+              <p:cTn id="2" dur="indefinite" nodeType="mainSeq">
+                <p:childTnLst>
+                  <p:par>
+                    <p:cTn id="3" fill="hold">
+                      <p:stCondLst>
+                        <p:cond delay="indefinite"/>
+                      </p:stCondLst>
+                      <p:childTnLst>
+                        <p:par>
+                          <p:cTn id="4" fill="hold">
+                            <p:stCondLst>
+                              <p:cond delay="0"/>
+                            </p:stCondLst>
+                            <p:childTnLst>
+                              <p:par>
+                                <p:cTn id="5" presetID="1" presetClass="entr" presetSubtype="0" fill="hold" grpId="0" nodeType="clickEffect">
+                                  <p:stCondLst>
+                                    <p:cond delay="0"/>
+                                  </p:stCondLst>
+                                  <p:childTnLst>
+                                    <p:set>
+                                      <p:cBhvr>
+                                        <p:cTn id="6" dur="1" fill="hold">
+                                          <p:stCondLst>
+                                            <p:cond delay="0"/>
+                                          </p:stCondLst>
+                                        </p:cTn>
+                                        <p:tgtEl>
+                                          <p:spTgt spid="6"/>
+                                        </p:tgtEl>
+                                        <p:attrNameLst>
+                                          <p:attrName>style.visibility</p:attrName>
+                                        </p:attrNameLst>
+                                      </p:cBhvr>
+                                      <p:to>
+                                        <p:strVal val="visible"/>
+                                      </p:to>
+                                    </p:set>
+                                  </p:childTnLst>
+                                </p:cTn>
+                              </p:par>
+                            </p:childTnLst>
+                          </p:cTn>
+                        </p:par>
+                      </p:childTnLst>
+                    </p:cTn>
+                  </p:par>
+                  <p:par>
+                    <p:cTn id="7" fill="hold">
+                      <p:stCondLst>
+                        <p:cond delay="indefinite"/>
+                      </p:stCondLst>
+                      <p:childTnLst>
+                        <p:par>
+                          <p:cTn id="8" fill="hold">
+                            <p:stCondLst>
+                              <p:cond delay="0"/>
+                            </p:stCondLst>
+                            <p:childTnLst>
+                              <p:par>
+                                <p:cTn id="9" presetID="1" presetClass="entr" presetSubtype="0" fill="hold" grpId="0" nodeType="clickEffect">
+                                  <p:stCondLst>
+                                    <p:cond delay="0"/>
+                                  </p:stCondLst>
+                                  <p:childTnLst>
+                                    <p:set>
+                                      <p:cBhvr>
+                                        <p:cTn id="10" dur="1" fill="hold">
+                                          <p:stCondLst>
+                                            <p:cond delay="0"/>
+                                          </p:stCondLst>
+                                        </p:cTn>
+                                        <p:tgtEl>
+                                          <p:spTgt spid="7"/>
+                                        </p:tgtEl>
+                                        <p:attrNameLst>
+                                          <p:attrName>style.visibility</p:attrName>
+                                        </p:attrNameLst>
+                                      </p:cBhvr>
+                                      <p:to>
+                                        <p:strVal val="visible"/>
+                                      </p:to>
+                                    </p:set>
+                                  </p:childTnLst>
+                                </p:cTn>
+                              </p:par>
+                            </p:childTnLst>
+                          </p:cTn>
+                        </p:par>
+                      </p:childTnLst>
+                    </p:cTn>
+                  </p:par>
+                </p:childTnLst>
+              </p:cTn>
+              <p:prevCondLst>
+                <p:cond evt="onPrev" delay="0">
+                  <p:tgtEl>
+                    <p:sldTgt/>
+                  </p:tgtEl>
+                </p:cond>
+              </p:prevCondLst>
+              <p:nextCondLst>
+                <p:cond evt="onNext" delay="0">
+                  <p:tgtEl>
+                    <p:sldTgt/>
+                  </p:tgtEl>
+                </p:cond>
+              </p:nextCondLst>
+            </p:seq>
+          </p:childTnLst>
+        </p:cTn>
+      </p:par>
+    </p:tnLst>
+    <p:bldLst>
+      <p:bldGraphic spid="6" grpId="0">
+        <p:bldAsOne/>
+      </p:bldGraphic>
+      <p:bldP spid="7" grpId="0" animBg="1"/>
+    </p:bldLst>
+  </p:timing>
+</p:sld>
+</file>
+
+<file path=ppt/slides/slide7.xml><?xml version="1.0" encoding="utf-8"?>
 <p:sld xmlns:a="http://schemas.openxmlformats.org/drawingml/2006/main" xmlns:p="http://schemas.openxmlformats.org/presentationml/2006/main" xmlns:r="http://schemas.openxmlformats.org/officeDocument/2006/relationships">
   <p:cSld>
     <p:spTree>
@@ -25153,7 +27485,7 @@
 </p:sld>
 </file>
 
-<file path=ppt/slides/slide7.xml><?xml version="1.0" encoding="utf-8"?>
+<file path=ppt/slides/slide8.xml><?xml version="1.0" encoding="utf-8"?>
 <p:sld xmlns:a="http://schemas.openxmlformats.org/drawingml/2006/main" xmlns:p="http://schemas.openxmlformats.org/presentationml/2006/main" xmlns:r="http://schemas.openxmlformats.org/officeDocument/2006/relationships">
   <p:cSld>
     <p:spTree>
@@ -26268,7 +28600,7 @@
 </p:sld>
 </file>
 
-<file path=ppt/slides/slide8.xml><?xml version="1.0" encoding="utf-8"?>
+<file path=ppt/slides/slide9.xml><?xml version="1.0" encoding="utf-8"?>
 <p:sld xmlns:a="http://schemas.openxmlformats.org/drawingml/2006/main" xmlns:p="http://schemas.openxmlformats.org/presentationml/2006/main" xmlns:r="http://schemas.openxmlformats.org/officeDocument/2006/relationships">
   <p:cSld>
     <p:spTree>
@@ -26431,7 +28763,7 @@
                 </a:solidFill>
                 <a:latin typeface="Times New Roman"/>
               </a:rPr>
-              <a:t>Used from this slide to slide 16</a:t>
+              <a:t>Used from this slide to slide 17</a:t>
             </a:r>
           </a:p>
         </p:txBody>
@@ -27323,1537 +29655,6 @@
       <p:bldP spid="8" grpId="0" animBg="1"/>
       <p:bldP spid="9" grpId="0" animBg="1"/>
       <p:bldP spid="10" grpId="0" animBg="1"/>
-    </p:bldLst>
-  </p:timing>
-</p:sld>
-</file>
-
-<file path=ppt/slides/slide9.xml><?xml version="1.0" encoding="utf-8"?>
-<p:sld xmlns:a="http://schemas.openxmlformats.org/drawingml/2006/main" xmlns:p="http://schemas.openxmlformats.org/presentationml/2006/main" xmlns:r="http://schemas.openxmlformats.org/officeDocument/2006/relationships">
-  <p:cSld>
-    <p:spTree>
-      <p:nvGrpSpPr>
-        <p:cNvPr id="1" name=""/>
-        <p:cNvGrpSpPr/>
-        <p:nvPr/>
-      </p:nvGrpSpPr>
-      <p:grpSpPr/>
-      <p:sp>
-        <p:nvSpPr>
-          <p:cNvPr id="2" name="Rectangle 1"/>
-          <p:cNvSpPr/>
-          <p:nvPr/>
-        </p:nvSpPr>
-        <p:spPr>
-          <a:xfrm>
-            <a:off x="0" y="0"/>
-            <a:ext cx="12191695" cy="6858000"/>
-          </a:xfrm>
-          <a:prstGeom prst="rect">
-            <a:avLst/>
-          </a:prstGeom>
-          <a:solidFill>
-            <a:srgbClr val="FFFFFF"/>
-          </a:solidFill>
-          <a:ln>
-            <a:noFill/>
-          </a:ln>
-          <a:effectLst/>
-        </p:spPr>
-        <p:style>
-          <a:lnRef idx="1">
-            <a:schemeClr val="accent1"/>
-          </a:lnRef>
-          <a:fillRef idx="3">
-            <a:schemeClr val="accent1"/>
-          </a:fillRef>
-          <a:effectRef idx="2">
-            <a:schemeClr val="accent1"/>
-          </a:effectRef>
-          <a:fontRef idx="minor">
-            <a:schemeClr val="lt1"/>
-          </a:fontRef>
-        </p:style>
-        <p:txBody>
-          <a:bodyPr rtlCol="0" anchor="ctr"/>
-          <a:lstStyle/>
-          <a:p>
-            <a:pPr algn="ctr"/>
-          </a:p>
-        </p:txBody>
-      </p:sp>
-      <p:sp>
-        <p:nvSpPr>
-          <p:cNvPr id="3" name="Rectangle 2"/>
-          <p:cNvSpPr/>
-          <p:nvPr/>
-        </p:nvSpPr>
-        <p:spPr>
-          <a:xfrm>
-            <a:off x="0" y="0"/>
-            <a:ext cx="12191695" cy="868680"/>
-          </a:xfrm>
-          <a:prstGeom prst="rect">
-            <a:avLst/>
-          </a:prstGeom>
-          <a:solidFill>
-            <a:srgbClr val="1F4E79"/>
-          </a:solidFill>
-          <a:ln>
-            <a:noFill/>
-          </a:ln>
-          <a:effectLst/>
-        </p:spPr>
-        <p:style>
-          <a:lnRef idx="1">
-            <a:schemeClr val="accent1"/>
-          </a:lnRef>
-          <a:fillRef idx="3">
-            <a:schemeClr val="accent1"/>
-          </a:fillRef>
-          <a:effectRef idx="2">
-            <a:schemeClr val="accent1"/>
-          </a:effectRef>
-          <a:fontRef idx="minor">
-            <a:schemeClr val="lt1"/>
-          </a:fontRef>
-        </p:style>
-        <p:txBody>
-          <a:bodyPr rtlCol="0" anchor="ctr"/>
-          <a:lstStyle/>
-          <a:p>
-            <a:pPr algn="ctr"/>
-          </a:p>
-        </p:txBody>
-      </p:sp>
-      <p:sp>
-        <p:nvSpPr>
-          <p:cNvPr id="4" name="TextBox 3"/>
-          <p:cNvSpPr txBox="1"/>
-          <p:nvPr/>
-        </p:nvSpPr>
-        <p:spPr>
-          <a:xfrm>
-            <a:off x="411480" y="54864"/>
-            <a:ext cx="11338560" cy="457200"/>
-          </a:xfrm>
-          <a:prstGeom prst="rect">
-            <a:avLst/>
-          </a:prstGeom>
-          <a:noFill/>
-        </p:spPr>
-        <p:txBody>
-          <a:bodyPr wrap="square">
-            <a:spAutoFit/>
-          </a:bodyPr>
-          <a:lstStyle/>
-          <a:p>
-            <a:pPr algn="just"/>
-            <a:r>
-              <a:rPr sz="2800" b="1" i="0">
-                <a:solidFill>
-                  <a:srgbClr val="FFFFFF"/>
-                </a:solidFill>
-                <a:latin typeface="Times New Roman"/>
-              </a:rPr>
-              <a:t>2. Softmax with a temperature: T = 1</a:t>
-            </a:r>
-          </a:p>
-        </p:txBody>
-      </p:sp>
-      <p:sp>
-        <p:nvSpPr>
-          <p:cNvPr id="5" name="TextBox 4"/>
-          <p:cNvSpPr txBox="1"/>
-          <p:nvPr/>
-        </p:nvSpPr>
-        <p:spPr>
-          <a:xfrm>
-            <a:off x="411480" y="521207"/>
-            <a:ext cx="11338560" cy="301752"/>
-          </a:xfrm>
-          <a:prstGeom prst="rect">
-            <a:avLst/>
-          </a:prstGeom>
-          <a:noFill/>
-        </p:spPr>
-        <p:txBody>
-          <a:bodyPr wrap="square">
-            <a:spAutoFit/>
-          </a:bodyPr>
-          <a:lstStyle/>
-          <a:p>
-            <a:pPr algn="just"/>
-            <a:r>
-              <a:rPr sz="1400" b="0" i="0">
-                <a:solidFill>
-                  <a:srgbClr val="C7D6E5"/>
-                </a:solidFill>
-                <a:latin typeface="Times New Roman"/>
-              </a:rPr>
-              <a:t>Eq. 1 of the paper; T is normally set to 1</a:t>
-            </a:r>
-          </a:p>
-        </p:txBody>
-      </p:sp>
-      <p:pic>
-        <p:nvPicPr>
-          <p:cNvPr id="6" name="Picture 5" descr="m_softmax.png"/>
-          <p:cNvPicPr>
-            <a:picLocks noChangeAspect="1"/>
-          </p:cNvPicPr>
-          <p:nvPr/>
-        </p:nvPicPr>
-        <p:blipFill>
-          <a:blip r:embed="rId2"/>
-          <a:stretch>
-            <a:fillRect/>
-          </a:stretch>
-        </p:blipFill>
-        <p:spPr>
-          <a:xfrm>
-            <a:off x="822960" y="1051560"/>
-            <a:ext cx="1834822" cy="868680"/>
-          </a:xfrm>
-          <a:prstGeom prst="rect">
-            <a:avLst/>
-          </a:prstGeom>
-        </p:spPr>
-      </p:pic>
-      <p:sp>
-        <p:nvSpPr>
-          <p:cNvPr id="7" name="TextBox 6"/>
-          <p:cNvSpPr txBox="1"/>
-          <p:nvPr/>
-        </p:nvSpPr>
-        <p:spPr>
-          <a:xfrm>
-            <a:off x="4754880" y="1097280"/>
-            <a:ext cx="6949440" cy="914400"/>
-          </a:xfrm>
-          <a:prstGeom prst="rect">
-            <a:avLst/>
-          </a:prstGeom>
-          <a:noFill/>
-        </p:spPr>
-        <p:txBody>
-          <a:bodyPr wrap="square">
-            <a:spAutoFit/>
-          </a:bodyPr>
-          <a:lstStyle/>
-          <a:p>
-            <a:pPr algn="just"/>
-            <a:r>
-              <a:rPr sz="1700" b="0" i="0">
-                <a:solidFill>
-                  <a:srgbClr val="202020"/>
-                </a:solidFill>
-                <a:latin typeface="Times New Roman"/>
-              </a:rPr>
-              <a:t>The softmax converts the logit z_i computed for each class into a probability q_i by comparing z_i with the other logits; T is a temperature.</a:t>
-            </a:r>
-          </a:p>
-        </p:txBody>
-      </p:sp>
-      <p:graphicFrame>
-        <p:nvGraphicFramePr>
-          <p:cNvPr id="8" name="Table 7"/>
-          <p:cNvGraphicFramePr>
-            <a:graphicFrameLocks noGrp="1"/>
-          </p:cNvGraphicFramePr>
-          <p:nvPr/>
-        </p:nvGraphicFramePr>
-        <p:xfrm>
-          <a:off x="731520" y="2240280"/>
-          <a:ext cx="1188720" cy="1316736"/>
-        </p:xfrm>
-        <a:graphic>
-          <a:graphicData uri="http://schemas.openxmlformats.org/drawingml/2006/table">
-            <a:tbl>
-              <a:tblPr bandRow="1">
-                <a:tableStyleId>{5C22544A-7EE6-4342-B048-85BDC9FD1C3A}</a:tableStyleId>
-              </a:tblPr>
-              <a:tblGrid>
-                <a:gridCol w="1188720"/>
-              </a:tblGrid>
-              <a:tr h="329184">
-                <a:tc>
-                  <a:txBody>
-                    <a:bodyPr/>
-                    <a:lstStyle/>
-                    <a:p>
-                      <a:pPr algn="ctr"/>
-                      <a:r>
-                        <a:rPr sz="1600" b="1">
-                          <a:solidFill>
-                            <a:srgbClr val="FFFFFF"/>
-                          </a:solidFill>
-                          <a:latin typeface="Times New Roman"/>
-                        </a:rPr>
-                        <a:t>Class</a:t>
-                      </a:r>
-                    </a:p>
-                  </a:txBody>
-                  <a:tcPr marL="36576" marR="36576" marT="9144" marB="9144">
-                    <a:solidFill>
-                      <a:srgbClr val="1F4E79"/>
-                    </a:solidFill>
-                  </a:tcPr>
-                </a:tc>
-              </a:tr>
-              <a:tr h="329184">
-                <a:tc>
-                  <a:txBody>
-                    <a:bodyPr/>
-                    <a:lstStyle/>
-                    <a:p>
-                      <a:pPr algn="ctr"/>
-                      <a:r>
-                        <a:rPr sz="1600" b="0">
-                          <a:solidFill>
-                            <a:srgbClr val="202020"/>
-                          </a:solidFill>
-                          <a:latin typeface="Times New Roman"/>
-                        </a:rPr>
-                        <a:t>2</a:t>
-                      </a:r>
-                    </a:p>
-                  </a:txBody>
-                  <a:tcPr marL="36576" marR="36576" marT="9144" marB="9144">
-                    <a:solidFill>
-                      <a:srgbClr val="FFFFFF"/>
-                    </a:solidFill>
-                  </a:tcPr>
-                </a:tc>
-              </a:tr>
-              <a:tr h="329184">
-                <a:tc>
-                  <a:txBody>
-                    <a:bodyPr/>
-                    <a:lstStyle/>
-                    <a:p>
-                      <a:pPr algn="ctr"/>
-                      <a:r>
-                        <a:rPr sz="1600" b="0">
-                          <a:solidFill>
-                            <a:srgbClr val="202020"/>
-                          </a:solidFill>
-                          <a:latin typeface="Times New Roman"/>
-                        </a:rPr>
-                        <a:t>3</a:t>
-                      </a:r>
-                    </a:p>
-                  </a:txBody>
-                  <a:tcPr marL="36576" marR="36576" marT="9144" marB="9144">
-                    <a:solidFill>
-                      <a:srgbClr val="FFFFFF"/>
-                    </a:solidFill>
-                  </a:tcPr>
-                </a:tc>
-              </a:tr>
-              <a:tr h="329184">
-                <a:tc>
-                  <a:txBody>
-                    <a:bodyPr/>
-                    <a:lstStyle/>
-                    <a:p>
-                      <a:pPr algn="ctr"/>
-                      <a:r>
-                        <a:rPr sz="1600" b="0">
-                          <a:solidFill>
-                            <a:srgbClr val="202020"/>
-                          </a:solidFill>
-                          <a:latin typeface="Times New Roman"/>
-                        </a:rPr>
-                        <a:t>7</a:t>
-                      </a:r>
-                    </a:p>
-                  </a:txBody>
-                  <a:tcPr marL="36576" marR="36576" marT="9144" marB="9144">
-                    <a:solidFill>
-                      <a:srgbClr val="FFFFFF"/>
-                    </a:solidFill>
-                  </a:tcPr>
-                </a:tc>
-              </a:tr>
-            </a:tbl>
-          </a:graphicData>
-        </a:graphic>
-      </p:graphicFrame>
-      <p:graphicFrame>
-        <p:nvGraphicFramePr>
-          <p:cNvPr id="9" name="Table 8"/>
-          <p:cNvGraphicFramePr>
-            <a:graphicFrameLocks noGrp="1"/>
-          </p:cNvGraphicFramePr>
-          <p:nvPr/>
-        </p:nvGraphicFramePr>
-        <p:xfrm>
-          <a:off x="2057400" y="2240280"/>
-          <a:ext cx="1463040" cy="1316736"/>
-        </p:xfrm>
-        <a:graphic>
-          <a:graphicData uri="http://schemas.openxmlformats.org/drawingml/2006/table">
-            <a:tbl>
-              <a:tblPr bandRow="1">
-                <a:tableStyleId>{5C22544A-7EE6-4342-B048-85BDC9FD1C3A}</a:tableStyleId>
-              </a:tblPr>
-              <a:tblGrid>
-                <a:gridCol w="1463040"/>
-              </a:tblGrid>
-              <a:tr h="329184">
-                <a:tc>
-                  <a:txBody>
-                    <a:bodyPr/>
-                    <a:lstStyle/>
-                    <a:p>
-                      <a:pPr algn="ctr"/>
-                      <a:r>
-                        <a:rPr sz="1600" b="1">
-                          <a:solidFill>
-                            <a:srgbClr val="FFFFFF"/>
-                          </a:solidFill>
-                          <a:latin typeface="Times New Roman"/>
-                        </a:rPr>
-                        <a:t>v</a:t>
-                      </a:r>
-                    </a:p>
-                  </a:txBody>
-                  <a:tcPr marL="36576" marR="36576" marT="9144" marB="9144">
-                    <a:solidFill>
-                      <a:srgbClr val="1F4E79"/>
-                    </a:solidFill>
-                  </a:tcPr>
-                </a:tc>
-              </a:tr>
-              <a:tr h="329184">
-                <a:tc>
-                  <a:txBody>
-                    <a:bodyPr/>
-                    <a:lstStyle/>
-                    <a:p>
-                      <a:pPr algn="ctr"/>
-                      <a:r>
-                        <a:rPr sz="1600" b="0">
-                          <a:solidFill>
-                            <a:srgbClr val="202020"/>
-                          </a:solidFill>
-                          <a:latin typeface="Times New Roman"/>
-                        </a:rPr>
-                        <a:t>8</a:t>
-                      </a:r>
-                    </a:p>
-                  </a:txBody>
-                  <a:tcPr marL="36576" marR="36576" marT="9144" marB="9144">
-                    <a:solidFill>
-                      <a:srgbClr val="FFFFFF"/>
-                    </a:solidFill>
-                  </a:tcPr>
-                </a:tc>
-              </a:tr>
-              <a:tr h="329184">
-                <a:tc>
-                  <a:txBody>
-                    <a:bodyPr/>
-                    <a:lstStyle/>
-                    <a:p>
-                      <a:pPr algn="ctr"/>
-                      <a:r>
-                        <a:rPr sz="1600" b="0">
-                          <a:solidFill>
-                            <a:srgbClr val="202020"/>
-                          </a:solidFill>
-                          <a:latin typeface="Times New Roman"/>
-                        </a:rPr>
-                        <a:t>4</a:t>
-                      </a:r>
-                    </a:p>
-                  </a:txBody>
-                  <a:tcPr marL="36576" marR="36576" marT="9144" marB="9144">
-                    <a:solidFill>
-                      <a:srgbClr val="FFFFFF"/>
-                    </a:solidFill>
-                  </a:tcPr>
-                </a:tc>
-              </a:tr>
-              <a:tr h="329184">
-                <a:tc>
-                  <a:txBody>
-                    <a:bodyPr/>
-                    <a:lstStyle/>
-                    <a:p>
-                      <a:pPr algn="ctr"/>
-                      <a:r>
-                        <a:rPr sz="1600" b="0">
-                          <a:solidFill>
-                            <a:srgbClr val="202020"/>
-                          </a:solidFill>
-                          <a:latin typeface="Times New Roman"/>
-                        </a:rPr>
-                        <a:t>0</a:t>
-                      </a:r>
-                    </a:p>
-                  </a:txBody>
-                  <a:tcPr marL="36576" marR="36576" marT="9144" marB="9144">
-                    <a:solidFill>
-                      <a:srgbClr val="FFFFFF"/>
-                    </a:solidFill>
-                  </a:tcPr>
-                </a:tc>
-              </a:tr>
-            </a:tbl>
-          </a:graphicData>
-        </a:graphic>
-      </p:graphicFrame>
-      <p:graphicFrame>
-        <p:nvGraphicFramePr>
-          <p:cNvPr id="10" name="Table 9"/>
-          <p:cNvGraphicFramePr>
-            <a:graphicFrameLocks noGrp="1"/>
-          </p:cNvGraphicFramePr>
-          <p:nvPr/>
-        </p:nvGraphicFramePr>
-        <p:xfrm>
-          <a:off x="3657600" y="2240280"/>
-          <a:ext cx="1965960" cy="1316736"/>
-        </p:xfrm>
-        <a:graphic>
-          <a:graphicData uri="http://schemas.openxmlformats.org/drawingml/2006/table">
-            <a:tbl>
-              <a:tblPr bandRow="1">
-                <a:tableStyleId>{5C22544A-7EE6-4342-B048-85BDC9FD1C3A}</a:tableStyleId>
-              </a:tblPr>
-              <a:tblGrid>
-                <a:gridCol w="1965960"/>
-              </a:tblGrid>
-              <a:tr h="329184">
-                <a:tc>
-                  <a:txBody>
-                    <a:bodyPr/>
-                    <a:lstStyle/>
-                    <a:p>
-                      <a:pPr algn="ctr"/>
-                      <a:r>
-                        <a:rPr sz="1600" b="1">
-                          <a:solidFill>
-                            <a:srgbClr val="FFFFFF"/>
-                          </a:solidFill>
-                          <a:latin typeface="Times New Roman"/>
-                        </a:rPr>
-                        <a:t>Step 1:  ÷ T</a:t>
-                      </a:r>
-                    </a:p>
-                  </a:txBody>
-                  <a:tcPr marL="36576" marR="36576" marT="9144" marB="9144">
-                    <a:solidFill>
-                      <a:srgbClr val="1F4E79"/>
-                    </a:solidFill>
-                  </a:tcPr>
-                </a:tc>
-              </a:tr>
-              <a:tr h="329184">
-                <a:tc>
-                  <a:txBody>
-                    <a:bodyPr/>
-                    <a:lstStyle/>
-                    <a:p>
-                      <a:pPr algn="ctr"/>
-                      <a:r>
-                        <a:rPr sz="1600" b="0">
-                          <a:solidFill>
-                            <a:srgbClr val="202020"/>
-                          </a:solidFill>
-                          <a:latin typeface="Times New Roman"/>
-                        </a:rPr>
-                        <a:t>8.0000</a:t>
-                      </a:r>
-                    </a:p>
-                  </a:txBody>
-                  <a:tcPr marL="36576" marR="36576" marT="9144" marB="9144">
-                    <a:solidFill>
-                      <a:srgbClr val="FFFFFF"/>
-                    </a:solidFill>
-                  </a:tcPr>
-                </a:tc>
-              </a:tr>
-              <a:tr h="329184">
-                <a:tc>
-                  <a:txBody>
-                    <a:bodyPr/>
-                    <a:lstStyle/>
-                    <a:p>
-                      <a:pPr algn="ctr"/>
-                      <a:r>
-                        <a:rPr sz="1600" b="0">
-                          <a:solidFill>
-                            <a:srgbClr val="202020"/>
-                          </a:solidFill>
-                          <a:latin typeface="Times New Roman"/>
-                        </a:rPr>
-                        <a:t>4.0000</a:t>
-                      </a:r>
-                    </a:p>
-                  </a:txBody>
-                  <a:tcPr marL="36576" marR="36576" marT="9144" marB="9144">
-                    <a:solidFill>
-                      <a:srgbClr val="FFFFFF"/>
-                    </a:solidFill>
-                  </a:tcPr>
-                </a:tc>
-              </a:tr>
-              <a:tr h="329184">
-                <a:tc>
-                  <a:txBody>
-                    <a:bodyPr/>
-                    <a:lstStyle/>
-                    <a:p>
-                      <a:pPr algn="ctr"/>
-                      <a:r>
-                        <a:rPr sz="1600" b="0">
-                          <a:solidFill>
-                            <a:srgbClr val="202020"/>
-                          </a:solidFill>
-                          <a:latin typeface="Times New Roman"/>
-                        </a:rPr>
-                        <a:t>0.0000</a:t>
-                      </a:r>
-                    </a:p>
-                  </a:txBody>
-                  <a:tcPr marL="36576" marR="36576" marT="9144" marB="9144">
-                    <a:solidFill>
-                      <a:srgbClr val="FFFFFF"/>
-                    </a:solidFill>
-                  </a:tcPr>
-                </a:tc>
-              </a:tr>
-            </a:tbl>
-          </a:graphicData>
-        </a:graphic>
-      </p:graphicFrame>
-      <p:graphicFrame>
-        <p:nvGraphicFramePr>
-          <p:cNvPr id="11" name="Table 10"/>
-          <p:cNvGraphicFramePr>
-            <a:graphicFrameLocks noGrp="1"/>
-          </p:cNvGraphicFramePr>
-          <p:nvPr/>
-        </p:nvGraphicFramePr>
-        <p:xfrm>
-          <a:off x="5760720" y="2240280"/>
-          <a:ext cx="2240279" cy="1316736"/>
-        </p:xfrm>
-        <a:graphic>
-          <a:graphicData uri="http://schemas.openxmlformats.org/drawingml/2006/table">
-            <a:tbl>
-              <a:tblPr bandRow="1">
-                <a:tableStyleId>{5C22544A-7EE6-4342-B048-85BDC9FD1C3A}</a:tableStyleId>
-              </a:tblPr>
-              <a:tblGrid>
-                <a:gridCol w="2240279"/>
-              </a:tblGrid>
-              <a:tr h="329184">
-                <a:tc>
-                  <a:txBody>
-                    <a:bodyPr/>
-                    <a:lstStyle/>
-                    <a:p>
-                      <a:pPr algn="ctr"/>
-                      <a:r>
-                        <a:rPr sz="1600" b="1">
-                          <a:solidFill>
-                            <a:srgbClr val="FFFFFF"/>
-                          </a:solidFill>
-                          <a:latin typeface="Times New Roman"/>
-                        </a:rPr>
-                        <a:t>Step 2:  exp</a:t>
-                      </a:r>
-                    </a:p>
-                  </a:txBody>
-                  <a:tcPr marL="36576" marR="36576" marT="9144" marB="9144">
-                    <a:solidFill>
-                      <a:srgbClr val="1F4E79"/>
-                    </a:solidFill>
-                  </a:tcPr>
-                </a:tc>
-              </a:tr>
-              <a:tr h="329184">
-                <a:tc>
-                  <a:txBody>
-                    <a:bodyPr/>
-                    <a:lstStyle/>
-                    <a:p>
-                      <a:pPr algn="ctr"/>
-                      <a:r>
-                        <a:rPr sz="1600" b="0">
-                          <a:solidFill>
-                            <a:srgbClr val="202020"/>
-                          </a:solidFill>
-                          <a:latin typeface="Times New Roman"/>
-                        </a:rPr>
-                        <a:t>2980.9580</a:t>
-                      </a:r>
-                    </a:p>
-                  </a:txBody>
-                  <a:tcPr marL="36576" marR="36576" marT="9144" marB="9144">
-                    <a:solidFill>
-                      <a:srgbClr val="FFFFFF"/>
-                    </a:solidFill>
-                  </a:tcPr>
-                </a:tc>
-              </a:tr>
-              <a:tr h="329184">
-                <a:tc>
-                  <a:txBody>
-                    <a:bodyPr/>
-                    <a:lstStyle/>
-                    <a:p>
-                      <a:pPr algn="ctr"/>
-                      <a:r>
-                        <a:rPr sz="1600" b="0">
-                          <a:solidFill>
-                            <a:srgbClr val="202020"/>
-                          </a:solidFill>
-                          <a:latin typeface="Times New Roman"/>
-                        </a:rPr>
-                        <a:t>54.5982</a:t>
-                      </a:r>
-                    </a:p>
-                  </a:txBody>
-                  <a:tcPr marL="36576" marR="36576" marT="9144" marB="9144">
-                    <a:solidFill>
-                      <a:srgbClr val="FFFFFF"/>
-                    </a:solidFill>
-                  </a:tcPr>
-                </a:tc>
-              </a:tr>
-              <a:tr h="329184">
-                <a:tc>
-                  <a:txBody>
-                    <a:bodyPr/>
-                    <a:lstStyle/>
-                    <a:p>
-                      <a:pPr algn="ctr"/>
-                      <a:r>
-                        <a:rPr sz="1600" b="0">
-                          <a:solidFill>
-                            <a:srgbClr val="202020"/>
-                          </a:solidFill>
-                          <a:latin typeface="Times New Roman"/>
-                        </a:rPr>
-                        <a:t>1.0000</a:t>
-                      </a:r>
-                    </a:p>
-                  </a:txBody>
-                  <a:tcPr marL="36576" marR="36576" marT="9144" marB="9144">
-                    <a:solidFill>
-                      <a:srgbClr val="FFFFFF"/>
-                    </a:solidFill>
-                  </a:tcPr>
-                </a:tc>
-              </a:tr>
-            </a:tbl>
-          </a:graphicData>
-        </a:graphic>
-      </p:graphicFrame>
-      <p:sp>
-        <p:nvSpPr>
-          <p:cNvPr id="12" name="Rectangle 11"/>
-          <p:cNvSpPr/>
-          <p:nvPr/>
-        </p:nvSpPr>
-        <p:spPr>
-          <a:xfrm>
-            <a:off x="8138160" y="2240280"/>
-            <a:ext cx="1737360" cy="1316736"/>
-          </a:xfrm>
-          <a:prstGeom prst="rect">
-            <a:avLst/>
-          </a:prstGeom>
-          <a:solidFill>
-            <a:srgbClr val="DAE6F2"/>
-          </a:solidFill>
-          <a:ln>
-            <a:solidFill>
-              <a:srgbClr val="D0D7DE"/>
-            </a:solidFill>
-          </a:ln>
-          <a:effectLst/>
-        </p:spPr>
-        <p:style>
-          <a:lnRef idx="1">
-            <a:schemeClr val="accent1"/>
-          </a:lnRef>
-          <a:fillRef idx="3">
-            <a:schemeClr val="accent1"/>
-          </a:fillRef>
-          <a:effectRef idx="2">
-            <a:schemeClr val="accent1"/>
-          </a:effectRef>
-          <a:fontRef idx="minor">
-            <a:schemeClr val="lt1"/>
-          </a:fontRef>
-        </p:style>
-        <p:txBody>
-          <a:bodyPr rtlCol="0" anchor="ctr" wrap="square"/>
-          <a:lstStyle/>
-          <a:p>
-            <a:pPr algn="ctr"/>
-            <a:r>
-              <a:rPr sz="1700" b="1">
-                <a:solidFill>
-                  <a:srgbClr val="1F4E79"/>
-                </a:solidFill>
-                <a:latin typeface="Times New Roman"/>
-              </a:rPr>
-              <a:t>Step 3:  sum</a:t>
-            </a:r>
-          </a:p>
-          <a:p>
-            <a:pPr algn="ctr"/>
-            <a:r>
-              <a:rPr sz="1700" b="1">
-                <a:solidFill>
-                  <a:srgbClr val="1F4E79"/>
-                </a:solidFill>
-                <a:latin typeface="Times New Roman"/>
-              </a:rPr>
-              <a:t>3036.5561</a:t>
-            </a:r>
-          </a:p>
-        </p:txBody>
-      </p:sp>
-      <p:graphicFrame>
-        <p:nvGraphicFramePr>
-          <p:cNvPr id="13" name="Table 12"/>
-          <p:cNvGraphicFramePr>
-            <a:graphicFrameLocks noGrp="1"/>
-          </p:cNvGraphicFramePr>
-          <p:nvPr/>
-        </p:nvGraphicFramePr>
-        <p:xfrm>
-          <a:off x="10012680" y="2240280"/>
-          <a:ext cx="1783080" cy="1316736"/>
-        </p:xfrm>
-        <a:graphic>
-          <a:graphicData uri="http://schemas.openxmlformats.org/drawingml/2006/table">
-            <a:tbl>
-              <a:tblPr bandRow="1">
-                <a:tableStyleId>{5C22544A-7EE6-4342-B048-85BDC9FD1C3A}</a:tableStyleId>
-              </a:tblPr>
-              <a:tblGrid>
-                <a:gridCol w="1783080"/>
-              </a:tblGrid>
-              <a:tr h="329184">
-                <a:tc>
-                  <a:txBody>
-                    <a:bodyPr/>
-                    <a:lstStyle/>
-                    <a:p>
-                      <a:pPr algn="ctr"/>
-                      <a:r>
-                        <a:rPr sz="1600" b="1">
-                          <a:solidFill>
-                            <a:srgbClr val="FFFFFF"/>
-                          </a:solidFill>
-                          <a:latin typeface="Times New Roman"/>
-                        </a:rPr>
-                        <a:t>Step 4:  p</a:t>
-                      </a:r>
-                    </a:p>
-                  </a:txBody>
-                  <a:tcPr marL="36576" marR="36576" marT="9144" marB="9144">
-                    <a:solidFill>
-                      <a:srgbClr val="1F4E79"/>
-                    </a:solidFill>
-                  </a:tcPr>
-                </a:tc>
-              </a:tr>
-              <a:tr h="329184">
-                <a:tc>
-                  <a:txBody>
-                    <a:bodyPr/>
-                    <a:lstStyle/>
-                    <a:p>
-                      <a:pPr algn="ctr"/>
-                      <a:r>
-                        <a:rPr sz="1600" b="0">
-                          <a:solidFill>
-                            <a:srgbClr val="202020"/>
-                          </a:solidFill>
-                          <a:latin typeface="Times New Roman"/>
-                        </a:rPr>
-                        <a:t>0.9817</a:t>
-                      </a:r>
-                    </a:p>
-                  </a:txBody>
-                  <a:tcPr marL="36576" marR="36576" marT="9144" marB="9144">
-                    <a:solidFill>
-                      <a:srgbClr val="FFFFFF"/>
-                    </a:solidFill>
-                  </a:tcPr>
-                </a:tc>
-              </a:tr>
-              <a:tr h="329184">
-                <a:tc>
-                  <a:txBody>
-                    <a:bodyPr/>
-                    <a:lstStyle/>
-                    <a:p>
-                      <a:pPr algn="ctr"/>
-                      <a:r>
-                        <a:rPr sz="1600" b="0">
-                          <a:solidFill>
-                            <a:srgbClr val="202020"/>
-                          </a:solidFill>
-                          <a:latin typeface="Times New Roman"/>
-                        </a:rPr>
-                        <a:t>0.0180</a:t>
-                      </a:r>
-                    </a:p>
-                  </a:txBody>
-                  <a:tcPr marL="36576" marR="36576" marT="9144" marB="9144">
-                    <a:solidFill>
-                      <a:srgbClr val="FFF3CD"/>
-                    </a:solidFill>
-                  </a:tcPr>
-                </a:tc>
-              </a:tr>
-              <a:tr h="329184">
-                <a:tc>
-                  <a:txBody>
-                    <a:bodyPr/>
-                    <a:lstStyle/>
-                    <a:p>
-                      <a:pPr algn="ctr"/>
-                      <a:r>
-                        <a:rPr sz="1600" b="0">
-                          <a:solidFill>
-                            <a:srgbClr val="202020"/>
-                          </a:solidFill>
-                          <a:latin typeface="Times New Roman"/>
-                        </a:rPr>
-                        <a:t>0.0003</a:t>
-                      </a:r>
-                    </a:p>
-                  </a:txBody>
-                  <a:tcPr marL="36576" marR="36576" marT="9144" marB="9144">
-                    <a:solidFill>
-                      <a:srgbClr val="FFF3CD"/>
-                    </a:solidFill>
-                  </a:tcPr>
-                </a:tc>
-              </a:tr>
-            </a:tbl>
-          </a:graphicData>
-        </a:graphic>
-      </p:graphicFrame>
-      <p:sp>
-        <p:nvSpPr>
-          <p:cNvPr id="14" name="Rectangle 13"/>
-          <p:cNvSpPr/>
-          <p:nvPr/>
-        </p:nvSpPr>
-        <p:spPr>
-          <a:xfrm>
-            <a:off x="731520" y="3931920"/>
-            <a:ext cx="10881360" cy="1051560"/>
-          </a:xfrm>
-          <a:prstGeom prst="rect">
-            <a:avLst/>
-          </a:prstGeom>
-          <a:solidFill>
-            <a:srgbClr val="FFF3CD"/>
-          </a:solidFill>
-          <a:ln>
-            <a:solidFill>
-              <a:srgbClr val="D0D7DE"/>
-            </a:solidFill>
-          </a:ln>
-          <a:effectLst/>
-        </p:spPr>
-        <p:style>
-          <a:lnRef idx="1">
-            <a:schemeClr val="accent1"/>
-          </a:lnRef>
-          <a:fillRef idx="3">
-            <a:schemeClr val="accent1"/>
-          </a:fillRef>
-          <a:effectRef idx="2">
-            <a:schemeClr val="accent1"/>
-          </a:effectRef>
-          <a:fontRef idx="minor">
-            <a:schemeClr val="lt1"/>
-          </a:fontRef>
-        </p:style>
-        <p:txBody>
-          <a:bodyPr rtlCol="0" anchor="ctr" wrap="square"/>
-          <a:lstStyle/>
-          <a:p>
-            <a:pPr algn="just"/>
-            <a:r>
-              <a:rPr sz="1700" b="1">
-                <a:solidFill>
-                  <a:srgbClr val="C03030"/>
-                </a:solidFill>
-                <a:latin typeface="Times New Roman"/>
-              </a:rPr>
-              <a:t>The probabilities of 3 and 7 are 0.0180 and 0.0003. The information that this 2 resembles a 3 more than a 7</a:t>
-            </a:r>
-          </a:p>
-          <a:p>
-            <a:pPr algn="just"/>
-            <a:r>
-              <a:rPr sz="1700" b="1">
-                <a:solidFill>
-                  <a:srgbClr val="C03030"/>
-                </a:solidFill>
-                <a:latin typeface="Times New Roman"/>
-              </a:rPr>
-              <a:t>is present, but it has very little influence on the cross-entropy cost function.</a:t>
-            </a:r>
-          </a:p>
-        </p:txBody>
-      </p:sp>
-      <p:sp>
-        <p:nvSpPr>
-          <p:cNvPr id="15" name="TextBox 14"/>
-          <p:cNvSpPr txBox="1"/>
-          <p:nvPr/>
-        </p:nvSpPr>
-        <p:spPr>
-          <a:xfrm>
-            <a:off x="731520" y="5166360"/>
-            <a:ext cx="10881360" cy="914400"/>
-          </a:xfrm>
-          <a:prstGeom prst="rect">
-            <a:avLst/>
-          </a:prstGeom>
-          <a:noFill/>
-        </p:spPr>
-        <p:txBody>
-          <a:bodyPr wrap="square">
-            <a:spAutoFit/>
-          </a:bodyPr>
-          <a:lstStyle/>
-          <a:p>
-            <a:pPr algn="just"/>
-            <a:r>
-              <a:rPr sz="1600" b="0" i="0">
-                <a:solidFill>
-                  <a:srgbClr val="59636E"/>
-                </a:solidFill>
-                <a:latin typeface="Times New Roman"/>
-              </a:rPr>
-              <a:t>Check: exp(8) = 2980.9580, exp(4) = 54.5982, and exp(0) = 1, which sum to 3036.5561.</a:t>
-            </a:r>
-          </a:p>
-        </p:txBody>
-      </p:sp>
-    </p:spTree>
-  </p:cSld>
-  <p:clrMapOvr>
-    <a:masterClrMapping/>
-  </p:clrMapOvr>
-  <p:timing>
-    <p:tnLst>
-      <p:par>
-        <p:cTn id="1" dur="indefinite" restart="never" nodeType="tmRoot">
-          <p:childTnLst>
-            <p:seq concurrent="1" nextAc="seek">
-              <p:cTn id="2" dur="indefinite" nodeType="mainSeq">
-                <p:childTnLst>
-                  <p:par>
-                    <p:cTn id="3" fill="hold">
-                      <p:stCondLst>
-                        <p:cond delay="indefinite"/>
-                      </p:stCondLst>
-                      <p:childTnLst>
-                        <p:par>
-                          <p:cTn id="4" fill="hold">
-                            <p:stCondLst>
-                              <p:cond delay="0"/>
-                            </p:stCondLst>
-                            <p:childTnLst>
-                              <p:par>
-                                <p:cTn id="5" presetID="1" presetClass="entr" presetSubtype="0" fill="hold" grpId="0" nodeType="clickEffect">
-                                  <p:stCondLst>
-                                    <p:cond delay="0"/>
-                                  </p:stCondLst>
-                                  <p:childTnLst>
-                                    <p:set>
-                                      <p:cBhvr>
-                                        <p:cTn id="6" dur="1" fill="hold">
-                                          <p:stCondLst>
-                                            <p:cond delay="0"/>
-                                          </p:stCondLst>
-                                        </p:cTn>
-                                        <p:tgtEl>
-                                          <p:spTgt spid="6"/>
-                                        </p:tgtEl>
-                                        <p:attrNameLst>
-                                          <p:attrName>style.visibility</p:attrName>
-                                        </p:attrNameLst>
-                                      </p:cBhvr>
-                                      <p:to>
-                                        <p:strVal val="visible"/>
-                                      </p:to>
-                                    </p:set>
-                                  </p:childTnLst>
-                                </p:cTn>
-                              </p:par>
-                            </p:childTnLst>
-                          </p:cTn>
-                        </p:par>
-                      </p:childTnLst>
-                    </p:cTn>
-                  </p:par>
-                  <p:par>
-                    <p:cTn id="7" fill="hold">
-                      <p:stCondLst>
-                        <p:cond delay="indefinite"/>
-                      </p:stCondLst>
-                      <p:childTnLst>
-                        <p:par>
-                          <p:cTn id="8" fill="hold">
-                            <p:stCondLst>
-                              <p:cond delay="0"/>
-                            </p:stCondLst>
-                            <p:childTnLst>
-                              <p:par>
-                                <p:cTn id="9" presetID="1" presetClass="entr" presetSubtype="0" fill="hold" grpId="0" nodeType="clickEffect">
-                                  <p:stCondLst>
-                                    <p:cond delay="0"/>
-                                  </p:stCondLst>
-                                  <p:childTnLst>
-                                    <p:set>
-                                      <p:cBhvr>
-                                        <p:cTn id="10" dur="1" fill="hold">
-                                          <p:stCondLst>
-                                            <p:cond delay="0"/>
-                                          </p:stCondLst>
-                                        </p:cTn>
-                                        <p:tgtEl>
-                                          <p:spTgt spid="7"/>
-                                        </p:tgtEl>
-                                        <p:attrNameLst>
-                                          <p:attrName>style.visibility</p:attrName>
-                                        </p:attrNameLst>
-                                      </p:cBhvr>
-                                      <p:to>
-                                        <p:strVal val="visible"/>
-                                      </p:to>
-                                    </p:set>
-                                  </p:childTnLst>
-                                </p:cTn>
-                              </p:par>
-                            </p:childTnLst>
-                          </p:cTn>
-                        </p:par>
-                      </p:childTnLst>
-                    </p:cTn>
-                  </p:par>
-                  <p:par>
-                    <p:cTn id="11" fill="hold">
-                      <p:stCondLst>
-                        <p:cond delay="indefinite"/>
-                      </p:stCondLst>
-                      <p:childTnLst>
-                        <p:par>
-                          <p:cTn id="12" fill="hold">
-                            <p:stCondLst>
-                              <p:cond delay="0"/>
-                            </p:stCondLst>
-                            <p:childTnLst>
-                              <p:par>
-                                <p:cTn id="13" presetID="1" presetClass="entr" presetSubtype="0" fill="hold" grpId="0" nodeType="clickEffect">
-                                  <p:stCondLst>
-                                    <p:cond delay="0"/>
-                                  </p:stCondLst>
-                                  <p:childTnLst>
-                                    <p:set>
-                                      <p:cBhvr>
-                                        <p:cTn id="14" dur="1" fill="hold">
-                                          <p:stCondLst>
-                                            <p:cond delay="0"/>
-                                          </p:stCondLst>
-                                        </p:cTn>
-                                        <p:tgtEl>
-                                          <p:spTgt spid="8"/>
-                                        </p:tgtEl>
-                                        <p:attrNameLst>
-                                          <p:attrName>style.visibility</p:attrName>
-                                        </p:attrNameLst>
-                                      </p:cBhvr>
-                                      <p:to>
-                                        <p:strVal val="visible"/>
-                                      </p:to>
-                                    </p:set>
-                                  </p:childTnLst>
-                                </p:cTn>
-                              </p:par>
-                            </p:childTnLst>
-                          </p:cTn>
-                        </p:par>
-                      </p:childTnLst>
-                    </p:cTn>
-                  </p:par>
-                  <p:par>
-                    <p:cTn id="15" fill="hold">
-                      <p:stCondLst>
-                        <p:cond delay="indefinite"/>
-                      </p:stCondLst>
-                      <p:childTnLst>
-                        <p:par>
-                          <p:cTn id="16" fill="hold">
-                            <p:stCondLst>
-                              <p:cond delay="0"/>
-                            </p:stCondLst>
-                            <p:childTnLst>
-                              <p:par>
-                                <p:cTn id="17" presetID="1" presetClass="entr" presetSubtype="0" fill="hold" grpId="0" nodeType="clickEffect">
-                                  <p:stCondLst>
-                                    <p:cond delay="0"/>
-                                  </p:stCondLst>
-                                  <p:childTnLst>
-                                    <p:set>
-                                      <p:cBhvr>
-                                        <p:cTn id="18" dur="1" fill="hold">
-                                          <p:stCondLst>
-                                            <p:cond delay="0"/>
-                                          </p:stCondLst>
-                                        </p:cTn>
-                                        <p:tgtEl>
-                                          <p:spTgt spid="9"/>
-                                        </p:tgtEl>
-                                        <p:attrNameLst>
-                                          <p:attrName>style.visibility</p:attrName>
-                                        </p:attrNameLst>
-                                      </p:cBhvr>
-                                      <p:to>
-                                        <p:strVal val="visible"/>
-                                      </p:to>
-                                    </p:set>
-                                  </p:childTnLst>
-                                </p:cTn>
-                              </p:par>
-                            </p:childTnLst>
-                          </p:cTn>
-                        </p:par>
-                      </p:childTnLst>
-                    </p:cTn>
-                  </p:par>
-                  <p:par>
-                    <p:cTn id="19" fill="hold">
-                      <p:stCondLst>
-                        <p:cond delay="indefinite"/>
-                      </p:stCondLst>
-                      <p:childTnLst>
-                        <p:par>
-                          <p:cTn id="20" fill="hold">
-                            <p:stCondLst>
-                              <p:cond delay="0"/>
-                            </p:stCondLst>
-                            <p:childTnLst>
-                              <p:par>
-                                <p:cTn id="21" presetID="1" presetClass="entr" presetSubtype="0" fill="hold" grpId="0" nodeType="clickEffect">
-                                  <p:stCondLst>
-                                    <p:cond delay="0"/>
-                                  </p:stCondLst>
-                                  <p:childTnLst>
-                                    <p:set>
-                                      <p:cBhvr>
-                                        <p:cTn id="22" dur="1" fill="hold">
-                                          <p:stCondLst>
-                                            <p:cond delay="0"/>
-                                          </p:stCondLst>
-                                        </p:cTn>
-                                        <p:tgtEl>
-                                          <p:spTgt spid="10"/>
-                                        </p:tgtEl>
-                                        <p:attrNameLst>
-                                          <p:attrName>style.visibility</p:attrName>
-                                        </p:attrNameLst>
-                                      </p:cBhvr>
-                                      <p:to>
-                                        <p:strVal val="visible"/>
-                                      </p:to>
-                                    </p:set>
-                                  </p:childTnLst>
-                                </p:cTn>
-                              </p:par>
-                            </p:childTnLst>
-                          </p:cTn>
-                        </p:par>
-                      </p:childTnLst>
-                    </p:cTn>
-                  </p:par>
-                  <p:par>
-                    <p:cTn id="23" fill="hold">
-                      <p:stCondLst>
-                        <p:cond delay="indefinite"/>
-                      </p:stCondLst>
-                      <p:childTnLst>
-                        <p:par>
-                          <p:cTn id="24" fill="hold">
-                            <p:stCondLst>
-                              <p:cond delay="0"/>
-                            </p:stCondLst>
-                            <p:childTnLst>
-                              <p:par>
-                                <p:cTn id="25" presetID="1" presetClass="entr" presetSubtype="0" fill="hold" grpId="0" nodeType="clickEffect">
-                                  <p:stCondLst>
-                                    <p:cond delay="0"/>
-                                  </p:stCondLst>
-                                  <p:childTnLst>
-                                    <p:set>
-                                      <p:cBhvr>
-                                        <p:cTn id="26" dur="1" fill="hold">
-                                          <p:stCondLst>
-                                            <p:cond delay="0"/>
-                                          </p:stCondLst>
-                                        </p:cTn>
-                                        <p:tgtEl>
-                                          <p:spTgt spid="11"/>
-                                        </p:tgtEl>
-                                        <p:attrNameLst>
-                                          <p:attrName>style.visibility</p:attrName>
-                                        </p:attrNameLst>
-                                      </p:cBhvr>
-                                      <p:to>
-                                        <p:strVal val="visible"/>
-                                      </p:to>
-                                    </p:set>
-                                  </p:childTnLst>
-                                </p:cTn>
-                              </p:par>
-                            </p:childTnLst>
-                          </p:cTn>
-                        </p:par>
-                      </p:childTnLst>
-                    </p:cTn>
-                  </p:par>
-                  <p:par>
-                    <p:cTn id="27" fill="hold">
-                      <p:stCondLst>
-                        <p:cond delay="indefinite"/>
-                      </p:stCondLst>
-                      <p:childTnLst>
-                        <p:par>
-                          <p:cTn id="28" fill="hold">
-                            <p:stCondLst>
-                              <p:cond delay="0"/>
-                            </p:stCondLst>
-                            <p:childTnLst>
-                              <p:par>
-                                <p:cTn id="29" presetID="1" presetClass="entr" presetSubtype="0" fill="hold" grpId="0" nodeType="clickEffect">
-                                  <p:stCondLst>
-                                    <p:cond delay="0"/>
-                                  </p:stCondLst>
-                                  <p:childTnLst>
-                                    <p:set>
-                                      <p:cBhvr>
-                                        <p:cTn id="30" dur="1" fill="hold">
-                                          <p:stCondLst>
-                                            <p:cond delay="0"/>
-                                          </p:stCondLst>
-                                        </p:cTn>
-                                        <p:tgtEl>
-                                          <p:spTgt spid="12"/>
-                                        </p:tgtEl>
-                                        <p:attrNameLst>
-                                          <p:attrName>style.visibility</p:attrName>
-                                        </p:attrNameLst>
-                                      </p:cBhvr>
-                                      <p:to>
-                                        <p:strVal val="visible"/>
-                                      </p:to>
-                                    </p:set>
-                                  </p:childTnLst>
-                                </p:cTn>
-                              </p:par>
-                            </p:childTnLst>
-                          </p:cTn>
-                        </p:par>
-                      </p:childTnLst>
-                    </p:cTn>
-                  </p:par>
-                  <p:par>
-                    <p:cTn id="31" fill="hold">
-                      <p:stCondLst>
-                        <p:cond delay="indefinite"/>
-                      </p:stCondLst>
-                      <p:childTnLst>
-                        <p:par>
-                          <p:cTn id="32" fill="hold">
-                            <p:stCondLst>
-                              <p:cond delay="0"/>
-                            </p:stCondLst>
-                            <p:childTnLst>
-                              <p:par>
-                                <p:cTn id="33" presetID="1" presetClass="entr" presetSubtype="0" fill="hold" grpId="0" nodeType="clickEffect">
-                                  <p:stCondLst>
-                                    <p:cond delay="0"/>
-                                  </p:stCondLst>
-                                  <p:childTnLst>
-                                    <p:set>
-                                      <p:cBhvr>
-                                        <p:cTn id="34" dur="1" fill="hold">
-                                          <p:stCondLst>
-                                            <p:cond delay="0"/>
-                                          </p:stCondLst>
-                                        </p:cTn>
-                                        <p:tgtEl>
-                                          <p:spTgt spid="13"/>
-                                        </p:tgtEl>
-                                        <p:attrNameLst>
-                                          <p:attrName>style.visibility</p:attrName>
-                                        </p:attrNameLst>
-                                      </p:cBhvr>
-                                      <p:to>
-                                        <p:strVal val="visible"/>
-                                      </p:to>
-                                    </p:set>
-                                  </p:childTnLst>
-                                </p:cTn>
-                              </p:par>
-                            </p:childTnLst>
-                          </p:cTn>
-                        </p:par>
-                      </p:childTnLst>
-                    </p:cTn>
-                  </p:par>
-                  <p:par>
-                    <p:cTn id="35" fill="hold">
-                      <p:stCondLst>
-                        <p:cond delay="indefinite"/>
-                      </p:stCondLst>
-                      <p:childTnLst>
-                        <p:par>
-                          <p:cTn id="36" fill="hold">
-                            <p:stCondLst>
-                              <p:cond delay="0"/>
-                            </p:stCondLst>
-                            <p:childTnLst>
-                              <p:par>
-                                <p:cTn id="37" presetID="1" presetClass="entr" presetSubtype="0" fill="hold" grpId="0" nodeType="clickEffect">
-                                  <p:stCondLst>
-                                    <p:cond delay="0"/>
-                                  </p:stCondLst>
-                                  <p:childTnLst>
-                                    <p:set>
-                                      <p:cBhvr>
-                                        <p:cTn id="38" dur="1" fill="hold">
-                                          <p:stCondLst>
-                                            <p:cond delay="0"/>
-                                          </p:stCondLst>
-                                        </p:cTn>
-                                        <p:tgtEl>
-                                          <p:spTgt spid="14"/>
-                                        </p:tgtEl>
-                                        <p:attrNameLst>
-                                          <p:attrName>style.visibility</p:attrName>
-                                        </p:attrNameLst>
-                                      </p:cBhvr>
-                                      <p:to>
-                                        <p:strVal val="visible"/>
-                                      </p:to>
-                                    </p:set>
-                                  </p:childTnLst>
-                                </p:cTn>
-                              </p:par>
-                            </p:childTnLst>
-                          </p:cTn>
-                        </p:par>
-                      </p:childTnLst>
-                    </p:cTn>
-                  </p:par>
-                  <p:par>
-                    <p:cTn id="39" fill="hold">
-                      <p:stCondLst>
-                        <p:cond delay="indefinite"/>
-                      </p:stCondLst>
-                      <p:childTnLst>
-                        <p:par>
-                          <p:cTn id="40" fill="hold">
-                            <p:stCondLst>
-                              <p:cond delay="0"/>
-                            </p:stCondLst>
-                            <p:childTnLst>
-                              <p:par>
-                                <p:cTn id="41" presetID="1" presetClass="entr" presetSubtype="0" fill="hold" grpId="0" nodeType="clickEffect">
-                                  <p:stCondLst>
-                                    <p:cond delay="0"/>
-                                  </p:stCondLst>
-                                  <p:childTnLst>
-                                    <p:set>
-                                      <p:cBhvr>
-                                        <p:cTn id="42" dur="1" fill="hold">
-                                          <p:stCondLst>
-                                            <p:cond delay="0"/>
-                                          </p:stCondLst>
-                                        </p:cTn>
-                                        <p:tgtEl>
-                                          <p:spTgt spid="15"/>
-                                        </p:tgtEl>
-                                        <p:attrNameLst>
-                                          <p:attrName>style.visibility</p:attrName>
-                                        </p:attrNameLst>
-                                      </p:cBhvr>
-                                      <p:to>
-                                        <p:strVal val="visible"/>
-                                      </p:to>
-                                    </p:set>
-                                  </p:childTnLst>
-                                </p:cTn>
-                              </p:par>
-                            </p:childTnLst>
-                          </p:cTn>
-                        </p:par>
-                      </p:childTnLst>
-                    </p:cTn>
-                  </p:par>
-                </p:childTnLst>
-              </p:cTn>
-              <p:prevCondLst>
-                <p:cond evt="onPrev" delay="0">
-                  <p:tgtEl>
-                    <p:sldTgt/>
-                  </p:tgtEl>
-                </p:cond>
-              </p:prevCondLst>
-              <p:nextCondLst>
-                <p:cond evt="onNext" delay="0">
-                  <p:tgtEl>
-                    <p:sldTgt/>
-                  </p:tgtEl>
-                </p:cond>
-              </p:nextCondLst>
-            </p:seq>
-          </p:childTnLst>
-        </p:cTn>
-      </p:par>
-    </p:tnLst>
-    <p:bldLst>
-      <p:bldP spid="6" grpId="0" animBg="1"/>
-      <p:bldP spid="7" grpId="0" animBg="1"/>
-      <p:bldGraphic spid="8" grpId="0">
-        <p:bldAsOne/>
-      </p:bldGraphic>
-      <p:bldGraphic spid="9" grpId="0">
-        <p:bldAsOne/>
-      </p:bldGraphic>
-      <p:bldGraphic spid="10" grpId="0">
-        <p:bldAsOne/>
-      </p:bldGraphic>
-      <p:bldGraphic spid="11" grpId="0">
-        <p:bldAsOne/>
-      </p:bldGraphic>
-      <p:bldP spid="12" grpId="0" animBg="1"/>
-      <p:bldGraphic spid="13" grpId="0">
-        <p:bldAsOne/>
-      </p:bldGraphic>
-      <p:bldP spid="14" grpId="0" animBg="1"/>
-      <p:bldP spid="15" grpId="0" animBg="1"/>
     </p:bldLst>
   </p:timing>
 </p:sld>

--- a/topics/knowledge-distillation/Knowledge_Distillation_slides_EN.pptx
+++ b/topics/knowledge-distillation/Knowledge_Distillation_slides_EN.pptx
@@ -3327,7 +3327,7 @@
           <a:p>
             <a:pPr algn="l"/>
             <a:r>
-              <a:rPr sz="1700" b="0" i="0">
+              <a:rPr sz="1900" b="0" i="0">
                 <a:solidFill>
                   <a:srgbClr val="C7D6E5"/>
                 </a:solidFill>
@@ -3339,7 +3339,7 @@
           <a:p>
             <a:pPr algn="l"/>
             <a:r>
-              <a:rPr sz="1700" b="0" i="0">
+              <a:rPr sz="1900" b="0" i="0">
                 <a:solidFill>
                   <a:srgbClr val="C7D6E5"/>
                 </a:solidFill>
@@ -3351,7 +3351,7 @@
           <a:p>
             <a:pPr algn="l"/>
             <a:r>
-              <a:rPr sz="1700" b="0" i="0">
+              <a:rPr sz="1900" b="0" i="0">
                 <a:solidFill>
                   <a:srgbClr val="C7D6E5"/>
                 </a:solidFill>
@@ -3386,7 +3386,7 @@
           <a:p>
             <a:pPr algn="l"/>
             <a:r>
-              <a:rPr sz="1500" b="0" i="0">
+              <a:rPr sz="1700" b="0" i="0">
                 <a:solidFill>
                   <a:srgbClr val="C7D6E5"/>
                 </a:solidFill>
@@ -3640,7 +3640,7 @@
           <a:p>
             <a:pPr algn="just"/>
             <a:r>
-              <a:rPr sz="1400" b="0" i="0">
+              <a:rPr sz="1600" b="0" i="0">
                 <a:solidFill>
                   <a:srgbClr val="C7D6E5"/>
                 </a:solidFill>
@@ -3699,7 +3699,7 @@
           <a:p>
             <a:pPr algn="just"/>
             <a:r>
-              <a:rPr sz="1700" b="0" i="0">
+              <a:rPr sz="1900" b="0" i="0">
                 <a:solidFill>
                   <a:srgbClr val="202020"/>
                 </a:solidFill>
@@ -3739,7 +3739,7 @@
                     <a:p>
                       <a:pPr algn="ctr"/>
                       <a:r>
-                        <a:rPr sz="1600" b="1">
+                        <a:rPr sz="1700" b="1">
                           <a:solidFill>
                             <a:srgbClr val="FFFFFF"/>
                           </a:solidFill>
@@ -3764,7 +3764,7 @@
                     <a:p>
                       <a:pPr algn="ctr"/>
                       <a:r>
-                        <a:rPr sz="1600" b="0">
+                        <a:rPr sz="1700" b="0">
                           <a:solidFill>
                             <a:srgbClr val="202020"/>
                           </a:solidFill>
@@ -3789,7 +3789,7 @@
                     <a:p>
                       <a:pPr algn="ctr"/>
                       <a:r>
-                        <a:rPr sz="1600" b="0">
+                        <a:rPr sz="1700" b="0">
                           <a:solidFill>
                             <a:srgbClr val="202020"/>
                           </a:solidFill>
@@ -3814,7 +3814,7 @@
                     <a:p>
                       <a:pPr algn="ctr"/>
                       <a:r>
-                        <a:rPr sz="1600" b="0">
+                        <a:rPr sz="1700" b="0">
                           <a:solidFill>
                             <a:srgbClr val="202020"/>
                           </a:solidFill>
@@ -3864,7 +3864,7 @@
                     <a:p>
                       <a:pPr algn="ctr"/>
                       <a:r>
-                        <a:rPr sz="1600" b="1">
+                        <a:rPr sz="1700" b="1">
                           <a:solidFill>
                             <a:srgbClr val="FFFFFF"/>
                           </a:solidFill>
@@ -3889,7 +3889,7 @@
                     <a:p>
                       <a:pPr algn="ctr"/>
                       <a:r>
-                        <a:rPr sz="1600" b="0">
+                        <a:rPr sz="1700" b="0">
                           <a:solidFill>
                             <a:srgbClr val="202020"/>
                           </a:solidFill>
@@ -3914,7 +3914,7 @@
                     <a:p>
                       <a:pPr algn="ctr"/>
                       <a:r>
-                        <a:rPr sz="1600" b="0">
+                        <a:rPr sz="1700" b="0">
                           <a:solidFill>
                             <a:srgbClr val="202020"/>
                           </a:solidFill>
@@ -3939,7 +3939,7 @@
                     <a:p>
                       <a:pPr algn="ctr"/>
                       <a:r>
-                        <a:rPr sz="1600" b="0">
+                        <a:rPr sz="1700" b="0">
                           <a:solidFill>
                             <a:srgbClr val="202020"/>
                           </a:solidFill>
@@ -3989,7 +3989,7 @@
                     <a:p>
                       <a:pPr algn="ctr"/>
                       <a:r>
-                        <a:rPr sz="1600" b="1">
+                        <a:rPr sz="1700" b="1">
                           <a:solidFill>
                             <a:srgbClr val="FFFFFF"/>
                           </a:solidFill>
@@ -4014,7 +4014,7 @@
                     <a:p>
                       <a:pPr algn="ctr"/>
                       <a:r>
-                        <a:rPr sz="1600" b="0">
+                        <a:rPr sz="1700" b="0">
                           <a:solidFill>
                             <a:srgbClr val="202020"/>
                           </a:solidFill>
@@ -4039,7 +4039,7 @@
                     <a:p>
                       <a:pPr algn="ctr"/>
                       <a:r>
-                        <a:rPr sz="1600" b="0">
+                        <a:rPr sz="1700" b="0">
                           <a:solidFill>
                             <a:srgbClr val="202020"/>
                           </a:solidFill>
@@ -4064,7 +4064,7 @@
                     <a:p>
                       <a:pPr algn="ctr"/>
                       <a:r>
-                        <a:rPr sz="1600" b="0">
+                        <a:rPr sz="1700" b="0">
                           <a:solidFill>
                             <a:srgbClr val="202020"/>
                           </a:solidFill>
@@ -4114,7 +4114,7 @@
                     <a:p>
                       <a:pPr algn="ctr"/>
                       <a:r>
-                        <a:rPr sz="1600" b="1">
+                        <a:rPr sz="1700" b="1">
                           <a:solidFill>
                             <a:srgbClr val="FFFFFF"/>
                           </a:solidFill>
@@ -4139,7 +4139,7 @@
                     <a:p>
                       <a:pPr algn="ctr"/>
                       <a:r>
-                        <a:rPr sz="1600" b="0">
+                        <a:rPr sz="1700" b="0">
                           <a:solidFill>
                             <a:srgbClr val="202020"/>
                           </a:solidFill>
@@ -4164,7 +4164,7 @@
                     <a:p>
                       <a:pPr algn="ctr"/>
                       <a:r>
-                        <a:rPr sz="1600" b="0">
+                        <a:rPr sz="1700" b="0">
                           <a:solidFill>
                             <a:srgbClr val="202020"/>
                           </a:solidFill>
@@ -4189,7 +4189,7 @@
                     <a:p>
                       <a:pPr algn="ctr"/>
                       <a:r>
-                        <a:rPr sz="1600" b="0">
+                        <a:rPr sz="1700" b="0">
                           <a:solidFill>
                             <a:srgbClr val="202020"/>
                           </a:solidFill>
@@ -4254,7 +4254,7 @@
           <a:p>
             <a:pPr algn="ctr"/>
             <a:r>
-              <a:rPr sz="1700" b="1">
+              <a:rPr sz="1900" b="1">
                 <a:solidFill>
                   <a:srgbClr val="1F4E79"/>
                 </a:solidFill>
@@ -4266,7 +4266,7 @@
           <a:p>
             <a:pPr algn="ctr"/>
             <a:r>
-              <a:rPr sz="1700" b="1">
+              <a:rPr sz="1900" b="1">
                 <a:solidFill>
                   <a:srgbClr val="1F4E79"/>
                 </a:solidFill>
@@ -4306,7 +4306,7 @@
                     <a:p>
                       <a:pPr algn="ctr"/>
                       <a:r>
-                        <a:rPr sz="1600" b="1">
+                        <a:rPr sz="1700" b="1">
                           <a:solidFill>
                             <a:srgbClr val="FFFFFF"/>
                           </a:solidFill>
@@ -4331,7 +4331,7 @@
                     <a:p>
                       <a:pPr algn="ctr"/>
                       <a:r>
-                        <a:rPr sz="1600" b="0">
+                        <a:rPr sz="1700" b="0">
                           <a:solidFill>
                             <a:srgbClr val="202020"/>
                           </a:solidFill>
@@ -4356,7 +4356,7 @@
                     <a:p>
                       <a:pPr algn="ctr"/>
                       <a:r>
-                        <a:rPr sz="1600" b="0">
+                        <a:rPr sz="1700" b="0">
                           <a:solidFill>
                             <a:srgbClr val="202020"/>
                           </a:solidFill>
@@ -4381,7 +4381,7 @@
                     <a:p>
                       <a:pPr algn="ctr"/>
                       <a:r>
-                        <a:rPr sz="1600" b="0">
+                        <a:rPr sz="1700" b="0">
                           <a:solidFill>
                             <a:srgbClr val="202020"/>
                           </a:solidFill>
@@ -4446,25 +4446,13 @@
           <a:p>
             <a:pPr algn="just"/>
             <a:r>
-              <a:rPr sz="1700" b="1">
+              <a:rPr sz="1900" b="1">
                 <a:solidFill>
                   <a:srgbClr val="C03030"/>
                 </a:solidFill>
                 <a:latin typeface="Times New Roman"/>
               </a:rPr>
-              <a:t>The probabilities of 3 and 7 are 0.0180 and 0.0003. The information that this 2 resembles a 3 more than a 7</a:t>
-            </a:r>
-          </a:p>
-          <a:p>
-            <a:pPr algn="just"/>
-            <a:r>
-              <a:rPr sz="1700" b="1">
-                <a:solidFill>
-                  <a:srgbClr val="C03030"/>
-                </a:solidFill>
-                <a:latin typeface="Times New Roman"/>
-              </a:rPr>
-              <a:t>is present, but it has very little influence on the cross-entropy cost function.</a:t>
+              <a:t>The probabilities of 3 and 7 are 0.0180 and 0.0003. The information that this 2 resembles a 3 more than a 7 is present, but it has very little influence on the cross-entropy cost function.</a:t>
             </a:r>
           </a:p>
         </p:txBody>
@@ -4493,7 +4481,7 @@
           <a:p>
             <a:pPr algn="just"/>
             <a:r>
-              <a:rPr sz="1600" b="0" i="0">
+              <a:rPr sz="1800" b="0" i="0">
                 <a:solidFill>
                   <a:srgbClr val="59636E"/>
                 </a:solidFill>
@@ -5171,7 +5159,7 @@
           <a:p>
             <a:pPr algn="just"/>
             <a:r>
-              <a:rPr sz="1400" b="0" i="0">
+              <a:rPr sz="1600" b="0" i="0">
                 <a:solidFill>
                   <a:srgbClr val="C7D6E5"/>
                 </a:solidFill>
@@ -5230,7 +5218,7 @@
           <a:p>
             <a:pPr algn="just"/>
             <a:r>
-              <a:rPr sz="1700" b="0" i="0">
+              <a:rPr sz="1900" b="0" i="0">
                 <a:solidFill>
                   <a:srgbClr val="202020"/>
                 </a:solidFill>
@@ -5270,7 +5258,7 @@
                     <a:p>
                       <a:pPr algn="ctr"/>
                       <a:r>
-                        <a:rPr sz="1600" b="1">
+                        <a:rPr sz="1700" b="1">
                           <a:solidFill>
                             <a:srgbClr val="FFFFFF"/>
                           </a:solidFill>
@@ -5295,7 +5283,7 @@
                     <a:p>
                       <a:pPr algn="ctr"/>
                       <a:r>
-                        <a:rPr sz="1600" b="0">
+                        <a:rPr sz="1700" b="0">
                           <a:solidFill>
                             <a:srgbClr val="202020"/>
                           </a:solidFill>
@@ -5320,7 +5308,7 @@
                     <a:p>
                       <a:pPr algn="ctr"/>
                       <a:r>
-                        <a:rPr sz="1600" b="0">
+                        <a:rPr sz="1700" b="0">
                           <a:solidFill>
                             <a:srgbClr val="202020"/>
                           </a:solidFill>
@@ -5345,7 +5333,7 @@
                     <a:p>
                       <a:pPr algn="ctr"/>
                       <a:r>
-                        <a:rPr sz="1600" b="0">
+                        <a:rPr sz="1700" b="0">
                           <a:solidFill>
                             <a:srgbClr val="202020"/>
                           </a:solidFill>
@@ -5395,7 +5383,7 @@
                     <a:p>
                       <a:pPr algn="ctr"/>
                       <a:r>
-                        <a:rPr sz="1600" b="1">
+                        <a:rPr sz="1700" b="1">
                           <a:solidFill>
                             <a:srgbClr val="FFFFFF"/>
                           </a:solidFill>
@@ -5420,7 +5408,7 @@
                     <a:p>
                       <a:pPr algn="ctr"/>
                       <a:r>
-                        <a:rPr sz="1600" b="0">
+                        <a:rPr sz="1700" b="0">
                           <a:solidFill>
                             <a:srgbClr val="202020"/>
                           </a:solidFill>
@@ -5445,7 +5433,7 @@
                     <a:p>
                       <a:pPr algn="ctr"/>
                       <a:r>
-                        <a:rPr sz="1600" b="0">
+                        <a:rPr sz="1700" b="0">
                           <a:solidFill>
                             <a:srgbClr val="202020"/>
                           </a:solidFill>
@@ -5470,7 +5458,7 @@
                     <a:p>
                       <a:pPr algn="ctr"/>
                       <a:r>
-                        <a:rPr sz="1600" b="0">
+                        <a:rPr sz="1700" b="0">
                           <a:solidFill>
                             <a:srgbClr val="202020"/>
                           </a:solidFill>
@@ -5520,7 +5508,7 @@
                     <a:p>
                       <a:pPr algn="ctr"/>
                       <a:r>
-                        <a:rPr sz="1600" b="1">
+                        <a:rPr sz="1700" b="1">
                           <a:solidFill>
                             <a:srgbClr val="FFFFFF"/>
                           </a:solidFill>
@@ -5545,7 +5533,7 @@
                     <a:p>
                       <a:pPr algn="ctr"/>
                       <a:r>
-                        <a:rPr sz="1600" b="0">
+                        <a:rPr sz="1700" b="0">
                           <a:solidFill>
                             <a:srgbClr val="202020"/>
                           </a:solidFill>
@@ -5570,7 +5558,7 @@
                     <a:p>
                       <a:pPr algn="ctr"/>
                       <a:r>
-                        <a:rPr sz="1600" b="0">
+                        <a:rPr sz="1700" b="0">
                           <a:solidFill>
                             <a:srgbClr val="202020"/>
                           </a:solidFill>
@@ -5595,7 +5583,7 @@
                     <a:p>
                       <a:pPr algn="ctr"/>
                       <a:r>
-                        <a:rPr sz="1600" b="0">
+                        <a:rPr sz="1700" b="0">
                           <a:solidFill>
                             <a:srgbClr val="202020"/>
                           </a:solidFill>
@@ -5645,7 +5633,7 @@
                     <a:p>
                       <a:pPr algn="ctr"/>
                       <a:r>
-                        <a:rPr sz="1600" b="1">
+                        <a:rPr sz="1700" b="1">
                           <a:solidFill>
                             <a:srgbClr val="FFFFFF"/>
                           </a:solidFill>
@@ -5670,7 +5658,7 @@
                     <a:p>
                       <a:pPr algn="ctr"/>
                       <a:r>
-                        <a:rPr sz="1600" b="0">
+                        <a:rPr sz="1700" b="0">
                           <a:solidFill>
                             <a:srgbClr val="202020"/>
                           </a:solidFill>
@@ -5695,7 +5683,7 @@
                     <a:p>
                       <a:pPr algn="ctr"/>
                       <a:r>
-                        <a:rPr sz="1600" b="0">
+                        <a:rPr sz="1700" b="0">
                           <a:solidFill>
                             <a:srgbClr val="202020"/>
                           </a:solidFill>
@@ -5720,7 +5708,7 @@
                     <a:p>
                       <a:pPr algn="ctr"/>
                       <a:r>
-                        <a:rPr sz="1600" b="0">
+                        <a:rPr sz="1700" b="0">
                           <a:solidFill>
                             <a:srgbClr val="202020"/>
                           </a:solidFill>
@@ -5785,7 +5773,7 @@
           <a:p>
             <a:pPr algn="ctr"/>
             <a:r>
-              <a:rPr sz="1700" b="1">
+              <a:rPr sz="1900" b="1">
                 <a:solidFill>
                   <a:srgbClr val="1F4E79"/>
                 </a:solidFill>
@@ -5797,7 +5785,7 @@
           <a:p>
             <a:pPr algn="ctr"/>
             <a:r>
-              <a:rPr sz="1700" b="1">
+              <a:rPr sz="1900" b="1">
                 <a:solidFill>
                   <a:srgbClr val="1F4E79"/>
                 </a:solidFill>
@@ -5837,7 +5825,7 @@
                     <a:p>
                       <a:pPr algn="ctr"/>
                       <a:r>
-                        <a:rPr sz="1600" b="1">
+                        <a:rPr sz="1700" b="1">
                           <a:solidFill>
                             <a:srgbClr val="FFFFFF"/>
                           </a:solidFill>
@@ -5862,7 +5850,7 @@
                     <a:p>
                       <a:pPr algn="ctr"/>
                       <a:r>
-                        <a:rPr sz="1600" b="0">
+                        <a:rPr sz="1700" b="0">
                           <a:solidFill>
                             <a:srgbClr val="202020"/>
                           </a:solidFill>
@@ -5887,7 +5875,7 @@
                     <a:p>
                       <a:pPr algn="ctr"/>
                       <a:r>
-                        <a:rPr sz="1600" b="0">
+                        <a:rPr sz="1700" b="0">
                           <a:solidFill>
                             <a:srgbClr val="202020"/>
                           </a:solidFill>
@@ -5912,7 +5900,7 @@
                     <a:p>
                       <a:pPr algn="ctr"/>
                       <a:r>
-                        <a:rPr sz="1600" b="0">
+                        <a:rPr sz="1700" b="0">
                           <a:solidFill>
                             <a:srgbClr val="202020"/>
                           </a:solidFill>
@@ -5977,7 +5965,7 @@
           <a:p>
             <a:pPr algn="just"/>
             <a:r>
-              <a:rPr sz="1700" b="1">
+              <a:rPr sz="1900" b="1">
                 <a:solidFill>
                   <a:srgbClr val="1E7A45"/>
                 </a:solidFill>
@@ -5989,7 +5977,7 @@
           <a:p>
             <a:pPr algn="just"/>
             <a:r>
-              <a:rPr sz="1700" b="1">
+              <a:rPr sz="1900" b="1">
                 <a:solidFill>
                   <a:srgbClr val="1E7A45"/>
                 </a:solidFill>
@@ -6024,7 +6012,7 @@
           <a:p>
             <a:pPr algn="just"/>
             <a:r>
-              <a:rPr sz="1600" b="0" i="0">
+              <a:rPr sz="1800" b="0" i="0">
                 <a:solidFill>
                   <a:srgbClr val="59636E"/>
                 </a:solidFill>
@@ -6702,7 +6690,7 @@
           <a:p>
             <a:pPr algn="just"/>
             <a:r>
-              <a:rPr sz="1400" b="0" i="0">
+              <a:rPr sz="1600" b="0" i="0">
                 <a:solidFill>
                   <a:srgbClr val="C7D6E5"/>
                 </a:solidFill>
@@ -6768,7 +6756,7 @@
                     <a:p>
                       <a:pPr algn="ctr"/>
                       <a:r>
-                        <a:rPr sz="1600" b="1">
+                        <a:rPr sz="1700" b="1">
                           <a:solidFill>
                             <a:srgbClr val="FFFFFF"/>
                           </a:solidFill>
@@ -6791,7 +6779,7 @@
                     <a:p>
                       <a:pPr algn="ctr"/>
                       <a:r>
-                        <a:rPr sz="1600" b="1">
+                        <a:rPr sz="1700" b="1">
                           <a:solidFill>
                             <a:srgbClr val="FFFFFF"/>
                           </a:solidFill>
@@ -6814,7 +6802,7 @@
                     <a:p>
                       <a:pPr algn="ctr"/>
                       <a:r>
-                        <a:rPr sz="1600" b="1">
+                        <a:rPr sz="1700" b="1">
                           <a:solidFill>
                             <a:srgbClr val="FFFFFF"/>
                           </a:solidFill>
@@ -6839,7 +6827,7 @@
                     <a:p>
                       <a:pPr algn="ctr"/>
                       <a:r>
-                        <a:rPr sz="1600" b="0">
+                        <a:rPr sz="1700" b="0">
                           <a:solidFill>
                             <a:srgbClr val="202020"/>
                           </a:solidFill>
@@ -6862,7 +6850,7 @@
                     <a:p>
                       <a:pPr algn="ctr"/>
                       <a:r>
-                        <a:rPr sz="1600" b="0">
+                        <a:rPr sz="1700" b="0">
                           <a:solidFill>
                             <a:srgbClr val="202020"/>
                           </a:solidFill>
@@ -6885,7 +6873,7 @@
                     <a:p>
                       <a:pPr algn="ctr"/>
                       <a:r>
-                        <a:rPr sz="1600" b="0">
+                        <a:rPr sz="1700" b="0">
                           <a:solidFill>
                             <a:srgbClr val="202020"/>
                           </a:solidFill>
@@ -6910,7 +6898,7 @@
                     <a:p>
                       <a:pPr algn="ctr"/>
                       <a:r>
-                        <a:rPr sz="1600" b="0">
+                        <a:rPr sz="1700" b="0">
                           <a:solidFill>
                             <a:srgbClr val="202020"/>
                           </a:solidFill>
@@ -6933,7 +6921,7 @@
                     <a:p>
                       <a:pPr algn="ctr"/>
                       <a:r>
-                        <a:rPr sz="1600" b="0">
+                        <a:rPr sz="1700" b="0">
                           <a:solidFill>
                             <a:srgbClr val="202020"/>
                           </a:solidFill>
@@ -6956,7 +6944,7 @@
                     <a:p>
                       <a:pPr algn="ctr"/>
                       <a:r>
-                        <a:rPr sz="1600" b="0">
+                        <a:rPr sz="1700" b="0">
                           <a:solidFill>
                             <a:srgbClr val="202020"/>
                           </a:solidFill>
@@ -6981,7 +6969,7 @@
                     <a:p>
                       <a:pPr algn="ctr"/>
                       <a:r>
-                        <a:rPr sz="1600" b="0">
+                        <a:rPr sz="1700" b="0">
                           <a:solidFill>
                             <a:srgbClr val="202020"/>
                           </a:solidFill>
@@ -7004,7 +6992,7 @@
                     <a:p>
                       <a:pPr algn="ctr"/>
                       <a:r>
-                        <a:rPr sz="1600" b="0">
+                        <a:rPr sz="1700" b="0">
                           <a:solidFill>
                             <a:srgbClr val="202020"/>
                           </a:solidFill>
@@ -7027,7 +7015,7 @@
                     <a:p>
                       <a:pPr algn="ctr"/>
                       <a:r>
-                        <a:rPr sz="1600" b="0">
+                        <a:rPr sz="1700" b="0">
                           <a:solidFill>
                             <a:srgbClr val="202020"/>
                           </a:solidFill>
@@ -7072,7 +7060,7 @@
           <a:p>
             <a:pPr algn="just"/>
             <a:r>
-              <a:rPr sz="1600" b="0" i="0">
+              <a:rPr sz="1800" b="0" i="0">
                 <a:solidFill>
                   <a:srgbClr val="59636E"/>
                 </a:solidFill>
@@ -7084,7 +7072,7 @@
           <a:p>
             <a:pPr algn="just"/>
             <a:r>
-              <a:rPr sz="1600" b="0" i="0">
+              <a:rPr sz="1800" b="0" i="0">
                 <a:solidFill>
                   <a:srgbClr val="59636E"/>
                 </a:solidFill>
@@ -7139,7 +7127,7 @@
           <a:p>
             <a:pPr algn="just"/>
             <a:r>
-              <a:rPr sz="1700" b="1">
+              <a:rPr sz="1900" b="1">
                 <a:solidFill>
                   <a:srgbClr val="1E7A45"/>
                 </a:solidFill>
@@ -7194,7 +7182,7 @@
           <a:p>
             <a:pPr algn="just"/>
             <a:r>
-              <a:rPr sz="1700" b="1">
+              <a:rPr sz="1900" b="1">
                 <a:solidFill>
                   <a:srgbClr val="1F4E79"/>
                 </a:solidFill>
@@ -7229,7 +7217,7 @@
           <a:p>
             <a:pPr algn="just"/>
             <a:r>
-              <a:rPr sz="1500" b="0" i="0">
+              <a:rPr sz="1700" b="0" i="0">
                 <a:solidFill>
                   <a:srgbClr val="202020"/>
                 </a:solidFill>
@@ -7715,7 +7703,7 @@
           <a:p>
             <a:pPr algn="just"/>
             <a:r>
-              <a:rPr sz="1400" b="0" i="0">
+              <a:rPr sz="1600" b="0" i="0">
                 <a:solidFill>
                   <a:srgbClr val="C7D6E5"/>
                 </a:solidFill>
@@ -7798,7 +7786,7 @@
           <a:p>
             <a:pPr algn="just"/>
             <a:r>
-              <a:rPr sz="1600" b="0" i="0">
+              <a:rPr sz="1800" b="0" i="0">
                 <a:solidFill>
                   <a:srgbClr val="202020"/>
                 </a:solidFill>
@@ -7857,7 +7845,7 @@
           <a:p>
             <a:pPr algn="just"/>
             <a:r>
-              <a:rPr sz="1600" b="0" i="0">
+              <a:rPr sz="1800" b="0" i="0">
                 <a:solidFill>
                   <a:srgbClr val="202020"/>
                 </a:solidFill>
@@ -7912,37 +7900,13 @@
           <a:p>
             <a:pPr algn="just"/>
             <a:r>
-              <a:rPr sz="1600" b="0">
+              <a:rPr sz="1800" b="0">
                 <a:solidFill>
                   <a:srgbClr val="1F4E79"/>
                 </a:solidFill>
                 <a:latin typeface="Times New Roman"/>
               </a:rPr>
-              <a:t>α: we found that the best results were</a:t>
-            </a:r>
-          </a:p>
-          <a:p>
-            <a:pPr algn="just"/>
-            <a:r>
-              <a:rPr sz="1600" b="0">
-                <a:solidFill>
-                  <a:srgbClr val="1F4E79"/>
-                </a:solidFill>
-                <a:latin typeface="Times New Roman"/>
-              </a:rPr>
-              <a:t>generally obtained by using a considerably</a:t>
-            </a:r>
-          </a:p>
-          <a:p>
-            <a:pPr algn="just"/>
-            <a:r>
-              <a:rPr sz="1600" b="0">
-                <a:solidFill>
-                  <a:srgbClr val="1F4E79"/>
-                </a:solidFill>
-                <a:latin typeface="Times New Roman"/>
-              </a:rPr>
-              <a:t>lower weight on the second objective; α = 0.9</a:t>
+              <a:t>α: we found that the best results were generally obtained by using a considerably lower weight on the second objective; α = 0.9</a:t>
             </a:r>
           </a:p>
         </p:txBody>
@@ -7991,37 +7955,13 @@
           <a:p>
             <a:pPr algn="just"/>
             <a:r>
-              <a:rPr sz="1600" b="0">
+              <a:rPr sz="1800" b="0">
                 <a:solidFill>
                   <a:srgbClr val="C03030"/>
                 </a:solidFill>
                 <a:latin typeface="Times New Roman"/>
               </a:rPr>
-              <a:t>T²: the magnitudes of the gradients produced by</a:t>
-            </a:r>
-          </a:p>
-          <a:p>
-            <a:pPr algn="just"/>
-            <a:r>
-              <a:rPr sz="1600" b="0">
-                <a:solidFill>
-                  <a:srgbClr val="C03030"/>
-                </a:solidFill>
-                <a:latin typeface="Times New Roman"/>
-              </a:rPr>
-              <a:t>the soft targets scale as 1/T², so we multiply</a:t>
-            </a:r>
-          </a:p>
-          <a:p>
-            <a:pPr algn="just"/>
-            <a:r>
-              <a:rPr sz="1600" b="0">
-                <a:solidFill>
-                  <a:srgbClr val="C03030"/>
-                </a:solidFill>
-                <a:latin typeface="Times New Roman"/>
-              </a:rPr>
-              <a:t>them by T² (checked on slide 17)</a:t>
+              <a:t>T²: the magnitudes of the gradients produced by the soft targets scale as 1/T², so we multiply them by T² (checked on slide 17)</a:t>
             </a:r>
           </a:p>
         </p:txBody>
@@ -8050,7 +7990,7 @@
           <a:p>
             <a:pPr algn="just"/>
             <a:r>
-              <a:rPr sz="1900" b="1" i="0">
+              <a:rPr sz="2100" b="1" i="0">
                 <a:solidFill>
                   <a:srgbClr val="1E7A45"/>
                 </a:solidFill>
@@ -8626,7 +8566,7 @@
           <a:p>
             <a:pPr algn="just"/>
             <a:r>
-              <a:rPr sz="1400" b="0" i="0">
+              <a:rPr sz="1600" b="0" i="0">
                 <a:solidFill>
                   <a:srgbClr val="C7D6E5"/>
                 </a:solidFill>
@@ -8666,7 +8606,7 @@
                     <a:p>
                       <a:pPr algn="ctr"/>
                       <a:r>
-                        <a:rPr sz="1600" b="1">
+                        <a:rPr sz="1700" b="1">
                           <a:solidFill>
                             <a:srgbClr val="FFFFFF"/>
                           </a:solidFill>
@@ -8691,7 +8631,7 @@
                     <a:p>
                       <a:pPr algn="ctr"/>
                       <a:r>
-                        <a:rPr sz="1600" b="0">
+                        <a:rPr sz="1700" b="0">
                           <a:solidFill>
                             <a:srgbClr val="202020"/>
                           </a:solidFill>
@@ -8716,7 +8656,7 @@
                     <a:p>
                       <a:pPr algn="ctr"/>
                       <a:r>
-                        <a:rPr sz="1600" b="0">
+                        <a:rPr sz="1700" b="0">
                           <a:solidFill>
                             <a:srgbClr val="202020"/>
                           </a:solidFill>
@@ -8741,7 +8681,7 @@
                     <a:p>
                       <a:pPr algn="ctr"/>
                       <a:r>
-                        <a:rPr sz="1600" b="0">
+                        <a:rPr sz="1700" b="0">
                           <a:solidFill>
                             <a:srgbClr val="202020"/>
                           </a:solidFill>
@@ -8791,7 +8731,7 @@
                     <a:p>
                       <a:pPr algn="ctr"/>
                       <a:r>
-                        <a:rPr sz="1600" b="1">
+                        <a:rPr sz="1700" b="1">
                           <a:solidFill>
                             <a:srgbClr val="FFFFFF"/>
                           </a:solidFill>
@@ -8816,7 +8756,7 @@
                     <a:p>
                       <a:pPr algn="ctr"/>
                       <a:r>
-                        <a:rPr sz="1600" b="0">
+                        <a:rPr sz="1700" b="0">
                           <a:solidFill>
                             <a:srgbClr val="202020"/>
                           </a:solidFill>
@@ -8841,7 +8781,7 @@
                     <a:p>
                       <a:pPr algn="ctr"/>
                       <a:r>
-                        <a:rPr sz="1600" b="0">
+                        <a:rPr sz="1700" b="0">
                           <a:solidFill>
                             <a:srgbClr val="202020"/>
                           </a:solidFill>
@@ -8866,7 +8806,7 @@
                     <a:p>
                       <a:pPr algn="ctr"/>
                       <a:r>
-                        <a:rPr sz="1600" b="0">
+                        <a:rPr sz="1700" b="0">
                           <a:solidFill>
                             <a:srgbClr val="202020"/>
                           </a:solidFill>
@@ -8916,7 +8856,7 @@
                     <a:p>
                       <a:pPr algn="ctr"/>
                       <a:r>
-                        <a:rPr sz="1600" b="1">
+                        <a:rPr sz="1700" b="1">
                           <a:solidFill>
                             <a:srgbClr val="FFFFFF"/>
                           </a:solidFill>
@@ -8941,7 +8881,7 @@
                     <a:p>
                       <a:pPr algn="ctr"/>
                       <a:r>
-                        <a:rPr sz="1600" b="0">
+                        <a:rPr sz="1700" b="0">
                           <a:solidFill>
                             <a:srgbClr val="202020"/>
                           </a:solidFill>
@@ -8966,7 +8906,7 @@
                     <a:p>
                       <a:pPr algn="ctr"/>
                       <a:r>
-                        <a:rPr sz="1600" b="0">
+                        <a:rPr sz="1700" b="0">
                           <a:solidFill>
                             <a:srgbClr val="202020"/>
                           </a:solidFill>
@@ -8991,7 +8931,7 @@
                     <a:p>
                       <a:pPr algn="ctr"/>
                       <a:r>
-                        <a:rPr sz="1600" b="0">
+                        <a:rPr sz="1700" b="0">
                           <a:solidFill>
                             <a:srgbClr val="202020"/>
                           </a:solidFill>
@@ -9041,7 +8981,7 @@
                     <a:p>
                       <a:pPr algn="ctr"/>
                       <a:r>
-                        <a:rPr sz="1600" b="1">
+                        <a:rPr sz="1700" b="1">
                           <a:solidFill>
                             <a:srgbClr val="FFFFFF"/>
                           </a:solidFill>
@@ -9066,7 +9006,7 @@
                     <a:p>
                       <a:pPr algn="ctr"/>
                       <a:r>
-                        <a:rPr sz="1600" b="0">
+                        <a:rPr sz="1700" b="0">
                           <a:solidFill>
                             <a:srgbClr val="202020"/>
                           </a:solidFill>
@@ -9091,7 +9031,7 @@
                     <a:p>
                       <a:pPr algn="ctr"/>
                       <a:r>
-                        <a:rPr sz="1600" b="0">
+                        <a:rPr sz="1700" b="0">
                           <a:solidFill>
                             <a:srgbClr val="202020"/>
                           </a:solidFill>
@@ -9116,7 +9056,7 @@
                     <a:p>
                       <a:pPr algn="ctr"/>
                       <a:r>
-                        <a:rPr sz="1600" b="0">
+                        <a:rPr sz="1700" b="0">
                           <a:solidFill>
                             <a:srgbClr val="202020"/>
                           </a:solidFill>
@@ -9181,7 +9121,7 @@
           <a:p>
             <a:pPr algn="ctr"/>
             <a:r>
-              <a:rPr sz="1700" b="1">
+              <a:rPr sz="1900" b="1">
                 <a:solidFill>
                   <a:srgbClr val="1F4E79"/>
                 </a:solidFill>
@@ -9193,7 +9133,7 @@
           <a:p>
             <a:pPr algn="ctr"/>
             <a:r>
-              <a:rPr sz="1700" b="1">
+              <a:rPr sz="1900" b="1">
                 <a:solidFill>
                   <a:srgbClr val="1F4E79"/>
                 </a:solidFill>
@@ -9233,7 +9173,7 @@
                     <a:p>
                       <a:pPr algn="ctr"/>
                       <a:r>
-                        <a:rPr sz="1600" b="1">
+                        <a:rPr sz="1700" b="1">
                           <a:solidFill>
                             <a:srgbClr val="FFFFFF"/>
                           </a:solidFill>
@@ -9258,7 +9198,7 @@
                     <a:p>
                       <a:pPr algn="ctr"/>
                       <a:r>
-                        <a:rPr sz="1600" b="0">
+                        <a:rPr sz="1700" b="0">
                           <a:solidFill>
                             <a:srgbClr val="202020"/>
                           </a:solidFill>
@@ -9283,7 +9223,7 @@
                     <a:p>
                       <a:pPr algn="ctr"/>
                       <a:r>
-                        <a:rPr sz="1600" b="0">
+                        <a:rPr sz="1700" b="0">
                           <a:solidFill>
                             <a:srgbClr val="202020"/>
                           </a:solidFill>
@@ -9308,7 +9248,7 @@
                     <a:p>
                       <a:pPr algn="ctr"/>
                       <a:r>
-                        <a:rPr sz="1600" b="0">
+                        <a:rPr sz="1700" b="0">
                           <a:solidFill>
                             <a:srgbClr val="202020"/>
                           </a:solidFill>
@@ -9353,37 +9293,13 @@
           <a:p>
             <a:pPr algn="just"/>
             <a:r>
-              <a:rPr sz="1500" b="0" i="0">
+              <a:rPr sz="1700" b="0" i="0">
                 <a:solidFill>
                   <a:srgbClr val="59636E"/>
                 </a:solidFill>
                 <a:latin typeface="Times New Roman"/>
               </a:rPr>
-              <a:t>At T = 4 the distilled</a:t>
-            </a:r>
-          </a:p>
-          <a:p>
-            <a:pPr algn="just"/>
-            <a:r>
-              <a:rPr sz="1500" b="0" i="0">
-                <a:solidFill>
-                  <a:srgbClr val="59636E"/>
-                </a:solidFill>
-                <a:latin typeface="Times New Roman"/>
-              </a:rPr>
-              <a:t>model gives 3 and 7</a:t>
-            </a:r>
-          </a:p>
-          <a:p>
-            <a:pPr algn="just"/>
-            <a:r>
-              <a:rPr sz="1500" b="0" i="0">
-                <a:solidFill>
-                  <a:srgbClr val="59636E"/>
-                </a:solidFill>
-                <a:latin typeface="Times New Roman"/>
-              </a:rPr>
-              <a:t>the same probability</a:t>
+              <a:t>At T = 4 the distilled model gives 3 and 7 the same probability</a:t>
             </a:r>
           </a:p>
         </p:txBody>
@@ -9417,7 +9333,7 @@
                     <a:p>
                       <a:pPr algn="ctr"/>
                       <a:r>
-                        <a:rPr sz="1600" b="1">
+                        <a:rPr sz="1700" b="1">
                           <a:solidFill>
                             <a:srgbClr val="FFFFFF"/>
                           </a:solidFill>
@@ -9442,7 +9358,7 @@
                     <a:p>
                       <a:pPr algn="ctr"/>
                       <a:r>
-                        <a:rPr sz="1600" b="0">
+                        <a:rPr sz="1700" b="0">
                           <a:solidFill>
                             <a:srgbClr val="202020"/>
                           </a:solidFill>
@@ -9467,7 +9383,7 @@
                     <a:p>
                       <a:pPr algn="ctr"/>
                       <a:r>
-                        <a:rPr sz="1600" b="0">
+                        <a:rPr sz="1700" b="0">
                           <a:solidFill>
                             <a:srgbClr val="202020"/>
                           </a:solidFill>
@@ -9492,7 +9408,7 @@
                     <a:p>
                       <a:pPr algn="ctr"/>
                       <a:r>
-                        <a:rPr sz="1600" b="0">
+                        <a:rPr sz="1700" b="0">
                           <a:solidFill>
                             <a:srgbClr val="202020"/>
                           </a:solidFill>
@@ -9542,7 +9458,7 @@
                     <a:p>
                       <a:pPr algn="ctr"/>
                       <a:r>
-                        <a:rPr sz="1600" b="1">
+                        <a:rPr sz="1700" b="1">
                           <a:solidFill>
                             <a:srgbClr val="FFFFFF"/>
                           </a:solidFill>
@@ -9567,7 +9483,7 @@
                     <a:p>
                       <a:pPr algn="ctr"/>
                       <a:r>
-                        <a:rPr sz="1600" b="0">
+                        <a:rPr sz="1700" b="0">
                           <a:solidFill>
                             <a:srgbClr val="202020"/>
                           </a:solidFill>
@@ -9592,7 +9508,7 @@
                     <a:p>
                       <a:pPr algn="ctr"/>
                       <a:r>
-                        <a:rPr sz="1600" b="0">
+                        <a:rPr sz="1700" b="0">
                           <a:solidFill>
                             <a:srgbClr val="202020"/>
                           </a:solidFill>
@@ -9617,7 +9533,7 @@
                     <a:p>
                       <a:pPr algn="ctr"/>
                       <a:r>
-                        <a:rPr sz="1600" b="0">
+                        <a:rPr sz="1700" b="0">
                           <a:solidFill>
                             <a:srgbClr val="202020"/>
                           </a:solidFill>
@@ -9667,7 +9583,7 @@
                     <a:p>
                       <a:pPr algn="ctr"/>
                       <a:r>
-                        <a:rPr sz="1600" b="1">
+                        <a:rPr sz="1700" b="1">
                           <a:solidFill>
                             <a:srgbClr val="FFFFFF"/>
                           </a:solidFill>
@@ -9692,7 +9608,7 @@
                     <a:p>
                       <a:pPr algn="ctr"/>
                       <a:r>
-                        <a:rPr sz="1600" b="0">
+                        <a:rPr sz="1700" b="0">
                           <a:solidFill>
                             <a:srgbClr val="202020"/>
                           </a:solidFill>
@@ -9717,7 +9633,7 @@
                     <a:p>
                       <a:pPr algn="ctr"/>
                       <a:r>
-                        <a:rPr sz="1600" b="0">
+                        <a:rPr sz="1700" b="0">
                           <a:solidFill>
                             <a:srgbClr val="202020"/>
                           </a:solidFill>
@@ -9742,7 +9658,7 @@
                     <a:p>
                       <a:pPr algn="ctr"/>
                       <a:r>
-                        <a:rPr sz="1600" b="0">
+                        <a:rPr sz="1700" b="0">
                           <a:solidFill>
                             <a:srgbClr val="202020"/>
                           </a:solidFill>
@@ -9792,7 +9708,7 @@
                     <a:p>
                       <a:pPr algn="ctr"/>
                       <a:r>
-                        <a:rPr sz="1600" b="1">
+                        <a:rPr sz="1700" b="1">
                           <a:solidFill>
                             <a:srgbClr val="FFFFFF"/>
                           </a:solidFill>
@@ -9817,7 +9733,7 @@
                     <a:p>
                       <a:pPr algn="ctr"/>
                       <a:r>
-                        <a:rPr sz="1600" b="0">
+                        <a:rPr sz="1700" b="0">
                           <a:solidFill>
                             <a:srgbClr val="202020"/>
                           </a:solidFill>
@@ -9842,7 +9758,7 @@
                     <a:p>
                       <a:pPr algn="ctr"/>
                       <a:r>
-                        <a:rPr sz="1600" b="0">
+                        <a:rPr sz="1700" b="0">
                           <a:solidFill>
                             <a:srgbClr val="202020"/>
                           </a:solidFill>
@@ -9867,7 +9783,7 @@
                     <a:p>
                       <a:pPr algn="ctr"/>
                       <a:r>
-                        <a:rPr sz="1600" b="0">
+                        <a:rPr sz="1700" b="0">
                           <a:solidFill>
                             <a:srgbClr val="202020"/>
                           </a:solidFill>
@@ -9932,7 +9848,7 @@
           <a:p>
             <a:pPr algn="ctr"/>
             <a:r>
-              <a:rPr sz="1900" b="1">
+              <a:rPr sz="2100" b="1">
                 <a:solidFill>
                   <a:srgbClr val="1E7A45"/>
                 </a:solidFill>
@@ -9944,7 +9860,7 @@
           <a:p>
             <a:pPr algn="ctr"/>
             <a:r>
-              <a:rPr sz="1900" b="1">
+              <a:rPr sz="2100" b="1">
                 <a:solidFill>
                   <a:srgbClr val="1E7A45"/>
                 </a:solidFill>
@@ -9979,7 +9895,7 @@
           <a:p>
             <a:pPr algn="just"/>
             <a:r>
-              <a:rPr sz="1600" b="0" i="0">
+              <a:rPr sz="1800" b="0" i="0">
                 <a:solidFill>
                   <a:srgbClr val="202020"/>
                 </a:solidFill>
@@ -9991,7 +9907,7 @@
           <a:p>
             <a:pPr algn="just"/>
             <a:r>
-              <a:rPr sz="1600" b="0" i="0">
+              <a:rPr sz="1800" b="0" i="0">
                 <a:solidFill>
                   <a:srgbClr val="202020"/>
                 </a:solidFill>
@@ -10815,7 +10731,7 @@
           <a:p>
             <a:pPr algn="just"/>
             <a:r>
-              <a:rPr sz="1400" b="0" i="0">
+              <a:rPr sz="1600" b="0" i="0">
                 <a:solidFill>
                   <a:srgbClr val="C7D6E5"/>
                 </a:solidFill>
@@ -10855,7 +10771,7 @@
                     <a:p>
                       <a:pPr algn="ctr"/>
                       <a:r>
-                        <a:rPr sz="1600" b="1">
+                        <a:rPr sz="1700" b="1">
                           <a:solidFill>
                             <a:srgbClr val="FFFFFF"/>
                           </a:solidFill>
@@ -10880,7 +10796,7 @@
                     <a:p>
                       <a:pPr algn="ctr"/>
                       <a:r>
-                        <a:rPr sz="1600" b="0">
+                        <a:rPr sz="1700" b="0">
                           <a:solidFill>
                             <a:srgbClr val="202020"/>
                           </a:solidFill>
@@ -10905,7 +10821,7 @@
                     <a:p>
                       <a:pPr algn="ctr"/>
                       <a:r>
-                        <a:rPr sz="1600" b="0">
+                        <a:rPr sz="1700" b="0">
                           <a:solidFill>
                             <a:srgbClr val="202020"/>
                           </a:solidFill>
@@ -10930,7 +10846,7 @@
                     <a:p>
                       <a:pPr algn="ctr"/>
                       <a:r>
-                        <a:rPr sz="1600" b="0">
+                        <a:rPr sz="1700" b="0">
                           <a:solidFill>
                             <a:srgbClr val="202020"/>
                           </a:solidFill>
@@ -10980,7 +10896,7 @@
                     <a:p>
                       <a:pPr algn="ctr"/>
                       <a:r>
-                        <a:rPr sz="1600" b="1">
+                        <a:rPr sz="1700" b="1">
                           <a:solidFill>
                             <a:srgbClr val="FFFFFF"/>
                           </a:solidFill>
@@ -11005,7 +10921,7 @@
                     <a:p>
                       <a:pPr algn="ctr"/>
                       <a:r>
-                        <a:rPr sz="1600" b="0">
+                        <a:rPr sz="1700" b="0">
                           <a:solidFill>
                             <a:srgbClr val="202020"/>
                           </a:solidFill>
@@ -11030,7 +10946,7 @@
                     <a:p>
                       <a:pPr algn="ctr"/>
                       <a:r>
-                        <a:rPr sz="1600" b="0">
+                        <a:rPr sz="1700" b="0">
                           <a:solidFill>
                             <a:srgbClr val="202020"/>
                           </a:solidFill>
@@ -11055,7 +10971,7 @@
                     <a:p>
                       <a:pPr algn="ctr"/>
                       <a:r>
-                        <a:rPr sz="1600" b="0">
+                        <a:rPr sz="1700" b="0">
                           <a:solidFill>
                             <a:srgbClr val="202020"/>
                           </a:solidFill>
@@ -11105,7 +11021,7 @@
                     <a:p>
                       <a:pPr algn="ctr"/>
                       <a:r>
-                        <a:rPr sz="1600" b="1">
+                        <a:rPr sz="1700" b="1">
                           <a:solidFill>
                             <a:srgbClr val="FFFFFF"/>
                           </a:solidFill>
@@ -11130,7 +11046,7 @@
                     <a:p>
                       <a:pPr algn="ctr"/>
                       <a:r>
-                        <a:rPr sz="1600" b="0">
+                        <a:rPr sz="1700" b="0">
                           <a:solidFill>
                             <a:srgbClr val="202020"/>
                           </a:solidFill>
@@ -11155,7 +11071,7 @@
                     <a:p>
                       <a:pPr algn="ctr"/>
                       <a:r>
-                        <a:rPr sz="1600" b="0">
+                        <a:rPr sz="1700" b="0">
                           <a:solidFill>
                             <a:srgbClr val="202020"/>
                           </a:solidFill>
@@ -11180,7 +11096,7 @@
                     <a:p>
                       <a:pPr algn="ctr"/>
                       <a:r>
-                        <a:rPr sz="1600" b="0">
+                        <a:rPr sz="1700" b="0">
                           <a:solidFill>
                             <a:srgbClr val="202020"/>
                           </a:solidFill>
@@ -11245,7 +11161,7 @@
           <a:p>
             <a:pPr algn="ctr"/>
             <a:r>
-              <a:rPr sz="1700" b="1">
+              <a:rPr sz="1900" b="1">
                 <a:solidFill>
                   <a:srgbClr val="1F4E79"/>
                 </a:solidFill>
@@ -11257,7 +11173,7 @@
           <a:p>
             <a:pPr algn="ctr"/>
             <a:r>
-              <a:rPr sz="1700" b="1">
+              <a:rPr sz="1900" b="1">
                 <a:solidFill>
                   <a:srgbClr val="1F4E79"/>
                 </a:solidFill>
@@ -11297,7 +11213,7 @@
                     <a:p>
                       <a:pPr algn="ctr"/>
                       <a:r>
-                        <a:rPr sz="1600" b="1">
+                        <a:rPr sz="1700" b="1">
                           <a:solidFill>
                             <a:srgbClr val="FFFFFF"/>
                           </a:solidFill>
@@ -11322,7 +11238,7 @@
                     <a:p>
                       <a:pPr algn="ctr"/>
                       <a:r>
-                        <a:rPr sz="1600" b="0">
+                        <a:rPr sz="1700" b="0">
                           <a:solidFill>
                             <a:srgbClr val="202020"/>
                           </a:solidFill>
@@ -11347,7 +11263,7 @@
                     <a:p>
                       <a:pPr algn="ctr"/>
                       <a:r>
-                        <a:rPr sz="1600" b="0">
+                        <a:rPr sz="1700" b="0">
                           <a:solidFill>
                             <a:srgbClr val="202020"/>
                           </a:solidFill>
@@ -11372,7 +11288,7 @@
                     <a:p>
                       <a:pPr algn="ctr"/>
                       <a:r>
-                        <a:rPr sz="1600" b="0">
+                        <a:rPr sz="1700" b="0">
                           <a:solidFill>
                             <a:srgbClr val="202020"/>
                           </a:solidFill>
@@ -11437,7 +11353,7 @@
           <a:p>
             <a:pPr algn="ctr"/>
             <a:r>
-              <a:rPr sz="1700" b="1">
+              <a:rPr sz="1900" b="1">
                 <a:solidFill>
                   <a:srgbClr val="1E7A45"/>
                 </a:solidFill>
@@ -11449,7 +11365,7 @@
           <a:p>
             <a:pPr algn="ctr"/>
             <a:r>
-              <a:rPr sz="1700" b="1">
+              <a:rPr sz="1900" b="1">
                 <a:solidFill>
                   <a:srgbClr val="1E7A45"/>
                 </a:solidFill>
@@ -11461,7 +11377,7 @@
           <a:p>
             <a:pPr algn="ctr"/>
             <a:r>
-              <a:rPr sz="1700" b="1">
+              <a:rPr sz="1900" b="1">
                 <a:solidFill>
                   <a:srgbClr val="1E7A45"/>
                 </a:solidFill>
@@ -11503,7 +11419,7 @@
                     <a:p>
                       <a:pPr algn="ctr"/>
                       <a:r>
-                        <a:rPr sz="1700" b="1">
+                        <a:rPr sz="1800" b="1">
                           <a:solidFill>
                             <a:srgbClr val="FFFFFF"/>
                           </a:solidFill>
@@ -11526,7 +11442,7 @@
                     <a:p>
                       <a:pPr algn="ctr"/>
                       <a:r>
-                        <a:rPr sz="1700" b="1">
+                        <a:rPr sz="1800" b="1">
                           <a:solidFill>
                             <a:srgbClr val="FFFFFF"/>
                           </a:solidFill>
@@ -11549,7 +11465,7 @@
                     <a:p>
                       <a:pPr algn="ctr"/>
                       <a:r>
-                        <a:rPr sz="1700" b="1">
+                        <a:rPr sz="1800" b="1">
                           <a:solidFill>
                             <a:srgbClr val="FFFFFF"/>
                           </a:solidFill>
@@ -11574,7 +11490,7 @@
                     <a:p>
                       <a:pPr algn="ctr"/>
                       <a:r>
-                        <a:rPr sz="1700" b="0">
+                        <a:rPr sz="1800" b="0">
                           <a:solidFill>
                             <a:srgbClr val="202020"/>
                           </a:solidFill>
@@ -11597,7 +11513,7 @@
                     <a:p>
                       <a:pPr algn="ctr"/>
                       <a:r>
-                        <a:rPr sz="1700" b="0">
+                        <a:rPr sz="1800" b="0">
                           <a:solidFill>
                             <a:srgbClr val="202020"/>
                           </a:solidFill>
@@ -11620,7 +11536,7 @@
                     <a:p>
                       <a:pPr algn="ctr"/>
                       <a:r>
-                        <a:rPr sz="1700" b="0">
+                        <a:rPr sz="1800" b="0">
                           <a:solidFill>
                             <a:srgbClr val="202020"/>
                           </a:solidFill>
@@ -11645,7 +11561,7 @@
                     <a:p>
                       <a:pPr algn="ctr"/>
                       <a:r>
-                        <a:rPr sz="1700" b="0">
+                        <a:rPr sz="1800" b="0">
                           <a:solidFill>
                             <a:srgbClr val="202020"/>
                           </a:solidFill>
@@ -11668,7 +11584,7 @@
                     <a:p>
                       <a:pPr algn="ctr"/>
                       <a:r>
-                        <a:rPr sz="1700" b="0">
+                        <a:rPr sz="1800" b="0">
                           <a:solidFill>
                             <a:srgbClr val="202020"/>
                           </a:solidFill>
@@ -11691,7 +11607,7 @@
                     <a:p>
                       <a:pPr algn="ctr"/>
                       <a:r>
-                        <a:rPr sz="1700" b="0">
+                        <a:rPr sz="1800" b="0">
                           <a:solidFill>
                             <a:srgbClr val="202020"/>
                           </a:solidFill>
@@ -11716,7 +11632,7 @@
                     <a:p>
                       <a:pPr algn="ctr"/>
                       <a:r>
-                        <a:rPr sz="1700" b="0">
+                        <a:rPr sz="1800" b="0">
                           <a:solidFill>
                             <a:srgbClr val="202020"/>
                           </a:solidFill>
@@ -11739,7 +11655,7 @@
                     <a:p>
                       <a:pPr algn="ctr"/>
                       <a:r>
-                        <a:rPr sz="1700" b="0">
+                        <a:rPr sz="1800" b="0">
                           <a:solidFill>
                             <a:srgbClr val="202020"/>
                           </a:solidFill>
@@ -11762,7 +11678,7 @@
                     <a:p>
                       <a:pPr algn="ctr"/>
                       <a:r>
-                        <a:rPr sz="1700" b="0">
+                        <a:rPr sz="1800" b="0">
                           <a:solidFill>
                             <a:srgbClr val="202020"/>
                           </a:solidFill>
@@ -11807,7 +11723,7 @@
           <a:p>
             <a:pPr algn="just"/>
             <a:r>
-              <a:rPr sz="1600" b="0" i="0">
+              <a:rPr sz="1800" b="0" i="0">
                 <a:solidFill>
                   <a:srgbClr val="59636E"/>
                 </a:solidFill>
@@ -12393,7 +12309,7 @@
           <a:p>
             <a:pPr algn="just"/>
             <a:r>
-              <a:rPr sz="1400" b="0" i="0">
+              <a:rPr sz="1600" b="0" i="0">
                 <a:solidFill>
                   <a:srgbClr val="C7D6E5"/>
                 </a:solidFill>
@@ -12452,7 +12368,7 @@
           <a:p>
             <a:pPr algn="just"/>
             <a:r>
-              <a:rPr sz="1700" b="0" i="0">
+              <a:rPr sz="1900" b="0" i="0">
                 <a:solidFill>
                   <a:srgbClr val="202020"/>
                 </a:solidFill>
@@ -12492,7 +12408,7 @@
                     <a:p>
                       <a:pPr algn="ctr"/>
                       <a:r>
-                        <a:rPr sz="1600" b="1">
+                        <a:rPr sz="1700" b="1">
                           <a:solidFill>
                             <a:srgbClr val="FFFFFF"/>
                           </a:solidFill>
@@ -12517,7 +12433,7 @@
                     <a:p>
                       <a:pPr algn="ctr"/>
                       <a:r>
-                        <a:rPr sz="1600" b="0">
+                        <a:rPr sz="1700" b="0">
                           <a:solidFill>
                             <a:srgbClr val="202020"/>
                           </a:solidFill>
@@ -12542,7 +12458,7 @@
                     <a:p>
                       <a:pPr algn="ctr"/>
                       <a:r>
-                        <a:rPr sz="1600" b="0">
+                        <a:rPr sz="1700" b="0">
                           <a:solidFill>
                             <a:srgbClr val="202020"/>
                           </a:solidFill>
@@ -12567,7 +12483,7 @@
                     <a:p>
                       <a:pPr algn="ctr"/>
                       <a:r>
-                        <a:rPr sz="1600" b="0">
+                        <a:rPr sz="1700" b="0">
                           <a:solidFill>
                             <a:srgbClr val="202020"/>
                           </a:solidFill>
@@ -12617,7 +12533,7 @@
                     <a:p>
                       <a:pPr algn="ctr"/>
                       <a:r>
-                        <a:rPr sz="1600" b="1">
+                        <a:rPr sz="1700" b="1">
                           <a:solidFill>
                             <a:srgbClr val="FFFFFF"/>
                           </a:solidFill>
@@ -12642,7 +12558,7 @@
                     <a:p>
                       <a:pPr algn="ctr"/>
                       <a:r>
-                        <a:rPr sz="1600" b="0">
+                        <a:rPr sz="1700" b="0">
                           <a:solidFill>
                             <a:srgbClr val="202020"/>
                           </a:solidFill>
@@ -12667,7 +12583,7 @@
                     <a:p>
                       <a:pPr algn="ctr"/>
                       <a:r>
-                        <a:rPr sz="1600" b="0">
+                        <a:rPr sz="1700" b="0">
                           <a:solidFill>
                             <a:srgbClr val="202020"/>
                           </a:solidFill>
@@ -12692,7 +12608,7 @@
                     <a:p>
                       <a:pPr algn="ctr"/>
                       <a:r>
-                        <a:rPr sz="1600" b="0">
+                        <a:rPr sz="1700" b="0">
                           <a:solidFill>
                             <a:srgbClr val="202020"/>
                           </a:solidFill>
@@ -12742,7 +12658,7 @@
                     <a:p>
                       <a:pPr algn="ctr"/>
                       <a:r>
-                        <a:rPr sz="1600" b="1">
+                        <a:rPr sz="1700" b="1">
                           <a:solidFill>
                             <a:srgbClr val="FFFFFF"/>
                           </a:solidFill>
@@ -12767,7 +12683,7 @@
                     <a:p>
                       <a:pPr algn="ctr"/>
                       <a:r>
-                        <a:rPr sz="1600" b="0">
+                        <a:rPr sz="1700" b="0">
                           <a:solidFill>
                             <a:srgbClr val="202020"/>
                           </a:solidFill>
@@ -12792,7 +12708,7 @@
                     <a:p>
                       <a:pPr algn="ctr"/>
                       <a:r>
-                        <a:rPr sz="1600" b="0">
+                        <a:rPr sz="1700" b="0">
                           <a:solidFill>
                             <a:srgbClr val="202020"/>
                           </a:solidFill>
@@ -12817,7 +12733,7 @@
                     <a:p>
                       <a:pPr algn="ctr"/>
                       <a:r>
-                        <a:rPr sz="1600" b="0">
+                        <a:rPr sz="1700" b="0">
                           <a:solidFill>
                             <a:srgbClr val="202020"/>
                           </a:solidFill>
@@ -12867,7 +12783,7 @@
                     <a:p>
                       <a:pPr algn="ctr"/>
                       <a:r>
-                        <a:rPr sz="1600" b="1">
+                        <a:rPr sz="1700" b="1">
                           <a:solidFill>
                             <a:srgbClr val="FFFFFF"/>
                           </a:solidFill>
@@ -12892,7 +12808,7 @@
                     <a:p>
                       <a:pPr algn="ctr"/>
                       <a:r>
-                        <a:rPr sz="1600" b="0">
+                        <a:rPr sz="1700" b="0">
                           <a:solidFill>
                             <a:srgbClr val="202020"/>
                           </a:solidFill>
@@ -12917,7 +12833,7 @@
                     <a:p>
                       <a:pPr algn="ctr"/>
                       <a:r>
-                        <a:rPr sz="1600" b="0">
+                        <a:rPr sz="1700" b="0">
                           <a:solidFill>
                             <a:srgbClr val="202020"/>
                           </a:solidFill>
@@ -12942,7 +12858,7 @@
                     <a:p>
                       <a:pPr algn="ctr"/>
                       <a:r>
-                        <a:rPr sz="1600" b="0">
+                        <a:rPr sz="1700" b="0">
                           <a:solidFill>
                             <a:srgbClr val="202020"/>
                           </a:solidFill>
@@ -12992,7 +12908,7 @@
                     <a:p>
                       <a:pPr algn="ctr"/>
                       <a:r>
-                        <a:rPr sz="1600" b="1">
+                        <a:rPr sz="1700" b="1">
                           <a:solidFill>
                             <a:srgbClr val="FFFFFF"/>
                           </a:solidFill>
@@ -13017,7 +12933,7 @@
                     <a:p>
                       <a:pPr algn="ctr"/>
                       <a:r>
-                        <a:rPr sz="1600" b="0">
+                        <a:rPr sz="1700" b="0">
                           <a:solidFill>
                             <a:srgbClr val="202020"/>
                           </a:solidFill>
@@ -13042,7 +12958,7 @@
                     <a:p>
                       <a:pPr algn="ctr"/>
                       <a:r>
-                        <a:rPr sz="1600" b="0">
+                        <a:rPr sz="1700" b="0">
                           <a:solidFill>
                             <a:srgbClr val="202020"/>
                           </a:solidFill>
@@ -13067,7 +12983,7 @@
                     <a:p>
                       <a:pPr algn="ctr"/>
                       <a:r>
-                        <a:rPr sz="1600" b="0">
+                        <a:rPr sz="1700" b="0">
                           <a:solidFill>
                             <a:srgbClr val="202020"/>
                           </a:solidFill>
@@ -13117,7 +13033,7 @@
                     <a:p>
                       <a:pPr algn="ctr"/>
                       <a:r>
-                        <a:rPr sz="1600" b="1">
+                        <a:rPr sz="1700" b="1">
                           <a:solidFill>
                             <a:srgbClr val="FFFFFF"/>
                           </a:solidFill>
@@ -13142,7 +13058,7 @@
                     <a:p>
                       <a:pPr algn="ctr"/>
                       <a:r>
-                        <a:rPr sz="1600" b="0">
+                        <a:rPr sz="1700" b="0">
                           <a:solidFill>
                             <a:srgbClr val="202020"/>
                           </a:solidFill>
@@ -13167,7 +13083,7 @@
                     <a:p>
                       <a:pPr algn="ctr"/>
                       <a:r>
-                        <a:rPr sz="1600" b="0">
+                        <a:rPr sz="1700" b="0">
                           <a:solidFill>
                             <a:srgbClr val="202020"/>
                           </a:solidFill>
@@ -13192,7 +13108,7 @@
                     <a:p>
                       <a:pPr algn="ctr"/>
                       <a:r>
-                        <a:rPr sz="1600" b="0">
+                        <a:rPr sz="1700" b="0">
                           <a:solidFill>
                             <a:srgbClr val="202020"/>
                           </a:solidFill>
@@ -13242,7 +13158,7 @@
                     <a:p>
                       <a:pPr algn="ctr"/>
                       <a:r>
-                        <a:rPr sz="1600" b="1">
+                        <a:rPr sz="1700" b="1">
                           <a:solidFill>
                             <a:srgbClr val="FFFFFF"/>
                           </a:solidFill>
@@ -13267,7 +13183,7 @@
                     <a:p>
                       <a:pPr algn="ctr"/>
                       <a:r>
-                        <a:rPr sz="1600" b="0">
+                        <a:rPr sz="1700" b="0">
                           <a:solidFill>
                             <a:srgbClr val="202020"/>
                           </a:solidFill>
@@ -13292,7 +13208,7 @@
                     <a:p>
                       <a:pPr algn="ctr"/>
                       <a:r>
-                        <a:rPr sz="1600" b="0">
+                        <a:rPr sz="1700" b="0">
                           <a:solidFill>
                             <a:srgbClr val="202020"/>
                           </a:solidFill>
@@ -13317,7 +13233,7 @@
                     <a:p>
                       <a:pPr algn="ctr"/>
                       <a:r>
-                        <a:rPr sz="1600" b="0">
+                        <a:rPr sz="1700" b="0">
                           <a:solidFill>
                             <a:srgbClr val="202020"/>
                           </a:solidFill>
@@ -13382,25 +13298,13 @@
           <a:p>
             <a:pPr algn="just"/>
             <a:r>
-              <a:rPr sz="1700" b="1">
+              <a:rPr sz="1900" b="1">
                 <a:solidFill>
                   <a:srgbClr val="1E7A45"/>
                 </a:solidFill>
                 <a:latin typeface="Times New Roman"/>
               </a:rPr>
-              <a:t>Gradient descent moves the logit of 2 up, the logit of 7 down the most, and the logit of 3 down only slightly,</a:t>
-            </a:r>
-          </a:p>
-          <a:p>
-            <a:pPr algn="just"/>
-            <a:r>
-              <a:rPr sz="1700" b="1">
-                <a:solidFill>
-                  <a:srgbClr val="1E7A45"/>
-                </a:solidFill>
-                <a:latin typeface="Times New Roman"/>
-              </a:rPr>
-              <a:t>so the distilled model moves toward the view of the cumbersome model: 2 first, 3 second, 7 last.</a:t>
+              <a:t>Gradient descent moves the logit of 2 up, the logit of 7 down the most, and the logit of 3 down only slightly, so the distilled model moves toward the view of the cumbersome model: 2 first, 3 second, 7 last.</a:t>
             </a:r>
           </a:p>
         </p:txBody>
@@ -13429,25 +13333,13 @@
           <a:p>
             <a:pPr algn="just"/>
             <a:r>
-              <a:rPr sz="1600" b="0" i="0">
+              <a:rPr sz="1800" b="0" i="0">
                 <a:solidFill>
                   <a:srgbClr val="59636E"/>
                 </a:solidFill>
                 <a:latin typeface="Times New Roman"/>
               </a:rPr>
-              <a:t>Section 3 of the notebook recomputes these values with automatic differentiation (TensorFlow GradientTape)</a:t>
-            </a:r>
-          </a:p>
-          <a:p>
-            <a:pPr algn="just"/>
-            <a:r>
-              <a:rPr sz="1600" b="0" i="0">
-                <a:solidFill>
-                  <a:srgbClr val="59636E"/>
-                </a:solidFill>
-                <a:latin typeface="Times New Roman"/>
-              </a:rPr>
-              <a:t>and obtains the same objective, 13.8732, and the same gradient.</a:t>
+              <a:t>Section 3 of the notebook recomputes these values with automatic differentiation (TensorFlow GradientTape) and obtains the same objective, 13.8732, and the same gradient.</a:t>
             </a:r>
           </a:p>
         </p:txBody>
@@ -14169,7 +14061,7 @@
           <a:p>
             <a:pPr algn="just"/>
             <a:r>
-              <a:rPr sz="1400" b="0" i="0">
+              <a:rPr sz="1600" b="0" i="0">
                 <a:solidFill>
                   <a:srgbClr val="C7D6E5"/>
                 </a:solidFill>
@@ -14211,7 +14103,7 @@
                     <a:p>
                       <a:pPr algn="ctr"/>
                       <a:r>
-                        <a:rPr sz="1600" b="1">
+                        <a:rPr sz="1700" b="1">
                           <a:solidFill>
                             <a:srgbClr val="FFFFFF"/>
                           </a:solidFill>
@@ -14234,7 +14126,7 @@
                     <a:p>
                       <a:pPr algn="ctr"/>
                       <a:r>
-                        <a:rPr sz="1600" b="1">
+                        <a:rPr sz="1700" b="1">
                           <a:solidFill>
                             <a:srgbClr val="FFFFFF"/>
                           </a:solidFill>
@@ -14257,7 +14149,7 @@
                     <a:p>
                       <a:pPr algn="ctr"/>
                       <a:r>
-                        <a:rPr sz="1600" b="1">
+                        <a:rPr sz="1700" b="1">
                           <a:solidFill>
                             <a:srgbClr val="FFFFFF"/>
                           </a:solidFill>
@@ -14282,7 +14174,7 @@
                     <a:p>
                       <a:pPr algn="ctr"/>
                       <a:r>
-                        <a:rPr sz="1600" b="0">
+                        <a:rPr sz="1700" b="0">
                           <a:solidFill>
                             <a:srgbClr val="202020"/>
                           </a:solidFill>
@@ -14305,7 +14197,7 @@
                     <a:p>
                       <a:pPr algn="ctr"/>
                       <a:r>
-                        <a:rPr sz="1600" b="0">
+                        <a:rPr sz="1700" b="0">
                           <a:solidFill>
                             <a:srgbClr val="202020"/>
                           </a:solidFill>
@@ -14328,7 +14220,7 @@
                     <a:p>
                       <a:pPr algn="ctr"/>
                       <a:r>
-                        <a:rPr sz="1600" b="0">
+                        <a:rPr sz="1700" b="0">
                           <a:solidFill>
                             <a:srgbClr val="202020"/>
                           </a:solidFill>
@@ -14353,7 +14245,7 @@
                     <a:p>
                       <a:pPr algn="ctr"/>
                       <a:r>
-                        <a:rPr sz="1600" b="0">
+                        <a:rPr sz="1700" b="0">
                           <a:solidFill>
                             <a:srgbClr val="202020"/>
                           </a:solidFill>
@@ -14376,7 +14268,7 @@
                     <a:p>
                       <a:pPr algn="ctr"/>
                       <a:r>
-                        <a:rPr sz="1600" b="0">
+                        <a:rPr sz="1700" b="0">
                           <a:solidFill>
                             <a:srgbClr val="202020"/>
                           </a:solidFill>
@@ -14399,7 +14291,7 @@
                     <a:p>
                       <a:pPr algn="ctr"/>
                       <a:r>
-                        <a:rPr sz="1600" b="0">
+                        <a:rPr sz="1700" b="0">
                           <a:solidFill>
                             <a:srgbClr val="202020"/>
                           </a:solidFill>
@@ -14424,7 +14316,7 @@
                     <a:p>
                       <a:pPr algn="ctr"/>
                       <a:r>
-                        <a:rPr sz="1600" b="0">
+                        <a:rPr sz="1700" b="0">
                           <a:solidFill>
                             <a:srgbClr val="202020"/>
                           </a:solidFill>
@@ -14447,7 +14339,7 @@
                     <a:p>
                       <a:pPr algn="ctr"/>
                       <a:r>
-                        <a:rPr sz="1600" b="0">
+                        <a:rPr sz="1700" b="0">
                           <a:solidFill>
                             <a:srgbClr val="202020"/>
                           </a:solidFill>
@@ -14470,7 +14362,7 @@
                     <a:p>
                       <a:pPr algn="ctr"/>
                       <a:r>
-                        <a:rPr sz="1600" b="0">
+                        <a:rPr sz="1700" b="0">
                           <a:solidFill>
                             <a:srgbClr val="202020"/>
                           </a:solidFill>
@@ -14515,61 +14407,13 @@
           <a:p>
             <a:pPr algn="just"/>
             <a:r>
-              <a:rPr sz="1600" b="0" i="0">
+              <a:rPr sz="1800" b="0" i="0">
                 <a:solidFill>
                   <a:srgbClr val="202020"/>
                 </a:solidFill>
                 <a:latin typeface="Times New Roman"/>
               </a:rPr>
-              <a:t>From T = 4 to T = 20 the gradient shrinks by a factor</a:t>
-            </a:r>
-          </a:p>
-          <a:p>
-            <a:pPr algn="just"/>
-            <a:r>
-              <a:rPr sz="1600" b="0" i="0">
-                <a:solidFill>
-                  <a:srgbClr val="202020"/>
-                </a:solidFill>
-                <a:latin typeface="Times New Roman"/>
-              </a:rPr>
-              <a:t>of about 20, close to (20/4)² = 25; multiplied by T²,</a:t>
-            </a:r>
-          </a:p>
-          <a:p>
-            <a:pPr algn="just"/>
-            <a:r>
-              <a:rPr sz="1600" b="0" i="0">
-                <a:solidFill>
-                  <a:srgbClr val="202020"/>
-                </a:solidFill>
-                <a:latin typeface="Times New Roman"/>
-              </a:rPr>
-              <a:t>the values 0.85 and 1.05 are of similar size. The 1/T²</a:t>
-            </a:r>
-          </a:p>
-          <a:p>
-            <a:pPr algn="just"/>
-            <a:r>
-              <a:rPr sz="1600" b="0" i="0">
-                <a:solidFill>
-                  <a:srgbClr val="202020"/>
-                </a:solidFill>
-                <a:latin typeface="Times New Roman"/>
-              </a:rPr>
-              <a:t>scaling holds in the high-temperature limit; T = 1 is</a:t>
-            </a:r>
-          </a:p>
-          <a:p>
-            <a:pPr algn="just"/>
-            <a:r>
-              <a:rPr sz="1600" b="0" i="0">
-                <a:solidFill>
-                  <a:srgbClr val="202020"/>
-                </a:solidFill>
-                <a:latin typeface="Times New Roman"/>
-              </a:rPr>
-              <a:t>outside it.</a:t>
+              <a:t>From T = 4 to T = 20 the gradient shrinks by a factor of about 20, close to (20/4)² = 25; multiplied by T², the values 0.85 and 1.05 are of similar size. The 1/T² scaling holds in the high-temperature limit; T = 1 is outside it.</a:t>
             </a:r>
           </a:p>
         </p:txBody>
@@ -14622,25 +14466,13 @@
           <a:p>
             <a:pPr algn="just"/>
             <a:r>
-              <a:rPr sz="1600" b="0" i="0">
+              <a:rPr sz="1800" b="0" i="0">
                 <a:solidFill>
                   <a:srgbClr val="202020"/>
                 </a:solidFill>
                 <a:latin typeface="Times New Roman"/>
               </a:rPr>
-              <a:t>If T is high compared with the logits and the logits</a:t>
-            </a:r>
-          </a:p>
-          <a:p>
-            <a:pPr algn="just"/>
-            <a:r>
-              <a:rPr sz="1600" b="0" i="0">
-                <a:solidFill>
-                  <a:srgbClr val="202020"/>
-                </a:solidFill>
-                <a:latin typeface="Times New Roman"/>
-              </a:rPr>
-              <a:t>are zero-meaned (N classes), distillation minimizes</a:t>
+              <a:t>If T is high compared with the logits and the logits are zero-meaned (N classes), distillation minimizes</a:t>
             </a:r>
           </a:p>
         </p:txBody>
@@ -14700,7 +14532,7 @@
                     <a:p>
                       <a:pPr algn="ctr"/>
                       <a:r>
-                        <a:rPr sz="1600" b="1">
+                        <a:rPr sz="1700" b="1">
                           <a:solidFill>
                             <a:srgbClr val="FFFFFF"/>
                           </a:solidFill>
@@ -14723,7 +14555,7 @@
                     <a:p>
                       <a:pPr algn="ctr"/>
                       <a:r>
-                        <a:rPr sz="1600" b="1">
+                        <a:rPr sz="1700" b="1">
                           <a:solidFill>
                             <a:srgbClr val="FFFFFF"/>
                           </a:solidFill>
@@ -14746,7 +14578,7 @@
                     <a:p>
                       <a:pPr algn="ctr"/>
                       <a:r>
-                        <a:rPr sz="1600" b="1">
+                        <a:rPr sz="1700" b="1">
                           <a:solidFill>
                             <a:srgbClr val="FFFFFF"/>
                           </a:solidFill>
@@ -14771,7 +14603,7 @@
                     <a:p>
                       <a:pPr algn="ctr"/>
                       <a:r>
-                        <a:rPr sz="1600" b="0">
+                        <a:rPr sz="1700" b="0">
                           <a:solidFill>
                             <a:srgbClr val="202020"/>
                           </a:solidFill>
@@ -14794,7 +14626,7 @@
                     <a:p>
                       <a:pPr algn="ctr"/>
                       <a:r>
-                        <a:rPr sz="1600" b="0">
+                        <a:rPr sz="1700" b="0">
                           <a:solidFill>
                             <a:srgbClr val="202020"/>
                           </a:solidFill>
@@ -14817,7 +14649,7 @@
                     <a:p>
                       <a:pPr algn="ctr"/>
                       <a:r>
-                        <a:rPr sz="1600" b="0">
+                        <a:rPr sz="1700" b="0">
                           <a:solidFill>
                             <a:srgbClr val="202020"/>
                           </a:solidFill>
@@ -14842,7 +14674,7 @@
                     <a:p>
                       <a:pPr algn="ctr"/>
                       <a:r>
-                        <a:rPr sz="1600" b="0">
+                        <a:rPr sz="1700" b="0">
                           <a:solidFill>
                             <a:srgbClr val="202020"/>
                           </a:solidFill>
@@ -14865,7 +14697,7 @@
                     <a:p>
                       <a:pPr algn="ctr"/>
                       <a:r>
-                        <a:rPr sz="1600" b="0">
+                        <a:rPr sz="1700" b="0">
                           <a:solidFill>
                             <a:srgbClr val="202020"/>
                           </a:solidFill>
@@ -14888,7 +14720,7 @@
                     <a:p>
                       <a:pPr algn="ctr"/>
                       <a:r>
-                        <a:rPr sz="1600" b="0">
+                        <a:rPr sz="1700" b="0">
                           <a:solidFill>
                             <a:srgbClr val="202020"/>
                           </a:solidFill>
@@ -14913,7 +14745,7 @@
                     <a:p>
                       <a:pPr algn="ctr"/>
                       <a:r>
-                        <a:rPr sz="1600" b="0">
+                        <a:rPr sz="1700" b="0">
                           <a:solidFill>
                             <a:srgbClr val="202020"/>
                           </a:solidFill>
@@ -14936,7 +14768,7 @@
                     <a:p>
                       <a:pPr algn="ctr"/>
                       <a:r>
-                        <a:rPr sz="1600" b="0">
+                        <a:rPr sz="1700" b="0">
                           <a:solidFill>
                             <a:srgbClr val="202020"/>
                           </a:solidFill>
@@ -14959,7 +14791,7 @@
                     <a:p>
                       <a:pPr algn="ctr"/>
                       <a:r>
-                        <a:rPr sz="1600" b="0">
+                        <a:rPr sz="1700" b="0">
                           <a:solidFill>
                             <a:srgbClr val="202020"/>
                           </a:solidFill>
@@ -15004,7 +14836,7 @@
           <a:p>
             <a:pPr algn="just"/>
             <a:r>
-              <a:rPr sz="1400" b="0" i="0">
+              <a:rPr sz="1600" b="0" i="0">
                 <a:solidFill>
                   <a:srgbClr val="59636E"/>
                 </a:solidFill>
@@ -15059,25 +14891,13 @@
           <a:p>
             <a:pPr algn="just"/>
             <a:r>
-              <a:rPr sz="1600" b="1">
+              <a:rPr sz="1800" b="1">
                 <a:solidFill>
                   <a:srgbClr val="1E7A45"/>
                 </a:solidFill>
                 <a:latin typeface="Times New Roman"/>
               </a:rPr>
-              <a:t>Matching logits is a special case of distillation. At lower temperatures, distillation pays much less attention</a:t>
-            </a:r>
-          </a:p>
-          <a:p>
-            <a:pPr algn="just"/>
-            <a:r>
-              <a:rPr sz="1600" b="1">
-                <a:solidFill>
-                  <a:srgbClr val="1E7A45"/>
-                </a:solidFill>
-                <a:latin typeface="Times New Roman"/>
-              </a:rPr>
-              <a:t>to matching logits that are much more negative than the average.</a:t>
+              <a:t>Matching logits is a special case of distillation. At lower temperatures, distillation pays much less attention to matching logits that are much more negative than the average.</a:t>
             </a:r>
           </a:p>
         </p:txBody>
@@ -15651,7 +15471,7 @@
           <a:p>
             <a:pPr algn="just"/>
             <a:r>
-              <a:rPr sz="1400" b="0" i="0">
+              <a:rPr sz="1600" b="0" i="0">
                 <a:solidFill>
                   <a:srgbClr val="C7D6E5"/>
                 </a:solidFill>
@@ -15717,7 +15537,7 @@
                     <a:p>
                       <a:pPr algn="ctr"/>
                       <a:r>
-                        <a:rPr sz="1600" b="1">
+                        <a:rPr sz="1700" b="1">
                           <a:solidFill>
                             <a:srgbClr val="FFFFFF"/>
                           </a:solidFill>
@@ -15740,7 +15560,7 @@
                     <a:p>
                       <a:pPr algn="ctr"/>
                       <a:r>
-                        <a:rPr sz="1600" b="1">
+                        <a:rPr sz="1700" b="1">
                           <a:solidFill>
                             <a:srgbClr val="FFFFFF"/>
                           </a:solidFill>
@@ -15763,7 +15583,7 @@
                     <a:p>
                       <a:pPr algn="ctr"/>
                       <a:r>
-                        <a:rPr sz="1600" b="1">
+                        <a:rPr sz="1700" b="1">
                           <a:solidFill>
                             <a:srgbClr val="FFFFFF"/>
                           </a:solidFill>
@@ -15788,7 +15608,7 @@
                     <a:p>
                       <a:pPr algn="ctr"/>
                       <a:r>
-                        <a:rPr sz="1600" b="0">
+                        <a:rPr sz="1700" b="0">
                           <a:solidFill>
                             <a:srgbClr val="202020"/>
                           </a:solidFill>
@@ -15811,7 +15631,7 @@
                     <a:p>
                       <a:pPr algn="ctr"/>
                       <a:r>
-                        <a:rPr sz="1600" b="0">
+                        <a:rPr sz="1700" b="0">
                           <a:solidFill>
                             <a:srgbClr val="202020"/>
                           </a:solidFill>
@@ -15834,7 +15654,7 @@
                     <a:p>
                       <a:pPr algn="ctr"/>
                       <a:r>
-                        <a:rPr sz="1600" b="0">
+                        <a:rPr sz="1700" b="0">
                           <a:solidFill>
                             <a:srgbClr val="202020"/>
                           </a:solidFill>
@@ -15859,7 +15679,7 @@
                     <a:p>
                       <a:pPr algn="ctr"/>
                       <a:r>
-                        <a:rPr sz="1600" b="0">
+                        <a:rPr sz="1700" b="0">
                           <a:solidFill>
                             <a:srgbClr val="202020"/>
                           </a:solidFill>
@@ -15882,7 +15702,7 @@
                     <a:p>
                       <a:pPr algn="ctr"/>
                       <a:r>
-                        <a:rPr sz="1600" b="0">
+                        <a:rPr sz="1700" b="0">
                           <a:solidFill>
                             <a:srgbClr val="202020"/>
                           </a:solidFill>
@@ -15905,7 +15725,7 @@
                     <a:p>
                       <a:pPr algn="ctr"/>
                       <a:r>
-                        <a:rPr sz="1600" b="0">
+                        <a:rPr sz="1700" b="0">
                           <a:solidFill>
                             <a:srgbClr val="202020"/>
                           </a:solidFill>
@@ -15930,7 +15750,7 @@
                     <a:p>
                       <a:pPr algn="ctr"/>
                       <a:r>
-                        <a:rPr sz="1600" b="0">
+                        <a:rPr sz="1700" b="0">
                           <a:solidFill>
                             <a:srgbClr val="202020"/>
                           </a:solidFill>
@@ -15953,7 +15773,7 @@
                     <a:p>
                       <a:pPr algn="ctr"/>
                       <a:r>
-                        <a:rPr sz="1600" b="0">
+                        <a:rPr sz="1700" b="0">
                           <a:solidFill>
                             <a:srgbClr val="202020"/>
                           </a:solidFill>
@@ -15976,7 +15796,7 @@
                     <a:p>
                       <a:pPr algn="ctr"/>
                       <a:r>
-                        <a:rPr sz="1600" b="0">
+                        <a:rPr sz="1700" b="0">
                           <a:solidFill>
                             <a:srgbClr val="202020"/>
                           </a:solidFill>
@@ -16001,7 +15821,7 @@
                     <a:p>
                       <a:pPr algn="ctr"/>
                       <a:r>
-                        <a:rPr sz="1600" b="0">
+                        <a:rPr sz="1700" b="0">
                           <a:solidFill>
                             <a:srgbClr val="202020"/>
                           </a:solidFill>
@@ -16024,7 +15844,7 @@
                     <a:p>
                       <a:pPr algn="ctr"/>
                       <a:r>
-                        <a:rPr sz="1600" b="0">
+                        <a:rPr sz="1700" b="0">
                           <a:solidFill>
                             <a:srgbClr val="202020"/>
                           </a:solidFill>
@@ -16047,7 +15867,7 @@
                     <a:p>
                       <a:pPr algn="ctr"/>
                       <a:r>
-                        <a:rPr sz="1600" b="0">
+                        <a:rPr sz="1700" b="0">
                           <a:solidFill>
                             <a:srgbClr val="202020"/>
                           </a:solidFill>
@@ -16072,7 +15892,7 @@
                     <a:p>
                       <a:pPr algn="ctr"/>
                       <a:r>
-                        <a:rPr sz="1600" b="0">
+                        <a:rPr sz="1700" b="0">
                           <a:solidFill>
                             <a:srgbClr val="202020"/>
                           </a:solidFill>
@@ -16095,7 +15915,7 @@
                     <a:p>
                       <a:pPr algn="ctr"/>
                       <a:r>
-                        <a:rPr sz="1600" b="0">
+                        <a:rPr sz="1700" b="0">
                           <a:solidFill>
                             <a:srgbClr val="202020"/>
                           </a:solidFill>
@@ -16118,7 +15938,7 @@
                     <a:p>
                       <a:pPr algn="ctr"/>
                       <a:r>
-                        <a:rPr sz="1600" b="0">
+                        <a:rPr sz="1700" b="0">
                           <a:solidFill>
                             <a:srgbClr val="202020"/>
                           </a:solidFill>
@@ -16163,7 +15983,7 @@
           <a:p>
             <a:pPr algn="just"/>
             <a:r>
-              <a:rPr sz="1600" b="0" i="0">
+              <a:rPr sz="1800" b="0" i="0">
                 <a:solidFill>
                   <a:srgbClr val="202020"/>
                 </a:solidFill>
@@ -16175,7 +15995,7 @@
           <a:p>
             <a:pPr algn="just"/>
             <a:r>
-              <a:rPr sz="1600" b="0" i="0">
+              <a:rPr sz="1800" b="0" i="0">
                 <a:solidFill>
                   <a:srgbClr val="202020"/>
                 </a:solidFill>
@@ -16523,7 +16343,7 @@
           <a:p>
             <a:pPr algn="just"/>
             <a:r>
-              <a:rPr sz="1400" b="0" i="0">
+              <a:rPr sz="1600" b="0" i="0">
                 <a:solidFill>
                   <a:srgbClr val="C7D6E5"/>
                 </a:solidFill>
@@ -16565,7 +16385,7 @@
                     <a:p>
                       <a:pPr algn="ctr"/>
                       <a:r>
-                        <a:rPr sz="1600" b="1">
+                        <a:rPr sz="1700" b="1">
                           <a:solidFill>
                             <a:srgbClr val="FFFFFF"/>
                           </a:solidFill>
@@ -16588,7 +16408,7 @@
                     <a:p>
                       <a:pPr algn="ctr"/>
                       <a:r>
-                        <a:rPr sz="1600" b="1">
+                        <a:rPr sz="1700" b="1">
                           <a:solidFill>
                             <a:srgbClr val="FFFFFF"/>
                           </a:solidFill>
@@ -16611,7 +16431,7 @@
                     <a:p>
                       <a:pPr algn="ctr"/>
                       <a:r>
-                        <a:rPr sz="1600" b="1">
+                        <a:rPr sz="1700" b="1">
                           <a:solidFill>
                             <a:srgbClr val="FFFFFF"/>
                           </a:solidFill>
@@ -16636,7 +16456,7 @@
                     <a:p>
                       <a:pPr algn="ctr"/>
                       <a:r>
-                        <a:rPr sz="1600" b="0">
+                        <a:rPr sz="1700" b="0">
                           <a:solidFill>
                             <a:srgbClr val="202020"/>
                           </a:solidFill>
@@ -16659,7 +16479,7 @@
                     <a:p>
                       <a:pPr algn="ctr"/>
                       <a:r>
-                        <a:rPr sz="1600" b="0">
+                        <a:rPr sz="1700" b="0">
                           <a:solidFill>
                             <a:srgbClr val="202020"/>
                           </a:solidFill>
@@ -16682,7 +16502,7 @@
                     <a:p>
                       <a:pPr algn="ctr"/>
                       <a:r>
-                        <a:rPr sz="1600" b="0">
+                        <a:rPr sz="1700" b="0">
                           <a:solidFill>
                             <a:srgbClr val="202020"/>
                           </a:solidFill>
@@ -16707,7 +16527,7 @@
                     <a:p>
                       <a:pPr algn="ctr"/>
                       <a:r>
-                        <a:rPr sz="1600" b="0">
+                        <a:rPr sz="1700" b="0">
                           <a:solidFill>
                             <a:srgbClr val="202020"/>
                           </a:solidFill>
@@ -16730,7 +16550,7 @@
                     <a:p>
                       <a:pPr algn="ctr"/>
                       <a:r>
-                        <a:rPr sz="1600" b="0">
+                        <a:rPr sz="1700" b="0">
                           <a:solidFill>
                             <a:srgbClr val="202020"/>
                           </a:solidFill>
@@ -16753,7 +16573,7 @@
                     <a:p>
                       <a:pPr algn="ctr"/>
                       <a:r>
-                        <a:rPr sz="1600" b="0">
+                        <a:rPr sz="1700" b="0">
                           <a:solidFill>
                             <a:srgbClr val="202020"/>
                           </a:solidFill>
@@ -16778,7 +16598,7 @@
                     <a:p>
                       <a:pPr algn="ctr"/>
                       <a:r>
-                        <a:rPr sz="1600" b="0">
+                        <a:rPr sz="1700" b="0">
                           <a:solidFill>
                             <a:srgbClr val="202020"/>
                           </a:solidFill>
@@ -16801,7 +16621,7 @@
                     <a:p>
                       <a:pPr algn="ctr"/>
                       <a:r>
-                        <a:rPr sz="1600" b="0">
+                        <a:rPr sz="1700" b="0">
                           <a:solidFill>
                             <a:srgbClr val="202020"/>
                           </a:solidFill>
@@ -16824,7 +16644,7 @@
                     <a:p>
                       <a:pPr algn="ctr"/>
                       <a:r>
-                        <a:rPr sz="1600" b="0">
+                        <a:rPr sz="1700" b="0">
                           <a:solidFill>
                             <a:srgbClr val="202020"/>
                           </a:solidFill>
@@ -16913,25 +16733,13 @@
           <a:p>
             <a:pPr algn="just"/>
             <a:r>
-              <a:rPr sz="1600" b="1">
+              <a:rPr sz="1800" b="1">
                 <a:solidFill>
                   <a:srgbClr val="1E7A45"/>
                 </a:solidFill>
                 <a:latin typeface="Times New Roman"/>
               </a:rPr>
-              <a:t>In our repetition, distillation reduces the gap between the</a:t>
-            </a:r>
-          </a:p>
-          <a:p>
-            <a:pPr algn="just"/>
-            <a:r>
-              <a:rPr sz="1600" b="1">
-                <a:solidFill>
-                  <a:srgbClr val="1E7A45"/>
-                </a:solidFill>
-                <a:latin typeface="Times New Roman"/>
-              </a:rPr>
-              <a:t>small net and the cumbersome model from 217 to 115 errors</a:t>
+              <a:t>In our repetition, distillation reduces the gap between the small net and the cumbersome model from 217 to 115 errors</a:t>
             </a:r>
           </a:p>
         </p:txBody>
@@ -16960,49 +16768,13 @@
           <a:p>
             <a:pPr algn="just"/>
             <a:r>
-              <a:rPr sz="1600" b="0" i="0">
+              <a:rPr sz="1800" b="0" i="0">
                 <a:solidFill>
                   <a:srgbClr val="202020"/>
                 </a:solidFill>
                 <a:latin typeface="Times New Roman"/>
               </a:rPr>
-              <a:t>In the paper, soft targets transfer a great deal of knowledge</a:t>
-            </a:r>
-          </a:p>
-          <a:p>
-            <a:pPr algn="just"/>
-            <a:r>
-              <a:rPr sz="1600" b="0" i="0">
-                <a:solidFill>
-                  <a:srgbClr val="202020"/>
-                </a:solidFill>
-                <a:latin typeface="Times New Roman"/>
-              </a:rPr>
-              <a:t>to the distilled model, including the knowledge about how</a:t>
-            </a:r>
-          </a:p>
-          <a:p>
-            <a:pPr algn="just"/>
-            <a:r>
-              <a:rPr sz="1600" b="0" i="0">
-                <a:solidFill>
-                  <a:srgbClr val="202020"/>
-                </a:solidFill>
-                <a:latin typeface="Times New Roman"/>
-              </a:rPr>
-              <a:t>to generalize that is learned from translated training data,</a:t>
-            </a:r>
-          </a:p>
-          <a:p>
-            <a:pPr algn="just"/>
-            <a:r>
-              <a:rPr sz="1600" b="0" i="0">
-                <a:solidFill>
-                  <a:srgbClr val="202020"/>
-                </a:solidFill>
-                <a:latin typeface="Times New Roman"/>
-              </a:rPr>
-              <a:t>even though the transfer set does not contain any translations.</a:t>
+              <a:t>In the paper, soft targets transfer a great deal of knowledge to the distilled model, including the knowledge about how to generalize that is learned from translated training data, even though the transfer set does not contain any translations.</a:t>
             </a:r>
           </a:p>
         </p:txBody>
@@ -17031,7 +16803,7 @@
           <a:p>
             <a:pPr algn="just"/>
             <a:r>
-              <a:rPr sz="1500" b="0" i="0">
+              <a:rPr sz="1700" b="0" i="0">
                 <a:solidFill>
                   <a:srgbClr val="59636E"/>
                 </a:solidFill>
@@ -17471,7 +17243,7 @@
           <a:p>
             <a:pPr algn="just"/>
             <a:r>
-              <a:rPr sz="1400" b="0" i="0">
+              <a:rPr sz="1600" b="0" i="0">
                 <a:solidFill>
                   <a:srgbClr val="C7D6E5"/>
                 </a:solidFill>
@@ -17782,7 +17554,7 @@
           <a:p>
             <a:pPr algn="just"/>
             <a:r>
-              <a:rPr sz="1400" b="0" i="0">
+              <a:rPr sz="1600" b="0" i="0">
                 <a:solidFill>
                   <a:srgbClr val="C7D6E5"/>
                 </a:solidFill>
@@ -17824,7 +17596,7 @@
                     <a:p>
                       <a:pPr algn="ctr"/>
                       <a:r>
-                        <a:rPr sz="1600" b="1">
+                        <a:rPr sz="1700" b="1">
                           <a:solidFill>
                             <a:srgbClr val="FFFFFF"/>
                           </a:solidFill>
@@ -17847,7 +17619,7 @@
                     <a:p>
                       <a:pPr algn="ctr"/>
                       <a:r>
-                        <a:rPr sz="1600" b="1">
+                        <a:rPr sz="1700" b="1">
                           <a:solidFill>
                             <a:srgbClr val="FFFFFF"/>
                           </a:solidFill>
@@ -17870,7 +17642,7 @@
                     <a:p>
                       <a:pPr algn="ctr"/>
                       <a:r>
-                        <a:rPr sz="1600" b="1">
+                        <a:rPr sz="1700" b="1">
                           <a:solidFill>
                             <a:srgbClr val="FFFFFF"/>
                           </a:solidFill>
@@ -17895,7 +17667,7 @@
                     <a:p>
                       <a:pPr algn="ctr"/>
                       <a:r>
-                        <a:rPr sz="1600" b="0">
+                        <a:rPr sz="1700" b="0">
                           <a:solidFill>
                             <a:srgbClr val="202020"/>
                           </a:solidFill>
@@ -17918,7 +17690,7 @@
                     <a:p>
                       <a:pPr algn="ctr"/>
                       <a:r>
-                        <a:rPr sz="1600" b="0">
+                        <a:rPr sz="1700" b="0">
                           <a:solidFill>
                             <a:srgbClr val="202020"/>
                           </a:solidFill>
@@ -17941,7 +17713,7 @@
                     <a:p>
                       <a:pPr algn="ctr"/>
                       <a:r>
-                        <a:rPr sz="1600" b="0">
+                        <a:rPr sz="1700" b="0">
                           <a:solidFill>
                             <a:srgbClr val="202020"/>
                           </a:solidFill>
@@ -17966,7 +17738,7 @@
                     <a:p>
                       <a:pPr algn="ctr"/>
                       <a:r>
-                        <a:rPr sz="1600" b="0">
+                        <a:rPr sz="1700" b="0">
                           <a:solidFill>
                             <a:srgbClr val="202020"/>
                           </a:solidFill>
@@ -17989,7 +17761,7 @@
                     <a:p>
                       <a:pPr algn="ctr"/>
                       <a:r>
-                        <a:rPr sz="1600" b="0">
+                        <a:rPr sz="1700" b="0">
                           <a:solidFill>
                             <a:srgbClr val="202020"/>
                           </a:solidFill>
@@ -18012,7 +17784,7 @@
                     <a:p>
                       <a:pPr algn="ctr"/>
                       <a:r>
-                        <a:rPr sz="1600" b="0">
+                        <a:rPr sz="1700" b="0">
                           <a:solidFill>
                             <a:srgbClr val="202020"/>
                           </a:solidFill>
@@ -18037,7 +17809,7 @@
                     <a:p>
                       <a:pPr algn="ctr"/>
                       <a:r>
-                        <a:rPr sz="1600" b="0">
+                        <a:rPr sz="1700" b="0">
                           <a:solidFill>
                             <a:srgbClr val="202020"/>
                           </a:solidFill>
@@ -18060,7 +17832,7 @@
                     <a:p>
                       <a:pPr algn="ctr"/>
                       <a:r>
-                        <a:rPr sz="1600" b="0">
+                        <a:rPr sz="1700" b="0">
                           <a:solidFill>
                             <a:srgbClr val="202020"/>
                           </a:solidFill>
@@ -18083,7 +17855,7 @@
                     <a:p>
                       <a:pPr algn="ctr"/>
                       <a:r>
-                        <a:rPr sz="1600" b="0">
+                        <a:rPr sz="1700" b="0">
                           <a:solidFill>
                             <a:srgbClr val="202020"/>
                           </a:solidFill>
@@ -18108,7 +17880,7 @@
                     <a:p>
                       <a:pPr algn="ctr"/>
                       <a:r>
-                        <a:rPr sz="1600" b="0">
+                        <a:rPr sz="1700" b="0">
                           <a:solidFill>
                             <a:srgbClr val="202020"/>
                           </a:solidFill>
@@ -18131,7 +17903,7 @@
                     <a:p>
                       <a:pPr algn="ctr"/>
                       <a:r>
-                        <a:rPr sz="1600" b="0">
+                        <a:rPr sz="1700" b="0">
                           <a:solidFill>
                             <a:srgbClr val="202020"/>
                           </a:solidFill>
@@ -18154,7 +17926,7 @@
                     <a:p>
                       <a:pPr algn="ctr"/>
                       <a:r>
-                        <a:rPr sz="1600" b="0">
+                        <a:rPr sz="1700" b="0">
                           <a:solidFill>
                             <a:srgbClr val="202020"/>
                           </a:solidFill>
@@ -18179,7 +17951,7 @@
                     <a:p>
                       <a:pPr algn="ctr"/>
                       <a:r>
-                        <a:rPr sz="1600" b="0">
+                        <a:rPr sz="1700" b="0">
                           <a:solidFill>
                             <a:srgbClr val="202020"/>
                           </a:solidFill>
@@ -18202,7 +17974,7 @@
                     <a:p>
                       <a:pPr algn="ctr"/>
                       <a:r>
-                        <a:rPr sz="1600" b="0">
+                        <a:rPr sz="1700" b="0">
                           <a:solidFill>
                             <a:srgbClr val="202020"/>
                           </a:solidFill>
@@ -18225,7 +17997,7 @@
                     <a:p>
                       <a:pPr algn="ctr"/>
                       <a:r>
-                        <a:rPr sz="1600" b="0">
+                        <a:rPr sz="1700" b="0">
                           <a:solidFill>
                             <a:srgbClr val="202020"/>
                           </a:solidFill>
@@ -18250,7 +18022,7 @@
                     <a:p>
                       <a:pPr algn="ctr"/>
                       <a:r>
-                        <a:rPr sz="1600" b="0">
+                        <a:rPr sz="1700" b="0">
                           <a:solidFill>
                             <a:srgbClr val="202020"/>
                           </a:solidFill>
@@ -18273,7 +18045,7 @@
                     <a:p>
                       <a:pPr algn="ctr"/>
                       <a:r>
-                        <a:rPr sz="1600" b="0">
+                        <a:rPr sz="1700" b="0">
                           <a:solidFill>
                             <a:srgbClr val="202020"/>
                           </a:solidFill>
@@ -18296,7 +18068,7 @@
                     <a:p>
                       <a:pPr algn="ctr"/>
                       <a:r>
-                        <a:rPr sz="1600" b="0">
+                        <a:rPr sz="1700" b="0">
                           <a:solidFill>
                             <a:srgbClr val="202020"/>
                           </a:solidFill>
@@ -18385,25 +18157,13 @@
           <a:p>
             <a:pPr algn="just"/>
             <a:r>
-              <a:rPr sz="1500" b="1">
+              <a:rPr sz="1700" b="1">
                 <a:solidFill>
                   <a:srgbClr val="1F4E79"/>
                 </a:solidFill>
                 <a:latin typeface="Times New Roman"/>
               </a:rPr>
-              <a:t>Paper: with 300 or more units per layer, all temperatures above 8 gave fairly similar results; with 30 units per layer,</a:t>
-            </a:r>
-          </a:p>
-          <a:p>
-            <a:pPr algn="just"/>
-            <a:r>
-              <a:rPr sz="1500" b="1">
-                <a:solidFill>
-                  <a:srgbClr val="1F4E79"/>
-                </a:solidFill>
-                <a:latin typeface="Times New Roman"/>
-              </a:rPr>
-              <a:t>temperatures in the range 2.5 to 4 worked significantly better than higher or lower temperatures</a:t>
+              <a:t>Paper: with 300 or more units per layer, all temperatures above 8 gave fairly similar results; with 30 units per layer, temperatures in the range 2.5 to 4 worked significantly better than higher or lower temperatures</a:t>
             </a:r>
           </a:p>
         </p:txBody>
@@ -18452,7 +18212,7 @@
           <a:p>
             <a:pPr algn="just"/>
             <a:r>
-              <a:rPr sz="1700" b="1">
+              <a:rPr sz="1900" b="1">
                 <a:solidFill>
                   <a:srgbClr val="1E7A45"/>
                 </a:solidFill>
@@ -18487,7 +18247,7 @@
           <a:p>
             <a:pPr algn="just"/>
             <a:r>
-              <a:rPr sz="1600" b="0" i="0">
+              <a:rPr sz="1800" b="0" i="0">
                 <a:solidFill>
                   <a:srgbClr val="59636E"/>
                 </a:solidFill>
@@ -18927,7 +18687,7 @@
           <a:p>
             <a:pPr algn="just"/>
             <a:r>
-              <a:rPr sz="1400" b="0" i="0">
+              <a:rPr sz="1600" b="0" i="0">
                 <a:solidFill>
                   <a:srgbClr val="C7D6E5"/>
                 </a:solidFill>
@@ -18970,7 +18730,7 @@
                     <a:p>
                       <a:pPr algn="ctr"/>
                       <a:r>
-                        <a:rPr sz="1600" b="1">
+                        <a:rPr sz="1700" b="1">
                           <a:solidFill>
                             <a:srgbClr val="FFFFFF"/>
                           </a:solidFill>
@@ -18993,7 +18753,7 @@
                     <a:p>
                       <a:pPr algn="ctr"/>
                       <a:r>
-                        <a:rPr sz="1600" b="1">
+                        <a:rPr sz="1700" b="1">
                           <a:solidFill>
                             <a:srgbClr val="FFFFFF"/>
                           </a:solidFill>
@@ -19016,7 +18776,7 @@
                     <a:p>
                       <a:pPr algn="ctr"/>
                       <a:r>
-                        <a:rPr sz="1600" b="1">
+                        <a:rPr sz="1700" b="1">
                           <a:solidFill>
                             <a:srgbClr val="FFFFFF"/>
                           </a:solidFill>
@@ -19039,7 +18799,7 @@
                     <a:p>
                       <a:pPr algn="ctr"/>
                       <a:r>
-                        <a:rPr sz="1600" b="1">
+                        <a:rPr sz="1700" b="1">
                           <a:solidFill>
                             <a:srgbClr val="FFFFFF"/>
                           </a:solidFill>
@@ -19064,7 +18824,7 @@
                     <a:p>
                       <a:pPr algn="ctr"/>
                       <a:r>
-                        <a:rPr sz="1600" b="0">
+                        <a:rPr sz="1700" b="0">
                           <a:solidFill>
                             <a:srgbClr val="202020"/>
                           </a:solidFill>
@@ -19087,7 +18847,7 @@
                     <a:p>
                       <a:pPr algn="ctr"/>
                       <a:r>
-                        <a:rPr sz="1600" b="0">
+                        <a:rPr sz="1700" b="0">
                           <a:solidFill>
                             <a:srgbClr val="202020"/>
                           </a:solidFill>
@@ -19110,7 +18870,7 @@
                     <a:p>
                       <a:pPr algn="ctr"/>
                       <a:r>
-                        <a:rPr sz="1600" b="0">
+                        <a:rPr sz="1700" b="0">
                           <a:solidFill>
                             <a:srgbClr val="202020"/>
                           </a:solidFill>
@@ -19133,7 +18893,7 @@
                     <a:p>
                       <a:pPr algn="ctr"/>
                       <a:r>
-                        <a:rPr sz="1600" b="0">
+                        <a:rPr sz="1700" b="0">
                           <a:solidFill>
                             <a:srgbClr val="202020"/>
                           </a:solidFill>
@@ -19158,7 +18918,7 @@
                     <a:p>
                       <a:pPr algn="ctr"/>
                       <a:r>
-                        <a:rPr sz="1600" b="0">
+                        <a:rPr sz="1700" b="0">
                           <a:solidFill>
                             <a:srgbClr val="202020"/>
                           </a:solidFill>
@@ -19181,7 +18941,7 @@
                     <a:p>
                       <a:pPr algn="ctr"/>
                       <a:r>
-                        <a:rPr sz="1600" b="0">
+                        <a:rPr sz="1700" b="0">
                           <a:solidFill>
                             <a:srgbClr val="202020"/>
                           </a:solidFill>
@@ -19204,7 +18964,7 @@
                     <a:p>
                       <a:pPr algn="ctr"/>
                       <a:r>
-                        <a:rPr sz="1600" b="0">
+                        <a:rPr sz="1700" b="0">
                           <a:solidFill>
                             <a:srgbClr val="202020"/>
                           </a:solidFill>
@@ -19227,7 +18987,7 @@
                     <a:p>
                       <a:pPr algn="ctr"/>
                       <a:r>
-                        <a:rPr sz="1600" b="0">
+                        <a:rPr sz="1700" b="0">
                           <a:solidFill>
                             <a:srgbClr val="202020"/>
                           </a:solidFill>
@@ -19252,7 +19012,7 @@
                     <a:p>
                       <a:pPr algn="ctr"/>
                       <a:r>
-                        <a:rPr sz="1600" b="0">
+                        <a:rPr sz="1700" b="0">
                           <a:solidFill>
                             <a:srgbClr val="202020"/>
                           </a:solidFill>
@@ -19275,7 +19035,7 @@
                     <a:p>
                       <a:pPr algn="ctr"/>
                       <a:r>
-                        <a:rPr sz="1600" b="0">
+                        <a:rPr sz="1700" b="0">
                           <a:solidFill>
                             <a:srgbClr val="202020"/>
                           </a:solidFill>
@@ -19298,7 +19058,7 @@
                     <a:p>
                       <a:pPr algn="ctr"/>
                       <a:r>
-                        <a:rPr sz="1600" b="0">
+                        <a:rPr sz="1700" b="0">
                           <a:solidFill>
                             <a:srgbClr val="202020"/>
                           </a:solidFill>
@@ -19321,7 +19081,7 @@
                     <a:p>
                       <a:pPr algn="ctr"/>
                       <a:r>
-                        <a:rPr sz="1600" b="0">
+                        <a:rPr sz="1700" b="0">
                           <a:solidFill>
                             <a:srgbClr val="202020"/>
                           </a:solidFill>
@@ -19346,7 +19106,7 @@
                     <a:p>
                       <a:pPr algn="ctr"/>
                       <a:r>
-                        <a:rPr sz="1600" b="0">
+                        <a:rPr sz="1700" b="0">
                           <a:solidFill>
                             <a:srgbClr val="202020"/>
                           </a:solidFill>
@@ -19369,7 +19129,7 @@
                     <a:p>
                       <a:pPr algn="ctr"/>
                       <a:r>
-                        <a:rPr sz="1600" b="0">
+                        <a:rPr sz="1700" b="0">
                           <a:solidFill>
                             <a:srgbClr val="202020"/>
                           </a:solidFill>
@@ -19392,7 +19152,7 @@
                     <a:p>
                       <a:pPr algn="ctr"/>
                       <a:r>
-                        <a:rPr sz="1600" b="0">
+                        <a:rPr sz="1700" b="0">
                           <a:solidFill>
                             <a:srgbClr val="202020"/>
                           </a:solidFill>
@@ -19415,7 +19175,7 @@
                     <a:p>
                       <a:pPr algn="ctr"/>
                       <a:r>
-                        <a:rPr sz="1600" b="0">
+                        <a:rPr sz="1700" b="0">
                           <a:solidFill>
                             <a:srgbClr val="202020"/>
                           </a:solidFill>
@@ -19440,7 +19200,7 @@
                     <a:p>
                       <a:pPr algn="ctr"/>
                       <a:r>
-                        <a:rPr sz="1600" b="0">
+                        <a:rPr sz="1700" b="0">
                           <a:solidFill>
                             <a:srgbClr val="202020"/>
                           </a:solidFill>
@@ -19463,7 +19223,7 @@
                     <a:p>
                       <a:pPr algn="ctr"/>
                       <a:r>
-                        <a:rPr sz="1600" b="0">
+                        <a:rPr sz="1700" b="0">
                           <a:solidFill>
                             <a:srgbClr val="202020"/>
                           </a:solidFill>
@@ -19486,7 +19246,7 @@
                     <a:p>
                       <a:pPr algn="ctr"/>
                       <a:r>
-                        <a:rPr sz="1600" b="0">
+                        <a:rPr sz="1700" b="0">
                           <a:solidFill>
                             <a:srgbClr val="202020"/>
                           </a:solidFill>
@@ -19509,7 +19269,7 @@
                     <a:p>
                       <a:pPr algn="ctr"/>
                       <a:r>
-                        <a:rPr sz="1600" b="0">
+                        <a:rPr sz="1700" b="0">
                           <a:solidFill>
                             <a:srgbClr val="202020"/>
                           </a:solidFill>
@@ -19574,25 +19334,13 @@
           <a:p>
             <a:pPr algn="just"/>
             <a:r>
-              <a:rPr sz="1600" b="1">
+              <a:rPr sz="1800" b="1">
                 <a:solidFill>
                   <a:srgbClr val="59636E"/>
                 </a:solidFill>
                 <a:latin typeface="Times New Roman"/>
               </a:rPr>
-              <a:t>Hard targets only: no training case has the</a:t>
-            </a:r>
-          </a:p>
-          <a:p>
-            <a:pPr algn="just"/>
-            <a:r>
-              <a:rPr sz="1600" b="1">
-                <a:solidFill>
-                  <a:srgbClr val="59636E"/>
-                </a:solidFill>
-                <a:latin typeface="Times New Roman"/>
-              </a:rPr>
-              <a:t>label 3, so the net never outputs a 3</a:t>
+              <a:t>Hard targets only: no training case has the label 3, so the net never outputs a 3</a:t>
             </a:r>
           </a:p>
         </p:txBody>
@@ -19641,37 +19389,13 @@
           <a:p>
             <a:pPr algn="just"/>
             <a:r>
-              <a:rPr sz="1600" b="1">
+              <a:rPr sz="1800" b="1">
                 <a:solidFill>
                   <a:srgbClr val="1E7A45"/>
                 </a:solidFill>
                 <a:latin typeface="Times New Roman"/>
               </a:rPr>
-              <a:t>Distillation: the soft targets for other digits</a:t>
-            </a:r>
-          </a:p>
-          <a:p>
-            <a:pPr algn="just"/>
-            <a:r>
-              <a:rPr sz="1600" b="1">
-                <a:solidFill>
-                  <a:srgbClr val="1E7A45"/>
-                </a:solidFill>
-                <a:latin typeface="Times New Roman"/>
-              </a:rPr>
-              <a:t>say how much each of them resembles a 3,</a:t>
-            </a:r>
-          </a:p>
-          <a:p>
-            <a:pPr algn="just"/>
-            <a:r>
-              <a:rPr sz="1600" b="1">
-                <a:solidFill>
-                  <a:srgbClr val="1E7A45"/>
-                </a:solidFill>
-                <a:latin typeface="Times New Roman"/>
-              </a:rPr>
-              <a:t>from which the distilled model learns about 3s</a:t>
+              <a:t>Distillation: the soft targets for other digits say how much each of them resembles a 3, from which the distilled model learns about 3s</a:t>
             </a:r>
           </a:p>
         </p:txBody>
@@ -19700,7 +19424,7 @@
           <a:p>
             <a:pPr algn="just"/>
             <a:r>
-              <a:rPr sz="1600" b="0" i="0">
+              <a:rPr sz="1800" b="0" i="0">
                 <a:solidFill>
                   <a:srgbClr val="202020"/>
                 </a:solidFill>
@@ -19712,7 +19436,7 @@
           <a:p>
             <a:pPr algn="just"/>
             <a:r>
-              <a:rPr sz="1600" b="0" i="0">
+              <a:rPr sz="1800" b="0" i="0">
                 <a:solidFill>
                   <a:srgbClr val="202020"/>
                 </a:solidFill>
@@ -20106,7 +19830,7 @@
           <a:p>
             <a:pPr algn="just"/>
             <a:r>
-              <a:rPr sz="1400" b="0" i="0">
+              <a:rPr sz="1600" b="0" i="0">
                 <a:solidFill>
                   <a:srgbClr val="C7D6E5"/>
                 </a:solidFill>
@@ -20148,7 +19872,7 @@
                     <a:p>
                       <a:pPr algn="ctr"/>
                       <a:r>
-                        <a:rPr sz="1600" b="1">
+                        <a:rPr sz="1700" b="1">
                           <a:solidFill>
                             <a:srgbClr val="FFFFFF"/>
                           </a:solidFill>
@@ -20171,7 +19895,7 @@
                     <a:p>
                       <a:pPr algn="ctr"/>
                       <a:r>
-                        <a:rPr sz="1600" b="1">
+                        <a:rPr sz="1700" b="1">
                           <a:solidFill>
                             <a:srgbClr val="FFFFFF"/>
                           </a:solidFill>
@@ -20194,7 +19918,7 @@
                     <a:p>
                       <a:pPr algn="ctr"/>
                       <a:r>
-                        <a:rPr sz="1600" b="1">
+                        <a:rPr sz="1700" b="1">
                           <a:solidFill>
                             <a:srgbClr val="FFFFFF"/>
                           </a:solidFill>
@@ -20219,7 +19943,7 @@
                     <a:p>
                       <a:pPr algn="ctr"/>
                       <a:r>
-                        <a:rPr sz="1600" b="0">
+                        <a:rPr sz="1700" b="0">
                           <a:solidFill>
                             <a:srgbClr val="202020"/>
                           </a:solidFill>
@@ -20242,7 +19966,7 @@
                     <a:p>
                       <a:pPr algn="ctr"/>
                       <a:r>
-                        <a:rPr sz="1600" b="0">
+                        <a:rPr sz="1700" b="0">
                           <a:solidFill>
                             <a:srgbClr val="202020"/>
                           </a:solidFill>
@@ -20265,7 +19989,7 @@
                     <a:p>
                       <a:pPr algn="ctr"/>
                       <a:r>
-                        <a:rPr sz="1600" b="0">
+                        <a:rPr sz="1700" b="0">
                           <a:solidFill>
                             <a:srgbClr val="202020"/>
                           </a:solidFill>
@@ -20290,7 +20014,7 @@
                     <a:p>
                       <a:pPr algn="ctr"/>
                       <a:r>
-                        <a:rPr sz="1600" b="0">
+                        <a:rPr sz="1700" b="0">
                           <a:solidFill>
                             <a:srgbClr val="202020"/>
                           </a:solidFill>
@@ -20313,7 +20037,7 @@
                     <a:p>
                       <a:pPr algn="ctr"/>
                       <a:r>
-                        <a:rPr sz="1600" b="0">
+                        <a:rPr sz="1700" b="0">
                           <a:solidFill>
                             <a:srgbClr val="202020"/>
                           </a:solidFill>
@@ -20336,7 +20060,7 @@
                     <a:p>
                       <a:pPr algn="ctr"/>
                       <a:r>
-                        <a:rPr sz="1600" b="0">
+                        <a:rPr sz="1700" b="0">
                           <a:solidFill>
                             <a:srgbClr val="202020"/>
                           </a:solidFill>
@@ -20361,7 +20085,7 @@
                     <a:p>
                       <a:pPr algn="ctr"/>
                       <a:r>
-                        <a:rPr sz="1600" b="0">
+                        <a:rPr sz="1700" b="0">
                           <a:solidFill>
                             <a:srgbClr val="202020"/>
                           </a:solidFill>
@@ -20384,7 +20108,7 @@
                     <a:p>
                       <a:pPr algn="ctr"/>
                       <a:r>
-                        <a:rPr sz="1600" b="0">
+                        <a:rPr sz="1700" b="0">
                           <a:solidFill>
                             <a:srgbClr val="202020"/>
                           </a:solidFill>
@@ -20407,7 +20131,7 @@
                     <a:p>
                       <a:pPr algn="ctr"/>
                       <a:r>
-                        <a:rPr sz="1600" b="0">
+                        <a:rPr sz="1700" b="0">
                           <a:solidFill>
                             <a:srgbClr val="202020"/>
                           </a:solidFill>
@@ -20452,37 +20176,13 @@
           <a:p>
             <a:pPr algn="just"/>
             <a:r>
-              <a:rPr sz="1500" b="0" i="0">
+              <a:rPr sz="1700" b="0" i="0">
                 <a:solidFill>
                   <a:srgbClr val="202020"/>
                 </a:solidFill>
                 <a:latin typeface="Times New Roman"/>
               </a:rPr>
-              <a:t>Acoustic model of Android voice search: more than 80%</a:t>
-            </a:r>
-          </a:p>
-          <a:p>
-            <a:pPr algn="just"/>
-            <a:r>
-              <a:rPr sz="1500" b="0" i="0">
-                <a:solidFill>
-                  <a:srgbClr val="202020"/>
-                </a:solidFill>
-                <a:latin typeface="Times New Roman"/>
-              </a:rPr>
-              <a:t>of the improvement in frame accuracy achieved by the</a:t>
-            </a:r>
-          </a:p>
-          <a:p>
-            <a:pPr algn="just"/>
-            <a:r>
-              <a:rPr sz="1500" b="0" i="0">
-                <a:solidFill>
-                  <a:srgbClr val="202020"/>
-                </a:solidFill>
-                <a:latin typeface="Times New Roman"/>
-              </a:rPr>
-              <a:t>ensemble is transferred to the distilled model.</a:t>
+              <a:t>Acoustic model of Android voice search: more than 80% of the improvement in frame accuracy achieved by the ensemble is transferred to the distilled model.</a:t>
             </a:r>
           </a:p>
         </p:txBody>
@@ -20518,7 +20218,7 @@
                     <a:p>
                       <a:pPr algn="ctr"/>
                       <a:r>
-                        <a:rPr sz="1600" b="1">
+                        <a:rPr sz="1700" b="1">
                           <a:solidFill>
                             <a:srgbClr val="FFFFFF"/>
                           </a:solidFill>
@@ -20541,7 +20241,7 @@
                     <a:p>
                       <a:pPr algn="ctr"/>
                       <a:r>
-                        <a:rPr sz="1600" b="1">
+                        <a:rPr sz="1700" b="1">
                           <a:solidFill>
                             <a:srgbClr val="FFFFFF"/>
                           </a:solidFill>
@@ -20564,7 +20264,7 @@
                     <a:p>
                       <a:pPr algn="ctr"/>
                       <a:r>
-                        <a:rPr sz="1600" b="1">
+                        <a:rPr sz="1700" b="1">
                           <a:solidFill>
                             <a:srgbClr val="FFFFFF"/>
                           </a:solidFill>
@@ -20589,7 +20289,7 @@
                     <a:p>
                       <a:pPr algn="ctr"/>
                       <a:r>
-                        <a:rPr sz="1600" b="0">
+                        <a:rPr sz="1700" b="0">
                           <a:solidFill>
                             <a:srgbClr val="202020"/>
                           </a:solidFill>
@@ -20612,7 +20312,7 @@
                     <a:p>
                       <a:pPr algn="ctr"/>
                       <a:r>
-                        <a:rPr sz="1600" b="0">
+                        <a:rPr sz="1700" b="0">
                           <a:solidFill>
                             <a:srgbClr val="202020"/>
                           </a:solidFill>
@@ -20635,7 +20335,7 @@
                     <a:p>
                       <a:pPr algn="ctr"/>
                       <a:r>
-                        <a:rPr sz="1600" b="0">
+                        <a:rPr sz="1700" b="0">
                           <a:solidFill>
                             <a:srgbClr val="202020"/>
                           </a:solidFill>
@@ -20660,7 +20360,7 @@
                     <a:p>
                       <a:pPr algn="ctr"/>
                       <a:r>
-                        <a:rPr sz="1600" b="0">
+                        <a:rPr sz="1700" b="0">
                           <a:solidFill>
                             <a:srgbClr val="202020"/>
                           </a:solidFill>
@@ -20683,7 +20383,7 @@
                     <a:p>
                       <a:pPr algn="ctr"/>
                       <a:r>
-                        <a:rPr sz="1600" b="0">
+                        <a:rPr sz="1700" b="0">
                           <a:solidFill>
                             <a:srgbClr val="202020"/>
                           </a:solidFill>
@@ -20706,7 +20406,7 @@
                     <a:p>
                       <a:pPr algn="ctr"/>
                       <a:r>
-                        <a:rPr sz="1600" b="0">
+                        <a:rPr sz="1700" b="0">
                           <a:solidFill>
                             <a:srgbClr val="202020"/>
                           </a:solidFill>
@@ -20731,7 +20431,7 @@
                     <a:p>
                       <a:pPr algn="ctr"/>
                       <a:r>
-                        <a:rPr sz="1600" b="0">
+                        <a:rPr sz="1700" b="0">
                           <a:solidFill>
                             <a:srgbClr val="202020"/>
                           </a:solidFill>
@@ -20754,7 +20454,7 @@
                     <a:p>
                       <a:pPr algn="ctr"/>
                       <a:r>
-                        <a:rPr sz="1600" b="0">
+                        <a:rPr sz="1700" b="0">
                           <a:solidFill>
                             <a:srgbClr val="202020"/>
                           </a:solidFill>
@@ -20777,7 +20477,7 @@
                     <a:p>
                       <a:pPr algn="ctr"/>
                       <a:r>
-                        <a:rPr sz="1600" b="0">
+                        <a:rPr sz="1700" b="0">
                           <a:solidFill>
                             <a:srgbClr val="202020"/>
                           </a:solidFill>
@@ -20822,37 +20522,13 @@
           <a:p>
             <a:pPr algn="just"/>
             <a:r>
-              <a:rPr sz="1500" b="0" i="0">
+              <a:rPr sz="1700" b="0" i="0">
                 <a:solidFill>
                   <a:srgbClr val="202020"/>
                 </a:solidFill>
                 <a:latin typeface="Times New Roman"/>
               </a:rPr>
-              <a:t>Soft targets allow a new model to generalize well from</a:t>
-            </a:r>
-          </a:p>
-          <a:p>
-            <a:pPr algn="just"/>
-            <a:r>
-              <a:rPr sz="1500" b="0" i="0">
-                <a:solidFill>
-                  <a:srgbClr val="202020"/>
-                </a:solidFill>
-                <a:latin typeface="Times New Roman"/>
-              </a:rPr>
-              <a:t>only 3% of the training set; with hard targets the model</a:t>
-            </a:r>
-          </a:p>
-          <a:p>
-            <a:pPr algn="just"/>
-            <a:r>
-              <a:rPr sz="1500" b="0" i="0">
-                <a:solidFill>
-                  <a:srgbClr val="202020"/>
-                </a:solidFill>
-                <a:latin typeface="Times New Roman"/>
-              </a:rPr>
-              <a:t>overfits severely and needs early stopping.</a:t>
+              <a:t>Soft targets allow a new model to generalize well from only 3% of the training set; with hard targets the model overfits severely and needs early stopping.</a:t>
             </a:r>
           </a:p>
         </p:txBody>
@@ -20901,25 +20577,13 @@
           <a:p>
             <a:pPr algn="just"/>
             <a:r>
-              <a:rPr sz="1600" b="0">
+              <a:rPr sz="1800" b="0">
                 <a:solidFill>
                   <a:srgbClr val="1F4E79"/>
                 </a:solidFill>
                 <a:latin typeface="Times New Roman"/>
               </a:rPr>
-              <a:t>Specialist models: on JFT (100 million labeled images, 15,000 labels), 61 specialist models, each trained on a</a:t>
-            </a:r>
-          </a:p>
-          <a:p>
-            <a:pPr algn="just"/>
-            <a:r>
-              <a:rPr sz="1600" b="0">
-                <a:solidFill>
-                  <a:srgbClr val="1F4E79"/>
-                </a:solidFill>
-                <a:latin typeface="Times New Roman"/>
-              </a:rPr>
-              <a:t>confusable subset of the classes, are added to the generalist model; test accuracy rises from 25.0% to 26.1%.</a:t>
+              <a:t>Specialist models: on JFT (100 million labeled images, 15,000 labels), 61 specialist models, each trained on a confusable subset of the classes, are added to the generalist model; test accuracy rises from 25.0% to 26.1%.</a:t>
             </a:r>
           </a:p>
         </p:txBody>
@@ -20948,7 +20612,7 @@
           <a:p>
             <a:pPr algn="just"/>
             <a:r>
-              <a:rPr sz="1500" b="0" i="0">
+              <a:rPr sz="1700" b="0" i="0">
                 <a:solidFill>
                   <a:srgbClr val="59636E"/>
                 </a:solidFill>
@@ -21456,7 +21120,7 @@
           <a:p>
             <a:pPr algn="just"/>
             <a:r>
-              <a:rPr sz="1700" b="1">
+              <a:rPr sz="1900" b="1">
                 <a:solidFill>
                   <a:srgbClr val="1F4E79"/>
                 </a:solidFill>
@@ -21511,7 +21175,7 @@
           <a:p>
             <a:pPr algn="just"/>
             <a:r>
-              <a:rPr sz="1700" b="1">
+              <a:rPr sz="1900" b="1">
                 <a:solidFill>
                   <a:srgbClr val="1F4E79"/>
                 </a:solidFill>
@@ -21566,7 +21230,7 @@
           <a:p>
             <a:pPr algn="just"/>
             <a:r>
-              <a:rPr sz="1700" b="1">
+              <a:rPr sz="1900" b="1">
                 <a:solidFill>
                   <a:srgbClr val="1F4E79"/>
                 </a:solidFill>
@@ -21621,7 +21285,7 @@
           <a:p>
             <a:pPr algn="just"/>
             <a:r>
-              <a:rPr sz="1700" b="1">
+              <a:rPr sz="1900" b="1">
                 <a:solidFill>
                   <a:srgbClr val="C03030"/>
                 </a:solidFill>
@@ -21676,7 +21340,7 @@
           <a:p>
             <a:pPr algn="just"/>
             <a:r>
-              <a:rPr sz="1700" b="1">
+              <a:rPr sz="1900" b="1">
                 <a:solidFill>
                   <a:srgbClr val="C03030"/>
                 </a:solidFill>
@@ -21731,7 +21395,7 @@
           <a:p>
             <a:pPr algn="just"/>
             <a:r>
-              <a:rPr sz="1700" b="1">
+              <a:rPr sz="1900" b="1">
                 <a:solidFill>
                   <a:srgbClr val="C03030"/>
                 </a:solidFill>
@@ -21766,7 +21430,7 @@
           <a:p>
             <a:pPr algn="just"/>
             <a:r>
-              <a:rPr sz="1600" b="1" i="0">
+              <a:rPr sz="1800" b="1" i="0">
                 <a:solidFill>
                   <a:srgbClr val="59636E"/>
                 </a:solidFill>
@@ -22296,7 +21960,7 @@
           <a:p>
             <a:pPr algn="just"/>
             <a:r>
-              <a:rPr sz="1400" b="0" i="0">
+              <a:rPr sz="1600" b="0" i="0">
                 <a:solidFill>
                   <a:srgbClr val="C7D6E5"/>
                 </a:solidFill>
@@ -22351,7 +22015,7 @@
           <a:p>
             <a:pPr algn="just"/>
             <a:r>
-              <a:rPr sz="1700" b="1">
+              <a:rPr sz="1900" b="1">
                 <a:solidFill>
                   <a:srgbClr val="C03030"/>
                 </a:solidFill>
@@ -23393,7 +23057,7 @@
           <a:p>
             <a:pPr algn="just"/>
             <a:r>
-              <a:rPr sz="1400" b="0" i="0">
+              <a:rPr sz="1600" b="0" i="0">
                 <a:solidFill>
                   <a:srgbClr val="C7D6E5"/>
                 </a:solidFill>
@@ -23435,7 +23099,7 @@
                     <a:p>
                       <a:pPr algn="ctr"/>
                       <a:r>
-                        <a:rPr sz="1500" b="1">
+                        <a:rPr sz="1600" b="1">
                           <a:solidFill>
                             <a:srgbClr val="FFFFFF"/>
                           </a:solidFill>
@@ -23458,7 +23122,7 @@
                     <a:p>
                       <a:pPr algn="ctr"/>
                       <a:r>
-                        <a:rPr sz="1500" b="1">
+                        <a:rPr sz="1600" b="1">
                           <a:solidFill>
                             <a:srgbClr val="FFFFFF"/>
                           </a:solidFill>
@@ -23481,7 +23145,7 @@
                     <a:p>
                       <a:pPr algn="ctr"/>
                       <a:r>
-                        <a:rPr sz="1500" b="1">
+                        <a:rPr sz="1600" b="1">
                           <a:solidFill>
                             <a:srgbClr val="FFFFFF"/>
                           </a:solidFill>
@@ -23506,7 +23170,7 @@
                     <a:p>
                       <a:pPr algn="ctr"/>
                       <a:r>
-                        <a:rPr sz="1500" b="0">
+                        <a:rPr sz="1600" b="0">
                           <a:solidFill>
                             <a:srgbClr val="202020"/>
                           </a:solidFill>
@@ -23529,7 +23193,7 @@
                     <a:p>
                       <a:pPr algn="ctr"/>
                       <a:r>
-                        <a:rPr sz="1500" b="0">
+                        <a:rPr sz="1600" b="0">
                           <a:solidFill>
                             <a:srgbClr val="202020"/>
                           </a:solidFill>
@@ -23552,7 +23216,7 @@
                     <a:p>
                       <a:pPr algn="ctr"/>
                       <a:r>
-                        <a:rPr sz="1500" b="0">
+                        <a:rPr sz="1600" b="0">
                           <a:solidFill>
                             <a:srgbClr val="202020"/>
                           </a:solidFill>
@@ -23577,7 +23241,7 @@
                     <a:p>
                       <a:pPr algn="ctr"/>
                       <a:r>
-                        <a:rPr sz="1500" b="0">
+                        <a:rPr sz="1600" b="0">
                           <a:solidFill>
                             <a:srgbClr val="202020"/>
                           </a:solidFill>
@@ -23600,7 +23264,7 @@
                     <a:p>
                       <a:pPr algn="ctr"/>
                       <a:r>
-                        <a:rPr sz="1500" b="0">
+                        <a:rPr sz="1600" b="0">
                           <a:solidFill>
                             <a:srgbClr val="202020"/>
                           </a:solidFill>
@@ -23623,7 +23287,7 @@
                     <a:p>
                       <a:pPr algn="ctr"/>
                       <a:r>
-                        <a:rPr sz="1500" b="0">
+                        <a:rPr sz="1600" b="0">
                           <a:solidFill>
                             <a:srgbClr val="202020"/>
                           </a:solidFill>
@@ -23648,7 +23312,7 @@
                     <a:p>
                       <a:pPr algn="ctr"/>
                       <a:r>
-                        <a:rPr sz="1500" b="0">
+                        <a:rPr sz="1600" b="0">
                           <a:solidFill>
                             <a:srgbClr val="202020"/>
                           </a:solidFill>
@@ -23671,7 +23335,7 @@
                     <a:p>
                       <a:pPr algn="ctr"/>
                       <a:r>
-                        <a:rPr sz="1500" b="0">
+                        <a:rPr sz="1600" b="0">
                           <a:solidFill>
                             <a:srgbClr val="202020"/>
                           </a:solidFill>
@@ -23694,7 +23358,7 @@
                     <a:p>
                       <a:pPr algn="ctr"/>
                       <a:r>
-                        <a:rPr sz="1500" b="0">
+                        <a:rPr sz="1600" b="0">
                           <a:solidFill>
                             <a:srgbClr val="202020"/>
                           </a:solidFill>
@@ -23719,7 +23383,7 @@
                     <a:p>
                       <a:pPr algn="ctr"/>
                       <a:r>
-                        <a:rPr sz="1500" b="0">
+                        <a:rPr sz="1600" b="0">
                           <a:solidFill>
                             <a:srgbClr val="202020"/>
                           </a:solidFill>
@@ -23742,7 +23406,7 @@
                     <a:p>
                       <a:pPr algn="ctr"/>
                       <a:r>
-                        <a:rPr sz="1500" b="0">
+                        <a:rPr sz="1600" b="0">
                           <a:solidFill>
                             <a:srgbClr val="202020"/>
                           </a:solidFill>
@@ -23765,7 +23429,7 @@
                     <a:p>
                       <a:pPr algn="ctr"/>
                       <a:r>
-                        <a:rPr sz="1500" b="0">
+                        <a:rPr sz="1600" b="0">
                           <a:solidFill>
                             <a:srgbClr val="202020"/>
                           </a:solidFill>
@@ -23790,7 +23454,7 @@
                     <a:p>
                       <a:pPr algn="ctr"/>
                       <a:r>
-                        <a:rPr sz="1500" b="0">
+                        <a:rPr sz="1600" b="0">
                           <a:solidFill>
                             <a:srgbClr val="202020"/>
                           </a:solidFill>
@@ -23813,7 +23477,7 @@
                     <a:p>
                       <a:pPr algn="ctr"/>
                       <a:r>
-                        <a:rPr sz="1500" b="0">
+                        <a:rPr sz="1600" b="0">
                           <a:solidFill>
                             <a:srgbClr val="202020"/>
                           </a:solidFill>
@@ -23836,7 +23500,7 @@
                     <a:p>
                       <a:pPr algn="ctr"/>
                       <a:r>
-                        <a:rPr sz="1500" b="0">
+                        <a:rPr sz="1600" b="0">
                           <a:solidFill>
                             <a:srgbClr val="202020"/>
                           </a:solidFill>
@@ -23861,7 +23525,7 @@
                     <a:p>
                       <a:pPr algn="ctr"/>
                       <a:r>
-                        <a:rPr sz="1500" b="0">
+                        <a:rPr sz="1600" b="0">
                           <a:solidFill>
                             <a:srgbClr val="202020"/>
                           </a:solidFill>
@@ -23884,7 +23548,7 @@
                     <a:p>
                       <a:pPr algn="ctr"/>
                       <a:r>
-                        <a:rPr sz="1500" b="0">
+                        <a:rPr sz="1600" b="0">
                           <a:solidFill>
                             <a:srgbClr val="202020"/>
                           </a:solidFill>
@@ -23907,7 +23571,7 @@
                     <a:p>
                       <a:pPr algn="ctr"/>
                       <a:r>
-                        <a:rPr sz="1500" b="0">
+                        <a:rPr sz="1600" b="0">
                           <a:solidFill>
                             <a:srgbClr val="202020"/>
                           </a:solidFill>
@@ -23972,7 +23636,7 @@
           <a:p>
             <a:pPr algn="just"/>
             <a:r>
-              <a:rPr sz="1700" b="1">
+              <a:rPr sz="1900" b="1">
                 <a:solidFill>
                   <a:srgbClr val="1E7A45"/>
                 </a:solidFill>
@@ -23984,7 +23648,7 @@
           <a:p>
             <a:pPr algn="just"/>
             <a:r>
-              <a:rPr sz="1700" b="1">
+              <a:rPr sz="1900" b="1">
                 <a:solidFill>
                   <a:srgbClr val="1E7A45"/>
                 </a:solidFill>
@@ -23996,7 +23660,7 @@
           <a:p>
             <a:pPr algn="just"/>
             <a:r>
-              <a:rPr sz="1700" b="1">
+              <a:rPr sz="1900" b="1">
                 <a:solidFill>
                   <a:srgbClr val="1E7A45"/>
                 </a:solidFill>
@@ -24008,7 +23672,7 @@
           <a:p>
             <a:pPr algn="just"/>
             <a:r>
-              <a:rPr sz="1700" b="1">
+              <a:rPr sz="1900" b="1">
                 <a:solidFill>
                   <a:srgbClr val="1E7A45"/>
                 </a:solidFill>
@@ -24043,7 +23707,7 @@
           <a:p>
             <a:pPr algn="just"/>
             <a:r>
-              <a:rPr sz="1600" b="0" i="0">
+              <a:rPr sz="1800" b="0" i="0">
                 <a:solidFill>
                   <a:srgbClr val="59636E"/>
                 </a:solidFill>
@@ -24055,7 +23719,7 @@
           <a:p>
             <a:pPr algn="just"/>
             <a:r>
-              <a:rPr sz="1600" b="0" i="0">
+              <a:rPr sz="1800" b="0" i="0">
                 <a:solidFill>
                   <a:srgbClr val="59636E"/>
                 </a:solidFill>
@@ -24403,7 +24067,7 @@
           <a:p>
             <a:pPr algn="just"/>
             <a:r>
-              <a:rPr sz="1400" b="0" i="0">
+              <a:rPr sz="1600" b="0" i="0">
                 <a:solidFill>
                   <a:srgbClr val="C7D6E5"/>
                 </a:solidFill>
@@ -24445,7 +24109,7 @@
                     <a:p>
                       <a:pPr algn="ctr"/>
                       <a:r>
-                        <a:rPr sz="1500" b="1">
+                        <a:rPr sz="1600" b="1">
                           <a:solidFill>
                             <a:srgbClr val="FFFFFF"/>
                           </a:solidFill>
@@ -24468,7 +24132,7 @@
                     <a:p>
                       <a:pPr algn="ctr"/>
                       <a:r>
-                        <a:rPr sz="1500" b="1">
+                        <a:rPr sz="1600" b="1">
                           <a:solidFill>
                             <a:srgbClr val="FFFFFF"/>
                           </a:solidFill>
@@ -24491,7 +24155,7 @@
                     <a:p>
                       <a:pPr algn="ctr"/>
                       <a:r>
-                        <a:rPr sz="1500" b="1">
+                        <a:rPr sz="1600" b="1">
                           <a:solidFill>
                             <a:srgbClr val="FFFFFF"/>
                           </a:solidFill>
@@ -24516,7 +24180,7 @@
                     <a:p>
                       <a:pPr algn="ctr"/>
                       <a:r>
-                        <a:rPr sz="1500" b="1">
+                        <a:rPr sz="1600" b="1">
                           <a:solidFill>
                             <a:srgbClr val="202020"/>
                           </a:solidFill>
@@ -24539,7 +24203,7 @@
                     <a:p>
                       <a:pPr algn="ctr"/>
                       <a:r>
-                        <a:rPr sz="1500" b="1">
+                        <a:rPr sz="1600" b="1">
                           <a:solidFill>
                             <a:srgbClr val="202020"/>
                           </a:solidFill>
@@ -24562,7 +24226,7 @@
                     <a:p>
                       <a:pPr algn="just"/>
                       <a:r>
-                        <a:rPr sz="1500" b="0">
+                        <a:rPr sz="1600" b="0">
                           <a:solidFill>
                             <a:srgbClr val="202020"/>
                           </a:solidFill>
@@ -24587,7 +24251,7 @@
                     <a:p>
                       <a:pPr algn="ctr"/>
                       <a:r>
-                        <a:rPr sz="1500" b="1">
+                        <a:rPr sz="1600" b="1">
                           <a:solidFill>
                             <a:srgbClr val="202020"/>
                           </a:solidFill>
@@ -24610,7 +24274,7 @@
                     <a:p>
                       <a:pPr algn="ctr"/>
                       <a:r>
-                        <a:rPr sz="1500" b="1">
+                        <a:rPr sz="1600" b="1">
                           <a:solidFill>
                             <a:srgbClr val="202020"/>
                           </a:solidFill>
@@ -24633,13 +24297,13 @@
                     <a:p>
                       <a:pPr algn="just"/>
                       <a:r>
-                        <a:rPr sz="1500" b="0">
-                          <a:solidFill>
-                            <a:srgbClr val="202020"/>
-                          </a:solidFill>
-                          <a:latin typeface="Times New Roman"/>
-                        </a:rPr>
-                        <a:t>a large model trained to extract structure from the data: an ensemble of models or a very large net with a strong regularizer; now commonly called the teacher model</a:t>
+                        <a:rPr sz="1600" b="0">
+                          <a:solidFill>
+                            <a:srgbClr val="202020"/>
+                          </a:solidFill>
+                          <a:latin typeface="Times New Roman"/>
+                        </a:rPr>
+                        <a:t>a large model trained to extract structure from the data: an ensemble of models or a very large net with a strong regularizer; now commonly called the teacher model (Li et al., 2014)</a:t>
                       </a:r>
                     </a:p>
                   </a:txBody>
@@ -24658,7 +24322,7 @@
                     <a:p>
                       <a:pPr algn="ctr"/>
                       <a:r>
-                        <a:rPr sz="1500" b="1">
+                        <a:rPr sz="1600" b="1">
                           <a:solidFill>
                             <a:srgbClr val="202020"/>
                           </a:solidFill>
@@ -24681,7 +24345,7 @@
                     <a:p>
                       <a:pPr algn="ctr"/>
                       <a:r>
-                        <a:rPr sz="1500" b="1">
+                        <a:rPr sz="1600" b="1">
                           <a:solidFill>
                             <a:srgbClr val="202020"/>
                           </a:solidFill>
@@ -24704,13 +24368,13 @@
                     <a:p>
                       <a:pPr algn="just"/>
                       <a:r>
-                        <a:rPr sz="1500" b="0">
-                          <a:solidFill>
-                            <a:srgbClr val="202020"/>
-                          </a:solidFill>
-                          <a:latin typeface="Times New Roman"/>
-                        </a:rPr>
-                        <a:t>the small model trained on soft targets and correct labels; after training it uses a temperature of 1; now commonly called the student model</a:t>
+                        <a:rPr sz="1600" b="0">
+                          <a:solidFill>
+                            <a:srgbClr val="202020"/>
+                          </a:solidFill>
+                          <a:latin typeface="Times New Roman"/>
+                        </a:rPr>
+                        <a:t>the small model trained on soft targets and correct labels; after training it uses a temperature of 1; now commonly called the student model (Li et al., 2014)</a:t>
                       </a:r>
                     </a:p>
                   </a:txBody>
@@ -24729,7 +24393,7 @@
                     <a:p>
                       <a:pPr algn="ctr"/>
                       <a:r>
-                        <a:rPr sz="1500" b="1">
+                        <a:rPr sz="1600" b="1">
                           <a:solidFill>
                             <a:srgbClr val="202020"/>
                           </a:solidFill>
@@ -24752,7 +24416,7 @@
                     <a:p>
                       <a:pPr algn="ctr"/>
                       <a:r>
-                        <a:rPr sz="1500" b="1">
+                        <a:rPr sz="1600" b="1">
                           <a:solidFill>
                             <a:srgbClr val="202020"/>
                           </a:solidFill>
@@ -24775,7 +24439,7 @@
                     <a:p>
                       <a:pPr algn="just"/>
                       <a:r>
-                        <a:rPr sz="1500" b="0">
+                        <a:rPr sz="1600" b="0">
                           <a:solidFill>
                             <a:srgbClr val="202020"/>
                           </a:solidFill>
@@ -24800,7 +24464,7 @@
                     <a:p>
                       <a:pPr algn="ctr"/>
                       <a:r>
-                        <a:rPr sz="1500" b="1">
+                        <a:rPr sz="1600" b="1">
                           <a:solidFill>
                             <a:srgbClr val="202020"/>
                           </a:solidFill>
@@ -24823,7 +24487,7 @@
                     <a:p>
                       <a:pPr algn="ctr"/>
                       <a:r>
-                        <a:rPr sz="1500" b="1">
+                        <a:rPr sz="1600" b="1">
                           <a:solidFill>
                             <a:srgbClr val="202020"/>
                           </a:solidFill>
@@ -24846,7 +24510,7 @@
                     <a:p>
                       <a:pPr algn="just"/>
                       <a:r>
-                        <a:rPr sz="1500" b="0">
+                        <a:rPr sz="1600" b="0">
                           <a:solidFill>
                             <a:srgbClr val="202020"/>
                           </a:solidFill>
@@ -24871,7 +24535,7 @@
                     <a:p>
                       <a:pPr algn="ctr"/>
                       <a:r>
-                        <a:rPr sz="1500" b="1">
+                        <a:rPr sz="1600" b="1">
                           <a:solidFill>
                             <a:srgbClr val="202020"/>
                           </a:solidFill>
@@ -24894,7 +24558,7 @@
                     <a:p>
                       <a:pPr algn="ctr"/>
                       <a:r>
-                        <a:rPr sz="1500" b="1">
+                        <a:rPr sz="1600" b="1">
                           <a:solidFill>
                             <a:srgbClr val="202020"/>
                           </a:solidFill>
@@ -24917,7 +24581,7 @@
                     <a:p>
                       <a:pPr algn="just"/>
                       <a:r>
-                        <a:rPr sz="1500" b="0">
+                        <a:rPr sz="1600" b="0">
                           <a:solidFill>
                             <a:srgbClr val="202020"/>
                           </a:solidFill>
@@ -24942,7 +24606,7 @@
                     <a:p>
                       <a:pPr algn="ctr"/>
                       <a:r>
-                        <a:rPr sz="1500" b="1">
+                        <a:rPr sz="1600" b="1">
                           <a:solidFill>
                             <a:srgbClr val="202020"/>
                           </a:solidFill>
@@ -24965,7 +24629,7 @@
                     <a:p>
                       <a:pPr algn="ctr"/>
                       <a:r>
-                        <a:rPr sz="1500" b="1">
+                        <a:rPr sz="1600" b="1">
                           <a:solidFill>
                             <a:srgbClr val="202020"/>
                           </a:solidFill>
@@ -24988,7 +24652,7 @@
                     <a:p>
                       <a:pPr algn="just"/>
                       <a:r>
-                        <a:rPr sz="1500" b="0">
+                        <a:rPr sz="1600" b="0">
                           <a:solidFill>
                             <a:srgbClr val="202020"/>
                           </a:solidFill>
@@ -25013,7 +24677,7 @@
                     <a:p>
                       <a:pPr algn="ctr"/>
                       <a:r>
-                        <a:rPr sz="1500" b="1">
+                        <a:rPr sz="1600" b="1">
                           <a:solidFill>
                             <a:srgbClr val="202020"/>
                           </a:solidFill>
@@ -25036,7 +24700,7 @@
                     <a:p>
                       <a:pPr algn="ctr"/>
                       <a:r>
-                        <a:rPr sz="1500" b="1">
+                        <a:rPr sz="1600" b="1">
                           <a:solidFill>
                             <a:srgbClr val="202020"/>
                           </a:solidFill>
@@ -25059,7 +24723,7 @@
                     <a:p>
                       <a:pPr algn="just"/>
                       <a:r>
-                        <a:rPr sz="1500" b="0">
+                        <a:rPr sz="1600" b="0">
                           <a:solidFill>
                             <a:srgbClr val="202020"/>
                           </a:solidFill>
@@ -25088,8 +24752,8 @@
         </p:nvSpPr>
         <p:spPr>
           <a:xfrm>
-            <a:off x="548640" y="5989320"/>
-            <a:ext cx="11109960" cy="457200"/>
+            <a:off x="548640" y="5760720"/>
+            <a:ext cx="11109960" cy="822960"/>
           </a:xfrm>
           <a:prstGeom prst="rect">
             <a:avLst/>
@@ -25104,13 +24768,13 @@
           <a:p>
             <a:pPr algn="just"/>
             <a:r>
-              <a:rPr sz="1400" b="0" i="0">
+              <a:rPr sz="1600" b="0" i="0">
                 <a:solidFill>
                   <a:srgbClr val="59636E"/>
                 </a:solidFill>
                 <a:latin typeface="Times New Roman"/>
               </a:rPr>
-              <a:t>The rest of this module keeps the terms of the paper (cumbersome model, distilled model) for easy comparison with the original.</a:t>
+              <a:t>The earliest explicit definition of teacher and student models we found: J. Li, R. Zhao, J.-T. Huang, and Y. Gong, Learning Small-Size DNN with Output-Distribution-Based Criteria, Interspeech 2014: "we sometimes call the large-size DNN as the teacher DNN, and the small-size DNN as the student DNN." The rest of this module keeps the terms of the paper.</a:t>
             </a:r>
           </a:p>
         </p:txBody>
@@ -25406,7 +25070,7 @@
           <a:p>
             <a:pPr algn="just"/>
             <a:r>
-              <a:rPr sz="1400" b="0" i="0">
+              <a:rPr sz="1600" b="0" i="0">
                 <a:solidFill>
                   <a:srgbClr val="C7D6E5"/>
                 </a:solidFill>
@@ -25448,7 +25112,7 @@
                     <a:p>
                       <a:pPr algn="ctr"/>
                       <a:r>
-                        <a:rPr sz="1500" b="1">
+                        <a:rPr sz="1600" b="1">
                           <a:solidFill>
                             <a:srgbClr val="FFFFFF"/>
                           </a:solidFill>
@@ -25471,7 +25135,7 @@
                     <a:p>
                       <a:pPr algn="ctr"/>
                       <a:r>
-                        <a:rPr sz="1500" b="1">
+                        <a:rPr sz="1600" b="1">
                           <a:solidFill>
                             <a:srgbClr val="FFFFFF"/>
                           </a:solidFill>
@@ -25494,7 +25158,7 @@
                     <a:p>
                       <a:pPr algn="ctr"/>
                       <a:r>
-                        <a:rPr sz="1500" b="1">
+                        <a:rPr sz="1600" b="1">
                           <a:solidFill>
                             <a:srgbClr val="FFFFFF"/>
                           </a:solidFill>
@@ -25519,7 +25183,7 @@
                     <a:p>
                       <a:pPr algn="ctr"/>
                       <a:r>
-                        <a:rPr sz="1500" b="1">
+                        <a:rPr sz="1600" b="1">
                           <a:solidFill>
                             <a:srgbClr val="202020"/>
                           </a:solidFill>
@@ -25542,7 +25206,7 @@
                     <a:p>
                       <a:pPr algn="ctr"/>
                       <a:r>
-                        <a:rPr sz="1500" b="1">
+                        <a:rPr sz="1600" b="1">
                           <a:solidFill>
                             <a:srgbClr val="202020"/>
                           </a:solidFill>
@@ -25565,7 +25229,7 @@
                     <a:p>
                       <a:pPr algn="just"/>
                       <a:r>
-                        <a:rPr sz="1500" b="0">
+                        <a:rPr sz="1600" b="0">
                           <a:solidFill>
                             <a:srgbClr val="202020"/>
                           </a:solidFill>
@@ -25590,7 +25254,7 @@
                     <a:p>
                       <a:pPr algn="ctr"/>
                       <a:r>
-                        <a:rPr sz="1500" b="1">
+                        <a:rPr sz="1600" b="1">
                           <a:solidFill>
                             <a:srgbClr val="202020"/>
                           </a:solidFill>
@@ -25613,7 +25277,7 @@
                     <a:p>
                       <a:pPr algn="ctr"/>
                       <a:r>
-                        <a:rPr sz="1500" b="1">
+                        <a:rPr sz="1600" b="1">
                           <a:solidFill>
                             <a:srgbClr val="202020"/>
                           </a:solidFill>
@@ -25636,7 +25300,7 @@
                     <a:p>
                       <a:pPr algn="just"/>
                       <a:r>
-                        <a:rPr sz="1500" b="0">
+                        <a:rPr sz="1600" b="0">
                           <a:solidFill>
                             <a:srgbClr val="202020"/>
                           </a:solidFill>
@@ -25661,7 +25325,7 @@
                     <a:p>
                       <a:pPr algn="ctr"/>
                       <a:r>
-                        <a:rPr sz="1500" b="1">
+                        <a:rPr sz="1600" b="1">
                           <a:solidFill>
                             <a:srgbClr val="202020"/>
                           </a:solidFill>
@@ -25684,7 +25348,7 @@
                     <a:p>
                       <a:pPr algn="ctr"/>
                       <a:r>
-                        <a:rPr sz="1500" b="1">
+                        <a:rPr sz="1600" b="1">
                           <a:solidFill>
                             <a:srgbClr val="202020"/>
                           </a:solidFill>
@@ -25707,7 +25371,7 @@
                     <a:p>
                       <a:pPr algn="just"/>
                       <a:r>
-                        <a:rPr sz="1500" b="0">
+                        <a:rPr sz="1600" b="0">
                           <a:solidFill>
                             <a:srgbClr val="202020"/>
                           </a:solidFill>
@@ -25732,7 +25396,7 @@
                     <a:p>
                       <a:pPr algn="ctr"/>
                       <a:r>
-                        <a:rPr sz="1500" b="1">
+                        <a:rPr sz="1600" b="1">
                           <a:solidFill>
                             <a:srgbClr val="202020"/>
                           </a:solidFill>
@@ -25755,7 +25419,7 @@
                     <a:p>
                       <a:pPr algn="ctr"/>
                       <a:r>
-                        <a:rPr sz="1500" b="1">
+                        <a:rPr sz="1600" b="1">
                           <a:solidFill>
                             <a:srgbClr val="202020"/>
                           </a:solidFill>
@@ -25778,7 +25442,7 @@
                     <a:p>
                       <a:pPr algn="just"/>
                       <a:r>
-                        <a:rPr sz="1500" b="0">
+                        <a:rPr sz="1600" b="0">
                           <a:solidFill>
                             <a:srgbClr val="202020"/>
                           </a:solidFill>
@@ -25803,7 +25467,7 @@
                     <a:p>
                       <a:pPr algn="ctr"/>
                       <a:r>
-                        <a:rPr sz="1500" b="1">
+                        <a:rPr sz="1600" b="1">
                           <a:solidFill>
                             <a:srgbClr val="202020"/>
                           </a:solidFill>
@@ -25826,7 +25490,7 @@
                     <a:p>
                       <a:pPr algn="ctr"/>
                       <a:r>
-                        <a:rPr sz="1500" b="1">
+                        <a:rPr sz="1600" b="1">
                           <a:solidFill>
                             <a:srgbClr val="202020"/>
                           </a:solidFill>
@@ -25849,7 +25513,7 @@
                     <a:p>
                       <a:pPr algn="just"/>
                       <a:r>
-                        <a:rPr sz="1500" b="0">
+                        <a:rPr sz="1600" b="0">
                           <a:solidFill>
                             <a:srgbClr val="202020"/>
                           </a:solidFill>
@@ -25874,7 +25538,7 @@
                     <a:p>
                       <a:pPr algn="ctr"/>
                       <a:r>
-                        <a:rPr sz="1500" b="1">
+                        <a:rPr sz="1600" b="1">
                           <a:solidFill>
                             <a:srgbClr val="202020"/>
                           </a:solidFill>
@@ -25897,7 +25561,7 @@
                     <a:p>
                       <a:pPr algn="ctr"/>
                       <a:r>
-                        <a:rPr sz="1500" b="1">
+                        <a:rPr sz="1600" b="1">
                           <a:solidFill>
                             <a:srgbClr val="202020"/>
                           </a:solidFill>
@@ -25920,7 +25584,7 @@
                     <a:p>
                       <a:pPr algn="just"/>
                       <a:r>
-                        <a:rPr sz="1500" b="0">
+                        <a:rPr sz="1600" b="0">
                           <a:solidFill>
                             <a:srgbClr val="202020"/>
                           </a:solidFill>
@@ -25945,7 +25609,7 @@
                     <a:p>
                       <a:pPr algn="ctr"/>
                       <a:r>
-                        <a:rPr sz="1500" b="1">
+                        <a:rPr sz="1600" b="1">
                           <a:solidFill>
                             <a:srgbClr val="202020"/>
                           </a:solidFill>
@@ -25968,7 +25632,7 @@
                     <a:p>
                       <a:pPr algn="ctr"/>
                       <a:r>
-                        <a:rPr sz="1500" b="1">
+                        <a:rPr sz="1600" b="1">
                           <a:solidFill>
                             <a:srgbClr val="202020"/>
                           </a:solidFill>
@@ -25991,7 +25655,7 @@
                     <a:p>
                       <a:pPr algn="just"/>
                       <a:r>
-                        <a:rPr sz="1500" b="0">
+                        <a:rPr sz="1600" b="0">
                           <a:solidFill>
                             <a:srgbClr val="202020"/>
                           </a:solidFill>
@@ -26016,7 +25680,7 @@
                     <a:p>
                       <a:pPr algn="ctr"/>
                       <a:r>
-                        <a:rPr sz="1500" b="1">
+                        <a:rPr sz="1600" b="1">
                           <a:solidFill>
                             <a:srgbClr val="202020"/>
                           </a:solidFill>
@@ -26039,7 +25703,7 @@
                     <a:p>
                       <a:pPr algn="ctr"/>
                       <a:r>
-                        <a:rPr sz="1500" b="1">
+                        <a:rPr sz="1600" b="1">
                           <a:solidFill>
                             <a:srgbClr val="202020"/>
                           </a:solidFill>
@@ -26062,7 +25726,7 @@
                     <a:p>
                       <a:pPr algn="just"/>
                       <a:r>
-                        <a:rPr sz="1500" b="0">
+                        <a:rPr sz="1600" b="0">
                           <a:solidFill>
                             <a:srgbClr val="202020"/>
                           </a:solidFill>
@@ -26091,8 +25755,8 @@
         </p:nvSpPr>
         <p:spPr>
           <a:xfrm>
-            <a:off x="548640" y="5989320"/>
-            <a:ext cx="11109960" cy="457200"/>
+            <a:off x="548640" y="5760720"/>
+            <a:ext cx="11109960" cy="822960"/>
           </a:xfrm>
           <a:prstGeom prst="rect">
             <a:avLst/>
@@ -26107,7 +25771,7 @@
           <a:p>
             <a:pPr algn="just"/>
             <a:r>
-              <a:rPr sz="1400" b="0" i="0">
+              <a:rPr sz="1600" b="0" i="0">
                 <a:solidFill>
                   <a:srgbClr val="59636E"/>
                 </a:solidFill>
@@ -26409,7 +26073,7 @@
           <a:p>
             <a:pPr algn="just"/>
             <a:r>
-              <a:rPr sz="1400" b="0" i="0">
+              <a:rPr sz="1600" b="0" i="0">
                 <a:solidFill>
                   <a:srgbClr val="C7D6E5"/>
                 </a:solidFill>
@@ -26451,7 +26115,7 @@
                     <a:p>
                       <a:pPr algn="ctr"/>
                       <a:r>
-                        <a:rPr sz="1600" b="1">
+                        <a:rPr sz="1700" b="1">
                           <a:solidFill>
                             <a:srgbClr val="FFFFFF"/>
                           </a:solidFill>
@@ -26474,7 +26138,7 @@
                     <a:p>
                       <a:pPr algn="ctr"/>
                       <a:r>
-                        <a:rPr sz="1600" b="1">
+                        <a:rPr sz="1700" b="1">
                           <a:solidFill>
                             <a:srgbClr val="FFFFFF"/>
                           </a:solidFill>
@@ -26497,7 +26161,7 @@
                     <a:p>
                       <a:pPr algn="ctr"/>
                       <a:r>
-                        <a:rPr sz="1600" b="1">
+                        <a:rPr sz="1700" b="1">
                           <a:solidFill>
                             <a:srgbClr val="FFFFFF"/>
                           </a:solidFill>
@@ -26522,7 +26186,7 @@
                     <a:p>
                       <a:pPr algn="ctr"/>
                       <a:r>
-                        <a:rPr sz="1600" b="0">
+                        <a:rPr sz="1700" b="0">
                           <a:solidFill>
                             <a:srgbClr val="202020"/>
                           </a:solidFill>
@@ -26545,7 +26209,7 @@
                     <a:p>
                       <a:pPr algn="ctr"/>
                       <a:r>
-                        <a:rPr sz="1600" b="0">
+                        <a:rPr sz="1700" b="0">
                           <a:solidFill>
                             <a:srgbClr val="202020"/>
                           </a:solidFill>
@@ -26568,7 +26232,7 @@
                     <a:p>
                       <a:pPr algn="ctr"/>
                       <a:r>
-                        <a:rPr sz="1600" b="0">
+                        <a:rPr sz="1700" b="0">
                           <a:solidFill>
                             <a:srgbClr val="202020"/>
                           </a:solidFill>
@@ -26593,7 +26257,7 @@
                     <a:p>
                       <a:pPr algn="ctr"/>
                       <a:r>
-                        <a:rPr sz="1600" b="0">
+                        <a:rPr sz="1700" b="0">
                           <a:solidFill>
                             <a:srgbClr val="202020"/>
                           </a:solidFill>
@@ -26616,7 +26280,7 @@
                     <a:p>
                       <a:pPr algn="ctr"/>
                       <a:r>
-                        <a:rPr sz="1600" b="0">
+                        <a:rPr sz="1700" b="0">
                           <a:solidFill>
                             <a:srgbClr val="202020"/>
                           </a:solidFill>
@@ -26639,7 +26303,7 @@
                     <a:p>
                       <a:pPr algn="ctr"/>
                       <a:r>
-                        <a:rPr sz="1600" b="0">
+                        <a:rPr sz="1700" b="0">
                           <a:solidFill>
                             <a:srgbClr val="202020"/>
                           </a:solidFill>
@@ -26664,7 +26328,7 @@
                     <a:p>
                       <a:pPr algn="ctr"/>
                       <a:r>
-                        <a:rPr sz="1600" b="0">
+                        <a:rPr sz="1700" b="0">
                           <a:solidFill>
                             <a:srgbClr val="202020"/>
                           </a:solidFill>
@@ -26687,7 +26351,7 @@
                     <a:p>
                       <a:pPr algn="ctr"/>
                       <a:r>
-                        <a:rPr sz="1600" b="0">
+                        <a:rPr sz="1700" b="0">
                           <a:solidFill>
                             <a:srgbClr val="202020"/>
                           </a:solidFill>
@@ -26710,7 +26374,7 @@
                     <a:p>
                       <a:pPr algn="ctr"/>
                       <a:r>
-                        <a:rPr sz="1600" b="0">
+                        <a:rPr sz="1700" b="0">
                           <a:solidFill>
                             <a:srgbClr val="202020"/>
                           </a:solidFill>
@@ -26735,7 +26399,7 @@
                     <a:p>
                       <a:pPr algn="ctr"/>
                       <a:r>
-                        <a:rPr sz="1600" b="0">
+                        <a:rPr sz="1700" b="0">
                           <a:solidFill>
                             <a:srgbClr val="202020"/>
                           </a:solidFill>
@@ -26758,7 +26422,7 @@
                     <a:p>
                       <a:pPr algn="ctr"/>
                       <a:r>
-                        <a:rPr sz="1600" b="0">
+                        <a:rPr sz="1700" b="0">
                           <a:solidFill>
                             <a:srgbClr val="202020"/>
                           </a:solidFill>
@@ -26781,7 +26445,7 @@
                     <a:p>
                       <a:pPr algn="ctr"/>
                       <a:r>
-                        <a:rPr sz="1600" b="0">
+                        <a:rPr sz="1700" b="0">
                           <a:solidFill>
                             <a:srgbClr val="202020"/>
                           </a:solidFill>
@@ -26929,7 +26593,7 @@
           <a:p>
             <a:pPr algn="just"/>
             <a:r>
-              <a:rPr sz="1900" b="1" i="0">
+              <a:rPr sz="2100" b="1" i="0">
                 <a:solidFill>
                   <a:srgbClr val="1E7A45"/>
                 </a:solidFill>
@@ -27051,25 +26715,13 @@
           <a:p>
             <a:pPr algn="just"/>
             <a:r>
-              <a:rPr sz="1800" b="1">
+              <a:rPr sz="2000" b="1">
                 <a:solidFill>
                   <a:srgbClr val="1E7A45"/>
                 </a:solidFill>
                 <a:latin typeface="Times New Roman"/>
               </a:rPr>
-              <a:t>Distillation: a different kind of training that transfers</a:t>
-            </a:r>
-          </a:p>
-          <a:p>
-            <a:pPr algn="just"/>
-            <a:r>
-              <a:rPr sz="1800" b="1">
-                <a:solidFill>
-                  <a:srgbClr val="1E7A45"/>
-                </a:solidFill>
-                <a:latin typeface="Times New Roman"/>
-              </a:rPr>
-              <a:t>the knowledge from the cumbersome model to a small model</a:t>
+              <a:t>Distillation: a different kind of training that transfers the knowledge from the cumbersome model to a small model</a:t>
             </a:r>
           </a:p>
         </p:txBody>
@@ -27098,7 +26750,7 @@
           <a:p>
             <a:pPr algn="just"/>
             <a:r>
-              <a:rPr sz="1800" b="0" i="0">
+              <a:rPr sz="2000" b="0" i="0">
                 <a:solidFill>
                   <a:srgbClr val="202020"/>
                 </a:solidFill>
@@ -27110,7 +26762,7 @@
           <a:p>
             <a:pPr algn="just"/>
             <a:r>
-              <a:rPr sz="1800" b="0" i="0">
+              <a:rPr sz="2000" b="0" i="0">
                 <a:solidFill>
                   <a:srgbClr val="202020"/>
                 </a:solidFill>
@@ -27642,7 +27294,7 @@
           <a:p>
             <a:pPr algn="just"/>
             <a:r>
-              <a:rPr sz="1400" b="0" i="0">
+              <a:rPr sz="1600" b="0" i="0">
                 <a:solidFill>
                   <a:srgbClr val="C7D6E5"/>
                 </a:solidFill>
@@ -27677,7 +27329,7 @@
           <a:p>
             <a:pPr algn="just"/>
             <a:r>
-              <a:rPr sz="1700" b="0" i="0">
+              <a:rPr sz="1900" b="0" i="0">
                 <a:solidFill>
                   <a:srgbClr val="202020"/>
                 </a:solidFill>
@@ -27719,7 +27371,7 @@
                     <a:p>
                       <a:pPr algn="ctr"/>
                       <a:r>
-                        <a:rPr sz="1600" b="1">
+                        <a:rPr sz="1700" b="1">
                           <a:solidFill>
                             <a:srgbClr val="FFFFFF"/>
                           </a:solidFill>
@@ -27742,7 +27394,7 @@
                     <a:p>
                       <a:pPr algn="ctr"/>
                       <a:r>
-                        <a:rPr sz="1600" b="1">
+                        <a:rPr sz="1700" b="1">
                           <a:solidFill>
                             <a:srgbClr val="FFFFFF"/>
                           </a:solidFill>
@@ -27765,7 +27417,7 @@
                     <a:p>
                       <a:pPr algn="ctr"/>
                       <a:r>
-                        <a:rPr sz="1600" b="1">
+                        <a:rPr sz="1700" b="1">
                           <a:solidFill>
                             <a:srgbClr val="FFFFFF"/>
                           </a:solidFill>
@@ -27790,7 +27442,7 @@
                     <a:p>
                       <a:pPr algn="ctr"/>
                       <a:r>
-                        <a:rPr sz="1600" b="0">
+                        <a:rPr sz="1700" b="0">
                           <a:solidFill>
                             <a:srgbClr val="202020"/>
                           </a:solidFill>
@@ -27813,7 +27465,7 @@
                     <a:p>
                       <a:pPr algn="ctr"/>
                       <a:r>
-                        <a:rPr sz="1600" b="0">
+                        <a:rPr sz="1700" b="0">
                           <a:solidFill>
                             <a:srgbClr val="202020"/>
                           </a:solidFill>
@@ -27836,7 +27488,7 @@
                     <a:p>
                       <a:pPr algn="ctr"/>
                       <a:r>
-                        <a:rPr sz="1600" b="0">
+                        <a:rPr sz="1700" b="0">
                           <a:solidFill>
                             <a:srgbClr val="202020"/>
                           </a:solidFill>
@@ -27861,7 +27513,7 @@
                     <a:p>
                       <a:pPr algn="ctr"/>
                       <a:r>
-                        <a:rPr sz="1600" b="0">
+                        <a:rPr sz="1700" b="0">
                           <a:solidFill>
                             <a:srgbClr val="202020"/>
                           </a:solidFill>
@@ -27884,7 +27536,7 @@
                     <a:p>
                       <a:pPr algn="ctr"/>
                       <a:r>
-                        <a:rPr sz="1600" b="0">
+                        <a:rPr sz="1700" b="0">
                           <a:solidFill>
                             <a:srgbClr val="202020"/>
                           </a:solidFill>
@@ -27907,7 +27559,7 @@
                     <a:p>
                       <a:pPr algn="ctr"/>
                       <a:r>
-                        <a:rPr sz="1600" b="0">
+                        <a:rPr sz="1700" b="0">
                           <a:solidFill>
                             <a:srgbClr val="202020"/>
                           </a:solidFill>
@@ -27959,7 +27611,7 @@
                     <a:p>
                       <a:pPr algn="ctr"/>
                       <a:r>
-                        <a:rPr sz="1600" b="1">
+                        <a:rPr sz="1700" b="1">
                           <a:solidFill>
                             <a:srgbClr val="FFFFFF"/>
                           </a:solidFill>
@@ -27982,7 +27634,7 @@
                     <a:p>
                       <a:pPr algn="ctr"/>
                       <a:r>
-                        <a:rPr sz="1600" b="1">
+                        <a:rPr sz="1700" b="1">
                           <a:solidFill>
                             <a:srgbClr val="FFFFFF"/>
                           </a:solidFill>
@@ -28005,7 +27657,7 @@
                     <a:p>
                       <a:pPr algn="ctr"/>
                       <a:r>
-                        <a:rPr sz="1600" b="1">
+                        <a:rPr sz="1700" b="1">
                           <a:solidFill>
                             <a:srgbClr val="FFFFFF"/>
                           </a:solidFill>
@@ -28030,7 +27682,7 @@
                     <a:p>
                       <a:pPr algn="ctr"/>
                       <a:r>
-                        <a:rPr sz="1600" b="0">
+                        <a:rPr sz="1700" b="0">
                           <a:solidFill>
                             <a:srgbClr val="202020"/>
                           </a:solidFill>
@@ -28053,7 +27705,7 @@
                     <a:p>
                       <a:pPr algn="ctr"/>
                       <a:r>
-                        <a:rPr sz="1600" b="0">
+                        <a:rPr sz="1700" b="0">
                           <a:solidFill>
                             <a:srgbClr val="202020"/>
                           </a:solidFill>
@@ -28076,7 +27728,7 @@
                     <a:p>
                       <a:pPr algn="ctr"/>
                       <a:r>
-                        <a:rPr sz="1600" b="0">
+                        <a:rPr sz="1700" b="0">
                           <a:solidFill>
                             <a:srgbClr val="202020"/>
                           </a:solidFill>
@@ -28101,7 +27753,7 @@
                     <a:p>
                       <a:pPr algn="ctr"/>
                       <a:r>
-                        <a:rPr sz="1600" b="0">
+                        <a:rPr sz="1700" b="0">
                           <a:solidFill>
                             <a:srgbClr val="202020"/>
                           </a:solidFill>
@@ -28124,7 +27776,7 @@
                     <a:p>
                       <a:pPr algn="ctr"/>
                       <a:r>
-                        <a:rPr sz="1600" b="0">
+                        <a:rPr sz="1700" b="0">
                           <a:solidFill>
                             <a:srgbClr val="202020"/>
                           </a:solidFill>
@@ -28147,7 +27799,7 @@
                     <a:p>
                       <a:pPr algn="ctr"/>
                       <a:r>
-                        <a:rPr sz="1600" b="0">
+                        <a:rPr sz="1700" b="0">
                           <a:solidFill>
                             <a:srgbClr val="202020"/>
                           </a:solidFill>
@@ -28212,49 +27864,13 @@
           <a:p>
             <a:pPr algn="just"/>
             <a:r>
-              <a:rPr sz="1800" b="1">
+              <a:rPr sz="2000" b="1">
                 <a:solidFill>
                   <a:srgbClr val="1E7A45"/>
                 </a:solidFill>
                 <a:latin typeface="Times New Roman"/>
               </a:rPr>
-              <a:t>This defines a rich similarity</a:t>
-            </a:r>
-          </a:p>
-          <a:p>
-            <a:pPr algn="just"/>
-            <a:r>
-              <a:rPr sz="1800" b="1">
-                <a:solidFill>
-                  <a:srgbClr val="1E7A45"/>
-                </a:solidFill>
-                <a:latin typeface="Times New Roman"/>
-              </a:rPr>
-              <a:t>structure over the data: it says</a:t>
-            </a:r>
-          </a:p>
-          <a:p>
-            <a:pPr algn="just"/>
-            <a:r>
-              <a:rPr sz="1800" b="1">
-                <a:solidFill>
-                  <a:srgbClr val="1E7A45"/>
-                </a:solidFill>
-                <a:latin typeface="Times New Roman"/>
-              </a:rPr>
-              <a:t>which 2's look like 3's and</a:t>
-            </a:r>
-          </a:p>
-          <a:p>
-            <a:pPr algn="just"/>
-            <a:r>
-              <a:rPr sz="1800" b="1">
-                <a:solidFill>
-                  <a:srgbClr val="1E7A45"/>
-                </a:solidFill>
-                <a:latin typeface="Times New Roman"/>
-              </a:rPr>
-              <a:t>which look like 7's.</a:t>
+              <a:t>This defines a rich similarity structure over the data: it says which 2's look like 3's and which look like 7's.</a:t>
             </a:r>
           </a:p>
         </p:txBody>
@@ -28303,7 +27919,7 @@
           <a:p>
             <a:pPr algn="just"/>
             <a:r>
-              <a:rPr sz="1700" b="1">
+              <a:rPr sz="1900" b="1">
                 <a:solidFill>
                   <a:srgbClr val="C03030"/>
                 </a:solidFill>
@@ -28315,7 +27931,7 @@
           <a:p>
             <a:pPr algn="just"/>
             <a:r>
-              <a:rPr sz="1700" b="1">
+              <a:rPr sz="1900" b="1">
                 <a:solidFill>
                   <a:srgbClr val="C03030"/>
                 </a:solidFill>
@@ -28757,7 +28373,7 @@
           <a:p>
             <a:pPr algn="just"/>
             <a:r>
-              <a:rPr sz="1400" b="0" i="0">
+              <a:rPr sz="1600" b="0" i="0">
                 <a:solidFill>
                   <a:srgbClr val="C7D6E5"/>
                 </a:solidFill>
@@ -28792,7 +28408,7 @@
           <a:p>
             <a:pPr algn="just"/>
             <a:r>
-              <a:rPr sz="1800" b="0" i="0">
+              <a:rPr sz="2000" b="0" i="0">
                 <a:solidFill>
                   <a:srgbClr val="202020"/>
                 </a:solidFill>
@@ -28835,7 +28451,7 @@
                     <a:p>
                       <a:pPr algn="ctr"/>
                       <a:r>
-                        <a:rPr sz="1600" b="1">
+                        <a:rPr sz="1700" b="1">
                           <a:solidFill>
                             <a:srgbClr val="FFFFFF"/>
                           </a:solidFill>
@@ -28858,7 +28474,7 @@
                     <a:p>
                       <a:pPr algn="ctr"/>
                       <a:r>
-                        <a:rPr sz="1600" b="1">
+                        <a:rPr sz="1700" b="1">
                           <a:solidFill>
                             <a:srgbClr val="FFFFFF"/>
                           </a:solidFill>
@@ -28881,7 +28497,7 @@
                     <a:p>
                       <a:pPr algn="ctr"/>
                       <a:r>
-                        <a:rPr sz="1600" b="1">
+                        <a:rPr sz="1700" b="1">
                           <a:solidFill>
                             <a:srgbClr val="FFFFFF"/>
                           </a:solidFill>
@@ -28904,7 +28520,7 @@
                     <a:p>
                       <a:pPr algn="ctr"/>
                       <a:r>
-                        <a:rPr sz="1600" b="1">
+                        <a:rPr sz="1700" b="1">
                           <a:solidFill>
                             <a:srgbClr val="FFFFFF"/>
                           </a:solidFill>
@@ -28929,7 +28545,7 @@
                     <a:p>
                       <a:pPr algn="ctr"/>
                       <a:r>
-                        <a:rPr sz="1600" b="0">
+                        <a:rPr sz="1700" b="0">
                           <a:solidFill>
                             <a:srgbClr val="202020"/>
                           </a:solidFill>
@@ -28952,7 +28568,7 @@
                     <a:p>
                       <a:pPr algn="ctr"/>
                       <a:r>
-                        <a:rPr sz="1600" b="0">
+                        <a:rPr sz="1700" b="0">
                           <a:solidFill>
                             <a:srgbClr val="202020"/>
                           </a:solidFill>
@@ -28975,7 +28591,7 @@
                     <a:p>
                       <a:pPr algn="ctr"/>
                       <a:r>
-                        <a:rPr sz="1600" b="0">
+                        <a:rPr sz="1700" b="0">
                           <a:solidFill>
                             <a:srgbClr val="202020"/>
                           </a:solidFill>
@@ -28998,7 +28614,7 @@
                     <a:p>
                       <a:pPr algn="ctr"/>
                       <a:r>
-                        <a:rPr sz="1600" b="0">
+                        <a:rPr sz="1700" b="0">
                           <a:solidFill>
                             <a:srgbClr val="202020"/>
                           </a:solidFill>
@@ -29023,7 +28639,7 @@
                     <a:p>
                       <a:pPr algn="ctr"/>
                       <a:r>
-                        <a:rPr sz="1600" b="0">
+                        <a:rPr sz="1700" b="0">
                           <a:solidFill>
                             <a:srgbClr val="202020"/>
                           </a:solidFill>
@@ -29046,7 +28662,7 @@
                     <a:p>
                       <a:pPr algn="ctr"/>
                       <a:r>
-                        <a:rPr sz="1600" b="0">
+                        <a:rPr sz="1700" b="0">
                           <a:solidFill>
                             <a:srgbClr val="202020"/>
                           </a:solidFill>
@@ -29069,7 +28685,7 @@
                     <a:p>
                       <a:pPr algn="ctr"/>
                       <a:r>
-                        <a:rPr sz="1600" b="0">
+                        <a:rPr sz="1700" b="0">
                           <a:solidFill>
                             <a:srgbClr val="202020"/>
                           </a:solidFill>
@@ -29092,7 +28708,7 @@
                     <a:p>
                       <a:pPr algn="ctr"/>
                       <a:r>
-                        <a:rPr sz="1600" b="0">
+                        <a:rPr sz="1700" b="0">
                           <a:solidFill>
                             <a:srgbClr val="202020"/>
                           </a:solidFill>
@@ -29117,7 +28733,7 @@
                     <a:p>
                       <a:pPr algn="ctr"/>
                       <a:r>
-                        <a:rPr sz="1600" b="0">
+                        <a:rPr sz="1700" b="0">
                           <a:solidFill>
                             <a:srgbClr val="202020"/>
                           </a:solidFill>
@@ -29140,7 +28756,7 @@
                     <a:p>
                       <a:pPr algn="ctr"/>
                       <a:r>
-                        <a:rPr sz="1600" b="0">
+                        <a:rPr sz="1700" b="0">
                           <a:solidFill>
                             <a:srgbClr val="202020"/>
                           </a:solidFill>
@@ -29163,7 +28779,7 @@
                     <a:p>
                       <a:pPr algn="ctr"/>
                       <a:r>
-                        <a:rPr sz="1600" b="0">
+                        <a:rPr sz="1700" b="0">
                           <a:solidFill>
                             <a:srgbClr val="202020"/>
                           </a:solidFill>
@@ -29186,7 +28802,7 @@
                     <a:p>
                       <a:pPr algn="ctr"/>
                       <a:r>
-                        <a:rPr sz="1600" b="0">
+                        <a:rPr sz="1700" b="0">
                           <a:solidFill>
                             <a:srgbClr val="202020"/>
                           </a:solidFill>
@@ -29251,25 +28867,13 @@
           <a:p>
             <a:pPr algn="just"/>
             <a:r>
-              <a:rPr sz="1800" b="1">
+              <a:rPr sz="2000" b="1">
                 <a:solidFill>
                   <a:srgbClr val="1F4E79"/>
                 </a:solidFill>
                 <a:latin typeface="Times New Roman"/>
               </a:rPr>
-              <a:t>The cumbersome model is confident that</a:t>
-            </a:r>
-          </a:p>
-          <a:p>
-            <a:pPr algn="just"/>
-            <a:r>
-              <a:rPr sz="1800" b="1">
-                <a:solidFill>
-                  <a:srgbClr val="1F4E79"/>
-                </a:solidFill>
-                <a:latin typeface="Times New Roman"/>
-              </a:rPr>
-              <a:t>this is a 2 and rates a 3 above a 7</a:t>
+              <a:t>The cumbersome model is confident that this is a 2 and rates a 3 above a 7</a:t>
             </a:r>
           </a:p>
         </p:txBody>
@@ -29318,25 +28922,13 @@
           <a:p>
             <a:pPr algn="just"/>
             <a:r>
-              <a:rPr sz="1800" b="1">
+              <a:rPr sz="2000" b="1">
                 <a:solidFill>
                   <a:srgbClr val="59636E"/>
                 </a:solidFill>
                 <a:latin typeface="Times New Roman"/>
               </a:rPr>
-              <a:t>The distilled model, not yet trained,</a:t>
-            </a:r>
-          </a:p>
-          <a:p>
-            <a:pPr algn="just"/>
-            <a:r>
-              <a:rPr sz="1800" b="1">
-                <a:solidFill>
-                  <a:srgbClr val="59636E"/>
-                </a:solidFill>
-                <a:latin typeface="Times New Roman"/>
-              </a:rPr>
-              <a:t>identifies the 2 but rates 3 and 7 equally</a:t>
+              <a:t>The distilled model, not yet trained, identifies the 2 but rates 3 and 7 equally</a:t>
             </a:r>
           </a:p>
         </p:txBody>
@@ -29365,7 +28957,7 @@
           <a:p>
             <a:pPr algn="just"/>
             <a:r>
-              <a:rPr sz="1700" b="0" i="0">
+              <a:rPr sz="1900" b="0" i="0">
                 <a:solidFill>
                   <a:srgbClr val="59636E"/>
                 </a:solidFill>
@@ -29377,7 +28969,7 @@
           <a:p>
             <a:pPr algn="just"/>
             <a:r>
-              <a:rPr sz="1700" b="0" i="0">
+              <a:rPr sz="1900" b="0" i="0">
                 <a:solidFill>
                   <a:srgbClr val="59636E"/>
                 </a:solidFill>

--- a/topics/knowledge-distillation/Knowledge_Distillation_slides_EN.pptx
+++ b/topics/knowledge-distillation/Knowledge_Distillation_slides_EN.pptx
@@ -24562,7 +24562,7 @@
                           <a:solidFill>
                             <a:srgbClr val="202020"/>
                           </a:solidFill>
-                          <a:latin typeface="Microsoft JhengHei"/>
+                          <a:latin typeface="Times New Roman"/>
                         </a:rPr>
                         <a:t>dropout</a:t>
                       </a:r>
@@ -25210,7 +25210,7 @@
                           <a:solidFill>
                             <a:srgbClr val="202020"/>
                           </a:solidFill>
-                          <a:latin typeface="Microsoft JhengHei"/>
+                          <a:latin typeface="Times New Roman"/>
                         </a:rPr>
                         <a:t>logit</a:t>
                       </a:r>
@@ -25281,7 +25281,7 @@
                           <a:solidFill>
                             <a:srgbClr val="202020"/>
                           </a:solidFill>
-                          <a:latin typeface="Microsoft JhengHei"/>
+                          <a:latin typeface="Times New Roman"/>
                         </a:rPr>
                         <a:t>softmax</a:t>
                       </a:r>
